--- a/deck/Asian-Digital-Autocallable-Note.pptx
+++ b/deck/Asian-Digital-Autocallable-Note.pptx
@@ -487,7 +487,7 @@
               <c:strCache>
                 <c:ptCount val="1"/>
                 <c:pt idx="0">
-                  <c:v>Our note (6.5%)</c:v>
+                  <c:v>Our note (6.8%)</c:v>
                 </c:pt>
               </c:strCache>
             </c:strRef>
@@ -1141,247 +1141,247 @@
                   <c:v>100</c:v>
                 </c:pt>
                 <c:pt idx="60">
-                  <c:v>132.5</c:v>
+                  <c:v>134</c:v>
                 </c:pt>
                 <c:pt idx="61">
-                  <c:v>132.5</c:v>
+                  <c:v>134</c:v>
                 </c:pt>
                 <c:pt idx="62">
-                  <c:v>132.5</c:v>
+                  <c:v>134</c:v>
                 </c:pt>
                 <c:pt idx="63">
-                  <c:v>132.5</c:v>
+                  <c:v>134</c:v>
                 </c:pt>
                 <c:pt idx="64">
-                  <c:v>132.5</c:v>
+                  <c:v>134</c:v>
                 </c:pt>
                 <c:pt idx="65">
-                  <c:v>132.5</c:v>
+                  <c:v>134</c:v>
                 </c:pt>
                 <c:pt idx="66">
-                  <c:v>132.5</c:v>
+                  <c:v>134</c:v>
                 </c:pt>
                 <c:pt idx="67">
-                  <c:v>132.5</c:v>
+                  <c:v>134</c:v>
                 </c:pt>
                 <c:pt idx="68">
-                  <c:v>132.5</c:v>
+                  <c:v>134</c:v>
                 </c:pt>
                 <c:pt idx="69">
-                  <c:v>132.5</c:v>
+                  <c:v>134</c:v>
                 </c:pt>
                 <c:pt idx="70">
-                  <c:v>132.5</c:v>
+                  <c:v>134</c:v>
                 </c:pt>
                 <c:pt idx="71">
-                  <c:v>132.5</c:v>
+                  <c:v>134</c:v>
                 </c:pt>
                 <c:pt idx="72">
-                  <c:v>132.5</c:v>
+                  <c:v>134</c:v>
                 </c:pt>
                 <c:pt idx="73">
-                  <c:v>132.5</c:v>
+                  <c:v>134</c:v>
                 </c:pt>
                 <c:pt idx="74">
-                  <c:v>132.5</c:v>
+                  <c:v>134</c:v>
                 </c:pt>
                 <c:pt idx="75">
-                  <c:v>132.5</c:v>
+                  <c:v>134</c:v>
                 </c:pt>
                 <c:pt idx="76">
-                  <c:v>132.5</c:v>
+                  <c:v>134</c:v>
                 </c:pt>
                 <c:pt idx="77">
-                  <c:v>132.5</c:v>
+                  <c:v>134</c:v>
                 </c:pt>
                 <c:pt idx="78">
-                  <c:v>132.5</c:v>
+                  <c:v>134</c:v>
                 </c:pt>
                 <c:pt idx="79">
-                  <c:v>132.5</c:v>
+                  <c:v>134</c:v>
                 </c:pt>
                 <c:pt idx="80">
-                  <c:v>132.5</c:v>
+                  <c:v>134</c:v>
                 </c:pt>
                 <c:pt idx="81">
-                  <c:v>132.5</c:v>
+                  <c:v>134</c:v>
                 </c:pt>
                 <c:pt idx="82">
-                  <c:v>132.5</c:v>
+                  <c:v>134</c:v>
                 </c:pt>
                 <c:pt idx="83">
-                  <c:v>132.5</c:v>
+                  <c:v>134</c:v>
                 </c:pt>
                 <c:pt idx="84">
-                  <c:v>132.5</c:v>
+                  <c:v>134</c:v>
                 </c:pt>
                 <c:pt idx="85">
-                  <c:v>132.5</c:v>
+                  <c:v>134</c:v>
                 </c:pt>
                 <c:pt idx="86">
-                  <c:v>132.5</c:v>
+                  <c:v>134</c:v>
                 </c:pt>
                 <c:pt idx="87">
-                  <c:v>132.5</c:v>
+                  <c:v>134</c:v>
                 </c:pt>
                 <c:pt idx="88">
-                  <c:v>132.5</c:v>
+                  <c:v>134</c:v>
                 </c:pt>
                 <c:pt idx="89">
-                  <c:v>132.5</c:v>
+                  <c:v>134</c:v>
                 </c:pt>
                 <c:pt idx="90">
-                  <c:v>132.5</c:v>
+                  <c:v>134</c:v>
                 </c:pt>
                 <c:pt idx="91">
-                  <c:v>132.5</c:v>
+                  <c:v>134</c:v>
                 </c:pt>
                 <c:pt idx="92">
-                  <c:v>132.5</c:v>
+                  <c:v>134</c:v>
                 </c:pt>
                 <c:pt idx="93">
-                  <c:v>132.5</c:v>
+                  <c:v>134</c:v>
                 </c:pt>
                 <c:pt idx="94">
-                  <c:v>132.5</c:v>
+                  <c:v>134</c:v>
                 </c:pt>
                 <c:pt idx="95">
-                  <c:v>132.5</c:v>
+                  <c:v>134</c:v>
                 </c:pt>
                 <c:pt idx="96">
-                  <c:v>132.5</c:v>
+                  <c:v>134</c:v>
                 </c:pt>
                 <c:pt idx="97">
-                  <c:v>132.5</c:v>
+                  <c:v>134</c:v>
                 </c:pt>
                 <c:pt idx="98">
-                  <c:v>132.5</c:v>
+                  <c:v>134</c:v>
                 </c:pt>
                 <c:pt idx="99">
-                  <c:v>132.5</c:v>
+                  <c:v>134</c:v>
                 </c:pt>
                 <c:pt idx="100">
-                  <c:v>132.5</c:v>
+                  <c:v>134</c:v>
                 </c:pt>
                 <c:pt idx="101">
-                  <c:v>132.5</c:v>
+                  <c:v>134</c:v>
                 </c:pt>
                 <c:pt idx="102">
-                  <c:v>132.5</c:v>
+                  <c:v>134</c:v>
                 </c:pt>
                 <c:pt idx="103">
-                  <c:v>132.5</c:v>
+                  <c:v>134</c:v>
                 </c:pt>
                 <c:pt idx="104">
-                  <c:v>132.5</c:v>
+                  <c:v>134</c:v>
                 </c:pt>
                 <c:pt idx="105">
-                  <c:v>132.5</c:v>
+                  <c:v>134</c:v>
                 </c:pt>
                 <c:pt idx="106">
-                  <c:v>132.5</c:v>
+                  <c:v>134</c:v>
                 </c:pt>
                 <c:pt idx="107">
-                  <c:v>132.5</c:v>
+                  <c:v>134</c:v>
                 </c:pt>
                 <c:pt idx="108">
-                  <c:v>132.5</c:v>
+                  <c:v>134</c:v>
                 </c:pt>
                 <c:pt idx="109">
-                  <c:v>132.5</c:v>
+                  <c:v>134</c:v>
                 </c:pt>
                 <c:pt idx="110">
-                  <c:v>132.5</c:v>
+                  <c:v>134</c:v>
                 </c:pt>
                 <c:pt idx="111">
-                  <c:v>132.5</c:v>
+                  <c:v>134</c:v>
                 </c:pt>
                 <c:pt idx="112">
-                  <c:v>132.5</c:v>
+                  <c:v>134</c:v>
                 </c:pt>
                 <c:pt idx="113">
-                  <c:v>132.5</c:v>
+                  <c:v>134</c:v>
                 </c:pt>
                 <c:pt idx="114">
-                  <c:v>132.5</c:v>
+                  <c:v>134</c:v>
                 </c:pt>
                 <c:pt idx="115">
-                  <c:v>132.5</c:v>
+                  <c:v>134</c:v>
                 </c:pt>
                 <c:pt idx="116">
-                  <c:v>132.5</c:v>
+                  <c:v>134</c:v>
                 </c:pt>
                 <c:pt idx="117">
-                  <c:v>132.5</c:v>
+                  <c:v>134</c:v>
                 </c:pt>
                 <c:pt idx="118">
-                  <c:v>132.5</c:v>
+                  <c:v>134</c:v>
                 </c:pt>
                 <c:pt idx="119">
-                  <c:v>132.5</c:v>
+                  <c:v>134</c:v>
                 </c:pt>
                 <c:pt idx="120">
-                  <c:v>132.5</c:v>
+                  <c:v>134</c:v>
                 </c:pt>
                 <c:pt idx="121">
-                  <c:v>132.5</c:v>
+                  <c:v>134</c:v>
                 </c:pt>
                 <c:pt idx="122">
-                  <c:v>132.5</c:v>
+                  <c:v>134</c:v>
                 </c:pt>
                 <c:pt idx="123">
-                  <c:v>132.5</c:v>
+                  <c:v>134</c:v>
                 </c:pt>
                 <c:pt idx="124">
-                  <c:v>132.5</c:v>
+                  <c:v>134</c:v>
                 </c:pt>
                 <c:pt idx="125">
-                  <c:v>132.5</c:v>
+                  <c:v>134</c:v>
                 </c:pt>
                 <c:pt idx="126">
-                  <c:v>132.5</c:v>
+                  <c:v>134</c:v>
                 </c:pt>
                 <c:pt idx="127">
-                  <c:v>132.5</c:v>
+                  <c:v>134</c:v>
                 </c:pt>
                 <c:pt idx="128">
-                  <c:v>132.5</c:v>
+                  <c:v>134</c:v>
                 </c:pt>
                 <c:pt idx="129">
-                  <c:v>132.5</c:v>
+                  <c:v>134</c:v>
                 </c:pt>
                 <c:pt idx="130">
-                  <c:v>132.5</c:v>
+                  <c:v>134</c:v>
                 </c:pt>
                 <c:pt idx="131">
-                  <c:v>132.5</c:v>
+                  <c:v>134</c:v>
                 </c:pt>
                 <c:pt idx="132">
-                  <c:v>132.5</c:v>
+                  <c:v>134</c:v>
                 </c:pt>
                 <c:pt idx="133">
-                  <c:v>132.5</c:v>
+                  <c:v>134</c:v>
                 </c:pt>
                 <c:pt idx="134">
-                  <c:v>132.5</c:v>
+                  <c:v>134</c:v>
                 </c:pt>
                 <c:pt idx="135">
-                  <c:v>132.5</c:v>
+                  <c:v>134</c:v>
                 </c:pt>
                 <c:pt idx="136">
-                  <c:v>132.5</c:v>
+                  <c:v>134</c:v>
                 </c:pt>
                 <c:pt idx="137">
-                  <c:v>132.5</c:v>
+                  <c:v>134</c:v>
                 </c:pt>
                 <c:pt idx="138">
-                  <c:v>132.5</c:v>
+                  <c:v>134</c:v>
                 </c:pt>
                 <c:pt idx="139">
-                  <c:v>132.5</c:v>
+                  <c:v>134</c:v>
                 </c:pt>
                 <c:pt idx="140">
-                  <c:v>132.5</c:v>
+                  <c:v>134</c:v>
                 </c:pt>
               </c:numCache>
             </c:numRef>
@@ -2964,244 +2964,244 @@
                   <c:v>100</c:v>
                 </c:pt>
                 <c:pt idx="61">
-                  <c:v>101.02</c:v>
+                  <c:v>100.944</c:v>
                 </c:pt>
                 <c:pt idx="62">
-                  <c:v>102.04</c:v>
+                  <c:v>101.888</c:v>
                 </c:pt>
                 <c:pt idx="63">
-                  <c:v>103.06</c:v>
+                  <c:v>102.832</c:v>
                 </c:pt>
                 <c:pt idx="64">
-                  <c:v>104.08</c:v>
+                  <c:v>103.776</c:v>
                 </c:pt>
                 <c:pt idx="65">
-                  <c:v>105.1</c:v>
+                  <c:v>104.72</c:v>
                 </c:pt>
                 <c:pt idx="66">
-                  <c:v>106.12</c:v>
+                  <c:v>105.664</c:v>
                 </c:pt>
                 <c:pt idx="67">
-                  <c:v>107.14</c:v>
+                  <c:v>106.608</c:v>
                 </c:pt>
                 <c:pt idx="68">
-                  <c:v>108.16</c:v>
+                  <c:v>107.55199999999999</c:v>
                 </c:pt>
                 <c:pt idx="69">
-                  <c:v>109.18</c:v>
+                  <c:v>108.496</c:v>
                 </c:pt>
                 <c:pt idx="70">
-                  <c:v>110.2</c:v>
+                  <c:v>109.44</c:v>
                 </c:pt>
                 <c:pt idx="71">
-                  <c:v>111.22</c:v>
+                  <c:v>110.384</c:v>
                 </c:pt>
                 <c:pt idx="72">
-                  <c:v>112.24</c:v>
+                  <c:v>111.328</c:v>
                 </c:pt>
                 <c:pt idx="73">
-                  <c:v>113.26</c:v>
+                  <c:v>112.27199999999999</c:v>
                 </c:pt>
                 <c:pt idx="74">
-                  <c:v>114.28</c:v>
+                  <c:v>113.216</c:v>
                 </c:pt>
                 <c:pt idx="75">
-                  <c:v>115.3</c:v>
+                  <c:v>114.16</c:v>
                 </c:pt>
                 <c:pt idx="76">
-                  <c:v>116.32</c:v>
+                  <c:v>115.104</c:v>
                 </c:pt>
                 <c:pt idx="77">
-                  <c:v>117.34</c:v>
+                  <c:v>116.048</c:v>
                 </c:pt>
                 <c:pt idx="78">
-                  <c:v>118.36</c:v>
+                  <c:v>116.99199999999999</c:v>
                 </c:pt>
                 <c:pt idx="79">
-                  <c:v>119.38</c:v>
+                  <c:v>117.936</c:v>
                 </c:pt>
                 <c:pt idx="80">
-                  <c:v>120.4</c:v>
+                  <c:v>118.88</c:v>
                 </c:pt>
                 <c:pt idx="81">
-                  <c:v>121.42</c:v>
+                  <c:v>119.824</c:v>
                 </c:pt>
                 <c:pt idx="82">
-                  <c:v>122.44</c:v>
+                  <c:v>120.768</c:v>
                 </c:pt>
                 <c:pt idx="83">
-                  <c:v>123.46000000000001</c:v>
+                  <c:v>121.712</c:v>
                 </c:pt>
                 <c:pt idx="84">
-                  <c:v>124.48</c:v>
+                  <c:v>122.656</c:v>
                 </c:pt>
                 <c:pt idx="85">
-                  <c:v>125.5</c:v>
+                  <c:v>123.6</c:v>
                 </c:pt>
                 <c:pt idx="86">
-                  <c:v>126.52</c:v>
+                  <c:v>124.544</c:v>
                 </c:pt>
                 <c:pt idx="87">
-                  <c:v>127.53999999999999</c:v>
+                  <c:v>125.488</c:v>
                 </c:pt>
                 <c:pt idx="88">
-                  <c:v>128.56</c:v>
+                  <c:v>126.432</c:v>
                 </c:pt>
                 <c:pt idx="89">
-                  <c:v>129.58</c:v>
+                  <c:v>127.376</c:v>
                 </c:pt>
                 <c:pt idx="90">
-                  <c:v>130.6</c:v>
+                  <c:v>128.32</c:v>
                 </c:pt>
                 <c:pt idx="91">
-                  <c:v>131.62</c:v>
+                  <c:v>129.264</c:v>
                 </c:pt>
                 <c:pt idx="92">
-                  <c:v>132.64</c:v>
+                  <c:v>130.208</c:v>
                 </c:pt>
                 <c:pt idx="93">
-                  <c:v>133.66</c:v>
+                  <c:v>131.152</c:v>
                 </c:pt>
                 <c:pt idx="94">
-                  <c:v>134.68</c:v>
+                  <c:v>132.096</c:v>
                 </c:pt>
                 <c:pt idx="95">
-                  <c:v>135.7</c:v>
+                  <c:v>133.04</c:v>
                 </c:pt>
                 <c:pt idx="96">
-                  <c:v>136.72</c:v>
+                  <c:v>133.98399999999998</c:v>
                 </c:pt>
                 <c:pt idx="97">
-                  <c:v>137.74</c:v>
+                  <c:v>134.928</c:v>
                 </c:pt>
                 <c:pt idx="98">
-                  <c:v>138.76</c:v>
+                  <c:v>135.872</c:v>
                 </c:pt>
                 <c:pt idx="99">
-                  <c:v>139.78</c:v>
+                  <c:v>136.816</c:v>
                 </c:pt>
                 <c:pt idx="100">
-                  <c:v>140.8</c:v>
+                  <c:v>137.76</c:v>
                 </c:pt>
                 <c:pt idx="101">
-                  <c:v>141.82</c:v>
+                  <c:v>138.704</c:v>
                 </c:pt>
                 <c:pt idx="102">
-                  <c:v>142.84</c:v>
+                  <c:v>139.648</c:v>
                 </c:pt>
                 <c:pt idx="103">
-                  <c:v>143.86</c:v>
+                  <c:v>140.59199999999998</c:v>
                 </c:pt>
                 <c:pt idx="104">
-                  <c:v>144.88</c:v>
+                  <c:v>141.536</c:v>
                 </c:pt>
                 <c:pt idx="105">
-                  <c:v>145.9</c:v>
+                  <c:v>142.48</c:v>
                 </c:pt>
                 <c:pt idx="106">
-                  <c:v>146.92000000000002</c:v>
+                  <c:v>143.424</c:v>
                 </c:pt>
                 <c:pt idx="107">
-                  <c:v>147.94</c:v>
+                  <c:v>144.368</c:v>
                 </c:pt>
                 <c:pt idx="108">
-                  <c:v>148.96</c:v>
+                  <c:v>145.312</c:v>
                 </c:pt>
                 <c:pt idx="109">
-                  <c:v>149.98000000000002</c:v>
+                  <c:v>146.256</c:v>
                 </c:pt>
                 <c:pt idx="110">
-                  <c:v>151</c:v>
+                  <c:v>147.2</c:v>
                 </c:pt>
                 <c:pt idx="111">
-                  <c:v>152.02</c:v>
+                  <c:v>148.144</c:v>
                 </c:pt>
                 <c:pt idx="112">
-                  <c:v>153.04</c:v>
+                  <c:v>149.088</c:v>
                 </c:pt>
                 <c:pt idx="113">
-                  <c:v>154.06</c:v>
+                  <c:v>150.03199999999998</c:v>
                 </c:pt>
                 <c:pt idx="114">
-                  <c:v>155.07999999999998</c:v>
+                  <c:v>150.976</c:v>
                 </c:pt>
                 <c:pt idx="115">
-                  <c:v>156.1</c:v>
+                  <c:v>151.92</c:v>
                 </c:pt>
                 <c:pt idx="116">
-                  <c:v>157.12</c:v>
+                  <c:v>152.864</c:v>
                 </c:pt>
                 <c:pt idx="117">
-                  <c:v>158.14</c:v>
+                  <c:v>153.808</c:v>
                 </c:pt>
                 <c:pt idx="118">
-                  <c:v>159.16</c:v>
+                  <c:v>154.752</c:v>
                 </c:pt>
                 <c:pt idx="119">
-                  <c:v>160.18</c:v>
+                  <c:v>155.696</c:v>
                 </c:pt>
                 <c:pt idx="120">
-                  <c:v>161.2</c:v>
+                  <c:v>156.64</c:v>
                 </c:pt>
                 <c:pt idx="121">
-                  <c:v>162.22</c:v>
+                  <c:v>157.584</c:v>
                 </c:pt>
                 <c:pt idx="122">
-                  <c:v>163.24</c:v>
+                  <c:v>158.528</c:v>
                 </c:pt>
                 <c:pt idx="123">
-                  <c:v>164.26</c:v>
+                  <c:v>159.47199999999998</c:v>
                 </c:pt>
                 <c:pt idx="124">
-                  <c:v>165.28</c:v>
+                  <c:v>160.416</c:v>
                 </c:pt>
                 <c:pt idx="125">
-                  <c:v>166.3</c:v>
+                  <c:v>161.36</c:v>
                 </c:pt>
                 <c:pt idx="126">
-                  <c:v>167.32</c:v>
+                  <c:v>162.304</c:v>
                 </c:pt>
                 <c:pt idx="127">
-                  <c:v>168.34</c:v>
+                  <c:v>163.248</c:v>
                 </c:pt>
                 <c:pt idx="128">
-                  <c:v>169.36</c:v>
+                  <c:v>164.192</c:v>
                 </c:pt>
                 <c:pt idx="129">
-                  <c:v>170.38</c:v>
+                  <c:v>165.136</c:v>
                 </c:pt>
                 <c:pt idx="130">
-                  <c:v>171.4</c:v>
+                  <c:v>166.07999999999998</c:v>
                 </c:pt>
                 <c:pt idx="131">
-                  <c:v>172.42000000000002</c:v>
+                  <c:v>167.024</c:v>
                 </c:pt>
                 <c:pt idx="132">
-                  <c:v>173.44</c:v>
+                  <c:v>167.968</c:v>
                 </c:pt>
                 <c:pt idx="133">
-                  <c:v>174.46</c:v>
+                  <c:v>168.91199999999998</c:v>
                 </c:pt>
                 <c:pt idx="134">
-                  <c:v>175.48000000000002</c:v>
+                  <c:v>169.856</c:v>
                 </c:pt>
                 <c:pt idx="135">
-                  <c:v>176.5</c:v>
+                  <c:v>170.8</c:v>
                 </c:pt>
                 <c:pt idx="136">
-                  <c:v>177.51999999999998</c:v>
+                  <c:v>171.744</c:v>
                 </c:pt>
                 <c:pt idx="137">
-                  <c:v>178.54000000000002</c:v>
+                  <c:v>172.688</c:v>
                 </c:pt>
                 <c:pt idx="138">
-                  <c:v>179.56</c:v>
+                  <c:v>173.632</c:v>
                 </c:pt>
                 <c:pt idx="139">
-                  <c:v>180.57999999999998</c:v>
+                  <c:v>174.576</c:v>
                 </c:pt>
                 <c:pt idx="140">
-                  <c:v>181.6</c:v>
+                  <c:v>175.51999999999998</c:v>
                 </c:pt>
               </c:numCache>
             </c:numRef>
@@ -4484,16 +4484,16 @@
               <c:strCache>
                 <c:ptCount val="4"/>
                 <c:pt idx="0">
-                  <c:v>Hang Seng TECH</c:v>
+                  <c:v>Taiwan TAIEX</c:v>
                 </c:pt>
                 <c:pt idx="1">
+                  <c:v>KOSPI 200</c:v>
+                </c:pt>
+                <c:pt idx="2">
                   <c:v>Nikkei 225</c:v>
                 </c:pt>
-                <c:pt idx="2">
-                  <c:v>Taiwan TAIEX</c:v>
-                </c:pt>
                 <c:pt idx="3">
-                  <c:v>MSCI AC Asia Pacific Utilities</c:v>
+                  <c:v>PHLX Semiconductor</c:v>
                 </c:pt>
               </c:strCache>
             </c:strRef>
@@ -4504,16 +4504,16 @@
               <c:numCache>
                 <c:ptCount val="4"/>
                 <c:pt idx="0">
-                  <c:v>30</c:v>
+                  <c:v>35</c:v>
                 </c:pt>
                 <c:pt idx="1">
-                  <c:v>30</c:v>
+                  <c:v>25</c:v>
                 </c:pt>
                 <c:pt idx="2">
-                  <c:v>25</c:v>
+                  <c:v>20</c:v>
                 </c:pt>
                 <c:pt idx="3">
-                  <c:v>15</c:v>
+                  <c:v>20</c:v>
                 </c:pt>
               </c:numCache>
             </c:numRef>
@@ -4700,55 +4700,55 @@
                 <c:formatCode>General</c:formatCode>
                 <c:ptCount val="17"/>
                 <c:pt idx="0">
-                  <c:v>106.5</c:v>
+                  <c:v>106.8</c:v>
                 </c:pt>
                 <c:pt idx="1">
-                  <c:v>108.125</c:v>
+                  <c:v>108.5</c:v>
                 </c:pt>
                 <c:pt idx="2">
-                  <c:v>109.75</c:v>
+                  <c:v>110.2</c:v>
                 </c:pt>
                 <c:pt idx="3">
-                  <c:v>111.375</c:v>
+                  <c:v>111.9</c:v>
                 </c:pt>
                 <c:pt idx="4">
-                  <c:v>113</c:v>
+                  <c:v>113.6</c:v>
                 </c:pt>
                 <c:pt idx="5">
-                  <c:v>114.625</c:v>
+                  <c:v>115.3</c:v>
                 </c:pt>
                 <c:pt idx="6">
-                  <c:v>116.25</c:v>
+                  <c:v>117</c:v>
                 </c:pt>
                 <c:pt idx="7">
-                  <c:v>117.875</c:v>
+                  <c:v>118.7</c:v>
                 </c:pt>
                 <c:pt idx="8">
-                  <c:v>119.5</c:v>
+                  <c:v>120.4</c:v>
                 </c:pt>
                 <c:pt idx="9">
-                  <c:v>121.125</c:v>
+                  <c:v>122.1</c:v>
                 </c:pt>
                 <c:pt idx="10">
-                  <c:v>122.75</c:v>
+                  <c:v>123.8</c:v>
                 </c:pt>
                 <c:pt idx="11">
-                  <c:v>124.375</c:v>
+                  <c:v>125.5</c:v>
                 </c:pt>
                 <c:pt idx="12">
-                  <c:v>126</c:v>
+                  <c:v>127.2</c:v>
                 </c:pt>
                 <c:pt idx="13">
-                  <c:v>127.625</c:v>
+                  <c:v>128.9</c:v>
                 </c:pt>
                 <c:pt idx="14">
-                  <c:v>129.25</c:v>
+                  <c:v>130.6</c:v>
                 </c:pt>
                 <c:pt idx="15">
-                  <c:v>130.875</c:v>
+                  <c:v>132.3</c:v>
                 </c:pt>
                 <c:pt idx="16">
-                  <c:v>132.5</c:v>
+                  <c:v>134</c:v>
                 </c:pt>
               </c:numCache>
             </c:numRef>
@@ -6202,367 +6202,367 @@
                   <c:v>100</c:v>
                 </c:pt>
                 <c:pt idx="140">
-                  <c:v>132.5</c:v>
+                  <c:v>134</c:v>
                 </c:pt>
                 <c:pt idx="141">
-                  <c:v>132.5</c:v>
+                  <c:v>134</c:v>
                 </c:pt>
                 <c:pt idx="142">
-                  <c:v>132.5</c:v>
+                  <c:v>134</c:v>
                 </c:pt>
                 <c:pt idx="143">
-                  <c:v>132.5</c:v>
+                  <c:v>134</c:v>
                 </c:pt>
                 <c:pt idx="144">
-                  <c:v>132.5</c:v>
+                  <c:v>134</c:v>
                 </c:pt>
                 <c:pt idx="145">
-                  <c:v>132.5</c:v>
+                  <c:v>134</c:v>
                 </c:pt>
                 <c:pt idx="146">
-                  <c:v>132.5</c:v>
+                  <c:v>134</c:v>
                 </c:pt>
                 <c:pt idx="147">
-                  <c:v>132.5</c:v>
+                  <c:v>134</c:v>
                 </c:pt>
                 <c:pt idx="148">
-                  <c:v>132.5</c:v>
+                  <c:v>134</c:v>
                 </c:pt>
                 <c:pt idx="149">
-                  <c:v>132.5</c:v>
+                  <c:v>134</c:v>
                 </c:pt>
                 <c:pt idx="150">
-                  <c:v>132.5</c:v>
+                  <c:v>134</c:v>
                 </c:pt>
                 <c:pt idx="151">
-                  <c:v>132.5</c:v>
+                  <c:v>134</c:v>
                 </c:pt>
                 <c:pt idx="152">
-                  <c:v>132.5</c:v>
+                  <c:v>134</c:v>
                 </c:pt>
                 <c:pt idx="153">
-                  <c:v>132.5</c:v>
+                  <c:v>134</c:v>
                 </c:pt>
                 <c:pt idx="154">
-                  <c:v>132.5</c:v>
+                  <c:v>134</c:v>
                 </c:pt>
                 <c:pt idx="155">
-                  <c:v>132.5</c:v>
+                  <c:v>134</c:v>
                 </c:pt>
                 <c:pt idx="156">
-                  <c:v>132.5</c:v>
+                  <c:v>134</c:v>
                 </c:pt>
                 <c:pt idx="157">
-                  <c:v>132.5</c:v>
+                  <c:v>134</c:v>
                 </c:pt>
                 <c:pt idx="158">
-                  <c:v>132.5</c:v>
+                  <c:v>134</c:v>
                 </c:pt>
                 <c:pt idx="159">
-                  <c:v>132.5</c:v>
+                  <c:v>134</c:v>
                 </c:pt>
                 <c:pt idx="160">
-                  <c:v>132.5</c:v>
+                  <c:v>134</c:v>
                 </c:pt>
                 <c:pt idx="161">
-                  <c:v>132.5</c:v>
+                  <c:v>134</c:v>
                 </c:pt>
                 <c:pt idx="162">
-                  <c:v>132.5</c:v>
+                  <c:v>134</c:v>
                 </c:pt>
                 <c:pt idx="163">
-                  <c:v>132.5</c:v>
+                  <c:v>134</c:v>
                 </c:pt>
                 <c:pt idx="164">
-                  <c:v>132.5</c:v>
+                  <c:v>134</c:v>
                 </c:pt>
                 <c:pt idx="165">
-                  <c:v>132.5</c:v>
+                  <c:v>134</c:v>
                 </c:pt>
                 <c:pt idx="166">
-                  <c:v>132.5</c:v>
+                  <c:v>134</c:v>
                 </c:pt>
                 <c:pt idx="167">
-                  <c:v>132.5</c:v>
+                  <c:v>134</c:v>
                 </c:pt>
                 <c:pt idx="168">
-                  <c:v>132.5</c:v>
+                  <c:v>134</c:v>
                 </c:pt>
                 <c:pt idx="169">
-                  <c:v>132.5</c:v>
+                  <c:v>134</c:v>
                 </c:pt>
                 <c:pt idx="170">
-                  <c:v>132.5</c:v>
+                  <c:v>134</c:v>
                 </c:pt>
                 <c:pt idx="171">
-                  <c:v>132.5</c:v>
+                  <c:v>134</c:v>
                 </c:pt>
                 <c:pt idx="172">
-                  <c:v>132.5</c:v>
+                  <c:v>134</c:v>
                 </c:pt>
                 <c:pt idx="173">
-                  <c:v>132.5</c:v>
+                  <c:v>134</c:v>
                 </c:pt>
                 <c:pt idx="174">
-                  <c:v>132.5</c:v>
+                  <c:v>134</c:v>
                 </c:pt>
                 <c:pt idx="175">
-                  <c:v>132.5</c:v>
+                  <c:v>134</c:v>
                 </c:pt>
                 <c:pt idx="176">
-                  <c:v>132.5</c:v>
+                  <c:v>134</c:v>
                 </c:pt>
                 <c:pt idx="177">
-                  <c:v>132.5</c:v>
+                  <c:v>134</c:v>
                 </c:pt>
                 <c:pt idx="178">
-                  <c:v>132.5</c:v>
+                  <c:v>134</c:v>
                 </c:pt>
                 <c:pt idx="179">
-                  <c:v>132.5</c:v>
+                  <c:v>134</c:v>
                 </c:pt>
                 <c:pt idx="180">
-                  <c:v>132.5</c:v>
+                  <c:v>134</c:v>
                 </c:pt>
                 <c:pt idx="181">
-                  <c:v>132.5</c:v>
+                  <c:v>134</c:v>
                 </c:pt>
                 <c:pt idx="182">
-                  <c:v>132.5</c:v>
+                  <c:v>134</c:v>
                 </c:pt>
                 <c:pt idx="183">
-                  <c:v>132.5</c:v>
+                  <c:v>134</c:v>
                 </c:pt>
                 <c:pt idx="184">
-                  <c:v>132.5</c:v>
+                  <c:v>134</c:v>
                 </c:pt>
                 <c:pt idx="185">
-                  <c:v>132.5</c:v>
+                  <c:v>134</c:v>
                 </c:pt>
                 <c:pt idx="186">
-                  <c:v>132.5</c:v>
+                  <c:v>134</c:v>
                 </c:pt>
                 <c:pt idx="187">
-                  <c:v>132.5</c:v>
+                  <c:v>134</c:v>
                 </c:pt>
                 <c:pt idx="188">
-                  <c:v>132.5</c:v>
+                  <c:v>134</c:v>
                 </c:pt>
                 <c:pt idx="189">
-                  <c:v>132.5</c:v>
+                  <c:v>134</c:v>
                 </c:pt>
                 <c:pt idx="190">
-                  <c:v>132.5</c:v>
+                  <c:v>134</c:v>
                 </c:pt>
                 <c:pt idx="191">
-                  <c:v>132.5</c:v>
+                  <c:v>134</c:v>
                 </c:pt>
                 <c:pt idx="192">
-                  <c:v>132.5</c:v>
+                  <c:v>134</c:v>
                 </c:pt>
                 <c:pt idx="193">
-                  <c:v>132.5</c:v>
+                  <c:v>134</c:v>
                 </c:pt>
                 <c:pt idx="194">
-                  <c:v>132.5</c:v>
+                  <c:v>134</c:v>
                 </c:pt>
                 <c:pt idx="195">
-                  <c:v>132.5</c:v>
+                  <c:v>134</c:v>
                 </c:pt>
                 <c:pt idx="196">
-                  <c:v>132.5</c:v>
+                  <c:v>134</c:v>
                 </c:pt>
                 <c:pt idx="197">
-                  <c:v>132.5</c:v>
+                  <c:v>134</c:v>
                 </c:pt>
                 <c:pt idx="198">
-                  <c:v>132.5</c:v>
+                  <c:v>134</c:v>
                 </c:pt>
                 <c:pt idx="199">
-                  <c:v>132.5</c:v>
+                  <c:v>134</c:v>
                 </c:pt>
                 <c:pt idx="200">
-                  <c:v>132.5</c:v>
+                  <c:v>134</c:v>
                 </c:pt>
                 <c:pt idx="201">
-                  <c:v>132.5</c:v>
+                  <c:v>134</c:v>
                 </c:pt>
                 <c:pt idx="202">
-                  <c:v>132.5</c:v>
+                  <c:v>134</c:v>
                 </c:pt>
                 <c:pt idx="203">
-                  <c:v>132.5</c:v>
+                  <c:v>134</c:v>
                 </c:pt>
                 <c:pt idx="204">
-                  <c:v>132.5</c:v>
+                  <c:v>134</c:v>
                 </c:pt>
                 <c:pt idx="205">
-                  <c:v>132.5</c:v>
+                  <c:v>134</c:v>
                 </c:pt>
                 <c:pt idx="206">
-                  <c:v>132.5</c:v>
+                  <c:v>134</c:v>
                 </c:pt>
                 <c:pt idx="207">
-                  <c:v>132.5</c:v>
+                  <c:v>134</c:v>
                 </c:pt>
                 <c:pt idx="208">
-                  <c:v>132.5</c:v>
+                  <c:v>134</c:v>
                 </c:pt>
                 <c:pt idx="209">
-                  <c:v>132.5</c:v>
+                  <c:v>134</c:v>
                 </c:pt>
                 <c:pt idx="210">
-                  <c:v>132.5</c:v>
+                  <c:v>134</c:v>
                 </c:pt>
                 <c:pt idx="211">
-                  <c:v>132.5</c:v>
+                  <c:v>134</c:v>
                 </c:pt>
                 <c:pt idx="212">
-                  <c:v>132.5</c:v>
+                  <c:v>134</c:v>
                 </c:pt>
                 <c:pt idx="213">
-                  <c:v>132.5</c:v>
+                  <c:v>134</c:v>
                 </c:pt>
                 <c:pt idx="214">
-                  <c:v>132.5</c:v>
+                  <c:v>134</c:v>
                 </c:pt>
                 <c:pt idx="215">
-                  <c:v>132.5</c:v>
+                  <c:v>134</c:v>
                 </c:pt>
                 <c:pt idx="216">
-                  <c:v>132.5</c:v>
+                  <c:v>134</c:v>
                 </c:pt>
                 <c:pt idx="217">
-                  <c:v>132.5</c:v>
+                  <c:v>134</c:v>
                 </c:pt>
                 <c:pt idx="218">
-                  <c:v>132.5</c:v>
+                  <c:v>134</c:v>
                 </c:pt>
                 <c:pt idx="219">
-                  <c:v>132.5</c:v>
+                  <c:v>134</c:v>
                 </c:pt>
                 <c:pt idx="220">
-                  <c:v>132.5</c:v>
+                  <c:v>134</c:v>
                 </c:pt>
                 <c:pt idx="221">
-                  <c:v>132.5</c:v>
+                  <c:v>134</c:v>
                 </c:pt>
                 <c:pt idx="222">
-                  <c:v>132.5</c:v>
+                  <c:v>134</c:v>
                 </c:pt>
                 <c:pt idx="223">
-                  <c:v>132.5</c:v>
+                  <c:v>134</c:v>
                 </c:pt>
                 <c:pt idx="224">
-                  <c:v>132.5</c:v>
+                  <c:v>134</c:v>
                 </c:pt>
                 <c:pt idx="225">
-                  <c:v>132.5</c:v>
+                  <c:v>134</c:v>
                 </c:pt>
                 <c:pt idx="226">
-                  <c:v>132.5</c:v>
+                  <c:v>134</c:v>
                 </c:pt>
                 <c:pt idx="227">
-                  <c:v>132.5</c:v>
+                  <c:v>134</c:v>
                 </c:pt>
                 <c:pt idx="228">
-                  <c:v>132.5</c:v>
+                  <c:v>134</c:v>
                 </c:pt>
                 <c:pt idx="229">
-                  <c:v>132.5</c:v>
+                  <c:v>134</c:v>
                 </c:pt>
                 <c:pt idx="230">
-                  <c:v>132.5</c:v>
+                  <c:v>134</c:v>
                 </c:pt>
                 <c:pt idx="231">
-                  <c:v>132.5</c:v>
+                  <c:v>134</c:v>
                 </c:pt>
                 <c:pt idx="232">
-                  <c:v>132.5</c:v>
+                  <c:v>134</c:v>
                 </c:pt>
                 <c:pt idx="233">
-                  <c:v>132.5</c:v>
+                  <c:v>134</c:v>
                 </c:pt>
                 <c:pt idx="234">
-                  <c:v>132.5</c:v>
+                  <c:v>134</c:v>
                 </c:pt>
                 <c:pt idx="235">
-                  <c:v>132.5</c:v>
+                  <c:v>134</c:v>
                 </c:pt>
                 <c:pt idx="236">
-                  <c:v>132.5</c:v>
+                  <c:v>134</c:v>
                 </c:pt>
                 <c:pt idx="237">
-                  <c:v>132.5</c:v>
+                  <c:v>134</c:v>
                 </c:pt>
                 <c:pt idx="238">
-                  <c:v>132.5</c:v>
+                  <c:v>134</c:v>
                 </c:pt>
                 <c:pt idx="239">
-                  <c:v>132.5</c:v>
+                  <c:v>134</c:v>
                 </c:pt>
                 <c:pt idx="240">
-                  <c:v>132.5</c:v>
+                  <c:v>134</c:v>
                 </c:pt>
                 <c:pt idx="241">
-                  <c:v>132.5</c:v>
+                  <c:v>134</c:v>
                 </c:pt>
                 <c:pt idx="242">
-                  <c:v>132.5</c:v>
+                  <c:v>134</c:v>
                 </c:pt>
                 <c:pt idx="243">
-                  <c:v>132.5</c:v>
+                  <c:v>134</c:v>
                 </c:pt>
                 <c:pt idx="244">
-                  <c:v>132.5</c:v>
+                  <c:v>134</c:v>
                 </c:pt>
                 <c:pt idx="245">
-                  <c:v>132.5</c:v>
+                  <c:v>134</c:v>
                 </c:pt>
                 <c:pt idx="246">
-                  <c:v>132.5</c:v>
+                  <c:v>134</c:v>
                 </c:pt>
                 <c:pt idx="247">
-                  <c:v>132.5</c:v>
+                  <c:v>134</c:v>
                 </c:pt>
                 <c:pt idx="248">
-                  <c:v>132.5</c:v>
+                  <c:v>134</c:v>
                 </c:pt>
                 <c:pt idx="249">
-                  <c:v>132.5</c:v>
+                  <c:v>134</c:v>
                 </c:pt>
                 <c:pt idx="250">
-                  <c:v>132.5</c:v>
+                  <c:v>134</c:v>
                 </c:pt>
                 <c:pt idx="251">
-                  <c:v>132.5</c:v>
+                  <c:v>134</c:v>
                 </c:pt>
                 <c:pt idx="252">
-                  <c:v>132.5</c:v>
+                  <c:v>134</c:v>
                 </c:pt>
                 <c:pt idx="253">
-                  <c:v>132.5</c:v>
+                  <c:v>134</c:v>
                 </c:pt>
                 <c:pt idx="254">
-                  <c:v>132.5</c:v>
+                  <c:v>134</c:v>
                 </c:pt>
                 <c:pt idx="255">
-                  <c:v>132.5</c:v>
+                  <c:v>134</c:v>
                 </c:pt>
                 <c:pt idx="256">
-                  <c:v>132.5</c:v>
+                  <c:v>134</c:v>
                 </c:pt>
                 <c:pt idx="257">
-                  <c:v>132.5</c:v>
+                  <c:v>134</c:v>
                 </c:pt>
                 <c:pt idx="258">
-                  <c:v>132.5</c:v>
+                  <c:v>134</c:v>
                 </c:pt>
                 <c:pt idx="259">
-                  <c:v>132.5</c:v>
+                  <c:v>134</c:v>
                 </c:pt>
                 <c:pt idx="260">
-                  <c:v>132.5</c:v>
+                  <c:v>134</c:v>
                 </c:pt>
               </c:numCache>
             </c:numRef>
@@ -10005,187 +10005,187 @@
                   <c:v>0</c:v>
                 </c:pt>
                 <c:pt idx="60">
-                  <c:v>1.625</c:v>
+                  <c:v>1.7000000000000002</c:v>
                 </c:pt>
                 <c:pt idx="61">
-                  <c:v>1.625</c:v>
+                  <c:v>1.7000000000000002</c:v>
                 </c:pt>
                 <c:pt idx="62">
-                  <c:v>1.625</c:v>
+                  <c:v>1.7000000000000002</c:v>
                 </c:pt>
                 <c:pt idx="63">
-                  <c:v>1.625</c:v>
+                  <c:v>1.7000000000000002</c:v>
                 </c:pt>
                 <c:pt idx="64">
-                  <c:v>1.625</c:v>
+                  <c:v>1.7000000000000002</c:v>
                 </c:pt>
                 <c:pt idx="65">
-                  <c:v>1.625</c:v>
+                  <c:v>1.7000000000000002</c:v>
                 </c:pt>
                 <c:pt idx="66">
-                  <c:v>1.625</c:v>
+                  <c:v>1.7000000000000002</c:v>
                 </c:pt>
                 <c:pt idx="67">
-                  <c:v>1.625</c:v>
+                  <c:v>1.7000000000000002</c:v>
                 </c:pt>
                 <c:pt idx="68">
-                  <c:v>1.625</c:v>
+                  <c:v>1.7000000000000002</c:v>
                 </c:pt>
                 <c:pt idx="69">
-                  <c:v>1.625</c:v>
+                  <c:v>1.7000000000000002</c:v>
                 </c:pt>
                 <c:pt idx="70">
-                  <c:v>1.625</c:v>
+                  <c:v>1.7000000000000002</c:v>
                 </c:pt>
                 <c:pt idx="71">
-                  <c:v>1.625</c:v>
+                  <c:v>1.7000000000000002</c:v>
                 </c:pt>
                 <c:pt idx="72">
-                  <c:v>1.625</c:v>
+                  <c:v>1.7000000000000002</c:v>
                 </c:pt>
                 <c:pt idx="73">
-                  <c:v>1.625</c:v>
+                  <c:v>1.7000000000000002</c:v>
                 </c:pt>
                 <c:pt idx="74">
-                  <c:v>1.625</c:v>
+                  <c:v>1.7000000000000002</c:v>
                 </c:pt>
                 <c:pt idx="75">
-                  <c:v>1.625</c:v>
+                  <c:v>1.7000000000000002</c:v>
                 </c:pt>
                 <c:pt idx="76">
-                  <c:v>1.625</c:v>
+                  <c:v>1.7000000000000002</c:v>
                 </c:pt>
                 <c:pt idx="77">
-                  <c:v>1.625</c:v>
+                  <c:v>1.7000000000000002</c:v>
                 </c:pt>
                 <c:pt idx="78">
-                  <c:v>1.625</c:v>
+                  <c:v>1.7000000000000002</c:v>
                 </c:pt>
                 <c:pt idx="79">
-                  <c:v>1.625</c:v>
+                  <c:v>1.7000000000000002</c:v>
                 </c:pt>
                 <c:pt idx="80">
-                  <c:v>1.625</c:v>
+                  <c:v>1.7000000000000002</c:v>
                 </c:pt>
                 <c:pt idx="81">
-                  <c:v>1.625</c:v>
+                  <c:v>1.7000000000000002</c:v>
                 </c:pt>
                 <c:pt idx="82">
-                  <c:v>1.625</c:v>
+                  <c:v>1.7000000000000002</c:v>
                 </c:pt>
                 <c:pt idx="83">
-                  <c:v>1.625</c:v>
+                  <c:v>1.7000000000000002</c:v>
                 </c:pt>
                 <c:pt idx="84">
-                  <c:v>1.625</c:v>
+                  <c:v>1.7000000000000002</c:v>
                 </c:pt>
                 <c:pt idx="85">
-                  <c:v>1.625</c:v>
+                  <c:v>1.7000000000000002</c:v>
                 </c:pt>
                 <c:pt idx="86">
-                  <c:v>1.625</c:v>
+                  <c:v>1.7000000000000002</c:v>
                 </c:pt>
                 <c:pt idx="87">
-                  <c:v>1.625</c:v>
+                  <c:v>1.7000000000000002</c:v>
                 </c:pt>
                 <c:pt idx="88">
-                  <c:v>1.625</c:v>
+                  <c:v>1.7000000000000002</c:v>
                 </c:pt>
                 <c:pt idx="89">
-                  <c:v>1.625</c:v>
+                  <c:v>1.7000000000000002</c:v>
                 </c:pt>
                 <c:pt idx="90">
-                  <c:v>1.625</c:v>
+                  <c:v>1.7000000000000002</c:v>
                 </c:pt>
                 <c:pt idx="91">
-                  <c:v>1.625</c:v>
+                  <c:v>1.7000000000000002</c:v>
                 </c:pt>
                 <c:pt idx="92">
-                  <c:v>1.625</c:v>
+                  <c:v>1.7000000000000002</c:v>
                 </c:pt>
                 <c:pt idx="93">
-                  <c:v>1.625</c:v>
+                  <c:v>1.7000000000000002</c:v>
                 </c:pt>
                 <c:pt idx="94">
-                  <c:v>1.625</c:v>
+                  <c:v>1.7000000000000002</c:v>
                 </c:pt>
                 <c:pt idx="95">
-                  <c:v>1.625</c:v>
+                  <c:v>1.7000000000000002</c:v>
                 </c:pt>
                 <c:pt idx="96">
-                  <c:v>1.625</c:v>
+                  <c:v>1.7000000000000002</c:v>
                 </c:pt>
                 <c:pt idx="97">
-                  <c:v>1.625</c:v>
+                  <c:v>1.7000000000000002</c:v>
                 </c:pt>
                 <c:pt idx="98">
-                  <c:v>1.625</c:v>
+                  <c:v>1.7000000000000002</c:v>
                 </c:pt>
                 <c:pt idx="99">
-                  <c:v>1.625</c:v>
+                  <c:v>1.7000000000000002</c:v>
                 </c:pt>
                 <c:pt idx="100">
-                  <c:v>1.625</c:v>
+                  <c:v>1.7000000000000002</c:v>
                 </c:pt>
                 <c:pt idx="101">
-                  <c:v>1.625</c:v>
+                  <c:v>1.7000000000000002</c:v>
                 </c:pt>
                 <c:pt idx="102">
-                  <c:v>1.625</c:v>
+                  <c:v>1.7000000000000002</c:v>
                 </c:pt>
                 <c:pt idx="103">
-                  <c:v>1.625</c:v>
+                  <c:v>1.7000000000000002</c:v>
                 </c:pt>
                 <c:pt idx="104">
-                  <c:v>1.625</c:v>
+                  <c:v>1.7000000000000002</c:v>
                 </c:pt>
                 <c:pt idx="105">
-                  <c:v>1.625</c:v>
+                  <c:v>1.7000000000000002</c:v>
                 </c:pt>
                 <c:pt idx="106">
-                  <c:v>1.625</c:v>
+                  <c:v>1.7000000000000002</c:v>
                 </c:pt>
                 <c:pt idx="107">
-                  <c:v>1.625</c:v>
+                  <c:v>1.7000000000000002</c:v>
                 </c:pt>
                 <c:pt idx="108">
-                  <c:v>1.625</c:v>
+                  <c:v>1.7000000000000002</c:v>
                 </c:pt>
                 <c:pt idx="109">
-                  <c:v>1.625</c:v>
+                  <c:v>1.7000000000000002</c:v>
                 </c:pt>
                 <c:pt idx="110">
-                  <c:v>1.625</c:v>
+                  <c:v>1.7000000000000002</c:v>
                 </c:pt>
                 <c:pt idx="111">
-                  <c:v>1.625</c:v>
+                  <c:v>1.7000000000000002</c:v>
                 </c:pt>
                 <c:pt idx="112">
-                  <c:v>1.625</c:v>
+                  <c:v>1.7000000000000002</c:v>
                 </c:pt>
                 <c:pt idx="113">
-                  <c:v>1.625</c:v>
+                  <c:v>1.7000000000000002</c:v>
                 </c:pt>
                 <c:pt idx="114">
-                  <c:v>1.625</c:v>
+                  <c:v>1.7000000000000002</c:v>
                 </c:pt>
                 <c:pt idx="115">
-                  <c:v>1.625</c:v>
+                  <c:v>1.7000000000000002</c:v>
                 </c:pt>
                 <c:pt idx="116">
-                  <c:v>1.625</c:v>
+                  <c:v>1.7000000000000002</c:v>
                 </c:pt>
                 <c:pt idx="117">
-                  <c:v>1.625</c:v>
+                  <c:v>1.7000000000000002</c:v>
                 </c:pt>
                 <c:pt idx="118">
-                  <c:v>1.625</c:v>
+                  <c:v>1.7000000000000002</c:v>
                 </c:pt>
                 <c:pt idx="119">
-                  <c:v>1.625</c:v>
+                  <c:v>1.7000000000000002</c:v>
                 </c:pt>
                 <c:pt idx="120">
-                  <c:v>1.625</c:v>
+                  <c:v>1.7000000000000002</c:v>
                 </c:pt>
               </c:numCache>
             </c:numRef>
@@ -12722,19 +12722,19 @@
                 <c:formatCode>General</c:formatCode>
                 <c:ptCount val="5"/>
                 <c:pt idx="0">
-                  <c:v>51.4</c:v>
+                  <c:v>50.7</c:v>
                 </c:pt>
                 <c:pt idx="1">
-                  <c:v>69.6</c:v>
+                  <c:v>68.9</c:v>
                 </c:pt>
                 <c:pt idx="2">
-                  <c:v>76.3</c:v>
+                  <c:v>75.6</c:v>
                 </c:pt>
                 <c:pt idx="3">
-                  <c:v>80.2</c:v>
+                  <c:v>79.4</c:v>
                 </c:pt>
                 <c:pt idx="4">
-                  <c:v>82.8</c:v>
+                  <c:v>82</c:v>
                 </c:pt>
               </c:numCache>
             </c:numRef>
@@ -13544,7 +13544,7 @@
           <a:p>
             <a:r>
               <a:rPr lang="en-US" dirty="0"/>
-              <a:t>The table answers 'what if markets go nowhere?'. Even at 0% equity return the note is called in ~68% of paths, because volatility alone takes the basket back to 100% on some date. The honest cost of protection: in ~11% of paths (risk-neutral) the family earns nothing for 5 years, but it never loses capital.</a:t>
+              <a:t>The table answers 'what if markets go nowhere?'. Even at 0% equity return the note is called in ~69% of paths, because volatility alone takes the basket back to 100% on some date. The honest cost of protection: in ~11% of paths (risk-neutral) the family earns nothing for 5 years, but it never loses capital.</a:t>
             </a:r>
             <a:endParaRPr lang="en-US" dirty="0"/>
           </a:p>
@@ -13632,7 +13632,7 @@
           <a:p>
             <a:r>
               <a:rPr lang="en-US" dirty="0"/>
-              <a:t>Investor risks on the left, desk hedges on the right. There is no capital-loss line: the main honest risks are earning nothing for 5 years, capped upside, and Natixis credit. The 6.5% coupon sits below the 6.9% fair level in every sensitivity we ran, so the offer is robust to market moves before the trade date.</a:t>
+              <a:t>Investor risks on the left, desk hedges on the right. There is no capital-loss line: the main honest risks are earning nothing for 5 years, capped upside, and Natixis credit. The 6.8% coupon sits below the 7.1% fair level in every sensitivity we ran, so the offer is robust to market moves before the trade date.</a:t>
             </a:r>
             <a:endParaRPr lang="en-US" dirty="0"/>
           </a:p>
@@ -14160,7 +14160,7 @@
           <a:p>
             <a:r>
               <a:rPr lang="en-US" dirty="0"/>
-              <a:t>Two arguments. (1) Structural: Asia supplies AI hardware, Japan's reforms re-rate equities, China tech trades at a discount, and power demand grows. (2) Structuring: high USD rates make the protected principal cheap, and Asian volatility makes the 100% coupon trigger likely to be hit, so we can protect capital and still pay above the funding rate.</a:t>
+              <a:t>Two arguments. (1) Structural: AI spending flows straight into Asian semiconductors: Taiwan makes the chips, Korea the memory, Japan the chip-making tools, with global chip leaders on the other side of the supply chain. (2) Structuring: high USD rates make the protected principal cheap, and Asian volatility makes the 100% coupon trigger likely to be hit, so we can protect capital and still pay above the funding rate.</a:t>
             </a:r>
             <a:endParaRPr lang="en-US" dirty="0"/>
           </a:p>
@@ -14248,7 +14248,7 @@
           <a:p>
             <a:r>
               <a:rPr lang="en-US" dirty="0"/>
-              <a:t>Each index is a real Bloomberg ticker (verify MXAP0UT Index for MSCI AC Asia Pacific Utilities). Weights: 60% to the two tech engines the family knows best, 25% to the AI supply chain, and 15% to utilities as a low-vol anchor linked to their renewable assets. Quanto USD: the client takes no JPY/HKD/TWD risk.</a:t>
+              <a:t>Each index is a real Bloomberg ticker (TWSE, KOSPI2, NKY, SOX Index). Semiconductors dominate TAIEX and KOSPI 200 through TSMC, Samsung and SK Hynix, Nikkei 225 carries Tokyo Electron and Advantest, and SOX is a pure chip index. Check look-through weights on Bloomberg before the pitch. Note the overlap: TSMC appears in both TAIEX and SOX, which raises correlation. Quanto USD: the client takes no JPY/TWD/KRW risk; SOX is already in USD.</a:t>
             </a:r>
             <a:endParaRPr lang="en-US" dirty="0"/>
           </a:p>
@@ -14336,7 +14336,7 @@
           <a:p>
             <a:r>
               <a:rPr lang="en-US" dirty="0"/>
-              <a:t>The table is the key design argument. Every design that puts capital at risk only pays 6–10% for an 8–10% chance of a loss; pushing the loss probability down with a calmer basket kills the coupon. Protecting capital fully keeps a coupon above the funding rate because the principal is cheap at 5.69% rates and the autocall usually returns it early.</a:t>
+              <a:t>The table is the key design argument. Every design that puts capital at risk only pays 6–11% for a 10–12% chance of a loss; pushing the loss probability down with a calmer basket kills the coupon. Protecting capital fully keeps a coupon above the funding rate because the principal is cheap at 5.69% rates and the autocall usually returns it early.</a:t>
             </a:r>
             <a:endParaRPr lang="en-US" dirty="0"/>
           </a:p>
@@ -14424,7 +14424,7 @@
           <a:p>
             <a:r>
               <a:rPr lang="en-US" dirty="0"/>
-              <a:t>Explain the note as one question asked every quarter: is the basket at or above where it started? If yes, the family is paid 1.625% for that quarter plus any coupons missed before, and from Year 1 the note also ends with 100% back. If the answer is never yes, the family still gets 100% back at Year 5.</a:t>
+              <a:t>Explain the note as one question asked every quarter: is the basket at or above where it started? If yes, the family is paid 1.70% for that quarter plus any coupons missed before, and from Year 1 the note also ends with 100% back. If the answer is never yes, the family still gets 100% back at Year 5.</a:t>
             </a:r>
             <a:endParaRPr lang="en-US" dirty="0"/>
           </a:p>
@@ -14512,7 +14512,7 @@
           <a:p>
             <a:r>
               <a:rPr lang="en-US" dirty="0"/>
-              <a:t>Left chart: the cash ladder. Each quarter the note lives adds 1.625% of notional, paid either on the date or later through memory. Right chart: if the note reaches Year 5 without being called, there are only two zones. At or above 100% the family receives 132.5%; below 100% it receives 100%, plus any coupons already paid in Q1–Q3. Above +32.5% the basket beats the note: that is the capped upside.</a:t>
+              <a:t>Left chart: the cash ladder. Each quarter the note lives adds 1.70% of notional, paid either on the date or later through memory. Right chart: if the note reaches Year 5 without being called, there are only two zones. At or above 100% the family receives 134.0%; below 100% it receives 100%, plus any coupons already paid in Q1–Q3. Above +34.0% the basket beats the note: that is the capped upside.</a:t>
             </a:r>
             <a:endParaRPr lang="en-US" dirty="0"/>
           </a:p>
@@ -15040,7 +15040,7 @@
                 <a:ea typeface="Calibri" pitchFamily="34" charset="-122"/>
                 <a:cs typeface="Calibri" pitchFamily="34" charset="-120"/>
               </a:rPr>
-              <a:t>6.5% a year from Asia's digital build-out, with 100% of capital returned at maturity</a:t>
+              <a:t>6.8% a year from Asia's semiconductor build-out, with 100% of capital returned at maturity</a:t>
             </a:r>
             <a:endParaRPr lang="en-US" sz="1500" dirty="0"/>
           </a:p>
@@ -15079,7 +15079,7 @@
                 <a:ea typeface="Calibri" pitchFamily="34" charset="-122"/>
                 <a:cs typeface="Calibri" pitchFamily="34" charset="-120"/>
               </a:rPr>
-              <a:t>USD 100mn · 5-year note issued by Natixis · 6.5% p.a. memory coupon · 100% capital protected · Trade date 17 Sep 2026</a:t>
+              <a:t>USD 100mn · 5-year note issued by Natixis · 6.8% p.a. memory coupon · 100% capital protected · Trade date 17 Sep 2026</a:t>
             </a:r>
             <a:endParaRPr lang="en-US" sz="1150" dirty="0"/>
           </a:p>
@@ -15294,7 +15294,7 @@
                 <a:ea typeface="Calibri" pitchFamily="34" charset="-122"/>
                 <a:cs typeface="Calibri" pitchFamily="34" charset="-120"/>
               </a:rPr>
-              <a:t>100% repaid at autocall or maturity. Worth 90.1%: early repayment is worth more than a 5Y bond (75.8%)</a:t>
+              <a:t>100% repaid at autocall or maturity. Worth 89.9%: early repayment is worth more than a 5Y bond (75.8%)</a:t>
             </a:r>
             <a:endParaRPr lang="en-US" sz="900" dirty="0"/>
           </a:p>
@@ -15454,7 +15454,7 @@
                 <a:ea typeface="Calibri" pitchFamily="34" charset="-122"/>
                 <a:cs typeface="Calibri" pitchFamily="34" charset="-120"/>
               </a:rPr>
-              <a:t>Pay 1.625%, plus missed coupons, on each date the basket is ≥ 100%. Worth 7.4%</a:t>
+              <a:t>Pay 1.70%, plus missed coupons, on each date the basket is ≥ 100%. Worth 7.7%</a:t>
             </a:r>
             <a:endParaRPr lang="en-US" sz="900" dirty="0"/>
           </a:p>
@@ -15696,7 +15696,7 @@
                 <a:ea typeface="Calibri" pitchFamily="34" charset="-122"/>
                 <a:cs typeface="Calibri" pitchFamily="34" charset="-120"/>
               </a:rPr>
-              <a:t>Fair value 97.5% = principal 90.1% + coupons 7.4% (net of autocall).  </a:t>
+              <a:t>Fair value 97.7% = principal 89.9% + coupons 7.7% (net of autocall).  </a:t>
             </a:r>
             <a:pPr indent="0" marL="0">
               <a:buNone/>
@@ -15710,7 +15710,7 @@
                 <a:ea typeface="Calibri" pitchFamily="34" charset="-122"/>
                 <a:cs typeface="Calibri" pitchFamily="34" charset="-120"/>
               </a:rPr>
-              <a:t>Issued at 100%, leaving 2.5% for hedging costs and Natixis margin. The client sells no put, so it takes no equity downside: it gives up upside above the coupon instead.</a:t>
+              <a:t>Issued at 100%, leaving 2.4% for hedging costs and Natixis margin. The client sells no put, so it takes no equity downside: it gives up upside above the coupon instead.</a:t>
             </a:r>
             <a:endParaRPr lang="en-US" sz="1000" dirty="0"/>
           </a:p>
@@ -16475,7 +16475,7 @@
                           <a:ea typeface="Calibri" pitchFamily="34" charset="-122"/>
                           <a:cs typeface="Calibri" pitchFamily="34" charset="-120"/>
                         </a:rPr>
-                        <a:t>6.5%</a:t>
+                        <a:t>6.8%</a:t>
                       </a:r>
                       <a:endParaRPr lang="en-US" sz="850" dirty="0">
                         <a:latin typeface="Calibri" charset="0"/>
@@ -16543,7 +16543,7 @@
                           <a:ea typeface="Calibri" pitchFamily="34" charset="-122"/>
                           <a:cs typeface="Calibri" pitchFamily="34" charset="-120"/>
                         </a:rPr>
-                        <a:t>106.5</a:t>
+                        <a:t>106.8</a:t>
                       </a:r>
                       <a:endParaRPr lang="en-US" sz="850" dirty="0">
                         <a:latin typeface="Calibri" charset="0"/>
@@ -16611,7 +16611,7 @@
                           <a:ea typeface="Calibri" pitchFamily="34" charset="-122"/>
                           <a:cs typeface="Calibri" pitchFamily="34" charset="-120"/>
                         </a:rPr>
-                        <a:t>6.7%</a:t>
+                        <a:t>7.0%</a:t>
                       </a:r>
                       <a:endParaRPr lang="en-US" sz="850" dirty="0">
                         <a:latin typeface="Calibri" charset="0"/>
@@ -16885,7 +16885,7 @@
                           <a:ea typeface="Calibri" pitchFamily="34" charset="-122"/>
                           <a:cs typeface="Calibri" pitchFamily="34" charset="-120"/>
                         </a:rPr>
-                        <a:t>9.8%</a:t>
+                        <a:t>10.2%</a:t>
                       </a:r>
                       <a:endParaRPr lang="en-US" sz="850" dirty="0">
                         <a:latin typeface="Calibri" charset="0"/>
@@ -16953,7 +16953,7 @@
                           <a:ea typeface="Calibri" pitchFamily="34" charset="-122"/>
                           <a:cs typeface="Calibri" pitchFamily="34" charset="-120"/>
                         </a:rPr>
-                        <a:t>109.7</a:t>
+                        <a:t>110.2</a:t>
                       </a:r>
                       <a:endParaRPr lang="en-US" sz="850" dirty="0">
                         <a:latin typeface="Calibri" charset="0"/>
@@ -17021,7 +17021,7 @@
                           <a:ea typeface="Calibri" pitchFamily="34" charset="-122"/>
                           <a:cs typeface="Calibri" pitchFamily="34" charset="-120"/>
                         </a:rPr>
-                        <a:t>6.4%</a:t>
+                        <a:t>6.7%</a:t>
                       </a:r>
                       <a:endParaRPr lang="en-US" sz="850" dirty="0">
                         <a:latin typeface="Calibri" charset="0"/>
@@ -17295,7 +17295,7 @@
                           <a:ea typeface="Calibri" pitchFamily="34" charset="-122"/>
                           <a:cs typeface="Calibri" pitchFamily="34" charset="-120"/>
                         </a:rPr>
-                        <a:t>24.4%</a:t>
+                        <a:t>25.5%</a:t>
                       </a:r>
                       <a:endParaRPr lang="en-US" sz="850" dirty="0">
                         <a:latin typeface="Calibri" charset="0"/>
@@ -17363,7 +17363,7 @@
                           <a:ea typeface="Calibri" pitchFamily="34" charset="-122"/>
                           <a:cs typeface="Calibri" pitchFamily="34" charset="-120"/>
                         </a:rPr>
-                        <a:t>124.4</a:t>
+                        <a:t>125.5</a:t>
                       </a:r>
                       <a:endParaRPr lang="en-US" sz="850" dirty="0">
                         <a:latin typeface="Calibri" charset="0"/>
@@ -17431,7 +17431,7 @@
                           <a:ea typeface="Calibri" pitchFamily="34" charset="-122"/>
                           <a:cs typeface="Calibri" pitchFamily="34" charset="-120"/>
                         </a:rPr>
-                        <a:t>6.0%</a:t>
+                        <a:t>6.2%</a:t>
                       </a:r>
                       <a:endParaRPr lang="en-US" sz="850" dirty="0">
                         <a:latin typeface="Calibri" charset="0"/>
@@ -18449,7 +18449,7 @@
                 <a:ea typeface="Calibri" pitchFamily="34" charset="-122"/>
                 <a:cs typeface="Calibri" pitchFamily="34" charset="-120"/>
               </a:rPr>
-              <a:t>the note earns ~6–6.7% a year whenever the basket gets back to 100%, even after a 30% drawdown: memory pays all 15 missed coupons at Q15. In a lost decade or a lasting shock the family gets 100% back, while the basket itself is down 12–45%.</a:t>
+              <a:t>the note earns ~6.2%–7.0% a year whenever the basket gets back to 100%, even after a 30% drawdown: memory pays all 15 missed coupons at Q15. In a lost decade or a lasting shock the family gets 100% back, while the basket itself is down 12–45%.</a:t>
             </a:r>
             <a:endParaRPr lang="en-US" sz="950" dirty="0"/>
           </a:p>
@@ -19116,7 +19116,7 @@
                           <a:ea typeface="Calibri" pitchFamily="34" charset="-122"/>
                           <a:cs typeface="Calibri" pitchFamily="34" charset="-120"/>
                         </a:rPr>
-                        <a:t>83%</a:t>
+                        <a:t>82%</a:t>
                       </a:r>
                       <a:endParaRPr lang="en-US" sz="900" dirty="0">
                         <a:latin typeface="Calibri" charset="0"/>
@@ -19184,7 +19184,7 @@
                           <a:ea typeface="Calibri" pitchFamily="34" charset="-122"/>
                           <a:cs typeface="Calibri" pitchFamily="34" charset="-120"/>
                         </a:rPr>
-                        <a:t>68%</a:t>
+                        <a:t>69%</a:t>
                       </a:r>
                       <a:endParaRPr lang="en-US" sz="900" dirty="0">
                         <a:latin typeface="Calibri" charset="0"/>
@@ -19320,7 +19320,7 @@
                           <a:ea typeface="Calibri" pitchFamily="34" charset="-122"/>
                           <a:cs typeface="Calibri" pitchFamily="34" charset="-120"/>
                         </a:rPr>
-                        <a:t>89%</a:t>
+                        <a:t>88%</a:t>
                       </a:r>
                       <a:endParaRPr lang="en-US" sz="900" dirty="0">
                         <a:latin typeface="Calibri" charset="0"/>
@@ -19662,7 +19662,7 @@
                           <a:ea typeface="Calibri" pitchFamily="34" charset="-122"/>
                           <a:cs typeface="Calibri" pitchFamily="34" charset="-120"/>
                         </a:rPr>
-                        <a:t>1.8</a:t>
+                        <a:t>1.9</a:t>
                       </a:r>
                       <a:endParaRPr lang="en-US" sz="900" dirty="0">
                         <a:latin typeface="Calibri" charset="0"/>
@@ -19800,7 +19800,7 @@
                           <a:ea typeface="Calibri" pitchFamily="34" charset="-122"/>
                           <a:cs typeface="Calibri" pitchFamily="34" charset="-120"/>
                         </a:rPr>
-                        <a:t>5.4%</a:t>
+                        <a:t>5.6%</a:t>
                       </a:r>
                       <a:endParaRPr lang="en-US" sz="900" dirty="0">
                         <a:latin typeface="Calibri" charset="0"/>
@@ -19868,7 +19868,7 @@
                           <a:ea typeface="Calibri" pitchFamily="34" charset="-122"/>
                           <a:cs typeface="Calibri" pitchFamily="34" charset="-120"/>
                         </a:rPr>
-                        <a:t>4.5%</a:t>
+                        <a:t>4.8%</a:t>
                       </a:r>
                       <a:endParaRPr lang="en-US" sz="900" dirty="0">
                         <a:latin typeface="Calibri" charset="0"/>
@@ -19936,7 +19936,7 @@
                           <a:ea typeface="Calibri" pitchFamily="34" charset="-122"/>
                           <a:cs typeface="Calibri" pitchFamily="34" charset="-120"/>
                         </a:rPr>
-                        <a:t>5.3%</a:t>
+                        <a:t>5.5%</a:t>
                       </a:r>
                       <a:endParaRPr lang="en-US" sz="900" dirty="0">
                         <a:latin typeface="Calibri" charset="0"/>
@@ -20004,7 +20004,7 @@
                           <a:ea typeface="Calibri" pitchFamily="34" charset="-122"/>
                           <a:cs typeface="Calibri" pitchFamily="34" charset="-120"/>
                         </a:rPr>
-                        <a:t>5.8%</a:t>
+                        <a:t>6.0%</a:t>
                       </a:r>
                       <a:endParaRPr lang="en-US" sz="900" dirty="0">
                         <a:latin typeface="Calibri" charset="0"/>
@@ -20142,7 +20142,7 @@
                           <a:ea typeface="Calibri" pitchFamily="34" charset="-122"/>
                           <a:cs typeface="Calibri" pitchFamily="34" charset="-120"/>
                         </a:rPr>
-                        <a:t>6.6%</a:t>
+                        <a:t>6.9%</a:t>
                       </a:r>
                       <a:endParaRPr lang="en-US" sz="900" dirty="0">
                         <a:latin typeface="Calibri" charset="0"/>
@@ -20210,7 +20210,7 @@
                           <a:ea typeface="Calibri" pitchFamily="34" charset="-122"/>
                           <a:cs typeface="Calibri" pitchFamily="34" charset="-120"/>
                         </a:rPr>
-                        <a:t>6.5%</a:t>
+                        <a:t>6.8%</a:t>
                       </a:r>
                       <a:endParaRPr lang="en-US" sz="900" dirty="0">
                         <a:latin typeface="Calibri" charset="0"/>
@@ -20278,7 +20278,7 @@
                           <a:ea typeface="Calibri" pitchFamily="34" charset="-122"/>
                           <a:cs typeface="Calibri" pitchFamily="34" charset="-120"/>
                         </a:rPr>
-                        <a:t>6.6%</a:t>
+                        <a:t>6.9%</a:t>
                       </a:r>
                       <a:endParaRPr lang="en-US" sz="900" dirty="0">
                         <a:latin typeface="Calibri" charset="0"/>
@@ -20346,7 +20346,7 @@
                           <a:ea typeface="Calibri" pitchFamily="34" charset="-122"/>
                           <a:cs typeface="Calibri" pitchFamily="34" charset="-120"/>
                         </a:rPr>
-                        <a:t>6.6%</a:t>
+                        <a:t>6.9%</a:t>
                       </a:r>
                       <a:endParaRPr lang="en-US" sz="900" dirty="0">
                         <a:latin typeface="Calibri" charset="0"/>
@@ -20484,7 +20484,7 @@
                           <a:ea typeface="Calibri" pitchFamily="34" charset="-122"/>
                           <a:cs typeface="Calibri" pitchFamily="34" charset="-120"/>
                         </a:rPr>
-                        <a:t>8.1%</a:t>
+                        <a:t>8.4%</a:t>
                       </a:r>
                       <a:endParaRPr lang="en-US" sz="900" dirty="0">
                         <a:latin typeface="Calibri" charset="0"/>
@@ -20552,7 +20552,7 @@
                           <a:ea typeface="Calibri" pitchFamily="34" charset="-122"/>
                           <a:cs typeface="Calibri" pitchFamily="34" charset="-120"/>
                         </a:rPr>
-                        <a:t>6.9%</a:t>
+                        <a:t>7.3%</a:t>
                       </a:r>
                       <a:endParaRPr lang="en-US" sz="900" dirty="0">
                         <a:latin typeface="Calibri" charset="0"/>
@@ -20620,7 +20620,7 @@
                           <a:ea typeface="Calibri" pitchFamily="34" charset="-122"/>
                           <a:cs typeface="Calibri" pitchFamily="34" charset="-120"/>
                         </a:rPr>
-                        <a:t>7.8%</a:t>
+                        <a:t>8.2%</a:t>
                       </a:r>
                       <a:endParaRPr lang="en-US" sz="900" dirty="0">
                         <a:latin typeface="Calibri" charset="0"/>
@@ -20688,7 +20688,7 @@
                           <a:ea typeface="Calibri" pitchFamily="34" charset="-122"/>
                           <a:cs typeface="Calibri" pitchFamily="34" charset="-120"/>
                         </a:rPr>
-                        <a:t>8.3%</a:t>
+                        <a:t>8.6%</a:t>
                       </a:r>
                       <a:endParaRPr lang="en-US" sz="900" dirty="0">
                         <a:latin typeface="Calibri" charset="0"/>
@@ -21030,7 +21030,7 @@
                           <a:ea typeface="Calibri" pitchFamily="34" charset="-122"/>
                           <a:cs typeface="Calibri" pitchFamily="34" charset="-120"/>
                         </a:rPr>
-                        <a:t>7%</a:t>
+                        <a:t>8%</a:t>
                       </a:r>
                       <a:endParaRPr lang="en-US" sz="900" dirty="0">
                         <a:latin typeface="Calibri" charset="0"/>
@@ -21527,7 +21527,7 @@
                 <a:ea typeface="Calibri" pitchFamily="34" charset="-122"/>
                 <a:cs typeface="Calibri" pitchFamily="34" charset="-120"/>
               </a:rPr>
-              <a:t>called at the first review (106.5% total)</a:t>
+              <a:t>called at the first review (106.8% total)</a:t>
             </a:r>
             <a:endParaRPr lang="en-US" sz="1000" dirty="0"/>
           </a:p>
@@ -22456,7 +22456,7 @@
                           <a:ea typeface="Calibri" pitchFamily="34" charset="-122"/>
                           <a:cs typeface="Calibri" pitchFamily="34" charset="-120"/>
                         </a:rPr>
-                        <a:t>Basket +80% still pays 6.5% p.a. and is called at Y1</a:t>
+                        <a:t>Basket +80% still pays 6.8% p.a. and is called at Y1</a:t>
                       </a:r>
                       <a:endParaRPr lang="en-US" sz="850" dirty="0">
                         <a:latin typeface="Calibri" charset="0"/>
@@ -23297,7 +23297,7 @@
                 <a:ea typeface="Calibri" pitchFamily="34" charset="-122"/>
                 <a:cs typeface="Calibri" pitchFamily="34" charset="-120"/>
               </a:rPr>
-              <a:t>Natixis owes basket digitals struck at 100%: replicated with tight basket call spreads, delta-hedged with HSTECH / NKY / TAIEX futures</a:t>
+              <a:t>Natixis owes basket digitals struck at 100%: replicated with tight basket call spreads, delta-hedged with TAIEX / KOSPI 200 / Nikkei / SOX futures</a:t>
             </a:r>
             <a:endParaRPr lang="en-US" sz="850" dirty="0"/>
           </a:p>
@@ -23402,7 +23402,7 @@
                 <a:ea typeface="Calibri" pitchFamily="34" charset="-122"/>
                 <a:cs typeface="Calibri" pitchFamily="34" charset="-120"/>
               </a:rPr>
-              <a:t>Coupon value moves with basket vol and correlation (fair 6.6%–7.2% for vol ±3pts): managed with listed index options and correlation trades</a:t>
+              <a:t>Coupon value moves with basket vol and correlation (fair 6.8%–7.4% for vol ±3pts): managed with listed index options and correlation trades</a:t>
             </a:r>
             <a:endParaRPr lang="en-US" sz="850" dirty="0"/>
           </a:p>
@@ -23507,7 +23507,7 @@
                 <a:ea typeface="Calibri" pitchFamily="34" charset="-122"/>
                 <a:cs typeface="Calibri" pitchFamily="34" charset="-120"/>
               </a:rPr>
-              <a:t>USD payout on JPY/HKD/TWD indices: FX forwards and quanto adjustment in price (FX-equity correlation)</a:t>
+              <a:t>USD payout on TWD/KRW/JPY indices (SOX already USD): FX forwards and quanto adjustment in price</a:t>
             </a:r>
             <a:endParaRPr lang="en-US" sz="850" dirty="0"/>
           </a:p>
@@ -23665,7 +23665,7 @@
                 <a:ea typeface="Calibri" pitchFamily="34" charset="-122"/>
                 <a:cs typeface="Calibri" pitchFamily="34" charset="-120"/>
               </a:rPr>
-              <a:t>base 6.9% · vol ±3pts 6.6%–7.2% · corr ±0.15 6.7%–7.1% · equity drift −1/−2% 7.5%–8.1%. The 6.5% offer stays fundable in every case.</a:t>
+              <a:t>base 7.1% · vol ±3pts 6.8%–7.4% · corr ±0.15 6.9%–7.3% · equity drift −1/−2% 7.7%–8.2%. The 6.8% offer stays fundable in every case.</a:t>
             </a:r>
             <a:endParaRPr lang="en-US" sz="900" dirty="0"/>
           </a:p>
@@ -24142,7 +24142,75 @@
                           <a:ea typeface="Calibri" pitchFamily="34" charset="-122"/>
                           <a:cs typeface="Calibri" pitchFamily="34" charset="-120"/>
                         </a:rPr>
-                        <a:t>HSTECH</a:t>
+                        <a:t>TWSE</a:t>
+                      </a:r>
+                      <a:endParaRPr lang="en-US" sz="900" dirty="0">
+                        <a:latin typeface="Calibri" charset="0"/>
+                        <a:ea typeface="Calibri" charset="0"/>
+                        <a:cs typeface="Calibri" charset="0"/>
+                      </a:endParaRPr>
+                    </a:p>
+                  </a:txBody>
+                  <a:tcPr marL="38100" marR="38100" marT="25400" marB="25400" anchor="ctr">
+                    <a:lnL w="6350" cap="flat" cmpd="sng" algn="ctr">
+                      <a:solidFill>
+                        <a:srgbClr val="DCE7E5"/>
+                      </a:solidFill>
+                      <a:prstDash val="solid"/>
+                      <a:round/>
+                      <a:headEnd type="none" w="med" len="med"/>
+                      <a:tailEnd type="none" w="med" len="med"/>
+                    </a:lnL>
+                    <a:lnR w="6350" cap="flat" cmpd="sng" algn="ctr">
+                      <a:solidFill>
+                        <a:srgbClr val="DCE7E5"/>
+                      </a:solidFill>
+                      <a:prstDash val="solid"/>
+                      <a:round/>
+                      <a:headEnd type="none" w="med" len="med"/>
+                      <a:tailEnd type="none" w="med" len="med"/>
+                    </a:lnR>
+                    <a:lnT w="6350" cap="flat" cmpd="sng" algn="ctr">
+                      <a:solidFill>
+                        <a:srgbClr val="DCE7E5"/>
+                      </a:solidFill>
+                      <a:prstDash val="solid"/>
+                      <a:round/>
+                      <a:headEnd type="none" w="med" len="med"/>
+                      <a:tailEnd type="none" w="med" len="med"/>
+                    </a:lnT>
+                    <a:lnB w="6350" cap="flat" cmpd="sng" algn="ctr">
+                      <a:solidFill>
+                        <a:srgbClr val="DCE7E5"/>
+                      </a:solidFill>
+                      <a:prstDash val="solid"/>
+                      <a:round/>
+                      <a:headEnd type="none" w="med" len="med"/>
+                      <a:tailEnd type="none" w="med" len="med"/>
+                    </a:lnB>
+                    <a:solidFill>
+                      <a:srgbClr val="0B3C49"/>
+                    </a:solidFill>
+                  </a:tcPr>
+                </a:tc>
+                <a:tc>
+                  <a:txBody>
+                    <a:bodyPr/>
+                    <a:lstStyle/>
+                    <a:p>
+                      <a:pPr algn="ctr" indent="0" marL="0">
+                        <a:buNone/>
+                      </a:pPr>
+                      <a:r>
+                        <a:rPr lang="en-US" sz="900" b="1" dirty="0">
+                          <a:solidFill>
+                            <a:srgbClr val="FFFFFF"/>
+                          </a:solidFill>
+                          <a:latin typeface="Calibri" pitchFamily="34" charset="0"/>
+                          <a:ea typeface="Calibri" pitchFamily="34" charset="-122"/>
+                          <a:cs typeface="Calibri" pitchFamily="34" charset="-120"/>
+                        </a:rPr>
+                        <a:t>KOSPI2</a:t>
                       </a:r>
                       <a:endParaRPr lang="en-US" sz="900" dirty="0">
                         <a:latin typeface="Calibri" charset="0"/>
@@ -24278,75 +24346,7 @@
                           <a:ea typeface="Calibri" pitchFamily="34" charset="-122"/>
                           <a:cs typeface="Calibri" pitchFamily="34" charset="-120"/>
                         </a:rPr>
-                        <a:t>TWSE</a:t>
-                      </a:r>
-                      <a:endParaRPr lang="en-US" sz="900" dirty="0">
-                        <a:latin typeface="Calibri" charset="0"/>
-                        <a:ea typeface="Calibri" charset="0"/>
-                        <a:cs typeface="Calibri" charset="0"/>
-                      </a:endParaRPr>
-                    </a:p>
-                  </a:txBody>
-                  <a:tcPr marL="38100" marR="38100" marT="25400" marB="25400" anchor="ctr">
-                    <a:lnL w="6350" cap="flat" cmpd="sng" algn="ctr">
-                      <a:solidFill>
-                        <a:srgbClr val="DCE7E5"/>
-                      </a:solidFill>
-                      <a:prstDash val="solid"/>
-                      <a:round/>
-                      <a:headEnd type="none" w="med" len="med"/>
-                      <a:tailEnd type="none" w="med" len="med"/>
-                    </a:lnL>
-                    <a:lnR w="6350" cap="flat" cmpd="sng" algn="ctr">
-                      <a:solidFill>
-                        <a:srgbClr val="DCE7E5"/>
-                      </a:solidFill>
-                      <a:prstDash val="solid"/>
-                      <a:round/>
-                      <a:headEnd type="none" w="med" len="med"/>
-                      <a:tailEnd type="none" w="med" len="med"/>
-                    </a:lnR>
-                    <a:lnT w="6350" cap="flat" cmpd="sng" algn="ctr">
-                      <a:solidFill>
-                        <a:srgbClr val="DCE7E5"/>
-                      </a:solidFill>
-                      <a:prstDash val="solid"/>
-                      <a:round/>
-                      <a:headEnd type="none" w="med" len="med"/>
-                      <a:tailEnd type="none" w="med" len="med"/>
-                    </a:lnT>
-                    <a:lnB w="6350" cap="flat" cmpd="sng" algn="ctr">
-                      <a:solidFill>
-                        <a:srgbClr val="DCE7E5"/>
-                      </a:solidFill>
-                      <a:prstDash val="solid"/>
-                      <a:round/>
-                      <a:headEnd type="none" w="med" len="med"/>
-                      <a:tailEnd type="none" w="med" len="med"/>
-                    </a:lnB>
-                    <a:solidFill>
-                      <a:srgbClr val="0B3C49"/>
-                    </a:solidFill>
-                  </a:tcPr>
-                </a:tc>
-                <a:tc>
-                  <a:txBody>
-                    <a:bodyPr/>
-                    <a:lstStyle/>
-                    <a:p>
-                      <a:pPr algn="ctr" indent="0" marL="0">
-                        <a:buNone/>
-                      </a:pPr>
-                      <a:r>
-                        <a:rPr lang="en-US" sz="900" b="1" dirty="0">
-                          <a:solidFill>
-                            <a:srgbClr val="FFFFFF"/>
-                          </a:solidFill>
-                          <a:latin typeface="Calibri" pitchFamily="34" charset="0"/>
-                          <a:ea typeface="Calibri" pitchFamily="34" charset="-122"/>
-                          <a:cs typeface="Calibri" pitchFamily="34" charset="-120"/>
-                        </a:rPr>
-                        <a:t>MXAP0UT</a:t>
+                        <a:t>SOX</a:t>
                       </a:r>
                       <a:endParaRPr lang="en-US" sz="900" dirty="0">
                         <a:latin typeface="Calibri" charset="0"/>
@@ -24416,7 +24416,7 @@
                           <a:ea typeface="Calibri" pitchFamily="34" charset="-122"/>
                           <a:cs typeface="Calibri" pitchFamily="34" charset="-120"/>
                         </a:rPr>
-                        <a:t>HSTECH</a:t>
+                        <a:t>TWSE</a:t>
                       </a:r>
                       <a:endParaRPr lang="en-US" sz="900" dirty="0">
                         <a:latin typeface="Calibri" charset="0"/>
@@ -24484,7 +24484,7 @@
                           <a:ea typeface="Calibri" pitchFamily="34" charset="-122"/>
                           <a:cs typeface="Calibri" pitchFamily="34" charset="-120"/>
                         </a:rPr>
-                        <a:t>30%</a:t>
+                        <a:t>35%</a:t>
                       </a:r>
                       <a:endParaRPr lang="en-US" sz="900" dirty="0">
                         <a:latin typeface="Calibri" charset="0"/>
@@ -24552,7 +24552,7 @@
                           <a:ea typeface="Calibri" pitchFamily="34" charset="-122"/>
                           <a:cs typeface="Calibri" pitchFamily="34" charset="-120"/>
                         </a:rPr>
-                        <a:t>32%</a:t>
+                        <a:t>24%</a:t>
                       </a:r>
                       <a:endParaRPr lang="en-US" sz="900" dirty="0">
                         <a:latin typeface="Calibri" charset="0"/>
@@ -24620,7 +24620,7 @@
                           <a:ea typeface="Calibri" pitchFamily="34" charset="-122"/>
                           <a:cs typeface="Calibri" pitchFamily="34" charset="-120"/>
                         </a:rPr>
-                        <a:t>1.0%</a:t>
+                        <a:t>2.8%</a:t>
                       </a:r>
                       <a:endParaRPr lang="en-US" sz="900" dirty="0">
                         <a:latin typeface="Calibri" charset="0"/>
@@ -24756,7 +24756,75 @@
                           <a:ea typeface="Calibri" pitchFamily="34" charset="-122"/>
                           <a:cs typeface="Calibri" pitchFamily="34" charset="-120"/>
                         </a:rPr>
-                        <a:t>0.45</a:t>
+                        <a:t>0.70</a:t>
+                      </a:r>
+                      <a:endParaRPr lang="en-US" sz="900" dirty="0">
+                        <a:latin typeface="Calibri" charset="0"/>
+                        <a:ea typeface="Calibri" charset="0"/>
+                        <a:cs typeface="Calibri" charset="0"/>
+                      </a:endParaRPr>
+                    </a:p>
+                  </a:txBody>
+                  <a:tcPr marL="38100" marR="38100" marT="25400" marB="25400" anchor="ctr">
+                    <a:lnL w="6350" cap="flat" cmpd="sng" algn="ctr">
+                      <a:solidFill>
+                        <a:srgbClr val="DCE7E5"/>
+                      </a:solidFill>
+                      <a:prstDash val="solid"/>
+                      <a:round/>
+                      <a:headEnd type="none" w="med" len="med"/>
+                      <a:tailEnd type="none" w="med" len="med"/>
+                    </a:lnL>
+                    <a:lnR w="6350" cap="flat" cmpd="sng" algn="ctr">
+                      <a:solidFill>
+                        <a:srgbClr val="DCE7E5"/>
+                      </a:solidFill>
+                      <a:prstDash val="solid"/>
+                      <a:round/>
+                      <a:headEnd type="none" w="med" len="med"/>
+                      <a:tailEnd type="none" w="med" len="med"/>
+                    </a:lnR>
+                    <a:lnT w="6350" cap="flat" cmpd="sng" algn="ctr">
+                      <a:solidFill>
+                        <a:srgbClr val="DCE7E5"/>
+                      </a:solidFill>
+                      <a:prstDash val="solid"/>
+                      <a:round/>
+                      <a:headEnd type="none" w="med" len="med"/>
+                      <a:tailEnd type="none" w="med" len="med"/>
+                    </a:lnT>
+                    <a:lnB w="6350" cap="flat" cmpd="sng" algn="ctr">
+                      <a:solidFill>
+                        <a:srgbClr val="DCE7E5"/>
+                      </a:solidFill>
+                      <a:prstDash val="solid"/>
+                      <a:round/>
+                      <a:headEnd type="none" w="med" len="med"/>
+                      <a:tailEnd type="none" w="med" len="med"/>
+                    </a:lnB>
+                    <a:solidFill>
+                      <a:srgbClr val="FFFFFF"/>
+                    </a:solidFill>
+                  </a:tcPr>
+                </a:tc>
+                <a:tc>
+                  <a:txBody>
+                    <a:bodyPr/>
+                    <a:lstStyle/>
+                    <a:p>
+                      <a:pPr algn="ctr" indent="0" marL="0">
+                        <a:buNone/>
+                      </a:pPr>
+                      <a:r>
+                        <a:rPr lang="en-US" sz="900" dirty="0">
+                          <a:solidFill>
+                            <a:srgbClr val="1D2B30"/>
+                          </a:solidFill>
+                          <a:latin typeface="Calibri" pitchFamily="34" charset="0"/>
+                          <a:ea typeface="Calibri" pitchFamily="34" charset="-122"/>
+                          <a:cs typeface="Calibri" pitchFamily="34" charset="-120"/>
+                        </a:rPr>
+                        <a:t>0.60</a:t>
                       </a:r>
                       <a:endParaRPr lang="en-US" sz="900" dirty="0">
                         <a:latin typeface="Calibri" charset="0"/>
@@ -24875,6 +24943,76 @@
                     </a:solidFill>
                   </a:tcPr>
                 </a:tc>
+              </a:tr>
+              <a:tr h="274320">
+                <a:tc>
+                  <a:txBody>
+                    <a:bodyPr/>
+                    <a:lstStyle/>
+                    <a:p>
+                      <a:pPr algn="ctr" indent="0" marL="0">
+                        <a:buNone/>
+                      </a:pPr>
+                      <a:r>
+                        <a:rPr lang="en-US" sz="900" b="1" dirty="0">
+                          <a:solidFill>
+                            <a:srgbClr val="1D2B30"/>
+                          </a:solidFill>
+                          <a:latin typeface="Calibri" pitchFamily="34" charset="0"/>
+                          <a:ea typeface="Calibri" pitchFamily="34" charset="-122"/>
+                          <a:cs typeface="Calibri" pitchFamily="34" charset="-120"/>
+                        </a:rPr>
+                        <a:t>KOSPI2</a:t>
+                      </a:r>
+                      <a:endParaRPr lang="en-US" sz="900" dirty="0">
+                        <a:latin typeface="Calibri" charset="0"/>
+                        <a:ea typeface="Calibri" charset="0"/>
+                        <a:cs typeface="Calibri" charset="0"/>
+                      </a:endParaRPr>
+                    </a:p>
+                  </a:txBody>
+                  <a:tcPr marL="38100" marR="38100" marT="25400" marB="25400" anchor="ctr">
+                    <a:lnL w="6350" cap="flat" cmpd="sng" algn="ctr">
+                      <a:solidFill>
+                        <a:srgbClr val="DCE7E5"/>
+                      </a:solidFill>
+                      <a:prstDash val="solid"/>
+                      <a:round/>
+                      <a:headEnd type="none" w="med" len="med"/>
+                      <a:tailEnd type="none" w="med" len="med"/>
+                    </a:lnL>
+                    <a:lnR w="6350" cap="flat" cmpd="sng" algn="ctr">
+                      <a:solidFill>
+                        <a:srgbClr val="DCE7E5"/>
+                      </a:solidFill>
+                      <a:prstDash val="solid"/>
+                      <a:round/>
+                      <a:headEnd type="none" w="med" len="med"/>
+                      <a:tailEnd type="none" w="med" len="med"/>
+                    </a:lnR>
+                    <a:lnT w="6350" cap="flat" cmpd="sng" algn="ctr">
+                      <a:solidFill>
+                        <a:srgbClr val="DCE7E5"/>
+                      </a:solidFill>
+                      <a:prstDash val="solid"/>
+                      <a:round/>
+                      <a:headEnd type="none" w="med" len="med"/>
+                      <a:tailEnd type="none" w="med" len="med"/>
+                    </a:lnT>
+                    <a:lnB w="6350" cap="flat" cmpd="sng" algn="ctr">
+                      <a:solidFill>
+                        <a:srgbClr val="DCE7E5"/>
+                      </a:solidFill>
+                      <a:prstDash val="solid"/>
+                      <a:round/>
+                      <a:headEnd type="none" w="med" len="med"/>
+                      <a:tailEnd type="none" w="med" len="med"/>
+                    </a:lnB>
+                    <a:solidFill>
+                      <a:srgbClr val="FFFFFF"/>
+                    </a:solidFill>
+                  </a:tcPr>
+                </a:tc>
                 <a:tc>
                   <a:txBody>
                     <a:bodyPr/>
@@ -24892,7 +25030,415 @@
                           <a:ea typeface="Calibri" pitchFamily="34" charset="-122"/>
                           <a:cs typeface="Calibri" pitchFamily="34" charset="-120"/>
                         </a:rPr>
-                        <a:t>0.35</a:t>
+                        <a:t>25%</a:t>
+                      </a:r>
+                      <a:endParaRPr lang="en-US" sz="900" dirty="0">
+                        <a:latin typeface="Calibri" charset="0"/>
+                        <a:ea typeface="Calibri" charset="0"/>
+                        <a:cs typeface="Calibri" charset="0"/>
+                      </a:endParaRPr>
+                    </a:p>
+                  </a:txBody>
+                  <a:tcPr marL="38100" marR="38100" marT="25400" marB="25400" anchor="ctr">
+                    <a:lnL w="6350" cap="flat" cmpd="sng" algn="ctr">
+                      <a:solidFill>
+                        <a:srgbClr val="DCE7E5"/>
+                      </a:solidFill>
+                      <a:prstDash val="solid"/>
+                      <a:round/>
+                      <a:headEnd type="none" w="med" len="med"/>
+                      <a:tailEnd type="none" w="med" len="med"/>
+                    </a:lnL>
+                    <a:lnR w="6350" cap="flat" cmpd="sng" algn="ctr">
+                      <a:solidFill>
+                        <a:srgbClr val="DCE7E5"/>
+                      </a:solidFill>
+                      <a:prstDash val="solid"/>
+                      <a:round/>
+                      <a:headEnd type="none" w="med" len="med"/>
+                      <a:tailEnd type="none" w="med" len="med"/>
+                    </a:lnR>
+                    <a:lnT w="6350" cap="flat" cmpd="sng" algn="ctr">
+                      <a:solidFill>
+                        <a:srgbClr val="DCE7E5"/>
+                      </a:solidFill>
+                      <a:prstDash val="solid"/>
+                      <a:round/>
+                      <a:headEnd type="none" w="med" len="med"/>
+                      <a:tailEnd type="none" w="med" len="med"/>
+                    </a:lnT>
+                    <a:lnB w="6350" cap="flat" cmpd="sng" algn="ctr">
+                      <a:solidFill>
+                        <a:srgbClr val="DCE7E5"/>
+                      </a:solidFill>
+                      <a:prstDash val="solid"/>
+                      <a:round/>
+                      <a:headEnd type="none" w="med" len="med"/>
+                      <a:tailEnd type="none" w="med" len="med"/>
+                    </a:lnB>
+                    <a:solidFill>
+                      <a:srgbClr val="FFFFFF"/>
+                    </a:solidFill>
+                  </a:tcPr>
+                </a:tc>
+                <a:tc>
+                  <a:txBody>
+                    <a:bodyPr/>
+                    <a:lstStyle/>
+                    <a:p>
+                      <a:pPr algn="ctr" indent="0" marL="0">
+                        <a:buNone/>
+                      </a:pPr>
+                      <a:r>
+                        <a:rPr lang="en-US" sz="900" dirty="0">
+                          <a:solidFill>
+                            <a:srgbClr val="1D2B30"/>
+                          </a:solidFill>
+                          <a:latin typeface="Calibri" pitchFamily="34" charset="0"/>
+                          <a:ea typeface="Calibri" pitchFamily="34" charset="-122"/>
+                          <a:cs typeface="Calibri" pitchFamily="34" charset="-120"/>
+                        </a:rPr>
+                        <a:t>25%</a:t>
+                      </a:r>
+                      <a:endParaRPr lang="en-US" sz="900" dirty="0">
+                        <a:latin typeface="Calibri" charset="0"/>
+                        <a:ea typeface="Calibri" charset="0"/>
+                        <a:cs typeface="Calibri" charset="0"/>
+                      </a:endParaRPr>
+                    </a:p>
+                  </a:txBody>
+                  <a:tcPr marL="38100" marR="38100" marT="25400" marB="25400" anchor="ctr">
+                    <a:lnL w="6350" cap="flat" cmpd="sng" algn="ctr">
+                      <a:solidFill>
+                        <a:srgbClr val="DCE7E5"/>
+                      </a:solidFill>
+                      <a:prstDash val="solid"/>
+                      <a:round/>
+                      <a:headEnd type="none" w="med" len="med"/>
+                      <a:tailEnd type="none" w="med" len="med"/>
+                    </a:lnL>
+                    <a:lnR w="6350" cap="flat" cmpd="sng" algn="ctr">
+                      <a:solidFill>
+                        <a:srgbClr val="DCE7E5"/>
+                      </a:solidFill>
+                      <a:prstDash val="solid"/>
+                      <a:round/>
+                      <a:headEnd type="none" w="med" len="med"/>
+                      <a:tailEnd type="none" w="med" len="med"/>
+                    </a:lnR>
+                    <a:lnT w="6350" cap="flat" cmpd="sng" algn="ctr">
+                      <a:solidFill>
+                        <a:srgbClr val="DCE7E5"/>
+                      </a:solidFill>
+                      <a:prstDash val="solid"/>
+                      <a:round/>
+                      <a:headEnd type="none" w="med" len="med"/>
+                      <a:tailEnd type="none" w="med" len="med"/>
+                    </a:lnT>
+                    <a:lnB w="6350" cap="flat" cmpd="sng" algn="ctr">
+                      <a:solidFill>
+                        <a:srgbClr val="DCE7E5"/>
+                      </a:solidFill>
+                      <a:prstDash val="solid"/>
+                      <a:round/>
+                      <a:headEnd type="none" w="med" len="med"/>
+                      <a:tailEnd type="none" w="med" len="med"/>
+                    </a:lnB>
+                    <a:solidFill>
+                      <a:srgbClr val="FFFFFF"/>
+                    </a:solidFill>
+                  </a:tcPr>
+                </a:tc>
+                <a:tc>
+                  <a:txBody>
+                    <a:bodyPr/>
+                    <a:lstStyle/>
+                    <a:p>
+                      <a:pPr algn="ctr" indent="0" marL="0">
+                        <a:buNone/>
+                      </a:pPr>
+                      <a:r>
+                        <a:rPr lang="en-US" sz="900" dirty="0">
+                          <a:solidFill>
+                            <a:srgbClr val="1D2B30"/>
+                          </a:solidFill>
+                          <a:latin typeface="Calibri" pitchFamily="34" charset="0"/>
+                          <a:ea typeface="Calibri" pitchFamily="34" charset="-122"/>
+                          <a:cs typeface="Calibri" pitchFamily="34" charset="-120"/>
+                        </a:rPr>
+                        <a:t>2.0%</a:t>
+                      </a:r>
+                      <a:endParaRPr lang="en-US" sz="900" dirty="0">
+                        <a:latin typeface="Calibri" charset="0"/>
+                        <a:ea typeface="Calibri" charset="0"/>
+                        <a:cs typeface="Calibri" charset="0"/>
+                      </a:endParaRPr>
+                    </a:p>
+                  </a:txBody>
+                  <a:tcPr marL="38100" marR="38100" marT="25400" marB="25400" anchor="ctr">
+                    <a:lnL w="6350" cap="flat" cmpd="sng" algn="ctr">
+                      <a:solidFill>
+                        <a:srgbClr val="DCE7E5"/>
+                      </a:solidFill>
+                      <a:prstDash val="solid"/>
+                      <a:round/>
+                      <a:headEnd type="none" w="med" len="med"/>
+                      <a:tailEnd type="none" w="med" len="med"/>
+                    </a:lnL>
+                    <a:lnR w="6350" cap="flat" cmpd="sng" algn="ctr">
+                      <a:solidFill>
+                        <a:srgbClr val="DCE7E5"/>
+                      </a:solidFill>
+                      <a:prstDash val="solid"/>
+                      <a:round/>
+                      <a:headEnd type="none" w="med" len="med"/>
+                      <a:tailEnd type="none" w="med" len="med"/>
+                    </a:lnR>
+                    <a:lnT w="6350" cap="flat" cmpd="sng" algn="ctr">
+                      <a:solidFill>
+                        <a:srgbClr val="DCE7E5"/>
+                      </a:solidFill>
+                      <a:prstDash val="solid"/>
+                      <a:round/>
+                      <a:headEnd type="none" w="med" len="med"/>
+                      <a:tailEnd type="none" w="med" len="med"/>
+                    </a:lnT>
+                    <a:lnB w="6350" cap="flat" cmpd="sng" algn="ctr">
+                      <a:solidFill>
+                        <a:srgbClr val="DCE7E5"/>
+                      </a:solidFill>
+                      <a:prstDash val="solid"/>
+                      <a:round/>
+                      <a:headEnd type="none" w="med" len="med"/>
+                      <a:tailEnd type="none" w="med" len="med"/>
+                    </a:lnB>
+                    <a:solidFill>
+                      <a:srgbClr val="FFFFFF"/>
+                    </a:solidFill>
+                  </a:tcPr>
+                </a:tc>
+                <a:tc>
+                  <a:txBody>
+                    <a:bodyPr/>
+                    <a:lstStyle/>
+                    <a:p>
+                      <a:pPr algn="ctr" indent="0" marL="0">
+                        <a:buNone/>
+                      </a:pPr>
+                      <a:r>
+                        <a:rPr lang="en-US" sz="900" dirty="0">
+                          <a:solidFill>
+                            <a:srgbClr val="1D2B30"/>
+                          </a:solidFill>
+                          <a:latin typeface="Calibri" pitchFamily="34" charset="0"/>
+                          <a:ea typeface="Calibri" pitchFamily="34" charset="-122"/>
+                          <a:cs typeface="Calibri" pitchFamily="34" charset="-120"/>
+                        </a:rPr>
+                        <a:t>0.70</a:t>
+                      </a:r>
+                      <a:endParaRPr lang="en-US" sz="900" dirty="0">
+                        <a:latin typeface="Calibri" charset="0"/>
+                        <a:ea typeface="Calibri" charset="0"/>
+                        <a:cs typeface="Calibri" charset="0"/>
+                      </a:endParaRPr>
+                    </a:p>
+                  </a:txBody>
+                  <a:tcPr marL="38100" marR="38100" marT="25400" marB="25400" anchor="ctr">
+                    <a:lnL w="6350" cap="flat" cmpd="sng" algn="ctr">
+                      <a:solidFill>
+                        <a:srgbClr val="DCE7E5"/>
+                      </a:solidFill>
+                      <a:prstDash val="solid"/>
+                      <a:round/>
+                      <a:headEnd type="none" w="med" len="med"/>
+                      <a:tailEnd type="none" w="med" len="med"/>
+                    </a:lnL>
+                    <a:lnR w="6350" cap="flat" cmpd="sng" algn="ctr">
+                      <a:solidFill>
+                        <a:srgbClr val="DCE7E5"/>
+                      </a:solidFill>
+                      <a:prstDash val="solid"/>
+                      <a:round/>
+                      <a:headEnd type="none" w="med" len="med"/>
+                      <a:tailEnd type="none" w="med" len="med"/>
+                    </a:lnR>
+                    <a:lnT w="6350" cap="flat" cmpd="sng" algn="ctr">
+                      <a:solidFill>
+                        <a:srgbClr val="DCE7E5"/>
+                      </a:solidFill>
+                      <a:prstDash val="solid"/>
+                      <a:round/>
+                      <a:headEnd type="none" w="med" len="med"/>
+                      <a:tailEnd type="none" w="med" len="med"/>
+                    </a:lnT>
+                    <a:lnB w="6350" cap="flat" cmpd="sng" algn="ctr">
+                      <a:solidFill>
+                        <a:srgbClr val="DCE7E5"/>
+                      </a:solidFill>
+                      <a:prstDash val="solid"/>
+                      <a:round/>
+                      <a:headEnd type="none" w="med" len="med"/>
+                      <a:tailEnd type="none" w="med" len="med"/>
+                    </a:lnB>
+                    <a:solidFill>
+                      <a:srgbClr val="FFFFFF"/>
+                    </a:solidFill>
+                  </a:tcPr>
+                </a:tc>
+                <a:tc>
+                  <a:txBody>
+                    <a:bodyPr/>
+                    <a:lstStyle/>
+                    <a:p>
+                      <a:pPr algn="ctr" indent="0" marL="0">
+                        <a:buNone/>
+                      </a:pPr>
+                      <a:r>
+                        <a:rPr lang="en-US" sz="900" dirty="0">
+                          <a:solidFill>
+                            <a:srgbClr val="1D2B30"/>
+                          </a:solidFill>
+                          <a:latin typeface="Calibri" pitchFamily="34" charset="0"/>
+                          <a:ea typeface="Calibri" pitchFamily="34" charset="-122"/>
+                          <a:cs typeface="Calibri" pitchFamily="34" charset="-120"/>
+                        </a:rPr>
+                        <a:t>1.00</a:t>
+                      </a:r>
+                      <a:endParaRPr lang="en-US" sz="900" dirty="0">
+                        <a:latin typeface="Calibri" charset="0"/>
+                        <a:ea typeface="Calibri" charset="0"/>
+                        <a:cs typeface="Calibri" charset="0"/>
+                      </a:endParaRPr>
+                    </a:p>
+                  </a:txBody>
+                  <a:tcPr marL="38100" marR="38100" marT="25400" marB="25400" anchor="ctr">
+                    <a:lnL w="6350" cap="flat" cmpd="sng" algn="ctr">
+                      <a:solidFill>
+                        <a:srgbClr val="DCE7E5"/>
+                      </a:solidFill>
+                      <a:prstDash val="solid"/>
+                      <a:round/>
+                      <a:headEnd type="none" w="med" len="med"/>
+                      <a:tailEnd type="none" w="med" len="med"/>
+                    </a:lnL>
+                    <a:lnR w="6350" cap="flat" cmpd="sng" algn="ctr">
+                      <a:solidFill>
+                        <a:srgbClr val="DCE7E5"/>
+                      </a:solidFill>
+                      <a:prstDash val="solid"/>
+                      <a:round/>
+                      <a:headEnd type="none" w="med" len="med"/>
+                      <a:tailEnd type="none" w="med" len="med"/>
+                    </a:lnR>
+                    <a:lnT w="6350" cap="flat" cmpd="sng" algn="ctr">
+                      <a:solidFill>
+                        <a:srgbClr val="DCE7E5"/>
+                      </a:solidFill>
+                      <a:prstDash val="solid"/>
+                      <a:round/>
+                      <a:headEnd type="none" w="med" len="med"/>
+                      <a:tailEnd type="none" w="med" len="med"/>
+                    </a:lnT>
+                    <a:lnB w="6350" cap="flat" cmpd="sng" algn="ctr">
+                      <a:solidFill>
+                        <a:srgbClr val="DCE7E5"/>
+                      </a:solidFill>
+                      <a:prstDash val="solid"/>
+                      <a:round/>
+                      <a:headEnd type="none" w="med" len="med"/>
+                      <a:tailEnd type="none" w="med" len="med"/>
+                    </a:lnB>
+                    <a:solidFill>
+                      <a:srgbClr val="FFFFFF"/>
+                    </a:solidFill>
+                  </a:tcPr>
+                </a:tc>
+                <a:tc>
+                  <a:txBody>
+                    <a:bodyPr/>
+                    <a:lstStyle/>
+                    <a:p>
+                      <a:pPr algn="ctr" indent="0" marL="0">
+                        <a:buNone/>
+                      </a:pPr>
+                      <a:r>
+                        <a:rPr lang="en-US" sz="900" dirty="0">
+                          <a:solidFill>
+                            <a:srgbClr val="1D2B30"/>
+                          </a:solidFill>
+                          <a:latin typeface="Calibri" pitchFamily="34" charset="0"/>
+                          <a:ea typeface="Calibri" pitchFamily="34" charset="-122"/>
+                          <a:cs typeface="Calibri" pitchFamily="34" charset="-120"/>
+                        </a:rPr>
+                        <a:t>0.55</a:t>
+                      </a:r>
+                      <a:endParaRPr lang="en-US" sz="900" dirty="0">
+                        <a:latin typeface="Calibri" charset="0"/>
+                        <a:ea typeface="Calibri" charset="0"/>
+                        <a:cs typeface="Calibri" charset="0"/>
+                      </a:endParaRPr>
+                    </a:p>
+                  </a:txBody>
+                  <a:tcPr marL="38100" marR="38100" marT="25400" marB="25400" anchor="ctr">
+                    <a:lnL w="6350" cap="flat" cmpd="sng" algn="ctr">
+                      <a:solidFill>
+                        <a:srgbClr val="DCE7E5"/>
+                      </a:solidFill>
+                      <a:prstDash val="solid"/>
+                      <a:round/>
+                      <a:headEnd type="none" w="med" len="med"/>
+                      <a:tailEnd type="none" w="med" len="med"/>
+                    </a:lnL>
+                    <a:lnR w="6350" cap="flat" cmpd="sng" algn="ctr">
+                      <a:solidFill>
+                        <a:srgbClr val="DCE7E5"/>
+                      </a:solidFill>
+                      <a:prstDash val="solid"/>
+                      <a:round/>
+                      <a:headEnd type="none" w="med" len="med"/>
+                      <a:tailEnd type="none" w="med" len="med"/>
+                    </a:lnR>
+                    <a:lnT w="6350" cap="flat" cmpd="sng" algn="ctr">
+                      <a:solidFill>
+                        <a:srgbClr val="DCE7E5"/>
+                      </a:solidFill>
+                      <a:prstDash val="solid"/>
+                      <a:round/>
+                      <a:headEnd type="none" w="med" len="med"/>
+                      <a:tailEnd type="none" w="med" len="med"/>
+                    </a:lnT>
+                    <a:lnB w="6350" cap="flat" cmpd="sng" algn="ctr">
+                      <a:solidFill>
+                        <a:srgbClr val="DCE7E5"/>
+                      </a:solidFill>
+                      <a:prstDash val="solid"/>
+                      <a:round/>
+                      <a:headEnd type="none" w="med" len="med"/>
+                      <a:tailEnd type="none" w="med" len="med"/>
+                    </a:lnB>
+                    <a:solidFill>
+                      <a:srgbClr val="FFFFFF"/>
+                    </a:solidFill>
+                  </a:tcPr>
+                </a:tc>
+                <a:tc>
+                  <a:txBody>
+                    <a:bodyPr/>
+                    <a:lstStyle/>
+                    <a:p>
+                      <a:pPr algn="ctr" indent="0" marL="0">
+                        <a:buNone/>
+                      </a:pPr>
+                      <a:r>
+                        <a:rPr lang="en-US" sz="900" dirty="0">
+                          <a:solidFill>
+                            <a:srgbClr val="1D2B30"/>
+                          </a:solidFill>
+                          <a:latin typeface="Calibri" pitchFamily="34" charset="0"/>
+                          <a:ea typeface="Calibri" pitchFamily="34" charset="-122"/>
+                          <a:cs typeface="Calibri" pitchFamily="34" charset="-120"/>
+                        </a:rPr>
+                        <a:t>0.45</a:t>
                       </a:r>
                       <a:endParaRPr lang="en-US" sz="900" dirty="0">
                         <a:latin typeface="Calibri" charset="0"/>
@@ -25030,7 +25576,7 @@
                           <a:ea typeface="Calibri" pitchFamily="34" charset="-122"/>
                           <a:cs typeface="Calibri" pitchFamily="34" charset="-120"/>
                         </a:rPr>
-                        <a:t>30%</a:t>
+                        <a:t>20%</a:t>
                       </a:r>
                       <a:endParaRPr lang="en-US" sz="900" dirty="0">
                         <a:latin typeface="Calibri" charset="0"/>
@@ -25234,7 +25780,75 @@
                           <a:ea typeface="Calibri" pitchFamily="34" charset="-122"/>
                           <a:cs typeface="Calibri" pitchFamily="34" charset="-120"/>
                         </a:rPr>
-                        <a:t>0.45</a:t>
+                        <a:t>0.60</a:t>
+                      </a:r>
+                      <a:endParaRPr lang="en-US" sz="900" dirty="0">
+                        <a:latin typeface="Calibri" charset="0"/>
+                        <a:ea typeface="Calibri" charset="0"/>
+                        <a:cs typeface="Calibri" charset="0"/>
+                      </a:endParaRPr>
+                    </a:p>
+                  </a:txBody>
+                  <a:tcPr marL="38100" marR="38100" marT="25400" marB="25400" anchor="ctr">
+                    <a:lnL w="6350" cap="flat" cmpd="sng" algn="ctr">
+                      <a:solidFill>
+                        <a:srgbClr val="DCE7E5"/>
+                      </a:solidFill>
+                      <a:prstDash val="solid"/>
+                      <a:round/>
+                      <a:headEnd type="none" w="med" len="med"/>
+                      <a:tailEnd type="none" w="med" len="med"/>
+                    </a:lnL>
+                    <a:lnR w="6350" cap="flat" cmpd="sng" algn="ctr">
+                      <a:solidFill>
+                        <a:srgbClr val="DCE7E5"/>
+                      </a:solidFill>
+                      <a:prstDash val="solid"/>
+                      <a:round/>
+                      <a:headEnd type="none" w="med" len="med"/>
+                      <a:tailEnd type="none" w="med" len="med"/>
+                    </a:lnR>
+                    <a:lnT w="6350" cap="flat" cmpd="sng" algn="ctr">
+                      <a:solidFill>
+                        <a:srgbClr val="DCE7E5"/>
+                      </a:solidFill>
+                      <a:prstDash val="solid"/>
+                      <a:round/>
+                      <a:headEnd type="none" w="med" len="med"/>
+                      <a:tailEnd type="none" w="med" len="med"/>
+                    </a:lnT>
+                    <a:lnB w="6350" cap="flat" cmpd="sng" algn="ctr">
+                      <a:solidFill>
+                        <a:srgbClr val="DCE7E5"/>
+                      </a:solidFill>
+                      <a:prstDash val="solid"/>
+                      <a:round/>
+                      <a:headEnd type="none" w="med" len="med"/>
+                      <a:tailEnd type="none" w="med" len="med"/>
+                    </a:lnB>
+                    <a:solidFill>
+                      <a:srgbClr val="FFFFFF"/>
+                    </a:solidFill>
+                  </a:tcPr>
+                </a:tc>
+                <a:tc>
+                  <a:txBody>
+                    <a:bodyPr/>
+                    <a:lstStyle/>
+                    <a:p>
+                      <a:pPr algn="ctr" indent="0" marL="0">
+                        <a:buNone/>
+                      </a:pPr>
+                      <a:r>
+                        <a:rPr lang="en-US" sz="900" dirty="0">
+                          <a:solidFill>
+                            <a:srgbClr val="1D2B30"/>
+                          </a:solidFill>
+                          <a:latin typeface="Calibri" pitchFamily="34" charset="0"/>
+                          <a:ea typeface="Calibri" pitchFamily="34" charset="-122"/>
+                          <a:cs typeface="Calibri" pitchFamily="34" charset="-120"/>
+                        </a:rPr>
+                        <a:t>0.55</a:t>
                       </a:r>
                       <a:endParaRPr lang="en-US" sz="900" dirty="0">
                         <a:latin typeface="Calibri" charset="0"/>
@@ -25370,75 +25984,7 @@
                           <a:ea typeface="Calibri" pitchFamily="34" charset="-122"/>
                           <a:cs typeface="Calibri" pitchFamily="34" charset="-120"/>
                         </a:rPr>
-                        <a:t>0.60</a:t>
-                      </a:r>
-                      <a:endParaRPr lang="en-US" sz="900" dirty="0">
-                        <a:latin typeface="Calibri" charset="0"/>
-                        <a:ea typeface="Calibri" charset="0"/>
-                        <a:cs typeface="Calibri" charset="0"/>
-                      </a:endParaRPr>
-                    </a:p>
-                  </a:txBody>
-                  <a:tcPr marL="38100" marR="38100" marT="25400" marB="25400" anchor="ctr">
-                    <a:lnL w="6350" cap="flat" cmpd="sng" algn="ctr">
-                      <a:solidFill>
-                        <a:srgbClr val="DCE7E5"/>
-                      </a:solidFill>
-                      <a:prstDash val="solid"/>
-                      <a:round/>
-                      <a:headEnd type="none" w="med" len="med"/>
-                      <a:tailEnd type="none" w="med" len="med"/>
-                    </a:lnL>
-                    <a:lnR w="6350" cap="flat" cmpd="sng" algn="ctr">
-                      <a:solidFill>
-                        <a:srgbClr val="DCE7E5"/>
-                      </a:solidFill>
-                      <a:prstDash val="solid"/>
-                      <a:round/>
-                      <a:headEnd type="none" w="med" len="med"/>
-                      <a:tailEnd type="none" w="med" len="med"/>
-                    </a:lnR>
-                    <a:lnT w="6350" cap="flat" cmpd="sng" algn="ctr">
-                      <a:solidFill>
-                        <a:srgbClr val="DCE7E5"/>
-                      </a:solidFill>
-                      <a:prstDash val="solid"/>
-                      <a:round/>
-                      <a:headEnd type="none" w="med" len="med"/>
-                      <a:tailEnd type="none" w="med" len="med"/>
-                    </a:lnT>
-                    <a:lnB w="6350" cap="flat" cmpd="sng" algn="ctr">
-                      <a:solidFill>
-                        <a:srgbClr val="DCE7E5"/>
-                      </a:solidFill>
-                      <a:prstDash val="solid"/>
-                      <a:round/>
-                      <a:headEnd type="none" w="med" len="med"/>
-                      <a:tailEnd type="none" w="med" len="med"/>
-                    </a:lnB>
-                    <a:solidFill>
-                      <a:srgbClr val="FFFFFF"/>
-                    </a:solidFill>
-                  </a:tcPr>
-                </a:tc>
-                <a:tc>
-                  <a:txBody>
-                    <a:bodyPr/>
-                    <a:lstStyle/>
-                    <a:p>
-                      <a:pPr algn="ctr" indent="0" marL="0">
-                        <a:buNone/>
-                      </a:pPr>
-                      <a:r>
-                        <a:rPr lang="en-US" sz="900" dirty="0">
-                          <a:solidFill>
-                            <a:srgbClr val="1D2B30"/>
-                          </a:solidFill>
-                          <a:latin typeface="Calibri" pitchFamily="34" charset="0"/>
-                          <a:ea typeface="Calibri" pitchFamily="34" charset="-122"/>
-                          <a:cs typeface="Calibri" pitchFamily="34" charset="-120"/>
-                        </a:rPr>
-                        <a:t>0.35</a:t>
+                        <a:t>0.40</a:t>
                       </a:r>
                       <a:endParaRPr lang="en-US" sz="900" dirty="0">
                         <a:latin typeface="Calibri" charset="0"/>
@@ -25508,7 +26054,7 @@
                           <a:ea typeface="Calibri" pitchFamily="34" charset="-122"/>
                           <a:cs typeface="Calibri" pitchFamily="34" charset="-120"/>
                         </a:rPr>
-                        <a:t>TWSE</a:t>
+                        <a:t>SOX</a:t>
                       </a:r>
                       <a:endParaRPr lang="en-US" sz="900" dirty="0">
                         <a:latin typeface="Calibri" charset="0"/>
@@ -25576,7 +26122,7 @@
                           <a:ea typeface="Calibri" pitchFamily="34" charset="-122"/>
                           <a:cs typeface="Calibri" pitchFamily="34" charset="-120"/>
                         </a:rPr>
-                        <a:t>25%</a:t>
+                        <a:t>20%</a:t>
                       </a:r>
                       <a:endParaRPr lang="en-US" sz="900" dirty="0">
                         <a:latin typeface="Calibri" charset="0"/>
@@ -25644,7 +26190,7 @@
                           <a:ea typeface="Calibri" pitchFamily="34" charset="-122"/>
                           <a:cs typeface="Calibri" pitchFamily="34" charset="-120"/>
                         </a:rPr>
-                        <a:t>22%</a:t>
+                        <a:t>35%</a:t>
                       </a:r>
                       <a:endParaRPr lang="en-US" sz="900" dirty="0">
                         <a:latin typeface="Calibri" charset="0"/>
@@ -25712,7 +26258,7 @@
                           <a:ea typeface="Calibri" pitchFamily="34" charset="-122"/>
                           <a:cs typeface="Calibri" pitchFamily="34" charset="-120"/>
                         </a:rPr>
-                        <a:t>2.8%</a:t>
+                        <a:t>0.8%</a:t>
                       </a:r>
                       <a:endParaRPr lang="en-US" sz="900" dirty="0">
                         <a:latin typeface="Calibri" charset="0"/>
@@ -25848,7 +26394,7 @@
                           <a:ea typeface="Calibri" pitchFamily="34" charset="-122"/>
                           <a:cs typeface="Calibri" pitchFamily="34" charset="-120"/>
                         </a:rPr>
-                        <a:t>0.60</a:t>
+                        <a:t>0.45</a:t>
                       </a:r>
                       <a:endParaRPr lang="en-US" sz="900" dirty="0">
                         <a:latin typeface="Calibri" charset="0"/>
@@ -25916,553 +26462,7 @@
                           <a:ea typeface="Calibri" pitchFamily="34" charset="-122"/>
                           <a:cs typeface="Calibri" pitchFamily="34" charset="-120"/>
                         </a:rPr>
-                        <a:t>1.00</a:t>
-                      </a:r>
-                      <a:endParaRPr lang="en-US" sz="900" dirty="0">
-                        <a:latin typeface="Calibri" charset="0"/>
-                        <a:ea typeface="Calibri" charset="0"/>
-                        <a:cs typeface="Calibri" charset="0"/>
-                      </a:endParaRPr>
-                    </a:p>
-                  </a:txBody>
-                  <a:tcPr marL="38100" marR="38100" marT="25400" marB="25400" anchor="ctr">
-                    <a:lnL w="6350" cap="flat" cmpd="sng" algn="ctr">
-                      <a:solidFill>
-                        <a:srgbClr val="DCE7E5"/>
-                      </a:solidFill>
-                      <a:prstDash val="solid"/>
-                      <a:round/>
-                      <a:headEnd type="none" w="med" len="med"/>
-                      <a:tailEnd type="none" w="med" len="med"/>
-                    </a:lnL>
-                    <a:lnR w="6350" cap="flat" cmpd="sng" algn="ctr">
-                      <a:solidFill>
-                        <a:srgbClr val="DCE7E5"/>
-                      </a:solidFill>
-                      <a:prstDash val="solid"/>
-                      <a:round/>
-                      <a:headEnd type="none" w="med" len="med"/>
-                      <a:tailEnd type="none" w="med" len="med"/>
-                    </a:lnR>
-                    <a:lnT w="6350" cap="flat" cmpd="sng" algn="ctr">
-                      <a:solidFill>
-                        <a:srgbClr val="DCE7E5"/>
-                      </a:solidFill>
-                      <a:prstDash val="solid"/>
-                      <a:round/>
-                      <a:headEnd type="none" w="med" len="med"/>
-                      <a:tailEnd type="none" w="med" len="med"/>
-                    </a:lnT>
-                    <a:lnB w="6350" cap="flat" cmpd="sng" algn="ctr">
-                      <a:solidFill>
-                        <a:srgbClr val="DCE7E5"/>
-                      </a:solidFill>
-                      <a:prstDash val="solid"/>
-                      <a:round/>
-                      <a:headEnd type="none" w="med" len="med"/>
-                      <a:tailEnd type="none" w="med" len="med"/>
-                    </a:lnB>
-                    <a:solidFill>
-                      <a:srgbClr val="FFFFFF"/>
-                    </a:solidFill>
-                  </a:tcPr>
-                </a:tc>
-                <a:tc>
-                  <a:txBody>
-                    <a:bodyPr/>
-                    <a:lstStyle/>
-                    <a:p>
-                      <a:pPr algn="ctr" indent="0" marL="0">
-                        <a:buNone/>
-                      </a:pPr>
-                      <a:r>
-                        <a:rPr lang="en-US" sz="900" dirty="0">
-                          <a:solidFill>
-                            <a:srgbClr val="1D2B30"/>
-                          </a:solidFill>
-                          <a:latin typeface="Calibri" pitchFamily="34" charset="0"/>
-                          <a:ea typeface="Calibri" pitchFamily="34" charset="-122"/>
-                          <a:cs typeface="Calibri" pitchFamily="34" charset="-120"/>
-                        </a:rPr>
-                        <a:t>0.35</a:t>
-                      </a:r>
-                      <a:endParaRPr lang="en-US" sz="900" dirty="0">
-                        <a:latin typeface="Calibri" charset="0"/>
-                        <a:ea typeface="Calibri" charset="0"/>
-                        <a:cs typeface="Calibri" charset="0"/>
-                      </a:endParaRPr>
-                    </a:p>
-                  </a:txBody>
-                  <a:tcPr marL="38100" marR="38100" marT="25400" marB="25400" anchor="ctr">
-                    <a:lnL w="6350" cap="flat" cmpd="sng" algn="ctr">
-                      <a:solidFill>
-                        <a:srgbClr val="DCE7E5"/>
-                      </a:solidFill>
-                      <a:prstDash val="solid"/>
-                      <a:round/>
-                      <a:headEnd type="none" w="med" len="med"/>
-                      <a:tailEnd type="none" w="med" len="med"/>
-                    </a:lnL>
-                    <a:lnR w="6350" cap="flat" cmpd="sng" algn="ctr">
-                      <a:solidFill>
-                        <a:srgbClr val="DCE7E5"/>
-                      </a:solidFill>
-                      <a:prstDash val="solid"/>
-                      <a:round/>
-                      <a:headEnd type="none" w="med" len="med"/>
-                      <a:tailEnd type="none" w="med" len="med"/>
-                    </a:lnR>
-                    <a:lnT w="6350" cap="flat" cmpd="sng" algn="ctr">
-                      <a:solidFill>
-                        <a:srgbClr val="DCE7E5"/>
-                      </a:solidFill>
-                      <a:prstDash val="solid"/>
-                      <a:round/>
-                      <a:headEnd type="none" w="med" len="med"/>
-                      <a:tailEnd type="none" w="med" len="med"/>
-                    </a:lnT>
-                    <a:lnB w="6350" cap="flat" cmpd="sng" algn="ctr">
-                      <a:solidFill>
-                        <a:srgbClr val="DCE7E5"/>
-                      </a:solidFill>
-                      <a:prstDash val="solid"/>
-                      <a:round/>
-                      <a:headEnd type="none" w="med" len="med"/>
-                      <a:tailEnd type="none" w="med" len="med"/>
-                    </a:lnB>
-                    <a:solidFill>
-                      <a:srgbClr val="FFFFFF"/>
-                    </a:solidFill>
-                  </a:tcPr>
-                </a:tc>
-              </a:tr>
-              <a:tr h="274320">
-                <a:tc>
-                  <a:txBody>
-                    <a:bodyPr/>
-                    <a:lstStyle/>
-                    <a:p>
-                      <a:pPr algn="ctr" indent="0" marL="0">
-                        <a:buNone/>
-                      </a:pPr>
-                      <a:r>
-                        <a:rPr lang="en-US" sz="900" b="1" dirty="0">
-                          <a:solidFill>
-                            <a:srgbClr val="1D2B30"/>
-                          </a:solidFill>
-                          <a:latin typeface="Calibri" pitchFamily="34" charset="0"/>
-                          <a:ea typeface="Calibri" pitchFamily="34" charset="-122"/>
-                          <a:cs typeface="Calibri" pitchFamily="34" charset="-120"/>
-                        </a:rPr>
-                        <a:t>MXAP0UT</a:t>
-                      </a:r>
-                      <a:endParaRPr lang="en-US" sz="900" dirty="0">
-                        <a:latin typeface="Calibri" charset="0"/>
-                        <a:ea typeface="Calibri" charset="0"/>
-                        <a:cs typeface="Calibri" charset="0"/>
-                      </a:endParaRPr>
-                    </a:p>
-                  </a:txBody>
-                  <a:tcPr marL="38100" marR="38100" marT="25400" marB="25400" anchor="ctr">
-                    <a:lnL w="6350" cap="flat" cmpd="sng" algn="ctr">
-                      <a:solidFill>
-                        <a:srgbClr val="DCE7E5"/>
-                      </a:solidFill>
-                      <a:prstDash val="solid"/>
-                      <a:round/>
-                      <a:headEnd type="none" w="med" len="med"/>
-                      <a:tailEnd type="none" w="med" len="med"/>
-                    </a:lnL>
-                    <a:lnR w="6350" cap="flat" cmpd="sng" algn="ctr">
-                      <a:solidFill>
-                        <a:srgbClr val="DCE7E5"/>
-                      </a:solidFill>
-                      <a:prstDash val="solid"/>
-                      <a:round/>
-                      <a:headEnd type="none" w="med" len="med"/>
-                      <a:tailEnd type="none" w="med" len="med"/>
-                    </a:lnR>
-                    <a:lnT w="6350" cap="flat" cmpd="sng" algn="ctr">
-                      <a:solidFill>
-                        <a:srgbClr val="DCE7E5"/>
-                      </a:solidFill>
-                      <a:prstDash val="solid"/>
-                      <a:round/>
-                      <a:headEnd type="none" w="med" len="med"/>
-                      <a:tailEnd type="none" w="med" len="med"/>
-                    </a:lnT>
-                    <a:lnB w="6350" cap="flat" cmpd="sng" algn="ctr">
-                      <a:solidFill>
-                        <a:srgbClr val="DCE7E5"/>
-                      </a:solidFill>
-                      <a:prstDash val="solid"/>
-                      <a:round/>
-                      <a:headEnd type="none" w="med" len="med"/>
-                      <a:tailEnd type="none" w="med" len="med"/>
-                    </a:lnB>
-                    <a:solidFill>
-                      <a:srgbClr val="FFFFFF"/>
-                    </a:solidFill>
-                  </a:tcPr>
-                </a:tc>
-                <a:tc>
-                  <a:txBody>
-                    <a:bodyPr/>
-                    <a:lstStyle/>
-                    <a:p>
-                      <a:pPr algn="ctr" indent="0" marL="0">
-                        <a:buNone/>
-                      </a:pPr>
-                      <a:r>
-                        <a:rPr lang="en-US" sz="900" dirty="0">
-                          <a:solidFill>
-                            <a:srgbClr val="1D2B30"/>
-                          </a:solidFill>
-                          <a:latin typeface="Calibri" pitchFamily="34" charset="0"/>
-                          <a:ea typeface="Calibri" pitchFamily="34" charset="-122"/>
-                          <a:cs typeface="Calibri" pitchFamily="34" charset="-120"/>
-                        </a:rPr>
-                        <a:t>15%</a:t>
-                      </a:r>
-                      <a:endParaRPr lang="en-US" sz="900" dirty="0">
-                        <a:latin typeface="Calibri" charset="0"/>
-                        <a:ea typeface="Calibri" charset="0"/>
-                        <a:cs typeface="Calibri" charset="0"/>
-                      </a:endParaRPr>
-                    </a:p>
-                  </a:txBody>
-                  <a:tcPr marL="38100" marR="38100" marT="25400" marB="25400" anchor="ctr">
-                    <a:lnL w="6350" cap="flat" cmpd="sng" algn="ctr">
-                      <a:solidFill>
-                        <a:srgbClr val="DCE7E5"/>
-                      </a:solidFill>
-                      <a:prstDash val="solid"/>
-                      <a:round/>
-                      <a:headEnd type="none" w="med" len="med"/>
-                      <a:tailEnd type="none" w="med" len="med"/>
-                    </a:lnL>
-                    <a:lnR w="6350" cap="flat" cmpd="sng" algn="ctr">
-                      <a:solidFill>
-                        <a:srgbClr val="DCE7E5"/>
-                      </a:solidFill>
-                      <a:prstDash val="solid"/>
-                      <a:round/>
-                      <a:headEnd type="none" w="med" len="med"/>
-                      <a:tailEnd type="none" w="med" len="med"/>
-                    </a:lnR>
-                    <a:lnT w="6350" cap="flat" cmpd="sng" algn="ctr">
-                      <a:solidFill>
-                        <a:srgbClr val="DCE7E5"/>
-                      </a:solidFill>
-                      <a:prstDash val="solid"/>
-                      <a:round/>
-                      <a:headEnd type="none" w="med" len="med"/>
-                      <a:tailEnd type="none" w="med" len="med"/>
-                    </a:lnT>
-                    <a:lnB w="6350" cap="flat" cmpd="sng" algn="ctr">
-                      <a:solidFill>
-                        <a:srgbClr val="DCE7E5"/>
-                      </a:solidFill>
-                      <a:prstDash val="solid"/>
-                      <a:round/>
-                      <a:headEnd type="none" w="med" len="med"/>
-                      <a:tailEnd type="none" w="med" len="med"/>
-                    </a:lnB>
-                    <a:solidFill>
-                      <a:srgbClr val="FFFFFF"/>
-                    </a:solidFill>
-                  </a:tcPr>
-                </a:tc>
-                <a:tc>
-                  <a:txBody>
-                    <a:bodyPr/>
-                    <a:lstStyle/>
-                    <a:p>
-                      <a:pPr algn="ctr" indent="0" marL="0">
-                        <a:buNone/>
-                      </a:pPr>
-                      <a:r>
-                        <a:rPr lang="en-US" sz="900" dirty="0">
-                          <a:solidFill>
-                            <a:srgbClr val="1D2B30"/>
-                          </a:solidFill>
-                          <a:latin typeface="Calibri" pitchFamily="34" charset="0"/>
-                          <a:ea typeface="Calibri" pitchFamily="34" charset="-122"/>
-                          <a:cs typeface="Calibri" pitchFamily="34" charset="-120"/>
-                        </a:rPr>
-                        <a:t>14%</a:t>
-                      </a:r>
-                      <a:endParaRPr lang="en-US" sz="900" dirty="0">
-                        <a:latin typeface="Calibri" charset="0"/>
-                        <a:ea typeface="Calibri" charset="0"/>
-                        <a:cs typeface="Calibri" charset="0"/>
-                      </a:endParaRPr>
-                    </a:p>
-                  </a:txBody>
-                  <a:tcPr marL="38100" marR="38100" marT="25400" marB="25400" anchor="ctr">
-                    <a:lnL w="6350" cap="flat" cmpd="sng" algn="ctr">
-                      <a:solidFill>
-                        <a:srgbClr val="DCE7E5"/>
-                      </a:solidFill>
-                      <a:prstDash val="solid"/>
-                      <a:round/>
-                      <a:headEnd type="none" w="med" len="med"/>
-                      <a:tailEnd type="none" w="med" len="med"/>
-                    </a:lnL>
-                    <a:lnR w="6350" cap="flat" cmpd="sng" algn="ctr">
-                      <a:solidFill>
-                        <a:srgbClr val="DCE7E5"/>
-                      </a:solidFill>
-                      <a:prstDash val="solid"/>
-                      <a:round/>
-                      <a:headEnd type="none" w="med" len="med"/>
-                      <a:tailEnd type="none" w="med" len="med"/>
-                    </a:lnR>
-                    <a:lnT w="6350" cap="flat" cmpd="sng" algn="ctr">
-                      <a:solidFill>
-                        <a:srgbClr val="DCE7E5"/>
-                      </a:solidFill>
-                      <a:prstDash val="solid"/>
-                      <a:round/>
-                      <a:headEnd type="none" w="med" len="med"/>
-                      <a:tailEnd type="none" w="med" len="med"/>
-                    </a:lnT>
-                    <a:lnB w="6350" cap="flat" cmpd="sng" algn="ctr">
-                      <a:solidFill>
-                        <a:srgbClr val="DCE7E5"/>
-                      </a:solidFill>
-                      <a:prstDash val="solid"/>
-                      <a:round/>
-                      <a:headEnd type="none" w="med" len="med"/>
-                      <a:tailEnd type="none" w="med" len="med"/>
-                    </a:lnB>
-                    <a:solidFill>
-                      <a:srgbClr val="FFFFFF"/>
-                    </a:solidFill>
-                  </a:tcPr>
-                </a:tc>
-                <a:tc>
-                  <a:txBody>
-                    <a:bodyPr/>
-                    <a:lstStyle/>
-                    <a:p>
-                      <a:pPr algn="ctr" indent="0" marL="0">
-                        <a:buNone/>
-                      </a:pPr>
-                      <a:r>
-                        <a:rPr lang="en-US" sz="900" dirty="0">
-                          <a:solidFill>
-                            <a:srgbClr val="1D2B30"/>
-                          </a:solidFill>
-                          <a:latin typeface="Calibri" pitchFamily="34" charset="0"/>
-                          <a:ea typeface="Calibri" pitchFamily="34" charset="-122"/>
-                          <a:cs typeface="Calibri" pitchFamily="34" charset="-120"/>
-                        </a:rPr>
-                        <a:t>3.5%</a:t>
-                      </a:r>
-                      <a:endParaRPr lang="en-US" sz="900" dirty="0">
-                        <a:latin typeface="Calibri" charset="0"/>
-                        <a:ea typeface="Calibri" charset="0"/>
-                        <a:cs typeface="Calibri" charset="0"/>
-                      </a:endParaRPr>
-                    </a:p>
-                  </a:txBody>
-                  <a:tcPr marL="38100" marR="38100" marT="25400" marB="25400" anchor="ctr">
-                    <a:lnL w="6350" cap="flat" cmpd="sng" algn="ctr">
-                      <a:solidFill>
-                        <a:srgbClr val="DCE7E5"/>
-                      </a:solidFill>
-                      <a:prstDash val="solid"/>
-                      <a:round/>
-                      <a:headEnd type="none" w="med" len="med"/>
-                      <a:tailEnd type="none" w="med" len="med"/>
-                    </a:lnL>
-                    <a:lnR w="6350" cap="flat" cmpd="sng" algn="ctr">
-                      <a:solidFill>
-                        <a:srgbClr val="DCE7E5"/>
-                      </a:solidFill>
-                      <a:prstDash val="solid"/>
-                      <a:round/>
-                      <a:headEnd type="none" w="med" len="med"/>
-                      <a:tailEnd type="none" w="med" len="med"/>
-                    </a:lnR>
-                    <a:lnT w="6350" cap="flat" cmpd="sng" algn="ctr">
-                      <a:solidFill>
-                        <a:srgbClr val="DCE7E5"/>
-                      </a:solidFill>
-                      <a:prstDash val="solid"/>
-                      <a:round/>
-                      <a:headEnd type="none" w="med" len="med"/>
-                      <a:tailEnd type="none" w="med" len="med"/>
-                    </a:lnT>
-                    <a:lnB w="6350" cap="flat" cmpd="sng" algn="ctr">
-                      <a:solidFill>
-                        <a:srgbClr val="DCE7E5"/>
-                      </a:solidFill>
-                      <a:prstDash val="solid"/>
-                      <a:round/>
-                      <a:headEnd type="none" w="med" len="med"/>
-                      <a:tailEnd type="none" w="med" len="med"/>
-                    </a:lnB>
-                    <a:solidFill>
-                      <a:srgbClr val="FFFFFF"/>
-                    </a:solidFill>
-                  </a:tcPr>
-                </a:tc>
-                <a:tc>
-                  <a:txBody>
-                    <a:bodyPr/>
-                    <a:lstStyle/>
-                    <a:p>
-                      <a:pPr algn="ctr" indent="0" marL="0">
-                        <a:buNone/>
-                      </a:pPr>
-                      <a:r>
-                        <a:rPr lang="en-US" sz="900" dirty="0">
-                          <a:solidFill>
-                            <a:srgbClr val="1D2B30"/>
-                          </a:solidFill>
-                          <a:latin typeface="Calibri" pitchFamily="34" charset="0"/>
-                          <a:ea typeface="Calibri" pitchFamily="34" charset="-122"/>
-                          <a:cs typeface="Calibri" pitchFamily="34" charset="-120"/>
-                        </a:rPr>
-                        <a:t>0.35</a:t>
-                      </a:r>
-                      <a:endParaRPr lang="en-US" sz="900" dirty="0">
-                        <a:latin typeface="Calibri" charset="0"/>
-                        <a:ea typeface="Calibri" charset="0"/>
-                        <a:cs typeface="Calibri" charset="0"/>
-                      </a:endParaRPr>
-                    </a:p>
-                  </a:txBody>
-                  <a:tcPr marL="38100" marR="38100" marT="25400" marB="25400" anchor="ctr">
-                    <a:lnL w="6350" cap="flat" cmpd="sng" algn="ctr">
-                      <a:solidFill>
-                        <a:srgbClr val="DCE7E5"/>
-                      </a:solidFill>
-                      <a:prstDash val="solid"/>
-                      <a:round/>
-                      <a:headEnd type="none" w="med" len="med"/>
-                      <a:tailEnd type="none" w="med" len="med"/>
-                    </a:lnL>
-                    <a:lnR w="6350" cap="flat" cmpd="sng" algn="ctr">
-                      <a:solidFill>
-                        <a:srgbClr val="DCE7E5"/>
-                      </a:solidFill>
-                      <a:prstDash val="solid"/>
-                      <a:round/>
-                      <a:headEnd type="none" w="med" len="med"/>
-                      <a:tailEnd type="none" w="med" len="med"/>
-                    </a:lnR>
-                    <a:lnT w="6350" cap="flat" cmpd="sng" algn="ctr">
-                      <a:solidFill>
-                        <a:srgbClr val="DCE7E5"/>
-                      </a:solidFill>
-                      <a:prstDash val="solid"/>
-                      <a:round/>
-                      <a:headEnd type="none" w="med" len="med"/>
-                      <a:tailEnd type="none" w="med" len="med"/>
-                    </a:lnT>
-                    <a:lnB w="6350" cap="flat" cmpd="sng" algn="ctr">
-                      <a:solidFill>
-                        <a:srgbClr val="DCE7E5"/>
-                      </a:solidFill>
-                      <a:prstDash val="solid"/>
-                      <a:round/>
-                      <a:headEnd type="none" w="med" len="med"/>
-                      <a:tailEnd type="none" w="med" len="med"/>
-                    </a:lnB>
-                    <a:solidFill>
-                      <a:srgbClr val="FFFFFF"/>
-                    </a:solidFill>
-                  </a:tcPr>
-                </a:tc>
-                <a:tc>
-                  <a:txBody>
-                    <a:bodyPr/>
-                    <a:lstStyle/>
-                    <a:p>
-                      <a:pPr algn="ctr" indent="0" marL="0">
-                        <a:buNone/>
-                      </a:pPr>
-                      <a:r>
-                        <a:rPr lang="en-US" sz="900" dirty="0">
-                          <a:solidFill>
-                            <a:srgbClr val="1D2B30"/>
-                          </a:solidFill>
-                          <a:latin typeface="Calibri" pitchFamily="34" charset="0"/>
-                          <a:ea typeface="Calibri" pitchFamily="34" charset="-122"/>
-                          <a:cs typeface="Calibri" pitchFamily="34" charset="-120"/>
-                        </a:rPr>
-                        <a:t>0.35</a:t>
-                      </a:r>
-                      <a:endParaRPr lang="en-US" sz="900" dirty="0">
-                        <a:latin typeface="Calibri" charset="0"/>
-                        <a:ea typeface="Calibri" charset="0"/>
-                        <a:cs typeface="Calibri" charset="0"/>
-                      </a:endParaRPr>
-                    </a:p>
-                  </a:txBody>
-                  <a:tcPr marL="38100" marR="38100" marT="25400" marB="25400" anchor="ctr">
-                    <a:lnL w="6350" cap="flat" cmpd="sng" algn="ctr">
-                      <a:solidFill>
-                        <a:srgbClr val="DCE7E5"/>
-                      </a:solidFill>
-                      <a:prstDash val="solid"/>
-                      <a:round/>
-                      <a:headEnd type="none" w="med" len="med"/>
-                      <a:tailEnd type="none" w="med" len="med"/>
-                    </a:lnL>
-                    <a:lnR w="6350" cap="flat" cmpd="sng" algn="ctr">
-                      <a:solidFill>
-                        <a:srgbClr val="DCE7E5"/>
-                      </a:solidFill>
-                      <a:prstDash val="solid"/>
-                      <a:round/>
-                      <a:headEnd type="none" w="med" len="med"/>
-                      <a:tailEnd type="none" w="med" len="med"/>
-                    </a:lnR>
-                    <a:lnT w="6350" cap="flat" cmpd="sng" algn="ctr">
-                      <a:solidFill>
-                        <a:srgbClr val="DCE7E5"/>
-                      </a:solidFill>
-                      <a:prstDash val="solid"/>
-                      <a:round/>
-                      <a:headEnd type="none" w="med" len="med"/>
-                      <a:tailEnd type="none" w="med" len="med"/>
-                    </a:lnT>
-                    <a:lnB w="6350" cap="flat" cmpd="sng" algn="ctr">
-                      <a:solidFill>
-                        <a:srgbClr val="DCE7E5"/>
-                      </a:solidFill>
-                      <a:prstDash val="solid"/>
-                      <a:round/>
-                      <a:headEnd type="none" w="med" len="med"/>
-                      <a:tailEnd type="none" w="med" len="med"/>
-                    </a:lnB>
-                    <a:solidFill>
-                      <a:srgbClr val="FFFFFF"/>
-                    </a:solidFill>
-                  </a:tcPr>
-                </a:tc>
-                <a:tc>
-                  <a:txBody>
-                    <a:bodyPr/>
-                    <a:lstStyle/>
-                    <a:p>
-                      <a:pPr algn="ctr" indent="0" marL="0">
-                        <a:buNone/>
-                      </a:pPr>
-                      <a:r>
-                        <a:rPr lang="en-US" sz="900" dirty="0">
-                          <a:solidFill>
-                            <a:srgbClr val="1D2B30"/>
-                          </a:solidFill>
-                          <a:latin typeface="Calibri" pitchFamily="34" charset="0"/>
-                          <a:ea typeface="Calibri" pitchFamily="34" charset="-122"/>
-                          <a:cs typeface="Calibri" pitchFamily="34" charset="-120"/>
-                        </a:rPr>
-                        <a:t>0.35</a:t>
+                        <a:t>0.40</a:t>
                       </a:r>
                       <a:endParaRPr lang="en-US" sz="900" dirty="0">
                         <a:latin typeface="Calibri" charset="0"/>
@@ -27006,7 +27006,7 @@
                           <a:ea typeface="Calibri" pitchFamily="34" charset="-122"/>
                           <a:cs typeface="Calibri" pitchFamily="34" charset="-120"/>
                         </a:rPr>
-                        <a:t>6.9%</a:t>
+                        <a:t>7.1%</a:t>
                       </a:r>
                       <a:endParaRPr lang="en-US" sz="900" dirty="0">
                         <a:latin typeface="Calibri" charset="0"/>
@@ -27144,7 +27144,7 @@
                           <a:ea typeface="Calibri" pitchFamily="34" charset="-122"/>
                           <a:cs typeface="Calibri" pitchFamily="34" charset="-120"/>
                         </a:rPr>
-                        <a:t>6.3%</a:t>
+                        <a:t>6.5%</a:t>
                       </a:r>
                       <a:endParaRPr lang="en-US" sz="900" dirty="0">
                         <a:latin typeface="Calibri" charset="0"/>
@@ -27282,7 +27282,7 @@
                           <a:ea typeface="Calibri" pitchFamily="34" charset="-122"/>
                           <a:cs typeface="Calibri" pitchFamily="34" charset="-120"/>
                         </a:rPr>
-                        <a:t>5.7%</a:t>
+                        <a:t>6.0%</a:t>
                       </a:r>
                       <a:endParaRPr lang="en-US" sz="900" dirty="0">
                         <a:latin typeface="Calibri" charset="0"/>
@@ -27420,7 +27420,7 @@
                           <a:ea typeface="Calibri" pitchFamily="34" charset="-122"/>
                           <a:cs typeface="Calibri" pitchFamily="34" charset="-120"/>
                         </a:rPr>
-                        <a:t>7.1%</a:t>
+                        <a:t>7.3%</a:t>
                       </a:r>
                       <a:endParaRPr lang="en-US" sz="900" dirty="0">
                         <a:latin typeface="Calibri" charset="0"/>
@@ -27558,7 +27558,7 @@
                           <a:ea typeface="Calibri" pitchFamily="34" charset="-122"/>
                           <a:cs typeface="Calibri" pitchFamily="34" charset="-120"/>
                         </a:rPr>
-                        <a:t>7.5%</a:t>
+                        <a:t>7.7%</a:t>
                       </a:r>
                       <a:endParaRPr lang="en-US" sz="900" dirty="0">
                         <a:latin typeface="Calibri" charset="0"/>
@@ -27696,7 +27696,7 @@
                           <a:ea typeface="Calibri" pitchFamily="34" charset="-122"/>
                           <a:cs typeface="Calibri" pitchFamily="34" charset="-120"/>
                         </a:rPr>
-                        <a:t>8.1%</a:t>
+                        <a:t>8.2%</a:t>
                       </a:r>
                       <a:endParaRPr lang="en-US" sz="900" dirty="0">
                         <a:latin typeface="Calibri" charset="0"/>
@@ -27834,7 +27834,7 @@
                           <a:ea typeface="Calibri" pitchFamily="34" charset="-122"/>
                           <a:cs typeface="Calibri" pitchFamily="34" charset="-120"/>
                         </a:rPr>
-                        <a:t>7.2% / 6.6%</a:t>
+                        <a:t>7.4% / 6.8%</a:t>
                       </a:r>
                       <a:endParaRPr lang="en-US" sz="900" dirty="0">
                         <a:latin typeface="Calibri" charset="0"/>
@@ -28374,7 +28374,7 @@
                           <a:ea typeface="Calibri" pitchFamily="34" charset="-122"/>
                           <a:cs typeface="Calibri" pitchFamily="34" charset="-120"/>
                         </a:rPr>
-                        <a:t>6.5% p.a. memory coupon</a:t>
+                        <a:t>6.8% p.a. memory coupon</a:t>
                       </a:r>
                       <a:endParaRPr lang="en-US" sz="900" dirty="0">
                         <a:latin typeface="Calibri" charset="0"/>
@@ -28648,7 +28648,7 @@
                           <a:ea typeface="Calibri" pitchFamily="34" charset="-122"/>
                           <a:cs typeface="Calibri" pitchFamily="34" charset="-120"/>
                         </a:rPr>
-                        <a:t>7.7%</a:t>
+                        <a:t>9.8%</a:t>
                       </a:r>
                       <a:endParaRPr lang="en-US" sz="900" dirty="0">
                         <a:latin typeface="Calibri" charset="0"/>
@@ -28786,7 +28786,7 @@
                           <a:ea typeface="Calibri" pitchFamily="34" charset="-122"/>
                           <a:cs typeface="Calibri" pitchFamily="34" charset="-120"/>
                         </a:rPr>
-                        <a:t>102% of basket gain at Y5</a:t>
+                        <a:t>94% of basket gain at Y5</a:t>
                       </a:r>
                       <a:endParaRPr lang="en-US" sz="900" dirty="0">
                         <a:latin typeface="Calibri" charset="0"/>
@@ -28984,7 +28984,7 @@
                 <a:ea typeface="Calibri" pitchFamily="34" charset="-122"/>
                 <a:cs typeface="Calibri" pitchFamily="34" charset="-120"/>
               </a:rPr>
-              <a:t>The snowball pays 9% but loses capital in ~8% of paths. The PPN keeps full protection with uncapped upside, but pays nothing unless the basket ends above 100% after 5 years and has no early exit. Our note sits between them: full protection, a coupon above the funding rate, and money usually back within ~2 years.</a:t>
+              <a:t>The snowball pays 9% but loses capital in ~10% of paths. The PPN keeps full protection with uncapped upside, but pays nothing unless the basket ends above 100% after 5 years and has no early exit. Our note sits between them: full protection, a coupon above the funding rate, and money usually back within ~2 years.</a:t>
             </a:r>
             <a:endParaRPr lang="en-US" sz="950" dirty="0"/>
           </a:p>
@@ -30150,7 +30150,7 @@
                 <a:ea typeface="Cambria" pitchFamily="34" charset="-122"/>
                 <a:cs typeface="Cambria" pitchFamily="34" charset="-120"/>
               </a:rPr>
-              <a:t>6.5%</a:t>
+              <a:t>6.8%</a:t>
             </a:r>
             <a:endParaRPr lang="en-US" sz="3800" dirty="0"/>
           </a:p>
@@ -30228,7 +30228,7 @@
                 <a:ea typeface="Calibri" pitchFamily="34" charset="-122"/>
                 <a:cs typeface="Calibri" pitchFamily="34" charset="-120"/>
               </a:rPr>
-              <a:t>1.625% each quarter the basket is ≥ 100%; missed coupons are paid later when it recovers</a:t>
+              <a:t>1.70% each quarter the basket is ≥ 100%; missed coupons are paid later when it recovers</a:t>
             </a:r>
             <a:endParaRPr lang="en-US" sz="1050" dirty="0"/>
           </a:p>
@@ -30516,7 +30516,7 @@
                 <a:ea typeface="Calibri" pitchFamily="34" charset="-122"/>
                 <a:cs typeface="Calibri" pitchFamily="34" charset="-120"/>
               </a:rPr>
-              <a:t>Risk-neutral. 83% called within 5 years; expected life 2.08 years</a:t>
+              <a:t>Risk-neutral. 82% called within 5 years; expected life 2.11 years</a:t>
             </a:r>
             <a:endParaRPr lang="en-US" sz="1050" dirty="0"/>
           </a:p>
@@ -30583,7 +30583,7 @@
                 <a:ea typeface="Calibri" pitchFamily="34" charset="-122"/>
                 <a:cs typeface="Calibri" pitchFamily="34" charset="-120"/>
               </a:rPr>
-              <a:t> on a basket of four real, Bloomberg-listed Asian indices (Hang Seng TECH 30%, Nikkei 225 30%, TAIEX 25%, MSCI AC Asia Pacific Utilities 15%). These mirror the family's businesses in Greater China real estate, Japan technology infrastructure and renewable power. </a:t>
+              <a:t> on a semiconductor-heavy basket of four real, Bloomberg-listed indices (Taiwan TAIEX 35%, KOSPI 200 25%, Nikkei 225 20%, PHLX Semiconductor 20%). It gives the family the AI hardware layer (chips, memory and chip-making equipment) that complements, rather than duplicates, the infrastructure, power and property they already own. </a:t>
             </a:r>
             <a:pPr indent="0" marL="0">
               <a:buNone/>
@@ -30597,7 +30597,7 @@
                 <a:ea typeface="Calibri" pitchFamily="34" charset="-122"/>
                 <a:cs typeface="Calibri" pitchFamily="34" charset="-120"/>
               </a:rPr>
-              <a:t>The family never loses capital at maturity, earns 6.5% a year in the 83% of paths where the basket gets back to its starting level, and gets 100% back in the rest. Fair value is 97.5%, so issuing at par leaves Natixis 2.5% for hedging and margin.</a:t>
+              <a:t>The family never loses capital at maturity, earns 6.8% a year in the 82% of paths where the basket gets back to its starting level, and gets 100% back in the rest. Fair value is 97.7%, so issuing at par leaves Natixis 2.4% for hedging and margin.</a:t>
             </a:r>
             <a:endParaRPr lang="en-US" sz="1150" dirty="0"/>
           </a:p>
@@ -31437,7 +31437,7 @@
                           <a:ea typeface="Calibri" pitchFamily="34" charset="-122"/>
                           <a:cs typeface="Calibri" pitchFamily="34" charset="-120"/>
                         </a:rPr>
-                        <a:t>6.5% p.a. coupon, above the 5.69% 5Y USD funding rate, in every path that autocalls; proceeds roll into the next note</a:t>
+                        <a:t>6.8% p.a. coupon, above the 5.69% 5Y USD funding rate, in every path that autocalls; proceeds roll into the next note</a:t>
                       </a:r>
                       <a:endParaRPr lang="en-US" sz="950" dirty="0">
                         <a:latin typeface="Calibri" charset="0"/>
@@ -31575,7 +31575,7 @@
                           <a:ea typeface="Calibri" pitchFamily="34" charset="-122"/>
                           <a:cs typeface="Calibri" pitchFamily="34" charset="-120"/>
                         </a:rPr>
-                        <a:t>Four real indices mapped to the family's own industries (slide 3)</a:t>
+                        <a:t>Semiconductor-heavy basket: the AI hardware layer behind the family's tech-infrastructure business (slide 3)</a:t>
                       </a:r>
                       <a:endParaRPr lang="en-US" sz="950" dirty="0">
                         <a:latin typeface="Calibri" charset="0"/>
@@ -32175,7 +32175,7 @@
                 <a:ea typeface="Calibri" pitchFamily="34" charset="-122"/>
                 <a:cs typeface="Calibri" pitchFamily="34" charset="-120"/>
               </a:rPr>
-              <a:t>AI hardware supply chain</a:t>
+              <a:t>Taiwan: the AI foundry</a:t>
             </a:r>
             <a:endParaRPr lang="en-US" sz="1150" dirty="0"/>
           </a:p>
@@ -32214,7 +32214,7 @@
                 <a:ea typeface="Calibri" pitchFamily="34" charset="-122"/>
                 <a:cs typeface="Calibri" pitchFamily="34" charset="-120"/>
               </a:rPr>
-              <a:t>Taiwan and Japan make the chips, equipment and servers behind global AI capex (TSMC, Tokyo Electron, Advantest).</a:t>
+              <a:t>TSMC and its supply chain make most of the world's advanced AI chips; Taiwan's index is dominated by semiconductors.</a:t>
             </a:r>
             <a:endParaRPr lang="en-US" sz="950" dirty="0"/>
           </a:p>
@@ -32339,7 +32339,7 @@
                 <a:ea typeface="Calibri" pitchFamily="34" charset="-122"/>
                 <a:cs typeface="Calibri" pitchFamily="34" charset="-120"/>
               </a:rPr>
-              <a:t>Japan corporate reform</a:t>
+              <a:t>Korea: memory for AI</a:t>
             </a:r>
             <a:endParaRPr lang="en-US" sz="1150" dirty="0"/>
           </a:p>
@@ -32378,7 +32378,7 @@
                 <a:ea typeface="Calibri" pitchFamily="34" charset="-122"/>
                 <a:cs typeface="Calibri" pitchFamily="34" charset="-120"/>
               </a:rPr>
-              <a:t>TSE pressure on capital efficiency and shareholder returns supports a re-rating of Japanese tech and industrials.</a:t>
+              <a:t>Samsung and SK Hynix supply the high-bandwidth memory every AI accelerator needs; together a large share of KOSPI 200.</a:t>
             </a:r>
             <a:endParaRPr lang="en-US" sz="950" dirty="0"/>
           </a:p>
@@ -32503,7 +32503,7 @@
                 <a:ea typeface="Calibri" pitchFamily="34" charset="-122"/>
                 <a:cs typeface="Calibri" pitchFamily="34" charset="-120"/>
               </a:rPr>
-              <a:t>China platform tech reset</a:t>
+              <a:t>Japan: chip-making tools</a:t>
             </a:r>
             <a:endParaRPr lang="en-US" sz="1150" dirty="0"/>
           </a:p>
@@ -32542,7 +32542,7 @@
                 <a:ea typeface="Calibri" pitchFamily="34" charset="-122"/>
                 <a:cs typeface="Calibri" pitchFamily="34" charset="-120"/>
               </a:rPr>
-              <a:t>After the 2021–22 regulatory drawdown, Greater China internet and EV leaders trade at a discount to global peers.</a:t>
+              <a:t>Tokyo Electron, Advantest and peers make the equipment and testers chip factories need, alongside TSE governance reforms.</a:t>
             </a:r>
             <a:endParaRPr lang="en-US" sz="950" dirty="0"/>
           </a:p>
@@ -32667,7 +32667,7 @@
                 <a:ea typeface="Calibri" pitchFamily="34" charset="-122"/>
                 <a:cs typeface="Calibri" pitchFamily="34" charset="-120"/>
               </a:rPr>
-              <a:t>Power for data centres</a:t>
+              <a:t>Global chip leaders</a:t>
             </a:r>
             <a:endParaRPr lang="en-US" sz="1150" dirty="0"/>
           </a:p>
@@ -32706,7 +32706,7 @@
                 <a:ea typeface="Calibri" pitchFamily="34" charset="-122"/>
                 <a:cs typeface="Calibri" pitchFamily="34" charset="-120"/>
               </a:rPr>
-              <a:t>AI data centres drive grid and utility investment: steady, lower-volatility exposure that anchors the basket.</a:t>
+              <a:t>The PHLX Semiconductor index adds the global designers and toolmakers (incl. TSMC and ASML ADRs) on the other side of Asia's supply chain.</a:t>
             </a:r>
             <a:endParaRPr lang="en-US" sz="950" dirty="0"/>
           </a:p>
@@ -32805,7 +32805,7 @@
                 <a:ea typeface="Calibri" pitchFamily="34" charset="-122"/>
                 <a:cs typeface="Calibri" pitchFamily="34" charset="-120"/>
               </a:rPr>
-              <a:t>High USD rates make the 5Y zero-coupon bond cheap (75.8%), so guaranteeing 100% back costs little. Asian equity volatility (basket ~19%) makes it likely the basket revisits 100%, which is what pays the 6.5% coupon.</a:t>
+              <a:t>High USD rates make the 5Y zero-coupon bond cheap (75.8%), so guaranteeing 100% back costs little. Asian equity volatility (basket ~21%) makes it likely the basket revisits 100%, which is what pays the 6.8% coupon.</a:t>
             </a:r>
             <a:endParaRPr lang="en-US" sz="1000" dirty="0"/>
           </a:p>
@@ -32954,7 +32954,7 @@
                 <a:ea typeface="Cambria" pitchFamily="34" charset="-122"/>
                 <a:cs typeface="Cambria" pitchFamily="34" charset="-120"/>
               </a:rPr>
-              <a:t>Underlying: four indices that mirror the family's businesses</a:t>
+              <a:t>Underlying: a semiconductor-heavy basket of four indices</a:t>
             </a:r>
             <a:endParaRPr lang="en-US" sz="2200" dirty="0"/>
           </a:p>
@@ -33112,7 +33112,7 @@
                 <a:ea typeface="Calibri" pitchFamily="34" charset="-122"/>
                 <a:cs typeface="Calibri" pitchFamily="34" charset="-120"/>
               </a:rPr>
-              <a:t>Hang Seng TECH</a:t>
+              <a:t>Taiwan TAIEX</a:t>
             </a:r>
             <a:endParaRPr lang="en-US" sz="900" dirty="0"/>
           </a:p>
@@ -33176,7 +33176,7 @@
                 <a:ea typeface="Calibri" pitchFamily="34" charset="-122"/>
                 <a:cs typeface="Calibri" pitchFamily="34" charset="-120"/>
               </a:rPr>
-              <a:t>Nikkei 225</a:t>
+              <a:t>KOSPI 200</a:t>
             </a:r>
             <a:endParaRPr lang="en-US" sz="900" dirty="0"/>
           </a:p>
@@ -33240,7 +33240,7 @@
                 <a:ea typeface="Calibri" pitchFamily="34" charset="-122"/>
                 <a:cs typeface="Calibri" pitchFamily="34" charset="-120"/>
               </a:rPr>
-              <a:t>Taiwan TAIEX</a:t>
+              <a:t>Nikkei 225</a:t>
             </a:r>
             <a:endParaRPr lang="en-US" sz="900" dirty="0"/>
           </a:p>
@@ -33304,7 +33304,7 @@
                 <a:ea typeface="Calibri" pitchFamily="34" charset="-122"/>
                 <a:cs typeface="Calibri" pitchFamily="34" charset="-120"/>
               </a:rPr>
-              <a:t>MSCI AC Asia Pacific Utilities</a:t>
+              <a:t>PHLX Semiconductor</a:t>
             </a:r>
             <a:endParaRPr lang="en-US" sz="900" dirty="0"/>
           </a:p>
@@ -33630,7 +33630,7 @@
                           <a:ea typeface="Calibri" pitchFamily="34" charset="-122"/>
                           <a:cs typeface="Calibri" pitchFamily="34" charset="-120"/>
                         </a:rPr>
-                        <a:t>Hang Seng TECH</a:t>
+                        <a:t>Taiwan TAIEX</a:t>
                       </a:r>
                       <a:endParaRPr lang="en-US" sz="900" dirty="0">
                         <a:latin typeface="Calibri" charset="0"/>
@@ -33651,7 +33651,7 @@
                           <a:ea typeface="Calibri" pitchFamily="34" charset="-122"/>
                           <a:cs typeface="Calibri" pitchFamily="34" charset="-120"/>
                         </a:rPr>
-                        <a:t>HSTECH Index</a:t>
+                        <a:t>TWSE Index</a:t>
                       </a:r>
                       <a:endParaRPr lang="en-US" sz="900" dirty="0">
                         <a:latin typeface="Calibri" charset="0"/>
@@ -33719,7 +33719,7 @@
                           <a:ea typeface="Calibri" pitchFamily="34" charset="-122"/>
                           <a:cs typeface="Calibri" pitchFamily="34" charset="-120"/>
                         </a:rPr>
-                        <a:t>30%</a:t>
+                        <a:t>35%</a:t>
                       </a:r>
                       <a:endParaRPr lang="en-US" sz="900" dirty="0">
                         <a:latin typeface="Calibri" charset="0"/>
@@ -33787,7 +33787,7 @@
                           <a:ea typeface="Calibri" pitchFamily="34" charset="-122"/>
                           <a:cs typeface="Calibri" pitchFamily="34" charset="-120"/>
                         </a:rPr>
-                        <a:t>Greater China platform, PropTech and EV leaders: digitising the real-estate and consumer economy the family operates in</a:t>
+                        <a:t>Foundry and chip supply chain (TSMC, MediaTek, ASE): the core of AI chip production, in the family's Greater China home region</a:t>
                       </a:r>
                       <a:endParaRPr lang="en-US" sz="900" dirty="0">
                         <a:latin typeface="Calibri" charset="0"/>
@@ -33855,7 +33855,302 @@
                           <a:ea typeface="Calibri" pitchFamily="34" charset="-122"/>
                           <a:cs typeface="Calibri" pitchFamily="34" charset="-120"/>
                         </a:rPr>
-                        <a:t>32%</a:t>
+                        <a:t>24%</a:t>
+                      </a:r>
+                      <a:endParaRPr lang="en-US" sz="900" dirty="0">
+                        <a:latin typeface="Calibri" charset="0"/>
+                        <a:ea typeface="Calibri" charset="0"/>
+                        <a:cs typeface="Calibri" charset="0"/>
+                      </a:endParaRPr>
+                    </a:p>
+                  </a:txBody>
+                  <a:tcPr marL="63500" marR="63500" marT="25400" marB="25400" anchor="ctr">
+                    <a:lnL w="6350" cap="flat" cmpd="sng" algn="ctr">
+                      <a:solidFill>
+                        <a:srgbClr val="DCE7E5"/>
+                      </a:solidFill>
+                      <a:prstDash val="solid"/>
+                      <a:round/>
+                      <a:headEnd type="none" w="med" len="med"/>
+                      <a:tailEnd type="none" w="med" len="med"/>
+                    </a:lnL>
+                    <a:lnR w="6350" cap="flat" cmpd="sng" algn="ctr">
+                      <a:solidFill>
+                        <a:srgbClr val="DCE7E5"/>
+                      </a:solidFill>
+                      <a:prstDash val="solid"/>
+                      <a:round/>
+                      <a:headEnd type="none" w="med" len="med"/>
+                      <a:tailEnd type="none" w="med" len="med"/>
+                    </a:lnR>
+                    <a:lnT w="6350" cap="flat" cmpd="sng" algn="ctr">
+                      <a:solidFill>
+                        <a:srgbClr val="DCE7E5"/>
+                      </a:solidFill>
+                      <a:prstDash val="solid"/>
+                      <a:round/>
+                      <a:headEnd type="none" w="med" len="med"/>
+                      <a:tailEnd type="none" w="med" len="med"/>
+                    </a:lnT>
+                    <a:lnB w="6350" cap="flat" cmpd="sng" algn="ctr">
+                      <a:solidFill>
+                        <a:srgbClr val="DCE7E5"/>
+                      </a:solidFill>
+                      <a:prstDash val="solid"/>
+                      <a:round/>
+                      <a:headEnd type="none" w="med" len="med"/>
+                      <a:tailEnd type="none" w="med" len="med"/>
+                    </a:lnB>
+                    <a:solidFill>
+                      <a:srgbClr val="FFFFFF"/>
+                    </a:solidFill>
+                  </a:tcPr>
+                </a:tc>
+              </a:tr>
+              <a:tr h="603504">
+                <a:tc>
+                  <a:txBody>
+                    <a:bodyPr/>
+                    <a:lstStyle/>
+                    <a:p>
+                      <a:pPr indent="0" marL="0">
+                        <a:buNone/>
+                      </a:pPr>
+                      <a:r>
+                        <a:rPr lang="en-US" sz="900" b="1" dirty="0">
+                          <a:solidFill>
+                            <a:srgbClr val="1D2B30"/>
+                          </a:solidFill>
+                          <a:latin typeface="Calibri" pitchFamily="34" charset="0"/>
+                          <a:ea typeface="Calibri" pitchFamily="34" charset="-122"/>
+                          <a:cs typeface="Calibri" pitchFamily="34" charset="-120"/>
+                        </a:rPr>
+                        <a:t>KOSPI 200</a:t>
+                      </a:r>
+                      <a:endParaRPr lang="en-US" sz="900" dirty="0">
+                        <a:latin typeface="Calibri" charset="0"/>
+                        <a:ea typeface="Calibri" charset="0"/>
+                        <a:cs typeface="Calibri" charset="0"/>
+                      </a:endParaRPr>
+                    </a:p>
+                    <a:p>
+                      <a:pPr indent="0" marL="0">
+                        <a:buNone/>
+                      </a:pPr>
+                      <a:r>
+                        <a:rPr lang="en-US" sz="900" b="1" dirty="0">
+                          <a:solidFill>
+                            <a:srgbClr val="1D2B30"/>
+                          </a:solidFill>
+                          <a:latin typeface="Calibri" pitchFamily="34" charset="0"/>
+                          <a:ea typeface="Calibri" pitchFamily="34" charset="-122"/>
+                          <a:cs typeface="Calibri" pitchFamily="34" charset="-120"/>
+                        </a:rPr>
+                        <a:t>KOSPI2 Index</a:t>
+                      </a:r>
+                      <a:endParaRPr lang="en-US" sz="900" dirty="0">
+                        <a:latin typeface="Calibri" charset="0"/>
+                        <a:ea typeface="Calibri" charset="0"/>
+                        <a:cs typeface="Calibri" charset="0"/>
+                      </a:endParaRPr>
+                    </a:p>
+                  </a:txBody>
+                  <a:tcPr marL="63500" marR="63500" marT="25400" marB="25400" anchor="ctr">
+                    <a:lnL w="6350" cap="flat" cmpd="sng" algn="ctr">
+                      <a:solidFill>
+                        <a:srgbClr val="DCE7E5"/>
+                      </a:solidFill>
+                      <a:prstDash val="solid"/>
+                      <a:round/>
+                      <a:headEnd type="none" w="med" len="med"/>
+                      <a:tailEnd type="none" w="med" len="med"/>
+                    </a:lnL>
+                    <a:lnR w="6350" cap="flat" cmpd="sng" algn="ctr">
+                      <a:solidFill>
+                        <a:srgbClr val="DCE7E5"/>
+                      </a:solidFill>
+                      <a:prstDash val="solid"/>
+                      <a:round/>
+                      <a:headEnd type="none" w="med" len="med"/>
+                      <a:tailEnd type="none" w="med" len="med"/>
+                    </a:lnR>
+                    <a:lnT w="6350" cap="flat" cmpd="sng" algn="ctr">
+                      <a:solidFill>
+                        <a:srgbClr val="DCE7E5"/>
+                      </a:solidFill>
+                      <a:prstDash val="solid"/>
+                      <a:round/>
+                      <a:headEnd type="none" w="med" len="med"/>
+                      <a:tailEnd type="none" w="med" len="med"/>
+                    </a:lnT>
+                    <a:lnB w="6350" cap="flat" cmpd="sng" algn="ctr">
+                      <a:solidFill>
+                        <a:srgbClr val="DCE7E5"/>
+                      </a:solidFill>
+                      <a:prstDash val="solid"/>
+                      <a:round/>
+                      <a:headEnd type="none" w="med" len="med"/>
+                      <a:tailEnd type="none" w="med" len="med"/>
+                    </a:lnB>
+                    <a:solidFill>
+                      <a:srgbClr val="FFFFFF"/>
+                    </a:solidFill>
+                  </a:tcPr>
+                </a:tc>
+                <a:tc>
+                  <a:txBody>
+                    <a:bodyPr/>
+                    <a:lstStyle/>
+                    <a:p>
+                      <a:pPr indent="0" marL="0">
+                        <a:buNone/>
+                      </a:pPr>
+                      <a:r>
+                        <a:rPr lang="en-US" sz="900" dirty="0">
+                          <a:solidFill>
+                            <a:srgbClr val="1D2B30"/>
+                          </a:solidFill>
+                          <a:latin typeface="Calibri" pitchFamily="34" charset="0"/>
+                          <a:ea typeface="Calibri" pitchFamily="34" charset="-122"/>
+                          <a:cs typeface="Calibri" pitchFamily="34" charset="-120"/>
+                        </a:rPr>
+                        <a:t>25%</a:t>
+                      </a:r>
+                      <a:endParaRPr lang="en-US" sz="900" dirty="0">
+                        <a:latin typeface="Calibri" charset="0"/>
+                        <a:ea typeface="Calibri" charset="0"/>
+                        <a:cs typeface="Calibri" charset="0"/>
+                      </a:endParaRPr>
+                    </a:p>
+                  </a:txBody>
+                  <a:tcPr marL="63500" marR="63500" marT="25400" marB="25400" anchor="ctr">
+                    <a:lnL w="6350" cap="flat" cmpd="sng" algn="ctr">
+                      <a:solidFill>
+                        <a:srgbClr val="DCE7E5"/>
+                      </a:solidFill>
+                      <a:prstDash val="solid"/>
+                      <a:round/>
+                      <a:headEnd type="none" w="med" len="med"/>
+                      <a:tailEnd type="none" w="med" len="med"/>
+                    </a:lnL>
+                    <a:lnR w="6350" cap="flat" cmpd="sng" algn="ctr">
+                      <a:solidFill>
+                        <a:srgbClr val="DCE7E5"/>
+                      </a:solidFill>
+                      <a:prstDash val="solid"/>
+                      <a:round/>
+                      <a:headEnd type="none" w="med" len="med"/>
+                      <a:tailEnd type="none" w="med" len="med"/>
+                    </a:lnR>
+                    <a:lnT w="6350" cap="flat" cmpd="sng" algn="ctr">
+                      <a:solidFill>
+                        <a:srgbClr val="DCE7E5"/>
+                      </a:solidFill>
+                      <a:prstDash val="solid"/>
+                      <a:round/>
+                      <a:headEnd type="none" w="med" len="med"/>
+                      <a:tailEnd type="none" w="med" len="med"/>
+                    </a:lnT>
+                    <a:lnB w="6350" cap="flat" cmpd="sng" algn="ctr">
+                      <a:solidFill>
+                        <a:srgbClr val="DCE7E5"/>
+                      </a:solidFill>
+                      <a:prstDash val="solid"/>
+                      <a:round/>
+                      <a:headEnd type="none" w="med" len="med"/>
+                      <a:tailEnd type="none" w="med" len="med"/>
+                    </a:lnB>
+                    <a:solidFill>
+                      <a:srgbClr val="FFFFFF"/>
+                    </a:solidFill>
+                  </a:tcPr>
+                </a:tc>
+                <a:tc>
+                  <a:txBody>
+                    <a:bodyPr/>
+                    <a:lstStyle/>
+                    <a:p>
+                      <a:pPr indent="0" marL="0">
+                        <a:buNone/>
+                      </a:pPr>
+                      <a:r>
+                        <a:rPr lang="en-US" sz="900" dirty="0">
+                          <a:solidFill>
+                            <a:srgbClr val="1D2B30"/>
+                          </a:solidFill>
+                          <a:latin typeface="Calibri" pitchFamily="34" charset="0"/>
+                          <a:ea typeface="Calibri" pitchFamily="34" charset="-122"/>
+                          <a:cs typeface="Calibri" pitchFamily="34" charset="-120"/>
+                        </a:rPr>
+                        <a:t>Memory for AI (Samsung, SK Hynix): high-bandwidth memory inside every AI accelerator</a:t>
+                      </a:r>
+                      <a:endParaRPr lang="en-US" sz="900" dirty="0">
+                        <a:latin typeface="Calibri" charset="0"/>
+                        <a:ea typeface="Calibri" charset="0"/>
+                        <a:cs typeface="Calibri" charset="0"/>
+                      </a:endParaRPr>
+                    </a:p>
+                  </a:txBody>
+                  <a:tcPr marL="63500" marR="63500" marT="25400" marB="25400" anchor="ctr">
+                    <a:lnL w="6350" cap="flat" cmpd="sng" algn="ctr">
+                      <a:solidFill>
+                        <a:srgbClr val="DCE7E5"/>
+                      </a:solidFill>
+                      <a:prstDash val="solid"/>
+                      <a:round/>
+                      <a:headEnd type="none" w="med" len="med"/>
+                      <a:tailEnd type="none" w="med" len="med"/>
+                    </a:lnL>
+                    <a:lnR w="6350" cap="flat" cmpd="sng" algn="ctr">
+                      <a:solidFill>
+                        <a:srgbClr val="DCE7E5"/>
+                      </a:solidFill>
+                      <a:prstDash val="solid"/>
+                      <a:round/>
+                      <a:headEnd type="none" w="med" len="med"/>
+                      <a:tailEnd type="none" w="med" len="med"/>
+                    </a:lnR>
+                    <a:lnT w="6350" cap="flat" cmpd="sng" algn="ctr">
+                      <a:solidFill>
+                        <a:srgbClr val="DCE7E5"/>
+                      </a:solidFill>
+                      <a:prstDash val="solid"/>
+                      <a:round/>
+                      <a:headEnd type="none" w="med" len="med"/>
+                      <a:tailEnd type="none" w="med" len="med"/>
+                    </a:lnT>
+                    <a:lnB w="6350" cap="flat" cmpd="sng" algn="ctr">
+                      <a:solidFill>
+                        <a:srgbClr val="DCE7E5"/>
+                      </a:solidFill>
+                      <a:prstDash val="solid"/>
+                      <a:round/>
+                      <a:headEnd type="none" w="med" len="med"/>
+                      <a:tailEnd type="none" w="med" len="med"/>
+                    </a:lnB>
+                    <a:solidFill>
+                      <a:srgbClr val="FFFFFF"/>
+                    </a:solidFill>
+                  </a:tcPr>
+                </a:tc>
+                <a:tc>
+                  <a:txBody>
+                    <a:bodyPr/>
+                    <a:lstStyle/>
+                    <a:p>
+                      <a:pPr indent="0" marL="0">
+                        <a:buNone/>
+                      </a:pPr>
+                      <a:r>
+                        <a:rPr lang="en-US" sz="900" dirty="0">
+                          <a:solidFill>
+                            <a:srgbClr val="1D2B30"/>
+                          </a:solidFill>
+                          <a:latin typeface="Calibri" pitchFamily="34" charset="0"/>
+                          <a:ea typeface="Calibri" pitchFamily="34" charset="-122"/>
+                          <a:cs typeface="Calibri" pitchFamily="34" charset="-120"/>
+                        </a:rPr>
+                        <a:t>25%</a:t>
                       </a:r>
                       <a:endParaRPr lang="en-US" sz="900" dirty="0">
                         <a:latin typeface="Calibri" charset="0"/>
@@ -34014,7 +34309,7 @@
                           <a:ea typeface="Calibri" pitchFamily="34" charset="-122"/>
                           <a:cs typeface="Calibri" pitchFamily="34" charset="-120"/>
                         </a:rPr>
-                        <a:t>30%</a:t>
+                        <a:t>20%</a:t>
                       </a:r>
                       <a:endParaRPr lang="en-US" sz="900" dirty="0">
                         <a:latin typeface="Calibri" charset="0"/>
@@ -34082,7 +34377,7 @@
                           <a:ea typeface="Calibri" pitchFamily="34" charset="-122"/>
                           <a:cs typeface="Calibri" pitchFamily="34" charset="-120"/>
                         </a:rPr>
-                        <a:t>Japan tech and semiconductor equipment: home market of the family's technology infrastructure business</a:t>
+                        <a:t>Chip-making equipment and test (Tokyo Electron, Advantest): home market of the family's tech-infrastructure business</a:t>
                       </a:r>
                       <a:endParaRPr lang="en-US" sz="900" dirty="0">
                         <a:latin typeface="Calibri" charset="0"/>
@@ -34220,7 +34515,7 @@
                           <a:ea typeface="Calibri" pitchFamily="34" charset="-122"/>
                           <a:cs typeface="Calibri" pitchFamily="34" charset="-120"/>
                         </a:rPr>
-                        <a:t>Taiwan TAIEX</a:t>
+                        <a:t>PHLX Semiconductor</a:t>
                       </a:r>
                       <a:endParaRPr lang="en-US" sz="900" dirty="0">
                         <a:latin typeface="Calibri" charset="0"/>
@@ -34241,7 +34536,7 @@
                           <a:ea typeface="Calibri" pitchFamily="34" charset="-122"/>
                           <a:cs typeface="Calibri" pitchFamily="34" charset="-120"/>
                         </a:rPr>
-                        <a:t>TWSE Index</a:t>
+                        <a:t>SOX Index</a:t>
                       </a:r>
                       <a:endParaRPr lang="en-US" sz="900" dirty="0">
                         <a:latin typeface="Calibri" charset="0"/>
@@ -34309,7 +34604,7 @@
                           <a:ea typeface="Calibri" pitchFamily="34" charset="-122"/>
                           <a:cs typeface="Calibri" pitchFamily="34" charset="-120"/>
                         </a:rPr>
-                        <a:t>25%</a:t>
+                        <a:t>20%</a:t>
                       </a:r>
                       <a:endParaRPr lang="en-US" sz="900" dirty="0">
                         <a:latin typeface="Calibri" charset="0"/>
@@ -34377,7 +34672,7 @@
                           <a:ea typeface="Calibri" pitchFamily="34" charset="-122"/>
                           <a:cs typeface="Calibri" pitchFamily="34" charset="-120"/>
                         </a:rPr>
-                        <a:t>AI supply chain and machine learning hardware (foundry, servers, networking) feeding regional logistics and retail</a:t>
+                        <a:t>Global semiconductor leaders, USD-listed: diversifies beyond Asia's single-country risks</a:t>
                       </a:r>
                       <a:endParaRPr lang="en-US" sz="900" dirty="0">
                         <a:latin typeface="Calibri" charset="0"/>
@@ -34445,302 +34740,7 @@
                           <a:ea typeface="Calibri" pitchFamily="34" charset="-122"/>
                           <a:cs typeface="Calibri" pitchFamily="34" charset="-120"/>
                         </a:rPr>
-                        <a:t>22%</a:t>
-                      </a:r>
-                      <a:endParaRPr lang="en-US" sz="900" dirty="0">
-                        <a:latin typeface="Calibri" charset="0"/>
-                        <a:ea typeface="Calibri" charset="0"/>
-                        <a:cs typeface="Calibri" charset="0"/>
-                      </a:endParaRPr>
-                    </a:p>
-                  </a:txBody>
-                  <a:tcPr marL="63500" marR="63500" marT="25400" marB="25400" anchor="ctr">
-                    <a:lnL w="6350" cap="flat" cmpd="sng" algn="ctr">
-                      <a:solidFill>
-                        <a:srgbClr val="DCE7E5"/>
-                      </a:solidFill>
-                      <a:prstDash val="solid"/>
-                      <a:round/>
-                      <a:headEnd type="none" w="med" len="med"/>
-                      <a:tailEnd type="none" w="med" len="med"/>
-                    </a:lnL>
-                    <a:lnR w="6350" cap="flat" cmpd="sng" algn="ctr">
-                      <a:solidFill>
-                        <a:srgbClr val="DCE7E5"/>
-                      </a:solidFill>
-                      <a:prstDash val="solid"/>
-                      <a:round/>
-                      <a:headEnd type="none" w="med" len="med"/>
-                      <a:tailEnd type="none" w="med" len="med"/>
-                    </a:lnR>
-                    <a:lnT w="6350" cap="flat" cmpd="sng" algn="ctr">
-                      <a:solidFill>
-                        <a:srgbClr val="DCE7E5"/>
-                      </a:solidFill>
-                      <a:prstDash val="solid"/>
-                      <a:round/>
-                      <a:headEnd type="none" w="med" len="med"/>
-                      <a:tailEnd type="none" w="med" len="med"/>
-                    </a:lnT>
-                    <a:lnB w="6350" cap="flat" cmpd="sng" algn="ctr">
-                      <a:solidFill>
-                        <a:srgbClr val="DCE7E5"/>
-                      </a:solidFill>
-                      <a:prstDash val="solid"/>
-                      <a:round/>
-                      <a:headEnd type="none" w="med" len="med"/>
-                      <a:tailEnd type="none" w="med" len="med"/>
-                    </a:lnB>
-                    <a:solidFill>
-                      <a:srgbClr val="FFFFFF"/>
-                    </a:solidFill>
-                  </a:tcPr>
-                </a:tc>
-              </a:tr>
-              <a:tr h="603504">
-                <a:tc>
-                  <a:txBody>
-                    <a:bodyPr/>
-                    <a:lstStyle/>
-                    <a:p>
-                      <a:pPr indent="0" marL="0">
-                        <a:buNone/>
-                      </a:pPr>
-                      <a:r>
-                        <a:rPr lang="en-US" sz="900" b="1" dirty="0">
-                          <a:solidFill>
-                            <a:srgbClr val="1D2B30"/>
-                          </a:solidFill>
-                          <a:latin typeface="Calibri" pitchFamily="34" charset="0"/>
-                          <a:ea typeface="Calibri" pitchFamily="34" charset="-122"/>
-                          <a:cs typeface="Calibri" pitchFamily="34" charset="-120"/>
-                        </a:rPr>
-                        <a:t>MSCI AC Asia Pacific Utilities</a:t>
-                      </a:r>
-                      <a:endParaRPr lang="en-US" sz="900" dirty="0">
-                        <a:latin typeface="Calibri" charset="0"/>
-                        <a:ea typeface="Calibri" charset="0"/>
-                        <a:cs typeface="Calibri" charset="0"/>
-                      </a:endParaRPr>
-                    </a:p>
-                    <a:p>
-                      <a:pPr indent="0" marL="0">
-                        <a:buNone/>
-                      </a:pPr>
-                      <a:r>
-                        <a:rPr lang="en-US" sz="900" b="1" dirty="0">
-                          <a:solidFill>
-                            <a:srgbClr val="1D2B30"/>
-                          </a:solidFill>
-                          <a:latin typeface="Calibri" pitchFamily="34" charset="0"/>
-                          <a:ea typeface="Calibri" pitchFamily="34" charset="-122"/>
-                          <a:cs typeface="Calibri" pitchFamily="34" charset="-120"/>
-                        </a:rPr>
-                        <a:t>MXAP0UT Index</a:t>
-                      </a:r>
-                      <a:endParaRPr lang="en-US" sz="900" dirty="0">
-                        <a:latin typeface="Calibri" charset="0"/>
-                        <a:ea typeface="Calibri" charset="0"/>
-                        <a:cs typeface="Calibri" charset="0"/>
-                      </a:endParaRPr>
-                    </a:p>
-                  </a:txBody>
-                  <a:tcPr marL="63500" marR="63500" marT="25400" marB="25400" anchor="ctr">
-                    <a:lnL w="6350" cap="flat" cmpd="sng" algn="ctr">
-                      <a:solidFill>
-                        <a:srgbClr val="DCE7E5"/>
-                      </a:solidFill>
-                      <a:prstDash val="solid"/>
-                      <a:round/>
-                      <a:headEnd type="none" w="med" len="med"/>
-                      <a:tailEnd type="none" w="med" len="med"/>
-                    </a:lnL>
-                    <a:lnR w="6350" cap="flat" cmpd="sng" algn="ctr">
-                      <a:solidFill>
-                        <a:srgbClr val="DCE7E5"/>
-                      </a:solidFill>
-                      <a:prstDash val="solid"/>
-                      <a:round/>
-                      <a:headEnd type="none" w="med" len="med"/>
-                      <a:tailEnd type="none" w="med" len="med"/>
-                    </a:lnR>
-                    <a:lnT w="6350" cap="flat" cmpd="sng" algn="ctr">
-                      <a:solidFill>
-                        <a:srgbClr val="DCE7E5"/>
-                      </a:solidFill>
-                      <a:prstDash val="solid"/>
-                      <a:round/>
-                      <a:headEnd type="none" w="med" len="med"/>
-                      <a:tailEnd type="none" w="med" len="med"/>
-                    </a:lnT>
-                    <a:lnB w="6350" cap="flat" cmpd="sng" algn="ctr">
-                      <a:solidFill>
-                        <a:srgbClr val="DCE7E5"/>
-                      </a:solidFill>
-                      <a:prstDash val="solid"/>
-                      <a:round/>
-                      <a:headEnd type="none" w="med" len="med"/>
-                      <a:tailEnd type="none" w="med" len="med"/>
-                    </a:lnB>
-                    <a:solidFill>
-                      <a:srgbClr val="FFFFFF"/>
-                    </a:solidFill>
-                  </a:tcPr>
-                </a:tc>
-                <a:tc>
-                  <a:txBody>
-                    <a:bodyPr/>
-                    <a:lstStyle/>
-                    <a:p>
-                      <a:pPr indent="0" marL="0">
-                        <a:buNone/>
-                      </a:pPr>
-                      <a:r>
-                        <a:rPr lang="en-US" sz="900" dirty="0">
-                          <a:solidFill>
-                            <a:srgbClr val="1D2B30"/>
-                          </a:solidFill>
-                          <a:latin typeface="Calibri" pitchFamily="34" charset="0"/>
-                          <a:ea typeface="Calibri" pitchFamily="34" charset="-122"/>
-                          <a:cs typeface="Calibri" pitchFamily="34" charset="-120"/>
-                        </a:rPr>
-                        <a:t>15%</a:t>
-                      </a:r>
-                      <a:endParaRPr lang="en-US" sz="900" dirty="0">
-                        <a:latin typeface="Calibri" charset="0"/>
-                        <a:ea typeface="Calibri" charset="0"/>
-                        <a:cs typeface="Calibri" charset="0"/>
-                      </a:endParaRPr>
-                    </a:p>
-                  </a:txBody>
-                  <a:tcPr marL="63500" marR="63500" marT="25400" marB="25400" anchor="ctr">
-                    <a:lnL w="6350" cap="flat" cmpd="sng" algn="ctr">
-                      <a:solidFill>
-                        <a:srgbClr val="DCE7E5"/>
-                      </a:solidFill>
-                      <a:prstDash val="solid"/>
-                      <a:round/>
-                      <a:headEnd type="none" w="med" len="med"/>
-                      <a:tailEnd type="none" w="med" len="med"/>
-                    </a:lnL>
-                    <a:lnR w="6350" cap="flat" cmpd="sng" algn="ctr">
-                      <a:solidFill>
-                        <a:srgbClr val="DCE7E5"/>
-                      </a:solidFill>
-                      <a:prstDash val="solid"/>
-                      <a:round/>
-                      <a:headEnd type="none" w="med" len="med"/>
-                      <a:tailEnd type="none" w="med" len="med"/>
-                    </a:lnR>
-                    <a:lnT w="6350" cap="flat" cmpd="sng" algn="ctr">
-                      <a:solidFill>
-                        <a:srgbClr val="DCE7E5"/>
-                      </a:solidFill>
-                      <a:prstDash val="solid"/>
-                      <a:round/>
-                      <a:headEnd type="none" w="med" len="med"/>
-                      <a:tailEnd type="none" w="med" len="med"/>
-                    </a:lnT>
-                    <a:lnB w="6350" cap="flat" cmpd="sng" algn="ctr">
-                      <a:solidFill>
-                        <a:srgbClr val="DCE7E5"/>
-                      </a:solidFill>
-                      <a:prstDash val="solid"/>
-                      <a:round/>
-                      <a:headEnd type="none" w="med" len="med"/>
-                      <a:tailEnd type="none" w="med" len="med"/>
-                    </a:lnB>
-                    <a:solidFill>
-                      <a:srgbClr val="FFFFFF"/>
-                    </a:solidFill>
-                  </a:tcPr>
-                </a:tc>
-                <a:tc>
-                  <a:txBody>
-                    <a:bodyPr/>
-                    <a:lstStyle/>
-                    <a:p>
-                      <a:pPr indent="0" marL="0">
-                        <a:buNone/>
-                      </a:pPr>
-                      <a:r>
-                        <a:rPr lang="en-US" sz="900" dirty="0">
-                          <a:solidFill>
-                            <a:srgbClr val="1D2B30"/>
-                          </a:solidFill>
-                          <a:latin typeface="Calibri" pitchFamily="34" charset="0"/>
-                          <a:ea typeface="Calibri" pitchFamily="34" charset="-122"/>
-                          <a:cs typeface="Calibri" pitchFamily="34" charset="-120"/>
-                        </a:rPr>
-                        <a:t>Grid and power operators: the smart-grid layer above the family's renewable plants; lowers basket volatility</a:t>
-                      </a:r>
-                      <a:endParaRPr lang="en-US" sz="900" dirty="0">
-                        <a:latin typeface="Calibri" charset="0"/>
-                        <a:ea typeface="Calibri" charset="0"/>
-                        <a:cs typeface="Calibri" charset="0"/>
-                      </a:endParaRPr>
-                    </a:p>
-                  </a:txBody>
-                  <a:tcPr marL="63500" marR="63500" marT="25400" marB="25400" anchor="ctr">
-                    <a:lnL w="6350" cap="flat" cmpd="sng" algn="ctr">
-                      <a:solidFill>
-                        <a:srgbClr val="DCE7E5"/>
-                      </a:solidFill>
-                      <a:prstDash val="solid"/>
-                      <a:round/>
-                      <a:headEnd type="none" w="med" len="med"/>
-                      <a:tailEnd type="none" w="med" len="med"/>
-                    </a:lnL>
-                    <a:lnR w="6350" cap="flat" cmpd="sng" algn="ctr">
-                      <a:solidFill>
-                        <a:srgbClr val="DCE7E5"/>
-                      </a:solidFill>
-                      <a:prstDash val="solid"/>
-                      <a:round/>
-                      <a:headEnd type="none" w="med" len="med"/>
-                      <a:tailEnd type="none" w="med" len="med"/>
-                    </a:lnR>
-                    <a:lnT w="6350" cap="flat" cmpd="sng" algn="ctr">
-                      <a:solidFill>
-                        <a:srgbClr val="DCE7E5"/>
-                      </a:solidFill>
-                      <a:prstDash val="solid"/>
-                      <a:round/>
-                      <a:headEnd type="none" w="med" len="med"/>
-                      <a:tailEnd type="none" w="med" len="med"/>
-                    </a:lnT>
-                    <a:lnB w="6350" cap="flat" cmpd="sng" algn="ctr">
-                      <a:solidFill>
-                        <a:srgbClr val="DCE7E5"/>
-                      </a:solidFill>
-                      <a:prstDash val="solid"/>
-                      <a:round/>
-                      <a:headEnd type="none" w="med" len="med"/>
-                      <a:tailEnd type="none" w="med" len="med"/>
-                    </a:lnB>
-                    <a:solidFill>
-                      <a:srgbClr val="FFFFFF"/>
-                    </a:solidFill>
-                  </a:tcPr>
-                </a:tc>
-                <a:tc>
-                  <a:txBody>
-                    <a:bodyPr/>
-                    <a:lstStyle/>
-                    <a:p>
-                      <a:pPr indent="0" marL="0">
-                        <a:buNone/>
-                      </a:pPr>
-                      <a:r>
-                        <a:rPr lang="en-US" sz="900" dirty="0">
-                          <a:solidFill>
-                            <a:srgbClr val="1D2B30"/>
-                          </a:solidFill>
-                          <a:latin typeface="Calibri" pitchFamily="34" charset="0"/>
-                          <a:ea typeface="Calibri" pitchFamily="34" charset="-122"/>
-                          <a:cs typeface="Calibri" pitchFamily="34" charset="-120"/>
-                        </a:rPr>
-                        <a:t>14%</a:t>
+                        <a:t>35%</a:t>
                       </a:r>
                       <a:endParaRPr lang="en-US" sz="900" dirty="0">
                         <a:latin typeface="Calibri" charset="0"/>
@@ -34843,7 +34843,7 @@
                 <a:ea typeface="Calibri" pitchFamily="34" charset="-122"/>
                 <a:cs typeface="Calibri" pitchFamily="34" charset="-120"/>
               </a:rPr>
-              <a:t>one index collapsing (e.g. a China regulatory shock) is cushioned by the other three. Basket vol is ~19% vs 32% for HSTECH alone, and correlation risk stays with the desk.</a:t>
+              <a:t>a shock to one market (e.g. Taiwan geopolitics) is cushioned by the other three. Basket vol is ~21% vs 35% for the PHLX Semiconductor index alone, and correlation risk stays with the desk.</a:t>
             </a:r>
             <a:endParaRPr lang="en-US" sz="1000" dirty="0"/>
           </a:p>
@@ -34882,7 +34882,7 @@
                 <a:ea typeface="Calibri" pitchFamily="34" charset="-122"/>
                 <a:cs typeface="Calibri" pitchFamily="34" charset="-120"/>
               </a:rPr>
-              <a:t>*Assumed 5Y implied vols for pricing. The draft's thematic indices (e.g. 'Greater China PropTech &amp; NLP') are not Bloomberg-listed, so we map each theme to a real index.</a:t>
+              <a:t>*Assumed 5Y implied vols for pricing. The draft's thematic indices (e.g. 'Greater China PropTech &amp; NLP') are not Bloomberg-listed, so we use real indices.</a:t>
             </a:r>
             <a:endParaRPr lang="en-US" sz="800" dirty="0"/>
           </a:p>
@@ -34992,7 +34992,7 @@
                 <a:ea typeface="Cambria" pitchFamily="34" charset="-122"/>
                 <a:cs typeface="Cambria" pitchFamily="34" charset="-120"/>
               </a:rPr>
-              <a:t>Term sheet: 5-year capital-protected autocallable, 6.5% coupon</a:t>
+              <a:t>Term sheet: 5-year capital-protected autocallable, 6.8% coupon</a:t>
             </a:r>
             <a:endParaRPr lang="en-US" sz="2200" dirty="0"/>
           </a:p>
@@ -35839,7 +35839,7 @@
                           <a:ea typeface="Calibri" pitchFamily="34" charset="-122"/>
                           <a:cs typeface="Calibri" pitchFamily="34" charset="-120"/>
                         </a:rPr>
-                        <a:t>6.5% p.a. (1.625% per quarter), paid if basket ≥ 100%</a:t>
+                        <a:t>6.8% p.a. (1.70% per quarter), paid if basket ≥ 100%</a:t>
                       </a:r>
                       <a:endParaRPr lang="en-US" sz="950" dirty="0">
                         <a:latin typeface="Calibri" charset="0"/>
@@ -36391,7 +36391,7 @@
                           <a:ea typeface="Calibri" pitchFamily="34" charset="-122"/>
                           <a:cs typeface="Calibri" pitchFamily="34" charset="-120"/>
                         </a:rPr>
-                        <a:t>100% / 97.5%</a:t>
+                        <a:t>100% / 97.7%</a:t>
                       </a:r>
                       <a:endParaRPr lang="en-US" sz="950" dirty="0">
                         <a:latin typeface="Calibri" charset="0"/>
@@ -36766,7 +36766,7 @@
                           <a:ea typeface="Calibri" pitchFamily="34" charset="-122"/>
                           <a:cs typeface="Calibri" pitchFamily="34" charset="-120"/>
                         </a:rPr>
-                        <a:t>5.9%</a:t>
+                        <a:t>6.3%</a:t>
                       </a:r>
                       <a:endParaRPr lang="en-US" sz="850" dirty="0">
                         <a:latin typeface="Calibri" charset="0"/>
@@ -36834,7 +36834,7 @@
                           <a:ea typeface="Calibri" pitchFamily="34" charset="-122"/>
                           <a:cs typeface="Calibri" pitchFamily="34" charset="-120"/>
                         </a:rPr>
-                        <a:t>9.6%</a:t>
+                        <a:t>11.6%</a:t>
                       </a:r>
                       <a:endParaRPr lang="en-US" sz="850" dirty="0">
                         <a:latin typeface="Calibri" charset="0"/>
@@ -36972,7 +36972,7 @@
                           <a:ea typeface="Calibri" pitchFamily="34" charset="-122"/>
                           <a:cs typeface="Calibri" pitchFamily="34" charset="-120"/>
                         </a:rPr>
-                        <a:t>7.0%</a:t>
+                        <a:t>7.9%</a:t>
                       </a:r>
                       <a:endParaRPr lang="en-US" sz="850" dirty="0">
                         <a:latin typeface="Calibri" charset="0"/>
@@ -37040,7 +37040,7 @@
                           <a:ea typeface="Calibri" pitchFamily="34" charset="-122"/>
                           <a:cs typeface="Calibri" pitchFamily="34" charset="-120"/>
                         </a:rPr>
-                        <a:t>9.6%</a:t>
+                        <a:t>11.6%</a:t>
                       </a:r>
                       <a:endParaRPr lang="en-US" sz="850" dirty="0">
                         <a:latin typeface="Calibri" charset="0"/>
@@ -37178,7 +37178,7 @@
                           <a:ea typeface="Calibri" pitchFamily="34" charset="-122"/>
                           <a:cs typeface="Calibri" pitchFamily="34" charset="-120"/>
                         </a:rPr>
-                        <a:t>9.7%</a:t>
+                        <a:t>10.8%</a:t>
                       </a:r>
                       <a:endParaRPr lang="en-US" sz="850" dirty="0">
                         <a:latin typeface="Calibri" charset="0"/>
@@ -37246,7 +37246,7 @@
                           <a:ea typeface="Calibri" pitchFamily="34" charset="-122"/>
                           <a:cs typeface="Calibri" pitchFamily="34" charset="-120"/>
                         </a:rPr>
-                        <a:t>7.7%</a:t>
+                        <a:t>9.8%</a:t>
                       </a:r>
                       <a:endParaRPr lang="en-US" sz="850" dirty="0">
                         <a:latin typeface="Calibri" charset="0"/>
@@ -37452,7 +37452,7 @@
                           <a:ea typeface="Calibri" pitchFamily="34" charset="-122"/>
                           <a:cs typeface="Calibri" pitchFamily="34" charset="-120"/>
                         </a:rPr>
-                        <a:t>1.1%</a:t>
+                        <a:t>1.0%</a:t>
                       </a:r>
                       <a:endParaRPr lang="en-US" sz="850" dirty="0">
                         <a:latin typeface="Calibri" charset="0"/>
@@ -37590,7 +37590,7 @@
                           <a:ea typeface="Calibri" pitchFamily="34" charset="-122"/>
                           <a:cs typeface="Calibri" pitchFamily="34" charset="-120"/>
                         </a:rPr>
-                        <a:t>6.9%</a:t>
+                        <a:t>7.1%</a:t>
                       </a:r>
                       <a:endParaRPr lang="en-US" sz="850" dirty="0">
                         <a:latin typeface="Calibri" charset="0"/>
@@ -37788,7 +37788,7 @@
                 <a:ea typeface="Calibri" pitchFamily="34" charset="-122"/>
                 <a:cs typeface="Calibri" pitchFamily="34" charset="-120"/>
               </a:rPr>
-              <a:t>The draft's 8.5% fixed coupon is worth 103.1% to the client, so Natixis cannot fund it. At-risk designs pay 6%–10% for an 8–10% chance of losing capital. Cutting that to ~1% needs a 10%-vol basket and pays only 4.1%, below the 5.69% bond. Full protection prices at 6.9%; we offer 6.5%.</a:t>
+              <a:t>The draft's 8.5% fixed coupon is worth 102.2% to the client, so Natixis cannot fund it. At-risk designs pay 6%–11% for a 10%–12% chance of losing capital. Cutting that to ~1% needs a 10%-vol basket and pays only 4.1%, below the 5.69% bond. Full protection prices at 7.1%; we offer 6.8%.</a:t>
             </a:r>
             <a:endParaRPr lang="en-US" sz="950" dirty="0"/>
           </a:p>
@@ -38246,7 +38246,7 @@
                 <a:ea typeface="Calibri" pitchFamily="34" charset="-122"/>
                 <a:cs typeface="Calibri" pitchFamily="34" charset="-120"/>
               </a:rPr>
-              <a:t>called, 106.5% total</a:t>
+              <a:t>called, 106.8% total</a:t>
             </a:r>
             <a:endParaRPr lang="en-US" sz="950" dirty="0"/>
           </a:p>
@@ -38400,7 +38400,7 @@
                 <a:ea typeface="Calibri" pitchFamily="34" charset="-122"/>
                 <a:cs typeface="Calibri" pitchFamily="34" charset="-120"/>
               </a:rPr>
-              <a:t>called, 113.0% total</a:t>
+              <a:t>called, 113.6% total</a:t>
             </a:r>
             <a:endParaRPr lang="en-US" sz="950" dirty="0"/>
           </a:p>
@@ -38439,7 +38439,7 @@
                 <a:ea typeface="Calibri" pitchFamily="34" charset="-122"/>
                 <a:cs typeface="Calibri" pitchFamily="34" charset="-120"/>
               </a:rPr>
-              <a:t>P(called by Y2) 70%</a:t>
+              <a:t>P(called by Y2) 69%</a:t>
             </a:r>
             <a:endParaRPr lang="en-US" sz="850" dirty="0"/>
           </a:p>
@@ -38554,7 +38554,7 @@
                 <a:ea typeface="Calibri" pitchFamily="34" charset="-122"/>
                 <a:cs typeface="Calibri" pitchFamily="34" charset="-120"/>
               </a:rPr>
-              <a:t>called, 119.5% total</a:t>
+              <a:t>called, 120.4% total</a:t>
             </a:r>
             <a:endParaRPr lang="en-US" sz="950" dirty="0"/>
           </a:p>
@@ -38708,7 +38708,7 @@
                 <a:ea typeface="Calibri" pitchFamily="34" charset="-122"/>
                 <a:cs typeface="Calibri" pitchFamily="34" charset="-120"/>
               </a:rPr>
-              <a:t>called, 126.0% total</a:t>
+              <a:t>called, 127.2% total</a:t>
             </a:r>
             <a:endParaRPr lang="en-US" sz="950" dirty="0"/>
           </a:p>
@@ -38747,7 +38747,7 @@
                 <a:ea typeface="Calibri" pitchFamily="34" charset="-122"/>
                 <a:cs typeface="Calibri" pitchFamily="34" charset="-120"/>
               </a:rPr>
-              <a:t>P(called by Y4) 80%</a:t>
+              <a:t>P(called by Y4) 79%</a:t>
             </a:r>
             <a:endParaRPr lang="en-US" sz="850" dirty="0"/>
           </a:p>
@@ -38862,7 +38862,7 @@
                 <a:ea typeface="Calibri" pitchFamily="34" charset="-122"/>
                 <a:cs typeface="Calibri" pitchFamily="34" charset="-120"/>
               </a:rPr>
-              <a:t>called, 132.5% total</a:t>
+              <a:t>called, 134.0% total</a:t>
             </a:r>
             <a:endParaRPr lang="en-US" sz="950" dirty="0"/>
           </a:p>
@@ -38901,7 +38901,7 @@
                 <a:ea typeface="Calibri" pitchFamily="34" charset="-122"/>
                 <a:cs typeface="Calibri" pitchFamily="34" charset="-120"/>
               </a:rPr>
-              <a:t>P(called by Y5) 83%</a:t>
+              <a:t>P(called by Y5) 82%</a:t>
             </a:r>
             <a:endParaRPr lang="en-US" sz="850" dirty="0"/>
           </a:p>
@@ -38940,7 +38940,7 @@
                 <a:ea typeface="Calibri" pitchFamily="34" charset="-122"/>
                 <a:cs typeface="Calibri" pitchFamily="34" charset="-120"/>
               </a:rPr>
-              <a:t>Q1–Q3: coupon only (1.625% if basket ≥ 100%). From Q4: coupon plus autocall. Missed coupons are always caught up.</a:t>
+              <a:t>Q1–Q3: coupon only (1.70% if basket ≥ 100%). From Q4: coupon plus autocall. Missed coupons are always caught up.</a:t>
             </a:r>
             <a:endParaRPr lang="en-US" sz="900" dirty="0"/>
           </a:p>
@@ -39143,7 +39143,7 @@
                 <a:ea typeface="Calibri" pitchFamily="34" charset="-122"/>
                 <a:cs typeface="Calibri" pitchFamily="34" charset="-120"/>
               </a:rPr>
-              <a:t>83%</a:t>
+              <a:t>82%</a:t>
             </a:r>
             <a:pPr indent="0" marL="0">
               <a:buNone/>
@@ -39360,7 +39360,7 @@
                 <a:ea typeface="Calibri" pitchFamily="34" charset="-122"/>
                 <a:cs typeface="Calibri" pitchFamily="34" charset="-120"/>
               </a:rPr>
-              <a:t>6%</a:t>
+              <a:t>7%</a:t>
             </a:r>
             <a:pPr indent="0" marL="0">
               <a:buNone/>
@@ -39834,7 +39834,7 @@
                 <a:ea typeface="Calibri" pitchFamily="34" charset="-122"/>
                 <a:cs typeface="Calibri" pitchFamily="34" charset="-120"/>
               </a:rPr>
-              <a:t>Y1: 106.5%  (USD 106.5mn)</a:t>
+              <a:t>Y1: 106.8%  (USD 106.8mn)</a:t>
             </a:r>
             <a:endParaRPr lang="en-US" sz="900" dirty="0"/>
           </a:p>
@@ -39851,7 +39851,7 @@
                 <a:ea typeface="Calibri" pitchFamily="34" charset="-122"/>
                 <a:cs typeface="Calibri" pitchFamily="34" charset="-120"/>
               </a:rPr>
-              <a:t>Y2: 113.0%  (USD 113.0mn)</a:t>
+              <a:t>Y2: 113.6%  (USD 113.6mn)</a:t>
             </a:r>
             <a:endParaRPr lang="en-US" sz="900" dirty="0"/>
           </a:p>
@@ -39868,7 +39868,7 @@
                 <a:ea typeface="Calibri" pitchFamily="34" charset="-122"/>
                 <a:cs typeface="Calibri" pitchFamily="34" charset="-120"/>
               </a:rPr>
-              <a:t>Y3: 119.5%  (USD 119.5mn)</a:t>
+              <a:t>Y3: 120.4%  (USD 120.4mn)</a:t>
             </a:r>
             <a:endParaRPr lang="en-US" sz="900" dirty="0"/>
           </a:p>
@@ -39885,7 +39885,7 @@
                 <a:ea typeface="Calibri" pitchFamily="34" charset="-122"/>
                 <a:cs typeface="Calibri" pitchFamily="34" charset="-120"/>
               </a:rPr>
-              <a:t>Y4: 126.0%  (USD 126.0mn)</a:t>
+              <a:t>Y4: 127.2%  (USD 127.2mn)</a:t>
             </a:r>
             <a:endParaRPr lang="en-US" sz="900" dirty="0"/>
           </a:p>
@@ -39902,7 +39902,7 @@
                 <a:ea typeface="Calibri" pitchFamily="34" charset="-122"/>
                 <a:cs typeface="Calibri" pitchFamily="34" charset="-120"/>
               </a:rPr>
-              <a:t>Y5: 132.5%  (USD 132.5mn)</a:t>
+              <a:t>Y5: 134.0%  (USD 134.0mn)</a:t>
             </a:r>
             <a:endParaRPr lang="en-US" sz="900" dirty="0"/>
           </a:p>
@@ -40085,7 +40085,7 @@
                 <a:ea typeface="Calibri" pitchFamily="34" charset="-122"/>
                 <a:cs typeface="Calibri" pitchFamily="34" charset="-120"/>
               </a:rPr>
-              <a:t>≥ 100%: 132.5% (principal + all 20 coupons via memory)</a:t>
+              <a:t>≥ 100%: 134.0% (principal + all 20 coupons via memory)</a:t>
             </a:r>
             <a:endParaRPr lang="en-US" sz="850" dirty="0"/>
           </a:p>

--- a/deck/Asian-Digital-Autocallable-Note.pptx
+++ b/deck/Asian-Digital-Autocallable-Note.pptx
@@ -487,7 +487,7 @@
               <c:strCache>
                 <c:ptCount val="1"/>
                 <c:pt idx="0">
-                  <c:v>Our note (6.8%)</c:v>
+                  <c:v>Our note (6.75%)</c:v>
                 </c:pt>
               </c:strCache>
             </c:strRef>
@@ -1141,247 +1141,247 @@
                   <c:v>100</c:v>
                 </c:pt>
                 <c:pt idx="60">
-                  <c:v>134</c:v>
+                  <c:v>133.75</c:v>
                 </c:pt>
                 <c:pt idx="61">
-                  <c:v>134</c:v>
+                  <c:v>133.75</c:v>
                 </c:pt>
                 <c:pt idx="62">
-                  <c:v>134</c:v>
+                  <c:v>133.75</c:v>
                 </c:pt>
                 <c:pt idx="63">
-                  <c:v>134</c:v>
+                  <c:v>133.75</c:v>
                 </c:pt>
                 <c:pt idx="64">
-                  <c:v>134</c:v>
+                  <c:v>133.75</c:v>
                 </c:pt>
                 <c:pt idx="65">
-                  <c:v>134</c:v>
+                  <c:v>133.75</c:v>
                 </c:pt>
                 <c:pt idx="66">
-                  <c:v>134</c:v>
+                  <c:v>133.75</c:v>
                 </c:pt>
                 <c:pt idx="67">
-                  <c:v>134</c:v>
+                  <c:v>133.75</c:v>
                 </c:pt>
                 <c:pt idx="68">
-                  <c:v>134</c:v>
+                  <c:v>133.75</c:v>
                 </c:pt>
                 <c:pt idx="69">
-                  <c:v>134</c:v>
+                  <c:v>133.75</c:v>
                 </c:pt>
                 <c:pt idx="70">
-                  <c:v>134</c:v>
+                  <c:v>133.75</c:v>
                 </c:pt>
                 <c:pt idx="71">
-                  <c:v>134</c:v>
+                  <c:v>133.75</c:v>
                 </c:pt>
                 <c:pt idx="72">
-                  <c:v>134</c:v>
+                  <c:v>133.75</c:v>
                 </c:pt>
                 <c:pt idx="73">
-                  <c:v>134</c:v>
+                  <c:v>133.75</c:v>
                 </c:pt>
                 <c:pt idx="74">
-                  <c:v>134</c:v>
+                  <c:v>133.75</c:v>
                 </c:pt>
                 <c:pt idx="75">
-                  <c:v>134</c:v>
+                  <c:v>133.75</c:v>
                 </c:pt>
                 <c:pt idx="76">
-                  <c:v>134</c:v>
+                  <c:v>133.75</c:v>
                 </c:pt>
                 <c:pt idx="77">
-                  <c:v>134</c:v>
+                  <c:v>133.75</c:v>
                 </c:pt>
                 <c:pt idx="78">
-                  <c:v>134</c:v>
+                  <c:v>133.75</c:v>
                 </c:pt>
                 <c:pt idx="79">
-                  <c:v>134</c:v>
+                  <c:v>133.75</c:v>
                 </c:pt>
                 <c:pt idx="80">
-                  <c:v>134</c:v>
+                  <c:v>133.75</c:v>
                 </c:pt>
                 <c:pt idx="81">
-                  <c:v>134</c:v>
+                  <c:v>133.75</c:v>
                 </c:pt>
                 <c:pt idx="82">
-                  <c:v>134</c:v>
+                  <c:v>133.75</c:v>
                 </c:pt>
                 <c:pt idx="83">
-                  <c:v>134</c:v>
+                  <c:v>133.75</c:v>
                 </c:pt>
                 <c:pt idx="84">
-                  <c:v>134</c:v>
+                  <c:v>133.75</c:v>
                 </c:pt>
                 <c:pt idx="85">
-                  <c:v>134</c:v>
+                  <c:v>133.75</c:v>
                 </c:pt>
                 <c:pt idx="86">
-                  <c:v>134</c:v>
+                  <c:v>133.75</c:v>
                 </c:pt>
                 <c:pt idx="87">
-                  <c:v>134</c:v>
+                  <c:v>133.75</c:v>
                 </c:pt>
                 <c:pt idx="88">
-                  <c:v>134</c:v>
+                  <c:v>133.75</c:v>
                 </c:pt>
                 <c:pt idx="89">
-                  <c:v>134</c:v>
+                  <c:v>133.75</c:v>
                 </c:pt>
                 <c:pt idx="90">
-                  <c:v>134</c:v>
+                  <c:v>133.75</c:v>
                 </c:pt>
                 <c:pt idx="91">
-                  <c:v>134</c:v>
+                  <c:v>133.75</c:v>
                 </c:pt>
                 <c:pt idx="92">
-                  <c:v>134</c:v>
+                  <c:v>133.75</c:v>
                 </c:pt>
                 <c:pt idx="93">
-                  <c:v>134</c:v>
+                  <c:v>133.75</c:v>
                 </c:pt>
                 <c:pt idx="94">
-                  <c:v>134</c:v>
+                  <c:v>133.75</c:v>
                 </c:pt>
                 <c:pt idx="95">
-                  <c:v>134</c:v>
+                  <c:v>133.75</c:v>
                 </c:pt>
                 <c:pt idx="96">
-                  <c:v>134</c:v>
+                  <c:v>133.75</c:v>
                 </c:pt>
                 <c:pt idx="97">
-                  <c:v>134</c:v>
+                  <c:v>133.75</c:v>
                 </c:pt>
                 <c:pt idx="98">
-                  <c:v>134</c:v>
+                  <c:v>133.75</c:v>
                 </c:pt>
                 <c:pt idx="99">
-                  <c:v>134</c:v>
+                  <c:v>133.75</c:v>
                 </c:pt>
                 <c:pt idx="100">
-                  <c:v>134</c:v>
+                  <c:v>133.75</c:v>
                 </c:pt>
                 <c:pt idx="101">
-                  <c:v>134</c:v>
+                  <c:v>133.75</c:v>
                 </c:pt>
                 <c:pt idx="102">
-                  <c:v>134</c:v>
+                  <c:v>133.75</c:v>
                 </c:pt>
                 <c:pt idx="103">
-                  <c:v>134</c:v>
+                  <c:v>133.75</c:v>
                 </c:pt>
                 <c:pt idx="104">
-                  <c:v>134</c:v>
+                  <c:v>133.75</c:v>
                 </c:pt>
                 <c:pt idx="105">
-                  <c:v>134</c:v>
+                  <c:v>133.75</c:v>
                 </c:pt>
                 <c:pt idx="106">
-                  <c:v>134</c:v>
+                  <c:v>133.75</c:v>
                 </c:pt>
                 <c:pt idx="107">
-                  <c:v>134</c:v>
+                  <c:v>133.75</c:v>
                 </c:pt>
                 <c:pt idx="108">
-                  <c:v>134</c:v>
+                  <c:v>133.75</c:v>
                 </c:pt>
                 <c:pt idx="109">
-                  <c:v>134</c:v>
+                  <c:v>133.75</c:v>
                 </c:pt>
                 <c:pt idx="110">
-                  <c:v>134</c:v>
+                  <c:v>133.75</c:v>
                 </c:pt>
                 <c:pt idx="111">
-                  <c:v>134</c:v>
+                  <c:v>133.75</c:v>
                 </c:pt>
                 <c:pt idx="112">
-                  <c:v>134</c:v>
+                  <c:v>133.75</c:v>
                 </c:pt>
                 <c:pt idx="113">
-                  <c:v>134</c:v>
+                  <c:v>133.75</c:v>
                 </c:pt>
                 <c:pt idx="114">
-                  <c:v>134</c:v>
+                  <c:v>133.75</c:v>
                 </c:pt>
                 <c:pt idx="115">
-                  <c:v>134</c:v>
+                  <c:v>133.75</c:v>
                 </c:pt>
                 <c:pt idx="116">
-                  <c:v>134</c:v>
+                  <c:v>133.75</c:v>
                 </c:pt>
                 <c:pt idx="117">
-                  <c:v>134</c:v>
+                  <c:v>133.75</c:v>
                 </c:pt>
                 <c:pt idx="118">
-                  <c:v>134</c:v>
+                  <c:v>133.75</c:v>
                 </c:pt>
                 <c:pt idx="119">
-                  <c:v>134</c:v>
+                  <c:v>133.75</c:v>
                 </c:pt>
                 <c:pt idx="120">
-                  <c:v>134</c:v>
+                  <c:v>133.75</c:v>
                 </c:pt>
                 <c:pt idx="121">
-                  <c:v>134</c:v>
+                  <c:v>133.75</c:v>
                 </c:pt>
                 <c:pt idx="122">
-                  <c:v>134</c:v>
+                  <c:v>133.75</c:v>
                 </c:pt>
                 <c:pt idx="123">
-                  <c:v>134</c:v>
+                  <c:v>133.75</c:v>
                 </c:pt>
                 <c:pt idx="124">
-                  <c:v>134</c:v>
+                  <c:v>133.75</c:v>
                 </c:pt>
                 <c:pt idx="125">
-                  <c:v>134</c:v>
+                  <c:v>133.75</c:v>
                 </c:pt>
                 <c:pt idx="126">
-                  <c:v>134</c:v>
+                  <c:v>133.75</c:v>
                 </c:pt>
                 <c:pt idx="127">
-                  <c:v>134</c:v>
+                  <c:v>133.75</c:v>
                 </c:pt>
                 <c:pt idx="128">
-                  <c:v>134</c:v>
+                  <c:v>133.75</c:v>
                 </c:pt>
                 <c:pt idx="129">
-                  <c:v>134</c:v>
+                  <c:v>133.75</c:v>
                 </c:pt>
                 <c:pt idx="130">
-                  <c:v>134</c:v>
+                  <c:v>133.75</c:v>
                 </c:pt>
                 <c:pt idx="131">
-                  <c:v>134</c:v>
+                  <c:v>133.75</c:v>
                 </c:pt>
                 <c:pt idx="132">
-                  <c:v>134</c:v>
+                  <c:v>133.75</c:v>
                 </c:pt>
                 <c:pt idx="133">
-                  <c:v>134</c:v>
+                  <c:v>133.75</c:v>
                 </c:pt>
                 <c:pt idx="134">
-                  <c:v>134</c:v>
+                  <c:v>133.75</c:v>
                 </c:pt>
                 <c:pt idx="135">
-                  <c:v>134</c:v>
+                  <c:v>133.75</c:v>
                 </c:pt>
                 <c:pt idx="136">
-                  <c:v>134</c:v>
+                  <c:v>133.75</c:v>
                 </c:pt>
                 <c:pt idx="137">
-                  <c:v>134</c:v>
+                  <c:v>133.75</c:v>
                 </c:pt>
                 <c:pt idx="138">
-                  <c:v>134</c:v>
+                  <c:v>133.75</c:v>
                 </c:pt>
                 <c:pt idx="139">
-                  <c:v>134</c:v>
+                  <c:v>133.75</c:v>
                 </c:pt>
                 <c:pt idx="140">
-                  <c:v>134</c:v>
+                  <c:v>133.75</c:v>
                 </c:pt>
               </c:numCache>
             </c:numRef>
@@ -2964,244 +2964,244 @@
                   <c:v>100</c:v>
                 </c:pt>
                 <c:pt idx="61">
-                  <c:v>100.944</c:v>
+                  <c:v>101.011</c:v>
                 </c:pt>
                 <c:pt idx="62">
-                  <c:v>101.888</c:v>
+                  <c:v>102.022</c:v>
                 </c:pt>
                 <c:pt idx="63">
-                  <c:v>102.832</c:v>
+                  <c:v>103.033</c:v>
                 </c:pt>
                 <c:pt idx="64">
-                  <c:v>103.776</c:v>
+                  <c:v>104.044</c:v>
                 </c:pt>
                 <c:pt idx="65">
-                  <c:v>104.72</c:v>
+                  <c:v>105.055</c:v>
                 </c:pt>
                 <c:pt idx="66">
-                  <c:v>105.664</c:v>
+                  <c:v>106.066</c:v>
                 </c:pt>
                 <c:pt idx="67">
-                  <c:v>106.608</c:v>
+                  <c:v>107.077</c:v>
                 </c:pt>
                 <c:pt idx="68">
-                  <c:v>107.55199999999999</c:v>
+                  <c:v>108.088</c:v>
                 </c:pt>
                 <c:pt idx="69">
-                  <c:v>108.496</c:v>
+                  <c:v>109.099</c:v>
                 </c:pt>
                 <c:pt idx="70">
-                  <c:v>109.44</c:v>
+                  <c:v>110.11</c:v>
                 </c:pt>
                 <c:pt idx="71">
-                  <c:v>110.384</c:v>
+                  <c:v>111.121</c:v>
                 </c:pt>
                 <c:pt idx="72">
-                  <c:v>111.328</c:v>
+                  <c:v>112.132</c:v>
                 </c:pt>
                 <c:pt idx="73">
-                  <c:v>112.27199999999999</c:v>
+                  <c:v>113.143</c:v>
                 </c:pt>
                 <c:pt idx="74">
-                  <c:v>113.216</c:v>
+                  <c:v>114.154</c:v>
                 </c:pt>
                 <c:pt idx="75">
-                  <c:v>114.16</c:v>
+                  <c:v>115.16499999999999</c:v>
                 </c:pt>
                 <c:pt idx="76">
-                  <c:v>115.104</c:v>
+                  <c:v>116.176</c:v>
                 </c:pt>
                 <c:pt idx="77">
-                  <c:v>116.048</c:v>
+                  <c:v>117.187</c:v>
                 </c:pt>
                 <c:pt idx="78">
-                  <c:v>116.99199999999999</c:v>
+                  <c:v>118.198</c:v>
                 </c:pt>
                 <c:pt idx="79">
-                  <c:v>117.936</c:v>
+                  <c:v>119.209</c:v>
                 </c:pt>
                 <c:pt idx="80">
-                  <c:v>118.88</c:v>
+                  <c:v>120.22</c:v>
                 </c:pt>
                 <c:pt idx="81">
-                  <c:v>119.824</c:v>
+                  <c:v>121.231</c:v>
                 </c:pt>
                 <c:pt idx="82">
-                  <c:v>120.768</c:v>
+                  <c:v>122.24199999999999</c:v>
                 </c:pt>
                 <c:pt idx="83">
-                  <c:v>121.712</c:v>
+                  <c:v>123.253</c:v>
                 </c:pt>
                 <c:pt idx="84">
-                  <c:v>122.656</c:v>
+                  <c:v>124.264</c:v>
                 </c:pt>
                 <c:pt idx="85">
-                  <c:v>123.6</c:v>
+                  <c:v>125.275</c:v>
                 </c:pt>
                 <c:pt idx="86">
-                  <c:v>124.544</c:v>
+                  <c:v>126.286</c:v>
                 </c:pt>
                 <c:pt idx="87">
-                  <c:v>125.488</c:v>
+                  <c:v>127.297</c:v>
                 </c:pt>
                 <c:pt idx="88">
-                  <c:v>126.432</c:v>
+                  <c:v>128.308</c:v>
                 </c:pt>
                 <c:pt idx="89">
-                  <c:v>127.376</c:v>
+                  <c:v>129.319</c:v>
                 </c:pt>
                 <c:pt idx="90">
-                  <c:v>128.32</c:v>
+                  <c:v>130.32999999999998</c:v>
                 </c:pt>
                 <c:pt idx="91">
-                  <c:v>129.264</c:v>
+                  <c:v>131.341</c:v>
                 </c:pt>
                 <c:pt idx="92">
-                  <c:v>130.208</c:v>
+                  <c:v>132.352</c:v>
                 </c:pt>
                 <c:pt idx="93">
-                  <c:v>131.152</c:v>
+                  <c:v>133.363</c:v>
                 </c:pt>
                 <c:pt idx="94">
-                  <c:v>132.096</c:v>
+                  <c:v>134.374</c:v>
                 </c:pt>
                 <c:pt idx="95">
-                  <c:v>133.04</c:v>
+                  <c:v>135.385</c:v>
                 </c:pt>
                 <c:pt idx="96">
-                  <c:v>133.98399999999998</c:v>
+                  <c:v>136.396</c:v>
                 </c:pt>
                 <c:pt idx="97">
-                  <c:v>134.928</c:v>
+                  <c:v>137.40699999999998</c:v>
                 </c:pt>
                 <c:pt idx="98">
-                  <c:v>135.872</c:v>
+                  <c:v>138.418</c:v>
                 </c:pt>
                 <c:pt idx="99">
-                  <c:v>136.816</c:v>
+                  <c:v>139.429</c:v>
                 </c:pt>
                 <c:pt idx="100">
-                  <c:v>137.76</c:v>
+                  <c:v>140.44</c:v>
                 </c:pt>
                 <c:pt idx="101">
-                  <c:v>138.704</c:v>
+                  <c:v>141.451</c:v>
                 </c:pt>
                 <c:pt idx="102">
-                  <c:v>139.648</c:v>
+                  <c:v>142.462</c:v>
                 </c:pt>
                 <c:pt idx="103">
-                  <c:v>140.59199999999998</c:v>
+                  <c:v>143.473</c:v>
                 </c:pt>
                 <c:pt idx="104">
-                  <c:v>141.536</c:v>
+                  <c:v>144.48399999999998</c:v>
                 </c:pt>
                 <c:pt idx="105">
-                  <c:v>142.48</c:v>
+                  <c:v>145.495</c:v>
                 </c:pt>
                 <c:pt idx="106">
-                  <c:v>143.424</c:v>
+                  <c:v>146.506</c:v>
                 </c:pt>
                 <c:pt idx="107">
-                  <c:v>144.368</c:v>
+                  <c:v>147.517</c:v>
                 </c:pt>
                 <c:pt idx="108">
-                  <c:v>145.312</c:v>
+                  <c:v>148.528</c:v>
                 </c:pt>
                 <c:pt idx="109">
-                  <c:v>146.256</c:v>
+                  <c:v>149.539</c:v>
                 </c:pt>
                 <c:pt idx="110">
-                  <c:v>147.2</c:v>
+                  <c:v>150.55</c:v>
                 </c:pt>
                 <c:pt idx="111">
-                  <c:v>148.144</c:v>
+                  <c:v>151.56099999999998</c:v>
                 </c:pt>
                 <c:pt idx="112">
-                  <c:v>149.088</c:v>
+                  <c:v>152.572</c:v>
                 </c:pt>
                 <c:pt idx="113">
-                  <c:v>150.03199999999998</c:v>
+                  <c:v>153.583</c:v>
                 </c:pt>
                 <c:pt idx="114">
-                  <c:v>150.976</c:v>
+                  <c:v>154.594</c:v>
                 </c:pt>
                 <c:pt idx="115">
-                  <c:v>151.92</c:v>
+                  <c:v>155.605</c:v>
                 </c:pt>
                 <c:pt idx="116">
-                  <c:v>152.864</c:v>
+                  <c:v>156.61599999999999</c:v>
                 </c:pt>
                 <c:pt idx="117">
-                  <c:v>153.808</c:v>
+                  <c:v>157.627</c:v>
                 </c:pt>
                 <c:pt idx="118">
-                  <c:v>154.752</c:v>
+                  <c:v>158.63799999999998</c:v>
                 </c:pt>
                 <c:pt idx="119">
-                  <c:v>155.696</c:v>
+                  <c:v>159.649</c:v>
                 </c:pt>
                 <c:pt idx="120">
-                  <c:v>156.64</c:v>
+                  <c:v>160.66</c:v>
                 </c:pt>
                 <c:pt idx="121">
-                  <c:v>157.584</c:v>
+                  <c:v>161.671</c:v>
                 </c:pt>
                 <c:pt idx="122">
-                  <c:v>158.528</c:v>
+                  <c:v>162.682</c:v>
                 </c:pt>
                 <c:pt idx="123">
-                  <c:v>159.47199999999998</c:v>
+                  <c:v>163.69299999999998</c:v>
                 </c:pt>
                 <c:pt idx="124">
-                  <c:v>160.416</c:v>
+                  <c:v>164.704</c:v>
                 </c:pt>
                 <c:pt idx="125">
-                  <c:v>161.36</c:v>
+                  <c:v>165.71499999999997</c:v>
                 </c:pt>
                 <c:pt idx="126">
-                  <c:v>162.304</c:v>
+                  <c:v>166.726</c:v>
                 </c:pt>
                 <c:pt idx="127">
-                  <c:v>163.248</c:v>
+                  <c:v>167.737</c:v>
                 </c:pt>
                 <c:pt idx="128">
-                  <c:v>164.192</c:v>
+                  <c:v>168.748</c:v>
                 </c:pt>
                 <c:pt idx="129">
-                  <c:v>165.136</c:v>
+                  <c:v>169.759</c:v>
                 </c:pt>
                 <c:pt idx="130">
-                  <c:v>166.07999999999998</c:v>
+                  <c:v>170.76999999999998</c:v>
                 </c:pt>
                 <c:pt idx="131">
-                  <c:v>167.024</c:v>
+                  <c:v>171.781</c:v>
                 </c:pt>
                 <c:pt idx="132">
-                  <c:v>167.968</c:v>
+                  <c:v>172.79199999999997</c:v>
                 </c:pt>
                 <c:pt idx="133">
-                  <c:v>168.91199999999998</c:v>
+                  <c:v>173.803</c:v>
                 </c:pt>
                 <c:pt idx="134">
-                  <c:v>169.856</c:v>
+                  <c:v>174.814</c:v>
                 </c:pt>
                 <c:pt idx="135">
-                  <c:v>170.8</c:v>
+                  <c:v>175.825</c:v>
                 </c:pt>
                 <c:pt idx="136">
-                  <c:v>171.744</c:v>
+                  <c:v>176.836</c:v>
                 </c:pt>
                 <c:pt idx="137">
-                  <c:v>172.688</c:v>
+                  <c:v>177.84699999999998</c:v>
                 </c:pt>
                 <c:pt idx="138">
-                  <c:v>173.632</c:v>
+                  <c:v>178.858</c:v>
                 </c:pt>
                 <c:pt idx="139">
-                  <c:v>174.576</c:v>
+                  <c:v>179.86899999999997</c:v>
                 </c:pt>
                 <c:pt idx="140">
-                  <c:v>175.51999999999998</c:v>
+                  <c:v>180.88</c:v>
                 </c:pt>
               </c:numCache>
             </c:numRef>
@@ -4344,16 +4344,6 @@
               <a:effectLst/>
             </c:spPr>
           </c:dPt>
-          <c:dPt>
-            <c:idx val="3"/>
-            <c:bubble3D val="0"/>
-            <c:spPr>
-              <a:solidFill>
-                <a:srgbClr val="8FA6AA"/>
-              </a:solidFill>
-              <a:effectLst/>
-            </c:spPr>
-          </c:dPt>
           <c:dLbls>
             <c:dLbl>
               <c:idx val="0"/>
@@ -4407,31 +4397,6 @@
             </c:dLbl>
             <c:dLbl>
               <c:idx val="2"/>
-              <c:numFmt formatCode="0&quot;%&quot;" sourceLinked="0"/>
-              <c:spPr/>
-              <c:txPr>
-                <a:bodyPr/>
-                <a:lstStyle/>
-                <a:p>
-                  <a:pPr>
-                    <a:defRPr sz="1000" b="1" i="0" u="none" strike="noStrike">
-                      <a:solidFill>
-                        <a:srgbClr val="FFFFFF"/>
-                      </a:solidFill>
-                      <a:latin typeface="Arial"/>
-                    </a:defRPr>
-                  </a:pPr>
-                </a:p>
-              </c:txPr>
-              <c:showLegendKey val="0"/>
-              <c:showVal val="1"/>
-              <c:showCatName val="0"/>
-              <c:showSerName val="0"/>
-              <c:showPercent val="0"/>
-              <c:showBubbleSize val="0"/>
-            </c:dLbl>
-            <c:dLbl>
-              <c:idx val="3"/>
               <c:numFmt formatCode="0&quot;%&quot;" sourceLinked="0"/>
               <c:spPr/>
               <c:txPr>
@@ -4480,9 +4445,9 @@
           </c:dLbls>
           <c:cat>
             <c:strRef>
-              <c:f>Sheet1!$A$2:$A$5</c:f>
+              <c:f>Sheet1!$A$2:$A$4</c:f>
               <c:strCache>
-                <c:ptCount val="4"/>
+                <c:ptCount val="3"/>
                 <c:pt idx="0">
                   <c:v>Taiwan TAIEX</c:v>
                 </c:pt>
@@ -4491,29 +4456,23 @@
                 </c:pt>
                 <c:pt idx="2">
                   <c:v>Nikkei 225</c:v>
-                </c:pt>
-                <c:pt idx="3">
-                  <c:v>PHLX Semiconductor</c:v>
                 </c:pt>
               </c:strCache>
             </c:strRef>
           </c:cat>
           <c:val>
             <c:numRef>
-              <c:f>Sheet1!$B$2:$B$5</c:f>
+              <c:f>Sheet1!$B$2:$B$4</c:f>
               <c:numCache>
-                <c:ptCount val="4"/>
+                <c:ptCount val="3"/>
                 <c:pt idx="0">
-                  <c:v>35</c:v>
+                  <c:v>40</c:v>
                 </c:pt>
                 <c:pt idx="1">
-                  <c:v>25</c:v>
+                  <c:v>30</c:v>
                 </c:pt>
                 <c:pt idx="2">
-                  <c:v>20</c:v>
-                </c:pt>
-                <c:pt idx="3">
-                  <c:v>20</c:v>
+                  <c:v>30</c:v>
                 </c:pt>
               </c:numCache>
             </c:numRef>
@@ -4700,55 +4659,55 @@
                 <c:formatCode>General</c:formatCode>
                 <c:ptCount val="17"/>
                 <c:pt idx="0">
-                  <c:v>106.8</c:v>
+                  <c:v>106.75</c:v>
                 </c:pt>
                 <c:pt idx="1">
-                  <c:v>108.5</c:v>
+                  <c:v>108.438</c:v>
                 </c:pt>
                 <c:pt idx="2">
-                  <c:v>110.2</c:v>
+                  <c:v>110.125</c:v>
                 </c:pt>
                 <c:pt idx="3">
-                  <c:v>111.9</c:v>
+                  <c:v>111.813</c:v>
                 </c:pt>
                 <c:pt idx="4">
-                  <c:v>113.6</c:v>
+                  <c:v>113.5</c:v>
                 </c:pt>
                 <c:pt idx="5">
-                  <c:v>115.3</c:v>
+                  <c:v>115.188</c:v>
                 </c:pt>
                 <c:pt idx="6">
-                  <c:v>117</c:v>
+                  <c:v>116.875</c:v>
                 </c:pt>
                 <c:pt idx="7">
-                  <c:v>118.7</c:v>
+                  <c:v>118.563</c:v>
                 </c:pt>
                 <c:pt idx="8">
-                  <c:v>120.4</c:v>
+                  <c:v>120.25</c:v>
                 </c:pt>
                 <c:pt idx="9">
-                  <c:v>122.1</c:v>
+                  <c:v>121.938</c:v>
                 </c:pt>
                 <c:pt idx="10">
-                  <c:v>123.8</c:v>
+                  <c:v>123.625</c:v>
                 </c:pt>
                 <c:pt idx="11">
-                  <c:v>125.5</c:v>
+                  <c:v>125.313</c:v>
                 </c:pt>
                 <c:pt idx="12">
-                  <c:v>127.2</c:v>
+                  <c:v>127</c:v>
                 </c:pt>
                 <c:pt idx="13">
-                  <c:v>128.9</c:v>
+                  <c:v>128.688</c:v>
                 </c:pt>
                 <c:pt idx="14">
-                  <c:v>130.6</c:v>
+                  <c:v>130.375</c:v>
                 </c:pt>
                 <c:pt idx="15">
-                  <c:v>132.3</c:v>
+                  <c:v>132.063</c:v>
                 </c:pt>
                 <c:pt idx="16">
-                  <c:v>134</c:v>
+                  <c:v>133.75</c:v>
                 </c:pt>
               </c:numCache>
             </c:numRef>
@@ -6202,367 +6161,367 @@
                   <c:v>100</c:v>
                 </c:pt>
                 <c:pt idx="140">
-                  <c:v>134</c:v>
+                  <c:v>133.75</c:v>
                 </c:pt>
                 <c:pt idx="141">
-                  <c:v>134</c:v>
+                  <c:v>133.75</c:v>
                 </c:pt>
                 <c:pt idx="142">
-                  <c:v>134</c:v>
+                  <c:v>133.75</c:v>
                 </c:pt>
                 <c:pt idx="143">
-                  <c:v>134</c:v>
+                  <c:v>133.75</c:v>
                 </c:pt>
                 <c:pt idx="144">
-                  <c:v>134</c:v>
+                  <c:v>133.75</c:v>
                 </c:pt>
                 <c:pt idx="145">
-                  <c:v>134</c:v>
+                  <c:v>133.75</c:v>
                 </c:pt>
                 <c:pt idx="146">
-                  <c:v>134</c:v>
+                  <c:v>133.75</c:v>
                 </c:pt>
                 <c:pt idx="147">
-                  <c:v>134</c:v>
+                  <c:v>133.75</c:v>
                 </c:pt>
                 <c:pt idx="148">
-                  <c:v>134</c:v>
+                  <c:v>133.75</c:v>
                 </c:pt>
                 <c:pt idx="149">
-                  <c:v>134</c:v>
+                  <c:v>133.75</c:v>
                 </c:pt>
                 <c:pt idx="150">
-                  <c:v>134</c:v>
+                  <c:v>133.75</c:v>
                 </c:pt>
                 <c:pt idx="151">
-                  <c:v>134</c:v>
+                  <c:v>133.75</c:v>
                 </c:pt>
                 <c:pt idx="152">
-                  <c:v>134</c:v>
+                  <c:v>133.75</c:v>
                 </c:pt>
                 <c:pt idx="153">
-                  <c:v>134</c:v>
+                  <c:v>133.75</c:v>
                 </c:pt>
                 <c:pt idx="154">
-                  <c:v>134</c:v>
+                  <c:v>133.75</c:v>
                 </c:pt>
                 <c:pt idx="155">
-                  <c:v>134</c:v>
+                  <c:v>133.75</c:v>
                 </c:pt>
                 <c:pt idx="156">
-                  <c:v>134</c:v>
+                  <c:v>133.75</c:v>
                 </c:pt>
                 <c:pt idx="157">
-                  <c:v>134</c:v>
+                  <c:v>133.75</c:v>
                 </c:pt>
                 <c:pt idx="158">
-                  <c:v>134</c:v>
+                  <c:v>133.75</c:v>
                 </c:pt>
                 <c:pt idx="159">
-                  <c:v>134</c:v>
+                  <c:v>133.75</c:v>
                 </c:pt>
                 <c:pt idx="160">
-                  <c:v>134</c:v>
+                  <c:v>133.75</c:v>
                 </c:pt>
                 <c:pt idx="161">
-                  <c:v>134</c:v>
+                  <c:v>133.75</c:v>
                 </c:pt>
                 <c:pt idx="162">
-                  <c:v>134</c:v>
+                  <c:v>133.75</c:v>
                 </c:pt>
                 <c:pt idx="163">
-                  <c:v>134</c:v>
+                  <c:v>133.75</c:v>
                 </c:pt>
                 <c:pt idx="164">
-                  <c:v>134</c:v>
+                  <c:v>133.75</c:v>
                 </c:pt>
                 <c:pt idx="165">
-                  <c:v>134</c:v>
+                  <c:v>133.75</c:v>
                 </c:pt>
                 <c:pt idx="166">
-                  <c:v>134</c:v>
+                  <c:v>133.75</c:v>
                 </c:pt>
                 <c:pt idx="167">
-                  <c:v>134</c:v>
+                  <c:v>133.75</c:v>
                 </c:pt>
                 <c:pt idx="168">
-                  <c:v>134</c:v>
+                  <c:v>133.75</c:v>
                 </c:pt>
                 <c:pt idx="169">
-                  <c:v>134</c:v>
+                  <c:v>133.75</c:v>
                 </c:pt>
                 <c:pt idx="170">
-                  <c:v>134</c:v>
+                  <c:v>133.75</c:v>
                 </c:pt>
                 <c:pt idx="171">
-                  <c:v>134</c:v>
+                  <c:v>133.75</c:v>
                 </c:pt>
                 <c:pt idx="172">
-                  <c:v>134</c:v>
+                  <c:v>133.75</c:v>
                 </c:pt>
                 <c:pt idx="173">
-                  <c:v>134</c:v>
+                  <c:v>133.75</c:v>
                 </c:pt>
                 <c:pt idx="174">
-                  <c:v>134</c:v>
+                  <c:v>133.75</c:v>
                 </c:pt>
                 <c:pt idx="175">
-                  <c:v>134</c:v>
+                  <c:v>133.75</c:v>
                 </c:pt>
                 <c:pt idx="176">
-                  <c:v>134</c:v>
+                  <c:v>133.75</c:v>
                 </c:pt>
                 <c:pt idx="177">
-                  <c:v>134</c:v>
+                  <c:v>133.75</c:v>
                 </c:pt>
                 <c:pt idx="178">
-                  <c:v>134</c:v>
+                  <c:v>133.75</c:v>
                 </c:pt>
                 <c:pt idx="179">
-                  <c:v>134</c:v>
+                  <c:v>133.75</c:v>
                 </c:pt>
                 <c:pt idx="180">
-                  <c:v>134</c:v>
+                  <c:v>133.75</c:v>
                 </c:pt>
                 <c:pt idx="181">
-                  <c:v>134</c:v>
+                  <c:v>133.75</c:v>
                 </c:pt>
                 <c:pt idx="182">
-                  <c:v>134</c:v>
+                  <c:v>133.75</c:v>
                 </c:pt>
                 <c:pt idx="183">
-                  <c:v>134</c:v>
+                  <c:v>133.75</c:v>
                 </c:pt>
                 <c:pt idx="184">
-                  <c:v>134</c:v>
+                  <c:v>133.75</c:v>
                 </c:pt>
                 <c:pt idx="185">
-                  <c:v>134</c:v>
+                  <c:v>133.75</c:v>
                 </c:pt>
                 <c:pt idx="186">
-                  <c:v>134</c:v>
+                  <c:v>133.75</c:v>
                 </c:pt>
                 <c:pt idx="187">
-                  <c:v>134</c:v>
+                  <c:v>133.75</c:v>
                 </c:pt>
                 <c:pt idx="188">
-                  <c:v>134</c:v>
+                  <c:v>133.75</c:v>
                 </c:pt>
                 <c:pt idx="189">
-                  <c:v>134</c:v>
+                  <c:v>133.75</c:v>
                 </c:pt>
                 <c:pt idx="190">
-                  <c:v>134</c:v>
+                  <c:v>133.75</c:v>
                 </c:pt>
                 <c:pt idx="191">
-                  <c:v>134</c:v>
+                  <c:v>133.75</c:v>
                 </c:pt>
                 <c:pt idx="192">
-                  <c:v>134</c:v>
+                  <c:v>133.75</c:v>
                 </c:pt>
                 <c:pt idx="193">
-                  <c:v>134</c:v>
+                  <c:v>133.75</c:v>
                 </c:pt>
                 <c:pt idx="194">
-                  <c:v>134</c:v>
+                  <c:v>133.75</c:v>
                 </c:pt>
                 <c:pt idx="195">
-                  <c:v>134</c:v>
+                  <c:v>133.75</c:v>
                 </c:pt>
                 <c:pt idx="196">
-                  <c:v>134</c:v>
+                  <c:v>133.75</c:v>
                 </c:pt>
                 <c:pt idx="197">
-                  <c:v>134</c:v>
+                  <c:v>133.75</c:v>
                 </c:pt>
                 <c:pt idx="198">
-                  <c:v>134</c:v>
+                  <c:v>133.75</c:v>
                 </c:pt>
                 <c:pt idx="199">
-                  <c:v>134</c:v>
+                  <c:v>133.75</c:v>
                 </c:pt>
                 <c:pt idx="200">
-                  <c:v>134</c:v>
+                  <c:v>133.75</c:v>
                 </c:pt>
                 <c:pt idx="201">
-                  <c:v>134</c:v>
+                  <c:v>133.75</c:v>
                 </c:pt>
                 <c:pt idx="202">
-                  <c:v>134</c:v>
+                  <c:v>133.75</c:v>
                 </c:pt>
                 <c:pt idx="203">
-                  <c:v>134</c:v>
+                  <c:v>133.75</c:v>
                 </c:pt>
                 <c:pt idx="204">
-                  <c:v>134</c:v>
+                  <c:v>133.75</c:v>
                 </c:pt>
                 <c:pt idx="205">
-                  <c:v>134</c:v>
+                  <c:v>133.75</c:v>
                 </c:pt>
                 <c:pt idx="206">
-                  <c:v>134</c:v>
+                  <c:v>133.75</c:v>
                 </c:pt>
                 <c:pt idx="207">
-                  <c:v>134</c:v>
+                  <c:v>133.75</c:v>
                 </c:pt>
                 <c:pt idx="208">
-                  <c:v>134</c:v>
+                  <c:v>133.75</c:v>
                 </c:pt>
                 <c:pt idx="209">
-                  <c:v>134</c:v>
+                  <c:v>133.75</c:v>
                 </c:pt>
                 <c:pt idx="210">
-                  <c:v>134</c:v>
+                  <c:v>133.75</c:v>
                 </c:pt>
                 <c:pt idx="211">
-                  <c:v>134</c:v>
+                  <c:v>133.75</c:v>
                 </c:pt>
                 <c:pt idx="212">
-                  <c:v>134</c:v>
+                  <c:v>133.75</c:v>
                 </c:pt>
                 <c:pt idx="213">
-                  <c:v>134</c:v>
+                  <c:v>133.75</c:v>
                 </c:pt>
                 <c:pt idx="214">
-                  <c:v>134</c:v>
+                  <c:v>133.75</c:v>
                 </c:pt>
                 <c:pt idx="215">
-                  <c:v>134</c:v>
+                  <c:v>133.75</c:v>
                 </c:pt>
                 <c:pt idx="216">
-                  <c:v>134</c:v>
+                  <c:v>133.75</c:v>
                 </c:pt>
                 <c:pt idx="217">
-                  <c:v>134</c:v>
+                  <c:v>133.75</c:v>
                 </c:pt>
                 <c:pt idx="218">
-                  <c:v>134</c:v>
+                  <c:v>133.75</c:v>
                 </c:pt>
                 <c:pt idx="219">
-                  <c:v>134</c:v>
+                  <c:v>133.75</c:v>
                 </c:pt>
                 <c:pt idx="220">
-                  <c:v>134</c:v>
+                  <c:v>133.75</c:v>
                 </c:pt>
                 <c:pt idx="221">
-                  <c:v>134</c:v>
+                  <c:v>133.75</c:v>
                 </c:pt>
                 <c:pt idx="222">
-                  <c:v>134</c:v>
+                  <c:v>133.75</c:v>
                 </c:pt>
                 <c:pt idx="223">
-                  <c:v>134</c:v>
+                  <c:v>133.75</c:v>
                 </c:pt>
                 <c:pt idx="224">
-                  <c:v>134</c:v>
+                  <c:v>133.75</c:v>
                 </c:pt>
                 <c:pt idx="225">
-                  <c:v>134</c:v>
+                  <c:v>133.75</c:v>
                 </c:pt>
                 <c:pt idx="226">
-                  <c:v>134</c:v>
+                  <c:v>133.75</c:v>
                 </c:pt>
                 <c:pt idx="227">
-                  <c:v>134</c:v>
+                  <c:v>133.75</c:v>
                 </c:pt>
                 <c:pt idx="228">
-                  <c:v>134</c:v>
+                  <c:v>133.75</c:v>
                 </c:pt>
                 <c:pt idx="229">
-                  <c:v>134</c:v>
+                  <c:v>133.75</c:v>
                 </c:pt>
                 <c:pt idx="230">
-                  <c:v>134</c:v>
+                  <c:v>133.75</c:v>
                 </c:pt>
                 <c:pt idx="231">
-                  <c:v>134</c:v>
+                  <c:v>133.75</c:v>
                 </c:pt>
                 <c:pt idx="232">
-                  <c:v>134</c:v>
+                  <c:v>133.75</c:v>
                 </c:pt>
                 <c:pt idx="233">
-                  <c:v>134</c:v>
+                  <c:v>133.75</c:v>
                 </c:pt>
                 <c:pt idx="234">
-                  <c:v>134</c:v>
+                  <c:v>133.75</c:v>
                 </c:pt>
                 <c:pt idx="235">
-                  <c:v>134</c:v>
+                  <c:v>133.75</c:v>
                 </c:pt>
                 <c:pt idx="236">
-                  <c:v>134</c:v>
+                  <c:v>133.75</c:v>
                 </c:pt>
                 <c:pt idx="237">
-                  <c:v>134</c:v>
+                  <c:v>133.75</c:v>
                 </c:pt>
                 <c:pt idx="238">
-                  <c:v>134</c:v>
+                  <c:v>133.75</c:v>
                 </c:pt>
                 <c:pt idx="239">
-                  <c:v>134</c:v>
+                  <c:v>133.75</c:v>
                 </c:pt>
                 <c:pt idx="240">
-                  <c:v>134</c:v>
+                  <c:v>133.75</c:v>
                 </c:pt>
                 <c:pt idx="241">
-                  <c:v>134</c:v>
+                  <c:v>133.75</c:v>
                 </c:pt>
                 <c:pt idx="242">
-                  <c:v>134</c:v>
+                  <c:v>133.75</c:v>
                 </c:pt>
                 <c:pt idx="243">
-                  <c:v>134</c:v>
+                  <c:v>133.75</c:v>
                 </c:pt>
                 <c:pt idx="244">
-                  <c:v>134</c:v>
+                  <c:v>133.75</c:v>
                 </c:pt>
                 <c:pt idx="245">
-                  <c:v>134</c:v>
+                  <c:v>133.75</c:v>
                 </c:pt>
                 <c:pt idx="246">
-                  <c:v>134</c:v>
+                  <c:v>133.75</c:v>
                 </c:pt>
                 <c:pt idx="247">
-                  <c:v>134</c:v>
+                  <c:v>133.75</c:v>
                 </c:pt>
                 <c:pt idx="248">
-                  <c:v>134</c:v>
+                  <c:v>133.75</c:v>
                 </c:pt>
                 <c:pt idx="249">
-                  <c:v>134</c:v>
+                  <c:v>133.75</c:v>
                 </c:pt>
                 <c:pt idx="250">
-                  <c:v>134</c:v>
+                  <c:v>133.75</c:v>
                 </c:pt>
                 <c:pt idx="251">
-                  <c:v>134</c:v>
+                  <c:v>133.75</c:v>
                 </c:pt>
                 <c:pt idx="252">
-                  <c:v>134</c:v>
+                  <c:v>133.75</c:v>
                 </c:pt>
                 <c:pt idx="253">
-                  <c:v>134</c:v>
+                  <c:v>133.75</c:v>
                 </c:pt>
                 <c:pt idx="254">
-                  <c:v>134</c:v>
+                  <c:v>133.75</c:v>
                 </c:pt>
                 <c:pt idx="255">
-                  <c:v>134</c:v>
+                  <c:v>133.75</c:v>
                 </c:pt>
                 <c:pt idx="256">
-                  <c:v>134</c:v>
+                  <c:v>133.75</c:v>
                 </c:pt>
                 <c:pt idx="257">
-                  <c:v>134</c:v>
+                  <c:v>133.75</c:v>
                 </c:pt>
                 <c:pt idx="258">
-                  <c:v>134</c:v>
+                  <c:v>133.75</c:v>
                 </c:pt>
                 <c:pt idx="259">
-                  <c:v>134</c:v>
+                  <c:v>133.75</c:v>
                 </c:pt>
                 <c:pt idx="260">
-                  <c:v>134</c:v>
+                  <c:v>133.75</c:v>
                 </c:pt>
               </c:numCache>
             </c:numRef>
@@ -10005,187 +9964,187 @@
                   <c:v>0</c:v>
                 </c:pt>
                 <c:pt idx="60">
-                  <c:v>1.7000000000000002</c:v>
+                  <c:v>1.6875</c:v>
                 </c:pt>
                 <c:pt idx="61">
-                  <c:v>1.7000000000000002</c:v>
+                  <c:v>1.6875</c:v>
                 </c:pt>
                 <c:pt idx="62">
-                  <c:v>1.7000000000000002</c:v>
+                  <c:v>1.6875</c:v>
                 </c:pt>
                 <c:pt idx="63">
-                  <c:v>1.7000000000000002</c:v>
+                  <c:v>1.6875</c:v>
                 </c:pt>
                 <c:pt idx="64">
-                  <c:v>1.7000000000000002</c:v>
+                  <c:v>1.6875</c:v>
                 </c:pt>
                 <c:pt idx="65">
-                  <c:v>1.7000000000000002</c:v>
+                  <c:v>1.6875</c:v>
                 </c:pt>
                 <c:pt idx="66">
-                  <c:v>1.7000000000000002</c:v>
+                  <c:v>1.6875</c:v>
                 </c:pt>
                 <c:pt idx="67">
-                  <c:v>1.7000000000000002</c:v>
+                  <c:v>1.6875</c:v>
                 </c:pt>
                 <c:pt idx="68">
-                  <c:v>1.7000000000000002</c:v>
+                  <c:v>1.6875</c:v>
                 </c:pt>
                 <c:pt idx="69">
-                  <c:v>1.7000000000000002</c:v>
+                  <c:v>1.6875</c:v>
                 </c:pt>
                 <c:pt idx="70">
-                  <c:v>1.7000000000000002</c:v>
+                  <c:v>1.6875</c:v>
                 </c:pt>
                 <c:pt idx="71">
-                  <c:v>1.7000000000000002</c:v>
+                  <c:v>1.6875</c:v>
                 </c:pt>
                 <c:pt idx="72">
-                  <c:v>1.7000000000000002</c:v>
+                  <c:v>1.6875</c:v>
                 </c:pt>
                 <c:pt idx="73">
-                  <c:v>1.7000000000000002</c:v>
+                  <c:v>1.6875</c:v>
                 </c:pt>
                 <c:pt idx="74">
-                  <c:v>1.7000000000000002</c:v>
+                  <c:v>1.6875</c:v>
                 </c:pt>
                 <c:pt idx="75">
-                  <c:v>1.7000000000000002</c:v>
+                  <c:v>1.6875</c:v>
                 </c:pt>
                 <c:pt idx="76">
-                  <c:v>1.7000000000000002</c:v>
+                  <c:v>1.6875</c:v>
                 </c:pt>
                 <c:pt idx="77">
-                  <c:v>1.7000000000000002</c:v>
+                  <c:v>1.6875</c:v>
                 </c:pt>
                 <c:pt idx="78">
-                  <c:v>1.7000000000000002</c:v>
+                  <c:v>1.6875</c:v>
                 </c:pt>
                 <c:pt idx="79">
-                  <c:v>1.7000000000000002</c:v>
+                  <c:v>1.6875</c:v>
                 </c:pt>
                 <c:pt idx="80">
-                  <c:v>1.7000000000000002</c:v>
+                  <c:v>1.6875</c:v>
                 </c:pt>
                 <c:pt idx="81">
-                  <c:v>1.7000000000000002</c:v>
+                  <c:v>1.6875</c:v>
                 </c:pt>
                 <c:pt idx="82">
-                  <c:v>1.7000000000000002</c:v>
+                  <c:v>1.6875</c:v>
                 </c:pt>
                 <c:pt idx="83">
-                  <c:v>1.7000000000000002</c:v>
+                  <c:v>1.6875</c:v>
                 </c:pt>
                 <c:pt idx="84">
-                  <c:v>1.7000000000000002</c:v>
+                  <c:v>1.6875</c:v>
                 </c:pt>
                 <c:pt idx="85">
-                  <c:v>1.7000000000000002</c:v>
+                  <c:v>1.6875</c:v>
                 </c:pt>
                 <c:pt idx="86">
-                  <c:v>1.7000000000000002</c:v>
+                  <c:v>1.6875</c:v>
                 </c:pt>
                 <c:pt idx="87">
-                  <c:v>1.7000000000000002</c:v>
+                  <c:v>1.6875</c:v>
                 </c:pt>
                 <c:pt idx="88">
-                  <c:v>1.7000000000000002</c:v>
+                  <c:v>1.6875</c:v>
                 </c:pt>
                 <c:pt idx="89">
-                  <c:v>1.7000000000000002</c:v>
+                  <c:v>1.6875</c:v>
                 </c:pt>
                 <c:pt idx="90">
-                  <c:v>1.7000000000000002</c:v>
+                  <c:v>1.6875</c:v>
                 </c:pt>
                 <c:pt idx="91">
-                  <c:v>1.7000000000000002</c:v>
+                  <c:v>1.6875</c:v>
                 </c:pt>
                 <c:pt idx="92">
-                  <c:v>1.7000000000000002</c:v>
+                  <c:v>1.6875</c:v>
                 </c:pt>
                 <c:pt idx="93">
-                  <c:v>1.7000000000000002</c:v>
+                  <c:v>1.6875</c:v>
                 </c:pt>
                 <c:pt idx="94">
-                  <c:v>1.7000000000000002</c:v>
+                  <c:v>1.6875</c:v>
                 </c:pt>
                 <c:pt idx="95">
-                  <c:v>1.7000000000000002</c:v>
+                  <c:v>1.6875</c:v>
                 </c:pt>
                 <c:pt idx="96">
-                  <c:v>1.7000000000000002</c:v>
+                  <c:v>1.6875</c:v>
                 </c:pt>
                 <c:pt idx="97">
-                  <c:v>1.7000000000000002</c:v>
+                  <c:v>1.6875</c:v>
                 </c:pt>
                 <c:pt idx="98">
-                  <c:v>1.7000000000000002</c:v>
+                  <c:v>1.6875</c:v>
                 </c:pt>
                 <c:pt idx="99">
-                  <c:v>1.7000000000000002</c:v>
+                  <c:v>1.6875</c:v>
                 </c:pt>
                 <c:pt idx="100">
-                  <c:v>1.7000000000000002</c:v>
+                  <c:v>1.6875</c:v>
                 </c:pt>
                 <c:pt idx="101">
-                  <c:v>1.7000000000000002</c:v>
+                  <c:v>1.6875</c:v>
                 </c:pt>
                 <c:pt idx="102">
-                  <c:v>1.7000000000000002</c:v>
+                  <c:v>1.6875</c:v>
                 </c:pt>
                 <c:pt idx="103">
-                  <c:v>1.7000000000000002</c:v>
+                  <c:v>1.6875</c:v>
                 </c:pt>
                 <c:pt idx="104">
-                  <c:v>1.7000000000000002</c:v>
+                  <c:v>1.6875</c:v>
                 </c:pt>
                 <c:pt idx="105">
-                  <c:v>1.7000000000000002</c:v>
+                  <c:v>1.6875</c:v>
                 </c:pt>
                 <c:pt idx="106">
-                  <c:v>1.7000000000000002</c:v>
+                  <c:v>1.6875</c:v>
                 </c:pt>
                 <c:pt idx="107">
-                  <c:v>1.7000000000000002</c:v>
+                  <c:v>1.6875</c:v>
                 </c:pt>
                 <c:pt idx="108">
-                  <c:v>1.7000000000000002</c:v>
+                  <c:v>1.6875</c:v>
                 </c:pt>
                 <c:pt idx="109">
-                  <c:v>1.7000000000000002</c:v>
+                  <c:v>1.6875</c:v>
                 </c:pt>
                 <c:pt idx="110">
-                  <c:v>1.7000000000000002</c:v>
+                  <c:v>1.6875</c:v>
                 </c:pt>
                 <c:pt idx="111">
-                  <c:v>1.7000000000000002</c:v>
+                  <c:v>1.6875</c:v>
                 </c:pt>
                 <c:pt idx="112">
-                  <c:v>1.7000000000000002</c:v>
+                  <c:v>1.6875</c:v>
                 </c:pt>
                 <c:pt idx="113">
-                  <c:v>1.7000000000000002</c:v>
+                  <c:v>1.6875</c:v>
                 </c:pt>
                 <c:pt idx="114">
-                  <c:v>1.7000000000000002</c:v>
+                  <c:v>1.6875</c:v>
                 </c:pt>
                 <c:pt idx="115">
-                  <c:v>1.7000000000000002</c:v>
+                  <c:v>1.6875</c:v>
                 </c:pt>
                 <c:pt idx="116">
-                  <c:v>1.7000000000000002</c:v>
+                  <c:v>1.6875</c:v>
                 </c:pt>
                 <c:pt idx="117">
-                  <c:v>1.7000000000000002</c:v>
+                  <c:v>1.6875</c:v>
                 </c:pt>
                 <c:pt idx="118">
-                  <c:v>1.7000000000000002</c:v>
+                  <c:v>1.6875</c:v>
                 </c:pt>
                 <c:pt idx="119">
-                  <c:v>1.7000000000000002</c:v>
+                  <c:v>1.6875</c:v>
                 </c:pt>
                 <c:pt idx="120">
-                  <c:v>1.7000000000000002</c:v>
+                  <c:v>1.6875</c:v>
                 </c:pt>
               </c:numCache>
             </c:numRef>
@@ -12722,19 +12681,19 @@
                 <c:formatCode>General</c:formatCode>
                 <c:ptCount val="5"/>
                 <c:pt idx="0">
-                  <c:v>50.7</c:v>
+                  <c:v>51</c:v>
                 </c:pt>
                 <c:pt idx="1">
                   <c:v>68.9</c:v>
                 </c:pt>
                 <c:pt idx="2">
-                  <c:v>75.6</c:v>
+                  <c:v>75.5</c:v>
                 </c:pt>
                 <c:pt idx="3">
-                  <c:v>79.4</c:v>
+                  <c:v>79.3</c:v>
                 </c:pt>
                 <c:pt idx="4">
-                  <c:v>82</c:v>
+                  <c:v>81.9</c:v>
                 </c:pt>
               </c:numCache>
             </c:numRef>
@@ -13280,7 +13239,7 @@
           <a:p>
             <a:r>
               <a:rPr lang="en-US" dirty="0"/>
-              <a:t>Title. One-line pitch: a capital-protected autocallable on the four Asian digital-transformation engines the Chak family already knows from its businesses. It pays 6.5% a year whenever the basket is at or above its starting level, catches up any missed coupons, and returns 100% of capital at maturity whatever the basket does.</a:t>
+              <a:t>Title. One-line pitch: a capital-protected autocallable on Asia's three semiconductor powerhouses: Taiwan's chipmakers, Korea's memory makers and Japan's chip-equipment makers. It pays 6.5% a year whenever the basket is at or above its starting level, catches up any missed coupons, and returns 100% of capital at maturity whatever the basket does.</a:t>
             </a:r>
             <a:endParaRPr lang="en-US" dirty="0"/>
           </a:p>
@@ -13632,7 +13591,7 @@
           <a:p>
             <a:r>
               <a:rPr lang="en-US" dirty="0"/>
-              <a:t>Investor risks on the left, desk hedges on the right. There is no capital-loss line: the main honest risks are earning nothing for 5 years, capped upside, and Natixis credit. The 6.8% coupon sits below the 7.1% fair level in every sensitivity we ran, so the offer is robust to market moves before the trade date.</a:t>
+              <a:t>Investor risks on the left, desk hedges on the right. There is no capital-loss line: the main honest risks are earning nothing for 5 years, capped upside, and Natixis credit. The 6.75% coupon sits below the 7.1% fair level in every sensitivity we ran, so the offer is robust to market moves before the trade date.</a:t>
             </a:r>
             <a:endParaRPr lang="en-US" dirty="0"/>
           </a:p>
@@ -14160,7 +14119,7 @@
           <a:p>
             <a:r>
               <a:rPr lang="en-US" dirty="0"/>
-              <a:t>Two arguments. (1) Structural: AI spending flows straight into Asian semiconductors: Taiwan makes the chips, Korea the memory, Japan the chip-making tools, with global chip leaders on the other side of the supply chain. (2) Structuring: high USD rates make the protected principal cheap, and Asian volatility makes the 100% coupon trigger likely to be hit, so we can protect capital and still pay above the funding rate.</a:t>
+              <a:t>Two arguments. (1) Structural: AI spending flows straight into Asian semiconductors: Taiwan makes the chips, Korea the memory, Japan the chip-making tools, all three with deep listed futures and options. (2) Structuring: high USD rates make the protected principal cheap, and Asian volatility makes the 100% coupon trigger likely to be hit, so we can protect capital and still pay above the funding rate.</a:t>
             </a:r>
             <a:endParaRPr lang="en-US" dirty="0"/>
           </a:p>
@@ -14248,7 +14207,7 @@
           <a:p>
             <a:r>
               <a:rPr lang="en-US" dirty="0"/>
-              <a:t>Each index is a real Bloomberg ticker (TWSE, KOSPI2, NKY, SOX Index). Semiconductors dominate TAIEX and KOSPI 200 through TSMC, Samsung and SK Hynix, Nikkei 225 carries Tokyo Electron and Advantest, and SOX is a pure chip index. Check look-through weights on Bloomberg before the pitch. Note the overlap: TSMC appears in both TAIEX and SOX, which raises correlation. Quanto USD: the client takes no JPY/TWD/KRW risk; SOX is already in USD.</a:t>
+              <a:t>Each index is a real Bloomberg ticker (TWSE, KOSPI2, NKY Index), all Asian, all with liquid listed futures and options. Semiconductors dominate TAIEX and KOSPI 200 through TSMC, Samsung and SK Hynix, and Nikkei 225 carries Tokyo Electron and Advantest. Check look-through weights on Bloomberg before the pitch. Quanto USD: the client takes no TWD/KRW/JPY risk.</a:t>
             </a:r>
             <a:endParaRPr lang="en-US" dirty="0"/>
           </a:p>
@@ -14336,7 +14295,7 @@
           <a:p>
             <a:r>
               <a:rPr lang="en-US" dirty="0"/>
-              <a:t>The table is the key design argument. Every design that puts capital at risk only pays 6–11% for a 10–12% chance of a loss; pushing the loss probability down with a calmer basket kills the coupon. Protecting capital fully keeps a coupon above the funding rate because the principal is cheap at 5.69% rates and the autocall usually returns it early.</a:t>
+              <a:t>The table is the key design argument. Every design that puts capital at risk only pays 6–11% for a roughly 10–11% chance of a loss; pushing the loss probability down with a calmer basket kills the coupon. Protecting capital fully keeps a coupon above the funding rate because the principal is cheap at 5.69% rates and the autocall usually returns it early.</a:t>
             </a:r>
             <a:endParaRPr lang="en-US" dirty="0"/>
           </a:p>
@@ -14424,7 +14383,7 @@
           <a:p>
             <a:r>
               <a:rPr lang="en-US" dirty="0"/>
-              <a:t>Explain the note as one question asked every quarter: is the basket at or above where it started? If yes, the family is paid 1.70% for that quarter plus any coupons missed before, and from Year 1 the note also ends with 100% back. If the answer is never yes, the family still gets 100% back at Year 5.</a:t>
+              <a:t>Explain the note as one question asked every quarter: is the basket at or above where it started? If yes, the family is paid 1.69% for that quarter plus any coupons missed before, and from Year 1 the note also ends with 100% back. If the answer is never yes, the family still gets 100% back at Year 5.</a:t>
             </a:r>
             <a:endParaRPr lang="en-US" dirty="0"/>
           </a:p>
@@ -14512,7 +14471,7 @@
           <a:p>
             <a:r>
               <a:rPr lang="en-US" dirty="0"/>
-              <a:t>Left chart: the cash ladder. Each quarter the note lives adds 1.70% of notional, paid either on the date or later through memory. Right chart: if the note reaches Year 5 without being called, there are only two zones. At or above 100% the family receives 134.0%; below 100% it receives 100%, plus any coupons already paid in Q1–Q3. Above +34.0% the basket beats the note: that is the capped upside.</a:t>
+              <a:t>Left chart: the cash ladder. Each quarter the note lives adds 1.69% of notional, paid either on the date or later through memory. Right chart: if the note reaches Year 5 without being called, there are only two zones. At or above 100% the family receives 133.8%; below 100% it receives 100%, plus any coupons already paid in Q1–Q3. Above +33.8% the basket beats the note: that is the capped upside.</a:t>
             </a:r>
             <a:endParaRPr lang="en-US" dirty="0"/>
           </a:p>
@@ -15040,7 +14999,7 @@
                 <a:ea typeface="Calibri" pitchFamily="34" charset="-122"/>
                 <a:cs typeface="Calibri" pitchFamily="34" charset="-120"/>
               </a:rPr>
-              <a:t>6.8% a year from Asia's semiconductor build-out, with 100% of capital returned at maturity</a:t>
+              <a:t>6.75% a year from Asia's semiconductor build-out, with 100% of capital returned at maturity</a:t>
             </a:r>
             <a:endParaRPr lang="en-US" sz="1500" dirty="0"/>
           </a:p>
@@ -15079,7 +15038,7 @@
                 <a:ea typeface="Calibri" pitchFamily="34" charset="-122"/>
                 <a:cs typeface="Calibri" pitchFamily="34" charset="-120"/>
               </a:rPr>
-              <a:t>USD 100mn · 5-year note issued by Natixis · 6.8% p.a. memory coupon · 100% capital protected · Trade date 17 Sep 2026</a:t>
+              <a:t>USD 100mn · 5-year note issued by Natixis · 6.75% p.a. memory coupon · 100% capital protected · Trade date 17 Sep 2026</a:t>
             </a:r>
             <a:endParaRPr lang="en-US" sz="1150" dirty="0"/>
           </a:p>
@@ -15454,7 +15413,7 @@
                 <a:ea typeface="Calibri" pitchFamily="34" charset="-122"/>
                 <a:cs typeface="Calibri" pitchFamily="34" charset="-120"/>
               </a:rPr>
-              <a:t>Pay 1.70%, plus missed coupons, on each date the basket is ≥ 100%. Worth 7.7%</a:t>
+              <a:t>Pay 1.69%, plus missed coupons, on each date the basket is ≥ 100%. Worth 7.6%</a:t>
             </a:r>
             <a:endParaRPr lang="en-US" sz="900" dirty="0"/>
           </a:p>
@@ -15696,7 +15655,7 @@
                 <a:ea typeface="Calibri" pitchFamily="34" charset="-122"/>
                 <a:cs typeface="Calibri" pitchFamily="34" charset="-120"/>
               </a:rPr>
-              <a:t>Fair value 97.7% = principal 89.9% + coupons 7.7% (net of autocall).  </a:t>
+              <a:t>Fair value 97.6% = principal 89.9% + coupons 7.6% (net of autocall).  </a:t>
             </a:r>
             <a:pPr indent="0" marL="0">
               <a:buNone/>
@@ -16543,7 +16502,7 @@
                           <a:ea typeface="Calibri" pitchFamily="34" charset="-122"/>
                           <a:cs typeface="Calibri" pitchFamily="34" charset="-120"/>
                         </a:rPr>
-                        <a:t>106.8</a:t>
+                        <a:t>106.7</a:t>
                       </a:r>
                       <a:endParaRPr lang="en-US" sz="850" dirty="0">
                         <a:latin typeface="Calibri" charset="0"/>
@@ -16611,7 +16570,7 @@
                           <a:ea typeface="Calibri" pitchFamily="34" charset="-122"/>
                           <a:cs typeface="Calibri" pitchFamily="34" charset="-120"/>
                         </a:rPr>
-                        <a:t>7.0%</a:t>
+                        <a:t>6.9%</a:t>
                       </a:r>
                       <a:endParaRPr lang="en-US" sz="850" dirty="0">
                         <a:latin typeface="Calibri" charset="0"/>
@@ -16885,7 +16844,7 @@
                           <a:ea typeface="Calibri" pitchFamily="34" charset="-122"/>
                           <a:cs typeface="Calibri" pitchFamily="34" charset="-120"/>
                         </a:rPr>
-                        <a:t>10.2%</a:t>
+                        <a:t>10.1%</a:t>
                       </a:r>
                       <a:endParaRPr lang="en-US" sz="850" dirty="0">
                         <a:latin typeface="Calibri" charset="0"/>
@@ -16953,7 +16912,7 @@
                           <a:ea typeface="Calibri" pitchFamily="34" charset="-122"/>
                           <a:cs typeface="Calibri" pitchFamily="34" charset="-120"/>
                         </a:rPr>
-                        <a:t>110.2</a:t>
+                        <a:t>110.1</a:t>
                       </a:r>
                       <a:endParaRPr lang="en-US" sz="850" dirty="0">
                         <a:latin typeface="Calibri" charset="0"/>
@@ -17021,7 +16980,7 @@
                           <a:ea typeface="Calibri" pitchFamily="34" charset="-122"/>
                           <a:cs typeface="Calibri" pitchFamily="34" charset="-120"/>
                         </a:rPr>
-                        <a:t>6.7%</a:t>
+                        <a:t>6.6%</a:t>
                       </a:r>
                       <a:endParaRPr lang="en-US" sz="850" dirty="0">
                         <a:latin typeface="Calibri" charset="0"/>
@@ -17295,7 +17254,7 @@
                           <a:ea typeface="Calibri" pitchFamily="34" charset="-122"/>
                           <a:cs typeface="Calibri" pitchFamily="34" charset="-120"/>
                         </a:rPr>
-                        <a:t>25.5%</a:t>
+                        <a:t>25.3%</a:t>
                       </a:r>
                       <a:endParaRPr lang="en-US" sz="850" dirty="0">
                         <a:latin typeface="Calibri" charset="0"/>
@@ -17363,7 +17322,7 @@
                           <a:ea typeface="Calibri" pitchFamily="34" charset="-122"/>
                           <a:cs typeface="Calibri" pitchFamily="34" charset="-120"/>
                         </a:rPr>
-                        <a:t>125.5</a:t>
+                        <a:t>125.3</a:t>
                       </a:r>
                       <a:endParaRPr lang="en-US" sz="850" dirty="0">
                         <a:latin typeface="Calibri" charset="0"/>
@@ -18449,7 +18408,7 @@
                 <a:ea typeface="Calibri" pitchFamily="34" charset="-122"/>
                 <a:cs typeface="Calibri" pitchFamily="34" charset="-120"/>
               </a:rPr>
-              <a:t>the note earns ~6.2%–7.0% a year whenever the basket gets back to 100%, even after a 30% drawdown: memory pays all 15 missed coupons at Q15. In a lost decade or a lasting shock the family gets 100% back, while the basket itself is down 12–45%.</a:t>
+              <a:t>the note earns ~6.2%–6.9% a year whenever the basket gets back to 100%, even after a 30% drawdown: memory pays all 15 missed coupons at Q15. In a lost decade or a lasting shock the family gets 100% back, while the basket itself is down 12–45%.</a:t>
             </a:r>
             <a:endParaRPr lang="en-US" sz="950" dirty="0"/>
           </a:p>
@@ -19252,7 +19211,7 @@
                           <a:ea typeface="Calibri" pitchFamily="34" charset="-122"/>
                           <a:cs typeface="Calibri" pitchFamily="34" charset="-120"/>
                         </a:rPr>
-                        <a:t>80%</a:t>
+                        <a:t>79%</a:t>
                       </a:r>
                       <a:endParaRPr lang="en-US" sz="900" dirty="0">
                         <a:latin typeface="Calibri" charset="0"/>
@@ -19868,7 +19827,7 @@
                           <a:ea typeface="Calibri" pitchFamily="34" charset="-122"/>
                           <a:cs typeface="Calibri" pitchFamily="34" charset="-120"/>
                         </a:rPr>
-                        <a:t>4.8%</a:t>
+                        <a:t>4.7%</a:t>
                       </a:r>
                       <a:endParaRPr lang="en-US" sz="900" dirty="0">
                         <a:latin typeface="Calibri" charset="0"/>
@@ -19936,7 +19895,7 @@
                           <a:ea typeface="Calibri" pitchFamily="34" charset="-122"/>
                           <a:cs typeface="Calibri" pitchFamily="34" charset="-120"/>
                         </a:rPr>
-                        <a:t>5.5%</a:t>
+                        <a:t>5.4%</a:t>
                       </a:r>
                       <a:endParaRPr lang="en-US" sz="900" dirty="0">
                         <a:latin typeface="Calibri" charset="0"/>
@@ -20142,7 +20101,75 @@
                           <a:ea typeface="Calibri" pitchFamily="34" charset="-122"/>
                           <a:cs typeface="Calibri" pitchFamily="34" charset="-120"/>
                         </a:rPr>
-                        <a:t>6.9%</a:t>
+                        <a:t>6.8%</a:t>
+                      </a:r>
+                      <a:endParaRPr lang="en-US" sz="900" dirty="0">
+                        <a:latin typeface="Calibri" charset="0"/>
+                        <a:ea typeface="Calibri" charset="0"/>
+                        <a:cs typeface="Calibri" charset="0"/>
+                      </a:endParaRPr>
+                    </a:p>
+                  </a:txBody>
+                  <a:tcPr marL="50800" marR="50800" marT="25400" marB="25400" anchor="ctr">
+                    <a:lnL w="6350" cap="flat" cmpd="sng" algn="ctr">
+                      <a:solidFill>
+                        <a:srgbClr val="DCE7E5"/>
+                      </a:solidFill>
+                      <a:prstDash val="solid"/>
+                      <a:round/>
+                      <a:headEnd type="none" w="med" len="med"/>
+                      <a:tailEnd type="none" w="med" len="med"/>
+                    </a:lnL>
+                    <a:lnR w="6350" cap="flat" cmpd="sng" algn="ctr">
+                      <a:solidFill>
+                        <a:srgbClr val="DCE7E5"/>
+                      </a:solidFill>
+                      <a:prstDash val="solid"/>
+                      <a:round/>
+                      <a:headEnd type="none" w="med" len="med"/>
+                      <a:tailEnd type="none" w="med" len="med"/>
+                    </a:lnR>
+                    <a:lnT w="6350" cap="flat" cmpd="sng" algn="ctr">
+                      <a:solidFill>
+                        <a:srgbClr val="DCE7E5"/>
+                      </a:solidFill>
+                      <a:prstDash val="solid"/>
+                      <a:round/>
+                      <a:headEnd type="none" w="med" len="med"/>
+                      <a:tailEnd type="none" w="med" len="med"/>
+                    </a:lnT>
+                    <a:lnB w="6350" cap="flat" cmpd="sng" algn="ctr">
+                      <a:solidFill>
+                        <a:srgbClr val="DCE7E5"/>
+                      </a:solidFill>
+                      <a:prstDash val="solid"/>
+                      <a:round/>
+                      <a:headEnd type="none" w="med" len="med"/>
+                      <a:tailEnd type="none" w="med" len="med"/>
+                    </a:lnB>
+                    <a:solidFill>
+                      <a:srgbClr val="FFFFFF"/>
+                    </a:solidFill>
+                  </a:tcPr>
+                </a:tc>
+                <a:tc>
+                  <a:txBody>
+                    <a:bodyPr/>
+                    <a:lstStyle/>
+                    <a:p>
+                      <a:pPr algn="ctr" indent="0" marL="0">
+                        <a:buNone/>
+                      </a:pPr>
+                      <a:r>
+                        <a:rPr lang="en-US" sz="900" dirty="0">
+                          <a:solidFill>
+                            <a:srgbClr val="1D2B30"/>
+                          </a:solidFill>
+                          <a:latin typeface="Calibri" pitchFamily="34" charset="0"/>
+                          <a:ea typeface="Calibri" pitchFamily="34" charset="-122"/>
+                          <a:cs typeface="Calibri" pitchFamily="34" charset="-120"/>
+                        </a:rPr>
+                        <a:t>6.7%</a:t>
                       </a:r>
                       <a:endParaRPr lang="en-US" sz="900" dirty="0">
                         <a:latin typeface="Calibri" charset="0"/>
@@ -20278,75 +20305,7 @@
                           <a:ea typeface="Calibri" pitchFamily="34" charset="-122"/>
                           <a:cs typeface="Calibri" pitchFamily="34" charset="-120"/>
                         </a:rPr>
-                        <a:t>6.9%</a:t>
-                      </a:r>
-                      <a:endParaRPr lang="en-US" sz="900" dirty="0">
-                        <a:latin typeface="Calibri" charset="0"/>
-                        <a:ea typeface="Calibri" charset="0"/>
-                        <a:cs typeface="Calibri" charset="0"/>
-                      </a:endParaRPr>
-                    </a:p>
-                  </a:txBody>
-                  <a:tcPr marL="50800" marR="50800" marT="25400" marB="25400" anchor="ctr">
-                    <a:lnL w="6350" cap="flat" cmpd="sng" algn="ctr">
-                      <a:solidFill>
-                        <a:srgbClr val="DCE7E5"/>
-                      </a:solidFill>
-                      <a:prstDash val="solid"/>
-                      <a:round/>
-                      <a:headEnd type="none" w="med" len="med"/>
-                      <a:tailEnd type="none" w="med" len="med"/>
-                    </a:lnL>
-                    <a:lnR w="6350" cap="flat" cmpd="sng" algn="ctr">
-                      <a:solidFill>
-                        <a:srgbClr val="DCE7E5"/>
-                      </a:solidFill>
-                      <a:prstDash val="solid"/>
-                      <a:round/>
-                      <a:headEnd type="none" w="med" len="med"/>
-                      <a:tailEnd type="none" w="med" len="med"/>
-                    </a:lnR>
-                    <a:lnT w="6350" cap="flat" cmpd="sng" algn="ctr">
-                      <a:solidFill>
-                        <a:srgbClr val="DCE7E5"/>
-                      </a:solidFill>
-                      <a:prstDash val="solid"/>
-                      <a:round/>
-                      <a:headEnd type="none" w="med" len="med"/>
-                      <a:tailEnd type="none" w="med" len="med"/>
-                    </a:lnT>
-                    <a:lnB w="6350" cap="flat" cmpd="sng" algn="ctr">
-                      <a:solidFill>
-                        <a:srgbClr val="DCE7E5"/>
-                      </a:solidFill>
-                      <a:prstDash val="solid"/>
-                      <a:round/>
-                      <a:headEnd type="none" w="med" len="med"/>
-                      <a:tailEnd type="none" w="med" len="med"/>
-                    </a:lnB>
-                    <a:solidFill>
-                      <a:srgbClr val="FFFFFF"/>
-                    </a:solidFill>
-                  </a:tcPr>
-                </a:tc>
-                <a:tc>
-                  <a:txBody>
-                    <a:bodyPr/>
-                    <a:lstStyle/>
-                    <a:p>
-                      <a:pPr algn="ctr" indent="0" marL="0">
-                        <a:buNone/>
-                      </a:pPr>
-                      <a:r>
-                        <a:rPr lang="en-US" sz="900" dirty="0">
-                          <a:solidFill>
-                            <a:srgbClr val="1D2B30"/>
-                          </a:solidFill>
-                          <a:latin typeface="Calibri" pitchFamily="34" charset="0"/>
-                          <a:ea typeface="Calibri" pitchFamily="34" charset="-122"/>
-                          <a:cs typeface="Calibri" pitchFamily="34" charset="-120"/>
-                        </a:rPr>
-                        <a:t>6.9%</a:t>
+                        <a:t>6.8%</a:t>
                       </a:r>
                       <a:endParaRPr lang="en-US" sz="900" dirty="0">
                         <a:latin typeface="Calibri" charset="0"/>
@@ -20484,7 +20443,7 @@
                           <a:ea typeface="Calibri" pitchFamily="34" charset="-122"/>
                           <a:cs typeface="Calibri" pitchFamily="34" charset="-120"/>
                         </a:rPr>
-                        <a:t>8.4%</a:t>
+                        <a:t>8.3%</a:t>
                       </a:r>
                       <a:endParaRPr lang="en-US" sz="900" dirty="0">
                         <a:latin typeface="Calibri" charset="0"/>
@@ -20552,7 +20511,7 @@
                           <a:ea typeface="Calibri" pitchFamily="34" charset="-122"/>
                           <a:cs typeface="Calibri" pitchFamily="34" charset="-120"/>
                         </a:rPr>
-                        <a:t>7.3%</a:t>
+                        <a:t>7.2%</a:t>
                       </a:r>
                       <a:endParaRPr lang="en-US" sz="900" dirty="0">
                         <a:latin typeface="Calibri" charset="0"/>
@@ -20620,7 +20579,7 @@
                           <a:ea typeface="Calibri" pitchFamily="34" charset="-122"/>
                           <a:cs typeface="Calibri" pitchFamily="34" charset="-120"/>
                         </a:rPr>
-                        <a:t>8.2%</a:t>
+                        <a:t>8.1%</a:t>
                       </a:r>
                       <a:endParaRPr lang="en-US" sz="900" dirty="0">
                         <a:latin typeface="Calibri" charset="0"/>
@@ -21527,7 +21486,7 @@
                 <a:ea typeface="Calibri" pitchFamily="34" charset="-122"/>
                 <a:cs typeface="Calibri" pitchFamily="34" charset="-120"/>
               </a:rPr>
-              <a:t>called at the first review (106.8% total)</a:t>
+              <a:t>called at the first review (106.7% total)</a:t>
             </a:r>
             <a:endParaRPr lang="en-US" sz="1000" dirty="0"/>
           </a:p>
@@ -22456,7 +22415,7 @@
                           <a:ea typeface="Calibri" pitchFamily="34" charset="-122"/>
                           <a:cs typeface="Calibri" pitchFamily="34" charset="-120"/>
                         </a:rPr>
-                        <a:t>Basket +80% still pays 6.8% p.a. and is called at Y1</a:t>
+                        <a:t>Basket +80% still pays 6.75% p.a. and is called at Y1</a:t>
                       </a:r>
                       <a:endParaRPr lang="en-US" sz="850" dirty="0">
                         <a:latin typeface="Calibri" charset="0"/>
@@ -23297,7 +23256,7 @@
                 <a:ea typeface="Calibri" pitchFamily="34" charset="-122"/>
                 <a:cs typeface="Calibri" pitchFamily="34" charset="-120"/>
               </a:rPr>
-              <a:t>Natixis owes basket digitals struck at 100%: replicated with tight basket call spreads, delta-hedged with TAIEX / KOSPI 200 / Nikkei / SOX futures</a:t>
+              <a:t>Natixis owes basket digitals struck at 100%: replicated with tight basket call spreads, delta-hedged with TAIEX / KOSPI 200 / Nikkei 225 futures</a:t>
             </a:r>
             <a:endParaRPr lang="en-US" sz="850" dirty="0"/>
           </a:p>
@@ -23402,7 +23361,7 @@
                 <a:ea typeface="Calibri" pitchFamily="34" charset="-122"/>
                 <a:cs typeface="Calibri" pitchFamily="34" charset="-120"/>
               </a:rPr>
-              <a:t>Coupon value moves with basket vol and correlation (fair 6.8%–7.4% for vol ±3pts): managed with listed index options and correlation trades</a:t>
+              <a:t>Coupon value moves with basket vol and correlation (fair 6.8%–7.5% for vol ±3pts): managed with listed index options and correlation trades</a:t>
             </a:r>
             <a:endParaRPr lang="en-US" sz="850" dirty="0"/>
           </a:p>
@@ -23507,7 +23466,7 @@
                 <a:ea typeface="Calibri" pitchFamily="34" charset="-122"/>
                 <a:cs typeface="Calibri" pitchFamily="34" charset="-120"/>
               </a:rPr>
-              <a:t>USD payout on TWD/KRW/JPY indices (SOX already USD): FX forwards and quanto adjustment in price</a:t>
+              <a:t>USD payout on TWD/KRW/JPY indices: FX forwards and quanto adjustment in price (FX-equity correlation)</a:t>
             </a:r>
             <a:endParaRPr lang="en-US" sz="850" dirty="0"/>
           </a:p>
@@ -23665,7 +23624,7 @@
                 <a:ea typeface="Calibri" pitchFamily="34" charset="-122"/>
                 <a:cs typeface="Calibri" pitchFamily="34" charset="-120"/>
               </a:rPr>
-              <a:t>base 7.1% · vol ±3pts 6.8%–7.4% · corr ±0.15 6.9%–7.3% · equity drift −1/−2% 7.7%–8.2%. The 6.8% offer stays fundable in every case.</a:t>
+              <a:t>base 7.1% · vol ±3pts 6.8%–7.5% · corr ±0.15 6.9%–7.3% · equity drift −1/−2% 7.7%–8.3%. The 6.75% offer stays fundable in every case.</a:t>
             </a:r>
             <a:endParaRPr lang="en-US" sz="900" dirty="0"/>
           </a:p>
@@ -23847,10 +23806,9 @@
                 <a:gridCol w="566928"/>
                 <a:gridCol w="475488"/>
                 <a:gridCol w="475488"/>
-                <a:gridCol w="603504"/>
-                <a:gridCol w="603504"/>
-                <a:gridCol w="603504"/>
-                <a:gridCol w="603504"/>
+                <a:gridCol w="804672"/>
+                <a:gridCol w="804672"/>
+                <a:gridCol w="804672"/>
               </a:tblGrid>
               <a:tr h="274320">
                 <a:tc>
@@ -24279,74 +24237,6 @@
                           <a:cs typeface="Calibri" pitchFamily="34" charset="-120"/>
                         </a:rPr>
                         <a:t>NKY</a:t>
-                      </a:r>
-                      <a:endParaRPr lang="en-US" sz="900" dirty="0">
-                        <a:latin typeface="Calibri" charset="0"/>
-                        <a:ea typeface="Calibri" charset="0"/>
-                        <a:cs typeface="Calibri" charset="0"/>
-                      </a:endParaRPr>
-                    </a:p>
-                  </a:txBody>
-                  <a:tcPr marL="38100" marR="38100" marT="25400" marB="25400" anchor="ctr">
-                    <a:lnL w="6350" cap="flat" cmpd="sng" algn="ctr">
-                      <a:solidFill>
-                        <a:srgbClr val="DCE7E5"/>
-                      </a:solidFill>
-                      <a:prstDash val="solid"/>
-                      <a:round/>
-                      <a:headEnd type="none" w="med" len="med"/>
-                      <a:tailEnd type="none" w="med" len="med"/>
-                    </a:lnL>
-                    <a:lnR w="6350" cap="flat" cmpd="sng" algn="ctr">
-                      <a:solidFill>
-                        <a:srgbClr val="DCE7E5"/>
-                      </a:solidFill>
-                      <a:prstDash val="solid"/>
-                      <a:round/>
-                      <a:headEnd type="none" w="med" len="med"/>
-                      <a:tailEnd type="none" w="med" len="med"/>
-                    </a:lnR>
-                    <a:lnT w="6350" cap="flat" cmpd="sng" algn="ctr">
-                      <a:solidFill>
-                        <a:srgbClr val="DCE7E5"/>
-                      </a:solidFill>
-                      <a:prstDash val="solid"/>
-                      <a:round/>
-                      <a:headEnd type="none" w="med" len="med"/>
-                      <a:tailEnd type="none" w="med" len="med"/>
-                    </a:lnT>
-                    <a:lnB w="6350" cap="flat" cmpd="sng" algn="ctr">
-                      <a:solidFill>
-                        <a:srgbClr val="DCE7E5"/>
-                      </a:solidFill>
-                      <a:prstDash val="solid"/>
-                      <a:round/>
-                      <a:headEnd type="none" w="med" len="med"/>
-                      <a:tailEnd type="none" w="med" len="med"/>
-                    </a:lnB>
-                    <a:solidFill>
-                      <a:srgbClr val="0B3C49"/>
-                    </a:solidFill>
-                  </a:tcPr>
-                </a:tc>
-                <a:tc>
-                  <a:txBody>
-                    <a:bodyPr/>
-                    <a:lstStyle/>
-                    <a:p>
-                      <a:pPr algn="ctr" indent="0" marL="0">
-                        <a:buNone/>
-                      </a:pPr>
-                      <a:r>
-                        <a:rPr lang="en-US" sz="900" b="1" dirty="0">
-                          <a:solidFill>
-                            <a:srgbClr val="FFFFFF"/>
-                          </a:solidFill>
-                          <a:latin typeface="Calibri" pitchFamily="34" charset="0"/>
-                          <a:ea typeface="Calibri" pitchFamily="34" charset="-122"/>
-                          <a:cs typeface="Calibri" pitchFamily="34" charset="-120"/>
-                        </a:rPr>
-                        <a:t>SOX</a:t>
                       </a:r>
                       <a:endParaRPr lang="en-US" sz="900" dirty="0">
                         <a:latin typeface="Calibri" charset="0"/>
@@ -24484,7 +24374,7 @@
                           <a:ea typeface="Calibri" pitchFamily="34" charset="-122"/>
                           <a:cs typeface="Calibri" pitchFamily="34" charset="-120"/>
                         </a:rPr>
-                        <a:t>35%</a:t>
+                        <a:t>40%</a:t>
                       </a:r>
                       <a:endParaRPr lang="en-US" sz="900" dirty="0">
                         <a:latin typeface="Calibri" charset="0"/>
@@ -24825,74 +24715,6 @@
                           <a:cs typeface="Calibri" pitchFamily="34" charset="-120"/>
                         </a:rPr>
                         <a:t>0.60</a:t>
-                      </a:r>
-                      <a:endParaRPr lang="en-US" sz="900" dirty="0">
-                        <a:latin typeface="Calibri" charset="0"/>
-                        <a:ea typeface="Calibri" charset="0"/>
-                        <a:cs typeface="Calibri" charset="0"/>
-                      </a:endParaRPr>
-                    </a:p>
-                  </a:txBody>
-                  <a:tcPr marL="38100" marR="38100" marT="25400" marB="25400" anchor="ctr">
-                    <a:lnL w="6350" cap="flat" cmpd="sng" algn="ctr">
-                      <a:solidFill>
-                        <a:srgbClr val="DCE7E5"/>
-                      </a:solidFill>
-                      <a:prstDash val="solid"/>
-                      <a:round/>
-                      <a:headEnd type="none" w="med" len="med"/>
-                      <a:tailEnd type="none" w="med" len="med"/>
-                    </a:lnL>
-                    <a:lnR w="6350" cap="flat" cmpd="sng" algn="ctr">
-                      <a:solidFill>
-                        <a:srgbClr val="DCE7E5"/>
-                      </a:solidFill>
-                      <a:prstDash val="solid"/>
-                      <a:round/>
-                      <a:headEnd type="none" w="med" len="med"/>
-                      <a:tailEnd type="none" w="med" len="med"/>
-                    </a:lnR>
-                    <a:lnT w="6350" cap="flat" cmpd="sng" algn="ctr">
-                      <a:solidFill>
-                        <a:srgbClr val="DCE7E5"/>
-                      </a:solidFill>
-                      <a:prstDash val="solid"/>
-                      <a:round/>
-                      <a:headEnd type="none" w="med" len="med"/>
-                      <a:tailEnd type="none" w="med" len="med"/>
-                    </a:lnT>
-                    <a:lnB w="6350" cap="flat" cmpd="sng" algn="ctr">
-                      <a:solidFill>
-                        <a:srgbClr val="DCE7E5"/>
-                      </a:solidFill>
-                      <a:prstDash val="solid"/>
-                      <a:round/>
-                      <a:headEnd type="none" w="med" len="med"/>
-                      <a:tailEnd type="none" w="med" len="med"/>
-                    </a:lnB>
-                    <a:solidFill>
-                      <a:srgbClr val="FFFFFF"/>
-                    </a:solidFill>
-                  </a:tcPr>
-                </a:tc>
-                <a:tc>
-                  <a:txBody>
-                    <a:bodyPr/>
-                    <a:lstStyle/>
-                    <a:p>
-                      <a:pPr algn="ctr" indent="0" marL="0">
-                        <a:buNone/>
-                      </a:pPr>
-                      <a:r>
-                        <a:rPr lang="en-US" sz="900" dirty="0">
-                          <a:solidFill>
-                            <a:srgbClr val="1D2B30"/>
-                          </a:solidFill>
-                          <a:latin typeface="Calibri" pitchFamily="34" charset="0"/>
-                          <a:ea typeface="Calibri" pitchFamily="34" charset="-122"/>
-                          <a:cs typeface="Calibri" pitchFamily="34" charset="-120"/>
-                        </a:rPr>
-                        <a:t>0.55</a:t>
                       </a:r>
                       <a:endParaRPr lang="en-US" sz="900" dirty="0">
                         <a:latin typeface="Calibri" charset="0"/>
@@ -25030,7 +24852,7 @@
                           <a:ea typeface="Calibri" pitchFamily="34" charset="-122"/>
                           <a:cs typeface="Calibri" pitchFamily="34" charset="-120"/>
                         </a:rPr>
-                        <a:t>25%</a:t>
+                        <a:t>30%</a:t>
                       </a:r>
                       <a:endParaRPr lang="en-US" sz="900" dirty="0">
                         <a:latin typeface="Calibri" charset="0"/>
@@ -25371,74 +25193,6 @@
                           <a:cs typeface="Calibri" pitchFamily="34" charset="-120"/>
                         </a:rPr>
                         <a:t>0.55</a:t>
-                      </a:r>
-                      <a:endParaRPr lang="en-US" sz="900" dirty="0">
-                        <a:latin typeface="Calibri" charset="0"/>
-                        <a:ea typeface="Calibri" charset="0"/>
-                        <a:cs typeface="Calibri" charset="0"/>
-                      </a:endParaRPr>
-                    </a:p>
-                  </a:txBody>
-                  <a:tcPr marL="38100" marR="38100" marT="25400" marB="25400" anchor="ctr">
-                    <a:lnL w="6350" cap="flat" cmpd="sng" algn="ctr">
-                      <a:solidFill>
-                        <a:srgbClr val="DCE7E5"/>
-                      </a:solidFill>
-                      <a:prstDash val="solid"/>
-                      <a:round/>
-                      <a:headEnd type="none" w="med" len="med"/>
-                      <a:tailEnd type="none" w="med" len="med"/>
-                    </a:lnL>
-                    <a:lnR w="6350" cap="flat" cmpd="sng" algn="ctr">
-                      <a:solidFill>
-                        <a:srgbClr val="DCE7E5"/>
-                      </a:solidFill>
-                      <a:prstDash val="solid"/>
-                      <a:round/>
-                      <a:headEnd type="none" w="med" len="med"/>
-                      <a:tailEnd type="none" w="med" len="med"/>
-                    </a:lnR>
-                    <a:lnT w="6350" cap="flat" cmpd="sng" algn="ctr">
-                      <a:solidFill>
-                        <a:srgbClr val="DCE7E5"/>
-                      </a:solidFill>
-                      <a:prstDash val="solid"/>
-                      <a:round/>
-                      <a:headEnd type="none" w="med" len="med"/>
-                      <a:tailEnd type="none" w="med" len="med"/>
-                    </a:lnT>
-                    <a:lnB w="6350" cap="flat" cmpd="sng" algn="ctr">
-                      <a:solidFill>
-                        <a:srgbClr val="DCE7E5"/>
-                      </a:solidFill>
-                      <a:prstDash val="solid"/>
-                      <a:round/>
-                      <a:headEnd type="none" w="med" len="med"/>
-                      <a:tailEnd type="none" w="med" len="med"/>
-                    </a:lnB>
-                    <a:solidFill>
-                      <a:srgbClr val="FFFFFF"/>
-                    </a:solidFill>
-                  </a:tcPr>
-                </a:tc>
-                <a:tc>
-                  <a:txBody>
-                    <a:bodyPr/>
-                    <a:lstStyle/>
-                    <a:p>
-                      <a:pPr algn="ctr" indent="0" marL="0">
-                        <a:buNone/>
-                      </a:pPr>
-                      <a:r>
-                        <a:rPr lang="en-US" sz="900" dirty="0">
-                          <a:solidFill>
-                            <a:srgbClr val="1D2B30"/>
-                          </a:solidFill>
-                          <a:latin typeface="Calibri" pitchFamily="34" charset="0"/>
-                          <a:ea typeface="Calibri" pitchFamily="34" charset="-122"/>
-                          <a:cs typeface="Calibri" pitchFamily="34" charset="-120"/>
-                        </a:rPr>
-                        <a:t>0.45</a:t>
                       </a:r>
                       <a:endParaRPr lang="en-US" sz="900" dirty="0">
                         <a:latin typeface="Calibri" charset="0"/>
@@ -25576,7 +25330,7 @@
                           <a:ea typeface="Calibri" pitchFamily="34" charset="-122"/>
                           <a:cs typeface="Calibri" pitchFamily="34" charset="-120"/>
                         </a:rPr>
-                        <a:t>20%</a:t>
+                        <a:t>30%</a:t>
                       </a:r>
                       <a:endParaRPr lang="en-US" sz="900" dirty="0">
                         <a:latin typeface="Calibri" charset="0"/>
@@ -25849,620 +25603,6 @@
                           <a:cs typeface="Calibri" pitchFamily="34" charset="-120"/>
                         </a:rPr>
                         <a:t>0.55</a:t>
-                      </a:r>
-                      <a:endParaRPr lang="en-US" sz="900" dirty="0">
-                        <a:latin typeface="Calibri" charset="0"/>
-                        <a:ea typeface="Calibri" charset="0"/>
-                        <a:cs typeface="Calibri" charset="0"/>
-                      </a:endParaRPr>
-                    </a:p>
-                  </a:txBody>
-                  <a:tcPr marL="38100" marR="38100" marT="25400" marB="25400" anchor="ctr">
-                    <a:lnL w="6350" cap="flat" cmpd="sng" algn="ctr">
-                      <a:solidFill>
-                        <a:srgbClr val="DCE7E5"/>
-                      </a:solidFill>
-                      <a:prstDash val="solid"/>
-                      <a:round/>
-                      <a:headEnd type="none" w="med" len="med"/>
-                      <a:tailEnd type="none" w="med" len="med"/>
-                    </a:lnL>
-                    <a:lnR w="6350" cap="flat" cmpd="sng" algn="ctr">
-                      <a:solidFill>
-                        <a:srgbClr val="DCE7E5"/>
-                      </a:solidFill>
-                      <a:prstDash val="solid"/>
-                      <a:round/>
-                      <a:headEnd type="none" w="med" len="med"/>
-                      <a:tailEnd type="none" w="med" len="med"/>
-                    </a:lnR>
-                    <a:lnT w="6350" cap="flat" cmpd="sng" algn="ctr">
-                      <a:solidFill>
-                        <a:srgbClr val="DCE7E5"/>
-                      </a:solidFill>
-                      <a:prstDash val="solid"/>
-                      <a:round/>
-                      <a:headEnd type="none" w="med" len="med"/>
-                      <a:tailEnd type="none" w="med" len="med"/>
-                    </a:lnT>
-                    <a:lnB w="6350" cap="flat" cmpd="sng" algn="ctr">
-                      <a:solidFill>
-                        <a:srgbClr val="DCE7E5"/>
-                      </a:solidFill>
-                      <a:prstDash val="solid"/>
-                      <a:round/>
-                      <a:headEnd type="none" w="med" len="med"/>
-                      <a:tailEnd type="none" w="med" len="med"/>
-                    </a:lnB>
-                    <a:solidFill>
-                      <a:srgbClr val="FFFFFF"/>
-                    </a:solidFill>
-                  </a:tcPr>
-                </a:tc>
-                <a:tc>
-                  <a:txBody>
-                    <a:bodyPr/>
-                    <a:lstStyle/>
-                    <a:p>
-                      <a:pPr algn="ctr" indent="0" marL="0">
-                        <a:buNone/>
-                      </a:pPr>
-                      <a:r>
-                        <a:rPr lang="en-US" sz="900" dirty="0">
-                          <a:solidFill>
-                            <a:srgbClr val="1D2B30"/>
-                          </a:solidFill>
-                          <a:latin typeface="Calibri" pitchFamily="34" charset="0"/>
-                          <a:ea typeface="Calibri" pitchFamily="34" charset="-122"/>
-                          <a:cs typeface="Calibri" pitchFamily="34" charset="-120"/>
-                        </a:rPr>
-                        <a:t>1.00</a:t>
-                      </a:r>
-                      <a:endParaRPr lang="en-US" sz="900" dirty="0">
-                        <a:latin typeface="Calibri" charset="0"/>
-                        <a:ea typeface="Calibri" charset="0"/>
-                        <a:cs typeface="Calibri" charset="0"/>
-                      </a:endParaRPr>
-                    </a:p>
-                  </a:txBody>
-                  <a:tcPr marL="38100" marR="38100" marT="25400" marB="25400" anchor="ctr">
-                    <a:lnL w="6350" cap="flat" cmpd="sng" algn="ctr">
-                      <a:solidFill>
-                        <a:srgbClr val="DCE7E5"/>
-                      </a:solidFill>
-                      <a:prstDash val="solid"/>
-                      <a:round/>
-                      <a:headEnd type="none" w="med" len="med"/>
-                      <a:tailEnd type="none" w="med" len="med"/>
-                    </a:lnL>
-                    <a:lnR w="6350" cap="flat" cmpd="sng" algn="ctr">
-                      <a:solidFill>
-                        <a:srgbClr val="DCE7E5"/>
-                      </a:solidFill>
-                      <a:prstDash val="solid"/>
-                      <a:round/>
-                      <a:headEnd type="none" w="med" len="med"/>
-                      <a:tailEnd type="none" w="med" len="med"/>
-                    </a:lnR>
-                    <a:lnT w="6350" cap="flat" cmpd="sng" algn="ctr">
-                      <a:solidFill>
-                        <a:srgbClr val="DCE7E5"/>
-                      </a:solidFill>
-                      <a:prstDash val="solid"/>
-                      <a:round/>
-                      <a:headEnd type="none" w="med" len="med"/>
-                      <a:tailEnd type="none" w="med" len="med"/>
-                    </a:lnT>
-                    <a:lnB w="6350" cap="flat" cmpd="sng" algn="ctr">
-                      <a:solidFill>
-                        <a:srgbClr val="DCE7E5"/>
-                      </a:solidFill>
-                      <a:prstDash val="solid"/>
-                      <a:round/>
-                      <a:headEnd type="none" w="med" len="med"/>
-                      <a:tailEnd type="none" w="med" len="med"/>
-                    </a:lnB>
-                    <a:solidFill>
-                      <a:srgbClr val="FFFFFF"/>
-                    </a:solidFill>
-                  </a:tcPr>
-                </a:tc>
-                <a:tc>
-                  <a:txBody>
-                    <a:bodyPr/>
-                    <a:lstStyle/>
-                    <a:p>
-                      <a:pPr algn="ctr" indent="0" marL="0">
-                        <a:buNone/>
-                      </a:pPr>
-                      <a:r>
-                        <a:rPr lang="en-US" sz="900" dirty="0">
-                          <a:solidFill>
-                            <a:srgbClr val="1D2B30"/>
-                          </a:solidFill>
-                          <a:latin typeface="Calibri" pitchFamily="34" charset="0"/>
-                          <a:ea typeface="Calibri" pitchFamily="34" charset="-122"/>
-                          <a:cs typeface="Calibri" pitchFamily="34" charset="-120"/>
-                        </a:rPr>
-                        <a:t>0.40</a:t>
-                      </a:r>
-                      <a:endParaRPr lang="en-US" sz="900" dirty="0">
-                        <a:latin typeface="Calibri" charset="0"/>
-                        <a:ea typeface="Calibri" charset="0"/>
-                        <a:cs typeface="Calibri" charset="0"/>
-                      </a:endParaRPr>
-                    </a:p>
-                  </a:txBody>
-                  <a:tcPr marL="38100" marR="38100" marT="25400" marB="25400" anchor="ctr">
-                    <a:lnL w="6350" cap="flat" cmpd="sng" algn="ctr">
-                      <a:solidFill>
-                        <a:srgbClr val="DCE7E5"/>
-                      </a:solidFill>
-                      <a:prstDash val="solid"/>
-                      <a:round/>
-                      <a:headEnd type="none" w="med" len="med"/>
-                      <a:tailEnd type="none" w="med" len="med"/>
-                    </a:lnL>
-                    <a:lnR w="6350" cap="flat" cmpd="sng" algn="ctr">
-                      <a:solidFill>
-                        <a:srgbClr val="DCE7E5"/>
-                      </a:solidFill>
-                      <a:prstDash val="solid"/>
-                      <a:round/>
-                      <a:headEnd type="none" w="med" len="med"/>
-                      <a:tailEnd type="none" w="med" len="med"/>
-                    </a:lnR>
-                    <a:lnT w="6350" cap="flat" cmpd="sng" algn="ctr">
-                      <a:solidFill>
-                        <a:srgbClr val="DCE7E5"/>
-                      </a:solidFill>
-                      <a:prstDash val="solid"/>
-                      <a:round/>
-                      <a:headEnd type="none" w="med" len="med"/>
-                      <a:tailEnd type="none" w="med" len="med"/>
-                    </a:lnT>
-                    <a:lnB w="6350" cap="flat" cmpd="sng" algn="ctr">
-                      <a:solidFill>
-                        <a:srgbClr val="DCE7E5"/>
-                      </a:solidFill>
-                      <a:prstDash val="solid"/>
-                      <a:round/>
-                      <a:headEnd type="none" w="med" len="med"/>
-                      <a:tailEnd type="none" w="med" len="med"/>
-                    </a:lnB>
-                    <a:solidFill>
-                      <a:srgbClr val="FFFFFF"/>
-                    </a:solidFill>
-                  </a:tcPr>
-                </a:tc>
-              </a:tr>
-              <a:tr h="274320">
-                <a:tc>
-                  <a:txBody>
-                    <a:bodyPr/>
-                    <a:lstStyle/>
-                    <a:p>
-                      <a:pPr algn="ctr" indent="0" marL="0">
-                        <a:buNone/>
-                      </a:pPr>
-                      <a:r>
-                        <a:rPr lang="en-US" sz="900" b="1" dirty="0">
-                          <a:solidFill>
-                            <a:srgbClr val="1D2B30"/>
-                          </a:solidFill>
-                          <a:latin typeface="Calibri" pitchFamily="34" charset="0"/>
-                          <a:ea typeface="Calibri" pitchFamily="34" charset="-122"/>
-                          <a:cs typeface="Calibri" pitchFamily="34" charset="-120"/>
-                        </a:rPr>
-                        <a:t>SOX</a:t>
-                      </a:r>
-                      <a:endParaRPr lang="en-US" sz="900" dirty="0">
-                        <a:latin typeface="Calibri" charset="0"/>
-                        <a:ea typeface="Calibri" charset="0"/>
-                        <a:cs typeface="Calibri" charset="0"/>
-                      </a:endParaRPr>
-                    </a:p>
-                  </a:txBody>
-                  <a:tcPr marL="38100" marR="38100" marT="25400" marB="25400" anchor="ctr">
-                    <a:lnL w="6350" cap="flat" cmpd="sng" algn="ctr">
-                      <a:solidFill>
-                        <a:srgbClr val="DCE7E5"/>
-                      </a:solidFill>
-                      <a:prstDash val="solid"/>
-                      <a:round/>
-                      <a:headEnd type="none" w="med" len="med"/>
-                      <a:tailEnd type="none" w="med" len="med"/>
-                    </a:lnL>
-                    <a:lnR w="6350" cap="flat" cmpd="sng" algn="ctr">
-                      <a:solidFill>
-                        <a:srgbClr val="DCE7E5"/>
-                      </a:solidFill>
-                      <a:prstDash val="solid"/>
-                      <a:round/>
-                      <a:headEnd type="none" w="med" len="med"/>
-                      <a:tailEnd type="none" w="med" len="med"/>
-                    </a:lnR>
-                    <a:lnT w="6350" cap="flat" cmpd="sng" algn="ctr">
-                      <a:solidFill>
-                        <a:srgbClr val="DCE7E5"/>
-                      </a:solidFill>
-                      <a:prstDash val="solid"/>
-                      <a:round/>
-                      <a:headEnd type="none" w="med" len="med"/>
-                      <a:tailEnd type="none" w="med" len="med"/>
-                    </a:lnT>
-                    <a:lnB w="6350" cap="flat" cmpd="sng" algn="ctr">
-                      <a:solidFill>
-                        <a:srgbClr val="DCE7E5"/>
-                      </a:solidFill>
-                      <a:prstDash val="solid"/>
-                      <a:round/>
-                      <a:headEnd type="none" w="med" len="med"/>
-                      <a:tailEnd type="none" w="med" len="med"/>
-                    </a:lnB>
-                    <a:solidFill>
-                      <a:srgbClr val="FFFFFF"/>
-                    </a:solidFill>
-                  </a:tcPr>
-                </a:tc>
-                <a:tc>
-                  <a:txBody>
-                    <a:bodyPr/>
-                    <a:lstStyle/>
-                    <a:p>
-                      <a:pPr algn="ctr" indent="0" marL="0">
-                        <a:buNone/>
-                      </a:pPr>
-                      <a:r>
-                        <a:rPr lang="en-US" sz="900" dirty="0">
-                          <a:solidFill>
-                            <a:srgbClr val="1D2B30"/>
-                          </a:solidFill>
-                          <a:latin typeface="Calibri" pitchFamily="34" charset="0"/>
-                          <a:ea typeface="Calibri" pitchFamily="34" charset="-122"/>
-                          <a:cs typeface="Calibri" pitchFamily="34" charset="-120"/>
-                        </a:rPr>
-                        <a:t>20%</a:t>
-                      </a:r>
-                      <a:endParaRPr lang="en-US" sz="900" dirty="0">
-                        <a:latin typeface="Calibri" charset="0"/>
-                        <a:ea typeface="Calibri" charset="0"/>
-                        <a:cs typeface="Calibri" charset="0"/>
-                      </a:endParaRPr>
-                    </a:p>
-                  </a:txBody>
-                  <a:tcPr marL="38100" marR="38100" marT="25400" marB="25400" anchor="ctr">
-                    <a:lnL w="6350" cap="flat" cmpd="sng" algn="ctr">
-                      <a:solidFill>
-                        <a:srgbClr val="DCE7E5"/>
-                      </a:solidFill>
-                      <a:prstDash val="solid"/>
-                      <a:round/>
-                      <a:headEnd type="none" w="med" len="med"/>
-                      <a:tailEnd type="none" w="med" len="med"/>
-                    </a:lnL>
-                    <a:lnR w="6350" cap="flat" cmpd="sng" algn="ctr">
-                      <a:solidFill>
-                        <a:srgbClr val="DCE7E5"/>
-                      </a:solidFill>
-                      <a:prstDash val="solid"/>
-                      <a:round/>
-                      <a:headEnd type="none" w="med" len="med"/>
-                      <a:tailEnd type="none" w="med" len="med"/>
-                    </a:lnR>
-                    <a:lnT w="6350" cap="flat" cmpd="sng" algn="ctr">
-                      <a:solidFill>
-                        <a:srgbClr val="DCE7E5"/>
-                      </a:solidFill>
-                      <a:prstDash val="solid"/>
-                      <a:round/>
-                      <a:headEnd type="none" w="med" len="med"/>
-                      <a:tailEnd type="none" w="med" len="med"/>
-                    </a:lnT>
-                    <a:lnB w="6350" cap="flat" cmpd="sng" algn="ctr">
-                      <a:solidFill>
-                        <a:srgbClr val="DCE7E5"/>
-                      </a:solidFill>
-                      <a:prstDash val="solid"/>
-                      <a:round/>
-                      <a:headEnd type="none" w="med" len="med"/>
-                      <a:tailEnd type="none" w="med" len="med"/>
-                    </a:lnB>
-                    <a:solidFill>
-                      <a:srgbClr val="FFFFFF"/>
-                    </a:solidFill>
-                  </a:tcPr>
-                </a:tc>
-                <a:tc>
-                  <a:txBody>
-                    <a:bodyPr/>
-                    <a:lstStyle/>
-                    <a:p>
-                      <a:pPr algn="ctr" indent="0" marL="0">
-                        <a:buNone/>
-                      </a:pPr>
-                      <a:r>
-                        <a:rPr lang="en-US" sz="900" dirty="0">
-                          <a:solidFill>
-                            <a:srgbClr val="1D2B30"/>
-                          </a:solidFill>
-                          <a:latin typeface="Calibri" pitchFamily="34" charset="0"/>
-                          <a:ea typeface="Calibri" pitchFamily="34" charset="-122"/>
-                          <a:cs typeface="Calibri" pitchFamily="34" charset="-120"/>
-                        </a:rPr>
-                        <a:t>35%</a:t>
-                      </a:r>
-                      <a:endParaRPr lang="en-US" sz="900" dirty="0">
-                        <a:latin typeface="Calibri" charset="0"/>
-                        <a:ea typeface="Calibri" charset="0"/>
-                        <a:cs typeface="Calibri" charset="0"/>
-                      </a:endParaRPr>
-                    </a:p>
-                  </a:txBody>
-                  <a:tcPr marL="38100" marR="38100" marT="25400" marB="25400" anchor="ctr">
-                    <a:lnL w="6350" cap="flat" cmpd="sng" algn="ctr">
-                      <a:solidFill>
-                        <a:srgbClr val="DCE7E5"/>
-                      </a:solidFill>
-                      <a:prstDash val="solid"/>
-                      <a:round/>
-                      <a:headEnd type="none" w="med" len="med"/>
-                      <a:tailEnd type="none" w="med" len="med"/>
-                    </a:lnL>
-                    <a:lnR w="6350" cap="flat" cmpd="sng" algn="ctr">
-                      <a:solidFill>
-                        <a:srgbClr val="DCE7E5"/>
-                      </a:solidFill>
-                      <a:prstDash val="solid"/>
-                      <a:round/>
-                      <a:headEnd type="none" w="med" len="med"/>
-                      <a:tailEnd type="none" w="med" len="med"/>
-                    </a:lnR>
-                    <a:lnT w="6350" cap="flat" cmpd="sng" algn="ctr">
-                      <a:solidFill>
-                        <a:srgbClr val="DCE7E5"/>
-                      </a:solidFill>
-                      <a:prstDash val="solid"/>
-                      <a:round/>
-                      <a:headEnd type="none" w="med" len="med"/>
-                      <a:tailEnd type="none" w="med" len="med"/>
-                    </a:lnT>
-                    <a:lnB w="6350" cap="flat" cmpd="sng" algn="ctr">
-                      <a:solidFill>
-                        <a:srgbClr val="DCE7E5"/>
-                      </a:solidFill>
-                      <a:prstDash val="solid"/>
-                      <a:round/>
-                      <a:headEnd type="none" w="med" len="med"/>
-                      <a:tailEnd type="none" w="med" len="med"/>
-                    </a:lnB>
-                    <a:solidFill>
-                      <a:srgbClr val="FFFFFF"/>
-                    </a:solidFill>
-                  </a:tcPr>
-                </a:tc>
-                <a:tc>
-                  <a:txBody>
-                    <a:bodyPr/>
-                    <a:lstStyle/>
-                    <a:p>
-                      <a:pPr algn="ctr" indent="0" marL="0">
-                        <a:buNone/>
-                      </a:pPr>
-                      <a:r>
-                        <a:rPr lang="en-US" sz="900" dirty="0">
-                          <a:solidFill>
-                            <a:srgbClr val="1D2B30"/>
-                          </a:solidFill>
-                          <a:latin typeface="Calibri" pitchFamily="34" charset="0"/>
-                          <a:ea typeface="Calibri" pitchFamily="34" charset="-122"/>
-                          <a:cs typeface="Calibri" pitchFamily="34" charset="-120"/>
-                        </a:rPr>
-                        <a:t>0.8%</a:t>
-                      </a:r>
-                      <a:endParaRPr lang="en-US" sz="900" dirty="0">
-                        <a:latin typeface="Calibri" charset="0"/>
-                        <a:ea typeface="Calibri" charset="0"/>
-                        <a:cs typeface="Calibri" charset="0"/>
-                      </a:endParaRPr>
-                    </a:p>
-                  </a:txBody>
-                  <a:tcPr marL="38100" marR="38100" marT="25400" marB="25400" anchor="ctr">
-                    <a:lnL w="6350" cap="flat" cmpd="sng" algn="ctr">
-                      <a:solidFill>
-                        <a:srgbClr val="DCE7E5"/>
-                      </a:solidFill>
-                      <a:prstDash val="solid"/>
-                      <a:round/>
-                      <a:headEnd type="none" w="med" len="med"/>
-                      <a:tailEnd type="none" w="med" len="med"/>
-                    </a:lnL>
-                    <a:lnR w="6350" cap="flat" cmpd="sng" algn="ctr">
-                      <a:solidFill>
-                        <a:srgbClr val="DCE7E5"/>
-                      </a:solidFill>
-                      <a:prstDash val="solid"/>
-                      <a:round/>
-                      <a:headEnd type="none" w="med" len="med"/>
-                      <a:tailEnd type="none" w="med" len="med"/>
-                    </a:lnR>
-                    <a:lnT w="6350" cap="flat" cmpd="sng" algn="ctr">
-                      <a:solidFill>
-                        <a:srgbClr val="DCE7E5"/>
-                      </a:solidFill>
-                      <a:prstDash val="solid"/>
-                      <a:round/>
-                      <a:headEnd type="none" w="med" len="med"/>
-                      <a:tailEnd type="none" w="med" len="med"/>
-                    </a:lnT>
-                    <a:lnB w="6350" cap="flat" cmpd="sng" algn="ctr">
-                      <a:solidFill>
-                        <a:srgbClr val="DCE7E5"/>
-                      </a:solidFill>
-                      <a:prstDash val="solid"/>
-                      <a:round/>
-                      <a:headEnd type="none" w="med" len="med"/>
-                      <a:tailEnd type="none" w="med" len="med"/>
-                    </a:lnB>
-                    <a:solidFill>
-                      <a:srgbClr val="FFFFFF"/>
-                    </a:solidFill>
-                  </a:tcPr>
-                </a:tc>
-                <a:tc>
-                  <a:txBody>
-                    <a:bodyPr/>
-                    <a:lstStyle/>
-                    <a:p>
-                      <a:pPr algn="ctr" indent="0" marL="0">
-                        <a:buNone/>
-                      </a:pPr>
-                      <a:r>
-                        <a:rPr lang="en-US" sz="900" dirty="0">
-                          <a:solidFill>
-                            <a:srgbClr val="1D2B30"/>
-                          </a:solidFill>
-                          <a:latin typeface="Calibri" pitchFamily="34" charset="0"/>
-                          <a:ea typeface="Calibri" pitchFamily="34" charset="-122"/>
-                          <a:cs typeface="Calibri" pitchFamily="34" charset="-120"/>
-                        </a:rPr>
-                        <a:t>0.55</a:t>
-                      </a:r>
-                      <a:endParaRPr lang="en-US" sz="900" dirty="0">
-                        <a:latin typeface="Calibri" charset="0"/>
-                        <a:ea typeface="Calibri" charset="0"/>
-                        <a:cs typeface="Calibri" charset="0"/>
-                      </a:endParaRPr>
-                    </a:p>
-                  </a:txBody>
-                  <a:tcPr marL="38100" marR="38100" marT="25400" marB="25400" anchor="ctr">
-                    <a:lnL w="6350" cap="flat" cmpd="sng" algn="ctr">
-                      <a:solidFill>
-                        <a:srgbClr val="DCE7E5"/>
-                      </a:solidFill>
-                      <a:prstDash val="solid"/>
-                      <a:round/>
-                      <a:headEnd type="none" w="med" len="med"/>
-                      <a:tailEnd type="none" w="med" len="med"/>
-                    </a:lnL>
-                    <a:lnR w="6350" cap="flat" cmpd="sng" algn="ctr">
-                      <a:solidFill>
-                        <a:srgbClr val="DCE7E5"/>
-                      </a:solidFill>
-                      <a:prstDash val="solid"/>
-                      <a:round/>
-                      <a:headEnd type="none" w="med" len="med"/>
-                      <a:tailEnd type="none" w="med" len="med"/>
-                    </a:lnR>
-                    <a:lnT w="6350" cap="flat" cmpd="sng" algn="ctr">
-                      <a:solidFill>
-                        <a:srgbClr val="DCE7E5"/>
-                      </a:solidFill>
-                      <a:prstDash val="solid"/>
-                      <a:round/>
-                      <a:headEnd type="none" w="med" len="med"/>
-                      <a:tailEnd type="none" w="med" len="med"/>
-                    </a:lnT>
-                    <a:lnB w="6350" cap="flat" cmpd="sng" algn="ctr">
-                      <a:solidFill>
-                        <a:srgbClr val="DCE7E5"/>
-                      </a:solidFill>
-                      <a:prstDash val="solid"/>
-                      <a:round/>
-                      <a:headEnd type="none" w="med" len="med"/>
-                      <a:tailEnd type="none" w="med" len="med"/>
-                    </a:lnB>
-                    <a:solidFill>
-                      <a:srgbClr val="FFFFFF"/>
-                    </a:solidFill>
-                  </a:tcPr>
-                </a:tc>
-                <a:tc>
-                  <a:txBody>
-                    <a:bodyPr/>
-                    <a:lstStyle/>
-                    <a:p>
-                      <a:pPr algn="ctr" indent="0" marL="0">
-                        <a:buNone/>
-                      </a:pPr>
-                      <a:r>
-                        <a:rPr lang="en-US" sz="900" dirty="0">
-                          <a:solidFill>
-                            <a:srgbClr val="1D2B30"/>
-                          </a:solidFill>
-                          <a:latin typeface="Calibri" pitchFamily="34" charset="0"/>
-                          <a:ea typeface="Calibri" pitchFamily="34" charset="-122"/>
-                          <a:cs typeface="Calibri" pitchFamily="34" charset="-120"/>
-                        </a:rPr>
-                        <a:t>0.45</a:t>
-                      </a:r>
-                      <a:endParaRPr lang="en-US" sz="900" dirty="0">
-                        <a:latin typeface="Calibri" charset="0"/>
-                        <a:ea typeface="Calibri" charset="0"/>
-                        <a:cs typeface="Calibri" charset="0"/>
-                      </a:endParaRPr>
-                    </a:p>
-                  </a:txBody>
-                  <a:tcPr marL="38100" marR="38100" marT="25400" marB="25400" anchor="ctr">
-                    <a:lnL w="6350" cap="flat" cmpd="sng" algn="ctr">
-                      <a:solidFill>
-                        <a:srgbClr val="DCE7E5"/>
-                      </a:solidFill>
-                      <a:prstDash val="solid"/>
-                      <a:round/>
-                      <a:headEnd type="none" w="med" len="med"/>
-                      <a:tailEnd type="none" w="med" len="med"/>
-                    </a:lnL>
-                    <a:lnR w="6350" cap="flat" cmpd="sng" algn="ctr">
-                      <a:solidFill>
-                        <a:srgbClr val="DCE7E5"/>
-                      </a:solidFill>
-                      <a:prstDash val="solid"/>
-                      <a:round/>
-                      <a:headEnd type="none" w="med" len="med"/>
-                      <a:tailEnd type="none" w="med" len="med"/>
-                    </a:lnR>
-                    <a:lnT w="6350" cap="flat" cmpd="sng" algn="ctr">
-                      <a:solidFill>
-                        <a:srgbClr val="DCE7E5"/>
-                      </a:solidFill>
-                      <a:prstDash val="solid"/>
-                      <a:round/>
-                      <a:headEnd type="none" w="med" len="med"/>
-                      <a:tailEnd type="none" w="med" len="med"/>
-                    </a:lnT>
-                    <a:lnB w="6350" cap="flat" cmpd="sng" algn="ctr">
-                      <a:solidFill>
-                        <a:srgbClr val="DCE7E5"/>
-                      </a:solidFill>
-                      <a:prstDash val="solid"/>
-                      <a:round/>
-                      <a:headEnd type="none" w="med" len="med"/>
-                      <a:tailEnd type="none" w="med" len="med"/>
-                    </a:lnB>
-                    <a:solidFill>
-                      <a:srgbClr val="FFFFFF"/>
-                    </a:solidFill>
-                  </a:tcPr>
-                </a:tc>
-                <a:tc>
-                  <a:txBody>
-                    <a:bodyPr/>
-                    <a:lstStyle/>
-                    <a:p>
-                      <a:pPr algn="ctr" indent="0" marL="0">
-                        <a:buNone/>
-                      </a:pPr>
-                      <a:r>
-                        <a:rPr lang="en-US" sz="900" dirty="0">
-                          <a:solidFill>
-                            <a:srgbClr val="1D2B30"/>
-                          </a:solidFill>
-                          <a:latin typeface="Calibri" pitchFamily="34" charset="0"/>
-                          <a:ea typeface="Calibri" pitchFamily="34" charset="-122"/>
-                          <a:cs typeface="Calibri" pitchFamily="34" charset="-120"/>
-                        </a:rPr>
-                        <a:t>0.40</a:t>
                       </a:r>
                       <a:endParaRPr lang="en-US" sz="900" dirty="0">
                         <a:latin typeface="Calibri" charset="0"/>
@@ -26750,7 +25890,7 @@
                 <a:ea typeface="Calibri" pitchFamily="34" charset="-122"/>
                 <a:cs typeface="Calibri" pitchFamily="34" charset="-120"/>
               </a:rPr>
-              <a:t>Monthly Bloomberg history since 2015 for all four indices. Launch a hypothetical note every month, apply the same coupon, memory and autocall rules, and record coupons, life and IRR by launch year.</a:t>
+              <a:t>Monthly Bloomberg history since 2015 for all three indices. Launch a hypothetical note every month, apply the same coupon, memory and autocall rules, and record coupons, life and IRR by launch year.</a:t>
             </a:r>
             <a:endParaRPr lang="en-US" sz="950" dirty="0"/>
           </a:p>
@@ -27282,7 +26422,7 @@
                           <a:ea typeface="Calibri" pitchFamily="34" charset="-122"/>
                           <a:cs typeface="Calibri" pitchFamily="34" charset="-120"/>
                         </a:rPr>
-                        <a:t>6.0%</a:t>
+                        <a:t>5.9%</a:t>
                       </a:r>
                       <a:endParaRPr lang="en-US" sz="900" dirty="0">
                         <a:latin typeface="Calibri" charset="0"/>
@@ -27696,7 +26836,7 @@
                           <a:ea typeface="Calibri" pitchFamily="34" charset="-122"/>
                           <a:cs typeface="Calibri" pitchFamily="34" charset="-120"/>
                         </a:rPr>
-                        <a:t>8.2%</a:t>
+                        <a:t>8.3%</a:t>
                       </a:r>
                       <a:endParaRPr lang="en-US" sz="900" dirty="0">
                         <a:latin typeface="Calibri" charset="0"/>
@@ -27834,7 +26974,7 @@
                           <a:ea typeface="Calibri" pitchFamily="34" charset="-122"/>
                           <a:cs typeface="Calibri" pitchFamily="34" charset="-120"/>
                         </a:rPr>
-                        <a:t>7.4% / 6.8%</a:t>
+                        <a:t>7.5% / 6.8%</a:t>
                       </a:r>
                       <a:endParaRPr lang="en-US" sz="900" dirty="0">
                         <a:latin typeface="Calibri" charset="0"/>
@@ -28374,7 +27514,7 @@
                           <a:ea typeface="Calibri" pitchFamily="34" charset="-122"/>
                           <a:cs typeface="Calibri" pitchFamily="34" charset="-120"/>
                         </a:rPr>
-                        <a:t>6.8% p.a. memory coupon</a:t>
+                        <a:t>6.75% p.a. memory coupon</a:t>
                       </a:r>
                       <a:endParaRPr lang="en-US" sz="900" dirty="0">
                         <a:latin typeface="Calibri" charset="0"/>
@@ -28648,7 +27788,7 @@
                           <a:ea typeface="Calibri" pitchFamily="34" charset="-122"/>
                           <a:cs typeface="Calibri" pitchFamily="34" charset="-120"/>
                         </a:rPr>
-                        <a:t>9.8%</a:t>
+                        <a:t>9.5%</a:t>
                       </a:r>
                       <a:endParaRPr lang="en-US" sz="900" dirty="0">
                         <a:latin typeface="Calibri" charset="0"/>
@@ -28786,7 +27926,7 @@
                           <a:ea typeface="Calibri" pitchFamily="34" charset="-122"/>
                           <a:cs typeface="Calibri" pitchFamily="34" charset="-120"/>
                         </a:rPr>
-                        <a:t>94% of basket gain at Y5</a:t>
+                        <a:t>101% of basket gain at Y5</a:t>
                       </a:r>
                       <a:endParaRPr lang="en-US" sz="900" dirty="0">
                         <a:latin typeface="Calibri" charset="0"/>
@@ -30150,7 +29290,7 @@
                 <a:ea typeface="Cambria" pitchFamily="34" charset="-122"/>
                 <a:cs typeface="Cambria" pitchFamily="34" charset="-120"/>
               </a:rPr>
-              <a:t>6.8%</a:t>
+              <a:t>6.75%</a:t>
             </a:r>
             <a:endParaRPr lang="en-US" sz="3800" dirty="0"/>
           </a:p>
@@ -30228,7 +29368,7 @@
                 <a:ea typeface="Calibri" pitchFamily="34" charset="-122"/>
                 <a:cs typeface="Calibri" pitchFamily="34" charset="-120"/>
               </a:rPr>
-              <a:t>1.70% each quarter the basket is ≥ 100%; missed coupons are paid later when it recovers</a:t>
+              <a:t>1.69% each quarter the basket is ≥ 100%; missed coupons are paid later when it recovers</a:t>
             </a:r>
             <a:endParaRPr lang="en-US" sz="1050" dirty="0"/>
           </a:p>
@@ -30583,7 +29723,7 @@
                 <a:ea typeface="Calibri" pitchFamily="34" charset="-122"/>
                 <a:cs typeface="Calibri" pitchFamily="34" charset="-120"/>
               </a:rPr>
-              <a:t> on a semiconductor-heavy basket of four real, Bloomberg-listed indices (Taiwan TAIEX 35%, KOSPI 200 25%, Nikkei 225 20%, PHLX Semiconductor 20%). It gives the family the AI hardware layer (chips, memory and chip-making equipment) that complements, rather than duplicates, the infrastructure, power and property they already own. </a:t>
+              <a:t> on a semiconductor-heavy basket of three real, Bloomberg-listed Asian indices (Taiwan TAIEX 40%, KOSPI 200 30%, Nikkei 225 30%). It gives the family the AI hardware layer (chips, memory and chip-making equipment) that complements, rather than duplicates, the infrastructure, power and property they already own. </a:t>
             </a:r>
             <a:pPr indent="0" marL="0">
               <a:buNone/>
@@ -30597,7 +29737,7 @@
                 <a:ea typeface="Calibri" pitchFamily="34" charset="-122"/>
                 <a:cs typeface="Calibri" pitchFamily="34" charset="-120"/>
               </a:rPr>
-              <a:t>The family never loses capital at maturity, earns 6.8% a year in the 82% of paths where the basket gets back to its starting level, and gets 100% back in the rest. Fair value is 97.7%, so issuing at par leaves Natixis 2.4% for hedging and margin.</a:t>
+              <a:t>The family never loses capital at maturity, earns 6.75% a year in the 82% of paths where the basket gets back to its starting level, and gets 100% back in the rest. Fair value is 97.6%, so issuing at par leaves Natixis 2.4% for hedging and margin.</a:t>
             </a:r>
             <a:endParaRPr lang="en-US" sz="1150" dirty="0"/>
           </a:p>
@@ -31437,7 +30577,7 @@
                           <a:ea typeface="Calibri" pitchFamily="34" charset="-122"/>
                           <a:cs typeface="Calibri" pitchFamily="34" charset="-120"/>
                         </a:rPr>
-                        <a:t>6.8% p.a. coupon, above the 5.69% 5Y USD funding rate, in every path that autocalls; proceeds roll into the next note</a:t>
+                        <a:t>6.75% p.a. coupon, above the 5.69% 5Y USD funding rate, in every path that autocalls; proceeds roll into the next note</a:t>
                       </a:r>
                       <a:endParaRPr lang="en-US" sz="950" dirty="0">
                         <a:latin typeface="Calibri" charset="0"/>
@@ -32667,7 +31807,7 @@
                 <a:ea typeface="Calibri" pitchFamily="34" charset="-122"/>
                 <a:cs typeface="Calibri" pitchFamily="34" charset="-120"/>
               </a:rPr>
-              <a:t>Global chip leaders</a:t>
+              <a:t>Liquid and hedgeable</a:t>
             </a:r>
             <a:endParaRPr lang="en-US" sz="1150" dirty="0"/>
           </a:p>
@@ -32706,7 +31846,7 @@
                 <a:ea typeface="Calibri" pitchFamily="34" charset="-122"/>
                 <a:cs typeface="Calibri" pitchFamily="34" charset="-120"/>
               </a:rPr>
-              <a:t>The PHLX Semiconductor index adds the global designers and toolmakers (incl. TSMC and ASML ADRs) on the other side of Asia's supply chain.</a:t>
+              <a:t>TAIEX, KOSPI 200 and Nikkei 225 futures and options are among Asia's most traded, so Natixis can hedge cheaply and transparently.</a:t>
             </a:r>
             <a:endParaRPr lang="en-US" sz="950" dirty="0"/>
           </a:p>
@@ -32805,7 +31945,7 @@
                 <a:ea typeface="Calibri" pitchFamily="34" charset="-122"/>
                 <a:cs typeface="Calibri" pitchFamily="34" charset="-120"/>
               </a:rPr>
-              <a:t>High USD rates make the 5Y zero-coupon bond cheap (75.8%), so guaranteeing 100% back costs little. Asian equity volatility (basket ~21%) makes it likely the basket revisits 100%, which is what pays the 6.8% coupon.</a:t>
+              <a:t>High USD rates make the 5Y zero-coupon bond cheap (75.8%), so guaranteeing 100% back costs little. Asian equity volatility (basket ~21%) makes it likely the basket revisits 100%, which is what pays the 6.75% coupon.</a:t>
             </a:r>
             <a:endParaRPr lang="en-US" sz="1000" dirty="0"/>
           </a:p>
@@ -32954,7 +32094,7 @@
                 <a:ea typeface="Cambria" pitchFamily="34" charset="-122"/>
                 <a:cs typeface="Cambria" pitchFamily="34" charset="-120"/>
               </a:rPr>
-              <a:t>Underlying: a semiconductor-heavy basket of four indices</a:t>
+              <a:t>Underlying: a semiconductor-heavy basket of three Asian indices</a:t>
             </a:r>
             <a:endParaRPr lang="en-US" sz="2200" dirty="0"/>
           </a:p>
@@ -33246,70 +32386,6 @@
           </a:p>
         </p:txBody>
       </p:sp>
-      <p:sp>
-        <p:nvSpPr>
-          <p:cNvPr id="12" name="Shape 9"/>
-          <p:cNvSpPr/>
-          <p:nvPr/>
-        </p:nvSpPr>
-        <p:spPr>
-          <a:xfrm>
-            <a:off x="548640" y="4526280"/>
-            <a:ext cx="118872" cy="118872"/>
-          </a:xfrm>
-          <a:prstGeom prst="rect">
-            <a:avLst/>
-          </a:prstGeom>
-          <a:solidFill>
-            <a:srgbClr val="8FA6AA"/>
-          </a:solidFill>
-          <a:ln w="12700">
-            <a:solidFill>
-              <a:srgbClr val="8FA6AA"/>
-            </a:solidFill>
-            <a:prstDash val="solid"/>
-          </a:ln>
-        </p:spPr>
-      </p:sp>
-      <p:sp>
-        <p:nvSpPr>
-          <p:cNvPr id="13" name="Text 10"/>
-          <p:cNvSpPr txBox="1"/>
-          <p:nvPr/>
-        </p:nvSpPr>
-        <p:spPr>
-          <a:xfrm>
-            <a:off x="731520" y="4489704"/>
-            <a:ext cx="2377440" cy="182880"/>
-          </a:xfrm>
-          <a:prstGeom prst="rect">
-            <a:avLst/>
-          </a:prstGeom>
-          <a:noFill/>
-          <a:ln/>
-        </p:spPr>
-        <p:txBody>
-          <a:bodyPr wrap="square" lIns="0" tIns="0" rIns="0" bIns="0" rtlCol="0" anchor="t"/>
-          <a:lstStyle/>
-          <a:p>
-            <a:pPr indent="0" marL="0">
-              <a:buNone/>
-            </a:pPr>
-            <a:r>
-              <a:rPr lang="en-US" sz="900" dirty="0">
-                <a:solidFill>
-                  <a:srgbClr val="1D2B30"/>
-                </a:solidFill>
-                <a:latin typeface="Calibri" pitchFamily="34" charset="0"/>
-                <a:ea typeface="Calibri" pitchFamily="34" charset="-122"/>
-                <a:cs typeface="Calibri" pitchFamily="34" charset="-120"/>
-              </a:rPr>
-              <a:t>PHLX Semiconductor</a:t>
-            </a:r>
-            <a:endParaRPr lang="en-US" sz="900" dirty="0"/>
-          </a:p>
-        </p:txBody>
-      </p:sp>
       <p:graphicFrame>
         <p:nvGraphicFramePr>
           <p:cNvPr id="7" name="Table 0"/>
@@ -33612,7 +32688,7 @@
                   </a:tcPr>
                 </a:tc>
               </a:tr>
-              <a:tr h="603504">
+              <a:tr h="731520">
                 <a:tc>
                   <a:txBody>
                     <a:bodyPr/>
@@ -33719,7 +32795,7 @@
                           <a:ea typeface="Calibri" pitchFamily="34" charset="-122"/>
                           <a:cs typeface="Calibri" pitchFamily="34" charset="-120"/>
                         </a:rPr>
-                        <a:t>35%</a:t>
+                        <a:t>40%</a:t>
                       </a:r>
                       <a:endParaRPr lang="en-US" sz="900" dirty="0">
                         <a:latin typeface="Calibri" charset="0"/>
@@ -33907,7 +32983,7 @@
                   </a:tcPr>
                 </a:tc>
               </a:tr>
-              <a:tr h="603504">
+              <a:tr h="731520">
                 <a:tc>
                   <a:txBody>
                     <a:bodyPr/>
@@ -34014,7 +33090,7 @@
                           <a:ea typeface="Calibri" pitchFamily="34" charset="-122"/>
                           <a:cs typeface="Calibri" pitchFamily="34" charset="-120"/>
                         </a:rPr>
-                        <a:t>25%</a:t>
+                        <a:t>30%</a:t>
                       </a:r>
                       <a:endParaRPr lang="en-US" sz="900" dirty="0">
                         <a:latin typeface="Calibri" charset="0"/>
@@ -34202,7 +33278,7 @@
                   </a:tcPr>
                 </a:tc>
               </a:tr>
-              <a:tr h="603504">
+              <a:tr h="731520">
                 <a:tc>
                   <a:txBody>
                     <a:bodyPr/>
@@ -34309,7 +33385,7 @@
                           <a:ea typeface="Calibri" pitchFamily="34" charset="-122"/>
                           <a:cs typeface="Calibri" pitchFamily="34" charset="-120"/>
                         </a:rPr>
-                        <a:t>20%</a:t>
+                        <a:t>30%</a:t>
                       </a:r>
                       <a:endParaRPr lang="en-US" sz="900" dirty="0">
                         <a:latin typeface="Calibri" charset="0"/>
@@ -34497,308 +33573,13 @@
                   </a:tcPr>
                 </a:tc>
               </a:tr>
-              <a:tr h="603504">
-                <a:tc>
-                  <a:txBody>
-                    <a:bodyPr/>
-                    <a:lstStyle/>
-                    <a:p>
-                      <a:pPr indent="0" marL="0">
-                        <a:buNone/>
-                      </a:pPr>
-                      <a:r>
-                        <a:rPr lang="en-US" sz="900" b="1" dirty="0">
-                          <a:solidFill>
-                            <a:srgbClr val="1D2B30"/>
-                          </a:solidFill>
-                          <a:latin typeface="Calibri" pitchFamily="34" charset="0"/>
-                          <a:ea typeface="Calibri" pitchFamily="34" charset="-122"/>
-                          <a:cs typeface="Calibri" pitchFamily="34" charset="-120"/>
-                        </a:rPr>
-                        <a:t>PHLX Semiconductor</a:t>
-                      </a:r>
-                      <a:endParaRPr lang="en-US" sz="900" dirty="0">
-                        <a:latin typeface="Calibri" charset="0"/>
-                        <a:ea typeface="Calibri" charset="0"/>
-                        <a:cs typeface="Calibri" charset="0"/>
-                      </a:endParaRPr>
-                    </a:p>
-                    <a:p>
-                      <a:pPr indent="0" marL="0">
-                        <a:buNone/>
-                      </a:pPr>
-                      <a:r>
-                        <a:rPr lang="en-US" sz="900" b="1" dirty="0">
-                          <a:solidFill>
-                            <a:srgbClr val="1D2B30"/>
-                          </a:solidFill>
-                          <a:latin typeface="Calibri" pitchFamily="34" charset="0"/>
-                          <a:ea typeface="Calibri" pitchFamily="34" charset="-122"/>
-                          <a:cs typeface="Calibri" pitchFamily="34" charset="-120"/>
-                        </a:rPr>
-                        <a:t>SOX Index</a:t>
-                      </a:r>
-                      <a:endParaRPr lang="en-US" sz="900" dirty="0">
-                        <a:latin typeface="Calibri" charset="0"/>
-                        <a:ea typeface="Calibri" charset="0"/>
-                        <a:cs typeface="Calibri" charset="0"/>
-                      </a:endParaRPr>
-                    </a:p>
-                  </a:txBody>
-                  <a:tcPr marL="63500" marR="63500" marT="25400" marB="25400" anchor="ctr">
-                    <a:lnL w="6350" cap="flat" cmpd="sng" algn="ctr">
-                      <a:solidFill>
-                        <a:srgbClr val="DCE7E5"/>
-                      </a:solidFill>
-                      <a:prstDash val="solid"/>
-                      <a:round/>
-                      <a:headEnd type="none" w="med" len="med"/>
-                      <a:tailEnd type="none" w="med" len="med"/>
-                    </a:lnL>
-                    <a:lnR w="6350" cap="flat" cmpd="sng" algn="ctr">
-                      <a:solidFill>
-                        <a:srgbClr val="DCE7E5"/>
-                      </a:solidFill>
-                      <a:prstDash val="solid"/>
-                      <a:round/>
-                      <a:headEnd type="none" w="med" len="med"/>
-                      <a:tailEnd type="none" w="med" len="med"/>
-                    </a:lnR>
-                    <a:lnT w="6350" cap="flat" cmpd="sng" algn="ctr">
-                      <a:solidFill>
-                        <a:srgbClr val="DCE7E5"/>
-                      </a:solidFill>
-                      <a:prstDash val="solid"/>
-                      <a:round/>
-                      <a:headEnd type="none" w="med" len="med"/>
-                      <a:tailEnd type="none" w="med" len="med"/>
-                    </a:lnT>
-                    <a:lnB w="6350" cap="flat" cmpd="sng" algn="ctr">
-                      <a:solidFill>
-                        <a:srgbClr val="DCE7E5"/>
-                      </a:solidFill>
-                      <a:prstDash val="solid"/>
-                      <a:round/>
-                      <a:headEnd type="none" w="med" len="med"/>
-                      <a:tailEnd type="none" w="med" len="med"/>
-                    </a:lnB>
-                    <a:solidFill>
-                      <a:srgbClr val="FFFFFF"/>
-                    </a:solidFill>
-                  </a:tcPr>
-                </a:tc>
-                <a:tc>
-                  <a:txBody>
-                    <a:bodyPr/>
-                    <a:lstStyle/>
-                    <a:p>
-                      <a:pPr indent="0" marL="0">
-                        <a:buNone/>
-                      </a:pPr>
-                      <a:r>
-                        <a:rPr lang="en-US" sz="900" dirty="0">
-                          <a:solidFill>
-                            <a:srgbClr val="1D2B30"/>
-                          </a:solidFill>
-                          <a:latin typeface="Calibri" pitchFamily="34" charset="0"/>
-                          <a:ea typeface="Calibri" pitchFamily="34" charset="-122"/>
-                          <a:cs typeface="Calibri" pitchFamily="34" charset="-120"/>
-                        </a:rPr>
-                        <a:t>20%</a:t>
-                      </a:r>
-                      <a:endParaRPr lang="en-US" sz="900" dirty="0">
-                        <a:latin typeface="Calibri" charset="0"/>
-                        <a:ea typeface="Calibri" charset="0"/>
-                        <a:cs typeface="Calibri" charset="0"/>
-                      </a:endParaRPr>
-                    </a:p>
-                  </a:txBody>
-                  <a:tcPr marL="63500" marR="63500" marT="25400" marB="25400" anchor="ctr">
-                    <a:lnL w="6350" cap="flat" cmpd="sng" algn="ctr">
-                      <a:solidFill>
-                        <a:srgbClr val="DCE7E5"/>
-                      </a:solidFill>
-                      <a:prstDash val="solid"/>
-                      <a:round/>
-                      <a:headEnd type="none" w="med" len="med"/>
-                      <a:tailEnd type="none" w="med" len="med"/>
-                    </a:lnL>
-                    <a:lnR w="6350" cap="flat" cmpd="sng" algn="ctr">
-                      <a:solidFill>
-                        <a:srgbClr val="DCE7E5"/>
-                      </a:solidFill>
-                      <a:prstDash val="solid"/>
-                      <a:round/>
-                      <a:headEnd type="none" w="med" len="med"/>
-                      <a:tailEnd type="none" w="med" len="med"/>
-                    </a:lnR>
-                    <a:lnT w="6350" cap="flat" cmpd="sng" algn="ctr">
-                      <a:solidFill>
-                        <a:srgbClr val="DCE7E5"/>
-                      </a:solidFill>
-                      <a:prstDash val="solid"/>
-                      <a:round/>
-                      <a:headEnd type="none" w="med" len="med"/>
-                      <a:tailEnd type="none" w="med" len="med"/>
-                    </a:lnT>
-                    <a:lnB w="6350" cap="flat" cmpd="sng" algn="ctr">
-                      <a:solidFill>
-                        <a:srgbClr val="DCE7E5"/>
-                      </a:solidFill>
-                      <a:prstDash val="solid"/>
-                      <a:round/>
-                      <a:headEnd type="none" w="med" len="med"/>
-                      <a:tailEnd type="none" w="med" len="med"/>
-                    </a:lnB>
-                    <a:solidFill>
-                      <a:srgbClr val="FFFFFF"/>
-                    </a:solidFill>
-                  </a:tcPr>
-                </a:tc>
-                <a:tc>
-                  <a:txBody>
-                    <a:bodyPr/>
-                    <a:lstStyle/>
-                    <a:p>
-                      <a:pPr indent="0" marL="0">
-                        <a:buNone/>
-                      </a:pPr>
-                      <a:r>
-                        <a:rPr lang="en-US" sz="900" dirty="0">
-                          <a:solidFill>
-                            <a:srgbClr val="1D2B30"/>
-                          </a:solidFill>
-                          <a:latin typeface="Calibri" pitchFamily="34" charset="0"/>
-                          <a:ea typeface="Calibri" pitchFamily="34" charset="-122"/>
-                          <a:cs typeface="Calibri" pitchFamily="34" charset="-120"/>
-                        </a:rPr>
-                        <a:t>Global semiconductor leaders, USD-listed: diversifies beyond Asia's single-country risks</a:t>
-                      </a:r>
-                      <a:endParaRPr lang="en-US" sz="900" dirty="0">
-                        <a:latin typeface="Calibri" charset="0"/>
-                        <a:ea typeface="Calibri" charset="0"/>
-                        <a:cs typeface="Calibri" charset="0"/>
-                      </a:endParaRPr>
-                    </a:p>
-                  </a:txBody>
-                  <a:tcPr marL="63500" marR="63500" marT="25400" marB="25400" anchor="ctr">
-                    <a:lnL w="6350" cap="flat" cmpd="sng" algn="ctr">
-                      <a:solidFill>
-                        <a:srgbClr val="DCE7E5"/>
-                      </a:solidFill>
-                      <a:prstDash val="solid"/>
-                      <a:round/>
-                      <a:headEnd type="none" w="med" len="med"/>
-                      <a:tailEnd type="none" w="med" len="med"/>
-                    </a:lnL>
-                    <a:lnR w="6350" cap="flat" cmpd="sng" algn="ctr">
-                      <a:solidFill>
-                        <a:srgbClr val="DCE7E5"/>
-                      </a:solidFill>
-                      <a:prstDash val="solid"/>
-                      <a:round/>
-                      <a:headEnd type="none" w="med" len="med"/>
-                      <a:tailEnd type="none" w="med" len="med"/>
-                    </a:lnR>
-                    <a:lnT w="6350" cap="flat" cmpd="sng" algn="ctr">
-                      <a:solidFill>
-                        <a:srgbClr val="DCE7E5"/>
-                      </a:solidFill>
-                      <a:prstDash val="solid"/>
-                      <a:round/>
-                      <a:headEnd type="none" w="med" len="med"/>
-                      <a:tailEnd type="none" w="med" len="med"/>
-                    </a:lnT>
-                    <a:lnB w="6350" cap="flat" cmpd="sng" algn="ctr">
-                      <a:solidFill>
-                        <a:srgbClr val="DCE7E5"/>
-                      </a:solidFill>
-                      <a:prstDash val="solid"/>
-                      <a:round/>
-                      <a:headEnd type="none" w="med" len="med"/>
-                      <a:tailEnd type="none" w="med" len="med"/>
-                    </a:lnB>
-                    <a:solidFill>
-                      <a:srgbClr val="FFFFFF"/>
-                    </a:solidFill>
-                  </a:tcPr>
-                </a:tc>
-                <a:tc>
-                  <a:txBody>
-                    <a:bodyPr/>
-                    <a:lstStyle/>
-                    <a:p>
-                      <a:pPr indent="0" marL="0">
-                        <a:buNone/>
-                      </a:pPr>
-                      <a:r>
-                        <a:rPr lang="en-US" sz="900" dirty="0">
-                          <a:solidFill>
-                            <a:srgbClr val="1D2B30"/>
-                          </a:solidFill>
-                          <a:latin typeface="Calibri" pitchFamily="34" charset="0"/>
-                          <a:ea typeface="Calibri" pitchFamily="34" charset="-122"/>
-                          <a:cs typeface="Calibri" pitchFamily="34" charset="-120"/>
-                        </a:rPr>
-                        <a:t>35%</a:t>
-                      </a:r>
-                      <a:endParaRPr lang="en-US" sz="900" dirty="0">
-                        <a:latin typeface="Calibri" charset="0"/>
-                        <a:ea typeface="Calibri" charset="0"/>
-                        <a:cs typeface="Calibri" charset="0"/>
-                      </a:endParaRPr>
-                    </a:p>
-                  </a:txBody>
-                  <a:tcPr marL="63500" marR="63500" marT="25400" marB="25400" anchor="ctr">
-                    <a:lnL w="6350" cap="flat" cmpd="sng" algn="ctr">
-                      <a:solidFill>
-                        <a:srgbClr val="DCE7E5"/>
-                      </a:solidFill>
-                      <a:prstDash val="solid"/>
-                      <a:round/>
-                      <a:headEnd type="none" w="med" len="med"/>
-                      <a:tailEnd type="none" w="med" len="med"/>
-                    </a:lnL>
-                    <a:lnR w="6350" cap="flat" cmpd="sng" algn="ctr">
-                      <a:solidFill>
-                        <a:srgbClr val="DCE7E5"/>
-                      </a:solidFill>
-                      <a:prstDash val="solid"/>
-                      <a:round/>
-                      <a:headEnd type="none" w="med" len="med"/>
-                      <a:tailEnd type="none" w="med" len="med"/>
-                    </a:lnR>
-                    <a:lnT w="6350" cap="flat" cmpd="sng" algn="ctr">
-                      <a:solidFill>
-                        <a:srgbClr val="DCE7E5"/>
-                      </a:solidFill>
-                      <a:prstDash val="solid"/>
-                      <a:round/>
-                      <a:headEnd type="none" w="med" len="med"/>
-                      <a:tailEnd type="none" w="med" len="med"/>
-                    </a:lnT>
-                    <a:lnB w="6350" cap="flat" cmpd="sng" algn="ctr">
-                      <a:solidFill>
-                        <a:srgbClr val="DCE7E5"/>
-                      </a:solidFill>
-                      <a:prstDash val="solid"/>
-                      <a:round/>
-                      <a:headEnd type="none" w="med" len="med"/>
-                      <a:tailEnd type="none" w="med" len="med"/>
-                    </a:lnB>
-                    <a:solidFill>
-                      <a:srgbClr val="FFFFFF"/>
-                    </a:solidFill>
-                  </a:tcPr>
-                </a:tc>
-              </a:tr>
             </a:tbl>
           </a:graphicData>
         </a:graphic>
       </p:graphicFrame>
       <p:sp>
         <p:nvSpPr>
-          <p:cNvPr id="15" name="Text 11"/>
+          <p:cNvPr id="13" name="Text 9"/>
           <p:cNvSpPr txBox="1"/>
           <p:nvPr/>
         </p:nvSpPr>
@@ -34843,7 +33624,7 @@
                 <a:ea typeface="Calibri" pitchFamily="34" charset="-122"/>
                 <a:cs typeface="Calibri" pitchFamily="34" charset="-120"/>
               </a:rPr>
-              <a:t>a shock to one market (e.g. Taiwan geopolitics) is cushioned by the other three. Basket vol is ~21% vs 35% for the PHLX Semiconductor index alone, and correlation risk stays with the desk.</a:t>
+              <a:t>a shock to one market (e.g. Taiwan geopolitics) is cushioned by the other two. Basket vol is ~21% vs 22%–25% for each index alone, and correlation risk stays with the desk.</a:t>
             </a:r>
             <a:endParaRPr lang="en-US" sz="1000" dirty="0"/>
           </a:p>
@@ -34851,7 +33632,7 @@
       </p:sp>
       <p:sp>
         <p:nvSpPr>
-          <p:cNvPr id="16" name="Text 12"/>
+          <p:cNvPr id="14" name="Text 10"/>
           <p:cNvSpPr txBox="1"/>
           <p:nvPr/>
         </p:nvSpPr>
@@ -34890,7 +33671,7 @@
       </p:sp>
       <p:sp>
         <p:nvSpPr>
-          <p:cNvPr id="17" name="Text 13"/>
+          <p:cNvPr id="15" name="Text 11"/>
           <p:cNvSpPr txBox="1"/>
           <p:nvPr/>
         </p:nvSpPr>
@@ -34992,7 +33773,7 @@
                 <a:ea typeface="Cambria" pitchFamily="34" charset="-122"/>
                 <a:cs typeface="Cambria" pitchFamily="34" charset="-120"/>
               </a:rPr>
-              <a:t>Term sheet: 5-year capital-protected autocallable, 6.8% coupon</a:t>
+              <a:t>Term sheet: 5-year capital-protected autocallable, 6.75% coupon</a:t>
             </a:r>
             <a:endParaRPr lang="en-US" sz="2200" dirty="0"/>
           </a:p>
@@ -35563,7 +34344,7 @@
                           <a:ea typeface="Calibri" pitchFamily="34" charset="-122"/>
                           <a:cs typeface="Calibri" pitchFamily="34" charset="-120"/>
                         </a:rPr>
-                        <a:t>Weighted basket of 4 indices (slide 3)</a:t>
+                        <a:t>Weighted basket of 3 Asian indices (slide 3)</a:t>
                       </a:r>
                       <a:endParaRPr lang="en-US" sz="950" dirty="0">
                         <a:latin typeface="Calibri" charset="0"/>
@@ -35839,7 +34620,7 @@
                           <a:ea typeface="Calibri" pitchFamily="34" charset="-122"/>
                           <a:cs typeface="Calibri" pitchFamily="34" charset="-120"/>
                         </a:rPr>
-                        <a:t>6.8% p.a. (1.70% per quarter), paid if basket ≥ 100%</a:t>
+                        <a:t>6.75% p.a. (1.69% per quarter), paid if basket ≥ 100%</a:t>
                       </a:r>
                       <a:endParaRPr lang="en-US" sz="950" dirty="0">
                         <a:latin typeface="Calibri" charset="0"/>
@@ -36391,7 +35172,7 @@
                           <a:ea typeface="Calibri" pitchFamily="34" charset="-122"/>
                           <a:cs typeface="Calibri" pitchFamily="34" charset="-120"/>
                         </a:rPr>
-                        <a:t>100% / 97.7%</a:t>
+                        <a:t>100% / 97.6%</a:t>
                       </a:r>
                       <a:endParaRPr lang="en-US" sz="950" dirty="0">
                         <a:latin typeface="Calibri" charset="0"/>
@@ -36834,7 +35615,7 @@
                           <a:ea typeface="Calibri" pitchFamily="34" charset="-122"/>
                           <a:cs typeface="Calibri" pitchFamily="34" charset="-120"/>
                         </a:rPr>
-                        <a:t>11.6%</a:t>
+                        <a:t>11.4%</a:t>
                       </a:r>
                       <a:endParaRPr lang="en-US" sz="850" dirty="0">
                         <a:latin typeface="Calibri" charset="0"/>
@@ -36972,7 +35753,7 @@
                           <a:ea typeface="Calibri" pitchFamily="34" charset="-122"/>
                           <a:cs typeface="Calibri" pitchFamily="34" charset="-120"/>
                         </a:rPr>
-                        <a:t>7.9%</a:t>
+                        <a:t>7.8%</a:t>
                       </a:r>
                       <a:endParaRPr lang="en-US" sz="850" dirty="0">
                         <a:latin typeface="Calibri" charset="0"/>
@@ -37040,7 +35821,7 @@
                           <a:ea typeface="Calibri" pitchFamily="34" charset="-122"/>
                           <a:cs typeface="Calibri" pitchFamily="34" charset="-120"/>
                         </a:rPr>
-                        <a:t>11.6%</a:t>
+                        <a:t>11.4%</a:t>
                       </a:r>
                       <a:endParaRPr lang="en-US" sz="850" dirty="0">
                         <a:latin typeface="Calibri" charset="0"/>
@@ -37178,7 +35959,7 @@
                           <a:ea typeface="Calibri" pitchFamily="34" charset="-122"/>
                           <a:cs typeface="Calibri" pitchFamily="34" charset="-120"/>
                         </a:rPr>
-                        <a:t>10.8%</a:t>
+                        <a:t>10.7%</a:t>
                       </a:r>
                       <a:endParaRPr lang="en-US" sz="850" dirty="0">
                         <a:latin typeface="Calibri" charset="0"/>
@@ -37246,7 +36027,7 @@
                           <a:ea typeface="Calibri" pitchFamily="34" charset="-122"/>
                           <a:cs typeface="Calibri" pitchFamily="34" charset="-120"/>
                         </a:rPr>
-                        <a:t>9.8%</a:t>
+                        <a:t>9.5%</a:t>
                       </a:r>
                       <a:endParaRPr lang="en-US" sz="850" dirty="0">
                         <a:latin typeface="Calibri" charset="0"/>
@@ -37452,7 +36233,7 @@
                           <a:ea typeface="Calibri" pitchFamily="34" charset="-122"/>
                           <a:cs typeface="Calibri" pitchFamily="34" charset="-120"/>
                         </a:rPr>
-                        <a:t>1.0%</a:t>
+                        <a:t>1.2%</a:t>
                       </a:r>
                       <a:endParaRPr lang="en-US" sz="850" dirty="0">
                         <a:latin typeface="Calibri" charset="0"/>
@@ -37788,7 +36569,7 @@
                 <a:ea typeface="Calibri" pitchFamily="34" charset="-122"/>
                 <a:cs typeface="Calibri" pitchFamily="34" charset="-120"/>
               </a:rPr>
-              <a:t>The draft's 8.5% fixed coupon is worth 102.2% to the client, so Natixis cannot fund it. At-risk designs pay 6%–11% for a 10%–12% chance of losing capital. Cutting that to ~1% needs a 10%-vol basket and pays only 4.1%, below the 5.69% bond. Full protection prices at 7.1%; we offer 6.8%.</a:t>
+              <a:t>The draft's 8.5% fixed coupon is worth 102.3% to the client, so Natixis cannot fund it. At-risk designs pay 6%–11% for a 10%–11% chance of losing capital. Cutting that to ~1% needs a 10%-vol basket and pays only 4.1%, below the 5.69% bond. Full protection prices at 7.1%; we offer 6.75%.</a:t>
             </a:r>
             <a:endParaRPr lang="en-US" sz="950" dirty="0"/>
           </a:p>
@@ -38246,7 +37027,7 @@
                 <a:ea typeface="Calibri" pitchFamily="34" charset="-122"/>
                 <a:cs typeface="Calibri" pitchFamily="34" charset="-120"/>
               </a:rPr>
-              <a:t>called, 106.8% total</a:t>
+              <a:t>called, 106.7% total</a:t>
             </a:r>
             <a:endParaRPr lang="en-US" sz="950" dirty="0"/>
           </a:p>
@@ -38400,7 +37181,7 @@
                 <a:ea typeface="Calibri" pitchFamily="34" charset="-122"/>
                 <a:cs typeface="Calibri" pitchFamily="34" charset="-120"/>
               </a:rPr>
-              <a:t>called, 113.6% total</a:t>
+              <a:t>called, 113.5% total</a:t>
             </a:r>
             <a:endParaRPr lang="en-US" sz="950" dirty="0"/>
           </a:p>
@@ -38554,7 +37335,7 @@
                 <a:ea typeface="Calibri" pitchFamily="34" charset="-122"/>
                 <a:cs typeface="Calibri" pitchFamily="34" charset="-120"/>
               </a:rPr>
-              <a:t>called, 120.4% total</a:t>
+              <a:t>called, 120.3% total</a:t>
             </a:r>
             <a:endParaRPr lang="en-US" sz="950" dirty="0"/>
           </a:p>
@@ -38708,7 +37489,7 @@
                 <a:ea typeface="Calibri" pitchFamily="34" charset="-122"/>
                 <a:cs typeface="Calibri" pitchFamily="34" charset="-120"/>
               </a:rPr>
-              <a:t>called, 127.2% total</a:t>
+              <a:t>called, 127.0% total</a:t>
             </a:r>
             <a:endParaRPr lang="en-US" sz="950" dirty="0"/>
           </a:p>
@@ -38862,7 +37643,7 @@
                 <a:ea typeface="Calibri" pitchFamily="34" charset="-122"/>
                 <a:cs typeface="Calibri" pitchFamily="34" charset="-120"/>
               </a:rPr>
-              <a:t>called, 134.0% total</a:t>
+              <a:t>called, 133.8% total</a:t>
             </a:r>
             <a:endParaRPr lang="en-US" sz="950" dirty="0"/>
           </a:p>
@@ -38940,7 +37721,7 @@
                 <a:ea typeface="Calibri" pitchFamily="34" charset="-122"/>
                 <a:cs typeface="Calibri" pitchFamily="34" charset="-120"/>
               </a:rPr>
-              <a:t>Q1–Q3: coupon only (1.70% if basket ≥ 100%). From Q4: coupon plus autocall. Missed coupons are always caught up.</a:t>
+              <a:t>Q1–Q3: coupon only (1.69% if basket ≥ 100%). From Q4: coupon plus autocall. Missed coupons are always caught up.</a:t>
             </a:r>
             <a:endParaRPr lang="en-US" sz="900" dirty="0"/>
           </a:p>
@@ -39834,7 +38615,7 @@
                 <a:ea typeface="Calibri" pitchFamily="34" charset="-122"/>
                 <a:cs typeface="Calibri" pitchFamily="34" charset="-120"/>
               </a:rPr>
-              <a:t>Y1: 106.8%  (USD 106.8mn)</a:t>
+              <a:t>Y1: 106.7%  (USD 106.7mn)</a:t>
             </a:r>
             <a:endParaRPr lang="en-US" sz="900" dirty="0"/>
           </a:p>
@@ -39851,7 +38632,7 @@
                 <a:ea typeface="Calibri" pitchFamily="34" charset="-122"/>
                 <a:cs typeface="Calibri" pitchFamily="34" charset="-120"/>
               </a:rPr>
-              <a:t>Y2: 113.6%  (USD 113.6mn)</a:t>
+              <a:t>Y2: 113.5%  (USD 113.5mn)</a:t>
             </a:r>
             <a:endParaRPr lang="en-US" sz="900" dirty="0"/>
           </a:p>
@@ -39868,7 +38649,7 @@
                 <a:ea typeface="Calibri" pitchFamily="34" charset="-122"/>
                 <a:cs typeface="Calibri" pitchFamily="34" charset="-120"/>
               </a:rPr>
-              <a:t>Y3: 120.4%  (USD 120.4mn)</a:t>
+              <a:t>Y3: 120.3%  (USD 120.3mn)</a:t>
             </a:r>
             <a:endParaRPr lang="en-US" sz="900" dirty="0"/>
           </a:p>
@@ -39885,7 +38666,7 @@
                 <a:ea typeface="Calibri" pitchFamily="34" charset="-122"/>
                 <a:cs typeface="Calibri" pitchFamily="34" charset="-120"/>
               </a:rPr>
-              <a:t>Y4: 127.2%  (USD 127.2mn)</a:t>
+              <a:t>Y4: 127.0%  (USD 127.0mn)</a:t>
             </a:r>
             <a:endParaRPr lang="en-US" sz="900" dirty="0"/>
           </a:p>
@@ -39902,7 +38683,7 @@
                 <a:ea typeface="Calibri" pitchFamily="34" charset="-122"/>
                 <a:cs typeface="Calibri" pitchFamily="34" charset="-120"/>
               </a:rPr>
-              <a:t>Y5: 134.0%  (USD 134.0mn)</a:t>
+              <a:t>Y5: 133.8%  (USD 133.8mn)</a:t>
             </a:r>
             <a:endParaRPr lang="en-US" sz="900" dirty="0"/>
           </a:p>
@@ -40085,7 +38866,7 @@
                 <a:ea typeface="Calibri" pitchFamily="34" charset="-122"/>
                 <a:cs typeface="Calibri" pitchFamily="34" charset="-120"/>
               </a:rPr>
-              <a:t>≥ 100%: 134.0% (principal + all 20 coupons via memory)</a:t>
+              <a:t>≥ 100%: 133.8% (principal + all 20 coupons via memory)</a:t>
             </a:r>
             <a:endParaRPr lang="en-US" sz="850" dirty="0"/>
           </a:p>

--- a/deck/Asian-Digital-Autocallable-Note.pptx
+++ b/deck/Asian-Digital-Autocallable-Note.pptx
@@ -487,7 +487,7 @@
               <c:strCache>
                 <c:ptCount val="1"/>
                 <c:pt idx="0">
-                  <c:v>Our note (6.75%)</c:v>
+                  <c:v>Our note (7.20%)</c:v>
                 </c:pt>
               </c:strCache>
             </c:strRef>
@@ -1141,247 +1141,247 @@
                   <c:v>100</c:v>
                 </c:pt>
                 <c:pt idx="60">
-                  <c:v>133.75</c:v>
+                  <c:v>136</c:v>
                 </c:pt>
                 <c:pt idx="61">
-                  <c:v>133.75</c:v>
+                  <c:v>136</c:v>
                 </c:pt>
                 <c:pt idx="62">
-                  <c:v>133.75</c:v>
+                  <c:v>136</c:v>
                 </c:pt>
                 <c:pt idx="63">
-                  <c:v>133.75</c:v>
+                  <c:v>136</c:v>
                 </c:pt>
                 <c:pt idx="64">
-                  <c:v>133.75</c:v>
+                  <c:v>136</c:v>
                 </c:pt>
                 <c:pt idx="65">
-                  <c:v>133.75</c:v>
+                  <c:v>136</c:v>
                 </c:pt>
                 <c:pt idx="66">
-                  <c:v>133.75</c:v>
+                  <c:v>136</c:v>
                 </c:pt>
                 <c:pt idx="67">
-                  <c:v>133.75</c:v>
+                  <c:v>136</c:v>
                 </c:pt>
                 <c:pt idx="68">
-                  <c:v>133.75</c:v>
+                  <c:v>136</c:v>
                 </c:pt>
                 <c:pt idx="69">
-                  <c:v>133.75</c:v>
+                  <c:v>136</c:v>
                 </c:pt>
                 <c:pt idx="70">
-                  <c:v>133.75</c:v>
+                  <c:v>136</c:v>
                 </c:pt>
                 <c:pt idx="71">
-                  <c:v>133.75</c:v>
+                  <c:v>136</c:v>
                 </c:pt>
                 <c:pt idx="72">
-                  <c:v>133.75</c:v>
+                  <c:v>136</c:v>
                 </c:pt>
                 <c:pt idx="73">
-                  <c:v>133.75</c:v>
+                  <c:v>136</c:v>
                 </c:pt>
                 <c:pt idx="74">
-                  <c:v>133.75</c:v>
+                  <c:v>136</c:v>
                 </c:pt>
                 <c:pt idx="75">
-                  <c:v>133.75</c:v>
+                  <c:v>136</c:v>
                 </c:pt>
                 <c:pt idx="76">
-                  <c:v>133.75</c:v>
+                  <c:v>136</c:v>
                 </c:pt>
                 <c:pt idx="77">
-                  <c:v>133.75</c:v>
+                  <c:v>136</c:v>
                 </c:pt>
                 <c:pt idx="78">
-                  <c:v>133.75</c:v>
+                  <c:v>136</c:v>
                 </c:pt>
                 <c:pt idx="79">
-                  <c:v>133.75</c:v>
+                  <c:v>136</c:v>
                 </c:pt>
                 <c:pt idx="80">
-                  <c:v>133.75</c:v>
+                  <c:v>136</c:v>
                 </c:pt>
                 <c:pt idx="81">
-                  <c:v>133.75</c:v>
+                  <c:v>136</c:v>
                 </c:pt>
                 <c:pt idx="82">
-                  <c:v>133.75</c:v>
+                  <c:v>136</c:v>
                 </c:pt>
                 <c:pt idx="83">
-                  <c:v>133.75</c:v>
+                  <c:v>136</c:v>
                 </c:pt>
                 <c:pt idx="84">
-                  <c:v>133.75</c:v>
+                  <c:v>136</c:v>
                 </c:pt>
                 <c:pt idx="85">
-                  <c:v>133.75</c:v>
+                  <c:v>136</c:v>
                 </c:pt>
                 <c:pt idx="86">
-                  <c:v>133.75</c:v>
+                  <c:v>136</c:v>
                 </c:pt>
                 <c:pt idx="87">
-                  <c:v>133.75</c:v>
+                  <c:v>136</c:v>
                 </c:pt>
                 <c:pt idx="88">
-                  <c:v>133.75</c:v>
+                  <c:v>136</c:v>
                 </c:pt>
                 <c:pt idx="89">
-                  <c:v>133.75</c:v>
+                  <c:v>136</c:v>
                 </c:pt>
                 <c:pt idx="90">
-                  <c:v>133.75</c:v>
+                  <c:v>136</c:v>
                 </c:pt>
                 <c:pt idx="91">
-                  <c:v>133.75</c:v>
+                  <c:v>136</c:v>
                 </c:pt>
                 <c:pt idx="92">
-                  <c:v>133.75</c:v>
+                  <c:v>136</c:v>
                 </c:pt>
                 <c:pt idx="93">
-                  <c:v>133.75</c:v>
+                  <c:v>136</c:v>
                 </c:pt>
                 <c:pt idx="94">
-                  <c:v>133.75</c:v>
+                  <c:v>136</c:v>
                 </c:pt>
                 <c:pt idx="95">
-                  <c:v>133.75</c:v>
+                  <c:v>136</c:v>
                 </c:pt>
                 <c:pt idx="96">
-                  <c:v>133.75</c:v>
+                  <c:v>136</c:v>
                 </c:pt>
                 <c:pt idx="97">
-                  <c:v>133.75</c:v>
+                  <c:v>136</c:v>
                 </c:pt>
                 <c:pt idx="98">
-                  <c:v>133.75</c:v>
+                  <c:v>136</c:v>
                 </c:pt>
                 <c:pt idx="99">
-                  <c:v>133.75</c:v>
+                  <c:v>136</c:v>
                 </c:pt>
                 <c:pt idx="100">
-                  <c:v>133.75</c:v>
+                  <c:v>136</c:v>
                 </c:pt>
                 <c:pt idx="101">
-                  <c:v>133.75</c:v>
+                  <c:v>136</c:v>
                 </c:pt>
                 <c:pt idx="102">
-                  <c:v>133.75</c:v>
+                  <c:v>136</c:v>
                 </c:pt>
                 <c:pt idx="103">
-                  <c:v>133.75</c:v>
+                  <c:v>136</c:v>
                 </c:pt>
                 <c:pt idx="104">
-                  <c:v>133.75</c:v>
+                  <c:v>136</c:v>
                 </c:pt>
                 <c:pt idx="105">
-                  <c:v>133.75</c:v>
+                  <c:v>136</c:v>
                 </c:pt>
                 <c:pt idx="106">
-                  <c:v>133.75</c:v>
+                  <c:v>136</c:v>
                 </c:pt>
                 <c:pt idx="107">
-                  <c:v>133.75</c:v>
+                  <c:v>136</c:v>
                 </c:pt>
                 <c:pt idx="108">
-                  <c:v>133.75</c:v>
+                  <c:v>136</c:v>
                 </c:pt>
                 <c:pt idx="109">
-                  <c:v>133.75</c:v>
+                  <c:v>136</c:v>
                 </c:pt>
                 <c:pt idx="110">
-                  <c:v>133.75</c:v>
+                  <c:v>136</c:v>
                 </c:pt>
                 <c:pt idx="111">
-                  <c:v>133.75</c:v>
+                  <c:v>136</c:v>
                 </c:pt>
                 <c:pt idx="112">
-                  <c:v>133.75</c:v>
+                  <c:v>136</c:v>
                 </c:pt>
                 <c:pt idx="113">
-                  <c:v>133.75</c:v>
+                  <c:v>136</c:v>
                 </c:pt>
                 <c:pt idx="114">
-                  <c:v>133.75</c:v>
+                  <c:v>136</c:v>
                 </c:pt>
                 <c:pt idx="115">
-                  <c:v>133.75</c:v>
+                  <c:v>136</c:v>
                 </c:pt>
                 <c:pt idx="116">
-                  <c:v>133.75</c:v>
+                  <c:v>136</c:v>
                 </c:pt>
                 <c:pt idx="117">
-                  <c:v>133.75</c:v>
+                  <c:v>136</c:v>
                 </c:pt>
                 <c:pt idx="118">
-                  <c:v>133.75</c:v>
+                  <c:v>136</c:v>
                 </c:pt>
                 <c:pt idx="119">
-                  <c:v>133.75</c:v>
+                  <c:v>136</c:v>
                 </c:pt>
                 <c:pt idx="120">
-                  <c:v>133.75</c:v>
+                  <c:v>136</c:v>
                 </c:pt>
                 <c:pt idx="121">
-                  <c:v>133.75</c:v>
+                  <c:v>136</c:v>
                 </c:pt>
                 <c:pt idx="122">
-                  <c:v>133.75</c:v>
+                  <c:v>136</c:v>
                 </c:pt>
                 <c:pt idx="123">
-                  <c:v>133.75</c:v>
+                  <c:v>136</c:v>
                 </c:pt>
                 <c:pt idx="124">
-                  <c:v>133.75</c:v>
+                  <c:v>136</c:v>
                 </c:pt>
                 <c:pt idx="125">
-                  <c:v>133.75</c:v>
+                  <c:v>136</c:v>
                 </c:pt>
                 <c:pt idx="126">
-                  <c:v>133.75</c:v>
+                  <c:v>136</c:v>
                 </c:pt>
                 <c:pt idx="127">
-                  <c:v>133.75</c:v>
+                  <c:v>136</c:v>
                 </c:pt>
                 <c:pt idx="128">
-                  <c:v>133.75</c:v>
+                  <c:v>136</c:v>
                 </c:pt>
                 <c:pt idx="129">
-                  <c:v>133.75</c:v>
+                  <c:v>136</c:v>
                 </c:pt>
                 <c:pt idx="130">
-                  <c:v>133.75</c:v>
+                  <c:v>136</c:v>
                 </c:pt>
                 <c:pt idx="131">
-                  <c:v>133.75</c:v>
+                  <c:v>136</c:v>
                 </c:pt>
                 <c:pt idx="132">
-                  <c:v>133.75</c:v>
+                  <c:v>136</c:v>
                 </c:pt>
                 <c:pt idx="133">
-                  <c:v>133.75</c:v>
+                  <c:v>136</c:v>
                 </c:pt>
                 <c:pt idx="134">
-                  <c:v>133.75</c:v>
+                  <c:v>136</c:v>
                 </c:pt>
                 <c:pt idx="135">
-                  <c:v>133.75</c:v>
+                  <c:v>136</c:v>
                 </c:pt>
                 <c:pt idx="136">
-                  <c:v>133.75</c:v>
+                  <c:v>136</c:v>
                 </c:pt>
                 <c:pt idx="137">
-                  <c:v>133.75</c:v>
+                  <c:v>136</c:v>
                 </c:pt>
                 <c:pt idx="138">
-                  <c:v>133.75</c:v>
+                  <c:v>136</c:v>
                 </c:pt>
                 <c:pt idx="139">
-                  <c:v>133.75</c:v>
+                  <c:v>136</c:v>
                 </c:pt>
                 <c:pt idx="140">
-                  <c:v>133.75</c:v>
+                  <c:v>136</c:v>
                 </c:pt>
               </c:numCache>
             </c:numRef>
@@ -2964,244 +2964,244 @@
                   <c:v>100</c:v>
                 </c:pt>
                 <c:pt idx="61">
-                  <c:v>101.011</c:v>
+                  <c:v>100.852</c:v>
                 </c:pt>
                 <c:pt idx="62">
-                  <c:v>102.022</c:v>
+                  <c:v>101.704</c:v>
                 </c:pt>
                 <c:pt idx="63">
-                  <c:v>103.033</c:v>
+                  <c:v>102.556</c:v>
                 </c:pt>
                 <c:pt idx="64">
-                  <c:v>104.044</c:v>
+                  <c:v>103.408</c:v>
                 </c:pt>
                 <c:pt idx="65">
-                  <c:v>105.055</c:v>
+                  <c:v>104.26</c:v>
                 </c:pt>
                 <c:pt idx="66">
-                  <c:v>106.066</c:v>
+                  <c:v>105.112</c:v>
                 </c:pt>
                 <c:pt idx="67">
-                  <c:v>107.077</c:v>
+                  <c:v>105.964</c:v>
                 </c:pt>
                 <c:pt idx="68">
-                  <c:v>108.088</c:v>
+                  <c:v>106.816</c:v>
                 </c:pt>
                 <c:pt idx="69">
-                  <c:v>109.099</c:v>
+                  <c:v>107.668</c:v>
                 </c:pt>
                 <c:pt idx="70">
-                  <c:v>110.11</c:v>
+                  <c:v>108.52</c:v>
                 </c:pt>
                 <c:pt idx="71">
-                  <c:v>111.121</c:v>
+                  <c:v>109.372</c:v>
                 </c:pt>
                 <c:pt idx="72">
-                  <c:v>112.132</c:v>
+                  <c:v>110.224</c:v>
                 </c:pt>
                 <c:pt idx="73">
-                  <c:v>113.143</c:v>
+                  <c:v>111.076</c:v>
                 </c:pt>
                 <c:pt idx="74">
-                  <c:v>114.154</c:v>
+                  <c:v>111.928</c:v>
                 </c:pt>
                 <c:pt idx="75">
-                  <c:v>115.16499999999999</c:v>
+                  <c:v>112.78</c:v>
                 </c:pt>
                 <c:pt idx="76">
-                  <c:v>116.176</c:v>
+                  <c:v>113.632</c:v>
                 </c:pt>
                 <c:pt idx="77">
-                  <c:v>117.187</c:v>
+                  <c:v>114.484</c:v>
                 </c:pt>
                 <c:pt idx="78">
-                  <c:v>118.198</c:v>
+                  <c:v>115.336</c:v>
                 </c:pt>
                 <c:pt idx="79">
-                  <c:v>119.209</c:v>
+                  <c:v>116.188</c:v>
                 </c:pt>
                 <c:pt idx="80">
-                  <c:v>120.22</c:v>
+                  <c:v>117.03999999999999</c:v>
                 </c:pt>
                 <c:pt idx="81">
-                  <c:v>121.231</c:v>
+                  <c:v>117.892</c:v>
                 </c:pt>
                 <c:pt idx="82">
-                  <c:v>122.24199999999999</c:v>
+                  <c:v>118.744</c:v>
                 </c:pt>
                 <c:pt idx="83">
-                  <c:v>123.253</c:v>
+                  <c:v>119.596</c:v>
                 </c:pt>
                 <c:pt idx="84">
-                  <c:v>124.264</c:v>
+                  <c:v>120.44800000000001</c:v>
                 </c:pt>
                 <c:pt idx="85">
-                  <c:v>125.275</c:v>
+                  <c:v>121.3</c:v>
                 </c:pt>
                 <c:pt idx="86">
-                  <c:v>126.286</c:v>
+                  <c:v>122.152</c:v>
                 </c:pt>
                 <c:pt idx="87">
-                  <c:v>127.297</c:v>
+                  <c:v>123.00399999999999</c:v>
                 </c:pt>
                 <c:pt idx="88">
-                  <c:v>128.308</c:v>
+                  <c:v>123.856</c:v>
                 </c:pt>
                 <c:pt idx="89">
-                  <c:v>129.319</c:v>
+                  <c:v>124.708</c:v>
                 </c:pt>
                 <c:pt idx="90">
-                  <c:v>130.32999999999998</c:v>
+                  <c:v>125.56</c:v>
                 </c:pt>
                 <c:pt idx="91">
-                  <c:v>131.341</c:v>
+                  <c:v>126.412</c:v>
                 </c:pt>
                 <c:pt idx="92">
-                  <c:v>132.352</c:v>
+                  <c:v>127.264</c:v>
                 </c:pt>
                 <c:pt idx="93">
-                  <c:v>133.363</c:v>
+                  <c:v>128.11599999999999</c:v>
                 </c:pt>
                 <c:pt idx="94">
-                  <c:v>134.374</c:v>
+                  <c:v>128.968</c:v>
                 </c:pt>
                 <c:pt idx="95">
-                  <c:v>135.385</c:v>
+                  <c:v>129.82</c:v>
                 </c:pt>
                 <c:pt idx="96">
-                  <c:v>136.396</c:v>
+                  <c:v>130.672</c:v>
                 </c:pt>
                 <c:pt idx="97">
-                  <c:v>137.40699999999998</c:v>
+                  <c:v>131.524</c:v>
                 </c:pt>
                 <c:pt idx="98">
-                  <c:v>138.418</c:v>
+                  <c:v>132.376</c:v>
                 </c:pt>
                 <c:pt idx="99">
-                  <c:v>139.429</c:v>
+                  <c:v>133.228</c:v>
                 </c:pt>
                 <c:pt idx="100">
-                  <c:v>140.44</c:v>
+                  <c:v>134.07999999999998</c:v>
                 </c:pt>
                 <c:pt idx="101">
-                  <c:v>141.451</c:v>
+                  <c:v>134.93200000000002</c:v>
                 </c:pt>
                 <c:pt idx="102">
-                  <c:v>142.462</c:v>
+                  <c:v>135.784</c:v>
                 </c:pt>
                 <c:pt idx="103">
-                  <c:v>143.473</c:v>
+                  <c:v>136.636</c:v>
                 </c:pt>
                 <c:pt idx="104">
-                  <c:v>144.48399999999998</c:v>
+                  <c:v>137.488</c:v>
                 </c:pt>
                 <c:pt idx="105">
-                  <c:v>145.495</c:v>
+                  <c:v>138.34</c:v>
                 </c:pt>
                 <c:pt idx="106">
-                  <c:v>146.506</c:v>
+                  <c:v>139.192</c:v>
                 </c:pt>
                 <c:pt idx="107">
-                  <c:v>147.517</c:v>
+                  <c:v>140.04399999999998</c:v>
                 </c:pt>
                 <c:pt idx="108">
-                  <c:v>148.528</c:v>
+                  <c:v>140.89600000000002</c:v>
                 </c:pt>
                 <c:pt idx="109">
-                  <c:v>149.539</c:v>
+                  <c:v>141.748</c:v>
                 </c:pt>
                 <c:pt idx="110">
-                  <c:v>150.55</c:v>
+                  <c:v>142.6</c:v>
                 </c:pt>
                 <c:pt idx="111">
-                  <c:v>151.56099999999998</c:v>
+                  <c:v>143.452</c:v>
                 </c:pt>
                 <c:pt idx="112">
-                  <c:v>152.572</c:v>
+                  <c:v>144.304</c:v>
                 </c:pt>
                 <c:pt idx="113">
-                  <c:v>153.583</c:v>
+                  <c:v>145.156</c:v>
                 </c:pt>
                 <c:pt idx="114">
-                  <c:v>154.594</c:v>
+                  <c:v>146.00799999999998</c:v>
                 </c:pt>
                 <c:pt idx="115">
-                  <c:v>155.605</c:v>
+                  <c:v>146.86</c:v>
                 </c:pt>
                 <c:pt idx="116">
-                  <c:v>156.61599999999999</c:v>
+                  <c:v>147.712</c:v>
                 </c:pt>
                 <c:pt idx="117">
-                  <c:v>157.627</c:v>
+                  <c:v>148.564</c:v>
                 </c:pt>
                 <c:pt idx="118">
-                  <c:v>158.63799999999998</c:v>
+                  <c:v>149.416</c:v>
                 </c:pt>
                 <c:pt idx="119">
-                  <c:v>159.649</c:v>
+                  <c:v>150.268</c:v>
                 </c:pt>
                 <c:pt idx="120">
-                  <c:v>160.66</c:v>
+                  <c:v>151.12</c:v>
                 </c:pt>
                 <c:pt idx="121">
-                  <c:v>161.671</c:v>
+                  <c:v>151.972</c:v>
                 </c:pt>
                 <c:pt idx="122">
-                  <c:v>162.682</c:v>
+                  <c:v>152.824</c:v>
                 </c:pt>
                 <c:pt idx="123">
-                  <c:v>163.69299999999998</c:v>
+                  <c:v>153.676</c:v>
                 </c:pt>
                 <c:pt idx="124">
-                  <c:v>164.704</c:v>
+                  <c:v>154.528</c:v>
                 </c:pt>
                 <c:pt idx="125">
-                  <c:v>165.71499999999997</c:v>
+                  <c:v>155.38</c:v>
                 </c:pt>
                 <c:pt idx="126">
-                  <c:v>166.726</c:v>
+                  <c:v>156.232</c:v>
                 </c:pt>
                 <c:pt idx="127">
-                  <c:v>167.737</c:v>
+                  <c:v>157.084</c:v>
                 </c:pt>
                 <c:pt idx="128">
-                  <c:v>168.748</c:v>
+                  <c:v>157.936</c:v>
                 </c:pt>
                 <c:pt idx="129">
-                  <c:v>169.759</c:v>
+                  <c:v>158.788</c:v>
                 </c:pt>
                 <c:pt idx="130">
-                  <c:v>170.76999999999998</c:v>
+                  <c:v>159.64</c:v>
                 </c:pt>
                 <c:pt idx="131">
-                  <c:v>171.781</c:v>
+                  <c:v>160.492</c:v>
                 </c:pt>
                 <c:pt idx="132">
-                  <c:v>172.79199999999997</c:v>
+                  <c:v>161.344</c:v>
                 </c:pt>
                 <c:pt idx="133">
-                  <c:v>173.803</c:v>
+                  <c:v>162.196</c:v>
                 </c:pt>
                 <c:pt idx="134">
-                  <c:v>174.814</c:v>
+                  <c:v>163.048</c:v>
                 </c:pt>
                 <c:pt idx="135">
-                  <c:v>175.825</c:v>
+                  <c:v>163.9</c:v>
                 </c:pt>
                 <c:pt idx="136">
-                  <c:v>176.836</c:v>
+                  <c:v>164.752</c:v>
                 </c:pt>
                 <c:pt idx="137">
-                  <c:v>177.84699999999998</c:v>
+                  <c:v>165.60399999999998</c:v>
                 </c:pt>
                 <c:pt idx="138">
-                  <c:v>178.858</c:v>
+                  <c:v>166.45600000000002</c:v>
                 </c:pt>
                 <c:pt idx="139">
-                  <c:v>179.86899999999997</c:v>
+                  <c:v>167.308</c:v>
                 </c:pt>
                 <c:pt idx="140">
-                  <c:v>180.88</c:v>
+                  <c:v>168.16</c:v>
                 </c:pt>
               </c:numCache>
             </c:numRef>
@@ -4344,6 +4344,26 @@
               <a:effectLst/>
             </c:spPr>
           </c:dPt>
+          <c:dPt>
+            <c:idx val="3"/>
+            <c:bubble3D val="0"/>
+            <c:spPr>
+              <a:solidFill>
+                <a:srgbClr val="8FA6AA"/>
+              </a:solidFill>
+              <a:effectLst/>
+            </c:spPr>
+          </c:dPt>
+          <c:dPt>
+            <c:idx val="4"/>
+            <c:bubble3D val="0"/>
+            <c:spPr>
+              <a:solidFill>
+                <a:srgbClr val="5BA37A"/>
+              </a:solidFill>
+              <a:effectLst/>
+            </c:spPr>
+          </c:dPt>
           <c:dLbls>
             <c:dLbl>
               <c:idx val="0"/>
@@ -4397,6 +4417,56 @@
             </c:dLbl>
             <c:dLbl>
               <c:idx val="2"/>
+              <c:numFmt formatCode="0&quot;%&quot;" sourceLinked="0"/>
+              <c:spPr/>
+              <c:txPr>
+                <a:bodyPr/>
+                <a:lstStyle/>
+                <a:p>
+                  <a:pPr>
+                    <a:defRPr sz="1000" b="1" i="0" u="none" strike="noStrike">
+                      <a:solidFill>
+                        <a:srgbClr val="FFFFFF"/>
+                      </a:solidFill>
+                      <a:latin typeface="Arial"/>
+                    </a:defRPr>
+                  </a:pPr>
+                </a:p>
+              </c:txPr>
+              <c:showLegendKey val="0"/>
+              <c:showVal val="1"/>
+              <c:showCatName val="0"/>
+              <c:showSerName val="0"/>
+              <c:showPercent val="0"/>
+              <c:showBubbleSize val="0"/>
+            </c:dLbl>
+            <c:dLbl>
+              <c:idx val="3"/>
+              <c:numFmt formatCode="0&quot;%&quot;" sourceLinked="0"/>
+              <c:spPr/>
+              <c:txPr>
+                <a:bodyPr/>
+                <a:lstStyle/>
+                <a:p>
+                  <a:pPr>
+                    <a:defRPr sz="1000" b="1" i="0" u="none" strike="noStrike">
+                      <a:solidFill>
+                        <a:srgbClr val="FFFFFF"/>
+                      </a:solidFill>
+                      <a:latin typeface="Arial"/>
+                    </a:defRPr>
+                  </a:pPr>
+                </a:p>
+              </c:txPr>
+              <c:showLegendKey val="0"/>
+              <c:showVal val="1"/>
+              <c:showCatName val="0"/>
+              <c:showSerName val="0"/>
+              <c:showPercent val="0"/>
+              <c:showBubbleSize val="0"/>
+            </c:dLbl>
+            <c:dLbl>
+              <c:idx val="4"/>
               <c:numFmt formatCode="0&quot;%&quot;" sourceLinked="0"/>
               <c:spPr/>
               <c:txPr>
@@ -4445,34 +4515,46 @@
           </c:dLbls>
           <c:cat>
             <c:strRef>
-              <c:f>Sheet1!$A$2:$A$4</c:f>
+              <c:f>Sheet1!$A$2:$A$6</c:f>
               <c:strCache>
-                <c:ptCount val="3"/>
+                <c:ptCount val="5"/>
                 <c:pt idx="0">
-                  <c:v>Taiwan TAIEX</c:v>
+                  <c:v>Asia Semiconductor (3119 HK)</c:v>
                 </c:pt>
                 <c:pt idx="1">
-                  <c:v>KOSPI 200</c:v>
+                  <c:v>Japan Semiconductor (2644 JP)</c:v>
                 </c:pt>
                 <c:pt idx="2">
-                  <c:v>Nikkei 225</c:v>
+                  <c:v>iShares MSCI Taiwan (EWT)</c:v>
+                </c:pt>
+                <c:pt idx="3">
+                  <c:v>iShares MSCI South Korea (EWY)</c:v>
+                </c:pt>
+                <c:pt idx="4">
+                  <c:v>Taiwan ESG High Dividend (00878 TT)</c:v>
                 </c:pt>
               </c:strCache>
             </c:strRef>
           </c:cat>
           <c:val>
             <c:numRef>
-              <c:f>Sheet1!$B$2:$B$4</c:f>
+              <c:f>Sheet1!$B$2:$B$6</c:f>
               <c:numCache>
-                <c:ptCount val="3"/>
+                <c:ptCount val="5"/>
                 <c:pt idx="0">
-                  <c:v>40</c:v>
+                  <c:v>25</c:v>
                 </c:pt>
                 <c:pt idx="1">
-                  <c:v>30</c:v>
+                  <c:v>20</c:v>
                 </c:pt>
                 <c:pt idx="2">
-                  <c:v>30</c:v>
+                  <c:v>20</c:v>
+                </c:pt>
+                <c:pt idx="3">
+                  <c:v>20</c:v>
+                </c:pt>
+                <c:pt idx="4">
+                  <c:v>15</c:v>
                 </c:pt>
               </c:numCache>
             </c:numRef>
@@ -4659,55 +4741,55 @@
                 <c:formatCode>General</c:formatCode>
                 <c:ptCount val="17"/>
                 <c:pt idx="0">
-                  <c:v>106.75</c:v>
+                  <c:v>107.2</c:v>
                 </c:pt>
                 <c:pt idx="1">
-                  <c:v>108.438</c:v>
+                  <c:v>109</c:v>
                 </c:pt>
                 <c:pt idx="2">
-                  <c:v>110.125</c:v>
+                  <c:v>110.8</c:v>
                 </c:pt>
                 <c:pt idx="3">
-                  <c:v>111.813</c:v>
+                  <c:v>112.6</c:v>
                 </c:pt>
                 <c:pt idx="4">
-                  <c:v>113.5</c:v>
+                  <c:v>114.4</c:v>
                 </c:pt>
                 <c:pt idx="5">
-                  <c:v>115.188</c:v>
+                  <c:v>116.2</c:v>
                 </c:pt>
                 <c:pt idx="6">
-                  <c:v>116.875</c:v>
+                  <c:v>118</c:v>
                 </c:pt>
                 <c:pt idx="7">
-                  <c:v>118.563</c:v>
+                  <c:v>119.8</c:v>
                 </c:pt>
                 <c:pt idx="8">
-                  <c:v>120.25</c:v>
+                  <c:v>121.6</c:v>
                 </c:pt>
                 <c:pt idx="9">
-                  <c:v>121.938</c:v>
+                  <c:v>123.4</c:v>
                 </c:pt>
                 <c:pt idx="10">
-                  <c:v>123.625</c:v>
+                  <c:v>125.2</c:v>
                 </c:pt>
                 <c:pt idx="11">
-                  <c:v>125.313</c:v>
+                  <c:v>127</c:v>
                 </c:pt>
                 <c:pt idx="12">
-                  <c:v>127</c:v>
+                  <c:v>128.8</c:v>
                 </c:pt>
                 <c:pt idx="13">
-                  <c:v>128.688</c:v>
+                  <c:v>130.6</c:v>
                 </c:pt>
                 <c:pt idx="14">
-                  <c:v>130.375</c:v>
+                  <c:v>132.4</c:v>
                 </c:pt>
                 <c:pt idx="15">
-                  <c:v>132.063</c:v>
+                  <c:v>134.2</c:v>
                 </c:pt>
                 <c:pt idx="16">
-                  <c:v>133.75</c:v>
+                  <c:v>136</c:v>
                 </c:pt>
               </c:numCache>
             </c:numRef>
@@ -6161,367 +6243,367 @@
                   <c:v>100</c:v>
                 </c:pt>
                 <c:pt idx="140">
-                  <c:v>133.75</c:v>
+                  <c:v>136</c:v>
                 </c:pt>
                 <c:pt idx="141">
-                  <c:v>133.75</c:v>
+                  <c:v>136</c:v>
                 </c:pt>
                 <c:pt idx="142">
-                  <c:v>133.75</c:v>
+                  <c:v>136</c:v>
                 </c:pt>
                 <c:pt idx="143">
-                  <c:v>133.75</c:v>
+                  <c:v>136</c:v>
                 </c:pt>
                 <c:pt idx="144">
-                  <c:v>133.75</c:v>
+                  <c:v>136</c:v>
                 </c:pt>
                 <c:pt idx="145">
-                  <c:v>133.75</c:v>
+                  <c:v>136</c:v>
                 </c:pt>
                 <c:pt idx="146">
-                  <c:v>133.75</c:v>
+                  <c:v>136</c:v>
                 </c:pt>
                 <c:pt idx="147">
-                  <c:v>133.75</c:v>
+                  <c:v>136</c:v>
                 </c:pt>
                 <c:pt idx="148">
-                  <c:v>133.75</c:v>
+                  <c:v>136</c:v>
                 </c:pt>
                 <c:pt idx="149">
-                  <c:v>133.75</c:v>
+                  <c:v>136</c:v>
                 </c:pt>
                 <c:pt idx="150">
-                  <c:v>133.75</c:v>
+                  <c:v>136</c:v>
                 </c:pt>
                 <c:pt idx="151">
-                  <c:v>133.75</c:v>
+                  <c:v>136</c:v>
                 </c:pt>
                 <c:pt idx="152">
-                  <c:v>133.75</c:v>
+                  <c:v>136</c:v>
                 </c:pt>
                 <c:pt idx="153">
-                  <c:v>133.75</c:v>
+                  <c:v>136</c:v>
                 </c:pt>
                 <c:pt idx="154">
-                  <c:v>133.75</c:v>
+                  <c:v>136</c:v>
                 </c:pt>
                 <c:pt idx="155">
-                  <c:v>133.75</c:v>
+                  <c:v>136</c:v>
                 </c:pt>
                 <c:pt idx="156">
-                  <c:v>133.75</c:v>
+                  <c:v>136</c:v>
                 </c:pt>
                 <c:pt idx="157">
-                  <c:v>133.75</c:v>
+                  <c:v>136</c:v>
                 </c:pt>
                 <c:pt idx="158">
-                  <c:v>133.75</c:v>
+                  <c:v>136</c:v>
                 </c:pt>
                 <c:pt idx="159">
-                  <c:v>133.75</c:v>
+                  <c:v>136</c:v>
                 </c:pt>
                 <c:pt idx="160">
-                  <c:v>133.75</c:v>
+                  <c:v>136</c:v>
                 </c:pt>
                 <c:pt idx="161">
-                  <c:v>133.75</c:v>
+                  <c:v>136</c:v>
                 </c:pt>
                 <c:pt idx="162">
-                  <c:v>133.75</c:v>
+                  <c:v>136</c:v>
                 </c:pt>
                 <c:pt idx="163">
-                  <c:v>133.75</c:v>
+                  <c:v>136</c:v>
                 </c:pt>
                 <c:pt idx="164">
-                  <c:v>133.75</c:v>
+                  <c:v>136</c:v>
                 </c:pt>
                 <c:pt idx="165">
-                  <c:v>133.75</c:v>
+                  <c:v>136</c:v>
                 </c:pt>
                 <c:pt idx="166">
-                  <c:v>133.75</c:v>
+                  <c:v>136</c:v>
                 </c:pt>
                 <c:pt idx="167">
-                  <c:v>133.75</c:v>
+                  <c:v>136</c:v>
                 </c:pt>
                 <c:pt idx="168">
-                  <c:v>133.75</c:v>
+                  <c:v>136</c:v>
                 </c:pt>
                 <c:pt idx="169">
-                  <c:v>133.75</c:v>
+                  <c:v>136</c:v>
                 </c:pt>
                 <c:pt idx="170">
-                  <c:v>133.75</c:v>
+                  <c:v>136</c:v>
                 </c:pt>
                 <c:pt idx="171">
-                  <c:v>133.75</c:v>
+                  <c:v>136</c:v>
                 </c:pt>
                 <c:pt idx="172">
-                  <c:v>133.75</c:v>
+                  <c:v>136</c:v>
                 </c:pt>
                 <c:pt idx="173">
-                  <c:v>133.75</c:v>
+                  <c:v>136</c:v>
                 </c:pt>
                 <c:pt idx="174">
-                  <c:v>133.75</c:v>
+                  <c:v>136</c:v>
                 </c:pt>
                 <c:pt idx="175">
-                  <c:v>133.75</c:v>
+                  <c:v>136</c:v>
                 </c:pt>
                 <c:pt idx="176">
-                  <c:v>133.75</c:v>
+                  <c:v>136</c:v>
                 </c:pt>
                 <c:pt idx="177">
-                  <c:v>133.75</c:v>
+                  <c:v>136</c:v>
                 </c:pt>
                 <c:pt idx="178">
-                  <c:v>133.75</c:v>
+                  <c:v>136</c:v>
                 </c:pt>
                 <c:pt idx="179">
-                  <c:v>133.75</c:v>
+                  <c:v>136</c:v>
                 </c:pt>
                 <c:pt idx="180">
-                  <c:v>133.75</c:v>
+                  <c:v>136</c:v>
                 </c:pt>
                 <c:pt idx="181">
-                  <c:v>133.75</c:v>
+                  <c:v>136</c:v>
                 </c:pt>
                 <c:pt idx="182">
-                  <c:v>133.75</c:v>
+                  <c:v>136</c:v>
                 </c:pt>
                 <c:pt idx="183">
-                  <c:v>133.75</c:v>
+                  <c:v>136</c:v>
                 </c:pt>
                 <c:pt idx="184">
-                  <c:v>133.75</c:v>
+                  <c:v>136</c:v>
                 </c:pt>
                 <c:pt idx="185">
-                  <c:v>133.75</c:v>
+                  <c:v>136</c:v>
                 </c:pt>
                 <c:pt idx="186">
-                  <c:v>133.75</c:v>
+                  <c:v>136</c:v>
                 </c:pt>
                 <c:pt idx="187">
-                  <c:v>133.75</c:v>
+                  <c:v>136</c:v>
                 </c:pt>
                 <c:pt idx="188">
-                  <c:v>133.75</c:v>
+                  <c:v>136</c:v>
                 </c:pt>
                 <c:pt idx="189">
-                  <c:v>133.75</c:v>
+                  <c:v>136</c:v>
                 </c:pt>
                 <c:pt idx="190">
-                  <c:v>133.75</c:v>
+                  <c:v>136</c:v>
                 </c:pt>
                 <c:pt idx="191">
-                  <c:v>133.75</c:v>
+                  <c:v>136</c:v>
                 </c:pt>
                 <c:pt idx="192">
-                  <c:v>133.75</c:v>
+                  <c:v>136</c:v>
                 </c:pt>
                 <c:pt idx="193">
-                  <c:v>133.75</c:v>
+                  <c:v>136</c:v>
                 </c:pt>
                 <c:pt idx="194">
-                  <c:v>133.75</c:v>
+                  <c:v>136</c:v>
                 </c:pt>
                 <c:pt idx="195">
-                  <c:v>133.75</c:v>
+                  <c:v>136</c:v>
                 </c:pt>
                 <c:pt idx="196">
-                  <c:v>133.75</c:v>
+                  <c:v>136</c:v>
                 </c:pt>
                 <c:pt idx="197">
-                  <c:v>133.75</c:v>
+                  <c:v>136</c:v>
                 </c:pt>
                 <c:pt idx="198">
-                  <c:v>133.75</c:v>
+                  <c:v>136</c:v>
                 </c:pt>
                 <c:pt idx="199">
-                  <c:v>133.75</c:v>
+                  <c:v>136</c:v>
                 </c:pt>
                 <c:pt idx="200">
-                  <c:v>133.75</c:v>
+                  <c:v>136</c:v>
                 </c:pt>
                 <c:pt idx="201">
-                  <c:v>133.75</c:v>
+                  <c:v>136</c:v>
                 </c:pt>
                 <c:pt idx="202">
-                  <c:v>133.75</c:v>
+                  <c:v>136</c:v>
                 </c:pt>
                 <c:pt idx="203">
-                  <c:v>133.75</c:v>
+                  <c:v>136</c:v>
                 </c:pt>
                 <c:pt idx="204">
-                  <c:v>133.75</c:v>
+                  <c:v>136</c:v>
                 </c:pt>
                 <c:pt idx="205">
-                  <c:v>133.75</c:v>
+                  <c:v>136</c:v>
                 </c:pt>
                 <c:pt idx="206">
-                  <c:v>133.75</c:v>
+                  <c:v>136</c:v>
                 </c:pt>
                 <c:pt idx="207">
-                  <c:v>133.75</c:v>
+                  <c:v>136</c:v>
                 </c:pt>
                 <c:pt idx="208">
-                  <c:v>133.75</c:v>
+                  <c:v>136</c:v>
                 </c:pt>
                 <c:pt idx="209">
-                  <c:v>133.75</c:v>
+                  <c:v>136</c:v>
                 </c:pt>
                 <c:pt idx="210">
-                  <c:v>133.75</c:v>
+                  <c:v>136</c:v>
                 </c:pt>
                 <c:pt idx="211">
-                  <c:v>133.75</c:v>
+                  <c:v>136</c:v>
                 </c:pt>
                 <c:pt idx="212">
-                  <c:v>133.75</c:v>
+                  <c:v>136</c:v>
                 </c:pt>
                 <c:pt idx="213">
-                  <c:v>133.75</c:v>
+                  <c:v>136</c:v>
                 </c:pt>
                 <c:pt idx="214">
-                  <c:v>133.75</c:v>
+                  <c:v>136</c:v>
                 </c:pt>
                 <c:pt idx="215">
-                  <c:v>133.75</c:v>
+                  <c:v>136</c:v>
                 </c:pt>
                 <c:pt idx="216">
-                  <c:v>133.75</c:v>
+                  <c:v>136</c:v>
                 </c:pt>
                 <c:pt idx="217">
-                  <c:v>133.75</c:v>
+                  <c:v>136</c:v>
                 </c:pt>
                 <c:pt idx="218">
-                  <c:v>133.75</c:v>
+                  <c:v>136</c:v>
                 </c:pt>
                 <c:pt idx="219">
-                  <c:v>133.75</c:v>
+                  <c:v>136</c:v>
                 </c:pt>
                 <c:pt idx="220">
-                  <c:v>133.75</c:v>
+                  <c:v>136</c:v>
                 </c:pt>
                 <c:pt idx="221">
-                  <c:v>133.75</c:v>
+                  <c:v>136</c:v>
                 </c:pt>
                 <c:pt idx="222">
-                  <c:v>133.75</c:v>
+                  <c:v>136</c:v>
                 </c:pt>
                 <c:pt idx="223">
-                  <c:v>133.75</c:v>
+                  <c:v>136</c:v>
                 </c:pt>
                 <c:pt idx="224">
-                  <c:v>133.75</c:v>
+                  <c:v>136</c:v>
                 </c:pt>
                 <c:pt idx="225">
-                  <c:v>133.75</c:v>
+                  <c:v>136</c:v>
                 </c:pt>
                 <c:pt idx="226">
-                  <c:v>133.75</c:v>
+                  <c:v>136</c:v>
                 </c:pt>
                 <c:pt idx="227">
-                  <c:v>133.75</c:v>
+                  <c:v>136</c:v>
                 </c:pt>
                 <c:pt idx="228">
-                  <c:v>133.75</c:v>
+                  <c:v>136</c:v>
                 </c:pt>
                 <c:pt idx="229">
-                  <c:v>133.75</c:v>
+                  <c:v>136</c:v>
                 </c:pt>
                 <c:pt idx="230">
-                  <c:v>133.75</c:v>
+                  <c:v>136</c:v>
                 </c:pt>
                 <c:pt idx="231">
-                  <c:v>133.75</c:v>
+                  <c:v>136</c:v>
                 </c:pt>
                 <c:pt idx="232">
-                  <c:v>133.75</c:v>
+                  <c:v>136</c:v>
                 </c:pt>
                 <c:pt idx="233">
-                  <c:v>133.75</c:v>
+                  <c:v>136</c:v>
                 </c:pt>
                 <c:pt idx="234">
-                  <c:v>133.75</c:v>
+                  <c:v>136</c:v>
                 </c:pt>
                 <c:pt idx="235">
-                  <c:v>133.75</c:v>
+                  <c:v>136</c:v>
                 </c:pt>
                 <c:pt idx="236">
-                  <c:v>133.75</c:v>
+                  <c:v>136</c:v>
                 </c:pt>
                 <c:pt idx="237">
-                  <c:v>133.75</c:v>
+                  <c:v>136</c:v>
                 </c:pt>
                 <c:pt idx="238">
-                  <c:v>133.75</c:v>
+                  <c:v>136</c:v>
                 </c:pt>
                 <c:pt idx="239">
-                  <c:v>133.75</c:v>
+                  <c:v>136</c:v>
                 </c:pt>
                 <c:pt idx="240">
-                  <c:v>133.75</c:v>
+                  <c:v>136</c:v>
                 </c:pt>
                 <c:pt idx="241">
-                  <c:v>133.75</c:v>
+                  <c:v>136</c:v>
                 </c:pt>
                 <c:pt idx="242">
-                  <c:v>133.75</c:v>
+                  <c:v>136</c:v>
                 </c:pt>
                 <c:pt idx="243">
-                  <c:v>133.75</c:v>
+                  <c:v>136</c:v>
                 </c:pt>
                 <c:pt idx="244">
-                  <c:v>133.75</c:v>
+                  <c:v>136</c:v>
                 </c:pt>
                 <c:pt idx="245">
-                  <c:v>133.75</c:v>
+                  <c:v>136</c:v>
                 </c:pt>
                 <c:pt idx="246">
-                  <c:v>133.75</c:v>
+                  <c:v>136</c:v>
                 </c:pt>
                 <c:pt idx="247">
-                  <c:v>133.75</c:v>
+                  <c:v>136</c:v>
                 </c:pt>
                 <c:pt idx="248">
-                  <c:v>133.75</c:v>
+                  <c:v>136</c:v>
                 </c:pt>
                 <c:pt idx="249">
-                  <c:v>133.75</c:v>
+                  <c:v>136</c:v>
                 </c:pt>
                 <c:pt idx="250">
-                  <c:v>133.75</c:v>
+                  <c:v>136</c:v>
                 </c:pt>
                 <c:pt idx="251">
-                  <c:v>133.75</c:v>
+                  <c:v>136</c:v>
                 </c:pt>
                 <c:pt idx="252">
-                  <c:v>133.75</c:v>
+                  <c:v>136</c:v>
                 </c:pt>
                 <c:pt idx="253">
-                  <c:v>133.75</c:v>
+                  <c:v>136</c:v>
                 </c:pt>
                 <c:pt idx="254">
-                  <c:v>133.75</c:v>
+                  <c:v>136</c:v>
                 </c:pt>
                 <c:pt idx="255">
-                  <c:v>133.75</c:v>
+                  <c:v>136</c:v>
                 </c:pt>
                 <c:pt idx="256">
-                  <c:v>133.75</c:v>
+                  <c:v>136</c:v>
                 </c:pt>
                 <c:pt idx="257">
-                  <c:v>133.75</c:v>
+                  <c:v>136</c:v>
                 </c:pt>
                 <c:pt idx="258">
-                  <c:v>133.75</c:v>
+                  <c:v>136</c:v>
                 </c:pt>
                 <c:pt idx="259">
-                  <c:v>133.75</c:v>
+                  <c:v>136</c:v>
                 </c:pt>
                 <c:pt idx="260">
-                  <c:v>133.75</c:v>
+                  <c:v>136</c:v>
                 </c:pt>
               </c:numCache>
             </c:numRef>
@@ -9964,187 +10046,187 @@
                   <c:v>0</c:v>
                 </c:pt>
                 <c:pt idx="60">
-                  <c:v>1.6875</c:v>
+                  <c:v>1.7999999999999998</c:v>
                 </c:pt>
                 <c:pt idx="61">
-                  <c:v>1.6875</c:v>
+                  <c:v>1.7999999999999998</c:v>
                 </c:pt>
                 <c:pt idx="62">
-                  <c:v>1.6875</c:v>
+                  <c:v>1.7999999999999998</c:v>
                 </c:pt>
                 <c:pt idx="63">
-                  <c:v>1.6875</c:v>
+                  <c:v>1.7999999999999998</c:v>
                 </c:pt>
                 <c:pt idx="64">
-                  <c:v>1.6875</c:v>
+                  <c:v>1.7999999999999998</c:v>
                 </c:pt>
                 <c:pt idx="65">
-                  <c:v>1.6875</c:v>
+                  <c:v>1.7999999999999998</c:v>
                 </c:pt>
                 <c:pt idx="66">
-                  <c:v>1.6875</c:v>
+                  <c:v>1.7999999999999998</c:v>
                 </c:pt>
                 <c:pt idx="67">
-                  <c:v>1.6875</c:v>
+                  <c:v>1.7999999999999998</c:v>
                 </c:pt>
                 <c:pt idx="68">
-                  <c:v>1.6875</c:v>
+                  <c:v>1.7999999999999998</c:v>
                 </c:pt>
                 <c:pt idx="69">
-                  <c:v>1.6875</c:v>
+                  <c:v>1.7999999999999998</c:v>
                 </c:pt>
                 <c:pt idx="70">
-                  <c:v>1.6875</c:v>
+                  <c:v>1.7999999999999998</c:v>
                 </c:pt>
                 <c:pt idx="71">
-                  <c:v>1.6875</c:v>
+                  <c:v>1.7999999999999998</c:v>
                 </c:pt>
                 <c:pt idx="72">
-                  <c:v>1.6875</c:v>
+                  <c:v>1.7999999999999998</c:v>
                 </c:pt>
                 <c:pt idx="73">
-                  <c:v>1.6875</c:v>
+                  <c:v>1.7999999999999998</c:v>
                 </c:pt>
                 <c:pt idx="74">
-                  <c:v>1.6875</c:v>
+                  <c:v>1.7999999999999998</c:v>
                 </c:pt>
                 <c:pt idx="75">
-                  <c:v>1.6875</c:v>
+                  <c:v>1.7999999999999998</c:v>
                 </c:pt>
                 <c:pt idx="76">
-                  <c:v>1.6875</c:v>
+                  <c:v>1.7999999999999998</c:v>
                 </c:pt>
                 <c:pt idx="77">
-                  <c:v>1.6875</c:v>
+                  <c:v>1.7999999999999998</c:v>
                 </c:pt>
                 <c:pt idx="78">
-                  <c:v>1.6875</c:v>
+                  <c:v>1.7999999999999998</c:v>
                 </c:pt>
                 <c:pt idx="79">
-                  <c:v>1.6875</c:v>
+                  <c:v>1.7999999999999998</c:v>
                 </c:pt>
                 <c:pt idx="80">
-                  <c:v>1.6875</c:v>
+                  <c:v>1.7999999999999998</c:v>
                 </c:pt>
                 <c:pt idx="81">
-                  <c:v>1.6875</c:v>
+                  <c:v>1.7999999999999998</c:v>
                 </c:pt>
                 <c:pt idx="82">
-                  <c:v>1.6875</c:v>
+                  <c:v>1.7999999999999998</c:v>
                 </c:pt>
                 <c:pt idx="83">
-                  <c:v>1.6875</c:v>
+                  <c:v>1.7999999999999998</c:v>
                 </c:pt>
                 <c:pt idx="84">
-                  <c:v>1.6875</c:v>
+                  <c:v>1.7999999999999998</c:v>
                 </c:pt>
                 <c:pt idx="85">
-                  <c:v>1.6875</c:v>
+                  <c:v>1.7999999999999998</c:v>
                 </c:pt>
                 <c:pt idx="86">
-                  <c:v>1.6875</c:v>
+                  <c:v>1.7999999999999998</c:v>
                 </c:pt>
                 <c:pt idx="87">
-                  <c:v>1.6875</c:v>
+                  <c:v>1.7999999999999998</c:v>
                 </c:pt>
                 <c:pt idx="88">
-                  <c:v>1.6875</c:v>
+                  <c:v>1.7999999999999998</c:v>
                 </c:pt>
                 <c:pt idx="89">
-                  <c:v>1.6875</c:v>
+                  <c:v>1.7999999999999998</c:v>
                 </c:pt>
                 <c:pt idx="90">
-                  <c:v>1.6875</c:v>
+                  <c:v>1.7999999999999998</c:v>
                 </c:pt>
                 <c:pt idx="91">
-                  <c:v>1.6875</c:v>
+                  <c:v>1.7999999999999998</c:v>
                 </c:pt>
                 <c:pt idx="92">
-                  <c:v>1.6875</c:v>
+                  <c:v>1.7999999999999998</c:v>
                 </c:pt>
                 <c:pt idx="93">
-                  <c:v>1.6875</c:v>
+                  <c:v>1.7999999999999998</c:v>
                 </c:pt>
                 <c:pt idx="94">
-                  <c:v>1.6875</c:v>
+                  <c:v>1.7999999999999998</c:v>
                 </c:pt>
                 <c:pt idx="95">
-                  <c:v>1.6875</c:v>
+                  <c:v>1.7999999999999998</c:v>
                 </c:pt>
                 <c:pt idx="96">
-                  <c:v>1.6875</c:v>
+                  <c:v>1.7999999999999998</c:v>
                 </c:pt>
                 <c:pt idx="97">
-                  <c:v>1.6875</c:v>
+                  <c:v>1.7999999999999998</c:v>
                 </c:pt>
                 <c:pt idx="98">
-                  <c:v>1.6875</c:v>
+                  <c:v>1.7999999999999998</c:v>
                 </c:pt>
                 <c:pt idx="99">
-                  <c:v>1.6875</c:v>
+                  <c:v>1.7999999999999998</c:v>
                 </c:pt>
                 <c:pt idx="100">
-                  <c:v>1.6875</c:v>
+                  <c:v>1.7999999999999998</c:v>
                 </c:pt>
                 <c:pt idx="101">
-                  <c:v>1.6875</c:v>
+                  <c:v>1.7999999999999998</c:v>
                 </c:pt>
                 <c:pt idx="102">
-                  <c:v>1.6875</c:v>
+                  <c:v>1.7999999999999998</c:v>
                 </c:pt>
                 <c:pt idx="103">
-                  <c:v>1.6875</c:v>
+                  <c:v>1.7999999999999998</c:v>
                 </c:pt>
                 <c:pt idx="104">
-                  <c:v>1.6875</c:v>
+                  <c:v>1.7999999999999998</c:v>
                 </c:pt>
                 <c:pt idx="105">
-                  <c:v>1.6875</c:v>
+                  <c:v>1.7999999999999998</c:v>
                 </c:pt>
                 <c:pt idx="106">
-                  <c:v>1.6875</c:v>
+                  <c:v>1.7999999999999998</c:v>
                 </c:pt>
                 <c:pt idx="107">
-                  <c:v>1.6875</c:v>
+                  <c:v>1.7999999999999998</c:v>
                 </c:pt>
                 <c:pt idx="108">
-                  <c:v>1.6875</c:v>
+                  <c:v>1.7999999999999998</c:v>
                 </c:pt>
                 <c:pt idx="109">
-                  <c:v>1.6875</c:v>
+                  <c:v>1.7999999999999998</c:v>
                 </c:pt>
                 <c:pt idx="110">
-                  <c:v>1.6875</c:v>
+                  <c:v>1.7999999999999998</c:v>
                 </c:pt>
                 <c:pt idx="111">
-                  <c:v>1.6875</c:v>
+                  <c:v>1.7999999999999998</c:v>
                 </c:pt>
                 <c:pt idx="112">
-                  <c:v>1.6875</c:v>
+                  <c:v>1.7999999999999998</c:v>
                 </c:pt>
                 <c:pt idx="113">
-                  <c:v>1.6875</c:v>
+                  <c:v>1.7999999999999998</c:v>
                 </c:pt>
                 <c:pt idx="114">
-                  <c:v>1.6875</c:v>
+                  <c:v>1.7999999999999998</c:v>
                 </c:pt>
                 <c:pt idx="115">
-                  <c:v>1.6875</c:v>
+                  <c:v>1.7999999999999998</c:v>
                 </c:pt>
                 <c:pt idx="116">
-                  <c:v>1.6875</c:v>
+                  <c:v>1.7999999999999998</c:v>
                 </c:pt>
                 <c:pt idx="117">
-                  <c:v>1.6875</c:v>
+                  <c:v>1.7999999999999998</c:v>
                 </c:pt>
                 <c:pt idx="118">
-                  <c:v>1.6875</c:v>
+                  <c:v>1.7999999999999998</c:v>
                 </c:pt>
                 <c:pt idx="119">
-                  <c:v>1.6875</c:v>
+                  <c:v>1.7999999999999998</c:v>
                 </c:pt>
                 <c:pt idx="120">
-                  <c:v>1.6875</c:v>
+                  <c:v>1.7999999999999998</c:v>
                 </c:pt>
               </c:numCache>
             </c:numRef>
@@ -12681,19 +12763,19 @@
                 <c:formatCode>General</c:formatCode>
                 <c:ptCount val="5"/>
                 <c:pt idx="0">
-                  <c:v>51</c:v>
+                  <c:v>48.6</c:v>
                 </c:pt>
                 <c:pt idx="1">
-                  <c:v>68.9</c:v>
+                  <c:v>66.4</c:v>
                 </c:pt>
                 <c:pt idx="2">
-                  <c:v>75.5</c:v>
+                  <c:v>72.9</c:v>
                 </c:pt>
                 <c:pt idx="3">
-                  <c:v>79.3</c:v>
+                  <c:v>76.6</c:v>
                 </c:pt>
                 <c:pt idx="4">
-                  <c:v>81.9</c:v>
+                  <c:v>79.1</c:v>
                 </c:pt>
               </c:numCache>
             </c:numRef>
@@ -13239,7 +13321,7 @@
           <a:p>
             <a:r>
               <a:rPr lang="en-US" dirty="0"/>
-              <a:t>Title. One-line pitch: a capital-protected autocallable on Asia's three semiconductor powerhouses: Taiwan's chipmakers, Korea's memory makers and Japan's chip-equipment makers. It pays 6.5% a year whenever the basket is at or above its starting level, catches up any missed coupons, and returns 100% of capital at maturity whatever the basket does.</a:t>
+              <a:t>Title. One-line pitch: a capital-protected autocallable on five Asian ETFs covering the AI-hardware supply chain (pan-Asian and Japanese semiconductors, Taiwan, Korea) plus an ESG sleeve. It pays a coupon whenever the basket is at or above its starting level, catches up any missed coupons, and returns 100% of capital at maturity whatever the basket does.</a:t>
             </a:r>
             <a:endParaRPr lang="en-US" dirty="0"/>
           </a:p>
@@ -13503,7 +13585,7 @@
           <a:p>
             <a:r>
               <a:rPr lang="en-US" dirty="0"/>
-              <a:t>The table answers 'what if markets go nowhere?'. Even at 0% equity return the note is called in ~69% of paths, because volatility alone takes the basket back to 100% on some date. The honest cost of protection: in ~11% of paths (risk-neutral) the family earns nothing for 5 years, but it never loses capital.</a:t>
+              <a:t>The table answers 'what if markets go nowhere?'. Even at 0% equity return the note is called in ~68% of paths, because volatility alone takes the basket back to 100% on some date. The honest cost of protection: in ~13% of paths (risk-neutral) the family earns nothing for 5 years, but it never loses capital.</a:t>
             </a:r>
             <a:endParaRPr lang="en-US" dirty="0"/>
           </a:p>
@@ -13591,7 +13673,7 @@
           <a:p>
             <a:r>
               <a:rPr lang="en-US" dirty="0"/>
-              <a:t>Investor risks on the left, desk hedges on the right. There is no capital-loss line: the main honest risks are earning nothing for 5 years, capped upside, and Natixis credit. The 6.75% coupon sits below the 7.1% fair level in every sensitivity we ran, so the offer is robust to market moves before the trade date.</a:t>
+              <a:t>Investor risks on the left, desk hedges on the right. There is no capital-loss line: the main honest risks are earning nothing for 5 years, capped upside, and Natixis credit. The 7.20% coupon sits below the 7.8% fair level in every sensitivity we ran, so the offer is robust to market moves before the trade date.</a:t>
             </a:r>
             <a:endParaRPr lang="en-US" dirty="0"/>
           </a:p>
@@ -14119,7 +14201,7 @@
           <a:p>
             <a:r>
               <a:rPr lang="en-US" dirty="0"/>
-              <a:t>Two arguments. (1) Structural: AI spending flows straight into Asian semiconductors: Taiwan makes the chips, Korea the memory, Japan the chip-making tools, all three with deep listed futures and options. (2) Structuring: high USD rates make the protected principal cheap, and Asian volatility makes the 100% coupon trigger likely to be hit, so we can protect capital and still pay above the funding rate.</a:t>
+              <a:t>Two arguments. (1) Structural: AI spending flows straight into Asian semiconductors: Taiwan makes the chips, Korea the memory, Japan the chip-making tools, plus an ESG-screened Taiwan sleeve. (2) Structuring: high USD rates make the protected principal cheap, and Asian volatility makes the 100% coupon trigger likely to be hit, so we can protect capital and still pay above the funding rate.</a:t>
             </a:r>
             <a:endParaRPr lang="en-US" dirty="0"/>
           </a:p>
@@ -14207,7 +14289,7 @@
           <a:p>
             <a:r>
               <a:rPr lang="en-US" dirty="0"/>
-              <a:t>Each index is a real Bloomberg ticker (TWSE, KOSPI2, NKY Index), all Asian, all with liquid listed futures and options. Semiconductors dominate TAIEX and KOSPI 200 through TSMC, Samsung and SK Hynix, and Nikkei 225 carries Tokyo Electron and Advantest. Check look-through weights on Bloomberg before the pitch. Quanto USD: the client takes no TWD/KRW/JPY risk.</a:t>
+              <a:t>Five Bloomberg-listed ETFs: 3119 HK (Asia semiconductors), 2644 JP (Japan semiconductors), EWT and EWY (US-listed Taiwan and Korea country funds) and 00878 TT (Taiwan ESG high dividend). EWT and EWY trade in USD, so no quanto is needed; the HKD, JPY and TWD lines are quantoed into USD. Check: 3119 trading value against the USD 5M/day rule, 2644 top holdings, and 00878 distributions (~7.6% a year), which reduce its price-return path and so the chance of the basket getting back to 100%.</a:t>
             </a:r>
             <a:endParaRPr lang="en-US" dirty="0"/>
           </a:p>
@@ -14383,7 +14465,7 @@
           <a:p>
             <a:r>
               <a:rPr lang="en-US" dirty="0"/>
-              <a:t>Explain the note as one question asked every quarter: is the basket at or above where it started? If yes, the family is paid 1.69% for that quarter plus any coupons missed before, and from Year 1 the note also ends with 100% back. If the answer is never yes, the family still gets 100% back at Year 5.</a:t>
+              <a:t>Explain the note as one question asked every quarter: is the basket at or above where it started? If yes, the family is paid 1.80% for that quarter plus any coupons missed before, and from Year 1 the note also ends with 100% back. If the answer is never yes, the family still gets 100% back at Year 5.</a:t>
             </a:r>
             <a:endParaRPr lang="en-US" dirty="0"/>
           </a:p>
@@ -14471,7 +14553,7 @@
           <a:p>
             <a:r>
               <a:rPr lang="en-US" dirty="0"/>
-              <a:t>Left chart: the cash ladder. Each quarter the note lives adds 1.69% of notional, paid either on the date or later through memory. Right chart: if the note reaches Year 5 without being called, there are only two zones. At or above 100% the family receives 133.8%; below 100% it receives 100%, plus any coupons already paid in Q1–Q3. Above +33.8% the basket beats the note: that is the capped upside.</a:t>
+              <a:t>Left chart: the cash ladder. Each quarter the note lives adds 1.80% of notional, paid either on the date or later through memory. Right chart: if the note reaches Year 5 without being called, there are only two zones. At or above 100% the family receives 136.0%; below 100% it receives 100%, plus any coupons already paid in Q1–Q3. Above +36.0% the basket beats the note: that is the capped upside.</a:t>
             </a:r>
             <a:endParaRPr lang="en-US" dirty="0"/>
           </a:p>
@@ -14999,7 +15081,7 @@
                 <a:ea typeface="Calibri" pitchFamily="34" charset="-122"/>
                 <a:cs typeface="Calibri" pitchFamily="34" charset="-120"/>
               </a:rPr>
-              <a:t>6.75% a year from Asia's semiconductor build-out, with 100% of capital returned at maturity</a:t>
+              <a:t>7.20% a year from Asia's semiconductor build-out, with 100% of capital returned at maturity</a:t>
             </a:r>
             <a:endParaRPr lang="en-US" sz="1500" dirty="0"/>
           </a:p>
@@ -15038,7 +15120,7 @@
                 <a:ea typeface="Calibri" pitchFamily="34" charset="-122"/>
                 <a:cs typeface="Calibri" pitchFamily="34" charset="-120"/>
               </a:rPr>
-              <a:t>USD 100mn · 5-year note issued by Natixis · 6.75% p.a. memory coupon · 100% capital protected · Trade date 17 Sep 2026</a:t>
+              <a:t>USD 100mn · 5-year note issued by Natixis · 7.20% p.a. memory coupon · 100% capital protected · Trade date 17 Sep 2026</a:t>
             </a:r>
             <a:endParaRPr lang="en-US" sz="1150" dirty="0"/>
           </a:p>
@@ -15253,7 +15335,7 @@
                 <a:ea typeface="Calibri" pitchFamily="34" charset="-122"/>
                 <a:cs typeface="Calibri" pitchFamily="34" charset="-120"/>
               </a:rPr>
-              <a:t>100% repaid at autocall or maturity. Worth 89.9%: early repayment is worth more than a 5Y bond (75.8%)</a:t>
+              <a:t>100% repaid at autocall or maturity. Worth 89.4%: early repayment is worth more than a 5Y bond (75.8%)</a:t>
             </a:r>
             <a:endParaRPr lang="en-US" sz="900" dirty="0"/>
           </a:p>
@@ -15413,7 +15495,7 @@
                 <a:ea typeface="Calibri" pitchFamily="34" charset="-122"/>
                 <a:cs typeface="Calibri" pitchFamily="34" charset="-120"/>
               </a:rPr>
-              <a:t>Pay 1.69%, plus missed coupons, on each date the basket is ≥ 100%. Worth 7.6%</a:t>
+              <a:t>Pay 1.80%, plus missed coupons, on each date the basket is ≥ 100%. Worth 8.0%</a:t>
             </a:r>
             <a:endParaRPr lang="en-US" sz="900" dirty="0"/>
           </a:p>
@@ -15655,7 +15737,7 @@
                 <a:ea typeface="Calibri" pitchFamily="34" charset="-122"/>
                 <a:cs typeface="Calibri" pitchFamily="34" charset="-120"/>
               </a:rPr>
-              <a:t>Fair value 97.6% = principal 89.9% + coupons 7.6% (net of autocall).  </a:t>
+              <a:t>Fair value 97.4% = principal 89.4% + coupons 8.0% (net of autocall).  </a:t>
             </a:r>
             <a:pPr indent="0" marL="0">
               <a:buNone/>
@@ -15669,7 +15751,7 @@
                 <a:ea typeface="Calibri" pitchFamily="34" charset="-122"/>
                 <a:cs typeface="Calibri" pitchFamily="34" charset="-120"/>
               </a:rPr>
-              <a:t>Issued at 100%, leaving 2.4% for hedging costs and Natixis margin. The client sells no put, so it takes no equity downside: it gives up upside above the coupon instead.</a:t>
+              <a:t>Issued at 100%, leaving 2.6% for hedging costs and Natixis margin. The client sells no put, so it takes no equity downside: it gives up upside above the coupon instead.</a:t>
             </a:r>
             <a:endParaRPr lang="en-US" sz="1000" dirty="0"/>
           </a:p>
@@ -16434,7 +16516,7 @@
                           <a:ea typeface="Calibri" pitchFamily="34" charset="-122"/>
                           <a:cs typeface="Calibri" pitchFamily="34" charset="-120"/>
                         </a:rPr>
-                        <a:t>6.8%</a:t>
+                        <a:t>7.2%</a:t>
                       </a:r>
                       <a:endParaRPr lang="en-US" sz="850" dirty="0">
                         <a:latin typeface="Calibri" charset="0"/>
@@ -16502,7 +16584,7 @@
                           <a:ea typeface="Calibri" pitchFamily="34" charset="-122"/>
                           <a:cs typeface="Calibri" pitchFamily="34" charset="-120"/>
                         </a:rPr>
-                        <a:t>106.7</a:t>
+                        <a:t>107.2</a:t>
                       </a:r>
                       <a:endParaRPr lang="en-US" sz="850" dirty="0">
                         <a:latin typeface="Calibri" charset="0"/>
@@ -16570,7 +16652,7 @@
                           <a:ea typeface="Calibri" pitchFamily="34" charset="-122"/>
                           <a:cs typeface="Calibri" pitchFamily="34" charset="-120"/>
                         </a:rPr>
-                        <a:t>6.9%</a:t>
+                        <a:t>7.4%</a:t>
                       </a:r>
                       <a:endParaRPr lang="en-US" sz="850" dirty="0">
                         <a:latin typeface="Calibri" charset="0"/>
@@ -16844,7 +16926,7 @@
                           <a:ea typeface="Calibri" pitchFamily="34" charset="-122"/>
                           <a:cs typeface="Calibri" pitchFamily="34" charset="-120"/>
                         </a:rPr>
-                        <a:t>10.1%</a:t>
+                        <a:t>10.8%</a:t>
                       </a:r>
                       <a:endParaRPr lang="en-US" sz="850" dirty="0">
                         <a:latin typeface="Calibri" charset="0"/>
@@ -16912,7 +16994,7 @@
                           <a:ea typeface="Calibri" pitchFamily="34" charset="-122"/>
                           <a:cs typeface="Calibri" pitchFamily="34" charset="-120"/>
                         </a:rPr>
-                        <a:t>110.1</a:t>
+                        <a:t>110.8</a:t>
                       </a:r>
                       <a:endParaRPr lang="en-US" sz="850" dirty="0">
                         <a:latin typeface="Calibri" charset="0"/>
@@ -16980,7 +17062,7 @@
                           <a:ea typeface="Calibri" pitchFamily="34" charset="-122"/>
                           <a:cs typeface="Calibri" pitchFamily="34" charset="-120"/>
                         </a:rPr>
-                        <a:t>6.6%</a:t>
+                        <a:t>7.1%</a:t>
                       </a:r>
                       <a:endParaRPr lang="en-US" sz="850" dirty="0">
                         <a:latin typeface="Calibri" charset="0"/>
@@ -17254,7 +17336,7 @@
                           <a:ea typeface="Calibri" pitchFamily="34" charset="-122"/>
                           <a:cs typeface="Calibri" pitchFamily="34" charset="-120"/>
                         </a:rPr>
-                        <a:t>25.3%</a:t>
+                        <a:t>27.0%</a:t>
                       </a:r>
                       <a:endParaRPr lang="en-US" sz="850" dirty="0">
                         <a:latin typeface="Calibri" charset="0"/>
@@ -17322,7 +17404,7 @@
                           <a:ea typeface="Calibri" pitchFamily="34" charset="-122"/>
                           <a:cs typeface="Calibri" pitchFamily="34" charset="-120"/>
                         </a:rPr>
-                        <a:t>125.3</a:t>
+                        <a:t>127.0</a:t>
                       </a:r>
                       <a:endParaRPr lang="en-US" sz="850" dirty="0">
                         <a:latin typeface="Calibri" charset="0"/>
@@ -17390,7 +17472,7 @@
                           <a:ea typeface="Calibri" pitchFamily="34" charset="-122"/>
                           <a:cs typeface="Calibri" pitchFamily="34" charset="-120"/>
                         </a:rPr>
-                        <a:t>6.2%</a:t>
+                        <a:t>6.6%</a:t>
                       </a:r>
                       <a:endParaRPr lang="en-US" sz="850" dirty="0">
                         <a:latin typeface="Calibri" charset="0"/>
@@ -18408,7 +18490,7 @@
                 <a:ea typeface="Calibri" pitchFamily="34" charset="-122"/>
                 <a:cs typeface="Calibri" pitchFamily="34" charset="-120"/>
               </a:rPr>
-              <a:t>the note earns ~6.2%–6.9% a year whenever the basket gets back to 100%, even after a 30% drawdown: memory pays all 15 missed coupons at Q15. In a lost decade or a lasting shock the family gets 100% back, while the basket itself is down 12–45%.</a:t>
+              <a:t>the note earns ~6.6%–7.4% a year whenever the basket gets back to 100%, even after a 30% drawdown: memory pays all 15 missed coupons at Q15. In a lost decade or a lasting shock the family gets 100% back, while the basket itself is down 12–45%.</a:t>
             </a:r>
             <a:endParaRPr lang="en-US" sz="950" dirty="0"/>
           </a:p>
@@ -19075,7 +19157,7 @@
                           <a:ea typeface="Calibri" pitchFamily="34" charset="-122"/>
                           <a:cs typeface="Calibri" pitchFamily="34" charset="-120"/>
                         </a:rPr>
-                        <a:t>82%</a:t>
+                        <a:t>79%</a:t>
                       </a:r>
                       <a:endParaRPr lang="en-US" sz="900" dirty="0">
                         <a:latin typeface="Calibri" charset="0"/>
@@ -19143,7 +19225,7 @@
                           <a:ea typeface="Calibri" pitchFamily="34" charset="-122"/>
                           <a:cs typeface="Calibri" pitchFamily="34" charset="-120"/>
                         </a:rPr>
-                        <a:t>69%</a:t>
+                        <a:t>68%</a:t>
                       </a:r>
                       <a:endParaRPr lang="en-US" sz="900" dirty="0">
                         <a:latin typeface="Calibri" charset="0"/>
@@ -19211,7 +19293,7 @@
                           <a:ea typeface="Calibri" pitchFamily="34" charset="-122"/>
                           <a:cs typeface="Calibri" pitchFamily="34" charset="-120"/>
                         </a:rPr>
-                        <a:t>79%</a:t>
+                        <a:t>77%</a:t>
                       </a:r>
                       <a:endParaRPr lang="en-US" sz="900" dirty="0">
                         <a:latin typeface="Calibri" charset="0"/>
@@ -19279,7 +19361,7 @@
                           <a:ea typeface="Calibri" pitchFamily="34" charset="-122"/>
                           <a:cs typeface="Calibri" pitchFamily="34" charset="-120"/>
                         </a:rPr>
-                        <a:t>88%</a:t>
+                        <a:t>84%</a:t>
                       </a:r>
                       <a:endParaRPr lang="en-US" sz="900" dirty="0">
                         <a:latin typeface="Calibri" charset="0"/>
@@ -19417,7 +19499,7 @@
                           <a:ea typeface="Calibri" pitchFamily="34" charset="-122"/>
                           <a:cs typeface="Calibri" pitchFamily="34" charset="-120"/>
                         </a:rPr>
-                        <a:t>2.1</a:t>
+                        <a:t>2.2</a:t>
                       </a:r>
                       <a:endParaRPr lang="en-US" sz="900" dirty="0">
                         <a:latin typeface="Calibri" charset="0"/>
@@ -19553,7 +19635,7 @@
                           <a:ea typeface="Calibri" pitchFamily="34" charset="-122"/>
                           <a:cs typeface="Calibri" pitchFamily="34" charset="-120"/>
                         </a:rPr>
-                        <a:t>2.2</a:t>
+                        <a:t>2.3</a:t>
                       </a:r>
                       <a:endParaRPr lang="en-US" sz="900" dirty="0">
                         <a:latin typeface="Calibri" charset="0"/>
@@ -19621,7 +19703,7 @@
                           <a:ea typeface="Calibri" pitchFamily="34" charset="-122"/>
                           <a:cs typeface="Calibri" pitchFamily="34" charset="-120"/>
                         </a:rPr>
-                        <a:t>1.9</a:t>
+                        <a:t>2.0</a:t>
                       </a:r>
                       <a:endParaRPr lang="en-US" sz="900" dirty="0">
                         <a:latin typeface="Calibri" charset="0"/>
@@ -19759,7 +19841,7 @@
                           <a:ea typeface="Calibri" pitchFamily="34" charset="-122"/>
                           <a:cs typeface="Calibri" pitchFamily="34" charset="-120"/>
                         </a:rPr>
-                        <a:t>5.6%</a:t>
+                        <a:t>5.8%</a:t>
                       </a:r>
                       <a:endParaRPr lang="en-US" sz="900" dirty="0">
                         <a:latin typeface="Calibri" charset="0"/>
@@ -19827,7 +19909,7 @@
                           <a:ea typeface="Calibri" pitchFamily="34" charset="-122"/>
                           <a:cs typeface="Calibri" pitchFamily="34" charset="-120"/>
                         </a:rPr>
-                        <a:t>4.7%</a:t>
+                        <a:t>5.0%</a:t>
                       </a:r>
                       <a:endParaRPr lang="en-US" sz="900" dirty="0">
                         <a:latin typeface="Calibri" charset="0"/>
@@ -19895,7 +19977,7 @@
                           <a:ea typeface="Calibri" pitchFamily="34" charset="-122"/>
                           <a:cs typeface="Calibri" pitchFamily="34" charset="-120"/>
                         </a:rPr>
-                        <a:t>5.4%</a:t>
+                        <a:t>5.6%</a:t>
                       </a:r>
                       <a:endParaRPr lang="en-US" sz="900" dirty="0">
                         <a:latin typeface="Calibri" charset="0"/>
@@ -19963,7 +20045,7 @@
                           <a:ea typeface="Calibri" pitchFamily="34" charset="-122"/>
                           <a:cs typeface="Calibri" pitchFamily="34" charset="-120"/>
                         </a:rPr>
-                        <a:t>6.0%</a:t>
+                        <a:t>6.1%</a:t>
                       </a:r>
                       <a:endParaRPr lang="en-US" sz="900" dirty="0">
                         <a:latin typeface="Calibri" charset="0"/>
@@ -20101,7 +20183,7 @@
                           <a:ea typeface="Calibri" pitchFamily="34" charset="-122"/>
                           <a:cs typeface="Calibri" pitchFamily="34" charset="-120"/>
                         </a:rPr>
-                        <a:t>6.8%</a:t>
+                        <a:t>7.3%</a:t>
                       </a:r>
                       <a:endParaRPr lang="en-US" sz="900" dirty="0">
                         <a:latin typeface="Calibri" charset="0"/>
@@ -20169,7 +20251,7 @@
                           <a:ea typeface="Calibri" pitchFamily="34" charset="-122"/>
                           <a:cs typeface="Calibri" pitchFamily="34" charset="-120"/>
                         </a:rPr>
-                        <a:t>6.7%</a:t>
+                        <a:t>7.1%</a:t>
                       </a:r>
                       <a:endParaRPr lang="en-US" sz="900" dirty="0">
                         <a:latin typeface="Calibri" charset="0"/>
@@ -20237,7 +20319,7 @@
                           <a:ea typeface="Calibri" pitchFamily="34" charset="-122"/>
                           <a:cs typeface="Calibri" pitchFamily="34" charset="-120"/>
                         </a:rPr>
-                        <a:t>6.8%</a:t>
+                        <a:t>7.2%</a:t>
                       </a:r>
                       <a:endParaRPr lang="en-US" sz="900" dirty="0">
                         <a:latin typeface="Calibri" charset="0"/>
@@ -20305,7 +20387,7 @@
                           <a:ea typeface="Calibri" pitchFamily="34" charset="-122"/>
                           <a:cs typeface="Calibri" pitchFamily="34" charset="-120"/>
                         </a:rPr>
-                        <a:t>6.8%</a:t>
+                        <a:t>7.3%</a:t>
                       </a:r>
                       <a:endParaRPr lang="en-US" sz="900" dirty="0">
                         <a:latin typeface="Calibri" charset="0"/>
@@ -20443,7 +20525,7 @@
                           <a:ea typeface="Calibri" pitchFamily="34" charset="-122"/>
                           <a:cs typeface="Calibri" pitchFamily="34" charset="-120"/>
                         </a:rPr>
-                        <a:t>8.3%</a:t>
+                        <a:t>8.7%</a:t>
                       </a:r>
                       <a:endParaRPr lang="en-US" sz="900" dirty="0">
                         <a:latin typeface="Calibri" charset="0"/>
@@ -20511,7 +20593,7 @@
                           <a:ea typeface="Calibri" pitchFamily="34" charset="-122"/>
                           <a:cs typeface="Calibri" pitchFamily="34" charset="-120"/>
                         </a:rPr>
-                        <a:t>7.2%</a:t>
+                        <a:t>7.6%</a:t>
                       </a:r>
                       <a:endParaRPr lang="en-US" sz="900" dirty="0">
                         <a:latin typeface="Calibri" charset="0"/>
@@ -20579,7 +20661,7 @@
                           <a:ea typeface="Calibri" pitchFamily="34" charset="-122"/>
                           <a:cs typeface="Calibri" pitchFamily="34" charset="-120"/>
                         </a:rPr>
-                        <a:t>8.1%</a:t>
+                        <a:t>8.4%</a:t>
                       </a:r>
                       <a:endParaRPr lang="en-US" sz="900" dirty="0">
                         <a:latin typeface="Calibri" charset="0"/>
@@ -20647,7 +20729,7 @@
                           <a:ea typeface="Calibri" pitchFamily="34" charset="-122"/>
                           <a:cs typeface="Calibri" pitchFamily="34" charset="-120"/>
                         </a:rPr>
-                        <a:t>8.6%</a:t>
+                        <a:t>9.0%</a:t>
                       </a:r>
                       <a:endParaRPr lang="en-US" sz="900" dirty="0">
                         <a:latin typeface="Calibri" charset="0"/>
@@ -20785,7 +20867,7 @@
                           <a:ea typeface="Calibri" pitchFamily="34" charset="-122"/>
                           <a:cs typeface="Calibri" pitchFamily="34" charset="-120"/>
                         </a:rPr>
-                        <a:t>11%</a:t>
+                        <a:t>13%</a:t>
                       </a:r>
                       <a:endParaRPr lang="en-US" sz="900" dirty="0">
                         <a:latin typeface="Calibri" charset="0"/>
@@ -20853,7 +20935,7 @@
                           <a:ea typeface="Calibri" pitchFamily="34" charset="-122"/>
                           <a:cs typeface="Calibri" pitchFamily="34" charset="-120"/>
                         </a:rPr>
-                        <a:t>20%</a:t>
+                        <a:t>21%</a:t>
                       </a:r>
                       <a:endParaRPr lang="en-US" sz="900" dirty="0">
                         <a:latin typeface="Calibri" charset="0"/>
@@ -20921,7 +21003,7 @@
                           <a:ea typeface="Calibri" pitchFamily="34" charset="-122"/>
                           <a:cs typeface="Calibri" pitchFamily="34" charset="-120"/>
                         </a:rPr>
-                        <a:t>13%</a:t>
+                        <a:t>15%</a:t>
                       </a:r>
                       <a:endParaRPr lang="en-US" sz="900" dirty="0">
                         <a:latin typeface="Calibri" charset="0"/>
@@ -20989,7 +21071,7 @@
                           <a:ea typeface="Calibri" pitchFamily="34" charset="-122"/>
                           <a:cs typeface="Calibri" pitchFamily="34" charset="-120"/>
                         </a:rPr>
-                        <a:t>8%</a:t>
+                        <a:t>10%</a:t>
                       </a:r>
                       <a:endParaRPr lang="en-US" sz="900" dirty="0">
                         <a:latin typeface="Calibri" charset="0"/>
@@ -21447,7 +21529,7 @@
                 <a:ea typeface="Cambria" pitchFamily="34" charset="-122"/>
                 <a:cs typeface="Cambria" pitchFamily="34" charset="-120"/>
               </a:rPr>
-              <a:t>51%</a:t>
+              <a:t>49%</a:t>
             </a:r>
             <a:endParaRPr lang="en-US" sz="2400" dirty="0"/>
           </a:p>
@@ -21486,7 +21568,7 @@
                 <a:ea typeface="Calibri" pitchFamily="34" charset="-122"/>
                 <a:cs typeface="Calibri" pitchFamily="34" charset="-120"/>
               </a:rPr>
-              <a:t>called at the first review (106.7% total)</a:t>
+              <a:t>called at the first review (107.2% total)</a:t>
             </a:r>
             <a:endParaRPr lang="en-US" sz="1000" dirty="0"/>
           </a:p>
@@ -21657,7 +21739,7 @@
                 <a:ea typeface="Cambria" pitchFamily="34" charset="-122"/>
                 <a:cs typeface="Cambria" pitchFamily="34" charset="-120"/>
               </a:rPr>
-              <a:t>11%</a:t>
+              <a:t>13%</a:t>
             </a:r>
             <a:endParaRPr lang="en-US" sz="2400" dirty="0"/>
           </a:p>
@@ -22209,7 +22291,7 @@
                           <a:ea typeface="Calibri" pitchFamily="34" charset="-122"/>
                           <a:cs typeface="Calibri" pitchFamily="34" charset="-120"/>
                         </a:rPr>
-                        <a:t>Basket never back to 100%: 0% for 5 years (~11% of paths)</a:t>
+                        <a:t>Basket never back to 100%: 0% for 5 years (~13% of paths)</a:t>
                       </a:r>
                       <a:endParaRPr lang="en-US" sz="850" dirty="0">
                         <a:latin typeface="Calibri" charset="0"/>
@@ -22415,7 +22497,7 @@
                           <a:ea typeface="Calibri" pitchFamily="34" charset="-122"/>
                           <a:cs typeface="Calibri" pitchFamily="34" charset="-120"/>
                         </a:rPr>
-                        <a:t>Basket +80% still pays 6.75% p.a. and is called at Y1</a:t>
+                        <a:t>Basket +80% still pays 7.20% p.a. and is called at Y1</a:t>
                       </a:r>
                       <a:endParaRPr lang="en-US" sz="850" dirty="0">
                         <a:latin typeface="Calibri" charset="0"/>
@@ -22553,7 +22635,7 @@
                           <a:ea typeface="Calibri" pitchFamily="34" charset="-122"/>
                           <a:cs typeface="Calibri" pitchFamily="34" charset="-120"/>
                         </a:rPr>
-                        <a:t>Reinvestment</a:t>
+                        <a:t>ETF structure</a:t>
                       </a:r>
                       <a:endParaRPr lang="en-US" sz="850" dirty="0">
                         <a:latin typeface="Calibri" charset="0"/>
@@ -22621,7 +22703,7 @@
                           <a:ea typeface="Calibri" pitchFamily="34" charset="-122"/>
                           <a:cs typeface="Calibri" pitchFamily="34" charset="-120"/>
                         </a:rPr>
-                        <a:t>51% called at Y1: cash back at prevailing rates</a:t>
+                        <a:t>00878 pays ~7.6% a year out, lowering its price path; 3119 trading is thin; ETF tracking error</a:t>
                       </a:r>
                       <a:endParaRPr lang="en-US" sz="850" dirty="0">
                         <a:latin typeface="Calibri" charset="0"/>
@@ -22689,7 +22771,7 @@
                           <a:ea typeface="Calibri" pitchFamily="34" charset="-122"/>
                           <a:cs typeface="Calibri" pitchFamily="34" charset="-120"/>
                         </a:rPr>
-                        <a:t>Natixis offers a roll into a new note at call</a:t>
+                        <a:t>Small 00878 weight; verify volumes; Natixis can reference total-return versions</a:t>
                       </a:r>
                       <a:endParaRPr lang="en-US" sz="850" dirty="0">
                         <a:latin typeface="Calibri" charset="0"/>
@@ -23256,7 +23338,7 @@
                 <a:ea typeface="Calibri" pitchFamily="34" charset="-122"/>
                 <a:cs typeface="Calibri" pitchFamily="34" charset="-120"/>
               </a:rPr>
-              <a:t>Natixis owes basket digitals struck at 100%: replicated with tight basket call spreads, delta-hedged with TAIEX / KOSPI 200 / Nikkei 225 futures</a:t>
+              <a:t>Natixis owes basket digitals struck at 100%: replicated with tight basket call spreads, delta-hedged with ETF units, constituent stocks and index futures as proxies; listed options on EWY/EWT</a:t>
             </a:r>
             <a:endParaRPr lang="en-US" sz="850" dirty="0"/>
           </a:p>
@@ -23361,7 +23443,7 @@
                 <a:ea typeface="Calibri" pitchFamily="34" charset="-122"/>
                 <a:cs typeface="Calibri" pitchFamily="34" charset="-120"/>
               </a:rPr>
-              <a:t>Coupon value moves with basket vol and correlation (fair 6.8%–7.5% for vol ±3pts): managed with listed index options and correlation trades</a:t>
+              <a:t>Coupon value moves with basket vol and correlation (fair 7.5%–8.1% for vol ±3pts): managed with listed index options and correlation trades</a:t>
             </a:r>
             <a:endParaRPr lang="en-US" sz="850" dirty="0"/>
           </a:p>
@@ -23466,7 +23548,7 @@
                 <a:ea typeface="Calibri" pitchFamily="34" charset="-122"/>
                 <a:cs typeface="Calibri" pitchFamily="34" charset="-120"/>
               </a:rPr>
-              <a:t>USD payout on TWD/KRW/JPY indices: FX forwards and quanto adjustment in price (FX-equity correlation)</a:t>
+              <a:t>EWT and EWY already trade in USD; 3119 (HKD, pegged), 2644 (JPY) and 00878 (TWD) need FX forwards and a quanto adjustment</a:t>
             </a:r>
             <a:endParaRPr lang="en-US" sz="850" dirty="0"/>
           </a:p>
@@ -23624,7 +23706,7 @@
                 <a:ea typeface="Calibri" pitchFamily="34" charset="-122"/>
                 <a:cs typeface="Calibri" pitchFamily="34" charset="-120"/>
               </a:rPr>
-              <a:t>base 7.1% · vol ±3pts 6.8%–7.5% · corr ±0.15 6.9%–7.3% · equity drift −1/−2% 7.7%–8.3%. The 6.75% offer stays fundable in every case.</a:t>
+              <a:t>base 7.8% · vol ±3pts 7.5%–8.1% · corr ±0.15 7.6%–8.0% · equity drift −1/−2% 8.3%–8.9%. The 7.20% offer stays fundable in every case.</a:t>
             </a:r>
             <a:endParaRPr lang="en-US" sz="900" dirty="0"/>
           </a:p>
@@ -23806,9 +23888,11 @@
                 <a:gridCol w="566928"/>
                 <a:gridCol w="475488"/>
                 <a:gridCol w="475488"/>
-                <a:gridCol w="804672"/>
-                <a:gridCol w="804672"/>
-                <a:gridCol w="804672"/>
+                <a:gridCol w="482803"/>
+                <a:gridCol w="482803"/>
+                <a:gridCol w="482803"/>
+                <a:gridCol w="482803"/>
+                <a:gridCol w="482803"/>
               </a:tblGrid>
               <a:tr h="274320">
                 <a:tc>
@@ -23828,7 +23912,7 @@
                           <a:ea typeface="Calibri" pitchFamily="34" charset="-122"/>
                           <a:cs typeface="Calibri" pitchFamily="34" charset="-120"/>
                         </a:rPr>
-                        <a:t>Index</a:t>
+                        <a:t>ETF</a:t>
                       </a:r>
                       <a:endParaRPr lang="en-US" sz="900" dirty="0">
                         <a:latin typeface="Calibri" charset="0"/>
@@ -24100,7 +24184,7 @@
                           <a:ea typeface="Calibri" pitchFamily="34" charset="-122"/>
                           <a:cs typeface="Calibri" pitchFamily="34" charset="-120"/>
                         </a:rPr>
-                        <a:t>TWSE</a:t>
+                        <a:t>3119 HK</a:t>
                       </a:r>
                       <a:endParaRPr lang="en-US" sz="900" dirty="0">
                         <a:latin typeface="Calibri" charset="0"/>
@@ -24168,7 +24252,7 @@
                           <a:ea typeface="Calibri" pitchFamily="34" charset="-122"/>
                           <a:cs typeface="Calibri" pitchFamily="34" charset="-120"/>
                         </a:rPr>
-                        <a:t>KOSPI2</a:t>
+                        <a:t>2644 JP</a:t>
                       </a:r>
                       <a:endParaRPr lang="en-US" sz="900" dirty="0">
                         <a:latin typeface="Calibri" charset="0"/>
@@ -24236,7 +24320,143 @@
                           <a:ea typeface="Calibri" pitchFamily="34" charset="-122"/>
                           <a:cs typeface="Calibri" pitchFamily="34" charset="-120"/>
                         </a:rPr>
-                        <a:t>NKY</a:t>
+                        <a:t>EWT US</a:t>
+                      </a:r>
+                      <a:endParaRPr lang="en-US" sz="900" dirty="0">
+                        <a:latin typeface="Calibri" charset="0"/>
+                        <a:ea typeface="Calibri" charset="0"/>
+                        <a:cs typeface="Calibri" charset="0"/>
+                      </a:endParaRPr>
+                    </a:p>
+                  </a:txBody>
+                  <a:tcPr marL="38100" marR="38100" marT="25400" marB="25400" anchor="ctr">
+                    <a:lnL w="6350" cap="flat" cmpd="sng" algn="ctr">
+                      <a:solidFill>
+                        <a:srgbClr val="DCE7E5"/>
+                      </a:solidFill>
+                      <a:prstDash val="solid"/>
+                      <a:round/>
+                      <a:headEnd type="none" w="med" len="med"/>
+                      <a:tailEnd type="none" w="med" len="med"/>
+                    </a:lnL>
+                    <a:lnR w="6350" cap="flat" cmpd="sng" algn="ctr">
+                      <a:solidFill>
+                        <a:srgbClr val="DCE7E5"/>
+                      </a:solidFill>
+                      <a:prstDash val="solid"/>
+                      <a:round/>
+                      <a:headEnd type="none" w="med" len="med"/>
+                      <a:tailEnd type="none" w="med" len="med"/>
+                    </a:lnR>
+                    <a:lnT w="6350" cap="flat" cmpd="sng" algn="ctr">
+                      <a:solidFill>
+                        <a:srgbClr val="DCE7E5"/>
+                      </a:solidFill>
+                      <a:prstDash val="solid"/>
+                      <a:round/>
+                      <a:headEnd type="none" w="med" len="med"/>
+                      <a:tailEnd type="none" w="med" len="med"/>
+                    </a:lnT>
+                    <a:lnB w="6350" cap="flat" cmpd="sng" algn="ctr">
+                      <a:solidFill>
+                        <a:srgbClr val="DCE7E5"/>
+                      </a:solidFill>
+                      <a:prstDash val="solid"/>
+                      <a:round/>
+                      <a:headEnd type="none" w="med" len="med"/>
+                      <a:tailEnd type="none" w="med" len="med"/>
+                    </a:lnB>
+                    <a:solidFill>
+                      <a:srgbClr val="0B3C49"/>
+                    </a:solidFill>
+                  </a:tcPr>
+                </a:tc>
+                <a:tc>
+                  <a:txBody>
+                    <a:bodyPr/>
+                    <a:lstStyle/>
+                    <a:p>
+                      <a:pPr algn="ctr" indent="0" marL="0">
+                        <a:buNone/>
+                      </a:pPr>
+                      <a:r>
+                        <a:rPr lang="en-US" sz="900" b="1" dirty="0">
+                          <a:solidFill>
+                            <a:srgbClr val="FFFFFF"/>
+                          </a:solidFill>
+                          <a:latin typeface="Calibri" pitchFamily="34" charset="0"/>
+                          <a:ea typeface="Calibri" pitchFamily="34" charset="-122"/>
+                          <a:cs typeface="Calibri" pitchFamily="34" charset="-120"/>
+                        </a:rPr>
+                        <a:t>EWY US</a:t>
+                      </a:r>
+                      <a:endParaRPr lang="en-US" sz="900" dirty="0">
+                        <a:latin typeface="Calibri" charset="0"/>
+                        <a:ea typeface="Calibri" charset="0"/>
+                        <a:cs typeface="Calibri" charset="0"/>
+                      </a:endParaRPr>
+                    </a:p>
+                  </a:txBody>
+                  <a:tcPr marL="38100" marR="38100" marT="25400" marB="25400" anchor="ctr">
+                    <a:lnL w="6350" cap="flat" cmpd="sng" algn="ctr">
+                      <a:solidFill>
+                        <a:srgbClr val="DCE7E5"/>
+                      </a:solidFill>
+                      <a:prstDash val="solid"/>
+                      <a:round/>
+                      <a:headEnd type="none" w="med" len="med"/>
+                      <a:tailEnd type="none" w="med" len="med"/>
+                    </a:lnL>
+                    <a:lnR w="6350" cap="flat" cmpd="sng" algn="ctr">
+                      <a:solidFill>
+                        <a:srgbClr val="DCE7E5"/>
+                      </a:solidFill>
+                      <a:prstDash val="solid"/>
+                      <a:round/>
+                      <a:headEnd type="none" w="med" len="med"/>
+                      <a:tailEnd type="none" w="med" len="med"/>
+                    </a:lnR>
+                    <a:lnT w="6350" cap="flat" cmpd="sng" algn="ctr">
+                      <a:solidFill>
+                        <a:srgbClr val="DCE7E5"/>
+                      </a:solidFill>
+                      <a:prstDash val="solid"/>
+                      <a:round/>
+                      <a:headEnd type="none" w="med" len="med"/>
+                      <a:tailEnd type="none" w="med" len="med"/>
+                    </a:lnT>
+                    <a:lnB w="6350" cap="flat" cmpd="sng" algn="ctr">
+                      <a:solidFill>
+                        <a:srgbClr val="DCE7E5"/>
+                      </a:solidFill>
+                      <a:prstDash val="solid"/>
+                      <a:round/>
+                      <a:headEnd type="none" w="med" len="med"/>
+                      <a:tailEnd type="none" w="med" len="med"/>
+                    </a:lnB>
+                    <a:solidFill>
+                      <a:srgbClr val="0B3C49"/>
+                    </a:solidFill>
+                  </a:tcPr>
+                </a:tc>
+                <a:tc>
+                  <a:txBody>
+                    <a:bodyPr/>
+                    <a:lstStyle/>
+                    <a:p>
+                      <a:pPr algn="ctr" indent="0" marL="0">
+                        <a:buNone/>
+                      </a:pPr>
+                      <a:r>
+                        <a:rPr lang="en-US" sz="900" b="1" dirty="0">
+                          <a:solidFill>
+                            <a:srgbClr val="FFFFFF"/>
+                          </a:solidFill>
+                          <a:latin typeface="Calibri" pitchFamily="34" charset="0"/>
+                          <a:ea typeface="Calibri" pitchFamily="34" charset="-122"/>
+                          <a:cs typeface="Calibri" pitchFamily="34" charset="-120"/>
+                        </a:rPr>
+                        <a:t>00878 TT</a:t>
                       </a:r>
                       <a:endParaRPr lang="en-US" sz="900" dirty="0">
                         <a:latin typeface="Calibri" charset="0"/>
@@ -24306,7 +24526,7 @@
                           <a:ea typeface="Calibri" pitchFamily="34" charset="-122"/>
                           <a:cs typeface="Calibri" pitchFamily="34" charset="-120"/>
                         </a:rPr>
-                        <a:t>TWSE</a:t>
+                        <a:t>3119 HK</a:t>
                       </a:r>
                       <a:endParaRPr lang="en-US" sz="900" dirty="0">
                         <a:latin typeface="Calibri" charset="0"/>
@@ -24374,7 +24594,7 @@
                           <a:ea typeface="Calibri" pitchFamily="34" charset="-122"/>
                           <a:cs typeface="Calibri" pitchFamily="34" charset="-120"/>
                         </a:rPr>
-                        <a:t>40%</a:t>
+                        <a:t>25%</a:t>
                       </a:r>
                       <a:endParaRPr lang="en-US" sz="900" dirty="0">
                         <a:latin typeface="Calibri" charset="0"/>
@@ -24442,7 +24662,7 @@
                           <a:ea typeface="Calibri" pitchFamily="34" charset="-122"/>
                           <a:cs typeface="Calibri" pitchFamily="34" charset="-120"/>
                         </a:rPr>
-                        <a:t>24%</a:t>
+                        <a:t>32%</a:t>
                       </a:r>
                       <a:endParaRPr lang="en-US" sz="900" dirty="0">
                         <a:latin typeface="Calibri" charset="0"/>
@@ -24510,7 +24730,7 @@
                           <a:ea typeface="Calibri" pitchFamily="34" charset="-122"/>
                           <a:cs typeface="Calibri" pitchFamily="34" charset="-120"/>
                         </a:rPr>
-                        <a:t>2.8%</a:t>
+                        <a:t>1.0%</a:t>
                       </a:r>
                       <a:endParaRPr lang="en-US" sz="900" dirty="0">
                         <a:latin typeface="Calibri" charset="0"/>
@@ -24714,6 +24934,142 @@
                           <a:ea typeface="Calibri" pitchFamily="34" charset="-122"/>
                           <a:cs typeface="Calibri" pitchFamily="34" charset="-120"/>
                         </a:rPr>
+                        <a:t>0.85</a:t>
+                      </a:r>
+                      <a:endParaRPr lang="en-US" sz="900" dirty="0">
+                        <a:latin typeface="Calibri" charset="0"/>
+                        <a:ea typeface="Calibri" charset="0"/>
+                        <a:cs typeface="Calibri" charset="0"/>
+                      </a:endParaRPr>
+                    </a:p>
+                  </a:txBody>
+                  <a:tcPr marL="38100" marR="38100" marT="25400" marB="25400" anchor="ctr">
+                    <a:lnL w="6350" cap="flat" cmpd="sng" algn="ctr">
+                      <a:solidFill>
+                        <a:srgbClr val="DCE7E5"/>
+                      </a:solidFill>
+                      <a:prstDash val="solid"/>
+                      <a:round/>
+                      <a:headEnd type="none" w="med" len="med"/>
+                      <a:tailEnd type="none" w="med" len="med"/>
+                    </a:lnL>
+                    <a:lnR w="6350" cap="flat" cmpd="sng" algn="ctr">
+                      <a:solidFill>
+                        <a:srgbClr val="DCE7E5"/>
+                      </a:solidFill>
+                      <a:prstDash val="solid"/>
+                      <a:round/>
+                      <a:headEnd type="none" w="med" len="med"/>
+                      <a:tailEnd type="none" w="med" len="med"/>
+                    </a:lnR>
+                    <a:lnT w="6350" cap="flat" cmpd="sng" algn="ctr">
+                      <a:solidFill>
+                        <a:srgbClr val="DCE7E5"/>
+                      </a:solidFill>
+                      <a:prstDash val="solid"/>
+                      <a:round/>
+                      <a:headEnd type="none" w="med" len="med"/>
+                      <a:tailEnd type="none" w="med" len="med"/>
+                    </a:lnT>
+                    <a:lnB w="6350" cap="flat" cmpd="sng" algn="ctr">
+                      <a:solidFill>
+                        <a:srgbClr val="DCE7E5"/>
+                      </a:solidFill>
+                      <a:prstDash val="solid"/>
+                      <a:round/>
+                      <a:headEnd type="none" w="med" len="med"/>
+                      <a:tailEnd type="none" w="med" len="med"/>
+                    </a:lnB>
+                    <a:solidFill>
+                      <a:srgbClr val="FFFFFF"/>
+                    </a:solidFill>
+                  </a:tcPr>
+                </a:tc>
+                <a:tc>
+                  <a:txBody>
+                    <a:bodyPr/>
+                    <a:lstStyle/>
+                    <a:p>
+                      <a:pPr algn="ctr" indent="0" marL="0">
+                        <a:buNone/>
+                      </a:pPr>
+                      <a:r>
+                        <a:rPr lang="en-US" sz="900" dirty="0">
+                          <a:solidFill>
+                            <a:srgbClr val="1D2B30"/>
+                          </a:solidFill>
+                          <a:latin typeface="Calibri" pitchFamily="34" charset="0"/>
+                          <a:ea typeface="Calibri" pitchFamily="34" charset="-122"/>
+                          <a:cs typeface="Calibri" pitchFamily="34" charset="-120"/>
+                        </a:rPr>
+                        <a:t>0.80</a:t>
+                      </a:r>
+                      <a:endParaRPr lang="en-US" sz="900" dirty="0">
+                        <a:latin typeface="Calibri" charset="0"/>
+                        <a:ea typeface="Calibri" charset="0"/>
+                        <a:cs typeface="Calibri" charset="0"/>
+                      </a:endParaRPr>
+                    </a:p>
+                  </a:txBody>
+                  <a:tcPr marL="38100" marR="38100" marT="25400" marB="25400" anchor="ctr">
+                    <a:lnL w="6350" cap="flat" cmpd="sng" algn="ctr">
+                      <a:solidFill>
+                        <a:srgbClr val="DCE7E5"/>
+                      </a:solidFill>
+                      <a:prstDash val="solid"/>
+                      <a:round/>
+                      <a:headEnd type="none" w="med" len="med"/>
+                      <a:tailEnd type="none" w="med" len="med"/>
+                    </a:lnL>
+                    <a:lnR w="6350" cap="flat" cmpd="sng" algn="ctr">
+                      <a:solidFill>
+                        <a:srgbClr val="DCE7E5"/>
+                      </a:solidFill>
+                      <a:prstDash val="solid"/>
+                      <a:round/>
+                      <a:headEnd type="none" w="med" len="med"/>
+                      <a:tailEnd type="none" w="med" len="med"/>
+                    </a:lnR>
+                    <a:lnT w="6350" cap="flat" cmpd="sng" algn="ctr">
+                      <a:solidFill>
+                        <a:srgbClr val="DCE7E5"/>
+                      </a:solidFill>
+                      <a:prstDash val="solid"/>
+                      <a:round/>
+                      <a:headEnd type="none" w="med" len="med"/>
+                      <a:tailEnd type="none" w="med" len="med"/>
+                    </a:lnT>
+                    <a:lnB w="6350" cap="flat" cmpd="sng" algn="ctr">
+                      <a:solidFill>
+                        <a:srgbClr val="DCE7E5"/>
+                      </a:solidFill>
+                      <a:prstDash val="solid"/>
+                      <a:round/>
+                      <a:headEnd type="none" w="med" len="med"/>
+                      <a:tailEnd type="none" w="med" len="med"/>
+                    </a:lnB>
+                    <a:solidFill>
+                      <a:srgbClr val="FFFFFF"/>
+                    </a:solidFill>
+                  </a:tcPr>
+                </a:tc>
+                <a:tc>
+                  <a:txBody>
+                    <a:bodyPr/>
+                    <a:lstStyle/>
+                    <a:p>
+                      <a:pPr algn="ctr" indent="0" marL="0">
+                        <a:buNone/>
+                      </a:pPr>
+                      <a:r>
+                        <a:rPr lang="en-US" sz="900" dirty="0">
+                          <a:solidFill>
+                            <a:srgbClr val="1D2B30"/>
+                          </a:solidFill>
+                          <a:latin typeface="Calibri" pitchFamily="34" charset="0"/>
+                          <a:ea typeface="Calibri" pitchFamily="34" charset="-122"/>
+                          <a:cs typeface="Calibri" pitchFamily="34" charset="-120"/>
+                        </a:rPr>
                         <a:t>0.60</a:t>
                       </a:r>
                       <a:endParaRPr lang="en-US" sz="900" dirty="0">
@@ -24784,7 +25140,1303 @@
                           <a:ea typeface="Calibri" pitchFamily="34" charset="-122"/>
                           <a:cs typeface="Calibri" pitchFamily="34" charset="-120"/>
                         </a:rPr>
-                        <a:t>KOSPI2</a:t>
+                        <a:t>2644 JP</a:t>
+                      </a:r>
+                      <a:endParaRPr lang="en-US" sz="900" dirty="0">
+                        <a:latin typeface="Calibri" charset="0"/>
+                        <a:ea typeface="Calibri" charset="0"/>
+                        <a:cs typeface="Calibri" charset="0"/>
+                      </a:endParaRPr>
+                    </a:p>
+                  </a:txBody>
+                  <a:tcPr marL="38100" marR="38100" marT="25400" marB="25400" anchor="ctr">
+                    <a:lnL w="6350" cap="flat" cmpd="sng" algn="ctr">
+                      <a:solidFill>
+                        <a:srgbClr val="DCE7E5"/>
+                      </a:solidFill>
+                      <a:prstDash val="solid"/>
+                      <a:round/>
+                      <a:headEnd type="none" w="med" len="med"/>
+                      <a:tailEnd type="none" w="med" len="med"/>
+                    </a:lnL>
+                    <a:lnR w="6350" cap="flat" cmpd="sng" algn="ctr">
+                      <a:solidFill>
+                        <a:srgbClr val="DCE7E5"/>
+                      </a:solidFill>
+                      <a:prstDash val="solid"/>
+                      <a:round/>
+                      <a:headEnd type="none" w="med" len="med"/>
+                      <a:tailEnd type="none" w="med" len="med"/>
+                    </a:lnR>
+                    <a:lnT w="6350" cap="flat" cmpd="sng" algn="ctr">
+                      <a:solidFill>
+                        <a:srgbClr val="DCE7E5"/>
+                      </a:solidFill>
+                      <a:prstDash val="solid"/>
+                      <a:round/>
+                      <a:headEnd type="none" w="med" len="med"/>
+                      <a:tailEnd type="none" w="med" len="med"/>
+                    </a:lnT>
+                    <a:lnB w="6350" cap="flat" cmpd="sng" algn="ctr">
+                      <a:solidFill>
+                        <a:srgbClr val="DCE7E5"/>
+                      </a:solidFill>
+                      <a:prstDash val="solid"/>
+                      <a:round/>
+                      <a:headEnd type="none" w="med" len="med"/>
+                      <a:tailEnd type="none" w="med" len="med"/>
+                    </a:lnB>
+                    <a:solidFill>
+                      <a:srgbClr val="FFFFFF"/>
+                    </a:solidFill>
+                  </a:tcPr>
+                </a:tc>
+                <a:tc>
+                  <a:txBody>
+                    <a:bodyPr/>
+                    <a:lstStyle/>
+                    <a:p>
+                      <a:pPr algn="ctr" indent="0" marL="0">
+                        <a:buNone/>
+                      </a:pPr>
+                      <a:r>
+                        <a:rPr lang="en-US" sz="900" dirty="0">
+                          <a:solidFill>
+                            <a:srgbClr val="1D2B30"/>
+                          </a:solidFill>
+                          <a:latin typeface="Calibri" pitchFamily="34" charset="0"/>
+                          <a:ea typeface="Calibri" pitchFamily="34" charset="-122"/>
+                          <a:cs typeface="Calibri" pitchFamily="34" charset="-120"/>
+                        </a:rPr>
+                        <a:t>20%</a:t>
+                      </a:r>
+                      <a:endParaRPr lang="en-US" sz="900" dirty="0">
+                        <a:latin typeface="Calibri" charset="0"/>
+                        <a:ea typeface="Calibri" charset="0"/>
+                        <a:cs typeface="Calibri" charset="0"/>
+                      </a:endParaRPr>
+                    </a:p>
+                  </a:txBody>
+                  <a:tcPr marL="38100" marR="38100" marT="25400" marB="25400" anchor="ctr">
+                    <a:lnL w="6350" cap="flat" cmpd="sng" algn="ctr">
+                      <a:solidFill>
+                        <a:srgbClr val="DCE7E5"/>
+                      </a:solidFill>
+                      <a:prstDash val="solid"/>
+                      <a:round/>
+                      <a:headEnd type="none" w="med" len="med"/>
+                      <a:tailEnd type="none" w="med" len="med"/>
+                    </a:lnL>
+                    <a:lnR w="6350" cap="flat" cmpd="sng" algn="ctr">
+                      <a:solidFill>
+                        <a:srgbClr val="DCE7E5"/>
+                      </a:solidFill>
+                      <a:prstDash val="solid"/>
+                      <a:round/>
+                      <a:headEnd type="none" w="med" len="med"/>
+                      <a:tailEnd type="none" w="med" len="med"/>
+                    </a:lnR>
+                    <a:lnT w="6350" cap="flat" cmpd="sng" algn="ctr">
+                      <a:solidFill>
+                        <a:srgbClr val="DCE7E5"/>
+                      </a:solidFill>
+                      <a:prstDash val="solid"/>
+                      <a:round/>
+                      <a:headEnd type="none" w="med" len="med"/>
+                      <a:tailEnd type="none" w="med" len="med"/>
+                    </a:lnT>
+                    <a:lnB w="6350" cap="flat" cmpd="sng" algn="ctr">
+                      <a:solidFill>
+                        <a:srgbClr val="DCE7E5"/>
+                      </a:solidFill>
+                      <a:prstDash val="solid"/>
+                      <a:round/>
+                      <a:headEnd type="none" w="med" len="med"/>
+                      <a:tailEnd type="none" w="med" len="med"/>
+                    </a:lnB>
+                    <a:solidFill>
+                      <a:srgbClr val="FFFFFF"/>
+                    </a:solidFill>
+                  </a:tcPr>
+                </a:tc>
+                <a:tc>
+                  <a:txBody>
+                    <a:bodyPr/>
+                    <a:lstStyle/>
+                    <a:p>
+                      <a:pPr algn="ctr" indent="0" marL="0">
+                        <a:buNone/>
+                      </a:pPr>
+                      <a:r>
+                        <a:rPr lang="en-US" sz="900" dirty="0">
+                          <a:solidFill>
+                            <a:srgbClr val="1D2B30"/>
+                          </a:solidFill>
+                          <a:latin typeface="Calibri" pitchFamily="34" charset="0"/>
+                          <a:ea typeface="Calibri" pitchFamily="34" charset="-122"/>
+                          <a:cs typeface="Calibri" pitchFamily="34" charset="-120"/>
+                        </a:rPr>
+                        <a:t>38%</a:t>
+                      </a:r>
+                      <a:endParaRPr lang="en-US" sz="900" dirty="0">
+                        <a:latin typeface="Calibri" charset="0"/>
+                        <a:ea typeface="Calibri" charset="0"/>
+                        <a:cs typeface="Calibri" charset="0"/>
+                      </a:endParaRPr>
+                    </a:p>
+                  </a:txBody>
+                  <a:tcPr marL="38100" marR="38100" marT="25400" marB="25400" anchor="ctr">
+                    <a:lnL w="6350" cap="flat" cmpd="sng" algn="ctr">
+                      <a:solidFill>
+                        <a:srgbClr val="DCE7E5"/>
+                      </a:solidFill>
+                      <a:prstDash val="solid"/>
+                      <a:round/>
+                      <a:headEnd type="none" w="med" len="med"/>
+                      <a:tailEnd type="none" w="med" len="med"/>
+                    </a:lnL>
+                    <a:lnR w="6350" cap="flat" cmpd="sng" algn="ctr">
+                      <a:solidFill>
+                        <a:srgbClr val="DCE7E5"/>
+                      </a:solidFill>
+                      <a:prstDash val="solid"/>
+                      <a:round/>
+                      <a:headEnd type="none" w="med" len="med"/>
+                      <a:tailEnd type="none" w="med" len="med"/>
+                    </a:lnR>
+                    <a:lnT w="6350" cap="flat" cmpd="sng" algn="ctr">
+                      <a:solidFill>
+                        <a:srgbClr val="DCE7E5"/>
+                      </a:solidFill>
+                      <a:prstDash val="solid"/>
+                      <a:round/>
+                      <a:headEnd type="none" w="med" len="med"/>
+                      <a:tailEnd type="none" w="med" len="med"/>
+                    </a:lnT>
+                    <a:lnB w="6350" cap="flat" cmpd="sng" algn="ctr">
+                      <a:solidFill>
+                        <a:srgbClr val="DCE7E5"/>
+                      </a:solidFill>
+                      <a:prstDash val="solid"/>
+                      <a:round/>
+                      <a:headEnd type="none" w="med" len="med"/>
+                      <a:tailEnd type="none" w="med" len="med"/>
+                    </a:lnB>
+                    <a:solidFill>
+                      <a:srgbClr val="FFFFFF"/>
+                    </a:solidFill>
+                  </a:tcPr>
+                </a:tc>
+                <a:tc>
+                  <a:txBody>
+                    <a:bodyPr/>
+                    <a:lstStyle/>
+                    <a:p>
+                      <a:pPr algn="ctr" indent="0" marL="0">
+                        <a:buNone/>
+                      </a:pPr>
+                      <a:r>
+                        <a:rPr lang="en-US" sz="900" dirty="0">
+                          <a:solidFill>
+                            <a:srgbClr val="1D2B30"/>
+                          </a:solidFill>
+                          <a:latin typeface="Calibri" pitchFamily="34" charset="0"/>
+                          <a:ea typeface="Calibri" pitchFamily="34" charset="-122"/>
+                          <a:cs typeface="Calibri" pitchFamily="34" charset="-120"/>
+                        </a:rPr>
+                        <a:t>0.8%</a:t>
+                      </a:r>
+                      <a:endParaRPr lang="en-US" sz="900" dirty="0">
+                        <a:latin typeface="Calibri" charset="0"/>
+                        <a:ea typeface="Calibri" charset="0"/>
+                        <a:cs typeface="Calibri" charset="0"/>
+                      </a:endParaRPr>
+                    </a:p>
+                  </a:txBody>
+                  <a:tcPr marL="38100" marR="38100" marT="25400" marB="25400" anchor="ctr">
+                    <a:lnL w="6350" cap="flat" cmpd="sng" algn="ctr">
+                      <a:solidFill>
+                        <a:srgbClr val="DCE7E5"/>
+                      </a:solidFill>
+                      <a:prstDash val="solid"/>
+                      <a:round/>
+                      <a:headEnd type="none" w="med" len="med"/>
+                      <a:tailEnd type="none" w="med" len="med"/>
+                    </a:lnL>
+                    <a:lnR w="6350" cap="flat" cmpd="sng" algn="ctr">
+                      <a:solidFill>
+                        <a:srgbClr val="DCE7E5"/>
+                      </a:solidFill>
+                      <a:prstDash val="solid"/>
+                      <a:round/>
+                      <a:headEnd type="none" w="med" len="med"/>
+                      <a:tailEnd type="none" w="med" len="med"/>
+                    </a:lnR>
+                    <a:lnT w="6350" cap="flat" cmpd="sng" algn="ctr">
+                      <a:solidFill>
+                        <a:srgbClr val="DCE7E5"/>
+                      </a:solidFill>
+                      <a:prstDash val="solid"/>
+                      <a:round/>
+                      <a:headEnd type="none" w="med" len="med"/>
+                      <a:tailEnd type="none" w="med" len="med"/>
+                    </a:lnT>
+                    <a:lnB w="6350" cap="flat" cmpd="sng" algn="ctr">
+                      <a:solidFill>
+                        <a:srgbClr val="DCE7E5"/>
+                      </a:solidFill>
+                      <a:prstDash val="solid"/>
+                      <a:round/>
+                      <a:headEnd type="none" w="med" len="med"/>
+                      <a:tailEnd type="none" w="med" len="med"/>
+                    </a:lnB>
+                    <a:solidFill>
+                      <a:srgbClr val="FFFFFF"/>
+                    </a:solidFill>
+                  </a:tcPr>
+                </a:tc>
+                <a:tc>
+                  <a:txBody>
+                    <a:bodyPr/>
+                    <a:lstStyle/>
+                    <a:p>
+                      <a:pPr algn="ctr" indent="0" marL="0">
+                        <a:buNone/>
+                      </a:pPr>
+                      <a:r>
+                        <a:rPr lang="en-US" sz="900" dirty="0">
+                          <a:solidFill>
+                            <a:srgbClr val="1D2B30"/>
+                          </a:solidFill>
+                          <a:latin typeface="Calibri" pitchFamily="34" charset="0"/>
+                          <a:ea typeface="Calibri" pitchFamily="34" charset="-122"/>
+                          <a:cs typeface="Calibri" pitchFamily="34" charset="-120"/>
+                        </a:rPr>
+                        <a:t>0.70</a:t>
+                      </a:r>
+                      <a:endParaRPr lang="en-US" sz="900" dirty="0">
+                        <a:latin typeface="Calibri" charset="0"/>
+                        <a:ea typeface="Calibri" charset="0"/>
+                        <a:cs typeface="Calibri" charset="0"/>
+                      </a:endParaRPr>
+                    </a:p>
+                  </a:txBody>
+                  <a:tcPr marL="38100" marR="38100" marT="25400" marB="25400" anchor="ctr">
+                    <a:lnL w="6350" cap="flat" cmpd="sng" algn="ctr">
+                      <a:solidFill>
+                        <a:srgbClr val="DCE7E5"/>
+                      </a:solidFill>
+                      <a:prstDash val="solid"/>
+                      <a:round/>
+                      <a:headEnd type="none" w="med" len="med"/>
+                      <a:tailEnd type="none" w="med" len="med"/>
+                    </a:lnL>
+                    <a:lnR w="6350" cap="flat" cmpd="sng" algn="ctr">
+                      <a:solidFill>
+                        <a:srgbClr val="DCE7E5"/>
+                      </a:solidFill>
+                      <a:prstDash val="solid"/>
+                      <a:round/>
+                      <a:headEnd type="none" w="med" len="med"/>
+                      <a:tailEnd type="none" w="med" len="med"/>
+                    </a:lnR>
+                    <a:lnT w="6350" cap="flat" cmpd="sng" algn="ctr">
+                      <a:solidFill>
+                        <a:srgbClr val="DCE7E5"/>
+                      </a:solidFill>
+                      <a:prstDash val="solid"/>
+                      <a:round/>
+                      <a:headEnd type="none" w="med" len="med"/>
+                      <a:tailEnd type="none" w="med" len="med"/>
+                    </a:lnT>
+                    <a:lnB w="6350" cap="flat" cmpd="sng" algn="ctr">
+                      <a:solidFill>
+                        <a:srgbClr val="DCE7E5"/>
+                      </a:solidFill>
+                      <a:prstDash val="solid"/>
+                      <a:round/>
+                      <a:headEnd type="none" w="med" len="med"/>
+                      <a:tailEnd type="none" w="med" len="med"/>
+                    </a:lnB>
+                    <a:solidFill>
+                      <a:srgbClr val="FFFFFF"/>
+                    </a:solidFill>
+                  </a:tcPr>
+                </a:tc>
+                <a:tc>
+                  <a:txBody>
+                    <a:bodyPr/>
+                    <a:lstStyle/>
+                    <a:p>
+                      <a:pPr algn="ctr" indent="0" marL="0">
+                        <a:buNone/>
+                      </a:pPr>
+                      <a:r>
+                        <a:rPr lang="en-US" sz="900" dirty="0">
+                          <a:solidFill>
+                            <a:srgbClr val="1D2B30"/>
+                          </a:solidFill>
+                          <a:latin typeface="Calibri" pitchFamily="34" charset="0"/>
+                          <a:ea typeface="Calibri" pitchFamily="34" charset="-122"/>
+                          <a:cs typeface="Calibri" pitchFamily="34" charset="-120"/>
+                        </a:rPr>
+                        <a:t>1.00</a:t>
+                      </a:r>
+                      <a:endParaRPr lang="en-US" sz="900" dirty="0">
+                        <a:latin typeface="Calibri" charset="0"/>
+                        <a:ea typeface="Calibri" charset="0"/>
+                        <a:cs typeface="Calibri" charset="0"/>
+                      </a:endParaRPr>
+                    </a:p>
+                  </a:txBody>
+                  <a:tcPr marL="38100" marR="38100" marT="25400" marB="25400" anchor="ctr">
+                    <a:lnL w="6350" cap="flat" cmpd="sng" algn="ctr">
+                      <a:solidFill>
+                        <a:srgbClr val="DCE7E5"/>
+                      </a:solidFill>
+                      <a:prstDash val="solid"/>
+                      <a:round/>
+                      <a:headEnd type="none" w="med" len="med"/>
+                      <a:tailEnd type="none" w="med" len="med"/>
+                    </a:lnL>
+                    <a:lnR w="6350" cap="flat" cmpd="sng" algn="ctr">
+                      <a:solidFill>
+                        <a:srgbClr val="DCE7E5"/>
+                      </a:solidFill>
+                      <a:prstDash val="solid"/>
+                      <a:round/>
+                      <a:headEnd type="none" w="med" len="med"/>
+                      <a:tailEnd type="none" w="med" len="med"/>
+                    </a:lnR>
+                    <a:lnT w="6350" cap="flat" cmpd="sng" algn="ctr">
+                      <a:solidFill>
+                        <a:srgbClr val="DCE7E5"/>
+                      </a:solidFill>
+                      <a:prstDash val="solid"/>
+                      <a:round/>
+                      <a:headEnd type="none" w="med" len="med"/>
+                      <a:tailEnd type="none" w="med" len="med"/>
+                    </a:lnT>
+                    <a:lnB w="6350" cap="flat" cmpd="sng" algn="ctr">
+                      <a:solidFill>
+                        <a:srgbClr val="DCE7E5"/>
+                      </a:solidFill>
+                      <a:prstDash val="solid"/>
+                      <a:round/>
+                      <a:headEnd type="none" w="med" len="med"/>
+                      <a:tailEnd type="none" w="med" len="med"/>
+                    </a:lnB>
+                    <a:solidFill>
+                      <a:srgbClr val="FFFFFF"/>
+                    </a:solidFill>
+                  </a:tcPr>
+                </a:tc>
+                <a:tc>
+                  <a:txBody>
+                    <a:bodyPr/>
+                    <a:lstStyle/>
+                    <a:p>
+                      <a:pPr algn="ctr" indent="0" marL="0">
+                        <a:buNone/>
+                      </a:pPr>
+                      <a:r>
+                        <a:rPr lang="en-US" sz="900" dirty="0">
+                          <a:solidFill>
+                            <a:srgbClr val="1D2B30"/>
+                          </a:solidFill>
+                          <a:latin typeface="Calibri" pitchFamily="34" charset="0"/>
+                          <a:ea typeface="Calibri" pitchFamily="34" charset="-122"/>
+                          <a:cs typeface="Calibri" pitchFamily="34" charset="-120"/>
+                        </a:rPr>
+                        <a:t>0.60</a:t>
+                      </a:r>
+                      <a:endParaRPr lang="en-US" sz="900" dirty="0">
+                        <a:latin typeface="Calibri" charset="0"/>
+                        <a:ea typeface="Calibri" charset="0"/>
+                        <a:cs typeface="Calibri" charset="0"/>
+                      </a:endParaRPr>
+                    </a:p>
+                  </a:txBody>
+                  <a:tcPr marL="38100" marR="38100" marT="25400" marB="25400" anchor="ctr">
+                    <a:lnL w="6350" cap="flat" cmpd="sng" algn="ctr">
+                      <a:solidFill>
+                        <a:srgbClr val="DCE7E5"/>
+                      </a:solidFill>
+                      <a:prstDash val="solid"/>
+                      <a:round/>
+                      <a:headEnd type="none" w="med" len="med"/>
+                      <a:tailEnd type="none" w="med" len="med"/>
+                    </a:lnL>
+                    <a:lnR w="6350" cap="flat" cmpd="sng" algn="ctr">
+                      <a:solidFill>
+                        <a:srgbClr val="DCE7E5"/>
+                      </a:solidFill>
+                      <a:prstDash val="solid"/>
+                      <a:round/>
+                      <a:headEnd type="none" w="med" len="med"/>
+                      <a:tailEnd type="none" w="med" len="med"/>
+                    </a:lnR>
+                    <a:lnT w="6350" cap="flat" cmpd="sng" algn="ctr">
+                      <a:solidFill>
+                        <a:srgbClr val="DCE7E5"/>
+                      </a:solidFill>
+                      <a:prstDash val="solid"/>
+                      <a:round/>
+                      <a:headEnd type="none" w="med" len="med"/>
+                      <a:tailEnd type="none" w="med" len="med"/>
+                    </a:lnT>
+                    <a:lnB w="6350" cap="flat" cmpd="sng" algn="ctr">
+                      <a:solidFill>
+                        <a:srgbClr val="DCE7E5"/>
+                      </a:solidFill>
+                      <a:prstDash val="solid"/>
+                      <a:round/>
+                      <a:headEnd type="none" w="med" len="med"/>
+                      <a:tailEnd type="none" w="med" len="med"/>
+                    </a:lnB>
+                    <a:solidFill>
+                      <a:srgbClr val="FFFFFF"/>
+                    </a:solidFill>
+                  </a:tcPr>
+                </a:tc>
+                <a:tc>
+                  <a:txBody>
+                    <a:bodyPr/>
+                    <a:lstStyle/>
+                    <a:p>
+                      <a:pPr algn="ctr" indent="0" marL="0">
+                        <a:buNone/>
+                      </a:pPr>
+                      <a:r>
+                        <a:rPr lang="en-US" sz="900" dirty="0">
+                          <a:solidFill>
+                            <a:srgbClr val="1D2B30"/>
+                          </a:solidFill>
+                          <a:latin typeface="Calibri" pitchFamily="34" charset="0"/>
+                          <a:ea typeface="Calibri" pitchFamily="34" charset="-122"/>
+                          <a:cs typeface="Calibri" pitchFamily="34" charset="-120"/>
+                        </a:rPr>
+                        <a:t>0.55</a:t>
+                      </a:r>
+                      <a:endParaRPr lang="en-US" sz="900" dirty="0">
+                        <a:latin typeface="Calibri" charset="0"/>
+                        <a:ea typeface="Calibri" charset="0"/>
+                        <a:cs typeface="Calibri" charset="0"/>
+                      </a:endParaRPr>
+                    </a:p>
+                  </a:txBody>
+                  <a:tcPr marL="38100" marR="38100" marT="25400" marB="25400" anchor="ctr">
+                    <a:lnL w="6350" cap="flat" cmpd="sng" algn="ctr">
+                      <a:solidFill>
+                        <a:srgbClr val="DCE7E5"/>
+                      </a:solidFill>
+                      <a:prstDash val="solid"/>
+                      <a:round/>
+                      <a:headEnd type="none" w="med" len="med"/>
+                      <a:tailEnd type="none" w="med" len="med"/>
+                    </a:lnL>
+                    <a:lnR w="6350" cap="flat" cmpd="sng" algn="ctr">
+                      <a:solidFill>
+                        <a:srgbClr val="DCE7E5"/>
+                      </a:solidFill>
+                      <a:prstDash val="solid"/>
+                      <a:round/>
+                      <a:headEnd type="none" w="med" len="med"/>
+                      <a:tailEnd type="none" w="med" len="med"/>
+                    </a:lnR>
+                    <a:lnT w="6350" cap="flat" cmpd="sng" algn="ctr">
+                      <a:solidFill>
+                        <a:srgbClr val="DCE7E5"/>
+                      </a:solidFill>
+                      <a:prstDash val="solid"/>
+                      <a:round/>
+                      <a:headEnd type="none" w="med" len="med"/>
+                      <a:tailEnd type="none" w="med" len="med"/>
+                    </a:lnT>
+                    <a:lnB w="6350" cap="flat" cmpd="sng" algn="ctr">
+                      <a:solidFill>
+                        <a:srgbClr val="DCE7E5"/>
+                      </a:solidFill>
+                      <a:prstDash val="solid"/>
+                      <a:round/>
+                      <a:headEnd type="none" w="med" len="med"/>
+                      <a:tailEnd type="none" w="med" len="med"/>
+                    </a:lnB>
+                    <a:solidFill>
+                      <a:srgbClr val="FFFFFF"/>
+                    </a:solidFill>
+                  </a:tcPr>
+                </a:tc>
+                <a:tc>
+                  <a:txBody>
+                    <a:bodyPr/>
+                    <a:lstStyle/>
+                    <a:p>
+                      <a:pPr algn="ctr" indent="0" marL="0">
+                        <a:buNone/>
+                      </a:pPr>
+                      <a:r>
+                        <a:rPr lang="en-US" sz="900" dirty="0">
+                          <a:solidFill>
+                            <a:srgbClr val="1D2B30"/>
+                          </a:solidFill>
+                          <a:latin typeface="Calibri" pitchFamily="34" charset="0"/>
+                          <a:ea typeface="Calibri" pitchFamily="34" charset="-122"/>
+                          <a:cs typeface="Calibri" pitchFamily="34" charset="-120"/>
+                        </a:rPr>
+                        <a:t>0.45</a:t>
+                      </a:r>
+                      <a:endParaRPr lang="en-US" sz="900" dirty="0">
+                        <a:latin typeface="Calibri" charset="0"/>
+                        <a:ea typeface="Calibri" charset="0"/>
+                        <a:cs typeface="Calibri" charset="0"/>
+                      </a:endParaRPr>
+                    </a:p>
+                  </a:txBody>
+                  <a:tcPr marL="38100" marR="38100" marT="25400" marB="25400" anchor="ctr">
+                    <a:lnL w="6350" cap="flat" cmpd="sng" algn="ctr">
+                      <a:solidFill>
+                        <a:srgbClr val="DCE7E5"/>
+                      </a:solidFill>
+                      <a:prstDash val="solid"/>
+                      <a:round/>
+                      <a:headEnd type="none" w="med" len="med"/>
+                      <a:tailEnd type="none" w="med" len="med"/>
+                    </a:lnL>
+                    <a:lnR w="6350" cap="flat" cmpd="sng" algn="ctr">
+                      <a:solidFill>
+                        <a:srgbClr val="DCE7E5"/>
+                      </a:solidFill>
+                      <a:prstDash val="solid"/>
+                      <a:round/>
+                      <a:headEnd type="none" w="med" len="med"/>
+                      <a:tailEnd type="none" w="med" len="med"/>
+                    </a:lnR>
+                    <a:lnT w="6350" cap="flat" cmpd="sng" algn="ctr">
+                      <a:solidFill>
+                        <a:srgbClr val="DCE7E5"/>
+                      </a:solidFill>
+                      <a:prstDash val="solid"/>
+                      <a:round/>
+                      <a:headEnd type="none" w="med" len="med"/>
+                      <a:tailEnd type="none" w="med" len="med"/>
+                    </a:lnT>
+                    <a:lnB w="6350" cap="flat" cmpd="sng" algn="ctr">
+                      <a:solidFill>
+                        <a:srgbClr val="DCE7E5"/>
+                      </a:solidFill>
+                      <a:prstDash val="solid"/>
+                      <a:round/>
+                      <a:headEnd type="none" w="med" len="med"/>
+                      <a:tailEnd type="none" w="med" len="med"/>
+                    </a:lnB>
+                    <a:solidFill>
+                      <a:srgbClr val="FFFFFF"/>
+                    </a:solidFill>
+                  </a:tcPr>
+                </a:tc>
+              </a:tr>
+              <a:tr h="274320">
+                <a:tc>
+                  <a:txBody>
+                    <a:bodyPr/>
+                    <a:lstStyle/>
+                    <a:p>
+                      <a:pPr algn="ctr" indent="0" marL="0">
+                        <a:buNone/>
+                      </a:pPr>
+                      <a:r>
+                        <a:rPr lang="en-US" sz="900" b="1" dirty="0">
+                          <a:solidFill>
+                            <a:srgbClr val="1D2B30"/>
+                          </a:solidFill>
+                          <a:latin typeface="Calibri" pitchFamily="34" charset="0"/>
+                          <a:ea typeface="Calibri" pitchFamily="34" charset="-122"/>
+                          <a:cs typeface="Calibri" pitchFamily="34" charset="-120"/>
+                        </a:rPr>
+                        <a:t>EWT US</a:t>
+                      </a:r>
+                      <a:endParaRPr lang="en-US" sz="900" dirty="0">
+                        <a:latin typeface="Calibri" charset="0"/>
+                        <a:ea typeface="Calibri" charset="0"/>
+                        <a:cs typeface="Calibri" charset="0"/>
+                      </a:endParaRPr>
+                    </a:p>
+                  </a:txBody>
+                  <a:tcPr marL="38100" marR="38100" marT="25400" marB="25400" anchor="ctr">
+                    <a:lnL w="6350" cap="flat" cmpd="sng" algn="ctr">
+                      <a:solidFill>
+                        <a:srgbClr val="DCE7E5"/>
+                      </a:solidFill>
+                      <a:prstDash val="solid"/>
+                      <a:round/>
+                      <a:headEnd type="none" w="med" len="med"/>
+                      <a:tailEnd type="none" w="med" len="med"/>
+                    </a:lnL>
+                    <a:lnR w="6350" cap="flat" cmpd="sng" algn="ctr">
+                      <a:solidFill>
+                        <a:srgbClr val="DCE7E5"/>
+                      </a:solidFill>
+                      <a:prstDash val="solid"/>
+                      <a:round/>
+                      <a:headEnd type="none" w="med" len="med"/>
+                      <a:tailEnd type="none" w="med" len="med"/>
+                    </a:lnR>
+                    <a:lnT w="6350" cap="flat" cmpd="sng" algn="ctr">
+                      <a:solidFill>
+                        <a:srgbClr val="DCE7E5"/>
+                      </a:solidFill>
+                      <a:prstDash val="solid"/>
+                      <a:round/>
+                      <a:headEnd type="none" w="med" len="med"/>
+                      <a:tailEnd type="none" w="med" len="med"/>
+                    </a:lnT>
+                    <a:lnB w="6350" cap="flat" cmpd="sng" algn="ctr">
+                      <a:solidFill>
+                        <a:srgbClr val="DCE7E5"/>
+                      </a:solidFill>
+                      <a:prstDash val="solid"/>
+                      <a:round/>
+                      <a:headEnd type="none" w="med" len="med"/>
+                      <a:tailEnd type="none" w="med" len="med"/>
+                    </a:lnB>
+                    <a:solidFill>
+                      <a:srgbClr val="FFFFFF"/>
+                    </a:solidFill>
+                  </a:tcPr>
+                </a:tc>
+                <a:tc>
+                  <a:txBody>
+                    <a:bodyPr/>
+                    <a:lstStyle/>
+                    <a:p>
+                      <a:pPr algn="ctr" indent="0" marL="0">
+                        <a:buNone/>
+                      </a:pPr>
+                      <a:r>
+                        <a:rPr lang="en-US" sz="900" dirty="0">
+                          <a:solidFill>
+                            <a:srgbClr val="1D2B30"/>
+                          </a:solidFill>
+                          <a:latin typeface="Calibri" pitchFamily="34" charset="0"/>
+                          <a:ea typeface="Calibri" pitchFamily="34" charset="-122"/>
+                          <a:cs typeface="Calibri" pitchFamily="34" charset="-120"/>
+                        </a:rPr>
+                        <a:t>20%</a:t>
+                      </a:r>
+                      <a:endParaRPr lang="en-US" sz="900" dirty="0">
+                        <a:latin typeface="Calibri" charset="0"/>
+                        <a:ea typeface="Calibri" charset="0"/>
+                        <a:cs typeface="Calibri" charset="0"/>
+                      </a:endParaRPr>
+                    </a:p>
+                  </a:txBody>
+                  <a:tcPr marL="38100" marR="38100" marT="25400" marB="25400" anchor="ctr">
+                    <a:lnL w="6350" cap="flat" cmpd="sng" algn="ctr">
+                      <a:solidFill>
+                        <a:srgbClr val="DCE7E5"/>
+                      </a:solidFill>
+                      <a:prstDash val="solid"/>
+                      <a:round/>
+                      <a:headEnd type="none" w="med" len="med"/>
+                      <a:tailEnd type="none" w="med" len="med"/>
+                    </a:lnL>
+                    <a:lnR w="6350" cap="flat" cmpd="sng" algn="ctr">
+                      <a:solidFill>
+                        <a:srgbClr val="DCE7E5"/>
+                      </a:solidFill>
+                      <a:prstDash val="solid"/>
+                      <a:round/>
+                      <a:headEnd type="none" w="med" len="med"/>
+                      <a:tailEnd type="none" w="med" len="med"/>
+                    </a:lnR>
+                    <a:lnT w="6350" cap="flat" cmpd="sng" algn="ctr">
+                      <a:solidFill>
+                        <a:srgbClr val="DCE7E5"/>
+                      </a:solidFill>
+                      <a:prstDash val="solid"/>
+                      <a:round/>
+                      <a:headEnd type="none" w="med" len="med"/>
+                      <a:tailEnd type="none" w="med" len="med"/>
+                    </a:lnT>
+                    <a:lnB w="6350" cap="flat" cmpd="sng" algn="ctr">
+                      <a:solidFill>
+                        <a:srgbClr val="DCE7E5"/>
+                      </a:solidFill>
+                      <a:prstDash val="solid"/>
+                      <a:round/>
+                      <a:headEnd type="none" w="med" len="med"/>
+                      <a:tailEnd type="none" w="med" len="med"/>
+                    </a:lnB>
+                    <a:solidFill>
+                      <a:srgbClr val="FFFFFF"/>
+                    </a:solidFill>
+                  </a:tcPr>
+                </a:tc>
+                <a:tc>
+                  <a:txBody>
+                    <a:bodyPr/>
+                    <a:lstStyle/>
+                    <a:p>
+                      <a:pPr algn="ctr" indent="0" marL="0">
+                        <a:buNone/>
+                      </a:pPr>
+                      <a:r>
+                        <a:rPr lang="en-US" sz="900" dirty="0">
+                          <a:solidFill>
+                            <a:srgbClr val="1D2B30"/>
+                          </a:solidFill>
+                          <a:latin typeface="Calibri" pitchFamily="34" charset="0"/>
+                          <a:ea typeface="Calibri" pitchFamily="34" charset="-122"/>
+                          <a:cs typeface="Calibri" pitchFamily="34" charset="-120"/>
+                        </a:rPr>
+                        <a:t>26%</a:t>
+                      </a:r>
+                      <a:endParaRPr lang="en-US" sz="900" dirty="0">
+                        <a:latin typeface="Calibri" charset="0"/>
+                        <a:ea typeface="Calibri" charset="0"/>
+                        <a:cs typeface="Calibri" charset="0"/>
+                      </a:endParaRPr>
+                    </a:p>
+                  </a:txBody>
+                  <a:tcPr marL="38100" marR="38100" marT="25400" marB="25400" anchor="ctr">
+                    <a:lnL w="6350" cap="flat" cmpd="sng" algn="ctr">
+                      <a:solidFill>
+                        <a:srgbClr val="DCE7E5"/>
+                      </a:solidFill>
+                      <a:prstDash val="solid"/>
+                      <a:round/>
+                      <a:headEnd type="none" w="med" len="med"/>
+                      <a:tailEnd type="none" w="med" len="med"/>
+                    </a:lnL>
+                    <a:lnR w="6350" cap="flat" cmpd="sng" algn="ctr">
+                      <a:solidFill>
+                        <a:srgbClr val="DCE7E5"/>
+                      </a:solidFill>
+                      <a:prstDash val="solid"/>
+                      <a:round/>
+                      <a:headEnd type="none" w="med" len="med"/>
+                      <a:tailEnd type="none" w="med" len="med"/>
+                    </a:lnR>
+                    <a:lnT w="6350" cap="flat" cmpd="sng" algn="ctr">
+                      <a:solidFill>
+                        <a:srgbClr val="DCE7E5"/>
+                      </a:solidFill>
+                      <a:prstDash val="solid"/>
+                      <a:round/>
+                      <a:headEnd type="none" w="med" len="med"/>
+                      <a:tailEnd type="none" w="med" len="med"/>
+                    </a:lnT>
+                    <a:lnB w="6350" cap="flat" cmpd="sng" algn="ctr">
+                      <a:solidFill>
+                        <a:srgbClr val="DCE7E5"/>
+                      </a:solidFill>
+                      <a:prstDash val="solid"/>
+                      <a:round/>
+                      <a:headEnd type="none" w="med" len="med"/>
+                      <a:tailEnd type="none" w="med" len="med"/>
+                    </a:lnB>
+                    <a:solidFill>
+                      <a:srgbClr val="FFFFFF"/>
+                    </a:solidFill>
+                  </a:tcPr>
+                </a:tc>
+                <a:tc>
+                  <a:txBody>
+                    <a:bodyPr/>
+                    <a:lstStyle/>
+                    <a:p>
+                      <a:pPr algn="ctr" indent="0" marL="0">
+                        <a:buNone/>
+                      </a:pPr>
+                      <a:r>
+                        <a:rPr lang="en-US" sz="900" dirty="0">
+                          <a:solidFill>
+                            <a:srgbClr val="1D2B30"/>
+                          </a:solidFill>
+                          <a:latin typeface="Calibri" pitchFamily="34" charset="0"/>
+                          <a:ea typeface="Calibri" pitchFamily="34" charset="-122"/>
+                          <a:cs typeface="Calibri" pitchFamily="34" charset="-120"/>
+                        </a:rPr>
+                        <a:t>2.6%</a:t>
+                      </a:r>
+                      <a:endParaRPr lang="en-US" sz="900" dirty="0">
+                        <a:latin typeface="Calibri" charset="0"/>
+                        <a:ea typeface="Calibri" charset="0"/>
+                        <a:cs typeface="Calibri" charset="0"/>
+                      </a:endParaRPr>
+                    </a:p>
+                  </a:txBody>
+                  <a:tcPr marL="38100" marR="38100" marT="25400" marB="25400" anchor="ctr">
+                    <a:lnL w="6350" cap="flat" cmpd="sng" algn="ctr">
+                      <a:solidFill>
+                        <a:srgbClr val="DCE7E5"/>
+                      </a:solidFill>
+                      <a:prstDash val="solid"/>
+                      <a:round/>
+                      <a:headEnd type="none" w="med" len="med"/>
+                      <a:tailEnd type="none" w="med" len="med"/>
+                    </a:lnL>
+                    <a:lnR w="6350" cap="flat" cmpd="sng" algn="ctr">
+                      <a:solidFill>
+                        <a:srgbClr val="DCE7E5"/>
+                      </a:solidFill>
+                      <a:prstDash val="solid"/>
+                      <a:round/>
+                      <a:headEnd type="none" w="med" len="med"/>
+                      <a:tailEnd type="none" w="med" len="med"/>
+                    </a:lnR>
+                    <a:lnT w="6350" cap="flat" cmpd="sng" algn="ctr">
+                      <a:solidFill>
+                        <a:srgbClr val="DCE7E5"/>
+                      </a:solidFill>
+                      <a:prstDash val="solid"/>
+                      <a:round/>
+                      <a:headEnd type="none" w="med" len="med"/>
+                      <a:tailEnd type="none" w="med" len="med"/>
+                    </a:lnT>
+                    <a:lnB w="6350" cap="flat" cmpd="sng" algn="ctr">
+                      <a:solidFill>
+                        <a:srgbClr val="DCE7E5"/>
+                      </a:solidFill>
+                      <a:prstDash val="solid"/>
+                      <a:round/>
+                      <a:headEnd type="none" w="med" len="med"/>
+                      <a:tailEnd type="none" w="med" len="med"/>
+                    </a:lnB>
+                    <a:solidFill>
+                      <a:srgbClr val="FFFFFF"/>
+                    </a:solidFill>
+                  </a:tcPr>
+                </a:tc>
+                <a:tc>
+                  <a:txBody>
+                    <a:bodyPr/>
+                    <a:lstStyle/>
+                    <a:p>
+                      <a:pPr algn="ctr" indent="0" marL="0">
+                        <a:buNone/>
+                      </a:pPr>
+                      <a:r>
+                        <a:rPr lang="en-US" sz="900" dirty="0">
+                          <a:solidFill>
+                            <a:srgbClr val="1D2B30"/>
+                          </a:solidFill>
+                          <a:latin typeface="Calibri" pitchFamily="34" charset="0"/>
+                          <a:ea typeface="Calibri" pitchFamily="34" charset="-122"/>
+                          <a:cs typeface="Calibri" pitchFamily="34" charset="-120"/>
+                        </a:rPr>
+                        <a:t>0.85</a:t>
+                      </a:r>
+                      <a:endParaRPr lang="en-US" sz="900" dirty="0">
+                        <a:latin typeface="Calibri" charset="0"/>
+                        <a:ea typeface="Calibri" charset="0"/>
+                        <a:cs typeface="Calibri" charset="0"/>
+                      </a:endParaRPr>
+                    </a:p>
+                  </a:txBody>
+                  <a:tcPr marL="38100" marR="38100" marT="25400" marB="25400" anchor="ctr">
+                    <a:lnL w="6350" cap="flat" cmpd="sng" algn="ctr">
+                      <a:solidFill>
+                        <a:srgbClr val="DCE7E5"/>
+                      </a:solidFill>
+                      <a:prstDash val="solid"/>
+                      <a:round/>
+                      <a:headEnd type="none" w="med" len="med"/>
+                      <a:tailEnd type="none" w="med" len="med"/>
+                    </a:lnL>
+                    <a:lnR w="6350" cap="flat" cmpd="sng" algn="ctr">
+                      <a:solidFill>
+                        <a:srgbClr val="DCE7E5"/>
+                      </a:solidFill>
+                      <a:prstDash val="solid"/>
+                      <a:round/>
+                      <a:headEnd type="none" w="med" len="med"/>
+                      <a:tailEnd type="none" w="med" len="med"/>
+                    </a:lnR>
+                    <a:lnT w="6350" cap="flat" cmpd="sng" algn="ctr">
+                      <a:solidFill>
+                        <a:srgbClr val="DCE7E5"/>
+                      </a:solidFill>
+                      <a:prstDash val="solid"/>
+                      <a:round/>
+                      <a:headEnd type="none" w="med" len="med"/>
+                      <a:tailEnd type="none" w="med" len="med"/>
+                    </a:lnT>
+                    <a:lnB w="6350" cap="flat" cmpd="sng" algn="ctr">
+                      <a:solidFill>
+                        <a:srgbClr val="DCE7E5"/>
+                      </a:solidFill>
+                      <a:prstDash val="solid"/>
+                      <a:round/>
+                      <a:headEnd type="none" w="med" len="med"/>
+                      <a:tailEnd type="none" w="med" len="med"/>
+                    </a:lnB>
+                    <a:solidFill>
+                      <a:srgbClr val="FFFFFF"/>
+                    </a:solidFill>
+                  </a:tcPr>
+                </a:tc>
+                <a:tc>
+                  <a:txBody>
+                    <a:bodyPr/>
+                    <a:lstStyle/>
+                    <a:p>
+                      <a:pPr algn="ctr" indent="0" marL="0">
+                        <a:buNone/>
+                      </a:pPr>
+                      <a:r>
+                        <a:rPr lang="en-US" sz="900" dirty="0">
+                          <a:solidFill>
+                            <a:srgbClr val="1D2B30"/>
+                          </a:solidFill>
+                          <a:latin typeface="Calibri" pitchFamily="34" charset="0"/>
+                          <a:ea typeface="Calibri" pitchFamily="34" charset="-122"/>
+                          <a:cs typeface="Calibri" pitchFamily="34" charset="-120"/>
+                        </a:rPr>
+                        <a:t>0.60</a:t>
+                      </a:r>
+                      <a:endParaRPr lang="en-US" sz="900" dirty="0">
+                        <a:latin typeface="Calibri" charset="0"/>
+                        <a:ea typeface="Calibri" charset="0"/>
+                        <a:cs typeface="Calibri" charset="0"/>
+                      </a:endParaRPr>
+                    </a:p>
+                  </a:txBody>
+                  <a:tcPr marL="38100" marR="38100" marT="25400" marB="25400" anchor="ctr">
+                    <a:lnL w="6350" cap="flat" cmpd="sng" algn="ctr">
+                      <a:solidFill>
+                        <a:srgbClr val="DCE7E5"/>
+                      </a:solidFill>
+                      <a:prstDash val="solid"/>
+                      <a:round/>
+                      <a:headEnd type="none" w="med" len="med"/>
+                      <a:tailEnd type="none" w="med" len="med"/>
+                    </a:lnL>
+                    <a:lnR w="6350" cap="flat" cmpd="sng" algn="ctr">
+                      <a:solidFill>
+                        <a:srgbClr val="DCE7E5"/>
+                      </a:solidFill>
+                      <a:prstDash val="solid"/>
+                      <a:round/>
+                      <a:headEnd type="none" w="med" len="med"/>
+                      <a:tailEnd type="none" w="med" len="med"/>
+                    </a:lnR>
+                    <a:lnT w="6350" cap="flat" cmpd="sng" algn="ctr">
+                      <a:solidFill>
+                        <a:srgbClr val="DCE7E5"/>
+                      </a:solidFill>
+                      <a:prstDash val="solid"/>
+                      <a:round/>
+                      <a:headEnd type="none" w="med" len="med"/>
+                      <a:tailEnd type="none" w="med" len="med"/>
+                    </a:lnT>
+                    <a:lnB w="6350" cap="flat" cmpd="sng" algn="ctr">
+                      <a:solidFill>
+                        <a:srgbClr val="DCE7E5"/>
+                      </a:solidFill>
+                      <a:prstDash val="solid"/>
+                      <a:round/>
+                      <a:headEnd type="none" w="med" len="med"/>
+                      <a:tailEnd type="none" w="med" len="med"/>
+                    </a:lnB>
+                    <a:solidFill>
+                      <a:srgbClr val="FFFFFF"/>
+                    </a:solidFill>
+                  </a:tcPr>
+                </a:tc>
+                <a:tc>
+                  <a:txBody>
+                    <a:bodyPr/>
+                    <a:lstStyle/>
+                    <a:p>
+                      <a:pPr algn="ctr" indent="0" marL="0">
+                        <a:buNone/>
+                      </a:pPr>
+                      <a:r>
+                        <a:rPr lang="en-US" sz="900" dirty="0">
+                          <a:solidFill>
+                            <a:srgbClr val="1D2B30"/>
+                          </a:solidFill>
+                          <a:latin typeface="Calibri" pitchFamily="34" charset="0"/>
+                          <a:ea typeface="Calibri" pitchFamily="34" charset="-122"/>
+                          <a:cs typeface="Calibri" pitchFamily="34" charset="-120"/>
+                        </a:rPr>
+                        <a:t>1.00</a:t>
+                      </a:r>
+                      <a:endParaRPr lang="en-US" sz="900" dirty="0">
+                        <a:latin typeface="Calibri" charset="0"/>
+                        <a:ea typeface="Calibri" charset="0"/>
+                        <a:cs typeface="Calibri" charset="0"/>
+                      </a:endParaRPr>
+                    </a:p>
+                  </a:txBody>
+                  <a:tcPr marL="38100" marR="38100" marT="25400" marB="25400" anchor="ctr">
+                    <a:lnL w="6350" cap="flat" cmpd="sng" algn="ctr">
+                      <a:solidFill>
+                        <a:srgbClr val="DCE7E5"/>
+                      </a:solidFill>
+                      <a:prstDash val="solid"/>
+                      <a:round/>
+                      <a:headEnd type="none" w="med" len="med"/>
+                      <a:tailEnd type="none" w="med" len="med"/>
+                    </a:lnL>
+                    <a:lnR w="6350" cap="flat" cmpd="sng" algn="ctr">
+                      <a:solidFill>
+                        <a:srgbClr val="DCE7E5"/>
+                      </a:solidFill>
+                      <a:prstDash val="solid"/>
+                      <a:round/>
+                      <a:headEnd type="none" w="med" len="med"/>
+                      <a:tailEnd type="none" w="med" len="med"/>
+                    </a:lnR>
+                    <a:lnT w="6350" cap="flat" cmpd="sng" algn="ctr">
+                      <a:solidFill>
+                        <a:srgbClr val="DCE7E5"/>
+                      </a:solidFill>
+                      <a:prstDash val="solid"/>
+                      <a:round/>
+                      <a:headEnd type="none" w="med" len="med"/>
+                      <a:tailEnd type="none" w="med" len="med"/>
+                    </a:lnT>
+                    <a:lnB w="6350" cap="flat" cmpd="sng" algn="ctr">
+                      <a:solidFill>
+                        <a:srgbClr val="DCE7E5"/>
+                      </a:solidFill>
+                      <a:prstDash val="solid"/>
+                      <a:round/>
+                      <a:headEnd type="none" w="med" len="med"/>
+                      <a:tailEnd type="none" w="med" len="med"/>
+                    </a:lnB>
+                    <a:solidFill>
+                      <a:srgbClr val="FFFFFF"/>
+                    </a:solidFill>
+                  </a:tcPr>
+                </a:tc>
+                <a:tc>
+                  <a:txBody>
+                    <a:bodyPr/>
+                    <a:lstStyle/>
+                    <a:p>
+                      <a:pPr algn="ctr" indent="0" marL="0">
+                        <a:buNone/>
+                      </a:pPr>
+                      <a:r>
+                        <a:rPr lang="en-US" sz="900" dirty="0">
+                          <a:solidFill>
+                            <a:srgbClr val="1D2B30"/>
+                          </a:solidFill>
+                          <a:latin typeface="Calibri" pitchFamily="34" charset="0"/>
+                          <a:ea typeface="Calibri" pitchFamily="34" charset="-122"/>
+                          <a:cs typeface="Calibri" pitchFamily="34" charset="-120"/>
+                        </a:rPr>
+                        <a:t>0.70</a:t>
+                      </a:r>
+                      <a:endParaRPr lang="en-US" sz="900" dirty="0">
+                        <a:latin typeface="Calibri" charset="0"/>
+                        <a:ea typeface="Calibri" charset="0"/>
+                        <a:cs typeface="Calibri" charset="0"/>
+                      </a:endParaRPr>
+                    </a:p>
+                  </a:txBody>
+                  <a:tcPr marL="38100" marR="38100" marT="25400" marB="25400" anchor="ctr">
+                    <a:lnL w="6350" cap="flat" cmpd="sng" algn="ctr">
+                      <a:solidFill>
+                        <a:srgbClr val="DCE7E5"/>
+                      </a:solidFill>
+                      <a:prstDash val="solid"/>
+                      <a:round/>
+                      <a:headEnd type="none" w="med" len="med"/>
+                      <a:tailEnd type="none" w="med" len="med"/>
+                    </a:lnL>
+                    <a:lnR w="6350" cap="flat" cmpd="sng" algn="ctr">
+                      <a:solidFill>
+                        <a:srgbClr val="DCE7E5"/>
+                      </a:solidFill>
+                      <a:prstDash val="solid"/>
+                      <a:round/>
+                      <a:headEnd type="none" w="med" len="med"/>
+                      <a:tailEnd type="none" w="med" len="med"/>
+                    </a:lnR>
+                    <a:lnT w="6350" cap="flat" cmpd="sng" algn="ctr">
+                      <a:solidFill>
+                        <a:srgbClr val="DCE7E5"/>
+                      </a:solidFill>
+                      <a:prstDash val="solid"/>
+                      <a:round/>
+                      <a:headEnd type="none" w="med" len="med"/>
+                      <a:tailEnd type="none" w="med" len="med"/>
+                    </a:lnT>
+                    <a:lnB w="6350" cap="flat" cmpd="sng" algn="ctr">
+                      <a:solidFill>
+                        <a:srgbClr val="DCE7E5"/>
+                      </a:solidFill>
+                      <a:prstDash val="solid"/>
+                      <a:round/>
+                      <a:headEnd type="none" w="med" len="med"/>
+                      <a:tailEnd type="none" w="med" len="med"/>
+                    </a:lnB>
+                    <a:solidFill>
+                      <a:srgbClr val="FFFFFF"/>
+                    </a:solidFill>
+                  </a:tcPr>
+                </a:tc>
+                <a:tc>
+                  <a:txBody>
+                    <a:bodyPr/>
+                    <a:lstStyle/>
+                    <a:p>
+                      <a:pPr algn="ctr" indent="0" marL="0">
+                        <a:buNone/>
+                      </a:pPr>
+                      <a:r>
+                        <a:rPr lang="en-US" sz="900" dirty="0">
+                          <a:solidFill>
+                            <a:srgbClr val="1D2B30"/>
+                          </a:solidFill>
+                          <a:latin typeface="Calibri" pitchFamily="34" charset="0"/>
+                          <a:ea typeface="Calibri" pitchFamily="34" charset="-122"/>
+                          <a:cs typeface="Calibri" pitchFamily="34" charset="-120"/>
+                        </a:rPr>
+                        <a:t>0.75</a:t>
+                      </a:r>
+                      <a:endParaRPr lang="en-US" sz="900" dirty="0">
+                        <a:latin typeface="Calibri" charset="0"/>
+                        <a:ea typeface="Calibri" charset="0"/>
+                        <a:cs typeface="Calibri" charset="0"/>
+                      </a:endParaRPr>
+                    </a:p>
+                  </a:txBody>
+                  <a:tcPr marL="38100" marR="38100" marT="25400" marB="25400" anchor="ctr">
+                    <a:lnL w="6350" cap="flat" cmpd="sng" algn="ctr">
+                      <a:solidFill>
+                        <a:srgbClr val="DCE7E5"/>
+                      </a:solidFill>
+                      <a:prstDash val="solid"/>
+                      <a:round/>
+                      <a:headEnd type="none" w="med" len="med"/>
+                      <a:tailEnd type="none" w="med" len="med"/>
+                    </a:lnL>
+                    <a:lnR w="6350" cap="flat" cmpd="sng" algn="ctr">
+                      <a:solidFill>
+                        <a:srgbClr val="DCE7E5"/>
+                      </a:solidFill>
+                      <a:prstDash val="solid"/>
+                      <a:round/>
+                      <a:headEnd type="none" w="med" len="med"/>
+                      <a:tailEnd type="none" w="med" len="med"/>
+                    </a:lnR>
+                    <a:lnT w="6350" cap="flat" cmpd="sng" algn="ctr">
+                      <a:solidFill>
+                        <a:srgbClr val="DCE7E5"/>
+                      </a:solidFill>
+                      <a:prstDash val="solid"/>
+                      <a:round/>
+                      <a:headEnd type="none" w="med" len="med"/>
+                      <a:tailEnd type="none" w="med" len="med"/>
+                    </a:lnT>
+                    <a:lnB w="6350" cap="flat" cmpd="sng" algn="ctr">
+                      <a:solidFill>
+                        <a:srgbClr val="DCE7E5"/>
+                      </a:solidFill>
+                      <a:prstDash val="solid"/>
+                      <a:round/>
+                      <a:headEnd type="none" w="med" len="med"/>
+                      <a:tailEnd type="none" w="med" len="med"/>
+                    </a:lnB>
+                    <a:solidFill>
+                      <a:srgbClr val="FFFFFF"/>
+                    </a:solidFill>
+                  </a:tcPr>
+                </a:tc>
+              </a:tr>
+              <a:tr h="274320">
+                <a:tc>
+                  <a:txBody>
+                    <a:bodyPr/>
+                    <a:lstStyle/>
+                    <a:p>
+                      <a:pPr algn="ctr" indent="0" marL="0">
+                        <a:buNone/>
+                      </a:pPr>
+                      <a:r>
+                        <a:rPr lang="en-US" sz="900" b="1" dirty="0">
+                          <a:solidFill>
+                            <a:srgbClr val="1D2B30"/>
+                          </a:solidFill>
+                          <a:latin typeface="Calibri" pitchFamily="34" charset="0"/>
+                          <a:ea typeface="Calibri" pitchFamily="34" charset="-122"/>
+                          <a:cs typeface="Calibri" pitchFamily="34" charset="-120"/>
+                        </a:rPr>
+                        <a:t>EWY US</a:t>
+                      </a:r>
+                      <a:endParaRPr lang="en-US" sz="900" dirty="0">
+                        <a:latin typeface="Calibri" charset="0"/>
+                        <a:ea typeface="Calibri" charset="0"/>
+                        <a:cs typeface="Calibri" charset="0"/>
+                      </a:endParaRPr>
+                    </a:p>
+                  </a:txBody>
+                  <a:tcPr marL="38100" marR="38100" marT="25400" marB="25400" anchor="ctr">
+                    <a:lnL w="6350" cap="flat" cmpd="sng" algn="ctr">
+                      <a:solidFill>
+                        <a:srgbClr val="DCE7E5"/>
+                      </a:solidFill>
+                      <a:prstDash val="solid"/>
+                      <a:round/>
+                      <a:headEnd type="none" w="med" len="med"/>
+                      <a:tailEnd type="none" w="med" len="med"/>
+                    </a:lnL>
+                    <a:lnR w="6350" cap="flat" cmpd="sng" algn="ctr">
+                      <a:solidFill>
+                        <a:srgbClr val="DCE7E5"/>
+                      </a:solidFill>
+                      <a:prstDash val="solid"/>
+                      <a:round/>
+                      <a:headEnd type="none" w="med" len="med"/>
+                      <a:tailEnd type="none" w="med" len="med"/>
+                    </a:lnR>
+                    <a:lnT w="6350" cap="flat" cmpd="sng" algn="ctr">
+                      <a:solidFill>
+                        <a:srgbClr val="DCE7E5"/>
+                      </a:solidFill>
+                      <a:prstDash val="solid"/>
+                      <a:round/>
+                      <a:headEnd type="none" w="med" len="med"/>
+                      <a:tailEnd type="none" w="med" len="med"/>
+                    </a:lnT>
+                    <a:lnB w="6350" cap="flat" cmpd="sng" algn="ctr">
+                      <a:solidFill>
+                        <a:srgbClr val="DCE7E5"/>
+                      </a:solidFill>
+                      <a:prstDash val="solid"/>
+                      <a:round/>
+                      <a:headEnd type="none" w="med" len="med"/>
+                      <a:tailEnd type="none" w="med" len="med"/>
+                    </a:lnB>
+                    <a:solidFill>
+                      <a:srgbClr val="FFFFFF"/>
+                    </a:solidFill>
+                  </a:tcPr>
+                </a:tc>
+                <a:tc>
+                  <a:txBody>
+                    <a:bodyPr/>
+                    <a:lstStyle/>
+                    <a:p>
+                      <a:pPr algn="ctr" indent="0" marL="0">
+                        <a:buNone/>
+                      </a:pPr>
+                      <a:r>
+                        <a:rPr lang="en-US" sz="900" dirty="0">
+                          <a:solidFill>
+                            <a:srgbClr val="1D2B30"/>
+                          </a:solidFill>
+                          <a:latin typeface="Calibri" pitchFamily="34" charset="0"/>
+                          <a:ea typeface="Calibri" pitchFamily="34" charset="-122"/>
+                          <a:cs typeface="Calibri" pitchFamily="34" charset="-120"/>
+                        </a:rPr>
+                        <a:t>20%</a:t>
                       </a:r>
                       <a:endParaRPr lang="en-US" sz="900" dirty="0">
                         <a:latin typeface="Calibri" charset="0"/>
@@ -24920,7 +26572,7 @@
                           <a:ea typeface="Calibri" pitchFamily="34" charset="-122"/>
                           <a:cs typeface="Calibri" pitchFamily="34" charset="-120"/>
                         </a:rPr>
-                        <a:t>25%</a:t>
+                        <a:t>1.2%</a:t>
                       </a:r>
                       <a:endParaRPr lang="en-US" sz="900" dirty="0">
                         <a:latin typeface="Calibri" charset="0"/>
@@ -24988,7 +26640,75 @@
                           <a:ea typeface="Calibri" pitchFamily="34" charset="-122"/>
                           <a:cs typeface="Calibri" pitchFamily="34" charset="-120"/>
                         </a:rPr>
-                        <a:t>2.0%</a:t>
+                        <a:t>0.80</a:t>
+                      </a:r>
+                      <a:endParaRPr lang="en-US" sz="900" dirty="0">
+                        <a:latin typeface="Calibri" charset="0"/>
+                        <a:ea typeface="Calibri" charset="0"/>
+                        <a:cs typeface="Calibri" charset="0"/>
+                      </a:endParaRPr>
+                    </a:p>
+                  </a:txBody>
+                  <a:tcPr marL="38100" marR="38100" marT="25400" marB="25400" anchor="ctr">
+                    <a:lnL w="6350" cap="flat" cmpd="sng" algn="ctr">
+                      <a:solidFill>
+                        <a:srgbClr val="DCE7E5"/>
+                      </a:solidFill>
+                      <a:prstDash val="solid"/>
+                      <a:round/>
+                      <a:headEnd type="none" w="med" len="med"/>
+                      <a:tailEnd type="none" w="med" len="med"/>
+                    </a:lnL>
+                    <a:lnR w="6350" cap="flat" cmpd="sng" algn="ctr">
+                      <a:solidFill>
+                        <a:srgbClr val="DCE7E5"/>
+                      </a:solidFill>
+                      <a:prstDash val="solid"/>
+                      <a:round/>
+                      <a:headEnd type="none" w="med" len="med"/>
+                      <a:tailEnd type="none" w="med" len="med"/>
+                    </a:lnR>
+                    <a:lnT w="6350" cap="flat" cmpd="sng" algn="ctr">
+                      <a:solidFill>
+                        <a:srgbClr val="DCE7E5"/>
+                      </a:solidFill>
+                      <a:prstDash val="solid"/>
+                      <a:round/>
+                      <a:headEnd type="none" w="med" len="med"/>
+                      <a:tailEnd type="none" w="med" len="med"/>
+                    </a:lnT>
+                    <a:lnB w="6350" cap="flat" cmpd="sng" algn="ctr">
+                      <a:solidFill>
+                        <a:srgbClr val="DCE7E5"/>
+                      </a:solidFill>
+                      <a:prstDash val="solid"/>
+                      <a:round/>
+                      <a:headEnd type="none" w="med" len="med"/>
+                      <a:tailEnd type="none" w="med" len="med"/>
+                    </a:lnB>
+                    <a:solidFill>
+                      <a:srgbClr val="FFFFFF"/>
+                    </a:solidFill>
+                  </a:tcPr>
+                </a:tc>
+                <a:tc>
+                  <a:txBody>
+                    <a:bodyPr/>
+                    <a:lstStyle/>
+                    <a:p>
+                      <a:pPr algn="ctr" indent="0" marL="0">
+                        <a:buNone/>
+                      </a:pPr>
+                      <a:r>
+                        <a:rPr lang="en-US" sz="900" dirty="0">
+                          <a:solidFill>
+                            <a:srgbClr val="1D2B30"/>
+                          </a:solidFill>
+                          <a:latin typeface="Calibri" pitchFamily="34" charset="0"/>
+                          <a:ea typeface="Calibri" pitchFamily="34" charset="-122"/>
+                          <a:cs typeface="Calibri" pitchFamily="34" charset="-120"/>
+                        </a:rPr>
+                        <a:t>0.55</a:t>
                       </a:r>
                       <a:endParaRPr lang="en-US" sz="900" dirty="0">
                         <a:latin typeface="Calibri" charset="0"/>
@@ -25262,7 +26982,7 @@
                           <a:ea typeface="Calibri" pitchFamily="34" charset="-122"/>
                           <a:cs typeface="Calibri" pitchFamily="34" charset="-120"/>
                         </a:rPr>
-                        <a:t>NKY</a:t>
+                        <a:t>00878 TT</a:t>
                       </a:r>
                       <a:endParaRPr lang="en-US" sz="900" dirty="0">
                         <a:latin typeface="Calibri" charset="0"/>
@@ -25330,7 +27050,7 @@
                           <a:ea typeface="Calibri" pitchFamily="34" charset="-122"/>
                           <a:cs typeface="Calibri" pitchFamily="34" charset="-120"/>
                         </a:rPr>
-                        <a:t>30%</a:t>
+                        <a:t>15%</a:t>
                       </a:r>
                       <a:endParaRPr lang="en-US" sz="900" dirty="0">
                         <a:latin typeface="Calibri" charset="0"/>
@@ -25398,7 +27118,7 @@
                           <a:ea typeface="Calibri" pitchFamily="34" charset="-122"/>
                           <a:cs typeface="Calibri" pitchFamily="34" charset="-120"/>
                         </a:rPr>
-                        <a:t>22%</a:t>
+                        <a:t>18%</a:t>
                       </a:r>
                       <a:endParaRPr lang="en-US" sz="900" dirty="0">
                         <a:latin typeface="Calibri" charset="0"/>
@@ -25466,7 +27186,7 @@
                           <a:ea typeface="Calibri" pitchFamily="34" charset="-122"/>
                           <a:cs typeface="Calibri" pitchFamily="34" charset="-120"/>
                         </a:rPr>
-                        <a:t>1.8%</a:t>
+                        <a:t>7.6%</a:t>
                       </a:r>
                       <a:endParaRPr lang="en-US" sz="900" dirty="0">
                         <a:latin typeface="Calibri" charset="0"/>
@@ -25602,6 +27322,142 @@
                           <a:ea typeface="Calibri" pitchFamily="34" charset="-122"/>
                           <a:cs typeface="Calibri" pitchFamily="34" charset="-120"/>
                         </a:rPr>
+                        <a:t>0.45</a:t>
+                      </a:r>
+                      <a:endParaRPr lang="en-US" sz="900" dirty="0">
+                        <a:latin typeface="Calibri" charset="0"/>
+                        <a:ea typeface="Calibri" charset="0"/>
+                        <a:cs typeface="Calibri" charset="0"/>
+                      </a:endParaRPr>
+                    </a:p>
+                  </a:txBody>
+                  <a:tcPr marL="38100" marR="38100" marT="25400" marB="25400" anchor="ctr">
+                    <a:lnL w="6350" cap="flat" cmpd="sng" algn="ctr">
+                      <a:solidFill>
+                        <a:srgbClr val="DCE7E5"/>
+                      </a:solidFill>
+                      <a:prstDash val="solid"/>
+                      <a:round/>
+                      <a:headEnd type="none" w="med" len="med"/>
+                      <a:tailEnd type="none" w="med" len="med"/>
+                    </a:lnL>
+                    <a:lnR w="6350" cap="flat" cmpd="sng" algn="ctr">
+                      <a:solidFill>
+                        <a:srgbClr val="DCE7E5"/>
+                      </a:solidFill>
+                      <a:prstDash val="solid"/>
+                      <a:round/>
+                      <a:headEnd type="none" w="med" len="med"/>
+                      <a:tailEnd type="none" w="med" len="med"/>
+                    </a:lnR>
+                    <a:lnT w="6350" cap="flat" cmpd="sng" algn="ctr">
+                      <a:solidFill>
+                        <a:srgbClr val="DCE7E5"/>
+                      </a:solidFill>
+                      <a:prstDash val="solid"/>
+                      <a:round/>
+                      <a:headEnd type="none" w="med" len="med"/>
+                      <a:tailEnd type="none" w="med" len="med"/>
+                    </a:lnT>
+                    <a:lnB w="6350" cap="flat" cmpd="sng" algn="ctr">
+                      <a:solidFill>
+                        <a:srgbClr val="DCE7E5"/>
+                      </a:solidFill>
+                      <a:prstDash val="solid"/>
+                      <a:round/>
+                      <a:headEnd type="none" w="med" len="med"/>
+                      <a:tailEnd type="none" w="med" len="med"/>
+                    </a:lnB>
+                    <a:solidFill>
+                      <a:srgbClr val="FFFFFF"/>
+                    </a:solidFill>
+                  </a:tcPr>
+                </a:tc>
+                <a:tc>
+                  <a:txBody>
+                    <a:bodyPr/>
+                    <a:lstStyle/>
+                    <a:p>
+                      <a:pPr algn="ctr" indent="0" marL="0">
+                        <a:buNone/>
+                      </a:pPr>
+                      <a:r>
+                        <a:rPr lang="en-US" sz="900" dirty="0">
+                          <a:solidFill>
+                            <a:srgbClr val="1D2B30"/>
+                          </a:solidFill>
+                          <a:latin typeface="Calibri" pitchFamily="34" charset="0"/>
+                          <a:ea typeface="Calibri" pitchFamily="34" charset="-122"/>
+                          <a:cs typeface="Calibri" pitchFamily="34" charset="-120"/>
+                        </a:rPr>
+                        <a:t>0.75</a:t>
+                      </a:r>
+                      <a:endParaRPr lang="en-US" sz="900" dirty="0">
+                        <a:latin typeface="Calibri" charset="0"/>
+                        <a:ea typeface="Calibri" charset="0"/>
+                        <a:cs typeface="Calibri" charset="0"/>
+                      </a:endParaRPr>
+                    </a:p>
+                  </a:txBody>
+                  <a:tcPr marL="38100" marR="38100" marT="25400" marB="25400" anchor="ctr">
+                    <a:lnL w="6350" cap="flat" cmpd="sng" algn="ctr">
+                      <a:solidFill>
+                        <a:srgbClr val="DCE7E5"/>
+                      </a:solidFill>
+                      <a:prstDash val="solid"/>
+                      <a:round/>
+                      <a:headEnd type="none" w="med" len="med"/>
+                      <a:tailEnd type="none" w="med" len="med"/>
+                    </a:lnL>
+                    <a:lnR w="6350" cap="flat" cmpd="sng" algn="ctr">
+                      <a:solidFill>
+                        <a:srgbClr val="DCE7E5"/>
+                      </a:solidFill>
+                      <a:prstDash val="solid"/>
+                      <a:round/>
+                      <a:headEnd type="none" w="med" len="med"/>
+                      <a:tailEnd type="none" w="med" len="med"/>
+                    </a:lnR>
+                    <a:lnT w="6350" cap="flat" cmpd="sng" algn="ctr">
+                      <a:solidFill>
+                        <a:srgbClr val="DCE7E5"/>
+                      </a:solidFill>
+                      <a:prstDash val="solid"/>
+                      <a:round/>
+                      <a:headEnd type="none" w="med" len="med"/>
+                      <a:tailEnd type="none" w="med" len="med"/>
+                    </a:lnT>
+                    <a:lnB w="6350" cap="flat" cmpd="sng" algn="ctr">
+                      <a:solidFill>
+                        <a:srgbClr val="DCE7E5"/>
+                      </a:solidFill>
+                      <a:prstDash val="solid"/>
+                      <a:round/>
+                      <a:headEnd type="none" w="med" len="med"/>
+                      <a:tailEnd type="none" w="med" len="med"/>
+                    </a:lnB>
+                    <a:solidFill>
+                      <a:srgbClr val="FFFFFF"/>
+                    </a:solidFill>
+                  </a:tcPr>
+                </a:tc>
+                <a:tc>
+                  <a:txBody>
+                    <a:bodyPr/>
+                    <a:lstStyle/>
+                    <a:p>
+                      <a:pPr algn="ctr" indent="0" marL="0">
+                        <a:buNone/>
+                      </a:pPr>
+                      <a:r>
+                        <a:rPr lang="en-US" sz="900" dirty="0">
+                          <a:solidFill>
+                            <a:srgbClr val="1D2B30"/>
+                          </a:solidFill>
+                          <a:latin typeface="Calibri" pitchFamily="34" charset="0"/>
+                          <a:ea typeface="Calibri" pitchFamily="34" charset="-122"/>
+                          <a:cs typeface="Calibri" pitchFamily="34" charset="-120"/>
+                        </a:rPr>
                         <a:t>0.55</a:t>
                       </a:r>
                       <a:endParaRPr lang="en-US" sz="900" dirty="0">
@@ -25734,8 +27590,8 @@
         </p:nvSpPr>
         <p:spPr>
           <a:xfrm>
-            <a:off x="411480" y="2697480"/>
-            <a:ext cx="4754880" cy="2011680"/>
+            <a:off x="411480" y="2971800"/>
+            <a:ext cx="4754880" cy="1828800"/>
           </a:xfrm>
           <a:prstGeom prst="rect">
             <a:avLst/>
@@ -25749,12 +27605,12 @@
           <a:p>
             <a:pPr indent="0" marL="0">
               <a:spcAft>
-                <a:spcPts val="400"/>
+                <a:spcPts val="300"/>
               </a:spcAft>
               <a:buNone/>
             </a:pPr>
             <a:r>
-              <a:rPr lang="en-US" sz="950" b="1" dirty="0">
+              <a:rPr lang="en-US" sz="900" b="1" dirty="0">
                 <a:solidFill>
                   <a:srgbClr val="0F8B8D"/>
                 </a:solidFill>
@@ -25766,12 +27622,12 @@
             </a:r>
             <a:pPr indent="0" marL="0">
               <a:spcAft>
-                <a:spcPts val="400"/>
+                <a:spcPts val="300"/>
               </a:spcAft>
               <a:buNone/>
             </a:pPr>
             <a:r>
-              <a:rPr lang="en-US" sz="950" dirty="0">
+              <a:rPr lang="en-US" sz="900" dirty="0">
                 <a:solidFill>
                   <a:srgbClr val="1D2B30"/>
                 </a:solidFill>
@@ -25779,19 +27635,19 @@
                 <a:ea typeface="Calibri" pitchFamily="34" charset="-122"/>
                 <a:cs typeface="Calibri" pitchFamily="34" charset="-120"/>
               </a:rPr>
-              <a:t>Correlated GBM for each index, 200,000 paths, quarterly steps. Risk-neutral drift = USD funding (linear interpolation of case grid) − dividend yield. Quanto adjustment ignored (assumed hedged by the desk; to be added with FX-equity correlations).</a:t>
+              <a:t>Correlated GBM for each ETF, 200,000 paths, quarterly steps. Risk-neutral drift = USD funding (linear interpolation of case grid) − dividend yield. Quanto adjustment ignored (assumed hedged by the desk; to be added with FX-equity correlations).</a:t>
             </a:r>
-            <a:endParaRPr lang="en-US" sz="950" dirty="0"/>
+            <a:endParaRPr lang="en-US" sz="900" dirty="0"/>
           </a:p>
           <a:p>
             <a:pPr indent="0" marL="0">
               <a:spcAft>
-                <a:spcPts val="400"/>
+                <a:spcPts val="300"/>
               </a:spcAft>
               <a:buNone/>
             </a:pPr>
             <a:r>
-              <a:rPr lang="en-US" sz="950" b="1" dirty="0">
+              <a:rPr lang="en-US" sz="900" b="1" dirty="0">
                 <a:solidFill>
                   <a:srgbClr val="0F8B8D"/>
                 </a:solidFill>
@@ -25803,12 +27659,12 @@
             </a:r>
             <a:pPr indent="0" marL="0">
               <a:spcAft>
-                <a:spcPts val="400"/>
+                <a:spcPts val="300"/>
               </a:spcAft>
               <a:buNone/>
             </a:pPr>
             <a:r>
-              <a:rPr lang="en-US" sz="950" dirty="0">
+              <a:rPr lang="en-US" sz="900" dirty="0">
                 <a:solidFill>
                   <a:srgbClr val="1D2B30"/>
                 </a:solidFill>
@@ -25818,17 +27674,17 @@
               </a:rPr>
               <a:t>USD funding grid from the case rules; 5Y discount factor 0.758.</a:t>
             </a:r>
-            <a:endParaRPr lang="en-US" sz="950" dirty="0"/>
+            <a:endParaRPr lang="en-US" sz="900" dirty="0"/>
           </a:p>
           <a:p>
             <a:pPr indent="0" marL="0">
               <a:spcAft>
-                <a:spcPts val="400"/>
+                <a:spcPts val="300"/>
               </a:spcAft>
               <a:buNone/>
             </a:pPr>
             <a:r>
-              <a:rPr lang="en-US" sz="950" b="1" dirty="0">
+              <a:rPr lang="en-US" sz="900" b="1" dirty="0">
                 <a:solidFill>
                   <a:srgbClr val="0F8B8D"/>
                 </a:solidFill>
@@ -25840,12 +27696,12 @@
             </a:r>
             <a:pPr indent="0" marL="0">
               <a:spcAft>
-                <a:spcPts val="400"/>
+                <a:spcPts val="300"/>
               </a:spcAft>
               <a:buNone/>
             </a:pPr>
             <a:r>
-              <a:rPr lang="en-US" sz="950" dirty="0">
+              <a:rPr lang="en-US" sz="900" dirty="0">
                 <a:solidFill>
                   <a:srgbClr val="1D2B30"/>
                 </a:solidFill>
@@ -25855,17 +27711,17 @@
               </a:rPr>
               <a:t>Bisection on coupon so that PV = 98% (2% hedging cost and margin).</a:t>
             </a:r>
-            <a:endParaRPr lang="en-US" sz="950" dirty="0"/>
+            <a:endParaRPr lang="en-US" sz="900" dirty="0"/>
           </a:p>
           <a:p>
             <a:pPr indent="0" marL="0">
               <a:spcAft>
-                <a:spcPts val="400"/>
+                <a:spcPts val="300"/>
               </a:spcAft>
               <a:buNone/>
             </a:pPr>
             <a:r>
-              <a:rPr lang="en-US" sz="950" b="1" dirty="0">
+              <a:rPr lang="en-US" sz="900" b="1" dirty="0">
                 <a:solidFill>
                   <a:srgbClr val="0F8B8D"/>
                 </a:solidFill>
@@ -25877,12 +27733,12 @@
             </a:r>
             <a:pPr indent="0" marL="0">
               <a:spcAft>
-                <a:spcPts val="400"/>
+                <a:spcPts val="300"/>
               </a:spcAft>
               <a:buNone/>
             </a:pPr>
             <a:r>
-              <a:rPr lang="en-US" sz="950" dirty="0">
+              <a:rPr lang="en-US" sz="900" dirty="0">
                 <a:solidFill>
                   <a:srgbClr val="1D2B30"/>
                 </a:solidFill>
@@ -25890,9 +27746,9 @@
                 <a:ea typeface="Calibri" pitchFamily="34" charset="-122"/>
                 <a:cs typeface="Calibri" pitchFamily="34" charset="-120"/>
               </a:rPr>
-              <a:t>Monthly Bloomberg history since 2015 for all three indices. Launch a hypothetical note every month, apply the same coupon, memory and autocall rules, and record coupons, life and IRR by launch year.</a:t>
+              <a:t>Monthly Bloomberg history since 2021 for all five ETFs (00878 and 3119 launched in 2020–21). Launch a hypothetical note every month, apply the same coupon, memory and autocall rules, and record coupons, life and IRR by launch year.</a:t>
             </a:r>
-            <a:endParaRPr lang="en-US" sz="950" dirty="0"/>
+            <a:endParaRPr lang="en-US" sz="900" dirty="0"/>
           </a:p>
         </p:txBody>
       </p:sp>
@@ -26146,7 +28002,7 @@
                           <a:ea typeface="Calibri" pitchFamily="34" charset="-122"/>
                           <a:cs typeface="Calibri" pitchFamily="34" charset="-120"/>
                         </a:rPr>
-                        <a:t>7.1%</a:t>
+                        <a:t>7.8%</a:t>
                       </a:r>
                       <a:endParaRPr lang="en-US" sz="900" dirty="0">
                         <a:latin typeface="Calibri" charset="0"/>
@@ -26284,7 +28140,7 @@
                           <a:ea typeface="Calibri" pitchFamily="34" charset="-122"/>
                           <a:cs typeface="Calibri" pitchFamily="34" charset="-120"/>
                         </a:rPr>
-                        <a:t>6.5%</a:t>
+                        <a:t>7.1%</a:t>
                       </a:r>
                       <a:endParaRPr lang="en-US" sz="900" dirty="0">
                         <a:latin typeface="Calibri" charset="0"/>
@@ -26422,7 +28278,7 @@
                           <a:ea typeface="Calibri" pitchFamily="34" charset="-122"/>
                           <a:cs typeface="Calibri" pitchFamily="34" charset="-120"/>
                         </a:rPr>
-                        <a:t>5.9%</a:t>
+                        <a:t>6.6%</a:t>
                       </a:r>
                       <a:endParaRPr lang="en-US" sz="900" dirty="0">
                         <a:latin typeface="Calibri" charset="0"/>
@@ -26560,7 +28416,7 @@
                           <a:ea typeface="Calibri" pitchFamily="34" charset="-122"/>
                           <a:cs typeface="Calibri" pitchFamily="34" charset="-120"/>
                         </a:rPr>
-                        <a:t>7.3%</a:t>
+                        <a:t>7.9%</a:t>
                       </a:r>
                       <a:endParaRPr lang="en-US" sz="900" dirty="0">
                         <a:latin typeface="Calibri" charset="0"/>
@@ -26698,7 +28554,7 @@
                           <a:ea typeface="Calibri" pitchFamily="34" charset="-122"/>
                           <a:cs typeface="Calibri" pitchFamily="34" charset="-120"/>
                         </a:rPr>
-                        <a:t>7.7%</a:t>
+                        <a:t>8.3%</a:t>
                       </a:r>
                       <a:endParaRPr lang="en-US" sz="900" dirty="0">
                         <a:latin typeface="Calibri" charset="0"/>
@@ -26836,7 +28692,7 @@
                           <a:ea typeface="Calibri" pitchFamily="34" charset="-122"/>
                           <a:cs typeface="Calibri" pitchFamily="34" charset="-120"/>
                         </a:rPr>
-                        <a:t>8.3%</a:t>
+                        <a:t>8.9%</a:t>
                       </a:r>
                       <a:endParaRPr lang="en-US" sz="900" dirty="0">
                         <a:latin typeface="Calibri" charset="0"/>
@@ -26974,7 +28830,7 @@
                           <a:ea typeface="Calibri" pitchFamily="34" charset="-122"/>
                           <a:cs typeface="Calibri" pitchFamily="34" charset="-120"/>
                         </a:rPr>
-                        <a:t>7.5% / 6.8%</a:t>
+                        <a:t>8.1% / 7.5%</a:t>
                       </a:r>
                       <a:endParaRPr lang="en-US" sz="900" dirty="0">
                         <a:latin typeface="Calibri" charset="0"/>
@@ -27514,7 +29370,7 @@
                           <a:ea typeface="Calibri" pitchFamily="34" charset="-122"/>
                           <a:cs typeface="Calibri" pitchFamily="34" charset="-120"/>
                         </a:rPr>
-                        <a:t>6.75% p.a. memory coupon</a:t>
+                        <a:t>7.20% p.a. memory coupon</a:t>
                       </a:r>
                       <a:endParaRPr lang="en-US" sz="900" dirty="0">
                         <a:latin typeface="Calibri" charset="0"/>
@@ -27788,7 +29644,7 @@
                           <a:ea typeface="Calibri" pitchFamily="34" charset="-122"/>
                           <a:cs typeface="Calibri" pitchFamily="34" charset="-120"/>
                         </a:rPr>
-                        <a:t>9.5%</a:t>
+                        <a:t>14.1%</a:t>
                       </a:r>
                       <a:endParaRPr lang="en-US" sz="900" dirty="0">
                         <a:latin typeface="Calibri" charset="0"/>
@@ -27926,7 +29782,7 @@
                           <a:ea typeface="Calibri" pitchFamily="34" charset="-122"/>
                           <a:cs typeface="Calibri" pitchFamily="34" charset="-120"/>
                         </a:rPr>
-                        <a:t>101% of basket gain at Y5</a:t>
+                        <a:t>85% of basket gain at Y5</a:t>
                       </a:r>
                       <a:endParaRPr lang="en-US" sz="900" dirty="0">
                         <a:latin typeface="Calibri" charset="0"/>
@@ -28124,7 +29980,7 @@
                 <a:ea typeface="Calibri" pitchFamily="34" charset="-122"/>
                 <a:cs typeface="Calibri" pitchFamily="34" charset="-120"/>
               </a:rPr>
-              <a:t>The snowball pays 9% but loses capital in ~10% of paths. The PPN keeps full protection with uncapped upside, but pays nothing unless the basket ends above 100% after 5 years and has no early exit. Our note sits between them: full protection, a coupon above the funding rate, and money usually back within ~2 years.</a:t>
+              <a:t>The snowball pays 9% but loses capital in ~14% of paths. The PPN keeps full protection with uncapped upside, but pays nothing unless the basket ends above 100% after 5 years and has no early exit. Our note sits between them: full protection, a coupon above the funding rate, and money usually back within ~2 years.</a:t>
             </a:r>
             <a:endParaRPr lang="en-US" sz="950" dirty="0"/>
           </a:p>
@@ -29290,7 +31146,7 @@
                 <a:ea typeface="Cambria" pitchFamily="34" charset="-122"/>
                 <a:cs typeface="Cambria" pitchFamily="34" charset="-120"/>
               </a:rPr>
-              <a:t>6.75%</a:t>
+              <a:t>7.20%</a:t>
             </a:r>
             <a:endParaRPr lang="en-US" sz="3800" dirty="0"/>
           </a:p>
@@ -29368,7 +31224,7 @@
                 <a:ea typeface="Calibri" pitchFamily="34" charset="-122"/>
                 <a:cs typeface="Calibri" pitchFamily="34" charset="-120"/>
               </a:rPr>
-              <a:t>1.69% each quarter the basket is ≥ 100%; missed coupons are paid later when it recovers</a:t>
+              <a:t>1.80% each quarter the basket is ≥ 100%; missed coupons are paid later when it recovers</a:t>
             </a:r>
             <a:endParaRPr lang="en-US" sz="1050" dirty="0"/>
           </a:p>
@@ -29578,7 +31434,7 @@
                 <a:ea typeface="Cambria" pitchFamily="34" charset="-122"/>
                 <a:cs typeface="Cambria" pitchFamily="34" charset="-120"/>
               </a:rPr>
-              <a:t>51%</a:t>
+              <a:t>49%</a:t>
             </a:r>
             <a:endParaRPr lang="en-US" sz="3800" dirty="0"/>
           </a:p>
@@ -29656,7 +31512,7 @@
                 <a:ea typeface="Calibri" pitchFamily="34" charset="-122"/>
                 <a:cs typeface="Calibri" pitchFamily="34" charset="-120"/>
               </a:rPr>
-              <a:t>Risk-neutral. 82% called within 5 years; expected life 2.11 years</a:t>
+              <a:t>Risk-neutral. 79% called within 5 years; expected life 2.22 years</a:t>
             </a:r>
             <a:endParaRPr lang="en-US" sz="1050" dirty="0"/>
           </a:p>
@@ -29723,7 +31579,7 @@
                 <a:ea typeface="Calibri" pitchFamily="34" charset="-122"/>
                 <a:cs typeface="Calibri" pitchFamily="34" charset="-120"/>
               </a:rPr>
-              <a:t> on a semiconductor-heavy basket of three real, Bloomberg-listed Asian indices (Taiwan TAIEX 40%, KOSPI 200 30%, Nikkei 225 30%). It gives the family the AI hardware layer (chips, memory and chip-making equipment) that complements, rather than duplicates, the infrastructure, power and property they already own. </a:t>
+              <a:t> on a basket of five Bloomberg-listed Asian ETFs: Global X Asia Semiconductor (3119 HK) 25%, Global X Japan Semiconductor (2644 JP) 20%, iShares MSCI Taiwan (EWT) 20%, iShares MSCI South Korea (EWY) 20% and Cathay Taiwan ESG High Dividend (00878 TT) 15%. It gives the family the AI hardware layer (chips, memory and chip-making equipment) that complements, rather than duplicates, the infrastructure, power and property they already own. </a:t>
             </a:r>
             <a:pPr indent="0" marL="0">
               <a:buNone/>
@@ -29737,7 +31593,7 @@
                 <a:ea typeface="Calibri" pitchFamily="34" charset="-122"/>
                 <a:cs typeface="Calibri" pitchFamily="34" charset="-120"/>
               </a:rPr>
-              <a:t>The family never loses capital at maturity, earns 6.75% a year in the 82% of paths where the basket gets back to its starting level, and gets 100% back in the rest. Fair value is 97.6%, so issuing at par leaves Natixis 2.4% for hedging and margin.</a:t>
+              <a:t>The family never loses capital at maturity, earns 7.20% a year in the 79% of paths where the basket gets back to its starting level, and gets 100% back in the rest. Fair value is 97.4%, so issuing at par leaves Natixis 2.6% for hedging and margin.</a:t>
             </a:r>
             <a:endParaRPr lang="en-US" sz="1150" dirty="0"/>
           </a:p>
@@ -30577,7 +32433,7 @@
                           <a:ea typeface="Calibri" pitchFamily="34" charset="-122"/>
                           <a:cs typeface="Calibri" pitchFamily="34" charset="-120"/>
                         </a:rPr>
-                        <a:t>6.75% p.a. coupon, above the 5.69% 5Y USD funding rate, in every path that autocalls; proceeds roll into the next note</a:t>
+                        <a:t>7.20% p.a. coupon, above the 5.69% 5Y USD funding rate, in every path that autocalls; proceeds roll into the next note</a:t>
                       </a:r>
                       <a:endParaRPr lang="en-US" sz="950" dirty="0">
                         <a:latin typeface="Calibri" charset="0"/>
@@ -31518,7 +33374,7 @@
                 <a:ea typeface="Calibri" pitchFamily="34" charset="-122"/>
                 <a:cs typeface="Calibri" pitchFamily="34" charset="-120"/>
               </a:rPr>
-              <a:t>Samsung and SK Hynix supply the high-bandwidth memory every AI accelerator needs; together a large share of KOSPI 200.</a:t>
+              <a:t>Samsung and SK hynix supply the high-bandwidth memory every AI accelerator needs; together ~44% of EWY.</a:t>
             </a:r>
             <a:endParaRPr lang="en-US" sz="950" dirty="0"/>
           </a:p>
@@ -31807,7 +33663,7 @@
                 <a:ea typeface="Calibri" pitchFamily="34" charset="-122"/>
                 <a:cs typeface="Calibri" pitchFamily="34" charset="-120"/>
               </a:rPr>
-              <a:t>Liquid and hedgeable</a:t>
+              <a:t>ESG sleeve</a:t>
             </a:r>
             <a:endParaRPr lang="en-US" sz="1150" dirty="0"/>
           </a:p>
@@ -31846,7 +33702,7 @@
                 <a:ea typeface="Calibri" pitchFamily="34" charset="-122"/>
                 <a:cs typeface="Calibri" pitchFamily="34" charset="-120"/>
               </a:rPr>
-              <a:t>TAIEX, KOSPI 200 and Nikkei 225 futures and options are among Asia's most traded, so Natixis can hedge cheaply and transparently.</a:t>
+              <a:t>00878 adds ESG-screened Taiwan leaders (MSCI ESG methodology) and a lower-volatility, high-dividend anchor to the basket.</a:t>
             </a:r>
             <a:endParaRPr lang="en-US" sz="950" dirty="0"/>
           </a:p>
@@ -31945,7 +33801,7 @@
                 <a:ea typeface="Calibri" pitchFamily="34" charset="-122"/>
                 <a:cs typeface="Calibri" pitchFamily="34" charset="-120"/>
               </a:rPr>
-              <a:t>High USD rates make the 5Y zero-coupon bond cheap (75.8%), so guaranteeing 100% back costs little. Asian equity volatility (basket ~21%) makes it likely the basket revisits 100%, which is what pays the 6.75% coupon.</a:t>
+              <a:t>High USD rates make the 5Y zero-coupon bond cheap (75.8%), so guaranteeing 100% back costs little. Asian equity volatility (basket ~26%) makes it likely the basket revisits 100%, which is what pays the 7.20% coupon.</a:t>
             </a:r>
             <a:endParaRPr lang="en-US" sz="1000" dirty="0"/>
           </a:p>
@@ -32094,7 +33950,7 @@
                 <a:ea typeface="Cambria" pitchFamily="34" charset="-122"/>
                 <a:cs typeface="Cambria" pitchFamily="34" charset="-120"/>
               </a:rPr>
-              <a:t>Underlying: a semiconductor-heavy basket of three Asian indices</a:t>
+              <a:t>Underlying: five Asian ETFs across the AI-hardware chain</a:t>
             </a:r>
             <a:endParaRPr lang="en-US" sz="2200" dirty="0"/>
           </a:p>
@@ -32133,7 +33989,7 @@
                 <a:ea typeface="Calibri" pitchFamily="34" charset="-122"/>
                 <a:cs typeface="Calibri" pitchFamily="34" charset="-120"/>
               </a:rPr>
-              <a:t>Bespoke weighted basket, USD quanto (FX risk sits with Natixis); all constituents searchable on Bloomberg</a:t>
+              <a:t>Bespoke weighted basket, USD payout (quanto on the HKD, JPY and TWD lines); all Bloomberg-listed</a:t>
             </a:r>
             <a:endParaRPr lang="en-US" sz="1250" dirty="0"/>
           </a:p>
@@ -32146,8 +34002,8 @@
           <p:nvPr/>
         </p:nvGraphicFramePr>
         <p:xfrm>
-          <a:off x="320040" y="1143000"/>
-          <a:ext cx="2743200" cy="2743200"/>
+          <a:off x="320040" y="1097280"/>
+          <a:ext cx="2560320" cy="2514600"/>
         </p:xfrm>
         <a:graphic xmlns:a="http://schemas.openxmlformats.org/drawingml/2006/main">
           <a:graphicData uri="http://schemas.openxmlformats.org/drawingml/2006/chart">
@@ -32163,7 +34019,7 @@
         </p:nvSpPr>
         <p:spPr>
           <a:xfrm>
-            <a:off x="1234440" y="2286000"/>
+            <a:off x="1143000" y="2130552"/>
             <a:ext cx="914400" cy="457200"/>
           </a:xfrm>
           <a:prstGeom prst="rect">
@@ -32202,7 +34058,7 @@
         </p:nvSpPr>
         <p:spPr>
           <a:xfrm>
-            <a:off x="548640" y="3977640"/>
+            <a:off x="457200" y="3730752"/>
             <a:ext cx="118872" cy="118872"/>
           </a:xfrm>
           <a:prstGeom prst="rect">
@@ -32227,8 +34083,8 @@
         </p:nvSpPr>
         <p:spPr>
           <a:xfrm>
-            <a:off x="731520" y="3941064"/>
-            <a:ext cx="2377440" cy="182880"/>
+            <a:off x="640080" y="3694176"/>
+            <a:ext cx="2560320" cy="182880"/>
           </a:xfrm>
           <a:prstGeom prst="rect">
             <a:avLst/>
@@ -32244,7 +34100,7 @@
               <a:buNone/>
             </a:pPr>
             <a:r>
-              <a:rPr lang="en-US" sz="900" dirty="0">
+              <a:rPr lang="en-US" sz="850" dirty="0">
                 <a:solidFill>
                   <a:srgbClr val="1D2B30"/>
                 </a:solidFill>
@@ -32252,9 +34108,9 @@
                 <a:ea typeface="Calibri" pitchFamily="34" charset="-122"/>
                 <a:cs typeface="Calibri" pitchFamily="34" charset="-120"/>
               </a:rPr>
-              <a:t>Taiwan TAIEX</a:t>
+              <a:t>Asia Semiconductor (3119 HK)</a:t>
             </a:r>
-            <a:endParaRPr lang="en-US" sz="900" dirty="0"/>
+            <a:endParaRPr lang="en-US" sz="850" dirty="0"/>
           </a:p>
         </p:txBody>
       </p:sp>
@@ -32266,7 +34122,7 @@
         </p:nvSpPr>
         <p:spPr>
           <a:xfrm>
-            <a:off x="548640" y="4160520"/>
+            <a:off x="457200" y="3922776"/>
             <a:ext cx="118872" cy="118872"/>
           </a:xfrm>
           <a:prstGeom prst="rect">
@@ -32291,8 +34147,8 @@
         </p:nvSpPr>
         <p:spPr>
           <a:xfrm>
-            <a:off x="731520" y="4123944"/>
-            <a:ext cx="2377440" cy="182880"/>
+            <a:off x="640080" y="3886200"/>
+            <a:ext cx="2560320" cy="182880"/>
           </a:xfrm>
           <a:prstGeom prst="rect">
             <a:avLst/>
@@ -32308,7 +34164,7 @@
               <a:buNone/>
             </a:pPr>
             <a:r>
-              <a:rPr lang="en-US" sz="900" dirty="0">
+              <a:rPr lang="en-US" sz="850" dirty="0">
                 <a:solidFill>
                   <a:srgbClr val="1D2B30"/>
                 </a:solidFill>
@@ -32316,9 +34172,9 @@
                 <a:ea typeface="Calibri" pitchFamily="34" charset="-122"/>
                 <a:cs typeface="Calibri" pitchFamily="34" charset="-120"/>
               </a:rPr>
-              <a:t>KOSPI 200</a:t>
+              <a:t>Japan Semiconductor (2644 JP)</a:t>
             </a:r>
-            <a:endParaRPr lang="en-US" sz="900" dirty="0"/>
+            <a:endParaRPr lang="en-US" sz="850" dirty="0"/>
           </a:p>
         </p:txBody>
       </p:sp>
@@ -32330,7 +34186,7 @@
         </p:nvSpPr>
         <p:spPr>
           <a:xfrm>
-            <a:off x="548640" y="4343400"/>
+            <a:off x="457200" y="4114800"/>
             <a:ext cx="118872" cy="118872"/>
           </a:xfrm>
           <a:prstGeom prst="rect">
@@ -32355,8 +34211,8 @@
         </p:nvSpPr>
         <p:spPr>
           <a:xfrm>
-            <a:off x="731520" y="4306824"/>
-            <a:ext cx="2377440" cy="182880"/>
+            <a:off x="640080" y="4078224"/>
+            <a:ext cx="2560320" cy="182880"/>
           </a:xfrm>
           <a:prstGeom prst="rect">
             <a:avLst/>
@@ -32372,7 +34228,7 @@
               <a:buNone/>
             </a:pPr>
             <a:r>
-              <a:rPr lang="en-US" sz="900" dirty="0">
+              <a:rPr lang="en-US" sz="850" dirty="0">
                 <a:solidFill>
                   <a:srgbClr val="1D2B30"/>
                 </a:solidFill>
@@ -32380,9 +34236,137 @@
                 <a:ea typeface="Calibri" pitchFamily="34" charset="-122"/>
                 <a:cs typeface="Calibri" pitchFamily="34" charset="-120"/>
               </a:rPr>
-              <a:t>Nikkei 225</a:t>
+              <a:t>iShares MSCI Taiwan (EWT)</a:t>
             </a:r>
-            <a:endParaRPr lang="en-US" sz="900" dirty="0"/>
+            <a:endParaRPr lang="en-US" sz="850" dirty="0"/>
+          </a:p>
+        </p:txBody>
+      </p:sp>
+      <p:sp>
+        <p:nvSpPr>
+          <p:cNvPr id="12" name="Shape 9"/>
+          <p:cNvSpPr/>
+          <p:nvPr/>
+        </p:nvSpPr>
+        <p:spPr>
+          <a:xfrm>
+            <a:off x="457200" y="4306824"/>
+            <a:ext cx="118872" cy="118872"/>
+          </a:xfrm>
+          <a:prstGeom prst="rect">
+            <a:avLst/>
+          </a:prstGeom>
+          <a:solidFill>
+            <a:srgbClr val="8FA6AA"/>
+          </a:solidFill>
+          <a:ln w="12700">
+            <a:solidFill>
+              <a:srgbClr val="8FA6AA"/>
+            </a:solidFill>
+            <a:prstDash val="solid"/>
+          </a:ln>
+        </p:spPr>
+      </p:sp>
+      <p:sp>
+        <p:nvSpPr>
+          <p:cNvPr id="13" name="Text 10"/>
+          <p:cNvSpPr txBox="1"/>
+          <p:nvPr/>
+        </p:nvSpPr>
+        <p:spPr>
+          <a:xfrm>
+            <a:off x="640080" y="4270248"/>
+            <a:ext cx="2560320" cy="182880"/>
+          </a:xfrm>
+          <a:prstGeom prst="rect">
+            <a:avLst/>
+          </a:prstGeom>
+          <a:noFill/>
+          <a:ln/>
+        </p:spPr>
+        <p:txBody>
+          <a:bodyPr wrap="square" lIns="0" tIns="0" rIns="0" bIns="0" rtlCol="0" anchor="t"/>
+          <a:lstStyle/>
+          <a:p>
+            <a:pPr indent="0" marL="0">
+              <a:buNone/>
+            </a:pPr>
+            <a:r>
+              <a:rPr lang="en-US" sz="850" dirty="0">
+                <a:solidFill>
+                  <a:srgbClr val="1D2B30"/>
+                </a:solidFill>
+                <a:latin typeface="Calibri" pitchFamily="34" charset="0"/>
+                <a:ea typeface="Calibri" pitchFamily="34" charset="-122"/>
+                <a:cs typeface="Calibri" pitchFamily="34" charset="-120"/>
+              </a:rPr>
+              <a:t>iShares MSCI South Korea (EWY)</a:t>
+            </a:r>
+            <a:endParaRPr lang="en-US" sz="850" dirty="0"/>
+          </a:p>
+        </p:txBody>
+      </p:sp>
+      <p:sp>
+        <p:nvSpPr>
+          <p:cNvPr id="14" name="Shape 11"/>
+          <p:cNvSpPr/>
+          <p:nvPr/>
+        </p:nvSpPr>
+        <p:spPr>
+          <a:xfrm>
+            <a:off x="457200" y="4498848"/>
+            <a:ext cx="118872" cy="118872"/>
+          </a:xfrm>
+          <a:prstGeom prst="rect">
+            <a:avLst/>
+          </a:prstGeom>
+          <a:solidFill>
+            <a:srgbClr val="5BA37A"/>
+          </a:solidFill>
+          <a:ln w="12700">
+            <a:solidFill>
+              <a:srgbClr val="5BA37A"/>
+            </a:solidFill>
+            <a:prstDash val="solid"/>
+          </a:ln>
+        </p:spPr>
+      </p:sp>
+      <p:sp>
+        <p:nvSpPr>
+          <p:cNvPr id="15" name="Text 12"/>
+          <p:cNvSpPr txBox="1"/>
+          <p:nvPr/>
+        </p:nvSpPr>
+        <p:spPr>
+          <a:xfrm>
+            <a:off x="640080" y="4462272"/>
+            <a:ext cx="2560320" cy="182880"/>
+          </a:xfrm>
+          <a:prstGeom prst="rect">
+            <a:avLst/>
+          </a:prstGeom>
+          <a:noFill/>
+          <a:ln/>
+        </p:spPr>
+        <p:txBody>
+          <a:bodyPr wrap="square" lIns="0" tIns="0" rIns="0" bIns="0" rtlCol="0" anchor="t"/>
+          <a:lstStyle/>
+          <a:p>
+            <a:pPr indent="0" marL="0">
+              <a:buNone/>
+            </a:pPr>
+            <a:r>
+              <a:rPr lang="en-US" sz="850" dirty="0">
+                <a:solidFill>
+                  <a:srgbClr val="1D2B30"/>
+                </a:solidFill>
+                <a:latin typeface="Calibri" pitchFamily="34" charset="0"/>
+                <a:ea typeface="Calibri" pitchFamily="34" charset="-122"/>
+                <a:cs typeface="Calibri" pitchFamily="34" charset="-120"/>
+              </a:rPr>
+              <a:t>Taiwan ESG High Dividend (00878 TT)</a:t>
+            </a:r>
+            <a:endParaRPr lang="en-US" sz="850" dirty="0"/>
           </a:p>
         </p:txBody>
       </p:sp>
@@ -32401,20 +34385,20 @@
           </p:nvPr>
         </p:nvGraphicFramePr>
         <p:xfrm>
-          <a:off x="3246120" y="1188720"/>
-          <a:ext cx="5440680" cy="914400"/>
+          <a:off x="3108960" y="1143000"/>
+          <a:ext cx="5577840" cy="914400"/>
         </p:xfrm>
         <a:graphic>
           <a:graphicData uri="http://schemas.openxmlformats.org/drawingml/2006/table">
             <a:tbl>
               <a:tblPr/>
               <a:tblGrid>
-                <a:gridCol w="1417320"/>
-                <a:gridCol w="411480"/>
-                <a:gridCol w="3108960"/>
-                <a:gridCol w="502920"/>
+                <a:gridCol w="1463040"/>
+                <a:gridCol w="384048"/>
+                <a:gridCol w="3246120"/>
+                <a:gridCol w="484632"/>
               </a:tblGrid>
-              <a:tr h="256032">
+              <a:tr h="237744">
                 <a:tc>
                   <a:txBody>
                     <a:bodyPr/>
@@ -32424,7 +34408,7 @@
                         <a:buNone/>
                       </a:pPr>
                       <a:r>
-                        <a:rPr lang="en-US" sz="900" b="1" dirty="0">
+                        <a:rPr lang="en-US" sz="850" b="1" dirty="0">
                           <a:solidFill>
                             <a:srgbClr val="FFFFFF"/>
                           </a:solidFill>
@@ -32432,16 +34416,16 @@
                           <a:ea typeface="Calibri" pitchFamily="34" charset="-122"/>
                           <a:cs typeface="Calibri" pitchFamily="34" charset="-120"/>
                         </a:rPr>
-                        <a:t>Index (Bloomberg)</a:t>
+                        <a:t>ETF (Bloomberg)</a:t>
                       </a:r>
-                      <a:endParaRPr lang="en-US" sz="900" dirty="0">
+                      <a:endParaRPr lang="en-US" sz="850" dirty="0">
                         <a:latin typeface="Calibri" charset="0"/>
                         <a:ea typeface="Calibri" charset="0"/>
                         <a:cs typeface="Calibri" charset="0"/>
                       </a:endParaRPr>
                     </a:p>
                   </a:txBody>
-                  <a:tcPr marL="63500" marR="63500" marT="25400" marB="25400" anchor="ctr">
+                  <a:tcPr marL="50800" marR="50800" marT="25400" marB="25400" anchor="ctr">
                     <a:lnL w="6350" cap="flat" cmpd="sng" algn="ctr">
                       <a:solidFill>
                         <a:srgbClr val="DCE7E5"/>
@@ -32492,7 +34476,7 @@
                         <a:buNone/>
                       </a:pPr>
                       <a:r>
-                        <a:rPr lang="en-US" sz="900" b="1" dirty="0">
+                        <a:rPr lang="en-US" sz="850" b="1" dirty="0">
                           <a:solidFill>
                             <a:srgbClr val="FFFFFF"/>
                           </a:solidFill>
@@ -32502,14 +34486,14 @@
                         </a:rPr>
                         <a:t>Wt</a:t>
                       </a:r>
-                      <a:endParaRPr lang="en-US" sz="900" dirty="0">
+                      <a:endParaRPr lang="en-US" sz="850" dirty="0">
                         <a:latin typeface="Calibri" charset="0"/>
                         <a:ea typeface="Calibri" charset="0"/>
                         <a:cs typeface="Calibri" charset="0"/>
                       </a:endParaRPr>
                     </a:p>
                   </a:txBody>
-                  <a:tcPr marL="63500" marR="63500" marT="25400" marB="25400" anchor="ctr">
+                  <a:tcPr marL="50800" marR="50800" marT="25400" marB="25400" anchor="ctr">
                     <a:lnL w="6350" cap="flat" cmpd="sng" algn="ctr">
                       <a:solidFill>
                         <a:srgbClr val="DCE7E5"/>
@@ -32560,7 +34544,7 @@
                         <a:buNone/>
                       </a:pPr>
                       <a:r>
-                        <a:rPr lang="en-US" sz="900" b="1" dirty="0">
+                        <a:rPr lang="en-US" sz="850" b="1" dirty="0">
                           <a:solidFill>
                             <a:srgbClr val="FFFFFF"/>
                           </a:solidFill>
@@ -32568,16 +34552,16 @@
                           <a:ea typeface="Calibri" pitchFamily="34" charset="-122"/>
                           <a:cs typeface="Calibri" pitchFamily="34" charset="-120"/>
                         </a:rPr>
-                        <a:t>Why it belongs (link to family)</a:t>
+                        <a:t>Role in the basket</a:t>
                       </a:r>
-                      <a:endParaRPr lang="en-US" sz="900" dirty="0">
+                      <a:endParaRPr lang="en-US" sz="850" dirty="0">
                         <a:latin typeface="Calibri" charset="0"/>
                         <a:ea typeface="Calibri" charset="0"/>
                         <a:cs typeface="Calibri" charset="0"/>
                       </a:endParaRPr>
                     </a:p>
                   </a:txBody>
-                  <a:tcPr marL="63500" marR="63500" marT="25400" marB="25400" anchor="ctr">
+                  <a:tcPr marL="50800" marR="50800" marT="25400" marB="25400" anchor="ctr">
                     <a:lnL w="6350" cap="flat" cmpd="sng" algn="ctr">
                       <a:solidFill>
                         <a:srgbClr val="DCE7E5"/>
@@ -32628,7 +34612,7 @@
                         <a:buNone/>
                       </a:pPr>
                       <a:r>
-                        <a:rPr lang="en-US" sz="900" b="1" dirty="0">
+                        <a:rPr lang="en-US" sz="850" b="1" dirty="0">
                           <a:solidFill>
                             <a:srgbClr val="FFFFFF"/>
                           </a:solidFill>
@@ -32638,14 +34622,14 @@
                         </a:rPr>
                         <a:t>Vol*</a:t>
                       </a:r>
-                      <a:endParaRPr lang="en-US" sz="900" dirty="0">
+                      <a:endParaRPr lang="en-US" sz="850" dirty="0">
                         <a:latin typeface="Calibri" charset="0"/>
                         <a:ea typeface="Calibri" charset="0"/>
                         <a:cs typeface="Calibri" charset="0"/>
                       </a:endParaRPr>
                     </a:p>
                   </a:txBody>
-                  <a:tcPr marL="63500" marR="63500" marT="25400" marB="25400" anchor="ctr">
+                  <a:tcPr marL="50800" marR="50800" marT="25400" marB="25400" anchor="ctr">
                     <a:lnL w="6350" cap="flat" cmpd="sng" algn="ctr">
                       <a:solidFill>
                         <a:srgbClr val="DCE7E5"/>
@@ -32688,7 +34672,7 @@
                   </a:tcPr>
                 </a:tc>
               </a:tr>
-              <a:tr h="731520">
+              <a:tr h="475488">
                 <a:tc>
                   <a:txBody>
                     <a:bodyPr/>
@@ -32698,7 +34682,7 @@
                         <a:buNone/>
                       </a:pPr>
                       <a:r>
-                        <a:rPr lang="en-US" sz="900" b="1" dirty="0">
+                        <a:rPr lang="en-US" sz="850" b="1" dirty="0">
                           <a:solidFill>
                             <a:srgbClr val="1D2B30"/>
                           </a:solidFill>
@@ -32706,37 +34690,16 @@
                           <a:ea typeface="Calibri" pitchFamily="34" charset="-122"/>
                           <a:cs typeface="Calibri" pitchFamily="34" charset="-120"/>
                         </a:rPr>
-                        <a:t>Taiwan TAIEX</a:t>
+                        <a:t>Asia Semiconductor (3119 HK)</a:t>
                       </a:r>
-                      <a:endParaRPr lang="en-US" sz="900" dirty="0">
-                        <a:latin typeface="Calibri" charset="0"/>
-                        <a:ea typeface="Calibri" charset="0"/>
-                        <a:cs typeface="Calibri" charset="0"/>
-                      </a:endParaRPr>
-                    </a:p>
-                    <a:p>
-                      <a:pPr indent="0" marL="0">
-                        <a:buNone/>
-                      </a:pPr>
-                      <a:r>
-                        <a:rPr lang="en-US" sz="900" b="1" dirty="0">
-                          <a:solidFill>
-                            <a:srgbClr val="1D2B30"/>
-                          </a:solidFill>
-                          <a:latin typeface="Calibri" pitchFamily="34" charset="0"/>
-                          <a:ea typeface="Calibri" pitchFamily="34" charset="-122"/>
-                          <a:cs typeface="Calibri" pitchFamily="34" charset="-120"/>
-                        </a:rPr>
-                        <a:t>TWSE Index</a:t>
-                      </a:r>
-                      <a:endParaRPr lang="en-US" sz="900" dirty="0">
+                      <a:endParaRPr lang="en-US" sz="850" dirty="0">
                         <a:latin typeface="Calibri" charset="0"/>
                         <a:ea typeface="Calibri" charset="0"/>
                         <a:cs typeface="Calibri" charset="0"/>
                       </a:endParaRPr>
                     </a:p>
                   </a:txBody>
-                  <a:tcPr marL="63500" marR="63500" marT="25400" marB="25400" anchor="ctr">
+                  <a:tcPr marL="50800" marR="50800" marT="25400" marB="25400" anchor="ctr">
                     <a:lnL w="6350" cap="flat" cmpd="sng" algn="ctr">
                       <a:solidFill>
                         <a:srgbClr val="DCE7E5"/>
@@ -32787,7 +34750,7 @@
                         <a:buNone/>
                       </a:pPr>
                       <a:r>
-                        <a:rPr lang="en-US" sz="900" dirty="0">
+                        <a:rPr lang="en-US" sz="850" dirty="0">
                           <a:solidFill>
                             <a:srgbClr val="1D2B30"/>
                           </a:solidFill>
@@ -32795,16 +34758,16 @@
                           <a:ea typeface="Calibri" pitchFamily="34" charset="-122"/>
                           <a:cs typeface="Calibri" pitchFamily="34" charset="-120"/>
                         </a:rPr>
-                        <a:t>40%</a:t>
+                        <a:t>25%</a:t>
                       </a:r>
-                      <a:endParaRPr lang="en-US" sz="900" dirty="0">
+                      <a:endParaRPr lang="en-US" sz="850" dirty="0">
                         <a:latin typeface="Calibri" charset="0"/>
                         <a:ea typeface="Calibri" charset="0"/>
                         <a:cs typeface="Calibri" charset="0"/>
                       </a:endParaRPr>
                     </a:p>
                   </a:txBody>
-                  <a:tcPr marL="63500" marR="63500" marT="25400" marB="25400" anchor="ctr">
+                  <a:tcPr marL="50800" marR="50800" marT="25400" marB="25400" anchor="ctr">
                     <a:lnL w="6350" cap="flat" cmpd="sng" algn="ctr">
                       <a:solidFill>
                         <a:srgbClr val="DCE7E5"/>
@@ -32855,7 +34818,7 @@
                         <a:buNone/>
                       </a:pPr>
                       <a:r>
-                        <a:rPr lang="en-US" sz="900" dirty="0">
+                        <a:rPr lang="en-US" sz="850" dirty="0">
                           <a:solidFill>
                             <a:srgbClr val="1D2B30"/>
                           </a:solidFill>
@@ -32863,16 +34826,16 @@
                           <a:ea typeface="Calibri" pitchFamily="34" charset="-122"/>
                           <a:cs typeface="Calibri" pitchFamily="34" charset="-120"/>
                         </a:rPr>
-                        <a:t>Foundry and chip supply chain (TSMC, MediaTek, ASE): the core of AI chip production, in the family's Greater China home region</a:t>
+                        <a:t>Pan-Asian chip leaders (40 names; TSMC, Samsung, SK hynix the largest): the core AI-hardware exposure</a:t>
                       </a:r>
-                      <a:endParaRPr lang="en-US" sz="900" dirty="0">
+                      <a:endParaRPr lang="en-US" sz="850" dirty="0">
                         <a:latin typeface="Calibri" charset="0"/>
                         <a:ea typeface="Calibri" charset="0"/>
                         <a:cs typeface="Calibri" charset="0"/>
                       </a:endParaRPr>
                     </a:p>
                   </a:txBody>
-                  <a:tcPr marL="63500" marR="63500" marT="25400" marB="25400" anchor="ctr">
+                  <a:tcPr marL="50800" marR="50800" marT="25400" marB="25400" anchor="ctr">
                     <a:lnL w="6350" cap="flat" cmpd="sng" algn="ctr">
                       <a:solidFill>
                         <a:srgbClr val="DCE7E5"/>
@@ -32923,7 +34886,7 @@
                         <a:buNone/>
                       </a:pPr>
                       <a:r>
-                        <a:rPr lang="en-US" sz="900" dirty="0">
+                        <a:rPr lang="en-US" sz="850" dirty="0">
                           <a:solidFill>
                             <a:srgbClr val="1D2B30"/>
                           </a:solidFill>
@@ -32931,16 +34894,16 @@
                           <a:ea typeface="Calibri" pitchFamily="34" charset="-122"/>
                           <a:cs typeface="Calibri" pitchFamily="34" charset="-120"/>
                         </a:rPr>
-                        <a:t>24%</a:t>
+                        <a:t>32%</a:t>
                       </a:r>
-                      <a:endParaRPr lang="en-US" sz="900" dirty="0">
+                      <a:endParaRPr lang="en-US" sz="850" dirty="0">
                         <a:latin typeface="Calibri" charset="0"/>
                         <a:ea typeface="Calibri" charset="0"/>
                         <a:cs typeface="Calibri" charset="0"/>
                       </a:endParaRPr>
                     </a:p>
                   </a:txBody>
-                  <a:tcPr marL="63500" marR="63500" marT="25400" marB="25400" anchor="ctr">
+                  <a:tcPr marL="50800" marR="50800" marT="25400" marB="25400" anchor="ctr">
                     <a:lnL w="6350" cap="flat" cmpd="sng" algn="ctr">
                       <a:solidFill>
                         <a:srgbClr val="DCE7E5"/>
@@ -32983,7 +34946,7 @@
                   </a:tcPr>
                 </a:tc>
               </a:tr>
-              <a:tr h="731520">
+              <a:tr h="475488">
                 <a:tc>
                   <a:txBody>
                     <a:bodyPr/>
@@ -32993,7 +34956,7 @@
                         <a:buNone/>
                       </a:pPr>
                       <a:r>
-                        <a:rPr lang="en-US" sz="900" b="1" dirty="0">
+                        <a:rPr lang="en-US" sz="850" b="1" dirty="0">
                           <a:solidFill>
                             <a:srgbClr val="1D2B30"/>
                           </a:solidFill>
@@ -33001,37 +34964,16 @@
                           <a:ea typeface="Calibri" pitchFamily="34" charset="-122"/>
                           <a:cs typeface="Calibri" pitchFamily="34" charset="-120"/>
                         </a:rPr>
-                        <a:t>KOSPI 200</a:t>
+                        <a:t>Japan Semiconductor (2644 JP)</a:t>
                       </a:r>
-                      <a:endParaRPr lang="en-US" sz="900" dirty="0">
-                        <a:latin typeface="Calibri" charset="0"/>
-                        <a:ea typeface="Calibri" charset="0"/>
-                        <a:cs typeface="Calibri" charset="0"/>
-                      </a:endParaRPr>
-                    </a:p>
-                    <a:p>
-                      <a:pPr indent="0" marL="0">
-                        <a:buNone/>
-                      </a:pPr>
-                      <a:r>
-                        <a:rPr lang="en-US" sz="900" b="1" dirty="0">
-                          <a:solidFill>
-                            <a:srgbClr val="1D2B30"/>
-                          </a:solidFill>
-                          <a:latin typeface="Calibri" pitchFamily="34" charset="0"/>
-                          <a:ea typeface="Calibri" pitchFamily="34" charset="-122"/>
-                          <a:cs typeface="Calibri" pitchFamily="34" charset="-120"/>
-                        </a:rPr>
-                        <a:t>KOSPI2 Index</a:t>
-                      </a:r>
-                      <a:endParaRPr lang="en-US" sz="900" dirty="0">
+                      <a:endParaRPr lang="en-US" sz="850" dirty="0">
                         <a:latin typeface="Calibri" charset="0"/>
                         <a:ea typeface="Calibri" charset="0"/>
                         <a:cs typeface="Calibri" charset="0"/>
                       </a:endParaRPr>
                     </a:p>
                   </a:txBody>
-                  <a:tcPr marL="63500" marR="63500" marT="25400" marB="25400" anchor="ctr">
+                  <a:tcPr marL="50800" marR="50800" marT="25400" marB="25400" anchor="ctr">
                     <a:lnL w="6350" cap="flat" cmpd="sng" algn="ctr">
                       <a:solidFill>
                         <a:srgbClr val="DCE7E5"/>
@@ -33082,7 +35024,7 @@
                         <a:buNone/>
                       </a:pPr>
                       <a:r>
-                        <a:rPr lang="en-US" sz="900" dirty="0">
+                        <a:rPr lang="en-US" sz="850" dirty="0">
                           <a:solidFill>
                             <a:srgbClr val="1D2B30"/>
                           </a:solidFill>
@@ -33090,16 +35032,16 @@
                           <a:ea typeface="Calibri" pitchFamily="34" charset="-122"/>
                           <a:cs typeface="Calibri" pitchFamily="34" charset="-120"/>
                         </a:rPr>
-                        <a:t>30%</a:t>
+                        <a:t>20%</a:t>
                       </a:r>
-                      <a:endParaRPr lang="en-US" sz="900" dirty="0">
+                      <a:endParaRPr lang="en-US" sz="850" dirty="0">
                         <a:latin typeface="Calibri" charset="0"/>
                         <a:ea typeface="Calibri" charset="0"/>
                         <a:cs typeface="Calibri" charset="0"/>
                       </a:endParaRPr>
                     </a:p>
                   </a:txBody>
-                  <a:tcPr marL="63500" marR="63500" marT="25400" marB="25400" anchor="ctr">
+                  <a:tcPr marL="50800" marR="50800" marT="25400" marB="25400" anchor="ctr">
                     <a:lnL w="6350" cap="flat" cmpd="sng" algn="ctr">
                       <a:solidFill>
                         <a:srgbClr val="DCE7E5"/>
@@ -33150,7 +35092,7 @@
                         <a:buNone/>
                       </a:pPr>
                       <a:r>
-                        <a:rPr lang="en-US" sz="900" dirty="0">
+                        <a:rPr lang="en-US" sz="850" dirty="0">
                           <a:solidFill>
                             <a:srgbClr val="1D2B30"/>
                           </a:solidFill>
@@ -33158,16 +35100,16 @@
                           <a:ea typeface="Calibri" pitchFamily="34" charset="-122"/>
                           <a:cs typeface="Calibri" pitchFamily="34" charset="-120"/>
                         </a:rPr>
-                        <a:t>Memory for AI (Samsung, SK Hynix): high-bandwidth memory inside every AI accelerator</a:t>
+                        <a:t>Japanese semiconductor stocks (FactSet Japan Semiconductor Index, e.g. Tokyo Electron, Advantest): the family's home market</a:t>
                       </a:r>
-                      <a:endParaRPr lang="en-US" sz="900" dirty="0">
+                      <a:endParaRPr lang="en-US" sz="850" dirty="0">
                         <a:latin typeface="Calibri" charset="0"/>
                         <a:ea typeface="Calibri" charset="0"/>
                         <a:cs typeface="Calibri" charset="0"/>
                       </a:endParaRPr>
                     </a:p>
                   </a:txBody>
-                  <a:tcPr marL="63500" marR="63500" marT="25400" marB="25400" anchor="ctr">
+                  <a:tcPr marL="50800" marR="50800" marT="25400" marB="25400" anchor="ctr">
                     <a:lnL w="6350" cap="flat" cmpd="sng" algn="ctr">
                       <a:solidFill>
                         <a:srgbClr val="DCE7E5"/>
@@ -33218,7 +35160,7 @@
                         <a:buNone/>
                       </a:pPr>
                       <a:r>
-                        <a:rPr lang="en-US" sz="900" dirty="0">
+                        <a:rPr lang="en-US" sz="850" dirty="0">
                           <a:solidFill>
                             <a:srgbClr val="1D2B30"/>
                           </a:solidFill>
@@ -33226,16 +35168,16 @@
                           <a:ea typeface="Calibri" pitchFamily="34" charset="-122"/>
                           <a:cs typeface="Calibri" pitchFamily="34" charset="-120"/>
                         </a:rPr>
-                        <a:t>25%</a:t>
+                        <a:t>38%</a:t>
                       </a:r>
-                      <a:endParaRPr lang="en-US" sz="900" dirty="0">
+                      <a:endParaRPr lang="en-US" sz="850" dirty="0">
                         <a:latin typeface="Calibri" charset="0"/>
                         <a:ea typeface="Calibri" charset="0"/>
                         <a:cs typeface="Calibri" charset="0"/>
                       </a:endParaRPr>
                     </a:p>
                   </a:txBody>
-                  <a:tcPr marL="63500" marR="63500" marT="25400" marB="25400" anchor="ctr">
+                  <a:tcPr marL="50800" marR="50800" marT="25400" marB="25400" anchor="ctr">
                     <a:lnL w="6350" cap="flat" cmpd="sng" algn="ctr">
                       <a:solidFill>
                         <a:srgbClr val="DCE7E5"/>
@@ -33278,7 +35220,7 @@
                   </a:tcPr>
                 </a:tc>
               </a:tr>
-              <a:tr h="731520">
+              <a:tr h="475488">
                 <a:tc>
                   <a:txBody>
                     <a:bodyPr/>
@@ -33288,7 +35230,7 @@
                         <a:buNone/>
                       </a:pPr>
                       <a:r>
-                        <a:rPr lang="en-US" sz="900" b="1" dirty="0">
+                        <a:rPr lang="en-US" sz="850" b="1" dirty="0">
                           <a:solidFill>
                             <a:srgbClr val="1D2B30"/>
                           </a:solidFill>
@@ -33296,37 +35238,16 @@
                           <a:ea typeface="Calibri" pitchFamily="34" charset="-122"/>
                           <a:cs typeface="Calibri" pitchFamily="34" charset="-120"/>
                         </a:rPr>
-                        <a:t>Nikkei 225</a:t>
+                        <a:t>iShares MSCI Taiwan (EWT)</a:t>
                       </a:r>
-                      <a:endParaRPr lang="en-US" sz="900" dirty="0">
-                        <a:latin typeface="Calibri" charset="0"/>
-                        <a:ea typeface="Calibri" charset="0"/>
-                        <a:cs typeface="Calibri" charset="0"/>
-                      </a:endParaRPr>
-                    </a:p>
-                    <a:p>
-                      <a:pPr indent="0" marL="0">
-                        <a:buNone/>
-                      </a:pPr>
-                      <a:r>
-                        <a:rPr lang="en-US" sz="900" b="1" dirty="0">
-                          <a:solidFill>
-                            <a:srgbClr val="1D2B30"/>
-                          </a:solidFill>
-                          <a:latin typeface="Calibri" pitchFamily="34" charset="0"/>
-                          <a:ea typeface="Calibri" pitchFamily="34" charset="-122"/>
-                          <a:cs typeface="Calibri" pitchFamily="34" charset="-120"/>
-                        </a:rPr>
-                        <a:t>NKY Index</a:t>
-                      </a:r>
-                      <a:endParaRPr lang="en-US" sz="900" dirty="0">
+                      <a:endParaRPr lang="en-US" sz="850" dirty="0">
                         <a:latin typeface="Calibri" charset="0"/>
                         <a:ea typeface="Calibri" charset="0"/>
                         <a:cs typeface="Calibri" charset="0"/>
                       </a:endParaRPr>
                     </a:p>
                   </a:txBody>
-                  <a:tcPr marL="63500" marR="63500" marT="25400" marB="25400" anchor="ctr">
+                  <a:tcPr marL="50800" marR="50800" marT="25400" marB="25400" anchor="ctr">
                     <a:lnL w="6350" cap="flat" cmpd="sng" algn="ctr">
                       <a:solidFill>
                         <a:srgbClr val="DCE7E5"/>
@@ -33377,7 +35298,7 @@
                         <a:buNone/>
                       </a:pPr>
                       <a:r>
-                        <a:rPr lang="en-US" sz="900" dirty="0">
+                        <a:rPr lang="en-US" sz="850" dirty="0">
                           <a:solidFill>
                             <a:srgbClr val="1D2B30"/>
                           </a:solidFill>
@@ -33385,16 +35306,16 @@
                           <a:ea typeface="Calibri" pitchFamily="34" charset="-122"/>
                           <a:cs typeface="Calibri" pitchFamily="34" charset="-120"/>
                         </a:rPr>
-                        <a:t>30%</a:t>
+                        <a:t>20%</a:t>
                       </a:r>
-                      <a:endParaRPr lang="en-US" sz="900" dirty="0">
+                      <a:endParaRPr lang="en-US" sz="850" dirty="0">
                         <a:latin typeface="Calibri" charset="0"/>
                         <a:ea typeface="Calibri" charset="0"/>
                         <a:cs typeface="Calibri" charset="0"/>
                       </a:endParaRPr>
                     </a:p>
                   </a:txBody>
-                  <a:tcPr marL="63500" marR="63500" marT="25400" marB="25400" anchor="ctr">
+                  <a:tcPr marL="50800" marR="50800" marT="25400" marB="25400" anchor="ctr">
                     <a:lnL w="6350" cap="flat" cmpd="sng" algn="ctr">
                       <a:solidFill>
                         <a:srgbClr val="DCE7E5"/>
@@ -33445,7 +35366,7 @@
                         <a:buNone/>
                       </a:pPr>
                       <a:r>
-                        <a:rPr lang="en-US" sz="900" dirty="0">
+                        <a:rPr lang="en-US" sz="850" dirty="0">
                           <a:solidFill>
                             <a:srgbClr val="1D2B30"/>
                           </a:solidFill>
@@ -33453,16 +35374,16 @@
                           <a:ea typeface="Calibri" pitchFamily="34" charset="-122"/>
                           <a:cs typeface="Calibri" pitchFamily="34" charset="-120"/>
                         </a:rPr>
-                        <a:t>Chip-making equipment and test (Tokyo Electron, Advantest): home market of the family's tech-infrastructure business</a:t>
+                        <a:t>Taiwan large caps (TSMC, MediaTek, Delta): AI foundry and server chain in the family's Greater China region</a:t>
                       </a:r>
-                      <a:endParaRPr lang="en-US" sz="900" dirty="0">
+                      <a:endParaRPr lang="en-US" sz="850" dirty="0">
                         <a:latin typeface="Calibri" charset="0"/>
                         <a:ea typeface="Calibri" charset="0"/>
                         <a:cs typeface="Calibri" charset="0"/>
                       </a:endParaRPr>
                     </a:p>
                   </a:txBody>
-                  <a:tcPr marL="63500" marR="63500" marT="25400" marB="25400" anchor="ctr">
+                  <a:tcPr marL="50800" marR="50800" marT="25400" marB="25400" anchor="ctr">
                     <a:lnL w="6350" cap="flat" cmpd="sng" algn="ctr">
                       <a:solidFill>
                         <a:srgbClr val="DCE7E5"/>
@@ -33513,7 +35434,7 @@
                         <a:buNone/>
                       </a:pPr>
                       <a:r>
-                        <a:rPr lang="en-US" sz="900" dirty="0">
+                        <a:rPr lang="en-US" sz="850" dirty="0">
                           <a:solidFill>
                             <a:srgbClr val="1D2B30"/>
                           </a:solidFill>
@@ -33521,16 +35442,564 @@
                           <a:ea typeface="Calibri" pitchFamily="34" charset="-122"/>
                           <a:cs typeface="Calibri" pitchFamily="34" charset="-120"/>
                         </a:rPr>
-                        <a:t>22%</a:t>
+                        <a:t>26%</a:t>
                       </a:r>
-                      <a:endParaRPr lang="en-US" sz="900" dirty="0">
+                      <a:endParaRPr lang="en-US" sz="850" dirty="0">
                         <a:latin typeface="Calibri" charset="0"/>
                         <a:ea typeface="Calibri" charset="0"/>
                         <a:cs typeface="Calibri" charset="0"/>
                       </a:endParaRPr>
                     </a:p>
                   </a:txBody>
-                  <a:tcPr marL="63500" marR="63500" marT="25400" marB="25400" anchor="ctr">
+                  <a:tcPr marL="50800" marR="50800" marT="25400" marB="25400" anchor="ctr">
+                    <a:lnL w="6350" cap="flat" cmpd="sng" algn="ctr">
+                      <a:solidFill>
+                        <a:srgbClr val="DCE7E5"/>
+                      </a:solidFill>
+                      <a:prstDash val="solid"/>
+                      <a:round/>
+                      <a:headEnd type="none" w="med" len="med"/>
+                      <a:tailEnd type="none" w="med" len="med"/>
+                    </a:lnL>
+                    <a:lnR w="6350" cap="flat" cmpd="sng" algn="ctr">
+                      <a:solidFill>
+                        <a:srgbClr val="DCE7E5"/>
+                      </a:solidFill>
+                      <a:prstDash val="solid"/>
+                      <a:round/>
+                      <a:headEnd type="none" w="med" len="med"/>
+                      <a:tailEnd type="none" w="med" len="med"/>
+                    </a:lnR>
+                    <a:lnT w="6350" cap="flat" cmpd="sng" algn="ctr">
+                      <a:solidFill>
+                        <a:srgbClr val="DCE7E5"/>
+                      </a:solidFill>
+                      <a:prstDash val="solid"/>
+                      <a:round/>
+                      <a:headEnd type="none" w="med" len="med"/>
+                      <a:tailEnd type="none" w="med" len="med"/>
+                    </a:lnT>
+                    <a:lnB w="6350" cap="flat" cmpd="sng" algn="ctr">
+                      <a:solidFill>
+                        <a:srgbClr val="DCE7E5"/>
+                      </a:solidFill>
+                      <a:prstDash val="solid"/>
+                      <a:round/>
+                      <a:headEnd type="none" w="med" len="med"/>
+                      <a:tailEnd type="none" w="med" len="med"/>
+                    </a:lnB>
+                    <a:solidFill>
+                      <a:srgbClr val="FFFFFF"/>
+                    </a:solidFill>
+                  </a:tcPr>
+                </a:tc>
+              </a:tr>
+              <a:tr h="475488">
+                <a:tc>
+                  <a:txBody>
+                    <a:bodyPr/>
+                    <a:lstStyle/>
+                    <a:p>
+                      <a:pPr indent="0" marL="0">
+                        <a:buNone/>
+                      </a:pPr>
+                      <a:r>
+                        <a:rPr lang="en-US" sz="850" b="1" dirty="0">
+                          <a:solidFill>
+                            <a:srgbClr val="1D2B30"/>
+                          </a:solidFill>
+                          <a:latin typeface="Calibri" pitchFamily="34" charset="0"/>
+                          <a:ea typeface="Calibri" pitchFamily="34" charset="-122"/>
+                          <a:cs typeface="Calibri" pitchFamily="34" charset="-120"/>
+                        </a:rPr>
+                        <a:t>iShares MSCI South Korea (EWY)</a:t>
+                      </a:r>
+                      <a:endParaRPr lang="en-US" sz="850" dirty="0">
+                        <a:latin typeface="Calibri" charset="0"/>
+                        <a:ea typeface="Calibri" charset="0"/>
+                        <a:cs typeface="Calibri" charset="0"/>
+                      </a:endParaRPr>
+                    </a:p>
+                  </a:txBody>
+                  <a:tcPr marL="50800" marR="50800" marT="25400" marB="25400" anchor="ctr">
+                    <a:lnL w="6350" cap="flat" cmpd="sng" algn="ctr">
+                      <a:solidFill>
+                        <a:srgbClr val="DCE7E5"/>
+                      </a:solidFill>
+                      <a:prstDash val="solid"/>
+                      <a:round/>
+                      <a:headEnd type="none" w="med" len="med"/>
+                      <a:tailEnd type="none" w="med" len="med"/>
+                    </a:lnL>
+                    <a:lnR w="6350" cap="flat" cmpd="sng" algn="ctr">
+                      <a:solidFill>
+                        <a:srgbClr val="DCE7E5"/>
+                      </a:solidFill>
+                      <a:prstDash val="solid"/>
+                      <a:round/>
+                      <a:headEnd type="none" w="med" len="med"/>
+                      <a:tailEnd type="none" w="med" len="med"/>
+                    </a:lnR>
+                    <a:lnT w="6350" cap="flat" cmpd="sng" algn="ctr">
+                      <a:solidFill>
+                        <a:srgbClr val="DCE7E5"/>
+                      </a:solidFill>
+                      <a:prstDash val="solid"/>
+                      <a:round/>
+                      <a:headEnd type="none" w="med" len="med"/>
+                      <a:tailEnd type="none" w="med" len="med"/>
+                    </a:lnT>
+                    <a:lnB w="6350" cap="flat" cmpd="sng" algn="ctr">
+                      <a:solidFill>
+                        <a:srgbClr val="DCE7E5"/>
+                      </a:solidFill>
+                      <a:prstDash val="solid"/>
+                      <a:round/>
+                      <a:headEnd type="none" w="med" len="med"/>
+                      <a:tailEnd type="none" w="med" len="med"/>
+                    </a:lnB>
+                    <a:solidFill>
+                      <a:srgbClr val="FFFFFF"/>
+                    </a:solidFill>
+                  </a:tcPr>
+                </a:tc>
+                <a:tc>
+                  <a:txBody>
+                    <a:bodyPr/>
+                    <a:lstStyle/>
+                    <a:p>
+                      <a:pPr indent="0" marL="0">
+                        <a:buNone/>
+                      </a:pPr>
+                      <a:r>
+                        <a:rPr lang="en-US" sz="850" dirty="0">
+                          <a:solidFill>
+                            <a:srgbClr val="1D2B30"/>
+                          </a:solidFill>
+                          <a:latin typeface="Calibri" pitchFamily="34" charset="0"/>
+                          <a:ea typeface="Calibri" pitchFamily="34" charset="-122"/>
+                          <a:cs typeface="Calibri" pitchFamily="34" charset="-120"/>
+                        </a:rPr>
+                        <a:t>20%</a:t>
+                      </a:r>
+                      <a:endParaRPr lang="en-US" sz="850" dirty="0">
+                        <a:latin typeface="Calibri" charset="0"/>
+                        <a:ea typeface="Calibri" charset="0"/>
+                        <a:cs typeface="Calibri" charset="0"/>
+                      </a:endParaRPr>
+                    </a:p>
+                  </a:txBody>
+                  <a:tcPr marL="50800" marR="50800" marT="25400" marB="25400" anchor="ctr">
+                    <a:lnL w="6350" cap="flat" cmpd="sng" algn="ctr">
+                      <a:solidFill>
+                        <a:srgbClr val="DCE7E5"/>
+                      </a:solidFill>
+                      <a:prstDash val="solid"/>
+                      <a:round/>
+                      <a:headEnd type="none" w="med" len="med"/>
+                      <a:tailEnd type="none" w="med" len="med"/>
+                    </a:lnL>
+                    <a:lnR w="6350" cap="flat" cmpd="sng" algn="ctr">
+                      <a:solidFill>
+                        <a:srgbClr val="DCE7E5"/>
+                      </a:solidFill>
+                      <a:prstDash val="solid"/>
+                      <a:round/>
+                      <a:headEnd type="none" w="med" len="med"/>
+                      <a:tailEnd type="none" w="med" len="med"/>
+                    </a:lnR>
+                    <a:lnT w="6350" cap="flat" cmpd="sng" algn="ctr">
+                      <a:solidFill>
+                        <a:srgbClr val="DCE7E5"/>
+                      </a:solidFill>
+                      <a:prstDash val="solid"/>
+                      <a:round/>
+                      <a:headEnd type="none" w="med" len="med"/>
+                      <a:tailEnd type="none" w="med" len="med"/>
+                    </a:lnT>
+                    <a:lnB w="6350" cap="flat" cmpd="sng" algn="ctr">
+                      <a:solidFill>
+                        <a:srgbClr val="DCE7E5"/>
+                      </a:solidFill>
+                      <a:prstDash val="solid"/>
+                      <a:round/>
+                      <a:headEnd type="none" w="med" len="med"/>
+                      <a:tailEnd type="none" w="med" len="med"/>
+                    </a:lnB>
+                    <a:solidFill>
+                      <a:srgbClr val="FFFFFF"/>
+                    </a:solidFill>
+                  </a:tcPr>
+                </a:tc>
+                <a:tc>
+                  <a:txBody>
+                    <a:bodyPr/>
+                    <a:lstStyle/>
+                    <a:p>
+                      <a:pPr indent="0" marL="0">
+                        <a:buNone/>
+                      </a:pPr>
+                      <a:r>
+                        <a:rPr lang="en-US" sz="850" dirty="0">
+                          <a:solidFill>
+                            <a:srgbClr val="1D2B30"/>
+                          </a:solidFill>
+                          <a:latin typeface="Calibri" pitchFamily="34" charset="0"/>
+                          <a:ea typeface="Calibri" pitchFamily="34" charset="-122"/>
+                          <a:cs typeface="Calibri" pitchFamily="34" charset="-120"/>
+                        </a:rPr>
+                        <a:t>Korea large caps (Samsung + SK hynix ~44%): high-bandwidth memory for AI</a:t>
+                      </a:r>
+                      <a:endParaRPr lang="en-US" sz="850" dirty="0">
+                        <a:latin typeface="Calibri" charset="0"/>
+                        <a:ea typeface="Calibri" charset="0"/>
+                        <a:cs typeface="Calibri" charset="0"/>
+                      </a:endParaRPr>
+                    </a:p>
+                  </a:txBody>
+                  <a:tcPr marL="50800" marR="50800" marT="25400" marB="25400" anchor="ctr">
+                    <a:lnL w="6350" cap="flat" cmpd="sng" algn="ctr">
+                      <a:solidFill>
+                        <a:srgbClr val="DCE7E5"/>
+                      </a:solidFill>
+                      <a:prstDash val="solid"/>
+                      <a:round/>
+                      <a:headEnd type="none" w="med" len="med"/>
+                      <a:tailEnd type="none" w="med" len="med"/>
+                    </a:lnL>
+                    <a:lnR w="6350" cap="flat" cmpd="sng" algn="ctr">
+                      <a:solidFill>
+                        <a:srgbClr val="DCE7E5"/>
+                      </a:solidFill>
+                      <a:prstDash val="solid"/>
+                      <a:round/>
+                      <a:headEnd type="none" w="med" len="med"/>
+                      <a:tailEnd type="none" w="med" len="med"/>
+                    </a:lnR>
+                    <a:lnT w="6350" cap="flat" cmpd="sng" algn="ctr">
+                      <a:solidFill>
+                        <a:srgbClr val="DCE7E5"/>
+                      </a:solidFill>
+                      <a:prstDash val="solid"/>
+                      <a:round/>
+                      <a:headEnd type="none" w="med" len="med"/>
+                      <a:tailEnd type="none" w="med" len="med"/>
+                    </a:lnT>
+                    <a:lnB w="6350" cap="flat" cmpd="sng" algn="ctr">
+                      <a:solidFill>
+                        <a:srgbClr val="DCE7E5"/>
+                      </a:solidFill>
+                      <a:prstDash val="solid"/>
+                      <a:round/>
+                      <a:headEnd type="none" w="med" len="med"/>
+                      <a:tailEnd type="none" w="med" len="med"/>
+                    </a:lnB>
+                    <a:solidFill>
+                      <a:srgbClr val="FFFFFF"/>
+                    </a:solidFill>
+                  </a:tcPr>
+                </a:tc>
+                <a:tc>
+                  <a:txBody>
+                    <a:bodyPr/>
+                    <a:lstStyle/>
+                    <a:p>
+                      <a:pPr indent="0" marL="0">
+                        <a:buNone/>
+                      </a:pPr>
+                      <a:r>
+                        <a:rPr lang="en-US" sz="850" dirty="0">
+                          <a:solidFill>
+                            <a:srgbClr val="1D2B30"/>
+                          </a:solidFill>
+                          <a:latin typeface="Calibri" pitchFamily="34" charset="0"/>
+                          <a:ea typeface="Calibri" pitchFamily="34" charset="-122"/>
+                          <a:cs typeface="Calibri" pitchFamily="34" charset="-120"/>
+                        </a:rPr>
+                        <a:t>30%</a:t>
+                      </a:r>
+                      <a:endParaRPr lang="en-US" sz="850" dirty="0">
+                        <a:latin typeface="Calibri" charset="0"/>
+                        <a:ea typeface="Calibri" charset="0"/>
+                        <a:cs typeface="Calibri" charset="0"/>
+                      </a:endParaRPr>
+                    </a:p>
+                  </a:txBody>
+                  <a:tcPr marL="50800" marR="50800" marT="25400" marB="25400" anchor="ctr">
+                    <a:lnL w="6350" cap="flat" cmpd="sng" algn="ctr">
+                      <a:solidFill>
+                        <a:srgbClr val="DCE7E5"/>
+                      </a:solidFill>
+                      <a:prstDash val="solid"/>
+                      <a:round/>
+                      <a:headEnd type="none" w="med" len="med"/>
+                      <a:tailEnd type="none" w="med" len="med"/>
+                    </a:lnL>
+                    <a:lnR w="6350" cap="flat" cmpd="sng" algn="ctr">
+                      <a:solidFill>
+                        <a:srgbClr val="DCE7E5"/>
+                      </a:solidFill>
+                      <a:prstDash val="solid"/>
+                      <a:round/>
+                      <a:headEnd type="none" w="med" len="med"/>
+                      <a:tailEnd type="none" w="med" len="med"/>
+                    </a:lnR>
+                    <a:lnT w="6350" cap="flat" cmpd="sng" algn="ctr">
+                      <a:solidFill>
+                        <a:srgbClr val="DCE7E5"/>
+                      </a:solidFill>
+                      <a:prstDash val="solid"/>
+                      <a:round/>
+                      <a:headEnd type="none" w="med" len="med"/>
+                      <a:tailEnd type="none" w="med" len="med"/>
+                    </a:lnT>
+                    <a:lnB w="6350" cap="flat" cmpd="sng" algn="ctr">
+                      <a:solidFill>
+                        <a:srgbClr val="DCE7E5"/>
+                      </a:solidFill>
+                      <a:prstDash val="solid"/>
+                      <a:round/>
+                      <a:headEnd type="none" w="med" len="med"/>
+                      <a:tailEnd type="none" w="med" len="med"/>
+                    </a:lnB>
+                    <a:solidFill>
+                      <a:srgbClr val="FFFFFF"/>
+                    </a:solidFill>
+                  </a:tcPr>
+                </a:tc>
+              </a:tr>
+              <a:tr h="475488">
+                <a:tc>
+                  <a:txBody>
+                    <a:bodyPr/>
+                    <a:lstStyle/>
+                    <a:p>
+                      <a:pPr indent="0" marL="0">
+                        <a:buNone/>
+                      </a:pPr>
+                      <a:r>
+                        <a:rPr lang="en-US" sz="850" b="1" dirty="0">
+                          <a:solidFill>
+                            <a:srgbClr val="1D2B30"/>
+                          </a:solidFill>
+                          <a:latin typeface="Calibri" pitchFamily="34" charset="0"/>
+                          <a:ea typeface="Calibri" pitchFamily="34" charset="-122"/>
+                          <a:cs typeface="Calibri" pitchFamily="34" charset="-120"/>
+                        </a:rPr>
+                        <a:t>Taiwan ESG High Dividend (00878 TT)</a:t>
+                      </a:r>
+                      <a:endParaRPr lang="en-US" sz="850" dirty="0">
+                        <a:latin typeface="Calibri" charset="0"/>
+                        <a:ea typeface="Calibri" charset="0"/>
+                        <a:cs typeface="Calibri" charset="0"/>
+                      </a:endParaRPr>
+                    </a:p>
+                  </a:txBody>
+                  <a:tcPr marL="50800" marR="50800" marT="25400" marB="25400" anchor="ctr">
+                    <a:lnL w="6350" cap="flat" cmpd="sng" algn="ctr">
+                      <a:solidFill>
+                        <a:srgbClr val="DCE7E5"/>
+                      </a:solidFill>
+                      <a:prstDash val="solid"/>
+                      <a:round/>
+                      <a:headEnd type="none" w="med" len="med"/>
+                      <a:tailEnd type="none" w="med" len="med"/>
+                    </a:lnL>
+                    <a:lnR w="6350" cap="flat" cmpd="sng" algn="ctr">
+                      <a:solidFill>
+                        <a:srgbClr val="DCE7E5"/>
+                      </a:solidFill>
+                      <a:prstDash val="solid"/>
+                      <a:round/>
+                      <a:headEnd type="none" w="med" len="med"/>
+                      <a:tailEnd type="none" w="med" len="med"/>
+                    </a:lnR>
+                    <a:lnT w="6350" cap="flat" cmpd="sng" algn="ctr">
+                      <a:solidFill>
+                        <a:srgbClr val="DCE7E5"/>
+                      </a:solidFill>
+                      <a:prstDash val="solid"/>
+                      <a:round/>
+                      <a:headEnd type="none" w="med" len="med"/>
+                      <a:tailEnd type="none" w="med" len="med"/>
+                    </a:lnT>
+                    <a:lnB w="6350" cap="flat" cmpd="sng" algn="ctr">
+                      <a:solidFill>
+                        <a:srgbClr val="DCE7E5"/>
+                      </a:solidFill>
+                      <a:prstDash val="solid"/>
+                      <a:round/>
+                      <a:headEnd type="none" w="med" len="med"/>
+                      <a:tailEnd type="none" w="med" len="med"/>
+                    </a:lnB>
+                    <a:solidFill>
+                      <a:srgbClr val="FFFFFF"/>
+                    </a:solidFill>
+                  </a:tcPr>
+                </a:tc>
+                <a:tc>
+                  <a:txBody>
+                    <a:bodyPr/>
+                    <a:lstStyle/>
+                    <a:p>
+                      <a:pPr indent="0" marL="0">
+                        <a:buNone/>
+                      </a:pPr>
+                      <a:r>
+                        <a:rPr lang="en-US" sz="850" dirty="0">
+                          <a:solidFill>
+                            <a:srgbClr val="1D2B30"/>
+                          </a:solidFill>
+                          <a:latin typeface="Calibri" pitchFamily="34" charset="0"/>
+                          <a:ea typeface="Calibri" pitchFamily="34" charset="-122"/>
+                          <a:cs typeface="Calibri" pitchFamily="34" charset="-120"/>
+                        </a:rPr>
+                        <a:t>15%</a:t>
+                      </a:r>
+                      <a:endParaRPr lang="en-US" sz="850" dirty="0">
+                        <a:latin typeface="Calibri" charset="0"/>
+                        <a:ea typeface="Calibri" charset="0"/>
+                        <a:cs typeface="Calibri" charset="0"/>
+                      </a:endParaRPr>
+                    </a:p>
+                  </a:txBody>
+                  <a:tcPr marL="50800" marR="50800" marT="25400" marB="25400" anchor="ctr">
+                    <a:lnL w="6350" cap="flat" cmpd="sng" algn="ctr">
+                      <a:solidFill>
+                        <a:srgbClr val="DCE7E5"/>
+                      </a:solidFill>
+                      <a:prstDash val="solid"/>
+                      <a:round/>
+                      <a:headEnd type="none" w="med" len="med"/>
+                      <a:tailEnd type="none" w="med" len="med"/>
+                    </a:lnL>
+                    <a:lnR w="6350" cap="flat" cmpd="sng" algn="ctr">
+                      <a:solidFill>
+                        <a:srgbClr val="DCE7E5"/>
+                      </a:solidFill>
+                      <a:prstDash val="solid"/>
+                      <a:round/>
+                      <a:headEnd type="none" w="med" len="med"/>
+                      <a:tailEnd type="none" w="med" len="med"/>
+                    </a:lnR>
+                    <a:lnT w="6350" cap="flat" cmpd="sng" algn="ctr">
+                      <a:solidFill>
+                        <a:srgbClr val="DCE7E5"/>
+                      </a:solidFill>
+                      <a:prstDash val="solid"/>
+                      <a:round/>
+                      <a:headEnd type="none" w="med" len="med"/>
+                      <a:tailEnd type="none" w="med" len="med"/>
+                    </a:lnT>
+                    <a:lnB w="6350" cap="flat" cmpd="sng" algn="ctr">
+                      <a:solidFill>
+                        <a:srgbClr val="DCE7E5"/>
+                      </a:solidFill>
+                      <a:prstDash val="solid"/>
+                      <a:round/>
+                      <a:headEnd type="none" w="med" len="med"/>
+                      <a:tailEnd type="none" w="med" len="med"/>
+                    </a:lnB>
+                    <a:solidFill>
+                      <a:srgbClr val="FFFFFF"/>
+                    </a:solidFill>
+                  </a:tcPr>
+                </a:tc>
+                <a:tc>
+                  <a:txBody>
+                    <a:bodyPr/>
+                    <a:lstStyle/>
+                    <a:p>
+                      <a:pPr indent="0" marL="0">
+                        <a:buNone/>
+                      </a:pPr>
+                      <a:r>
+                        <a:rPr lang="en-US" sz="850" dirty="0">
+                          <a:solidFill>
+                            <a:srgbClr val="1D2B30"/>
+                          </a:solidFill>
+                          <a:latin typeface="Calibri" pitchFamily="34" charset="0"/>
+                          <a:ea typeface="Calibri" pitchFamily="34" charset="-122"/>
+                          <a:cs typeface="Calibri" pitchFamily="34" charset="-120"/>
+                        </a:rPr>
+                        <a:t>ESG-screened Taiwan high-dividend leaders (Quanta, UMC, MediaTek): ESG sleeve and lower-volatility anchor</a:t>
+                      </a:r>
+                      <a:endParaRPr lang="en-US" sz="850" dirty="0">
+                        <a:latin typeface="Calibri" charset="0"/>
+                        <a:ea typeface="Calibri" charset="0"/>
+                        <a:cs typeface="Calibri" charset="0"/>
+                      </a:endParaRPr>
+                    </a:p>
+                  </a:txBody>
+                  <a:tcPr marL="50800" marR="50800" marT="25400" marB="25400" anchor="ctr">
+                    <a:lnL w="6350" cap="flat" cmpd="sng" algn="ctr">
+                      <a:solidFill>
+                        <a:srgbClr val="DCE7E5"/>
+                      </a:solidFill>
+                      <a:prstDash val="solid"/>
+                      <a:round/>
+                      <a:headEnd type="none" w="med" len="med"/>
+                      <a:tailEnd type="none" w="med" len="med"/>
+                    </a:lnL>
+                    <a:lnR w="6350" cap="flat" cmpd="sng" algn="ctr">
+                      <a:solidFill>
+                        <a:srgbClr val="DCE7E5"/>
+                      </a:solidFill>
+                      <a:prstDash val="solid"/>
+                      <a:round/>
+                      <a:headEnd type="none" w="med" len="med"/>
+                      <a:tailEnd type="none" w="med" len="med"/>
+                    </a:lnR>
+                    <a:lnT w="6350" cap="flat" cmpd="sng" algn="ctr">
+                      <a:solidFill>
+                        <a:srgbClr val="DCE7E5"/>
+                      </a:solidFill>
+                      <a:prstDash val="solid"/>
+                      <a:round/>
+                      <a:headEnd type="none" w="med" len="med"/>
+                      <a:tailEnd type="none" w="med" len="med"/>
+                    </a:lnT>
+                    <a:lnB w="6350" cap="flat" cmpd="sng" algn="ctr">
+                      <a:solidFill>
+                        <a:srgbClr val="DCE7E5"/>
+                      </a:solidFill>
+                      <a:prstDash val="solid"/>
+                      <a:round/>
+                      <a:headEnd type="none" w="med" len="med"/>
+                      <a:tailEnd type="none" w="med" len="med"/>
+                    </a:lnB>
+                    <a:solidFill>
+                      <a:srgbClr val="FFFFFF"/>
+                    </a:solidFill>
+                  </a:tcPr>
+                </a:tc>
+                <a:tc>
+                  <a:txBody>
+                    <a:bodyPr/>
+                    <a:lstStyle/>
+                    <a:p>
+                      <a:pPr indent="0" marL="0">
+                        <a:buNone/>
+                      </a:pPr>
+                      <a:r>
+                        <a:rPr lang="en-US" sz="850" dirty="0">
+                          <a:solidFill>
+                            <a:srgbClr val="1D2B30"/>
+                          </a:solidFill>
+                          <a:latin typeface="Calibri" pitchFamily="34" charset="0"/>
+                          <a:ea typeface="Calibri" pitchFamily="34" charset="-122"/>
+                          <a:cs typeface="Calibri" pitchFamily="34" charset="-120"/>
+                        </a:rPr>
+                        <a:t>18%</a:t>
+                      </a:r>
+                      <a:endParaRPr lang="en-US" sz="850" dirty="0">
+                        <a:latin typeface="Calibri" charset="0"/>
+                        <a:ea typeface="Calibri" charset="0"/>
+                        <a:cs typeface="Calibri" charset="0"/>
+                      </a:endParaRPr>
+                    </a:p>
+                  </a:txBody>
+                  <a:tcPr marL="50800" marR="50800" marT="25400" marB="25400" anchor="ctr">
                     <a:lnL w="6350" cap="flat" cmpd="sng" algn="ctr">
                       <a:solidFill>
                         <a:srgbClr val="DCE7E5"/>
@@ -33579,14 +36048,14 @@
       </p:graphicFrame>
       <p:sp>
         <p:nvSpPr>
-          <p:cNvPr id="13" name="Text 9"/>
+          <p:cNvPr id="17" name="Text 13"/>
           <p:cNvSpPr txBox="1"/>
           <p:nvPr/>
         </p:nvSpPr>
         <p:spPr>
           <a:xfrm>
-            <a:off x="3246120" y="3977640"/>
-            <a:ext cx="5440680" cy="548640"/>
+            <a:off x="3108960" y="3840480"/>
+            <a:ext cx="5577840" cy="548640"/>
           </a:xfrm>
           <a:prstGeom prst="rect">
             <a:avLst/>
@@ -33602,7 +36071,7 @@
               <a:buNone/>
             </a:pPr>
             <a:r>
-              <a:rPr lang="en-US" sz="1000" b="1" dirty="0">
+              <a:rPr lang="en-US" sz="950" b="1" dirty="0">
                 <a:solidFill>
                   <a:srgbClr val="0F8B8D"/>
                 </a:solidFill>
@@ -33616,7 +36085,7 @@
               <a:buNone/>
             </a:pPr>
             <a:r>
-              <a:rPr lang="en-US" sz="1000" dirty="0">
+              <a:rPr lang="en-US" sz="950" dirty="0">
                 <a:solidFill>
                   <a:srgbClr val="1D2B30"/>
                 </a:solidFill>
@@ -33624,15 +36093,15 @@
                 <a:ea typeface="Calibri" pitchFamily="34" charset="-122"/>
                 <a:cs typeface="Calibri" pitchFamily="34" charset="-120"/>
               </a:rPr>
-              <a:t>a shock to one market (e.g. Taiwan geopolitics) is cushioned by the other two. Basket vol is ~21% vs 22%–25% for each index alone, and correlation risk stays with the desk.</a:t>
+              <a:t>a shock to one ETF is cushioned by the others: basket vol ~26% vs 18%–38% alone. Overlap (TSMC, Samsung, SK hynix sit in several ETFs) keeps correlations high (0.45–0.85).</a:t>
             </a:r>
-            <a:endParaRPr lang="en-US" sz="1000" dirty="0"/>
+            <a:endParaRPr lang="en-US" sz="950" dirty="0"/>
           </a:p>
         </p:txBody>
       </p:sp>
       <p:sp>
         <p:nvSpPr>
-          <p:cNvPr id="14" name="Text 10"/>
+          <p:cNvPr id="18" name="Text 14"/>
           <p:cNvSpPr txBox="1"/>
           <p:nvPr/>
         </p:nvSpPr>
@@ -33663,7 +36132,7 @@
                 <a:ea typeface="Calibri" pitchFamily="34" charset="-122"/>
                 <a:cs typeface="Calibri" pitchFamily="34" charset="-120"/>
               </a:rPr>
-              <a:t>*Assumed 5Y implied vols for pricing. The draft's thematic indices (e.g. 'Greater China PropTech &amp; NLP') are not Bloomberg-listed, so we use real indices.</a:t>
+              <a:t>*Assumed 5Y vols. USD 5M/day ETF rule: EWY, EWT, 2644, 00878 pass; 3119 is borderline (~USD 4–5M/day), verify the 6-month average on Bloomberg. 00878 distributes ~7.6% a year, which lowers its price path.</a:t>
             </a:r>
             <a:endParaRPr lang="en-US" sz="800" dirty="0"/>
           </a:p>
@@ -33671,7 +36140,7 @@
       </p:sp>
       <p:sp>
         <p:nvSpPr>
-          <p:cNvPr id="15" name="Text 11"/>
+          <p:cNvPr id="19" name="Text 15"/>
           <p:cNvSpPr txBox="1"/>
           <p:nvPr/>
         </p:nvSpPr>
@@ -33773,7 +36242,7 @@
                 <a:ea typeface="Cambria" pitchFamily="34" charset="-122"/>
                 <a:cs typeface="Cambria" pitchFamily="34" charset="-120"/>
               </a:rPr>
-              <a:t>Term sheet: 5-year capital-protected autocallable, 6.75% coupon</a:t>
+              <a:t>Term sheet: 5-year capital-protected autocallable, 7.20% coupon</a:t>
             </a:r>
             <a:endParaRPr lang="en-US" sz="2200" dirty="0"/>
           </a:p>
@@ -34344,7 +36813,7 @@
                           <a:ea typeface="Calibri" pitchFamily="34" charset="-122"/>
                           <a:cs typeface="Calibri" pitchFamily="34" charset="-120"/>
                         </a:rPr>
-                        <a:t>Weighted basket of 3 Asian indices (slide 3)</a:t>
+                        <a:t>Weighted basket of 5 Asian ETFs (slide 3)</a:t>
                       </a:r>
                       <a:endParaRPr lang="en-US" sz="950" dirty="0">
                         <a:latin typeface="Calibri" charset="0"/>
@@ -34620,7 +37089,7 @@
                           <a:ea typeface="Calibri" pitchFamily="34" charset="-122"/>
                           <a:cs typeface="Calibri" pitchFamily="34" charset="-120"/>
                         </a:rPr>
-                        <a:t>6.75% p.a. (1.69% per quarter), paid if basket ≥ 100%</a:t>
+                        <a:t>7.20% p.a. (1.80% per quarter), paid if basket ≥ 100%</a:t>
                       </a:r>
                       <a:endParaRPr lang="en-US" sz="950" dirty="0">
                         <a:latin typeface="Calibri" charset="0"/>
@@ -35172,7 +37641,7 @@
                           <a:ea typeface="Calibri" pitchFamily="34" charset="-122"/>
                           <a:cs typeface="Calibri" pitchFamily="34" charset="-120"/>
                         </a:rPr>
-                        <a:t>100% / 97.6%</a:t>
+                        <a:t>100% / 97.4%</a:t>
                       </a:r>
                       <a:endParaRPr lang="en-US" sz="950" dirty="0">
                         <a:latin typeface="Calibri" charset="0"/>
@@ -35547,7 +38016,7 @@
                           <a:ea typeface="Calibri" pitchFamily="34" charset="-122"/>
                           <a:cs typeface="Calibri" pitchFamily="34" charset="-120"/>
                         </a:rPr>
-                        <a:t>6.3%</a:t>
+                        <a:t>7.3%</a:t>
                       </a:r>
                       <a:endParaRPr lang="en-US" sz="850" dirty="0">
                         <a:latin typeface="Calibri" charset="0"/>
@@ -35615,7 +38084,7 @@
                           <a:ea typeface="Calibri" pitchFamily="34" charset="-122"/>
                           <a:cs typeface="Calibri" pitchFamily="34" charset="-120"/>
                         </a:rPr>
-                        <a:t>11.4%</a:t>
+                        <a:t>15.7%</a:t>
                       </a:r>
                       <a:endParaRPr lang="en-US" sz="850" dirty="0">
                         <a:latin typeface="Calibri" charset="0"/>
@@ -35753,7 +38222,7 @@
                           <a:ea typeface="Calibri" pitchFamily="34" charset="-122"/>
                           <a:cs typeface="Calibri" pitchFamily="34" charset="-120"/>
                         </a:rPr>
-                        <a:t>7.8%</a:t>
+                        <a:t>9.9%</a:t>
                       </a:r>
                       <a:endParaRPr lang="en-US" sz="850" dirty="0">
                         <a:latin typeface="Calibri" charset="0"/>
@@ -35821,7 +38290,7 @@
                           <a:ea typeface="Calibri" pitchFamily="34" charset="-122"/>
                           <a:cs typeface="Calibri" pitchFamily="34" charset="-120"/>
                         </a:rPr>
-                        <a:t>11.4%</a:t>
+                        <a:t>15.7%</a:t>
                       </a:r>
                       <a:endParaRPr lang="en-US" sz="850" dirty="0">
                         <a:latin typeface="Calibri" charset="0"/>
@@ -35959,7 +38428,7 @@
                           <a:ea typeface="Calibri" pitchFamily="34" charset="-122"/>
                           <a:cs typeface="Calibri" pitchFamily="34" charset="-120"/>
                         </a:rPr>
-                        <a:t>10.7%</a:t>
+                        <a:t>13.6%</a:t>
                       </a:r>
                       <a:endParaRPr lang="en-US" sz="850" dirty="0">
                         <a:latin typeface="Calibri" charset="0"/>
@@ -36027,7 +38496,7 @@
                           <a:ea typeface="Calibri" pitchFamily="34" charset="-122"/>
                           <a:cs typeface="Calibri" pitchFamily="34" charset="-120"/>
                         </a:rPr>
-                        <a:t>9.5%</a:t>
+                        <a:t>14.1%</a:t>
                       </a:r>
                       <a:endParaRPr lang="en-US" sz="850" dirty="0">
                         <a:latin typeface="Calibri" charset="0"/>
@@ -36233,7 +38702,7 @@
                           <a:ea typeface="Calibri" pitchFamily="34" charset="-122"/>
                           <a:cs typeface="Calibri" pitchFamily="34" charset="-120"/>
                         </a:rPr>
-                        <a:t>1.2%</a:t>
+                        <a:t>1.1%</a:t>
                       </a:r>
                       <a:endParaRPr lang="en-US" sz="850" dirty="0">
                         <a:latin typeface="Calibri" charset="0"/>
@@ -36371,7 +38840,7 @@
                           <a:ea typeface="Calibri" pitchFamily="34" charset="-122"/>
                           <a:cs typeface="Calibri" pitchFamily="34" charset="-120"/>
                         </a:rPr>
-                        <a:t>7.1%</a:t>
+                        <a:t>7.8%</a:t>
                       </a:r>
                       <a:endParaRPr lang="en-US" sz="850" dirty="0">
                         <a:latin typeface="Calibri" charset="0"/>
@@ -36569,7 +39038,7 @@
                 <a:ea typeface="Calibri" pitchFamily="34" charset="-122"/>
                 <a:cs typeface="Calibri" pitchFamily="34" charset="-120"/>
               </a:rPr>
-              <a:t>The draft's 8.5% fixed coupon is worth 102.3% to the client, so Natixis cannot fund it. At-risk designs pay 6%–11% for a 10%–11% chance of losing capital. Cutting that to ~1% needs a 10%-vol basket and pays only 4.1%, below the 5.69% bond. Full protection prices at 7.1%; we offer 6.75%.</a:t>
+              <a:t>The draft's 8.5% fixed coupon is worth 100.4% to the client, so Natixis cannot fund it. At-risk designs pay 7%–14% for a 14%–16% chance of losing capital. Cutting that to ~1% needs a 10%-vol basket and pays only 4.1%, below the 5.69% bond. Full protection prices at 7.8%; we offer 7.20%.</a:t>
             </a:r>
             <a:endParaRPr lang="en-US" sz="950" dirty="0"/>
           </a:p>
@@ -37027,7 +39496,7 @@
                 <a:ea typeface="Calibri" pitchFamily="34" charset="-122"/>
                 <a:cs typeface="Calibri" pitchFamily="34" charset="-120"/>
               </a:rPr>
-              <a:t>called, 106.7% total</a:t>
+              <a:t>called, 107.2% total</a:t>
             </a:r>
             <a:endParaRPr lang="en-US" sz="950" dirty="0"/>
           </a:p>
@@ -37066,7 +39535,7 @@
                 <a:ea typeface="Calibri" pitchFamily="34" charset="-122"/>
                 <a:cs typeface="Calibri" pitchFamily="34" charset="-120"/>
               </a:rPr>
-              <a:t>P(called by Y1) 51%</a:t>
+              <a:t>P(called by Y1) 49%</a:t>
             </a:r>
             <a:endParaRPr lang="en-US" sz="850" dirty="0"/>
           </a:p>
@@ -37181,7 +39650,7 @@
                 <a:ea typeface="Calibri" pitchFamily="34" charset="-122"/>
                 <a:cs typeface="Calibri" pitchFamily="34" charset="-120"/>
               </a:rPr>
-              <a:t>called, 113.5% total</a:t>
+              <a:t>called, 114.4% total</a:t>
             </a:r>
             <a:endParaRPr lang="en-US" sz="950" dirty="0"/>
           </a:p>
@@ -37220,7 +39689,7 @@
                 <a:ea typeface="Calibri" pitchFamily="34" charset="-122"/>
                 <a:cs typeface="Calibri" pitchFamily="34" charset="-120"/>
               </a:rPr>
-              <a:t>P(called by Y2) 69%</a:t>
+              <a:t>P(called by Y2) 66%</a:t>
             </a:r>
             <a:endParaRPr lang="en-US" sz="850" dirty="0"/>
           </a:p>
@@ -37335,7 +39804,7 @@
                 <a:ea typeface="Calibri" pitchFamily="34" charset="-122"/>
                 <a:cs typeface="Calibri" pitchFamily="34" charset="-120"/>
               </a:rPr>
-              <a:t>called, 120.3% total</a:t>
+              <a:t>called, 121.6% total</a:t>
             </a:r>
             <a:endParaRPr lang="en-US" sz="950" dirty="0"/>
           </a:p>
@@ -37374,7 +39843,7 @@
                 <a:ea typeface="Calibri" pitchFamily="34" charset="-122"/>
                 <a:cs typeface="Calibri" pitchFamily="34" charset="-120"/>
               </a:rPr>
-              <a:t>P(called by Y3) 76%</a:t>
+              <a:t>P(called by Y3) 73%</a:t>
             </a:r>
             <a:endParaRPr lang="en-US" sz="850" dirty="0"/>
           </a:p>
@@ -37489,7 +39958,7 @@
                 <a:ea typeface="Calibri" pitchFamily="34" charset="-122"/>
                 <a:cs typeface="Calibri" pitchFamily="34" charset="-120"/>
               </a:rPr>
-              <a:t>called, 127.0% total</a:t>
+              <a:t>called, 128.8% total</a:t>
             </a:r>
             <a:endParaRPr lang="en-US" sz="950" dirty="0"/>
           </a:p>
@@ -37528,7 +39997,7 @@
                 <a:ea typeface="Calibri" pitchFamily="34" charset="-122"/>
                 <a:cs typeface="Calibri" pitchFamily="34" charset="-120"/>
               </a:rPr>
-              <a:t>P(called by Y4) 79%</a:t>
+              <a:t>P(called by Y4) 77%</a:t>
             </a:r>
             <a:endParaRPr lang="en-US" sz="850" dirty="0"/>
           </a:p>
@@ -37643,7 +40112,7 @@
                 <a:ea typeface="Calibri" pitchFamily="34" charset="-122"/>
                 <a:cs typeface="Calibri" pitchFamily="34" charset="-120"/>
               </a:rPr>
-              <a:t>called, 133.8% total</a:t>
+              <a:t>called, 136.0% total</a:t>
             </a:r>
             <a:endParaRPr lang="en-US" sz="950" dirty="0"/>
           </a:p>
@@ -37682,7 +40151,7 @@
                 <a:ea typeface="Calibri" pitchFamily="34" charset="-122"/>
                 <a:cs typeface="Calibri" pitchFamily="34" charset="-120"/>
               </a:rPr>
-              <a:t>P(called by Y5) 82%</a:t>
+              <a:t>P(called by Y5) 79%</a:t>
             </a:r>
             <a:endParaRPr lang="en-US" sz="850" dirty="0"/>
           </a:p>
@@ -37721,7 +40190,7 @@
                 <a:ea typeface="Calibri" pitchFamily="34" charset="-122"/>
                 <a:cs typeface="Calibri" pitchFamily="34" charset="-120"/>
               </a:rPr>
-              <a:t>Q1–Q3: coupon only (1.69% if basket ≥ 100%). From Q4: coupon plus autocall. Missed coupons are always caught up.</a:t>
+              <a:t>Q1–Q3: coupon only (1.80% if basket ≥ 100%). From Q4: coupon plus autocall. Missed coupons are always caught up.</a:t>
             </a:r>
             <a:endParaRPr lang="en-US" sz="900" dirty="0"/>
           </a:p>
@@ -37924,7 +40393,7 @@
                 <a:ea typeface="Calibri" pitchFamily="34" charset="-122"/>
                 <a:cs typeface="Calibri" pitchFamily="34" charset="-120"/>
               </a:rPr>
-              <a:t>82%</a:t>
+              <a:t>79%</a:t>
             </a:r>
             <a:pPr indent="0" marL="0">
               <a:buNone/>
@@ -38141,7 +40610,7 @@
                 <a:ea typeface="Calibri" pitchFamily="34" charset="-122"/>
                 <a:cs typeface="Calibri" pitchFamily="34" charset="-120"/>
               </a:rPr>
-              <a:t>7%</a:t>
+              <a:t>8%</a:t>
             </a:r>
             <a:pPr indent="0" marL="0">
               <a:buNone/>
@@ -38358,7 +40827,7 @@
                 <a:ea typeface="Calibri" pitchFamily="34" charset="-122"/>
                 <a:cs typeface="Calibri" pitchFamily="34" charset="-120"/>
               </a:rPr>
-              <a:t>11%</a:t>
+              <a:t>13%</a:t>
             </a:r>
             <a:pPr indent="0" marL="0">
               <a:buNone/>
@@ -38615,7 +41084,7 @@
                 <a:ea typeface="Calibri" pitchFamily="34" charset="-122"/>
                 <a:cs typeface="Calibri" pitchFamily="34" charset="-120"/>
               </a:rPr>
-              <a:t>Y1: 106.7%  (USD 106.7mn)</a:t>
+              <a:t>Y1: 107.2%  (USD 107.2mn)</a:t>
             </a:r>
             <a:endParaRPr lang="en-US" sz="900" dirty="0"/>
           </a:p>
@@ -38632,7 +41101,7 @@
                 <a:ea typeface="Calibri" pitchFamily="34" charset="-122"/>
                 <a:cs typeface="Calibri" pitchFamily="34" charset="-120"/>
               </a:rPr>
-              <a:t>Y2: 113.5%  (USD 113.5mn)</a:t>
+              <a:t>Y2: 114.4%  (USD 114.4mn)</a:t>
             </a:r>
             <a:endParaRPr lang="en-US" sz="900" dirty="0"/>
           </a:p>
@@ -38649,7 +41118,7 @@
                 <a:ea typeface="Calibri" pitchFamily="34" charset="-122"/>
                 <a:cs typeface="Calibri" pitchFamily="34" charset="-120"/>
               </a:rPr>
-              <a:t>Y3: 120.3%  (USD 120.3mn)</a:t>
+              <a:t>Y3: 121.6%  (USD 121.6mn)</a:t>
             </a:r>
             <a:endParaRPr lang="en-US" sz="900" dirty="0"/>
           </a:p>
@@ -38666,7 +41135,7 @@
                 <a:ea typeface="Calibri" pitchFamily="34" charset="-122"/>
                 <a:cs typeface="Calibri" pitchFamily="34" charset="-120"/>
               </a:rPr>
-              <a:t>Y4: 127.0%  (USD 127.0mn)</a:t>
+              <a:t>Y4: 128.8%  (USD 128.8mn)</a:t>
             </a:r>
             <a:endParaRPr lang="en-US" sz="900" dirty="0"/>
           </a:p>
@@ -38683,7 +41152,7 @@
                 <a:ea typeface="Calibri" pitchFamily="34" charset="-122"/>
                 <a:cs typeface="Calibri" pitchFamily="34" charset="-120"/>
               </a:rPr>
-              <a:t>Y5: 133.8%  (USD 133.8mn)</a:t>
+              <a:t>Y5: 136.0%  (USD 136.0mn)</a:t>
             </a:r>
             <a:endParaRPr lang="en-US" sz="900" dirty="0"/>
           </a:p>
@@ -38866,7 +41335,7 @@
                 <a:ea typeface="Calibri" pitchFamily="34" charset="-122"/>
                 <a:cs typeface="Calibri" pitchFamily="34" charset="-120"/>
               </a:rPr>
-              <a:t>≥ 100%: 133.8% (principal + all 20 coupons via memory)</a:t>
+              <a:t>≥ 100%: 136.0% (principal + all 20 coupons via memory)</a:t>
             </a:r>
             <a:endParaRPr lang="en-US" sz="850" dirty="0"/>
           </a:p>

--- a/deck/Asian-Digital-Autocallable-Note.pptx
+++ b/deck/Asian-Digital-Autocallable-Note.pptx
@@ -2964,244 +2964,244 @@
                   <c:v>100</c:v>
                 </c:pt>
                 <c:pt idx="61">
-                  <c:v>100.852</c:v>
+                  <c:v>100.874</c:v>
                 </c:pt>
                 <c:pt idx="62">
-                  <c:v>101.704</c:v>
+                  <c:v>101.748</c:v>
                 </c:pt>
                 <c:pt idx="63">
-                  <c:v>102.556</c:v>
+                  <c:v>102.622</c:v>
                 </c:pt>
                 <c:pt idx="64">
-                  <c:v>103.408</c:v>
+                  <c:v>103.496</c:v>
                 </c:pt>
                 <c:pt idx="65">
-                  <c:v>104.26</c:v>
+                  <c:v>104.37</c:v>
                 </c:pt>
                 <c:pt idx="66">
-                  <c:v>105.112</c:v>
+                  <c:v>105.244</c:v>
                 </c:pt>
                 <c:pt idx="67">
-                  <c:v>105.964</c:v>
+                  <c:v>106.118</c:v>
                 </c:pt>
                 <c:pt idx="68">
-                  <c:v>106.816</c:v>
+                  <c:v>106.992</c:v>
                 </c:pt>
                 <c:pt idx="69">
-                  <c:v>107.668</c:v>
+                  <c:v>107.866</c:v>
                 </c:pt>
                 <c:pt idx="70">
-                  <c:v>108.52</c:v>
+                  <c:v>108.74</c:v>
                 </c:pt>
                 <c:pt idx="71">
-                  <c:v>109.372</c:v>
+                  <c:v>109.614</c:v>
                 </c:pt>
                 <c:pt idx="72">
-                  <c:v>110.224</c:v>
+                  <c:v>110.488</c:v>
                 </c:pt>
                 <c:pt idx="73">
-                  <c:v>111.076</c:v>
+                  <c:v>111.362</c:v>
                 </c:pt>
                 <c:pt idx="74">
-                  <c:v>111.928</c:v>
+                  <c:v>112.236</c:v>
                 </c:pt>
                 <c:pt idx="75">
-                  <c:v>112.78</c:v>
+                  <c:v>113.11</c:v>
                 </c:pt>
                 <c:pt idx="76">
-                  <c:v>113.632</c:v>
+                  <c:v>113.984</c:v>
                 </c:pt>
                 <c:pt idx="77">
-                  <c:v>114.484</c:v>
+                  <c:v>114.858</c:v>
                 </c:pt>
                 <c:pt idx="78">
-                  <c:v>115.336</c:v>
+                  <c:v>115.732</c:v>
                 </c:pt>
                 <c:pt idx="79">
-                  <c:v>116.188</c:v>
+                  <c:v>116.606</c:v>
                 </c:pt>
                 <c:pt idx="80">
-                  <c:v>117.03999999999999</c:v>
+                  <c:v>117.48</c:v>
                 </c:pt>
                 <c:pt idx="81">
-                  <c:v>117.892</c:v>
+                  <c:v>118.354</c:v>
                 </c:pt>
                 <c:pt idx="82">
-                  <c:v>118.744</c:v>
+                  <c:v>119.22800000000001</c:v>
                 </c:pt>
                 <c:pt idx="83">
-                  <c:v>119.596</c:v>
+                  <c:v>120.102</c:v>
                 </c:pt>
                 <c:pt idx="84">
-                  <c:v>120.44800000000001</c:v>
+                  <c:v>120.976</c:v>
                 </c:pt>
                 <c:pt idx="85">
-                  <c:v>121.3</c:v>
+                  <c:v>121.85</c:v>
                 </c:pt>
                 <c:pt idx="86">
-                  <c:v>122.152</c:v>
+                  <c:v>122.724</c:v>
                 </c:pt>
                 <c:pt idx="87">
-                  <c:v>123.00399999999999</c:v>
+                  <c:v>123.598</c:v>
                 </c:pt>
                 <c:pt idx="88">
-                  <c:v>123.856</c:v>
+                  <c:v>124.47200000000001</c:v>
                 </c:pt>
                 <c:pt idx="89">
-                  <c:v>124.708</c:v>
+                  <c:v>125.346</c:v>
                 </c:pt>
                 <c:pt idx="90">
-                  <c:v>125.56</c:v>
+                  <c:v>126.22</c:v>
                 </c:pt>
                 <c:pt idx="91">
-                  <c:v>126.412</c:v>
+                  <c:v>127.094</c:v>
                 </c:pt>
                 <c:pt idx="92">
-                  <c:v>127.264</c:v>
+                  <c:v>127.968</c:v>
                 </c:pt>
                 <c:pt idx="93">
-                  <c:v>128.11599999999999</c:v>
+                  <c:v>128.84199999999998</c:v>
                 </c:pt>
                 <c:pt idx="94">
-                  <c:v>128.968</c:v>
+                  <c:v>129.716</c:v>
                 </c:pt>
                 <c:pt idx="95">
-                  <c:v>129.82</c:v>
+                  <c:v>130.59</c:v>
                 </c:pt>
                 <c:pt idx="96">
-                  <c:v>130.672</c:v>
+                  <c:v>131.464</c:v>
                 </c:pt>
                 <c:pt idx="97">
-                  <c:v>131.524</c:v>
+                  <c:v>132.338</c:v>
                 </c:pt>
                 <c:pt idx="98">
-                  <c:v>132.376</c:v>
+                  <c:v>133.212</c:v>
                 </c:pt>
                 <c:pt idx="99">
-                  <c:v>133.228</c:v>
+                  <c:v>134.086</c:v>
                 </c:pt>
                 <c:pt idx="100">
-                  <c:v>134.07999999999998</c:v>
+                  <c:v>134.96</c:v>
                 </c:pt>
                 <c:pt idx="101">
-                  <c:v>134.93200000000002</c:v>
+                  <c:v>135.834</c:v>
                 </c:pt>
                 <c:pt idx="102">
-                  <c:v>135.784</c:v>
+                  <c:v>136.708</c:v>
                 </c:pt>
                 <c:pt idx="103">
-                  <c:v>136.636</c:v>
+                  <c:v>137.582</c:v>
                 </c:pt>
                 <c:pt idx="104">
-                  <c:v>137.488</c:v>
+                  <c:v>138.45600000000002</c:v>
                 </c:pt>
                 <c:pt idx="105">
-                  <c:v>138.34</c:v>
+                  <c:v>139.32999999999998</c:v>
                 </c:pt>
                 <c:pt idx="106">
-                  <c:v>139.192</c:v>
+                  <c:v>140.204</c:v>
                 </c:pt>
                 <c:pt idx="107">
-                  <c:v>140.04399999999998</c:v>
+                  <c:v>141.078</c:v>
                 </c:pt>
                 <c:pt idx="108">
-                  <c:v>140.89600000000002</c:v>
+                  <c:v>141.952</c:v>
                 </c:pt>
                 <c:pt idx="109">
-                  <c:v>141.748</c:v>
+                  <c:v>142.826</c:v>
                 </c:pt>
                 <c:pt idx="110">
-                  <c:v>142.6</c:v>
+                  <c:v>143.7</c:v>
                 </c:pt>
                 <c:pt idx="111">
-                  <c:v>143.452</c:v>
+                  <c:v>144.574</c:v>
                 </c:pt>
                 <c:pt idx="112">
-                  <c:v>144.304</c:v>
+                  <c:v>145.448</c:v>
                 </c:pt>
                 <c:pt idx="113">
-                  <c:v>145.156</c:v>
+                  <c:v>146.322</c:v>
                 </c:pt>
                 <c:pt idx="114">
-                  <c:v>146.00799999999998</c:v>
+                  <c:v>147.196</c:v>
                 </c:pt>
                 <c:pt idx="115">
-                  <c:v>146.86</c:v>
+                  <c:v>148.07</c:v>
                 </c:pt>
                 <c:pt idx="116">
-                  <c:v>147.712</c:v>
+                  <c:v>148.94400000000002</c:v>
                 </c:pt>
                 <c:pt idx="117">
-                  <c:v>148.564</c:v>
+                  <c:v>149.81799999999998</c:v>
                 </c:pt>
                 <c:pt idx="118">
-                  <c:v>149.416</c:v>
+                  <c:v>150.692</c:v>
                 </c:pt>
                 <c:pt idx="119">
-                  <c:v>150.268</c:v>
+                  <c:v>151.566</c:v>
                 </c:pt>
                 <c:pt idx="120">
-                  <c:v>151.12</c:v>
+                  <c:v>152.44</c:v>
                 </c:pt>
                 <c:pt idx="121">
-                  <c:v>151.972</c:v>
+                  <c:v>153.314</c:v>
                 </c:pt>
                 <c:pt idx="122">
-                  <c:v>152.824</c:v>
+                  <c:v>154.188</c:v>
                 </c:pt>
                 <c:pt idx="123">
-                  <c:v>153.676</c:v>
+                  <c:v>155.062</c:v>
                 </c:pt>
                 <c:pt idx="124">
-                  <c:v>154.528</c:v>
+                  <c:v>155.936</c:v>
                 </c:pt>
                 <c:pt idx="125">
-                  <c:v>155.38</c:v>
+                  <c:v>156.81</c:v>
                 </c:pt>
                 <c:pt idx="126">
-                  <c:v>156.232</c:v>
+                  <c:v>157.684</c:v>
                 </c:pt>
                 <c:pt idx="127">
-                  <c:v>157.084</c:v>
+                  <c:v>158.558</c:v>
                 </c:pt>
                 <c:pt idx="128">
-                  <c:v>157.936</c:v>
+                  <c:v>159.43200000000002</c:v>
                 </c:pt>
                 <c:pt idx="129">
-                  <c:v>158.788</c:v>
+                  <c:v>160.30599999999998</c:v>
                 </c:pt>
                 <c:pt idx="130">
-                  <c:v>159.64</c:v>
+                  <c:v>161.18</c:v>
                 </c:pt>
                 <c:pt idx="131">
-                  <c:v>160.492</c:v>
+                  <c:v>162.054</c:v>
                 </c:pt>
                 <c:pt idx="132">
-                  <c:v>161.344</c:v>
+                  <c:v>162.928</c:v>
                 </c:pt>
                 <c:pt idx="133">
-                  <c:v>162.196</c:v>
+                  <c:v>163.802</c:v>
                 </c:pt>
                 <c:pt idx="134">
-                  <c:v>163.048</c:v>
+                  <c:v>164.676</c:v>
                 </c:pt>
                 <c:pt idx="135">
-                  <c:v>163.9</c:v>
+                  <c:v>165.55</c:v>
                 </c:pt>
                 <c:pt idx="136">
-                  <c:v>164.752</c:v>
+                  <c:v>166.424</c:v>
                 </c:pt>
                 <c:pt idx="137">
-                  <c:v>165.60399999999998</c:v>
+                  <c:v>167.298</c:v>
                 </c:pt>
                 <c:pt idx="138">
-                  <c:v>166.45600000000002</c:v>
+                  <c:v>168.172</c:v>
                 </c:pt>
                 <c:pt idx="139">
-                  <c:v>167.308</c:v>
+                  <c:v>169.046</c:v>
                 </c:pt>
                 <c:pt idx="140">
-                  <c:v>168.16</c:v>
+                  <c:v>169.92000000000002</c:v>
                 </c:pt>
               </c:numCache>
             </c:numRef>
@@ -4545,16 +4545,16 @@
                   <c:v>25</c:v>
                 </c:pt>
                 <c:pt idx="1">
+                  <c:v>25</c:v>
+                </c:pt>
+                <c:pt idx="2">
+                  <c:v>15</c:v>
+                </c:pt>
+                <c:pt idx="3">
+                  <c:v>15</c:v>
+                </c:pt>
+                <c:pt idx="4">
                   <c:v>20</c:v>
-                </c:pt>
-                <c:pt idx="2">
-                  <c:v>20</c:v>
-                </c:pt>
-                <c:pt idx="3">
-                  <c:v>20</c:v>
-                </c:pt>
-                <c:pt idx="4">
-                  <c:v>15</c:v>
                 </c:pt>
               </c:numCache>
             </c:numRef>
@@ -12763,19 +12763,19 @@
                 <c:formatCode>General</c:formatCode>
                 <c:ptCount val="5"/>
                 <c:pt idx="0">
-                  <c:v>48.6</c:v>
+                  <c:v>48.2</c:v>
                 </c:pt>
                 <c:pt idx="1">
-                  <c:v>66.4</c:v>
+                  <c:v>65.9</c:v>
                 </c:pt>
                 <c:pt idx="2">
-                  <c:v>72.9</c:v>
+                  <c:v>72.4</c:v>
                 </c:pt>
                 <c:pt idx="3">
-                  <c:v>76.6</c:v>
+                  <c:v>76.1</c:v>
                 </c:pt>
                 <c:pt idx="4">
-                  <c:v>79.1</c:v>
+                  <c:v>78.6</c:v>
                 </c:pt>
               </c:numCache>
             </c:numRef>
@@ -13585,7 +13585,7 @@
           <a:p>
             <a:r>
               <a:rPr lang="en-US" dirty="0"/>
-              <a:t>The table answers 'what if markets go nowhere?'. Even at 0% equity return the note is called in ~68% of paths, because volatility alone takes the basket back to 100% on some date. The honest cost of protection: in ~13% of paths (risk-neutral) the family earns nothing for 5 years, but it never loses capital.</a:t>
+              <a:t>The table answers 'what if markets go nowhere?'. Even at 0% equity return the note is called in ~67% of paths, because volatility alone takes the basket back to 100% on some date. The honest cost of protection: in ~13% of paths (risk-neutral) the family earns nothing for 5 years, but it never loses capital.</a:t>
             </a:r>
             <a:endParaRPr lang="en-US" dirty="0"/>
           </a:p>
@@ -13673,7 +13673,7 @@
           <a:p>
             <a:r>
               <a:rPr lang="en-US" dirty="0"/>
-              <a:t>Investor risks on the left, desk hedges on the right. There is no capital-loss line: the main honest risks are earning nothing for 5 years, capped upside, and Natixis credit. The 7.20% coupon sits below the 7.8% fair level in every sensitivity we ran, so the offer is robust to market moves before the trade date.</a:t>
+              <a:t>Investor risks on the left, desk hedges on the right. There is no capital-loss line: the main honest risks are earning nothing for 5 years, capped upside, and Natixis credit. The 7.20% coupon sits below the 7.9% fair level in every sensitivity we ran, so the offer is robust to market moves before the trade date.</a:t>
             </a:r>
             <a:endParaRPr lang="en-US" dirty="0"/>
           </a:p>
@@ -15335,7 +15335,7 @@
                 <a:ea typeface="Calibri" pitchFamily="34" charset="-122"/>
                 <a:cs typeface="Calibri" pitchFamily="34" charset="-120"/>
               </a:rPr>
-              <a:t>100% repaid at autocall or maturity. Worth 89.4%: early repayment is worth more than a 5Y bond (75.8%)</a:t>
+              <a:t>100% repaid at autocall or maturity. Worth 89.3%: early repayment is worth more than a 5Y bond (75.8%)</a:t>
             </a:r>
             <a:endParaRPr lang="en-US" sz="900" dirty="0"/>
           </a:p>
@@ -15495,7 +15495,7 @@
                 <a:ea typeface="Calibri" pitchFamily="34" charset="-122"/>
                 <a:cs typeface="Calibri" pitchFamily="34" charset="-120"/>
               </a:rPr>
-              <a:t>Pay 1.80%, plus missed coupons, on each date the basket is ≥ 100%. Worth 8.0%</a:t>
+              <a:t>Pay 1.80%, plus missed coupons, on each date the basket is ≥ 100%. Worth 7.9%</a:t>
             </a:r>
             <a:endParaRPr lang="en-US" sz="900" dirty="0"/>
           </a:p>
@@ -15737,7 +15737,7 @@
                 <a:ea typeface="Calibri" pitchFamily="34" charset="-122"/>
                 <a:cs typeface="Calibri" pitchFamily="34" charset="-120"/>
               </a:rPr>
-              <a:t>Fair value 97.4% = principal 89.4% + coupons 8.0% (net of autocall).  </a:t>
+              <a:t>Fair value 97.3% = principal 89.3% + coupons 7.9% (net of autocall).  </a:t>
             </a:r>
             <a:pPr indent="0" marL="0">
               <a:buNone/>
@@ -15751,7 +15751,7 @@
                 <a:ea typeface="Calibri" pitchFamily="34" charset="-122"/>
                 <a:cs typeface="Calibri" pitchFamily="34" charset="-120"/>
               </a:rPr>
-              <a:t>Issued at 100%, leaving 2.6% for hedging costs and Natixis margin. The client sells no put, so it takes no equity downside: it gives up upside above the coupon instead.</a:t>
+              <a:t>Issued at 100%, leaving 2.8% for hedging costs and Natixis margin. The client sells no put, so it takes no equity downside: it gives up upside above the coupon instead.</a:t>
             </a:r>
             <a:endParaRPr lang="en-US" sz="1000" dirty="0"/>
           </a:p>
@@ -19225,7 +19225,7 @@
                           <a:ea typeface="Calibri" pitchFamily="34" charset="-122"/>
                           <a:cs typeface="Calibri" pitchFamily="34" charset="-120"/>
                         </a:rPr>
-                        <a:t>68%</a:t>
+                        <a:t>67%</a:t>
                       </a:r>
                       <a:endParaRPr lang="en-US" sz="900" dirty="0">
                         <a:latin typeface="Calibri" charset="0"/>
@@ -19293,7 +19293,7 @@
                           <a:ea typeface="Calibri" pitchFamily="34" charset="-122"/>
                           <a:cs typeface="Calibri" pitchFamily="34" charset="-120"/>
                         </a:rPr>
-                        <a:t>77%</a:t>
+                        <a:t>76%</a:t>
                       </a:r>
                       <a:endParaRPr lang="en-US" sz="900" dirty="0">
                         <a:latin typeface="Calibri" charset="0"/>
@@ -19841,7 +19841,7 @@
                           <a:ea typeface="Calibri" pitchFamily="34" charset="-122"/>
                           <a:cs typeface="Calibri" pitchFamily="34" charset="-120"/>
                         </a:rPr>
-                        <a:t>5.8%</a:t>
+                        <a:t>5.7%</a:t>
                       </a:r>
                       <a:endParaRPr lang="en-US" sz="900" dirty="0">
                         <a:latin typeface="Calibri" charset="0"/>
@@ -19909,7 +19909,7 @@
                           <a:ea typeface="Calibri" pitchFamily="34" charset="-122"/>
                           <a:cs typeface="Calibri" pitchFamily="34" charset="-120"/>
                         </a:rPr>
-                        <a:t>5.0%</a:t>
+                        <a:t>4.9%</a:t>
                       </a:r>
                       <a:endParaRPr lang="en-US" sz="900" dirty="0">
                         <a:latin typeface="Calibri" charset="0"/>
@@ -20729,7 +20729,7 @@
                           <a:ea typeface="Calibri" pitchFamily="34" charset="-122"/>
                           <a:cs typeface="Calibri" pitchFamily="34" charset="-120"/>
                         </a:rPr>
-                        <a:t>9.0%</a:t>
+                        <a:t>8.9%</a:t>
                       </a:r>
                       <a:endParaRPr lang="en-US" sz="900" dirty="0">
                         <a:latin typeface="Calibri" charset="0"/>
@@ -21529,7 +21529,7 @@
                 <a:ea typeface="Cambria" pitchFamily="34" charset="-122"/>
                 <a:cs typeface="Cambria" pitchFamily="34" charset="-120"/>
               </a:rPr>
-              <a:t>49%</a:t>
+              <a:t>48%</a:t>
             </a:r>
             <a:endParaRPr lang="en-US" sz="2400" dirty="0"/>
           </a:p>
@@ -22771,7 +22771,7 @@
                           <a:ea typeface="Calibri" pitchFamily="34" charset="-122"/>
                           <a:cs typeface="Calibri" pitchFamily="34" charset="-120"/>
                         </a:rPr>
-                        <a:t>Small 00878 weight; verify volumes; Natixis can reference total-return versions</a:t>
+                        <a:t>00878 capped at 20%; verify volumes; Natixis can reference total-return versions</a:t>
                       </a:r>
                       <a:endParaRPr lang="en-US" sz="850" dirty="0">
                         <a:latin typeface="Calibri" charset="0"/>
@@ -23443,7 +23443,7 @@
                 <a:ea typeface="Calibri" pitchFamily="34" charset="-122"/>
                 <a:cs typeface="Calibri" pitchFamily="34" charset="-120"/>
               </a:rPr>
-              <a:t>Coupon value moves with basket vol and correlation (fair 7.5%–8.1% for vol ±3pts): managed with listed index options and correlation trades</a:t>
+              <a:t>Coupon value moves with basket vol and correlation (fair 7.6%–8.2% for vol ±3pts): managed with listed index options and correlation trades</a:t>
             </a:r>
             <a:endParaRPr lang="en-US" sz="850" dirty="0"/>
           </a:p>
@@ -23706,7 +23706,7 @@
                 <a:ea typeface="Calibri" pitchFamily="34" charset="-122"/>
                 <a:cs typeface="Calibri" pitchFamily="34" charset="-120"/>
               </a:rPr>
-              <a:t>base 7.8% · vol ±3pts 7.5%–8.1% · corr ±0.15 7.6%–8.0% · equity drift −1/−2% 8.3%–8.9%. The 7.20% offer stays fundable in every case.</a:t>
+              <a:t>base 7.9% · vol ±3pts 7.6%–8.2% · corr ±0.15 7.7%–8.1% · equity drift −1/−2% 8.4%–9.0%. The 7.20% offer stays fundable in every case.</a:t>
             </a:r>
             <a:endParaRPr lang="en-US" sz="900" dirty="0"/>
           </a:p>
@@ -25208,7 +25208,7 @@
                           <a:ea typeface="Calibri" pitchFamily="34" charset="-122"/>
                           <a:cs typeface="Calibri" pitchFamily="34" charset="-120"/>
                         </a:rPr>
-                        <a:t>20%</a:t>
+                        <a:t>25%</a:t>
                       </a:r>
                       <a:endParaRPr lang="en-US" sz="900" dirty="0">
                         <a:latin typeface="Calibri" charset="0"/>
@@ -25822,7 +25822,7 @@
                           <a:ea typeface="Calibri" pitchFamily="34" charset="-122"/>
                           <a:cs typeface="Calibri" pitchFamily="34" charset="-120"/>
                         </a:rPr>
-                        <a:t>20%</a:t>
+                        <a:t>15%</a:t>
                       </a:r>
                       <a:endParaRPr lang="en-US" sz="900" dirty="0">
                         <a:latin typeface="Calibri" charset="0"/>
@@ -26436,7 +26436,7 @@
                           <a:ea typeface="Calibri" pitchFamily="34" charset="-122"/>
                           <a:cs typeface="Calibri" pitchFamily="34" charset="-120"/>
                         </a:rPr>
-                        <a:t>20%</a:t>
+                        <a:t>15%</a:t>
                       </a:r>
                       <a:endParaRPr lang="en-US" sz="900" dirty="0">
                         <a:latin typeface="Calibri" charset="0"/>
@@ -27050,7 +27050,7 @@
                           <a:ea typeface="Calibri" pitchFamily="34" charset="-122"/>
                           <a:cs typeface="Calibri" pitchFamily="34" charset="-120"/>
                         </a:rPr>
-                        <a:t>15%</a:t>
+                        <a:t>20%</a:t>
                       </a:r>
                       <a:endParaRPr lang="en-US" sz="900" dirty="0">
                         <a:latin typeface="Calibri" charset="0"/>
@@ -28002,7 +28002,7 @@
                           <a:ea typeface="Calibri" pitchFamily="34" charset="-122"/>
                           <a:cs typeface="Calibri" pitchFamily="34" charset="-120"/>
                         </a:rPr>
-                        <a:t>7.8%</a:t>
+                        <a:t>7.9%</a:t>
                       </a:r>
                       <a:endParaRPr lang="en-US" sz="900" dirty="0">
                         <a:latin typeface="Calibri" charset="0"/>
@@ -28140,7 +28140,7 @@
                           <a:ea typeface="Calibri" pitchFamily="34" charset="-122"/>
                           <a:cs typeface="Calibri" pitchFamily="34" charset="-120"/>
                         </a:rPr>
-                        <a:t>7.1%</a:t>
+                        <a:t>7.2%</a:t>
                       </a:r>
                       <a:endParaRPr lang="en-US" sz="900" dirty="0">
                         <a:latin typeface="Calibri" charset="0"/>
@@ -28278,7 +28278,7 @@
                           <a:ea typeface="Calibri" pitchFamily="34" charset="-122"/>
                           <a:cs typeface="Calibri" pitchFamily="34" charset="-120"/>
                         </a:rPr>
-                        <a:t>6.6%</a:t>
+                        <a:t>6.7%</a:t>
                       </a:r>
                       <a:endParaRPr lang="en-US" sz="900" dirty="0">
                         <a:latin typeface="Calibri" charset="0"/>
@@ -28416,7 +28416,7 @@
                           <a:ea typeface="Calibri" pitchFamily="34" charset="-122"/>
                           <a:cs typeface="Calibri" pitchFamily="34" charset="-120"/>
                         </a:rPr>
-                        <a:t>7.9%</a:t>
+                        <a:t>8.0%</a:t>
                       </a:r>
                       <a:endParaRPr lang="en-US" sz="900" dirty="0">
                         <a:latin typeface="Calibri" charset="0"/>
@@ -28554,7 +28554,7 @@
                           <a:ea typeface="Calibri" pitchFamily="34" charset="-122"/>
                           <a:cs typeface="Calibri" pitchFamily="34" charset="-120"/>
                         </a:rPr>
-                        <a:t>8.3%</a:t>
+                        <a:t>8.4%</a:t>
                       </a:r>
                       <a:endParaRPr lang="en-US" sz="900" dirty="0">
                         <a:latin typeface="Calibri" charset="0"/>
@@ -28692,7 +28692,7 @@
                           <a:ea typeface="Calibri" pitchFamily="34" charset="-122"/>
                           <a:cs typeface="Calibri" pitchFamily="34" charset="-120"/>
                         </a:rPr>
-                        <a:t>8.9%</a:t>
+                        <a:t>9.0%</a:t>
                       </a:r>
                       <a:endParaRPr lang="en-US" sz="900" dirty="0">
                         <a:latin typeface="Calibri" charset="0"/>
@@ -28830,7 +28830,7 @@
                           <a:ea typeface="Calibri" pitchFamily="34" charset="-122"/>
                           <a:cs typeface="Calibri" pitchFamily="34" charset="-120"/>
                         </a:rPr>
-                        <a:t>8.1% / 7.5%</a:t>
+                        <a:t>8.2% / 7.6%</a:t>
                       </a:r>
                       <a:endParaRPr lang="en-US" sz="900" dirty="0">
                         <a:latin typeface="Calibri" charset="0"/>
@@ -29644,7 +29644,7 @@
                           <a:ea typeface="Calibri" pitchFamily="34" charset="-122"/>
                           <a:cs typeface="Calibri" pitchFamily="34" charset="-120"/>
                         </a:rPr>
-                        <a:t>14.1%</a:t>
+                        <a:t>14.5%</a:t>
                       </a:r>
                       <a:endParaRPr lang="en-US" sz="900" dirty="0">
                         <a:latin typeface="Calibri" charset="0"/>
@@ -29782,7 +29782,7 @@
                           <a:ea typeface="Calibri" pitchFamily="34" charset="-122"/>
                           <a:cs typeface="Calibri" pitchFamily="34" charset="-120"/>
                         </a:rPr>
-                        <a:t>85% of basket gain at Y5</a:t>
+                        <a:t>87% of basket gain at Y5</a:t>
                       </a:r>
                       <a:endParaRPr lang="en-US" sz="900" dirty="0">
                         <a:latin typeface="Calibri" charset="0"/>
@@ -31434,7 +31434,7 @@
                 <a:ea typeface="Cambria" pitchFamily="34" charset="-122"/>
                 <a:cs typeface="Cambria" pitchFamily="34" charset="-120"/>
               </a:rPr>
-              <a:t>49%</a:t>
+              <a:t>48%</a:t>
             </a:r>
             <a:endParaRPr lang="en-US" sz="3800" dirty="0"/>
           </a:p>
@@ -31512,7 +31512,7 @@
                 <a:ea typeface="Calibri" pitchFamily="34" charset="-122"/>
                 <a:cs typeface="Calibri" pitchFamily="34" charset="-120"/>
               </a:rPr>
-              <a:t>Risk-neutral. 79% called within 5 years; expected life 2.22 years</a:t>
+              <a:t>Risk-neutral. 79% called within 5 years; expected life 2.24 years</a:t>
             </a:r>
             <a:endParaRPr lang="en-US" sz="1050" dirty="0"/>
           </a:p>
@@ -31579,7 +31579,7 @@
                 <a:ea typeface="Calibri" pitchFamily="34" charset="-122"/>
                 <a:cs typeface="Calibri" pitchFamily="34" charset="-120"/>
               </a:rPr>
-              <a:t> on a basket of five Bloomberg-listed Asian ETFs: Global X Asia Semiconductor (3119 HK) 25%, Global X Japan Semiconductor (2644 JP) 20%, iShares MSCI Taiwan (EWT) 20%, iShares MSCI South Korea (EWY) 20% and Cathay Taiwan ESG High Dividend (00878 TT) 15%. It gives the family the AI hardware layer (chips, memory and chip-making equipment) that complements, rather than duplicates, the infrastructure, power and property they already own. </a:t>
+              <a:t> on a basket of five Bloomberg-listed Asian ETFs: Global X Asia Semiconductor (3119 HK) 25%, Global X Japan Semiconductor (2644 JP) 25%, iShares MSCI Taiwan (EWT) 15%, iShares MSCI South Korea (EWY) 15% and Cathay Taiwan ESG High Dividend (00878 TT) 20%. It gives the family the AI hardware layer (chips, memory and chip-making equipment) that complements, rather than duplicates, the infrastructure, power and property they already own. </a:t>
             </a:r>
             <a:pPr indent="0" marL="0">
               <a:buNone/>
@@ -31593,7 +31593,7 @@
                 <a:ea typeface="Calibri" pitchFamily="34" charset="-122"/>
                 <a:cs typeface="Calibri" pitchFamily="34" charset="-120"/>
               </a:rPr>
-              <a:t>The family never loses capital at maturity, earns 7.20% a year in the 79% of paths where the basket gets back to its starting level, and gets 100% back in the rest. Fair value is 97.4%, so issuing at par leaves Natixis 2.6% for hedging and margin.</a:t>
+              <a:t>The family never loses capital at maturity, earns 7.20% a year in the 79% of paths where the basket gets back to its starting level, and gets 100% back in the rest. Fair value is 97.3%, so issuing at par leaves Natixis 2.8% for hedging and margin.</a:t>
             </a:r>
             <a:endParaRPr lang="en-US" sz="1150" dirty="0"/>
           </a:p>
@@ -33801,7 +33801,7 @@
                 <a:ea typeface="Calibri" pitchFamily="34" charset="-122"/>
                 <a:cs typeface="Calibri" pitchFamily="34" charset="-120"/>
               </a:rPr>
-              <a:t>High USD rates make the 5Y zero-coupon bond cheap (75.8%), so guaranteeing 100% back costs little. Asian equity volatility (basket ~26%) makes it likely the basket revisits 100%, which is what pays the 7.20% coupon.</a:t>
+              <a:t>High USD rates make the 5Y zero-coupon bond cheap (75.8%), so guaranteeing 100% back costs little. Asian equity volatility (basket ~25%) makes it likely the basket revisits 100%, which is what pays the 7.20% coupon.</a:t>
             </a:r>
             <a:endParaRPr lang="en-US" sz="1000" dirty="0"/>
           </a:p>
@@ -35032,7 +35032,7 @@
                           <a:ea typeface="Calibri" pitchFamily="34" charset="-122"/>
                           <a:cs typeface="Calibri" pitchFamily="34" charset="-120"/>
                         </a:rPr>
-                        <a:t>20%</a:t>
+                        <a:t>25%</a:t>
                       </a:r>
                       <a:endParaRPr lang="en-US" sz="850" dirty="0">
                         <a:latin typeface="Calibri" charset="0"/>
@@ -35306,7 +35306,7 @@
                           <a:ea typeface="Calibri" pitchFamily="34" charset="-122"/>
                           <a:cs typeface="Calibri" pitchFamily="34" charset="-120"/>
                         </a:rPr>
-                        <a:t>20%</a:t>
+                        <a:t>15%</a:t>
                       </a:r>
                       <a:endParaRPr lang="en-US" sz="850" dirty="0">
                         <a:latin typeface="Calibri" charset="0"/>
@@ -35580,7 +35580,7 @@
                           <a:ea typeface="Calibri" pitchFamily="34" charset="-122"/>
                           <a:cs typeface="Calibri" pitchFamily="34" charset="-120"/>
                         </a:rPr>
-                        <a:t>20%</a:t>
+                        <a:t>15%</a:t>
                       </a:r>
                       <a:endParaRPr lang="en-US" sz="850" dirty="0">
                         <a:latin typeface="Calibri" charset="0"/>
@@ -35854,7 +35854,7 @@
                           <a:ea typeface="Calibri" pitchFamily="34" charset="-122"/>
                           <a:cs typeface="Calibri" pitchFamily="34" charset="-120"/>
                         </a:rPr>
-                        <a:t>15%</a:t>
+                        <a:t>20%</a:t>
                       </a:r>
                       <a:endParaRPr lang="en-US" sz="850" dirty="0">
                         <a:latin typeface="Calibri" charset="0"/>
@@ -36093,7 +36093,7 @@
                 <a:ea typeface="Calibri" pitchFamily="34" charset="-122"/>
                 <a:cs typeface="Calibri" pitchFamily="34" charset="-120"/>
               </a:rPr>
-              <a:t>a shock to one ETF is cushioned by the others: basket vol ~26% vs 18%–38% alone. Overlap (TSMC, Samsung, SK hynix sit in several ETFs) keeps correlations high (0.45–0.85).</a:t>
+              <a:t>a shock to one ETF is cushioned by the others: basket vol ~25% vs 18%–38% alone. Overlap (TSMC, Samsung, SK hynix sit in several ETFs) keeps correlations high (0.45–0.85).</a:t>
             </a:r>
             <a:endParaRPr lang="en-US" sz="950" dirty="0"/>
           </a:p>
@@ -37641,7 +37641,7 @@
                           <a:ea typeface="Calibri" pitchFamily="34" charset="-122"/>
                           <a:cs typeface="Calibri" pitchFamily="34" charset="-120"/>
                         </a:rPr>
-                        <a:t>100% / 97.4%</a:t>
+                        <a:t>100% / 97.3%</a:t>
                       </a:r>
                       <a:endParaRPr lang="en-US" sz="950" dirty="0">
                         <a:latin typeface="Calibri" charset="0"/>
@@ -38016,7 +38016,7 @@
                           <a:ea typeface="Calibri" pitchFamily="34" charset="-122"/>
                           <a:cs typeface="Calibri" pitchFamily="34" charset="-120"/>
                         </a:rPr>
-                        <a:t>7.3%</a:t>
+                        <a:t>7.4%</a:t>
                       </a:r>
                       <a:endParaRPr lang="en-US" sz="850" dirty="0">
                         <a:latin typeface="Calibri" charset="0"/>
@@ -38084,7 +38084,7 @@
                           <a:ea typeface="Calibri" pitchFamily="34" charset="-122"/>
                           <a:cs typeface="Calibri" pitchFamily="34" charset="-120"/>
                         </a:rPr>
-                        <a:t>15.7%</a:t>
+                        <a:t>16.2%</a:t>
                       </a:r>
                       <a:endParaRPr lang="en-US" sz="850" dirty="0">
                         <a:latin typeface="Calibri" charset="0"/>
@@ -38222,7 +38222,7 @@
                           <a:ea typeface="Calibri" pitchFamily="34" charset="-122"/>
                           <a:cs typeface="Calibri" pitchFamily="34" charset="-120"/>
                         </a:rPr>
-                        <a:t>9.9%</a:t>
+                        <a:t>10.0%</a:t>
                       </a:r>
                       <a:endParaRPr lang="en-US" sz="850" dirty="0">
                         <a:latin typeface="Calibri" charset="0"/>
@@ -38290,7 +38290,7 @@
                           <a:ea typeface="Calibri" pitchFamily="34" charset="-122"/>
                           <a:cs typeface="Calibri" pitchFamily="34" charset="-120"/>
                         </a:rPr>
-                        <a:t>15.7%</a:t>
+                        <a:t>16.2%</a:t>
                       </a:r>
                       <a:endParaRPr lang="en-US" sz="850" dirty="0">
                         <a:latin typeface="Calibri" charset="0"/>
@@ -38428,7 +38428,7 @@
                           <a:ea typeface="Calibri" pitchFamily="34" charset="-122"/>
                           <a:cs typeface="Calibri" pitchFamily="34" charset="-120"/>
                         </a:rPr>
-                        <a:t>13.6%</a:t>
+                        <a:t>13.9%</a:t>
                       </a:r>
                       <a:endParaRPr lang="en-US" sz="850" dirty="0">
                         <a:latin typeface="Calibri" charset="0"/>
@@ -38496,7 +38496,7 @@
                           <a:ea typeface="Calibri" pitchFamily="34" charset="-122"/>
                           <a:cs typeface="Calibri" pitchFamily="34" charset="-120"/>
                         </a:rPr>
-                        <a:t>14.1%</a:t>
+                        <a:t>14.5%</a:t>
                       </a:r>
                       <a:endParaRPr lang="en-US" sz="850" dirty="0">
                         <a:latin typeface="Calibri" charset="0"/>
@@ -38634,7 +38634,7 @@
                           <a:ea typeface="Calibri" pitchFamily="34" charset="-122"/>
                           <a:cs typeface="Calibri" pitchFamily="34" charset="-120"/>
                         </a:rPr>
-                        <a:t>4.1%</a:t>
+                        <a:t>4.2%</a:t>
                       </a:r>
                       <a:endParaRPr lang="en-US" sz="850" dirty="0">
                         <a:latin typeface="Calibri" charset="0"/>
@@ -38702,7 +38702,7 @@
                           <a:ea typeface="Calibri" pitchFamily="34" charset="-122"/>
                           <a:cs typeface="Calibri" pitchFamily="34" charset="-120"/>
                         </a:rPr>
-                        <a:t>1.1%</a:t>
+                        <a:t>1.3%</a:t>
                       </a:r>
                       <a:endParaRPr lang="en-US" sz="850" dirty="0">
                         <a:latin typeface="Calibri" charset="0"/>
@@ -38840,7 +38840,7 @@
                           <a:ea typeface="Calibri" pitchFamily="34" charset="-122"/>
                           <a:cs typeface="Calibri" pitchFamily="34" charset="-120"/>
                         </a:rPr>
-                        <a:t>7.8%</a:t>
+                        <a:t>7.9%</a:t>
                       </a:r>
                       <a:endParaRPr lang="en-US" sz="850" dirty="0">
                         <a:latin typeface="Calibri" charset="0"/>
@@ -39038,7 +39038,7 @@
                 <a:ea typeface="Calibri" pitchFamily="34" charset="-122"/>
                 <a:cs typeface="Calibri" pitchFamily="34" charset="-120"/>
               </a:rPr>
-              <a:t>The draft's 8.5% fixed coupon is worth 100.4% to the client, so Natixis cannot fund it. At-risk designs pay 7%–14% for a 14%–16% chance of losing capital. Cutting that to ~1% needs a 10%-vol basket and pays only 4.1%, below the 5.69% bond. Full protection prices at 7.8%; we offer 7.20%.</a:t>
+              <a:t>The draft's 8.5% fixed coupon is worth 100.3% to the client, so Natixis cannot fund it. At-risk designs pay 7%–14% for a 14%–16% chance of losing capital. Cutting that to ~1% needs a 10%-vol basket and pays only 4.2%, below the 5.69% bond. Full protection prices at 7.9%; we offer 7.20%.</a:t>
             </a:r>
             <a:endParaRPr lang="en-US" sz="950" dirty="0"/>
           </a:p>
@@ -39535,7 +39535,7 @@
                 <a:ea typeface="Calibri" pitchFamily="34" charset="-122"/>
                 <a:cs typeface="Calibri" pitchFamily="34" charset="-120"/>
               </a:rPr>
-              <a:t>P(called by Y1) 49%</a:t>
+              <a:t>P(called by Y1) 48%</a:t>
             </a:r>
             <a:endParaRPr lang="en-US" sz="850" dirty="0"/>
           </a:p>
@@ -39843,7 +39843,7 @@
                 <a:ea typeface="Calibri" pitchFamily="34" charset="-122"/>
                 <a:cs typeface="Calibri" pitchFamily="34" charset="-120"/>
               </a:rPr>
-              <a:t>P(called by Y3) 73%</a:t>
+              <a:t>P(called by Y3) 72%</a:t>
             </a:r>
             <a:endParaRPr lang="en-US" sz="850" dirty="0"/>
           </a:p>
@@ -39997,7 +39997,7 @@
                 <a:ea typeface="Calibri" pitchFamily="34" charset="-122"/>
                 <a:cs typeface="Calibri" pitchFamily="34" charset="-120"/>
               </a:rPr>
-              <a:t>P(called by Y4) 77%</a:t>
+              <a:t>P(called by Y4) 76%</a:t>
             </a:r>
             <a:endParaRPr lang="en-US" sz="850" dirty="0"/>
           </a:p>

--- a/deck/Asian-Digital-Autocallable-Note.pptx
+++ b/deck/Asian-Digital-Autocallable-Note.pptx
@@ -464,6 +464,287 @@
                 </a:solidFill>
                 <a:latin typeface="Calibri"/>
               </a:rPr>
+              <a:t>Cumulative autocall probability (risk-neutral)</a:t>
+            </a:r>
+          </a:p>
+        </c:rich>
+      </c:tx>
+      <c:layout/>
+      <c:overlay val="0"/>
+    </c:title>
+    <c:autoTitleDeleted val="0"/>
+    <c:plotArea>
+      <c:layout/>
+      <c:barChart>
+        <c:barDir val="col"/>
+        <c:grouping val="clustered"/>
+        <c:varyColors val="0"/>
+        <c:ser>
+          <c:idx val="0"/>
+          <c:order val="0"/>
+          <c:tx>
+            <c:strRef>
+              <c:f>Sheet1!$B$1</c:f>
+              <c:strCache>
+                <c:ptCount val="1"/>
+                <c:pt idx="0">
+                  <c:v>Cumulative call probability</c:v>
+                </c:pt>
+              </c:strCache>
+            </c:strRef>
+          </c:tx>
+          <c:spPr>
+            <a:solidFill>
+              <a:srgbClr val="0F8B8D"/>
+            </a:solidFill>
+            <a:effectLst/>
+          </c:spPr>
+          <c:invertIfNegative val="0"/>
+          <c:dLbls>
+            <c:numFmt formatCode="0&quot;%&quot;" sourceLinked="0"/>
+            <c:txPr>
+              <a:bodyPr/>
+              <a:lstStyle/>
+              <a:p>
+                <a:pPr>
+                  <a:defRPr b="0" i="0" strike="noStrike" sz="900" u="none">
+                    <a:solidFill>
+                      <a:srgbClr val="1D2B30"/>
+                    </a:solidFill>
+                    <a:latin typeface="Arial"/>
+                  </a:defRPr>
+                </a:pPr>
+              </a:p>
+            </c:txPr>
+            <c:showLegendKey val="0"/>
+            <c:showVal val="1"/>
+            <c:showCatName val="0"/>
+            <c:showSerName val="0"/>
+            <c:showPercent val="0"/>
+            <c:showBubbleSize val="0"/>
+            <c:showLeaderLines val="0"/>
+          </c:dLbls>
+          <c:cat>
+            <c:multiLvlStrRef>
+              <c:f>Sheet1!$A$2:$A$6</c:f>
+              <c:multiLvlStrCache>
+                <c:ptCount val="5"/>
+                <c:lvl>
+                  <c:pt idx="0">
+                    <c:v>Y1</c:v>
+                  </c:pt>
+                  <c:pt idx="1">
+                    <c:v>Y2</c:v>
+                  </c:pt>
+                  <c:pt idx="2">
+                    <c:v>Y3</c:v>
+                  </c:pt>
+                  <c:pt idx="3">
+                    <c:v>Y4</c:v>
+                  </c:pt>
+                  <c:pt idx="4">
+                    <c:v>Y5</c:v>
+                  </c:pt>
+                </c:lvl>
+              </c:multiLvlStrCache>
+            </c:multiLvlStrRef>
+          </c:cat>
+          <c:val>
+            <c:numRef>
+              <c:f>Sheet1!$B$2:$B$6</c:f>
+              <c:numCache>
+                <c:formatCode>General</c:formatCode>
+                <c:ptCount val="5"/>
+                <c:pt idx="0">
+                  <c:v>48.2</c:v>
+                </c:pt>
+                <c:pt idx="1">
+                  <c:v>65.9</c:v>
+                </c:pt>
+                <c:pt idx="2">
+                  <c:v>72.4</c:v>
+                </c:pt>
+                <c:pt idx="3">
+                  <c:v>76.1</c:v>
+                </c:pt>
+                <c:pt idx="4">
+                  <c:v>78.6</c:v>
+                </c:pt>
+              </c:numCache>
+            </c:numRef>
+          </c:val>
+        </c:ser>
+        <c:dLbls>
+          <c:numFmt formatCode="0&quot;%&quot;" sourceLinked="0"/>
+          <c:txPr>
+            <a:bodyPr/>
+            <a:lstStyle/>
+            <a:p>
+              <a:pPr>
+                <a:defRPr b="0" i="0" strike="noStrike" sz="900" u="none">
+                  <a:solidFill>
+                    <a:srgbClr val="1D2B30"/>
+                  </a:solidFill>
+                  <a:latin typeface="Arial"/>
+                </a:defRPr>
+              </a:pPr>
+            </a:p>
+          </c:txPr>
+          <c:showLegendKey val="0"/>
+          <c:showVal val="1"/>
+          <c:showCatName val="0"/>
+          <c:showSerName val="0"/>
+          <c:showPercent val="0"/>
+          <c:showBubbleSize val="0"/>
+          <c:showLeaderLines val="0"/>
+        </c:dLbls>
+        <c:gapWidth val="150"/>
+        <c:overlap val="0"/>
+        <c:axId val="2094734554"/>
+        <c:axId val="2094734552"/>
+        <c:axId val="2094734556"/>
+      </c:barChart>
+      <c:catAx>
+        <c:axId val="2094734554"/>
+        <c:scaling>
+          <c:orientation val="minMax"/>
+        </c:scaling>
+        <c:delete val="0"/>
+        <c:axPos val="b"/>
+        <c:numFmt formatCode="General" sourceLinked="1"/>
+        <c:majorTickMark val="out"/>
+        <c:minorTickMark val="none"/>
+        <c:tickLblPos val="low"/>
+        <c:spPr>
+          <a:ln w="12700" cap="flat">
+            <a:solidFill>
+              <a:srgbClr val="8FA6AA"/>
+            </a:solidFill>
+            <a:prstDash val="solid"/>
+            <a:round/>
+          </a:ln>
+        </c:spPr>
+        <c:txPr>
+          <a:bodyPr/>
+          <a:lstStyle/>
+          <a:p>
+            <a:pPr>
+              <a:defRPr sz="900" b="0" i="0" u="none" strike="noStrike">
+                <a:solidFill>
+                  <a:srgbClr val="5F7176"/>
+                </a:solidFill>
+                <a:latin typeface="Calibri"/>
+              </a:defRPr>
+            </a:pPr>
+            <a:endParaRPr lang="en-US"/>
+          </a:p>
+        </c:txPr>
+        <c:crossAx val="2094734552"/>
+        <c:crosses val="autoZero"/>
+        <c:auto val="1"/>
+        <c:lblAlgn val="ctr"/>
+        <c:noMultiLvlLbl val="1"/>
+      </c:catAx>
+      <c:valAx>
+        <c:axId val="2094734552"/>
+        <c:scaling>
+          <c:orientation val="minMax"/>
+          <c:max val="100"/>
+          <c:min val="0"/>
+        </c:scaling>
+        <c:delete val="0"/>
+        <c:axPos val="l"/>
+        <c:majorGridlines>
+          <c:spPr>
+            <a:ln w="6350" cap="flat">
+              <a:solidFill>
+                <a:srgbClr val="DCE7E5"/>
+              </a:solidFill>
+              <a:prstDash val="solid"/>
+              <a:round/>
+            </a:ln>
+          </c:spPr>
+        </c:majorGridlines>
+        <c:numFmt formatCode="0&quot;%&quot;" sourceLinked="0"/>
+        <c:majorTickMark val="out"/>
+        <c:minorTickMark val="none"/>
+        <c:tickLblPos val="nextTo"/>
+        <c:spPr>
+          <a:ln w="12700" cap="flat">
+            <a:noFill/>
+            <a:prstDash val="solid"/>
+            <a:round/>
+          </a:ln>
+        </c:spPr>
+        <c:txPr>
+          <a:bodyPr/>
+          <a:lstStyle/>
+          <a:p>
+            <a:pPr>
+              <a:defRPr sz="900" b="0" i="0" u="none" strike="noStrike">
+                <a:solidFill>
+                  <a:srgbClr val="5F7176"/>
+                </a:solidFill>
+                <a:latin typeface="Calibri"/>
+              </a:defRPr>
+            </a:pPr>
+            <a:endParaRPr lang="en-US"/>
+          </a:p>
+        </c:txPr>
+        <c:crossAx val="2094734554"/>
+        <c:crosses val="autoZero"/>
+        <c:crossBetween val="between"/>
+      </c:valAx>
+      <c:spPr>
+        <a:noFill/>
+        <a:ln>
+          <a:noFill/>
+        </a:ln>
+        <a:effectLst/>
+      </c:spPr>
+    </c:plotArea>
+    <c:plotVisOnly val="1"/>
+    <c:dispBlanksAs val="span"/>
+  </c:chart>
+  <c:spPr>
+    <a:noFill/>
+    <a:ln>
+      <a:noFill/>
+    </a:ln>
+    <a:effectLst/>
+  </c:spPr>
+  <c:externalData r:id="rId1">
+    <c:autoUpdate val="0"/>
+  </c:externalData>
+</c:chartSpace>
+</file>
+
+<file path=ppt/charts/chart11.xml><?xml version="1.0" encoding="utf-8"?>
+<c:chartSpace xmlns:c="http://schemas.openxmlformats.org/drawingml/2006/chart" xmlns:a="http://schemas.openxmlformats.org/drawingml/2006/main" xmlns:r="http://schemas.openxmlformats.org/officeDocument/2006/relationships">
+  <c:date1904 val="0"/>
+  <c:roundedCorners val="1"/>
+  <c:chart>
+    <c:title>
+      <c:tx>
+        <c:rich>
+          <a:bodyPr/>
+          <a:lstStyle/>
+          <a:p>
+            <a:pPr>
+              <a:defRPr sz="950" b="0" i="0" u="none" strike="noStrike">
+                <a:solidFill>
+                  <a:srgbClr val="1D2B30"/>
+                </a:solidFill>
+                <a:latin typeface="Calibri"/>
+              </a:defRPr>
+            </a:pPr>
+            <a:r>
+              <a:rPr sz="950" b="0" i="0" u="none" strike="noStrike">
+                <a:solidFill>
+                  <a:srgbClr val="1D2B30"/>
+                </a:solidFill>
+                <a:latin typeface="Calibri"/>
+              </a:rPr>
               <a:t>Total received at Y5 (not called earlier) vs final basket level</a:t>
             </a:r>
           </a:p>
@@ -487,7 +768,7 @@
               <c:strCache>
                 <c:ptCount val="1"/>
                 <c:pt idx="0">
-                  <c:v>Our note (7.20%)</c:v>
+                  <c:v>Our note (10.50%)</c:v>
                 </c:pt>
               </c:strCache>
             </c:strRef>
@@ -961,94 +1242,94 @@
                 <c:formatCode>General</c:formatCode>
                 <c:ptCount val="141"/>
                 <c:pt idx="0">
-                  <c:v>100</c:v>
+                  <c:v>70</c:v>
                 </c:pt>
                 <c:pt idx="1">
-                  <c:v>100</c:v>
+                  <c:v>70</c:v>
                 </c:pt>
                 <c:pt idx="2">
-                  <c:v>100</c:v>
+                  <c:v>70</c:v>
                 </c:pt>
                 <c:pt idx="3">
-                  <c:v>100</c:v>
+                  <c:v>70</c:v>
                 </c:pt>
                 <c:pt idx="4">
-                  <c:v>100</c:v>
+                  <c:v>70</c:v>
                 </c:pt>
                 <c:pt idx="5">
-                  <c:v>100</c:v>
+                  <c:v>70</c:v>
                 </c:pt>
                 <c:pt idx="6">
-                  <c:v>100</c:v>
+                  <c:v>70</c:v>
                 </c:pt>
                 <c:pt idx="7">
-                  <c:v>100</c:v>
+                  <c:v>70</c:v>
                 </c:pt>
                 <c:pt idx="8">
-                  <c:v>100</c:v>
+                  <c:v>70</c:v>
                 </c:pt>
                 <c:pt idx="9">
-                  <c:v>100</c:v>
+                  <c:v>70</c:v>
                 </c:pt>
                 <c:pt idx="10">
-                  <c:v>100</c:v>
+                  <c:v>70</c:v>
                 </c:pt>
                 <c:pt idx="11">
-                  <c:v>100</c:v>
+                  <c:v>70</c:v>
                 </c:pt>
                 <c:pt idx="12">
-                  <c:v>100</c:v>
+                  <c:v>70</c:v>
                 </c:pt>
                 <c:pt idx="13">
-                  <c:v>100</c:v>
+                  <c:v>70</c:v>
                 </c:pt>
                 <c:pt idx="14">
-                  <c:v>100</c:v>
+                  <c:v>70</c:v>
                 </c:pt>
                 <c:pt idx="15">
-                  <c:v>100</c:v>
+                  <c:v>70</c:v>
                 </c:pt>
                 <c:pt idx="16">
-                  <c:v>100</c:v>
+                  <c:v>70</c:v>
                 </c:pt>
                 <c:pt idx="17">
-                  <c:v>100</c:v>
+                  <c:v>70</c:v>
                 </c:pt>
                 <c:pt idx="18">
-                  <c:v>100</c:v>
+                  <c:v>70</c:v>
                 </c:pt>
                 <c:pt idx="19">
-                  <c:v>100</c:v>
+                  <c:v>70</c:v>
                 </c:pt>
                 <c:pt idx="20">
-                  <c:v>100</c:v>
+                  <c:v>70</c:v>
                 </c:pt>
                 <c:pt idx="21">
-                  <c:v>100</c:v>
+                  <c:v>70</c:v>
                 </c:pt>
                 <c:pt idx="22">
-                  <c:v>100</c:v>
+                  <c:v>70</c:v>
                 </c:pt>
                 <c:pt idx="23">
-                  <c:v>100</c:v>
+                  <c:v>70</c:v>
                 </c:pt>
                 <c:pt idx="24">
-                  <c:v>100</c:v>
+                  <c:v>70</c:v>
                 </c:pt>
                 <c:pt idx="25">
-                  <c:v>100</c:v>
+                  <c:v>70</c:v>
                 </c:pt>
                 <c:pt idx="26">
-                  <c:v>100</c:v>
+                  <c:v>70</c:v>
                 </c:pt>
                 <c:pt idx="27">
-                  <c:v>100</c:v>
+                  <c:v>70</c:v>
                 </c:pt>
                 <c:pt idx="28">
-                  <c:v>100</c:v>
+                  <c:v>70</c:v>
                 </c:pt>
                 <c:pt idx="29">
-                  <c:v>100</c:v>
+                  <c:v>70</c:v>
                 </c:pt>
                 <c:pt idx="30">
                   <c:v>100</c:v>
@@ -1141,247 +1422,247 @@
                   <c:v>100</c:v>
                 </c:pt>
                 <c:pt idx="60">
-                  <c:v>136</c:v>
+                  <c:v>152.5</c:v>
                 </c:pt>
                 <c:pt idx="61">
-                  <c:v>136</c:v>
+                  <c:v>152.5</c:v>
                 </c:pt>
                 <c:pt idx="62">
-                  <c:v>136</c:v>
+                  <c:v>152.5</c:v>
                 </c:pt>
                 <c:pt idx="63">
-                  <c:v>136</c:v>
+                  <c:v>152.5</c:v>
                 </c:pt>
                 <c:pt idx="64">
-                  <c:v>136</c:v>
+                  <c:v>152.5</c:v>
                 </c:pt>
                 <c:pt idx="65">
-                  <c:v>136</c:v>
+                  <c:v>152.5</c:v>
                 </c:pt>
                 <c:pt idx="66">
-                  <c:v>136</c:v>
+                  <c:v>152.5</c:v>
                 </c:pt>
                 <c:pt idx="67">
-                  <c:v>136</c:v>
+                  <c:v>152.5</c:v>
                 </c:pt>
                 <c:pt idx="68">
-                  <c:v>136</c:v>
+                  <c:v>152.5</c:v>
                 </c:pt>
                 <c:pt idx="69">
-                  <c:v>136</c:v>
+                  <c:v>152.5</c:v>
                 </c:pt>
                 <c:pt idx="70">
-                  <c:v>136</c:v>
+                  <c:v>152.5</c:v>
                 </c:pt>
                 <c:pt idx="71">
-                  <c:v>136</c:v>
+                  <c:v>152.5</c:v>
                 </c:pt>
                 <c:pt idx="72">
-                  <c:v>136</c:v>
+                  <c:v>152.5</c:v>
                 </c:pt>
                 <c:pt idx="73">
-                  <c:v>136</c:v>
+                  <c:v>152.5</c:v>
                 </c:pt>
                 <c:pt idx="74">
-                  <c:v>136</c:v>
+                  <c:v>152.5</c:v>
                 </c:pt>
                 <c:pt idx="75">
-                  <c:v>136</c:v>
+                  <c:v>152.5</c:v>
                 </c:pt>
                 <c:pt idx="76">
-                  <c:v>136</c:v>
+                  <c:v>152.5</c:v>
                 </c:pt>
                 <c:pt idx="77">
-                  <c:v>136</c:v>
+                  <c:v>152.5</c:v>
                 </c:pt>
                 <c:pt idx="78">
-                  <c:v>136</c:v>
+                  <c:v>152.5</c:v>
                 </c:pt>
                 <c:pt idx="79">
-                  <c:v>136</c:v>
+                  <c:v>152.5</c:v>
                 </c:pt>
                 <c:pt idx="80">
-                  <c:v>136</c:v>
+                  <c:v>152.5</c:v>
                 </c:pt>
                 <c:pt idx="81">
-                  <c:v>136</c:v>
+                  <c:v>152.5</c:v>
                 </c:pt>
                 <c:pt idx="82">
-                  <c:v>136</c:v>
+                  <c:v>152.5</c:v>
                 </c:pt>
                 <c:pt idx="83">
-                  <c:v>136</c:v>
+                  <c:v>152.5</c:v>
                 </c:pt>
                 <c:pt idx="84">
-                  <c:v>136</c:v>
+                  <c:v>152.5</c:v>
                 </c:pt>
                 <c:pt idx="85">
-                  <c:v>136</c:v>
+                  <c:v>152.5</c:v>
                 </c:pt>
                 <c:pt idx="86">
-                  <c:v>136</c:v>
+                  <c:v>152.5</c:v>
                 </c:pt>
                 <c:pt idx="87">
-                  <c:v>136</c:v>
+                  <c:v>152.5</c:v>
                 </c:pt>
                 <c:pt idx="88">
-                  <c:v>136</c:v>
+                  <c:v>152.5</c:v>
                 </c:pt>
                 <c:pt idx="89">
-                  <c:v>136</c:v>
+                  <c:v>152.5</c:v>
                 </c:pt>
                 <c:pt idx="90">
-                  <c:v>136</c:v>
+                  <c:v>152.5</c:v>
                 </c:pt>
                 <c:pt idx="91">
-                  <c:v>136</c:v>
+                  <c:v>152.5</c:v>
                 </c:pt>
                 <c:pt idx="92">
-                  <c:v>136</c:v>
+                  <c:v>152.5</c:v>
                 </c:pt>
                 <c:pt idx="93">
-                  <c:v>136</c:v>
+                  <c:v>152.5</c:v>
                 </c:pt>
                 <c:pt idx="94">
-                  <c:v>136</c:v>
+                  <c:v>152.5</c:v>
                 </c:pt>
                 <c:pt idx="95">
-                  <c:v>136</c:v>
+                  <c:v>152.5</c:v>
                 </c:pt>
                 <c:pt idx="96">
-                  <c:v>136</c:v>
+                  <c:v>152.5</c:v>
                 </c:pt>
                 <c:pt idx="97">
-                  <c:v>136</c:v>
+                  <c:v>152.5</c:v>
                 </c:pt>
                 <c:pt idx="98">
-                  <c:v>136</c:v>
+                  <c:v>152.5</c:v>
                 </c:pt>
                 <c:pt idx="99">
-                  <c:v>136</c:v>
+                  <c:v>152.5</c:v>
                 </c:pt>
                 <c:pt idx="100">
-                  <c:v>136</c:v>
+                  <c:v>152.5</c:v>
                 </c:pt>
                 <c:pt idx="101">
-                  <c:v>136</c:v>
+                  <c:v>152.5</c:v>
                 </c:pt>
                 <c:pt idx="102">
-                  <c:v>136</c:v>
+                  <c:v>152.5</c:v>
                 </c:pt>
                 <c:pt idx="103">
-                  <c:v>136</c:v>
+                  <c:v>152.5</c:v>
                 </c:pt>
                 <c:pt idx="104">
-                  <c:v>136</c:v>
+                  <c:v>152.5</c:v>
                 </c:pt>
                 <c:pt idx="105">
-                  <c:v>136</c:v>
+                  <c:v>152.5</c:v>
                 </c:pt>
                 <c:pt idx="106">
-                  <c:v>136</c:v>
+                  <c:v>152.5</c:v>
                 </c:pt>
                 <c:pt idx="107">
-                  <c:v>136</c:v>
+                  <c:v>152.5</c:v>
                 </c:pt>
                 <c:pt idx="108">
-                  <c:v>136</c:v>
+                  <c:v>152.5</c:v>
                 </c:pt>
                 <c:pt idx="109">
-                  <c:v>136</c:v>
+                  <c:v>152.5</c:v>
                 </c:pt>
                 <c:pt idx="110">
-                  <c:v>136</c:v>
+                  <c:v>152.5</c:v>
                 </c:pt>
                 <c:pt idx="111">
-                  <c:v>136</c:v>
+                  <c:v>152.5</c:v>
                 </c:pt>
                 <c:pt idx="112">
-                  <c:v>136</c:v>
+                  <c:v>152.5</c:v>
                 </c:pt>
                 <c:pt idx="113">
-                  <c:v>136</c:v>
+                  <c:v>152.5</c:v>
                 </c:pt>
                 <c:pt idx="114">
-                  <c:v>136</c:v>
+                  <c:v>152.5</c:v>
                 </c:pt>
                 <c:pt idx="115">
-                  <c:v>136</c:v>
+                  <c:v>152.5</c:v>
                 </c:pt>
                 <c:pt idx="116">
-                  <c:v>136</c:v>
+                  <c:v>152.5</c:v>
                 </c:pt>
                 <c:pt idx="117">
-                  <c:v>136</c:v>
+                  <c:v>152.5</c:v>
                 </c:pt>
                 <c:pt idx="118">
-                  <c:v>136</c:v>
+                  <c:v>152.5</c:v>
                 </c:pt>
                 <c:pt idx="119">
-                  <c:v>136</c:v>
+                  <c:v>152.5</c:v>
                 </c:pt>
                 <c:pt idx="120">
-                  <c:v>136</c:v>
+                  <c:v>152.5</c:v>
                 </c:pt>
                 <c:pt idx="121">
-                  <c:v>136</c:v>
+                  <c:v>152.5</c:v>
                 </c:pt>
                 <c:pt idx="122">
-                  <c:v>136</c:v>
+                  <c:v>152.5</c:v>
                 </c:pt>
                 <c:pt idx="123">
-                  <c:v>136</c:v>
+                  <c:v>152.5</c:v>
                 </c:pt>
                 <c:pt idx="124">
-                  <c:v>136</c:v>
+                  <c:v>152.5</c:v>
                 </c:pt>
                 <c:pt idx="125">
-                  <c:v>136</c:v>
+                  <c:v>152.5</c:v>
                 </c:pt>
                 <c:pt idx="126">
-                  <c:v>136</c:v>
+                  <c:v>152.5</c:v>
                 </c:pt>
                 <c:pt idx="127">
-                  <c:v>136</c:v>
+                  <c:v>152.5</c:v>
                 </c:pt>
                 <c:pt idx="128">
-                  <c:v>136</c:v>
+                  <c:v>152.5</c:v>
                 </c:pt>
                 <c:pt idx="129">
-                  <c:v>136</c:v>
+                  <c:v>152.5</c:v>
                 </c:pt>
                 <c:pt idx="130">
-                  <c:v>136</c:v>
+                  <c:v>152.5</c:v>
                 </c:pt>
                 <c:pt idx="131">
-                  <c:v>136</c:v>
+                  <c:v>152.5</c:v>
                 </c:pt>
                 <c:pt idx="132">
-                  <c:v>136</c:v>
+                  <c:v>152.5</c:v>
                 </c:pt>
                 <c:pt idx="133">
-                  <c:v>136</c:v>
+                  <c:v>152.5</c:v>
                 </c:pt>
                 <c:pt idx="134">
-                  <c:v>136</c:v>
+                  <c:v>152.5</c:v>
                 </c:pt>
                 <c:pt idx="135">
-                  <c:v>136</c:v>
+                  <c:v>152.5</c:v>
                 </c:pt>
                 <c:pt idx="136">
-                  <c:v>136</c:v>
+                  <c:v>152.5</c:v>
                 </c:pt>
                 <c:pt idx="137">
-                  <c:v>136</c:v>
+                  <c:v>152.5</c:v>
                 </c:pt>
                 <c:pt idx="138">
-                  <c:v>136</c:v>
+                  <c:v>152.5</c:v>
                 </c:pt>
                 <c:pt idx="139">
-                  <c:v>136</c:v>
+                  <c:v>152.5</c:v>
                 </c:pt>
                 <c:pt idx="140">
-                  <c:v>136</c:v>
+                  <c:v>152.5</c:v>
                 </c:pt>
               </c:numCache>
             </c:numRef>
@@ -4741,55 +5022,55 @@
                 <c:formatCode>General</c:formatCode>
                 <c:ptCount val="17"/>
                 <c:pt idx="0">
-                  <c:v>107.2</c:v>
+                  <c:v>110.5</c:v>
                 </c:pt>
                 <c:pt idx="1">
-                  <c:v>109</c:v>
+                  <c:v>113.125</c:v>
                 </c:pt>
                 <c:pt idx="2">
-                  <c:v>110.8</c:v>
+                  <c:v>115.75</c:v>
                 </c:pt>
                 <c:pt idx="3">
-                  <c:v>112.6</c:v>
+                  <c:v>118.375</c:v>
                 </c:pt>
                 <c:pt idx="4">
-                  <c:v>114.4</c:v>
+                  <c:v>121</c:v>
                 </c:pt>
                 <c:pt idx="5">
-                  <c:v>116.2</c:v>
+                  <c:v>123.625</c:v>
                 </c:pt>
                 <c:pt idx="6">
-                  <c:v>118</c:v>
+                  <c:v>126.25</c:v>
                 </c:pt>
                 <c:pt idx="7">
-                  <c:v>119.8</c:v>
+                  <c:v>128.875</c:v>
                 </c:pt>
                 <c:pt idx="8">
-                  <c:v>121.6</c:v>
+                  <c:v>131.5</c:v>
                 </c:pt>
                 <c:pt idx="9">
-                  <c:v>123.4</c:v>
+                  <c:v>134.125</c:v>
                 </c:pt>
                 <c:pt idx="10">
-                  <c:v>125.2</c:v>
+                  <c:v>136.75</c:v>
                 </c:pt>
                 <c:pt idx="11">
-                  <c:v>127</c:v>
+                  <c:v>139.375</c:v>
                 </c:pt>
                 <c:pt idx="12">
-                  <c:v>128.8</c:v>
+                  <c:v>142</c:v>
                 </c:pt>
                 <c:pt idx="13">
-                  <c:v>130.6</c:v>
+                  <c:v>144.625</c:v>
                 </c:pt>
                 <c:pt idx="14">
-                  <c:v>132.4</c:v>
+                  <c:v>147.25</c:v>
                 </c:pt>
                 <c:pt idx="15">
-                  <c:v>134.2</c:v>
+                  <c:v>149.875</c:v>
                 </c:pt>
                 <c:pt idx="16">
-                  <c:v>136</c:v>
+                  <c:v>152.5</c:v>
                 </c:pt>
               </c:numCache>
             </c:numRef>
@@ -4870,7 +5151,7 @@
         <c:axId val="2094734552"/>
         <c:scaling>
           <c:orientation val="minMax"/>
-          <c:max val="140"/>
+          <c:max val="160"/>
           <c:min val="90"/>
         </c:scaling>
         <c:delete val="0"/>
@@ -5823,244 +6104,244 @@
                 <c:formatCode>General</c:formatCode>
                 <c:ptCount val="261"/>
                 <c:pt idx="0">
-                  <c:v>100</c:v>
+                  <c:v>70</c:v>
                 </c:pt>
                 <c:pt idx="1">
-                  <c:v>100</c:v>
+                  <c:v>70</c:v>
                 </c:pt>
                 <c:pt idx="2">
-                  <c:v>100</c:v>
+                  <c:v>70</c:v>
                 </c:pt>
                 <c:pt idx="3">
-                  <c:v>100</c:v>
+                  <c:v>70</c:v>
                 </c:pt>
                 <c:pt idx="4">
-                  <c:v>100</c:v>
+                  <c:v>70</c:v>
                 </c:pt>
                 <c:pt idx="5">
-                  <c:v>100</c:v>
+                  <c:v>70</c:v>
                 </c:pt>
                 <c:pt idx="6">
-                  <c:v>100</c:v>
+                  <c:v>70</c:v>
                 </c:pt>
                 <c:pt idx="7">
-                  <c:v>100</c:v>
+                  <c:v>70</c:v>
                 </c:pt>
                 <c:pt idx="8">
-                  <c:v>100</c:v>
+                  <c:v>70</c:v>
                 </c:pt>
                 <c:pt idx="9">
-                  <c:v>100</c:v>
+                  <c:v>70</c:v>
                 </c:pt>
                 <c:pt idx="10">
-                  <c:v>100</c:v>
+                  <c:v>70</c:v>
                 </c:pt>
                 <c:pt idx="11">
-                  <c:v>100</c:v>
+                  <c:v>70</c:v>
                 </c:pt>
                 <c:pt idx="12">
-                  <c:v>100</c:v>
+                  <c:v>70</c:v>
                 </c:pt>
                 <c:pt idx="13">
-                  <c:v>100</c:v>
+                  <c:v>70</c:v>
                 </c:pt>
                 <c:pt idx="14">
-                  <c:v>100</c:v>
+                  <c:v>70</c:v>
                 </c:pt>
                 <c:pt idx="15">
-                  <c:v>100</c:v>
+                  <c:v>70</c:v>
                 </c:pt>
                 <c:pt idx="16">
-                  <c:v>100</c:v>
+                  <c:v>70</c:v>
                 </c:pt>
                 <c:pt idx="17">
-                  <c:v>100</c:v>
+                  <c:v>70</c:v>
                 </c:pt>
                 <c:pt idx="18">
-                  <c:v>100</c:v>
+                  <c:v>70</c:v>
                 </c:pt>
                 <c:pt idx="19">
-                  <c:v>100</c:v>
+                  <c:v>70</c:v>
                 </c:pt>
                 <c:pt idx="20">
-                  <c:v>100</c:v>
+                  <c:v>70</c:v>
                 </c:pt>
                 <c:pt idx="21">
-                  <c:v>100</c:v>
+                  <c:v>70</c:v>
                 </c:pt>
                 <c:pt idx="22">
-                  <c:v>100</c:v>
+                  <c:v>70</c:v>
                 </c:pt>
                 <c:pt idx="23">
-                  <c:v>100</c:v>
+                  <c:v>70</c:v>
                 </c:pt>
                 <c:pt idx="24">
-                  <c:v>100</c:v>
+                  <c:v>70</c:v>
                 </c:pt>
                 <c:pt idx="25">
-                  <c:v>100</c:v>
+                  <c:v>70</c:v>
                 </c:pt>
                 <c:pt idx="26">
-                  <c:v>100</c:v>
+                  <c:v>70</c:v>
                 </c:pt>
                 <c:pt idx="27">
-                  <c:v>100</c:v>
+                  <c:v>70</c:v>
                 </c:pt>
                 <c:pt idx="28">
-                  <c:v>100</c:v>
+                  <c:v>70</c:v>
                 </c:pt>
                 <c:pt idx="29">
-                  <c:v>100</c:v>
+                  <c:v>70</c:v>
                 </c:pt>
                 <c:pt idx="30">
-                  <c:v>100</c:v>
+                  <c:v>70</c:v>
                 </c:pt>
                 <c:pt idx="31">
-                  <c:v>100</c:v>
+                  <c:v>70</c:v>
                 </c:pt>
                 <c:pt idx="32">
-                  <c:v>100</c:v>
+                  <c:v>70</c:v>
                 </c:pt>
                 <c:pt idx="33">
-                  <c:v>100</c:v>
+                  <c:v>70</c:v>
                 </c:pt>
                 <c:pt idx="34">
-                  <c:v>100</c:v>
+                  <c:v>70</c:v>
                 </c:pt>
                 <c:pt idx="35">
-                  <c:v>100</c:v>
+                  <c:v>70</c:v>
                 </c:pt>
                 <c:pt idx="36">
-                  <c:v>100</c:v>
+                  <c:v>70</c:v>
                 </c:pt>
                 <c:pt idx="37">
-                  <c:v>100</c:v>
+                  <c:v>70</c:v>
                 </c:pt>
                 <c:pt idx="38">
-                  <c:v>100</c:v>
+                  <c:v>70</c:v>
                 </c:pt>
                 <c:pt idx="39">
-                  <c:v>100</c:v>
+                  <c:v>70</c:v>
                 </c:pt>
                 <c:pt idx="40">
-                  <c:v>100</c:v>
+                  <c:v>70</c:v>
                 </c:pt>
                 <c:pt idx="41">
-                  <c:v>100</c:v>
+                  <c:v>70</c:v>
                 </c:pt>
                 <c:pt idx="42">
-                  <c:v>100</c:v>
+                  <c:v>70</c:v>
                 </c:pt>
                 <c:pt idx="43">
-                  <c:v>100</c:v>
+                  <c:v>70</c:v>
                 </c:pt>
                 <c:pt idx="44">
-                  <c:v>100</c:v>
+                  <c:v>70</c:v>
                 </c:pt>
                 <c:pt idx="45">
-                  <c:v>100</c:v>
+                  <c:v>70</c:v>
                 </c:pt>
                 <c:pt idx="46">
-                  <c:v>100</c:v>
+                  <c:v>70</c:v>
                 </c:pt>
                 <c:pt idx="47">
-                  <c:v>100</c:v>
+                  <c:v>70</c:v>
                 </c:pt>
                 <c:pt idx="48">
-                  <c:v>100</c:v>
+                  <c:v>70</c:v>
                 </c:pt>
                 <c:pt idx="49">
-                  <c:v>100</c:v>
+                  <c:v>70</c:v>
                 </c:pt>
                 <c:pt idx="50">
-                  <c:v>100</c:v>
+                  <c:v>70</c:v>
                 </c:pt>
                 <c:pt idx="51">
-                  <c:v>100</c:v>
+                  <c:v>70</c:v>
                 </c:pt>
                 <c:pt idx="52">
-                  <c:v>100</c:v>
+                  <c:v>70</c:v>
                 </c:pt>
                 <c:pt idx="53">
-                  <c:v>100</c:v>
+                  <c:v>70</c:v>
                 </c:pt>
                 <c:pt idx="54">
-                  <c:v>100</c:v>
+                  <c:v>70</c:v>
                 </c:pt>
                 <c:pt idx="55">
-                  <c:v>100</c:v>
+                  <c:v>70</c:v>
                 </c:pt>
                 <c:pt idx="56">
-                  <c:v>100</c:v>
+                  <c:v>70</c:v>
                 </c:pt>
                 <c:pt idx="57">
-                  <c:v>100</c:v>
+                  <c:v>70</c:v>
                 </c:pt>
                 <c:pt idx="58">
-                  <c:v>100</c:v>
+                  <c:v>70</c:v>
                 </c:pt>
                 <c:pt idx="59">
-                  <c:v>100</c:v>
+                  <c:v>70</c:v>
                 </c:pt>
                 <c:pt idx="60">
-                  <c:v>100</c:v>
+                  <c:v>70</c:v>
                 </c:pt>
                 <c:pt idx="61">
-                  <c:v>100</c:v>
+                  <c:v>70</c:v>
                 </c:pt>
                 <c:pt idx="62">
-                  <c:v>100</c:v>
+                  <c:v>70</c:v>
                 </c:pt>
                 <c:pt idx="63">
-                  <c:v>100</c:v>
+                  <c:v>70</c:v>
                 </c:pt>
                 <c:pt idx="64">
-                  <c:v>100</c:v>
+                  <c:v>70</c:v>
                 </c:pt>
                 <c:pt idx="65">
-                  <c:v>100</c:v>
+                  <c:v>70</c:v>
                 </c:pt>
                 <c:pt idx="66">
-                  <c:v>100</c:v>
+                  <c:v>70</c:v>
                 </c:pt>
                 <c:pt idx="67">
-                  <c:v>100</c:v>
+                  <c:v>70</c:v>
                 </c:pt>
                 <c:pt idx="68">
-                  <c:v>100</c:v>
+                  <c:v>70</c:v>
                 </c:pt>
                 <c:pt idx="69">
-                  <c:v>100</c:v>
+                  <c:v>70</c:v>
                 </c:pt>
                 <c:pt idx="70">
-                  <c:v>100</c:v>
+                  <c:v>70</c:v>
                 </c:pt>
                 <c:pt idx="71">
-                  <c:v>100</c:v>
+                  <c:v>70</c:v>
                 </c:pt>
                 <c:pt idx="72">
-                  <c:v>100</c:v>
+                  <c:v>70</c:v>
                 </c:pt>
                 <c:pt idx="73">
-                  <c:v>100</c:v>
+                  <c:v>70</c:v>
                 </c:pt>
                 <c:pt idx="74">
-                  <c:v>100</c:v>
+                  <c:v>70</c:v>
                 </c:pt>
                 <c:pt idx="75">
-                  <c:v>100</c:v>
+                  <c:v>70</c:v>
                 </c:pt>
                 <c:pt idx="76">
-                  <c:v>100</c:v>
+                  <c:v>70</c:v>
                 </c:pt>
                 <c:pt idx="77">
-                  <c:v>100</c:v>
+                  <c:v>70</c:v>
                 </c:pt>
                 <c:pt idx="78">
-                  <c:v>100</c:v>
+                  <c:v>70</c:v>
                 </c:pt>
                 <c:pt idx="79">
-                  <c:v>100</c:v>
+                  <c:v>70</c:v>
                 </c:pt>
                 <c:pt idx="80">
                   <c:v>100</c:v>
@@ -6243,367 +6524,367 @@
                   <c:v>100</c:v>
                 </c:pt>
                 <c:pt idx="140">
-                  <c:v>136</c:v>
+                  <c:v>152.5</c:v>
                 </c:pt>
                 <c:pt idx="141">
-                  <c:v>136</c:v>
+                  <c:v>152.5</c:v>
                 </c:pt>
                 <c:pt idx="142">
-                  <c:v>136</c:v>
+                  <c:v>152.5</c:v>
                 </c:pt>
                 <c:pt idx="143">
-                  <c:v>136</c:v>
+                  <c:v>152.5</c:v>
                 </c:pt>
                 <c:pt idx="144">
-                  <c:v>136</c:v>
+                  <c:v>152.5</c:v>
                 </c:pt>
                 <c:pt idx="145">
-                  <c:v>136</c:v>
+                  <c:v>152.5</c:v>
                 </c:pt>
                 <c:pt idx="146">
-                  <c:v>136</c:v>
+                  <c:v>152.5</c:v>
                 </c:pt>
                 <c:pt idx="147">
-                  <c:v>136</c:v>
+                  <c:v>152.5</c:v>
                 </c:pt>
                 <c:pt idx="148">
-                  <c:v>136</c:v>
+                  <c:v>152.5</c:v>
                 </c:pt>
                 <c:pt idx="149">
-                  <c:v>136</c:v>
+                  <c:v>152.5</c:v>
                 </c:pt>
                 <c:pt idx="150">
-                  <c:v>136</c:v>
+                  <c:v>152.5</c:v>
                 </c:pt>
                 <c:pt idx="151">
-                  <c:v>136</c:v>
+                  <c:v>152.5</c:v>
                 </c:pt>
                 <c:pt idx="152">
-                  <c:v>136</c:v>
+                  <c:v>152.5</c:v>
                 </c:pt>
                 <c:pt idx="153">
-                  <c:v>136</c:v>
+                  <c:v>152.5</c:v>
                 </c:pt>
                 <c:pt idx="154">
-                  <c:v>136</c:v>
+                  <c:v>152.5</c:v>
                 </c:pt>
                 <c:pt idx="155">
-                  <c:v>136</c:v>
+                  <c:v>152.5</c:v>
                 </c:pt>
                 <c:pt idx="156">
-                  <c:v>136</c:v>
+                  <c:v>152.5</c:v>
                 </c:pt>
                 <c:pt idx="157">
-                  <c:v>136</c:v>
+                  <c:v>152.5</c:v>
                 </c:pt>
                 <c:pt idx="158">
-                  <c:v>136</c:v>
+                  <c:v>152.5</c:v>
                 </c:pt>
                 <c:pt idx="159">
-                  <c:v>136</c:v>
+                  <c:v>152.5</c:v>
                 </c:pt>
                 <c:pt idx="160">
-                  <c:v>136</c:v>
+                  <c:v>152.5</c:v>
                 </c:pt>
                 <c:pt idx="161">
-                  <c:v>136</c:v>
+                  <c:v>152.5</c:v>
                 </c:pt>
                 <c:pt idx="162">
-                  <c:v>136</c:v>
+                  <c:v>152.5</c:v>
                 </c:pt>
                 <c:pt idx="163">
-                  <c:v>136</c:v>
+                  <c:v>152.5</c:v>
                 </c:pt>
                 <c:pt idx="164">
-                  <c:v>136</c:v>
+                  <c:v>152.5</c:v>
                 </c:pt>
                 <c:pt idx="165">
-                  <c:v>136</c:v>
+                  <c:v>152.5</c:v>
                 </c:pt>
                 <c:pt idx="166">
-                  <c:v>136</c:v>
+                  <c:v>152.5</c:v>
                 </c:pt>
                 <c:pt idx="167">
-                  <c:v>136</c:v>
+                  <c:v>152.5</c:v>
                 </c:pt>
                 <c:pt idx="168">
-                  <c:v>136</c:v>
+                  <c:v>152.5</c:v>
                 </c:pt>
                 <c:pt idx="169">
-                  <c:v>136</c:v>
+                  <c:v>152.5</c:v>
                 </c:pt>
                 <c:pt idx="170">
-                  <c:v>136</c:v>
+                  <c:v>152.5</c:v>
                 </c:pt>
                 <c:pt idx="171">
-                  <c:v>136</c:v>
+                  <c:v>152.5</c:v>
                 </c:pt>
                 <c:pt idx="172">
-                  <c:v>136</c:v>
+                  <c:v>152.5</c:v>
                 </c:pt>
                 <c:pt idx="173">
-                  <c:v>136</c:v>
+                  <c:v>152.5</c:v>
                 </c:pt>
                 <c:pt idx="174">
-                  <c:v>136</c:v>
+                  <c:v>152.5</c:v>
                 </c:pt>
                 <c:pt idx="175">
-                  <c:v>136</c:v>
+                  <c:v>152.5</c:v>
                 </c:pt>
                 <c:pt idx="176">
-                  <c:v>136</c:v>
+                  <c:v>152.5</c:v>
                 </c:pt>
                 <c:pt idx="177">
-                  <c:v>136</c:v>
+                  <c:v>152.5</c:v>
                 </c:pt>
                 <c:pt idx="178">
-                  <c:v>136</c:v>
+                  <c:v>152.5</c:v>
                 </c:pt>
                 <c:pt idx="179">
-                  <c:v>136</c:v>
+                  <c:v>152.5</c:v>
                 </c:pt>
                 <c:pt idx="180">
-                  <c:v>136</c:v>
+                  <c:v>152.5</c:v>
                 </c:pt>
                 <c:pt idx="181">
-                  <c:v>136</c:v>
+                  <c:v>152.5</c:v>
                 </c:pt>
                 <c:pt idx="182">
-                  <c:v>136</c:v>
+                  <c:v>152.5</c:v>
                 </c:pt>
                 <c:pt idx="183">
-                  <c:v>136</c:v>
+                  <c:v>152.5</c:v>
                 </c:pt>
                 <c:pt idx="184">
-                  <c:v>136</c:v>
+                  <c:v>152.5</c:v>
                 </c:pt>
                 <c:pt idx="185">
-                  <c:v>136</c:v>
+                  <c:v>152.5</c:v>
                 </c:pt>
                 <c:pt idx="186">
-                  <c:v>136</c:v>
+                  <c:v>152.5</c:v>
                 </c:pt>
                 <c:pt idx="187">
-                  <c:v>136</c:v>
+                  <c:v>152.5</c:v>
                 </c:pt>
                 <c:pt idx="188">
-                  <c:v>136</c:v>
+                  <c:v>152.5</c:v>
                 </c:pt>
                 <c:pt idx="189">
-                  <c:v>136</c:v>
+                  <c:v>152.5</c:v>
                 </c:pt>
                 <c:pt idx="190">
-                  <c:v>136</c:v>
+                  <c:v>152.5</c:v>
                 </c:pt>
                 <c:pt idx="191">
-                  <c:v>136</c:v>
+                  <c:v>152.5</c:v>
                 </c:pt>
                 <c:pt idx="192">
-                  <c:v>136</c:v>
+                  <c:v>152.5</c:v>
                 </c:pt>
                 <c:pt idx="193">
-                  <c:v>136</c:v>
+                  <c:v>152.5</c:v>
                 </c:pt>
                 <c:pt idx="194">
-                  <c:v>136</c:v>
+                  <c:v>152.5</c:v>
                 </c:pt>
                 <c:pt idx="195">
-                  <c:v>136</c:v>
+                  <c:v>152.5</c:v>
                 </c:pt>
                 <c:pt idx="196">
-                  <c:v>136</c:v>
+                  <c:v>152.5</c:v>
                 </c:pt>
                 <c:pt idx="197">
-                  <c:v>136</c:v>
+                  <c:v>152.5</c:v>
                 </c:pt>
                 <c:pt idx="198">
-                  <c:v>136</c:v>
+                  <c:v>152.5</c:v>
                 </c:pt>
                 <c:pt idx="199">
-                  <c:v>136</c:v>
+                  <c:v>152.5</c:v>
                 </c:pt>
                 <c:pt idx="200">
-                  <c:v>136</c:v>
+                  <c:v>152.5</c:v>
                 </c:pt>
                 <c:pt idx="201">
-                  <c:v>136</c:v>
+                  <c:v>152.5</c:v>
                 </c:pt>
                 <c:pt idx="202">
-                  <c:v>136</c:v>
+                  <c:v>152.5</c:v>
                 </c:pt>
                 <c:pt idx="203">
-                  <c:v>136</c:v>
+                  <c:v>152.5</c:v>
                 </c:pt>
                 <c:pt idx="204">
-                  <c:v>136</c:v>
+                  <c:v>152.5</c:v>
                 </c:pt>
                 <c:pt idx="205">
-                  <c:v>136</c:v>
+                  <c:v>152.5</c:v>
                 </c:pt>
                 <c:pt idx="206">
-                  <c:v>136</c:v>
+                  <c:v>152.5</c:v>
                 </c:pt>
                 <c:pt idx="207">
-                  <c:v>136</c:v>
+                  <c:v>152.5</c:v>
                 </c:pt>
                 <c:pt idx="208">
-                  <c:v>136</c:v>
+                  <c:v>152.5</c:v>
                 </c:pt>
                 <c:pt idx="209">
-                  <c:v>136</c:v>
+                  <c:v>152.5</c:v>
                 </c:pt>
                 <c:pt idx="210">
-                  <c:v>136</c:v>
+                  <c:v>152.5</c:v>
                 </c:pt>
                 <c:pt idx="211">
-                  <c:v>136</c:v>
+                  <c:v>152.5</c:v>
                 </c:pt>
                 <c:pt idx="212">
-                  <c:v>136</c:v>
+                  <c:v>152.5</c:v>
                 </c:pt>
                 <c:pt idx="213">
-                  <c:v>136</c:v>
+                  <c:v>152.5</c:v>
                 </c:pt>
                 <c:pt idx="214">
-                  <c:v>136</c:v>
+                  <c:v>152.5</c:v>
                 </c:pt>
                 <c:pt idx="215">
-                  <c:v>136</c:v>
+                  <c:v>152.5</c:v>
                 </c:pt>
                 <c:pt idx="216">
-                  <c:v>136</c:v>
+                  <c:v>152.5</c:v>
                 </c:pt>
                 <c:pt idx="217">
-                  <c:v>136</c:v>
+                  <c:v>152.5</c:v>
                 </c:pt>
                 <c:pt idx="218">
-                  <c:v>136</c:v>
+                  <c:v>152.5</c:v>
                 </c:pt>
                 <c:pt idx="219">
-                  <c:v>136</c:v>
+                  <c:v>152.5</c:v>
                 </c:pt>
                 <c:pt idx="220">
-                  <c:v>136</c:v>
+                  <c:v>152.5</c:v>
                 </c:pt>
                 <c:pt idx="221">
-                  <c:v>136</c:v>
+                  <c:v>152.5</c:v>
                 </c:pt>
                 <c:pt idx="222">
-                  <c:v>136</c:v>
+                  <c:v>152.5</c:v>
                 </c:pt>
                 <c:pt idx="223">
-                  <c:v>136</c:v>
+                  <c:v>152.5</c:v>
                 </c:pt>
                 <c:pt idx="224">
-                  <c:v>136</c:v>
+                  <c:v>152.5</c:v>
                 </c:pt>
                 <c:pt idx="225">
-                  <c:v>136</c:v>
+                  <c:v>152.5</c:v>
                 </c:pt>
                 <c:pt idx="226">
-                  <c:v>136</c:v>
+                  <c:v>152.5</c:v>
                 </c:pt>
                 <c:pt idx="227">
-                  <c:v>136</c:v>
+                  <c:v>152.5</c:v>
                 </c:pt>
                 <c:pt idx="228">
-                  <c:v>136</c:v>
+                  <c:v>152.5</c:v>
                 </c:pt>
                 <c:pt idx="229">
-                  <c:v>136</c:v>
+                  <c:v>152.5</c:v>
                 </c:pt>
                 <c:pt idx="230">
-                  <c:v>136</c:v>
+                  <c:v>152.5</c:v>
                 </c:pt>
                 <c:pt idx="231">
-                  <c:v>136</c:v>
+                  <c:v>152.5</c:v>
                 </c:pt>
                 <c:pt idx="232">
-                  <c:v>136</c:v>
+                  <c:v>152.5</c:v>
                 </c:pt>
                 <c:pt idx="233">
-                  <c:v>136</c:v>
+                  <c:v>152.5</c:v>
                 </c:pt>
                 <c:pt idx="234">
-                  <c:v>136</c:v>
+                  <c:v>152.5</c:v>
                 </c:pt>
                 <c:pt idx="235">
-                  <c:v>136</c:v>
+                  <c:v>152.5</c:v>
                 </c:pt>
                 <c:pt idx="236">
-                  <c:v>136</c:v>
+                  <c:v>152.5</c:v>
                 </c:pt>
                 <c:pt idx="237">
-                  <c:v>136</c:v>
+                  <c:v>152.5</c:v>
                 </c:pt>
                 <c:pt idx="238">
-                  <c:v>136</c:v>
+                  <c:v>152.5</c:v>
                 </c:pt>
                 <c:pt idx="239">
-                  <c:v>136</c:v>
+                  <c:v>152.5</c:v>
                 </c:pt>
                 <c:pt idx="240">
-                  <c:v>136</c:v>
+                  <c:v>152.5</c:v>
                 </c:pt>
                 <c:pt idx="241">
-                  <c:v>136</c:v>
+                  <c:v>152.5</c:v>
                 </c:pt>
                 <c:pt idx="242">
-                  <c:v>136</c:v>
+                  <c:v>152.5</c:v>
                 </c:pt>
                 <c:pt idx="243">
-                  <c:v>136</c:v>
+                  <c:v>152.5</c:v>
                 </c:pt>
                 <c:pt idx="244">
-                  <c:v>136</c:v>
+                  <c:v>152.5</c:v>
                 </c:pt>
                 <c:pt idx="245">
-                  <c:v>136</c:v>
+                  <c:v>152.5</c:v>
                 </c:pt>
                 <c:pt idx="246">
-                  <c:v>136</c:v>
+                  <c:v>152.5</c:v>
                 </c:pt>
                 <c:pt idx="247">
-                  <c:v>136</c:v>
+                  <c:v>152.5</c:v>
                 </c:pt>
                 <c:pt idx="248">
-                  <c:v>136</c:v>
+                  <c:v>152.5</c:v>
                 </c:pt>
                 <c:pt idx="249">
-                  <c:v>136</c:v>
+                  <c:v>152.5</c:v>
                 </c:pt>
                 <c:pt idx="250">
-                  <c:v>136</c:v>
+                  <c:v>152.5</c:v>
                 </c:pt>
                 <c:pt idx="251">
-                  <c:v>136</c:v>
+                  <c:v>152.5</c:v>
                 </c:pt>
                 <c:pt idx="252">
-                  <c:v>136</c:v>
+                  <c:v>152.5</c:v>
                 </c:pt>
                 <c:pt idx="253">
-                  <c:v>136</c:v>
+                  <c:v>152.5</c:v>
                 </c:pt>
                 <c:pt idx="254">
-                  <c:v>136</c:v>
+                  <c:v>152.5</c:v>
                 </c:pt>
                 <c:pt idx="255">
-                  <c:v>136</c:v>
+                  <c:v>152.5</c:v>
                 </c:pt>
                 <c:pt idx="256">
-                  <c:v>136</c:v>
+                  <c:v>152.5</c:v>
                 </c:pt>
                 <c:pt idx="257">
-                  <c:v>136</c:v>
+                  <c:v>152.5</c:v>
                 </c:pt>
                 <c:pt idx="258">
-                  <c:v>136</c:v>
+                  <c:v>152.5</c:v>
                 </c:pt>
                 <c:pt idx="259">
-                  <c:v>136</c:v>
+                  <c:v>152.5</c:v>
                 </c:pt>
                 <c:pt idx="260">
-                  <c:v>136</c:v>
+                  <c:v>152.5</c:v>
                 </c:pt>
               </c:numCache>
             </c:numRef>
@@ -8343,7 +8624,7 @@
         <c:axId val="2094734552"/>
         <c:scaling>
           <c:orientation val="minMax"/>
-          <c:max val="160"/>
+          <c:max val="170"/>
           <c:min val="20"/>
         </c:scaling>
         <c:delete val="0"/>
@@ -8477,7 +8758,7 @@
               <c:strCache>
                 <c:ptCount val="1"/>
                 <c:pt idx="0">
-                  <c:v>Protected principal</c:v>
+                  <c:v>Principal</c:v>
                 </c:pt>
               </c:strCache>
             </c:strRef>
@@ -9314,7 +9595,7 @@
                     </a:solidFill>
                     <a:latin typeface="Arial"/>
                   </a:rPr>
-                  <a:t>Basket on observation date</a:t>
+                  <a:t>Basket on any date</a:t>
                 </a:r>
               </a:p>
             </c:rich>
@@ -9355,7 +9636,7 @@
         <c:auto val="1"/>
         <c:lblAlgn val="ctr"/>
         <c:noMultiLvlLbl val="1"/>
-        <c:majorUnit val="30"/>
+        <c:majorUnit val="40"/>
       </c:valAx>
       <c:valAx>
         <c:axId val="2094734552"/>
@@ -9452,7 +9733,7 @@
               <c:strCache>
                 <c:ptCount val="1"/>
                 <c:pt idx="0">
-                  <c:v>Long quarterly digitals</c:v>
+                  <c:v>Coupon digitals</c:v>
                 </c:pt>
               </c:strCache>
             </c:strRef>
@@ -10046,187 +10327,187 @@
                   <c:v>0</c:v>
                 </c:pt>
                 <c:pt idx="60">
-                  <c:v>1.7999999999999998</c:v>
+                  <c:v>2.625</c:v>
                 </c:pt>
                 <c:pt idx="61">
-                  <c:v>1.7999999999999998</c:v>
+                  <c:v>2.625</c:v>
                 </c:pt>
                 <c:pt idx="62">
-                  <c:v>1.7999999999999998</c:v>
+                  <c:v>2.625</c:v>
                 </c:pt>
                 <c:pt idx="63">
-                  <c:v>1.7999999999999998</c:v>
+                  <c:v>2.625</c:v>
                 </c:pt>
                 <c:pt idx="64">
-                  <c:v>1.7999999999999998</c:v>
+                  <c:v>2.625</c:v>
                 </c:pt>
                 <c:pt idx="65">
-                  <c:v>1.7999999999999998</c:v>
+                  <c:v>2.625</c:v>
                 </c:pt>
                 <c:pt idx="66">
-                  <c:v>1.7999999999999998</c:v>
+                  <c:v>2.625</c:v>
                 </c:pt>
                 <c:pt idx="67">
-                  <c:v>1.7999999999999998</c:v>
+                  <c:v>2.625</c:v>
                 </c:pt>
                 <c:pt idx="68">
-                  <c:v>1.7999999999999998</c:v>
+                  <c:v>2.625</c:v>
                 </c:pt>
                 <c:pt idx="69">
-                  <c:v>1.7999999999999998</c:v>
+                  <c:v>2.625</c:v>
                 </c:pt>
                 <c:pt idx="70">
-                  <c:v>1.7999999999999998</c:v>
+                  <c:v>2.625</c:v>
                 </c:pt>
                 <c:pt idx="71">
-                  <c:v>1.7999999999999998</c:v>
+                  <c:v>2.625</c:v>
                 </c:pt>
                 <c:pt idx="72">
-                  <c:v>1.7999999999999998</c:v>
+                  <c:v>2.625</c:v>
                 </c:pt>
                 <c:pt idx="73">
-                  <c:v>1.7999999999999998</c:v>
+                  <c:v>2.625</c:v>
                 </c:pt>
                 <c:pt idx="74">
-                  <c:v>1.7999999999999998</c:v>
+                  <c:v>2.625</c:v>
                 </c:pt>
                 <c:pt idx="75">
-                  <c:v>1.7999999999999998</c:v>
+                  <c:v>2.625</c:v>
                 </c:pt>
                 <c:pt idx="76">
-                  <c:v>1.7999999999999998</c:v>
+                  <c:v>2.625</c:v>
                 </c:pt>
                 <c:pt idx="77">
-                  <c:v>1.7999999999999998</c:v>
+                  <c:v>2.625</c:v>
                 </c:pt>
                 <c:pt idx="78">
-                  <c:v>1.7999999999999998</c:v>
+                  <c:v>2.625</c:v>
                 </c:pt>
                 <c:pt idx="79">
-                  <c:v>1.7999999999999998</c:v>
+                  <c:v>2.625</c:v>
                 </c:pt>
                 <c:pt idx="80">
-                  <c:v>1.7999999999999998</c:v>
+                  <c:v>2.625</c:v>
                 </c:pt>
                 <c:pt idx="81">
-                  <c:v>1.7999999999999998</c:v>
+                  <c:v>2.625</c:v>
                 </c:pt>
                 <c:pt idx="82">
-                  <c:v>1.7999999999999998</c:v>
+                  <c:v>2.625</c:v>
                 </c:pt>
                 <c:pt idx="83">
-                  <c:v>1.7999999999999998</c:v>
+                  <c:v>2.625</c:v>
                 </c:pt>
                 <c:pt idx="84">
-                  <c:v>1.7999999999999998</c:v>
+                  <c:v>2.625</c:v>
                 </c:pt>
                 <c:pt idx="85">
-                  <c:v>1.7999999999999998</c:v>
+                  <c:v>2.625</c:v>
                 </c:pt>
                 <c:pt idx="86">
-                  <c:v>1.7999999999999998</c:v>
+                  <c:v>2.625</c:v>
                 </c:pt>
                 <c:pt idx="87">
-                  <c:v>1.7999999999999998</c:v>
+                  <c:v>2.625</c:v>
                 </c:pt>
                 <c:pt idx="88">
-                  <c:v>1.7999999999999998</c:v>
+                  <c:v>2.625</c:v>
                 </c:pt>
                 <c:pt idx="89">
-                  <c:v>1.7999999999999998</c:v>
+                  <c:v>2.625</c:v>
                 </c:pt>
                 <c:pt idx="90">
-                  <c:v>1.7999999999999998</c:v>
+                  <c:v>2.625</c:v>
                 </c:pt>
                 <c:pt idx="91">
-                  <c:v>1.7999999999999998</c:v>
+                  <c:v>2.625</c:v>
                 </c:pt>
                 <c:pt idx="92">
-                  <c:v>1.7999999999999998</c:v>
+                  <c:v>2.625</c:v>
                 </c:pt>
                 <c:pt idx="93">
-                  <c:v>1.7999999999999998</c:v>
+                  <c:v>2.625</c:v>
                 </c:pt>
                 <c:pt idx="94">
-                  <c:v>1.7999999999999998</c:v>
+                  <c:v>2.625</c:v>
                 </c:pt>
                 <c:pt idx="95">
-                  <c:v>1.7999999999999998</c:v>
+                  <c:v>2.625</c:v>
                 </c:pt>
                 <c:pt idx="96">
-                  <c:v>1.7999999999999998</c:v>
+                  <c:v>2.625</c:v>
                 </c:pt>
                 <c:pt idx="97">
-                  <c:v>1.7999999999999998</c:v>
+                  <c:v>2.625</c:v>
                 </c:pt>
                 <c:pt idx="98">
-                  <c:v>1.7999999999999998</c:v>
+                  <c:v>2.625</c:v>
                 </c:pt>
                 <c:pt idx="99">
-                  <c:v>1.7999999999999998</c:v>
+                  <c:v>2.625</c:v>
                 </c:pt>
                 <c:pt idx="100">
-                  <c:v>1.7999999999999998</c:v>
+                  <c:v>2.625</c:v>
                 </c:pt>
                 <c:pt idx="101">
-                  <c:v>1.7999999999999998</c:v>
+                  <c:v>2.625</c:v>
                 </c:pt>
                 <c:pt idx="102">
-                  <c:v>1.7999999999999998</c:v>
+                  <c:v>2.625</c:v>
                 </c:pt>
                 <c:pt idx="103">
-                  <c:v>1.7999999999999998</c:v>
+                  <c:v>2.625</c:v>
                 </c:pt>
                 <c:pt idx="104">
-                  <c:v>1.7999999999999998</c:v>
+                  <c:v>2.625</c:v>
                 </c:pt>
                 <c:pt idx="105">
-                  <c:v>1.7999999999999998</c:v>
+                  <c:v>2.625</c:v>
                 </c:pt>
                 <c:pt idx="106">
-                  <c:v>1.7999999999999998</c:v>
+                  <c:v>2.625</c:v>
                 </c:pt>
                 <c:pt idx="107">
-                  <c:v>1.7999999999999998</c:v>
+                  <c:v>2.625</c:v>
                 </c:pt>
                 <c:pt idx="108">
-                  <c:v>1.7999999999999998</c:v>
+                  <c:v>2.625</c:v>
                 </c:pt>
                 <c:pt idx="109">
-                  <c:v>1.7999999999999998</c:v>
+                  <c:v>2.625</c:v>
                 </c:pt>
                 <c:pt idx="110">
-                  <c:v>1.7999999999999998</c:v>
+                  <c:v>2.625</c:v>
                 </c:pt>
                 <c:pt idx="111">
-                  <c:v>1.7999999999999998</c:v>
+                  <c:v>2.625</c:v>
                 </c:pt>
                 <c:pt idx="112">
-                  <c:v>1.7999999999999998</c:v>
+                  <c:v>2.625</c:v>
                 </c:pt>
                 <c:pt idx="113">
-                  <c:v>1.7999999999999998</c:v>
+                  <c:v>2.625</c:v>
                 </c:pt>
                 <c:pt idx="114">
-                  <c:v>1.7999999999999998</c:v>
+                  <c:v>2.625</c:v>
                 </c:pt>
                 <c:pt idx="115">
-                  <c:v>1.7999999999999998</c:v>
+                  <c:v>2.625</c:v>
                 </c:pt>
                 <c:pt idx="116">
-                  <c:v>1.7999999999999998</c:v>
+                  <c:v>2.625</c:v>
                 </c:pt>
                 <c:pt idx="117">
-                  <c:v>1.7999999999999998</c:v>
+                  <c:v>2.625</c:v>
                 </c:pt>
                 <c:pt idx="118">
-                  <c:v>1.7999999999999998</c:v>
+                  <c:v>2.625</c:v>
                 </c:pt>
                 <c:pt idx="119">
-                  <c:v>1.7999999999999998</c:v>
+                  <c:v>2.625</c:v>
                 </c:pt>
                 <c:pt idx="120">
-                  <c:v>1.7999999999999998</c:v>
+                  <c:v>2.625</c:v>
                 </c:pt>
               </c:numCache>
             </c:numRef>
@@ -10289,7 +10570,7 @@
                     </a:solidFill>
                     <a:latin typeface="Arial"/>
                   </a:rPr>
-                  <a:t>Basket on observation date</a:t>
+                  <a:t>Basket on any date</a:t>
                 </a:r>
               </a:p>
             </c:rich>
@@ -10330,13 +10611,13 @@
         <c:auto val="1"/>
         <c:lblAlgn val="ctr"/>
         <c:noMultiLvlLbl val="1"/>
-        <c:majorUnit val="30"/>
+        <c:majorUnit val="40"/>
       </c:valAx>
       <c:valAx>
         <c:axId val="2094734552"/>
         <c:scaling>
           <c:orientation val="minMax"/>
-          <c:max val="2.2"/>
+          <c:max val="3.2"/>
           <c:min val="-0.5"/>
         </c:scaling>
         <c:delete val="1"/>
@@ -10427,18 +10708,18 @@
               <c:strCache>
                 <c:ptCount val="1"/>
                 <c:pt idx="0">
-                  <c:v>Autocall (Natixis's side)</c:v>
+                  <c:v>Autocall (Natixis)</c:v>
                 </c:pt>
               </c:strCache>
             </c:strRef>
           </c:tx>
           <c:spPr>
             <a:solidFill>
-              <a:srgbClr val="B8433A"/>
+              <a:srgbClr val="8FA6AA"/>
             </a:solidFill>
             <a:ln w="25400" cap="flat">
               <a:solidFill>
-                <a:srgbClr val="B8433A"/>
+                <a:srgbClr val="8FA6AA"/>
               </a:solidFill>
               <a:prstDash val="solid"/>
               <a:round/>
@@ -10450,11 +10731,11 @@
             <c:size val="6"/>
             <c:spPr>
               <a:solidFill>
-                <a:srgbClr val="B8433A"/>
+                <a:srgbClr val="8FA6AA"/>
               </a:solidFill>
               <a:ln w="9525" cap="flat">
                 <a:solidFill>
-                  <a:srgbClr val="B8433A"/>
+                  <a:srgbClr val="8FA6AA"/>
                 </a:solidFill>
                 <a:prstDash val="solid"/>
                 <a:round/>
@@ -11264,7 +11545,7 @@
                     </a:solidFill>
                     <a:latin typeface="Arial"/>
                   </a:rPr>
-                  <a:t>Basket on observation date</a:t>
+                  <a:t>Basket on any date</a:t>
                 </a:r>
               </a:p>
             </c:rich>
@@ -11305,7 +11586,7 @@
         <c:auto val="1"/>
         <c:lblAlgn val="ctr"/>
         <c:noMultiLvlLbl val="1"/>
-        <c:majorUnit val="30"/>
+        <c:majorUnit val="40"/>
       </c:valAx>
       <c:valAx>
         <c:axId val="2094734552"/>
@@ -11383,6 +11664,981 @@
 </file>
 
 <file path=ppt/charts/chart8.xml><?xml version="1.0" encoding="utf-8"?>
+<c:chartSpace xmlns:c="http://schemas.openxmlformats.org/drawingml/2006/chart" xmlns:a="http://schemas.openxmlformats.org/drawingml/2006/main" xmlns:r="http://schemas.openxmlformats.org/officeDocument/2006/relationships">
+  <c:date1904 val="0"/>
+  <c:roundedCorners val="1"/>
+  <c:chart>
+    <c:autoTitleDeleted val="1"/>
+    <c:plotArea>
+      <c:layout/>
+      <c:scatterChart>
+        <c:scatterStyle val="lineMarker"/>
+        <c:varyColors val="0"/>
+        <c:ser>
+          <c:idx val="0"/>
+          <c:order val="0"/>
+          <c:tx>
+            <c:strRef>
+              <c:f>Sheet1!$B$1</c:f>
+              <c:strCache>
+                <c:ptCount val="1"/>
+                <c:pt idx="0">
+                  <c:v>70% put pair</c:v>
+                </c:pt>
+              </c:strCache>
+            </c:strRef>
+          </c:tx>
+          <c:spPr>
+            <a:solidFill>
+              <a:srgbClr val="B8433A"/>
+            </a:solidFill>
+            <a:ln w="25400" cap="flat">
+              <a:solidFill>
+                <a:srgbClr val="B8433A"/>
+              </a:solidFill>
+              <a:prstDash val="solid"/>
+              <a:round/>
+            </a:ln>
+            <a:effectLst/>
+          </c:spPr>
+          <c:marker>
+            <c:symbol val="none"/>
+            <c:size val="6"/>
+            <c:spPr>
+              <a:solidFill>
+                <a:srgbClr val="B8433A"/>
+              </a:solidFill>
+              <a:ln w="9525" cap="flat">
+                <a:solidFill>
+                  <a:srgbClr val="B8433A"/>
+                </a:solidFill>
+                <a:prstDash val="solid"/>
+                <a:round/>
+              </a:ln>
+              <a:effectLst/>
+            </c:spPr>
+          </c:marker>
+          <c:xVal>
+            <c:numRef>
+              <c:f>Sheet1!$A$2:$A$122</c:f>
+              <c:numCache>
+                <c:formatCode>General</c:formatCode>
+                <c:ptCount val="121"/>
+                <c:pt idx="0">
+                  <c:v>40</c:v>
+                </c:pt>
+                <c:pt idx="1">
+                  <c:v>41</c:v>
+                </c:pt>
+                <c:pt idx="2">
+                  <c:v>42</c:v>
+                </c:pt>
+                <c:pt idx="3">
+                  <c:v>43</c:v>
+                </c:pt>
+                <c:pt idx="4">
+                  <c:v>44</c:v>
+                </c:pt>
+                <c:pt idx="5">
+                  <c:v>45</c:v>
+                </c:pt>
+                <c:pt idx="6">
+                  <c:v>46</c:v>
+                </c:pt>
+                <c:pt idx="7">
+                  <c:v>47</c:v>
+                </c:pt>
+                <c:pt idx="8">
+                  <c:v>48</c:v>
+                </c:pt>
+                <c:pt idx="9">
+                  <c:v>49</c:v>
+                </c:pt>
+                <c:pt idx="10">
+                  <c:v>50</c:v>
+                </c:pt>
+                <c:pt idx="11">
+                  <c:v>51</c:v>
+                </c:pt>
+                <c:pt idx="12">
+                  <c:v>52</c:v>
+                </c:pt>
+                <c:pt idx="13">
+                  <c:v>53</c:v>
+                </c:pt>
+                <c:pt idx="14">
+                  <c:v>54</c:v>
+                </c:pt>
+                <c:pt idx="15">
+                  <c:v>55</c:v>
+                </c:pt>
+                <c:pt idx="16">
+                  <c:v>56</c:v>
+                </c:pt>
+                <c:pt idx="17">
+                  <c:v>57</c:v>
+                </c:pt>
+                <c:pt idx="18">
+                  <c:v>58</c:v>
+                </c:pt>
+                <c:pt idx="19">
+                  <c:v>59</c:v>
+                </c:pt>
+                <c:pt idx="20">
+                  <c:v>60</c:v>
+                </c:pt>
+                <c:pt idx="21">
+                  <c:v>61</c:v>
+                </c:pt>
+                <c:pt idx="22">
+                  <c:v>62</c:v>
+                </c:pt>
+                <c:pt idx="23">
+                  <c:v>63</c:v>
+                </c:pt>
+                <c:pt idx="24">
+                  <c:v>64</c:v>
+                </c:pt>
+                <c:pt idx="25">
+                  <c:v>65</c:v>
+                </c:pt>
+                <c:pt idx="26">
+                  <c:v>66</c:v>
+                </c:pt>
+                <c:pt idx="27">
+                  <c:v>67</c:v>
+                </c:pt>
+                <c:pt idx="28">
+                  <c:v>68</c:v>
+                </c:pt>
+                <c:pt idx="29">
+                  <c:v>69</c:v>
+                </c:pt>
+                <c:pt idx="30">
+                  <c:v>70</c:v>
+                </c:pt>
+                <c:pt idx="31">
+                  <c:v>71</c:v>
+                </c:pt>
+                <c:pt idx="32">
+                  <c:v>72</c:v>
+                </c:pt>
+                <c:pt idx="33">
+                  <c:v>73</c:v>
+                </c:pt>
+                <c:pt idx="34">
+                  <c:v>74</c:v>
+                </c:pt>
+                <c:pt idx="35">
+                  <c:v>75</c:v>
+                </c:pt>
+                <c:pt idx="36">
+                  <c:v>76</c:v>
+                </c:pt>
+                <c:pt idx="37">
+                  <c:v>77</c:v>
+                </c:pt>
+                <c:pt idx="38">
+                  <c:v>78</c:v>
+                </c:pt>
+                <c:pt idx="39">
+                  <c:v>79</c:v>
+                </c:pt>
+                <c:pt idx="40">
+                  <c:v>80</c:v>
+                </c:pt>
+                <c:pt idx="41">
+                  <c:v>81</c:v>
+                </c:pt>
+                <c:pt idx="42">
+                  <c:v>82</c:v>
+                </c:pt>
+                <c:pt idx="43">
+                  <c:v>83</c:v>
+                </c:pt>
+                <c:pt idx="44">
+                  <c:v>84</c:v>
+                </c:pt>
+                <c:pt idx="45">
+                  <c:v>85</c:v>
+                </c:pt>
+                <c:pt idx="46">
+                  <c:v>86</c:v>
+                </c:pt>
+                <c:pt idx="47">
+                  <c:v>87</c:v>
+                </c:pt>
+                <c:pt idx="48">
+                  <c:v>88</c:v>
+                </c:pt>
+                <c:pt idx="49">
+                  <c:v>89</c:v>
+                </c:pt>
+                <c:pt idx="50">
+                  <c:v>90</c:v>
+                </c:pt>
+                <c:pt idx="51">
+                  <c:v>91</c:v>
+                </c:pt>
+                <c:pt idx="52">
+                  <c:v>92</c:v>
+                </c:pt>
+                <c:pt idx="53">
+                  <c:v>93</c:v>
+                </c:pt>
+                <c:pt idx="54">
+                  <c:v>94</c:v>
+                </c:pt>
+                <c:pt idx="55">
+                  <c:v>95</c:v>
+                </c:pt>
+                <c:pt idx="56">
+                  <c:v>96</c:v>
+                </c:pt>
+                <c:pt idx="57">
+                  <c:v>97</c:v>
+                </c:pt>
+                <c:pt idx="58">
+                  <c:v>98</c:v>
+                </c:pt>
+                <c:pt idx="59">
+                  <c:v>99</c:v>
+                </c:pt>
+                <c:pt idx="60">
+                  <c:v>100</c:v>
+                </c:pt>
+                <c:pt idx="61">
+                  <c:v>101</c:v>
+                </c:pt>
+                <c:pt idx="62">
+                  <c:v>102</c:v>
+                </c:pt>
+                <c:pt idx="63">
+                  <c:v>103</c:v>
+                </c:pt>
+                <c:pt idx="64">
+                  <c:v>104</c:v>
+                </c:pt>
+                <c:pt idx="65">
+                  <c:v>105</c:v>
+                </c:pt>
+                <c:pt idx="66">
+                  <c:v>106</c:v>
+                </c:pt>
+                <c:pt idx="67">
+                  <c:v>107</c:v>
+                </c:pt>
+                <c:pt idx="68">
+                  <c:v>108</c:v>
+                </c:pt>
+                <c:pt idx="69">
+                  <c:v>109</c:v>
+                </c:pt>
+                <c:pt idx="70">
+                  <c:v>110</c:v>
+                </c:pt>
+                <c:pt idx="71">
+                  <c:v>111</c:v>
+                </c:pt>
+                <c:pt idx="72">
+                  <c:v>112</c:v>
+                </c:pt>
+                <c:pt idx="73">
+                  <c:v>113</c:v>
+                </c:pt>
+                <c:pt idx="74">
+                  <c:v>114</c:v>
+                </c:pt>
+                <c:pt idx="75">
+                  <c:v>115</c:v>
+                </c:pt>
+                <c:pt idx="76">
+                  <c:v>116</c:v>
+                </c:pt>
+                <c:pt idx="77">
+                  <c:v>117</c:v>
+                </c:pt>
+                <c:pt idx="78">
+                  <c:v>118</c:v>
+                </c:pt>
+                <c:pt idx="79">
+                  <c:v>119</c:v>
+                </c:pt>
+                <c:pt idx="80">
+                  <c:v>120</c:v>
+                </c:pt>
+                <c:pt idx="81">
+                  <c:v>121</c:v>
+                </c:pt>
+                <c:pt idx="82">
+                  <c:v>122</c:v>
+                </c:pt>
+                <c:pt idx="83">
+                  <c:v>123</c:v>
+                </c:pt>
+                <c:pt idx="84">
+                  <c:v>124</c:v>
+                </c:pt>
+                <c:pt idx="85">
+                  <c:v>125</c:v>
+                </c:pt>
+                <c:pt idx="86">
+                  <c:v>126</c:v>
+                </c:pt>
+                <c:pt idx="87">
+                  <c:v>127</c:v>
+                </c:pt>
+                <c:pt idx="88">
+                  <c:v>128</c:v>
+                </c:pt>
+                <c:pt idx="89">
+                  <c:v>129</c:v>
+                </c:pt>
+                <c:pt idx="90">
+                  <c:v>130</c:v>
+                </c:pt>
+                <c:pt idx="91">
+                  <c:v>131</c:v>
+                </c:pt>
+                <c:pt idx="92">
+                  <c:v>132</c:v>
+                </c:pt>
+                <c:pt idx="93">
+                  <c:v>133</c:v>
+                </c:pt>
+                <c:pt idx="94">
+                  <c:v>134</c:v>
+                </c:pt>
+                <c:pt idx="95">
+                  <c:v>135</c:v>
+                </c:pt>
+                <c:pt idx="96">
+                  <c:v>136</c:v>
+                </c:pt>
+                <c:pt idx="97">
+                  <c:v>137</c:v>
+                </c:pt>
+                <c:pt idx="98">
+                  <c:v>138</c:v>
+                </c:pt>
+                <c:pt idx="99">
+                  <c:v>139</c:v>
+                </c:pt>
+                <c:pt idx="100">
+                  <c:v>140</c:v>
+                </c:pt>
+                <c:pt idx="101">
+                  <c:v>141</c:v>
+                </c:pt>
+                <c:pt idx="102">
+                  <c:v>142</c:v>
+                </c:pt>
+                <c:pt idx="103">
+                  <c:v>143</c:v>
+                </c:pt>
+                <c:pt idx="104">
+                  <c:v>144</c:v>
+                </c:pt>
+                <c:pt idx="105">
+                  <c:v>145</c:v>
+                </c:pt>
+                <c:pt idx="106">
+                  <c:v>146</c:v>
+                </c:pt>
+                <c:pt idx="107">
+                  <c:v>147</c:v>
+                </c:pt>
+                <c:pt idx="108">
+                  <c:v>148</c:v>
+                </c:pt>
+                <c:pt idx="109">
+                  <c:v>149</c:v>
+                </c:pt>
+                <c:pt idx="110">
+                  <c:v>150</c:v>
+                </c:pt>
+                <c:pt idx="111">
+                  <c:v>151</c:v>
+                </c:pt>
+                <c:pt idx="112">
+                  <c:v>152</c:v>
+                </c:pt>
+                <c:pt idx="113">
+                  <c:v>153</c:v>
+                </c:pt>
+                <c:pt idx="114">
+                  <c:v>154</c:v>
+                </c:pt>
+                <c:pt idx="115">
+                  <c:v>155</c:v>
+                </c:pt>
+                <c:pt idx="116">
+                  <c:v>156</c:v>
+                </c:pt>
+                <c:pt idx="117">
+                  <c:v>157</c:v>
+                </c:pt>
+                <c:pt idx="118">
+                  <c:v>158</c:v>
+                </c:pt>
+                <c:pt idx="119">
+                  <c:v>159</c:v>
+                </c:pt>
+                <c:pt idx="120">
+                  <c:v>160</c:v>
+                </c:pt>
+              </c:numCache>
+            </c:numRef>
+          </c:xVal>
+          <c:yVal>
+            <c:numRef>
+              <c:f>Sheet1!$B$2:$B$122</c:f>
+              <c:numCache>
+                <c:formatCode>General</c:formatCode>
+                <c:ptCount val="121"/>
+                <c:pt idx="0">
+                  <c:v>-30</c:v>
+                </c:pt>
+                <c:pt idx="1">
+                  <c:v>-30</c:v>
+                </c:pt>
+                <c:pt idx="2">
+                  <c:v>-30</c:v>
+                </c:pt>
+                <c:pt idx="3">
+                  <c:v>-30</c:v>
+                </c:pt>
+                <c:pt idx="4">
+                  <c:v>-30</c:v>
+                </c:pt>
+                <c:pt idx="5">
+                  <c:v>-30</c:v>
+                </c:pt>
+                <c:pt idx="6">
+                  <c:v>-30</c:v>
+                </c:pt>
+                <c:pt idx="7">
+                  <c:v>-30</c:v>
+                </c:pt>
+                <c:pt idx="8">
+                  <c:v>-30</c:v>
+                </c:pt>
+                <c:pt idx="9">
+                  <c:v>-30</c:v>
+                </c:pt>
+                <c:pt idx="10">
+                  <c:v>-30</c:v>
+                </c:pt>
+                <c:pt idx="11">
+                  <c:v>-30</c:v>
+                </c:pt>
+                <c:pt idx="12">
+                  <c:v>-30</c:v>
+                </c:pt>
+                <c:pt idx="13">
+                  <c:v>-30</c:v>
+                </c:pt>
+                <c:pt idx="14">
+                  <c:v>-30</c:v>
+                </c:pt>
+                <c:pt idx="15">
+                  <c:v>-30</c:v>
+                </c:pt>
+                <c:pt idx="16">
+                  <c:v>-30</c:v>
+                </c:pt>
+                <c:pt idx="17">
+                  <c:v>-30</c:v>
+                </c:pt>
+                <c:pt idx="18">
+                  <c:v>-30</c:v>
+                </c:pt>
+                <c:pt idx="19">
+                  <c:v>-30</c:v>
+                </c:pt>
+                <c:pt idx="20">
+                  <c:v>-30</c:v>
+                </c:pt>
+                <c:pt idx="21">
+                  <c:v>-30</c:v>
+                </c:pt>
+                <c:pt idx="22">
+                  <c:v>-30</c:v>
+                </c:pt>
+                <c:pt idx="23">
+                  <c:v>-30</c:v>
+                </c:pt>
+                <c:pt idx="24">
+                  <c:v>-30</c:v>
+                </c:pt>
+                <c:pt idx="25">
+                  <c:v>-30</c:v>
+                </c:pt>
+                <c:pt idx="26">
+                  <c:v>-30</c:v>
+                </c:pt>
+                <c:pt idx="27">
+                  <c:v>-30</c:v>
+                </c:pt>
+                <c:pt idx="28">
+                  <c:v>-30</c:v>
+                </c:pt>
+                <c:pt idx="29">
+                  <c:v>-30</c:v>
+                </c:pt>
+                <c:pt idx="30">
+                  <c:v>0</c:v>
+                </c:pt>
+                <c:pt idx="31">
+                  <c:v>0</c:v>
+                </c:pt>
+                <c:pt idx="32">
+                  <c:v>0</c:v>
+                </c:pt>
+                <c:pt idx="33">
+                  <c:v>0</c:v>
+                </c:pt>
+                <c:pt idx="34">
+                  <c:v>0</c:v>
+                </c:pt>
+                <c:pt idx="35">
+                  <c:v>0</c:v>
+                </c:pt>
+                <c:pt idx="36">
+                  <c:v>0</c:v>
+                </c:pt>
+                <c:pt idx="37">
+                  <c:v>0</c:v>
+                </c:pt>
+                <c:pt idx="38">
+                  <c:v>0</c:v>
+                </c:pt>
+                <c:pt idx="39">
+                  <c:v>0</c:v>
+                </c:pt>
+                <c:pt idx="40">
+                  <c:v>0</c:v>
+                </c:pt>
+                <c:pt idx="41">
+                  <c:v>0</c:v>
+                </c:pt>
+                <c:pt idx="42">
+                  <c:v>0</c:v>
+                </c:pt>
+                <c:pt idx="43">
+                  <c:v>0</c:v>
+                </c:pt>
+                <c:pt idx="44">
+                  <c:v>0</c:v>
+                </c:pt>
+                <c:pt idx="45">
+                  <c:v>0</c:v>
+                </c:pt>
+                <c:pt idx="46">
+                  <c:v>0</c:v>
+                </c:pt>
+                <c:pt idx="47">
+                  <c:v>0</c:v>
+                </c:pt>
+                <c:pt idx="48">
+                  <c:v>0</c:v>
+                </c:pt>
+                <c:pt idx="49">
+                  <c:v>0</c:v>
+                </c:pt>
+                <c:pt idx="50">
+                  <c:v>0</c:v>
+                </c:pt>
+                <c:pt idx="51">
+                  <c:v>0</c:v>
+                </c:pt>
+                <c:pt idx="52">
+                  <c:v>0</c:v>
+                </c:pt>
+                <c:pt idx="53">
+                  <c:v>0</c:v>
+                </c:pt>
+                <c:pt idx="54">
+                  <c:v>0</c:v>
+                </c:pt>
+                <c:pt idx="55">
+                  <c:v>0</c:v>
+                </c:pt>
+                <c:pt idx="56">
+                  <c:v>0</c:v>
+                </c:pt>
+                <c:pt idx="57">
+                  <c:v>0</c:v>
+                </c:pt>
+                <c:pt idx="58">
+                  <c:v>0</c:v>
+                </c:pt>
+                <c:pt idx="59">
+                  <c:v>0</c:v>
+                </c:pt>
+                <c:pt idx="60">
+                  <c:v>0</c:v>
+                </c:pt>
+                <c:pt idx="61">
+                  <c:v>0</c:v>
+                </c:pt>
+                <c:pt idx="62">
+                  <c:v>0</c:v>
+                </c:pt>
+                <c:pt idx="63">
+                  <c:v>0</c:v>
+                </c:pt>
+                <c:pt idx="64">
+                  <c:v>0</c:v>
+                </c:pt>
+                <c:pt idx="65">
+                  <c:v>0</c:v>
+                </c:pt>
+                <c:pt idx="66">
+                  <c:v>0</c:v>
+                </c:pt>
+                <c:pt idx="67">
+                  <c:v>0</c:v>
+                </c:pt>
+                <c:pt idx="68">
+                  <c:v>0</c:v>
+                </c:pt>
+                <c:pt idx="69">
+                  <c:v>0</c:v>
+                </c:pt>
+                <c:pt idx="70">
+                  <c:v>0</c:v>
+                </c:pt>
+                <c:pt idx="71">
+                  <c:v>0</c:v>
+                </c:pt>
+                <c:pt idx="72">
+                  <c:v>0</c:v>
+                </c:pt>
+                <c:pt idx="73">
+                  <c:v>0</c:v>
+                </c:pt>
+                <c:pt idx="74">
+                  <c:v>0</c:v>
+                </c:pt>
+                <c:pt idx="75">
+                  <c:v>0</c:v>
+                </c:pt>
+                <c:pt idx="76">
+                  <c:v>0</c:v>
+                </c:pt>
+                <c:pt idx="77">
+                  <c:v>0</c:v>
+                </c:pt>
+                <c:pt idx="78">
+                  <c:v>0</c:v>
+                </c:pt>
+                <c:pt idx="79">
+                  <c:v>0</c:v>
+                </c:pt>
+                <c:pt idx="80">
+                  <c:v>0</c:v>
+                </c:pt>
+                <c:pt idx="81">
+                  <c:v>0</c:v>
+                </c:pt>
+                <c:pt idx="82">
+                  <c:v>0</c:v>
+                </c:pt>
+                <c:pt idx="83">
+                  <c:v>0</c:v>
+                </c:pt>
+                <c:pt idx="84">
+                  <c:v>0</c:v>
+                </c:pt>
+                <c:pt idx="85">
+                  <c:v>0</c:v>
+                </c:pt>
+                <c:pt idx="86">
+                  <c:v>0</c:v>
+                </c:pt>
+                <c:pt idx="87">
+                  <c:v>0</c:v>
+                </c:pt>
+                <c:pt idx="88">
+                  <c:v>0</c:v>
+                </c:pt>
+                <c:pt idx="89">
+                  <c:v>0</c:v>
+                </c:pt>
+                <c:pt idx="90">
+                  <c:v>0</c:v>
+                </c:pt>
+                <c:pt idx="91">
+                  <c:v>0</c:v>
+                </c:pt>
+                <c:pt idx="92">
+                  <c:v>0</c:v>
+                </c:pt>
+                <c:pt idx="93">
+                  <c:v>0</c:v>
+                </c:pt>
+                <c:pt idx="94">
+                  <c:v>0</c:v>
+                </c:pt>
+                <c:pt idx="95">
+                  <c:v>0</c:v>
+                </c:pt>
+                <c:pt idx="96">
+                  <c:v>0</c:v>
+                </c:pt>
+                <c:pt idx="97">
+                  <c:v>0</c:v>
+                </c:pt>
+                <c:pt idx="98">
+                  <c:v>0</c:v>
+                </c:pt>
+                <c:pt idx="99">
+                  <c:v>0</c:v>
+                </c:pt>
+                <c:pt idx="100">
+                  <c:v>0</c:v>
+                </c:pt>
+                <c:pt idx="101">
+                  <c:v>0</c:v>
+                </c:pt>
+                <c:pt idx="102">
+                  <c:v>0</c:v>
+                </c:pt>
+                <c:pt idx="103">
+                  <c:v>0</c:v>
+                </c:pt>
+                <c:pt idx="104">
+                  <c:v>0</c:v>
+                </c:pt>
+                <c:pt idx="105">
+                  <c:v>0</c:v>
+                </c:pt>
+                <c:pt idx="106">
+                  <c:v>0</c:v>
+                </c:pt>
+                <c:pt idx="107">
+                  <c:v>0</c:v>
+                </c:pt>
+                <c:pt idx="108">
+                  <c:v>0</c:v>
+                </c:pt>
+                <c:pt idx="109">
+                  <c:v>0</c:v>
+                </c:pt>
+                <c:pt idx="110">
+                  <c:v>0</c:v>
+                </c:pt>
+                <c:pt idx="111">
+                  <c:v>0</c:v>
+                </c:pt>
+                <c:pt idx="112">
+                  <c:v>0</c:v>
+                </c:pt>
+                <c:pt idx="113">
+                  <c:v>0</c:v>
+                </c:pt>
+                <c:pt idx="114">
+                  <c:v>0</c:v>
+                </c:pt>
+                <c:pt idx="115">
+                  <c:v>0</c:v>
+                </c:pt>
+                <c:pt idx="116">
+                  <c:v>0</c:v>
+                </c:pt>
+                <c:pt idx="117">
+                  <c:v>0</c:v>
+                </c:pt>
+                <c:pt idx="118">
+                  <c:v>0</c:v>
+                </c:pt>
+                <c:pt idx="119">
+                  <c:v>0</c:v>
+                </c:pt>
+                <c:pt idx="120">
+                  <c:v>0</c:v>
+                </c:pt>
+              </c:numCache>
+            </c:numRef>
+          </c:yVal>
+          <c:smooth val="0"/>
+        </c:ser>
+        <c:dLbls>
+          <c:numFmt formatCode="General" sourceLinked="0"/>
+          <c:txPr>
+            <a:bodyPr/>
+            <a:lstStyle/>
+            <a:p>
+              <a:pPr>
+                <a:defRPr b="0" i="0" strike="noStrike" sz="1200" u="none">
+                  <a:solidFill>
+                    <a:srgbClr val="000000"/>
+                  </a:solidFill>
+                  <a:latin typeface="Arial"/>
+                </a:defRPr>
+              </a:pPr>
+            </a:p>
+          </c:txPr>
+          <c:showLegendKey val="0"/>
+          <c:showVal val="0"/>
+          <c:showCatName val="0"/>
+          <c:showSerName val="0"/>
+          <c:showPercent val="0"/>
+          <c:showBubbleSize val="0"/>
+        </c:dLbls>
+        <c:axId val="2094734554"/>
+        <c:axId val="2094734552"/>
+      </c:scatterChart>
+      <c:valAx>
+        <c:axId val="2094734554"/>
+        <c:scaling>
+          <c:orientation val="minMax"/>
+          <c:max val="160"/>
+          <c:min val="40"/>
+        </c:scaling>
+        <c:delete val="0"/>
+        <c:axPos val="b"/>
+        <c:title>
+          <c:tx>
+            <c:rich>
+              <a:bodyPr/>
+              <a:lstStyle/>
+              <a:p>
+                <a:pPr>
+                  <a:defRPr sz="700" b="0" i="0" u="none" strike="noStrike">
+                    <a:solidFill>
+                      <a:srgbClr val="5F7176"/>
+                    </a:solidFill>
+                    <a:latin typeface="Arial"/>
+                  </a:defRPr>
+                </a:pPr>
+                <a:r>
+                  <a:rPr sz="700" b="0" i="0" u="none" strike="noStrike">
+                    <a:solidFill>
+                      <a:srgbClr val="5F7176"/>
+                    </a:solidFill>
+                    <a:latin typeface="Arial"/>
+                  </a:rPr>
+                  <a:t>Basket at Y5</a:t>
+                </a:r>
+              </a:p>
+            </c:rich>
+          </c:tx>
+          <c:layout/>
+          <c:overlay val="0"/>
+        </c:title>
+        <c:numFmt formatCode="General" sourceLinked="1"/>
+        <c:majorTickMark val="none"/>
+        <c:minorTickMark val="none"/>
+        <c:tickLblPos val="nextTo"/>
+        <c:spPr>
+          <a:ln w="12700" cap="flat">
+            <a:solidFill>
+              <a:srgbClr val="8FA6AA"/>
+            </a:solidFill>
+            <a:prstDash val="solid"/>
+            <a:round/>
+          </a:ln>
+        </c:spPr>
+        <c:txPr>
+          <a:bodyPr/>
+          <a:lstStyle/>
+          <a:p>
+            <a:pPr>
+              <a:defRPr sz="700" b="0" i="0" u="none" strike="noStrike">
+                <a:solidFill>
+                  <a:srgbClr val="5F7176"/>
+                </a:solidFill>
+                <a:latin typeface="Calibri"/>
+              </a:defRPr>
+            </a:pPr>
+            <a:endParaRPr lang="en-US"/>
+          </a:p>
+        </c:txPr>
+        <c:crossAx val="2094734552"/>
+        <c:crosses val="autoZero"/>
+        <c:auto val="1"/>
+        <c:lblAlgn val="ctr"/>
+        <c:noMultiLvlLbl val="1"/>
+        <c:majorUnit val="40"/>
+      </c:valAx>
+      <c:valAx>
+        <c:axId val="2094734552"/>
+        <c:scaling>
+          <c:orientation val="minMax"/>
+          <c:max val="6"/>
+          <c:min val="-36"/>
+        </c:scaling>
+        <c:delete val="1"/>
+        <c:axPos val="l"/>
+        <c:majorGridlines>
+          <c:spPr>
+            <a:ln w="6350" cap="flat">
+              <a:solidFill>
+                <a:srgbClr val="DCE7E5"/>
+              </a:solidFill>
+              <a:prstDash val="solid"/>
+              <a:round/>
+            </a:ln>
+          </c:spPr>
+        </c:majorGridlines>
+        <c:numFmt formatCode="General" sourceLinked="0"/>
+        <c:majorTickMark val="none"/>
+        <c:minorTickMark val="none"/>
+        <c:tickLblPos val="nextTo"/>
+        <c:spPr>
+          <a:ln w="12700" cap="flat">
+            <a:noFill/>
+            <a:prstDash val="solid"/>
+            <a:round/>
+          </a:ln>
+        </c:spPr>
+        <c:txPr>
+          <a:bodyPr/>
+          <a:lstStyle/>
+          <a:p>
+            <a:pPr>
+              <a:defRPr sz="900" b="0" i="0" u="none" strike="noStrike">
+                <a:solidFill>
+                  <a:srgbClr val="5F7176"/>
+                </a:solidFill>
+                <a:latin typeface="Calibri"/>
+              </a:defRPr>
+            </a:pPr>
+            <a:endParaRPr lang="en-US"/>
+          </a:p>
+        </c:txPr>
+        <c:crossAx val="2094734554"/>
+        <c:crosses val="autoZero"/>
+        <c:crossBetween val="midCat"/>
+      </c:valAx>
+      <c:spPr>
+        <a:noFill/>
+        <a:ln>
+          <a:noFill/>
+        </a:ln>
+        <a:effectLst/>
+      </c:spPr>
+    </c:plotArea>
+    <c:plotVisOnly val="1"/>
+    <c:dispBlanksAs val="span"/>
+    <c:showDLblsOverMax val="1"/>
+  </c:chart>
+  <c:spPr>
+    <a:noFill/>
+    <a:ln>
+      <a:noFill/>
+    </a:ln>
+    <a:effectLst/>
+  </c:spPr>
+  <c:externalData r:id="rId1">
+    <c:autoUpdate val="0"/>
+  </c:externalData>
+</c:chartSpace>
+</file>
+
+<file path=ppt/charts/chart9.xml><?xml version="1.0" encoding="utf-8"?>
 <c:chartSpace xmlns:c="http://schemas.openxmlformats.org/drawingml/2006/chart" xmlns:a="http://schemas.openxmlformats.org/drawingml/2006/main" xmlns:r="http://schemas.openxmlformats.org/officeDocument/2006/relationships">
   <c:date1904 val="0"/>
   <c:roundedCorners val="1"/>
@@ -12577,287 +13833,6 @@
           <c:orientation val="minMax"/>
           <c:max val="180"/>
           <c:min val="40"/>
-        </c:scaling>
-        <c:delete val="0"/>
-        <c:axPos val="l"/>
-        <c:majorGridlines>
-          <c:spPr>
-            <a:ln w="6350" cap="flat">
-              <a:solidFill>
-                <a:srgbClr val="DCE7E5"/>
-              </a:solidFill>
-              <a:prstDash val="solid"/>
-              <a:round/>
-            </a:ln>
-          </c:spPr>
-        </c:majorGridlines>
-        <c:numFmt formatCode="0&quot;%&quot;" sourceLinked="0"/>
-        <c:majorTickMark val="out"/>
-        <c:minorTickMark val="none"/>
-        <c:tickLblPos val="nextTo"/>
-        <c:spPr>
-          <a:ln w="12700" cap="flat">
-            <a:noFill/>
-            <a:prstDash val="solid"/>
-            <a:round/>
-          </a:ln>
-        </c:spPr>
-        <c:txPr>
-          <a:bodyPr/>
-          <a:lstStyle/>
-          <a:p>
-            <a:pPr>
-              <a:defRPr sz="900" b="0" i="0" u="none" strike="noStrike">
-                <a:solidFill>
-                  <a:srgbClr val="5F7176"/>
-                </a:solidFill>
-                <a:latin typeface="Calibri"/>
-              </a:defRPr>
-            </a:pPr>
-            <a:endParaRPr lang="en-US"/>
-          </a:p>
-        </c:txPr>
-        <c:crossAx val="2094734554"/>
-        <c:crosses val="autoZero"/>
-        <c:crossBetween val="between"/>
-      </c:valAx>
-      <c:spPr>
-        <a:noFill/>
-        <a:ln>
-          <a:noFill/>
-        </a:ln>
-        <a:effectLst/>
-      </c:spPr>
-    </c:plotArea>
-    <c:plotVisOnly val="1"/>
-    <c:dispBlanksAs val="span"/>
-  </c:chart>
-  <c:spPr>
-    <a:noFill/>
-    <a:ln>
-      <a:noFill/>
-    </a:ln>
-    <a:effectLst/>
-  </c:spPr>
-  <c:externalData r:id="rId1">
-    <c:autoUpdate val="0"/>
-  </c:externalData>
-</c:chartSpace>
-</file>
-
-<file path=ppt/charts/chart9.xml><?xml version="1.0" encoding="utf-8"?>
-<c:chartSpace xmlns:c="http://schemas.openxmlformats.org/drawingml/2006/chart" xmlns:a="http://schemas.openxmlformats.org/drawingml/2006/main" xmlns:r="http://schemas.openxmlformats.org/officeDocument/2006/relationships">
-  <c:date1904 val="0"/>
-  <c:roundedCorners val="1"/>
-  <c:chart>
-    <c:title>
-      <c:tx>
-        <c:rich>
-          <a:bodyPr/>
-          <a:lstStyle/>
-          <a:p>
-            <a:pPr>
-              <a:defRPr sz="950" b="0" i="0" u="none" strike="noStrike">
-                <a:solidFill>
-                  <a:srgbClr val="1D2B30"/>
-                </a:solidFill>
-                <a:latin typeface="Calibri"/>
-              </a:defRPr>
-            </a:pPr>
-            <a:r>
-              <a:rPr sz="950" b="0" i="0" u="none" strike="noStrike">
-                <a:solidFill>
-                  <a:srgbClr val="1D2B30"/>
-                </a:solidFill>
-                <a:latin typeface="Calibri"/>
-              </a:rPr>
-              <a:t>Cumulative autocall probability (risk-neutral)</a:t>
-            </a:r>
-          </a:p>
-        </c:rich>
-      </c:tx>
-      <c:layout/>
-      <c:overlay val="0"/>
-    </c:title>
-    <c:autoTitleDeleted val="0"/>
-    <c:plotArea>
-      <c:layout/>
-      <c:barChart>
-        <c:barDir val="col"/>
-        <c:grouping val="clustered"/>
-        <c:varyColors val="0"/>
-        <c:ser>
-          <c:idx val="0"/>
-          <c:order val="0"/>
-          <c:tx>
-            <c:strRef>
-              <c:f>Sheet1!$B$1</c:f>
-              <c:strCache>
-                <c:ptCount val="1"/>
-                <c:pt idx="0">
-                  <c:v>Cumulative call probability</c:v>
-                </c:pt>
-              </c:strCache>
-            </c:strRef>
-          </c:tx>
-          <c:spPr>
-            <a:solidFill>
-              <a:srgbClr val="0F8B8D"/>
-            </a:solidFill>
-            <a:effectLst/>
-          </c:spPr>
-          <c:invertIfNegative val="0"/>
-          <c:dLbls>
-            <c:numFmt formatCode="0&quot;%&quot;" sourceLinked="0"/>
-            <c:txPr>
-              <a:bodyPr/>
-              <a:lstStyle/>
-              <a:p>
-                <a:pPr>
-                  <a:defRPr b="0" i="0" strike="noStrike" sz="900" u="none">
-                    <a:solidFill>
-                      <a:srgbClr val="1D2B30"/>
-                    </a:solidFill>
-                    <a:latin typeface="Arial"/>
-                  </a:defRPr>
-                </a:pPr>
-              </a:p>
-            </c:txPr>
-            <c:showLegendKey val="0"/>
-            <c:showVal val="1"/>
-            <c:showCatName val="0"/>
-            <c:showSerName val="0"/>
-            <c:showPercent val="0"/>
-            <c:showBubbleSize val="0"/>
-            <c:showLeaderLines val="0"/>
-          </c:dLbls>
-          <c:cat>
-            <c:multiLvlStrRef>
-              <c:f>Sheet1!$A$2:$A$6</c:f>
-              <c:multiLvlStrCache>
-                <c:ptCount val="5"/>
-                <c:lvl>
-                  <c:pt idx="0">
-                    <c:v>Y1</c:v>
-                  </c:pt>
-                  <c:pt idx="1">
-                    <c:v>Y2</c:v>
-                  </c:pt>
-                  <c:pt idx="2">
-                    <c:v>Y3</c:v>
-                  </c:pt>
-                  <c:pt idx="3">
-                    <c:v>Y4</c:v>
-                  </c:pt>
-                  <c:pt idx="4">
-                    <c:v>Y5</c:v>
-                  </c:pt>
-                </c:lvl>
-              </c:multiLvlStrCache>
-            </c:multiLvlStrRef>
-          </c:cat>
-          <c:val>
-            <c:numRef>
-              <c:f>Sheet1!$B$2:$B$6</c:f>
-              <c:numCache>
-                <c:formatCode>General</c:formatCode>
-                <c:ptCount val="5"/>
-                <c:pt idx="0">
-                  <c:v>48.2</c:v>
-                </c:pt>
-                <c:pt idx="1">
-                  <c:v>65.9</c:v>
-                </c:pt>
-                <c:pt idx="2">
-                  <c:v>72.4</c:v>
-                </c:pt>
-                <c:pt idx="3">
-                  <c:v>76.1</c:v>
-                </c:pt>
-                <c:pt idx="4">
-                  <c:v>78.6</c:v>
-                </c:pt>
-              </c:numCache>
-            </c:numRef>
-          </c:val>
-        </c:ser>
-        <c:dLbls>
-          <c:numFmt formatCode="0&quot;%&quot;" sourceLinked="0"/>
-          <c:txPr>
-            <a:bodyPr/>
-            <a:lstStyle/>
-            <a:p>
-              <a:pPr>
-                <a:defRPr b="0" i="0" strike="noStrike" sz="900" u="none">
-                  <a:solidFill>
-                    <a:srgbClr val="1D2B30"/>
-                  </a:solidFill>
-                  <a:latin typeface="Arial"/>
-                </a:defRPr>
-              </a:pPr>
-            </a:p>
-          </c:txPr>
-          <c:showLegendKey val="0"/>
-          <c:showVal val="1"/>
-          <c:showCatName val="0"/>
-          <c:showSerName val="0"/>
-          <c:showPercent val="0"/>
-          <c:showBubbleSize val="0"/>
-          <c:showLeaderLines val="0"/>
-        </c:dLbls>
-        <c:gapWidth val="150"/>
-        <c:overlap val="0"/>
-        <c:axId val="2094734554"/>
-        <c:axId val="2094734552"/>
-        <c:axId val="2094734556"/>
-      </c:barChart>
-      <c:catAx>
-        <c:axId val="2094734554"/>
-        <c:scaling>
-          <c:orientation val="minMax"/>
-        </c:scaling>
-        <c:delete val="0"/>
-        <c:axPos val="b"/>
-        <c:numFmt formatCode="General" sourceLinked="1"/>
-        <c:majorTickMark val="out"/>
-        <c:minorTickMark val="none"/>
-        <c:tickLblPos val="low"/>
-        <c:spPr>
-          <a:ln w="12700" cap="flat">
-            <a:solidFill>
-              <a:srgbClr val="8FA6AA"/>
-            </a:solidFill>
-            <a:prstDash val="solid"/>
-            <a:round/>
-          </a:ln>
-        </c:spPr>
-        <c:txPr>
-          <a:bodyPr/>
-          <a:lstStyle/>
-          <a:p>
-            <a:pPr>
-              <a:defRPr sz="900" b="0" i="0" u="none" strike="noStrike">
-                <a:solidFill>
-                  <a:srgbClr val="5F7176"/>
-                </a:solidFill>
-                <a:latin typeface="Calibri"/>
-              </a:defRPr>
-            </a:pPr>
-            <a:endParaRPr lang="en-US"/>
-          </a:p>
-        </c:txPr>
-        <c:crossAx val="2094734552"/>
-        <c:crosses val="autoZero"/>
-        <c:auto val="1"/>
-        <c:lblAlgn val="ctr"/>
-        <c:noMultiLvlLbl val="1"/>
-      </c:catAx>
-      <c:valAx>
-        <c:axId val="2094734552"/>
-        <c:scaling>
-          <c:orientation val="minMax"/>
-          <c:max val="100"/>
-          <c:min val="0"/>
         </c:scaling>
         <c:delete val="0"/>
         <c:axPos val="l"/>
@@ -13321,7 +14296,7 @@
           <a:p>
             <a:r>
               <a:rPr lang="en-US" dirty="0"/>
-              <a:t>Title. One-line pitch: a capital-protected autocallable on five Asian ETFs covering the AI-hardware supply chain (pan-Asian and Japanese semiconductors, Taiwan, Korea) plus an ESG sleeve. It pays a coupon whenever the basket is at or above its starting level, catches up any missed coupons, and returns 100% of capital at maturity whatever the basket does.</a:t>
+              <a:t>Title. One-line pitch: a buffered autocallable on five Asian ETFs covering the AI-hardware supply chain (pan-Asian and Japanese semiconductors, Taiwan, Korea) plus an ESG sleeve. It pays a coupon whenever the basket is at or above its starting level and catches up any missed coupons. At maturity the family gets 100% back unless the basket has fallen more than 30%; even then an embedded 70% put returns 70%, so the loss is capped at 30%.</a:t>
             </a:r>
             <a:endParaRPr lang="en-US" dirty="0"/>
           </a:p>
@@ -13409,7 +14384,7 @@
           <a:p>
             <a:r>
               <a:rPr lang="en-US" dirty="0"/>
-              <a:t>Mini-charts show each leg's payoff on a single observation date against the basket level (the autocall leg is illustrative: it shows the remaining coupon stream switching off). Unlike a classic autocall, there is no short put: the coupon is funded by cheap protected principal and by the autocall cutting the coupon stream short when the basket is strong.</a:t>
+              <a:t>Mini-charts show each leg's payoff against the basket level (the autocall leg is illustrative: it shows the remaining coupon stream switching off). The put pair is the key: like a classic autocall, the client sells a put at the 70% barrier, which funds the double-digit coupon; unlike a classic autocall, the note buys a 70% put back, so below 70% the loss is a fixed 30% instead of the whole fall. Together they are a 30% digital put struck at 70%, observed only at maturity.</a:t>
             </a:r>
             <a:endParaRPr lang="en-US" dirty="0"/>
           </a:p>
@@ -13497,7 +14472,7 @@
           <a:p>
             <a:r>
               <a:rPr lang="en-US" dirty="0"/>
-              <a:t>Walk the five scenarios. The 2022-style path is the key one: a 30% drawdown in the first year that would scare a direct investor, yet the note pays all 15 quarterly coupons at once when the basket recovers at Q15. The two bad paths are where protection earns its keep: the basket is down 12% and 45%, the family gets 100% back.</a:t>
+              <a:t>Walk the five scenarios. The 2022-style path is the key one: a 30% drawdown in the first year that would scare a direct investor, yet the note pays all 15 quarterly coupons at once when the basket recovers at Q15. The two bad paths show the two layers of protection: at −12% the 30% buffer returns 100%; at −45% the embedded put returns 70%, so the family loses 30% instead of 45%.</a:t>
             </a:r>
             <a:endParaRPr lang="en-US" dirty="0"/>
           </a:p>
@@ -13585,7 +14560,7 @@
           <a:p>
             <a:r>
               <a:rPr lang="en-US" dirty="0"/>
-              <a:t>The table answers 'what if markets go nowhere?'. Even at 0% equity return the note is called in ~67% of paths, because volatility alone takes the basket back to 100% on some date. The honest cost of protection: in ~13% of paths (risk-neutral) the family earns nothing for 5 years, but it never loses capital.</a:t>
+              <a:t>The table answers 'what if markets go nowhere?'. Even at 0% equity return the note is called in ~67% of paths, because volatility alone takes the basket back to 100% on some date. The honest cost of the higher coupon: in ~16% of paths (risk-neutral; 12% at 8% equity returns) the basket ends below 70% and the family gets 70% back, but never less.</a:t>
             </a:r>
             <a:endParaRPr lang="en-US" dirty="0"/>
           </a:p>
@@ -13673,7 +14648,7 @@
           <a:p>
             <a:r>
               <a:rPr lang="en-US" dirty="0"/>
-              <a:t>Investor risks on the left, desk hedges on the right. There is no capital-loss line: the main honest risks are earning nothing for 5 years, capped upside, and Natixis credit. The 7.20% coupon sits below the 7.9% fair level in every sensitivity we ran, so the offer is robust to market moves before the trade date.</a:t>
+              <a:t>Investor risks on the left, desk hedges on the right. The capital-loss line is explicit: below 70% at maturity the family loses 30%, never more. The other honest risks are capped upside and Natixis credit. The 10.50% coupon sits below the 11.2% fair level in every sensitivity we ran, so the offer is robust to market moves before the trade date.</a:t>
             </a:r>
             <a:endParaRPr lang="en-US" dirty="0"/>
           </a:p>
@@ -14113,7 +15088,7 @@
           <a:p>
             <a:r>
               <a:rPr lang="en-US" dirty="0"/>
-              <a:t>Client needs translate one-for-one into design features. The key insight: this is legacy money. The family wants growth and Asian tech exposure, but the first rule is not to lose capital. That points us to an autocallable whose principal is fully protected, with a coupon that rewards recovery and is never lost, thanks to memory.</a:t>
+              <a:t>Client needs translate one-for-one into design features. The key insight: this is legacy money. The family wants growth and Asian tech exposure, but the first rule is to never suffer a large loss. That points us to an autocallable with a 30% buffer and a hard 70% floor, paying a double-digit coupon that rewards recovery and is never lost, thanks to memory.</a:t>
             </a:r>
             <a:endParaRPr lang="en-US" dirty="0"/>
           </a:p>
@@ -14201,7 +15176,7 @@
           <a:p>
             <a:r>
               <a:rPr lang="en-US" dirty="0"/>
-              <a:t>Two arguments. (1) Structural: AI spending flows straight into Asian semiconductors: Taiwan makes the chips, Korea the memory, Japan the chip-making tools, plus an ESG-screened Taiwan sleeve. (2) Structuring: high USD rates make the protected principal cheap, and Asian volatility makes the 100% coupon trigger likely to be hit, so we can protect capital and still pay above the funding rate.</a:t>
+              <a:t>Two arguments. (1) Structural: AI spending flows straight into Asian semiconductors: Taiwan makes the chips, Korea the memory, Japan the chip-making tools, plus an ESG-screened Taiwan sleeve. (2) Structuring: high USD rates make the principal cheap, Asian volatility makes the 100% coupon trigger likely to be hit, and a 70% put caps the downside, so we can pay a double-digit coupon with a hard floor.</a:t>
             </a:r>
             <a:endParaRPr lang="en-US" dirty="0"/>
           </a:p>
@@ -14377,7 +15352,7 @@
           <a:p>
             <a:r>
               <a:rPr lang="en-US" dirty="0"/>
-              <a:t>The table is the key design argument. Every design that puts capital at risk only pays 6–11% for a roughly 10–11% chance of a loss; pushing the loss probability down with a calmer basket kills the coupon. Protecting capital fully keeps a coupon above the funding rate because the principal is cheap at 5.69% rates and the autocall usually returns it early.</a:t>
+              <a:t>The table is the key design argument. Full protection is safe but pays under 8%. Removing all protection pays more but exposes the family to the whole drawdown in a crash. Our design sits between: the family accepts the first 30% of loss below the barrier risk only in a deep fall, and Natixis embeds a 70% put so the worst case is 70% back. The put costs a little over 2 points of coupon, which is the price of the hard floor.</a:t>
             </a:r>
             <a:endParaRPr lang="en-US" dirty="0"/>
           </a:p>
@@ -14465,7 +15440,7 @@
           <a:p>
             <a:r>
               <a:rPr lang="en-US" dirty="0"/>
-              <a:t>Explain the note as one question asked every quarter: is the basket at or above where it started? If yes, the family is paid 1.80% for that quarter plus any coupons missed before, and from Year 1 the note also ends with 100% back. If the answer is never yes, the family still gets 100% back at Year 5.</a:t>
+              <a:t>Explain the note as one question asked every quarter: is the basket at or above where it started? If yes, the family is paid 2.63% for that quarter plus any coupons missed before, and from Year 1 the note also ends with 100% back. If the answer is never yes, the family gets 100% back at Year 5 as long as the basket is at or above 70%, and 70% back if it is lower.</a:t>
             </a:r>
             <a:endParaRPr lang="en-US" dirty="0"/>
           </a:p>
@@ -14553,7 +15528,7 @@
           <a:p>
             <a:r>
               <a:rPr lang="en-US" dirty="0"/>
-              <a:t>Left chart: the cash ladder. Each quarter the note lives adds 1.80% of notional, paid either on the date or later through memory. Right chart: if the note reaches Year 5 without being called, there are only two zones. At or above 100% the family receives 136.0%; below 100% it receives 100%, plus any coupons already paid in Q1–Q3. Above +36.0% the basket beats the note: that is the capped upside.</a:t>
+              <a:t>Left chart: the cash ladder. Each quarter the note lives adds 2.63% of notional, paid either on the date or later through memory. Right chart: if the note reaches Year 5 without being called, there are three zones. At or above 100% the family receives 152.5%; between 70% and 100% it receives 100%; below 70% the embedded put pays 70%, so the loss stops at 30% however far the basket falls. Above +52.5% the basket beats the note: that is the capped upside.</a:t>
             </a:r>
             <a:endParaRPr lang="en-US" dirty="0"/>
           </a:p>
@@ -15081,7 +16056,7 @@
                 <a:ea typeface="Calibri" pitchFamily="34" charset="-122"/>
                 <a:cs typeface="Calibri" pitchFamily="34" charset="-120"/>
               </a:rPr>
-              <a:t>7.20% a year from Asia's semiconductor build-out, with 100% of capital returned at maturity</a:t>
+              <a:t>10.50% a year from Asia's semiconductor build-out, with at least 70% of capital back whatever happens</a:t>
             </a:r>
             <a:endParaRPr lang="en-US" sz="1500" dirty="0"/>
           </a:p>
@@ -15120,7 +16095,7 @@
                 <a:ea typeface="Calibri" pitchFamily="34" charset="-122"/>
                 <a:cs typeface="Calibri" pitchFamily="34" charset="-120"/>
               </a:rPr>
-              <a:t>USD 100mn · 5-year note issued by Natixis · 7.20% p.a. memory coupon · 100% capital protected · Trade date 17 Sep 2026</a:t>
+              <a:t>USD 100mn · 5-year note issued by Natixis · 10.50% p.a. memory coupon · 70% barrier + embedded 70% put · Trade date 17 Sep 2026</a:t>
             </a:r>
             <a:endParaRPr lang="en-US" sz="1150" dirty="0"/>
           </a:p>
@@ -15191,7 +16166,7 @@
                 <a:ea typeface="Cambria" pitchFamily="34" charset="-122"/>
                 <a:cs typeface="Cambria" pitchFamily="34" charset="-120"/>
               </a:rPr>
-              <a:t>Under the hood: a bond plus a strip of digital options</a:t>
+              <a:t>Under the hood: a bond, coupon digitals, and a 70% put pair</a:t>
             </a:r>
             <a:endParaRPr lang="en-US" sz="2200" dirty="0"/>
           </a:p>
@@ -15245,11 +16220,11 @@
         <p:spPr>
           <a:xfrm>
             <a:off x="411480" y="1188720"/>
-            <a:ext cx="2651760" cy="2788920"/>
+            <a:ext cx="1956816" cy="2788920"/>
           </a:xfrm>
           <a:prstGeom prst="roundRect">
             <a:avLst>
-              <a:gd name="adj" fmla="val 2414"/>
+              <a:gd name="adj" fmla="val 3271"/>
             </a:avLst>
           </a:prstGeom>
           <a:solidFill>
@@ -15271,8 +16246,8 @@
         </p:nvSpPr>
         <p:spPr>
           <a:xfrm>
-            <a:off x="548640" y="1261872"/>
-            <a:ext cx="2377440" cy="274320"/>
+            <a:off x="521208" y="1261872"/>
+            <a:ext cx="1783080" cy="274320"/>
           </a:xfrm>
           <a:prstGeom prst="rect">
             <a:avLst/>
@@ -15288,7 +16263,7 @@
               <a:buNone/>
             </a:pPr>
             <a:r>
-              <a:rPr lang="en-US" sz="1200" b="1" dirty="0">
+              <a:rPr lang="en-US" sz="1150" b="1" dirty="0">
                 <a:solidFill>
                   <a:srgbClr val="0B3C49"/>
                 </a:solidFill>
@@ -15296,9 +16271,9 @@
                 <a:ea typeface="Calibri" pitchFamily="34" charset="-122"/>
                 <a:cs typeface="Calibri" pitchFamily="34" charset="-120"/>
               </a:rPr>
-              <a:t>Protected principal</a:t>
+              <a:t>Principal</a:t>
             </a:r>
-            <a:endParaRPr lang="en-US" sz="1200" dirty="0"/>
+            <a:endParaRPr lang="en-US" sz="1150" dirty="0"/>
           </a:p>
         </p:txBody>
       </p:sp>
@@ -15310,8 +16285,8 @@
         </p:nvSpPr>
         <p:spPr>
           <a:xfrm>
-            <a:off x="548640" y="1554480"/>
-            <a:ext cx="2377440" cy="594360"/>
+            <a:off x="521208" y="1536192"/>
+            <a:ext cx="1783080" cy="731520"/>
           </a:xfrm>
           <a:prstGeom prst="rect">
             <a:avLst/>
@@ -15327,7 +16302,7 @@
               <a:buNone/>
             </a:pPr>
             <a:r>
-              <a:rPr lang="en-US" sz="900" dirty="0">
+              <a:rPr lang="en-US" sz="850" dirty="0">
                 <a:solidFill>
                   <a:srgbClr val="5F7176"/>
                 </a:solidFill>
@@ -15335,9 +16310,9 @@
                 <a:ea typeface="Calibri" pitchFamily="34" charset="-122"/>
                 <a:cs typeface="Calibri" pitchFamily="34" charset="-120"/>
               </a:rPr>
-              <a:t>100% repaid at autocall or maturity. Worth 89.3%: early repayment is worth more than a 5Y bond (75.8%)</a:t>
+              <a:t>100% repaid at autocall or maturity. Worth 89.3%</a:t>
             </a:r>
-            <a:endParaRPr lang="en-US" sz="900" dirty="0"/>
+            <a:endParaRPr lang="en-US" sz="850" dirty="0"/>
           </a:p>
         </p:txBody>
       </p:sp>
@@ -15348,8 +16323,8 @@
           <p:nvPr/>
         </p:nvGraphicFramePr>
         <p:xfrm>
-          <a:off x="457200" y="2148840"/>
-          <a:ext cx="2560320" cy="1737360"/>
+          <a:off x="438912" y="2286000"/>
+          <a:ext cx="1901952" cy="1627632"/>
         </p:xfrm>
         <a:graphic xmlns:a="http://schemas.openxmlformats.org/drawingml/2006/main">
           <a:graphicData uri="http://schemas.openxmlformats.org/drawingml/2006/chart">
@@ -15365,8 +16340,8 @@
         </p:nvSpPr>
         <p:spPr>
           <a:xfrm>
-            <a:off x="3044952" y="2697480"/>
-            <a:ext cx="228600" cy="365760"/>
+            <a:off x="2350008" y="2697480"/>
+            <a:ext cx="182880" cy="365760"/>
           </a:xfrm>
           <a:prstGeom prst="rect">
             <a:avLst/>
@@ -15382,7 +16357,7 @@
               <a:buNone/>
             </a:pPr>
             <a:r>
-              <a:rPr lang="en-US" sz="1800" b="1" dirty="0">
+              <a:rPr lang="en-US" sz="1600" b="1" dirty="0">
                 <a:solidFill>
                   <a:srgbClr val="0B3C49"/>
                 </a:solidFill>
@@ -15392,7 +16367,7 @@
               </a:rPr>
               <a:t>+</a:t>
             </a:r>
-            <a:endParaRPr lang="en-US" sz="1800" dirty="0"/>
+            <a:endParaRPr lang="en-US" sz="1600" dirty="0"/>
           </a:p>
         </p:txBody>
       </p:sp>
@@ -15404,12 +16379,12 @@
         </p:nvSpPr>
         <p:spPr>
           <a:xfrm>
-            <a:off x="3246120" y="1188720"/>
-            <a:ext cx="2651760" cy="2788920"/>
+            <a:off x="2532888" y="1188720"/>
+            <a:ext cx="1956816" cy="2788920"/>
           </a:xfrm>
           <a:prstGeom prst="roundRect">
             <a:avLst>
-              <a:gd name="adj" fmla="val 2414"/>
+              <a:gd name="adj" fmla="val 3271"/>
             </a:avLst>
           </a:prstGeom>
           <a:solidFill>
@@ -15431,8 +16406,8 @@
         </p:nvSpPr>
         <p:spPr>
           <a:xfrm>
-            <a:off x="3383280" y="1261872"/>
-            <a:ext cx="2377440" cy="274320"/>
+            <a:off x="2642616" y="1261872"/>
+            <a:ext cx="1783080" cy="274320"/>
           </a:xfrm>
           <a:prstGeom prst="rect">
             <a:avLst/>
@@ -15448,7 +16423,7 @@
               <a:buNone/>
             </a:pPr>
             <a:r>
-              <a:rPr lang="en-US" sz="1200" b="1" dirty="0">
+              <a:rPr lang="en-US" sz="1150" b="1" dirty="0">
                 <a:solidFill>
                   <a:srgbClr val="0B3C49"/>
                 </a:solidFill>
@@ -15456,9 +16431,9 @@
                 <a:ea typeface="Calibri" pitchFamily="34" charset="-122"/>
                 <a:cs typeface="Calibri" pitchFamily="34" charset="-120"/>
               </a:rPr>
-              <a:t>Long quarterly digitals</a:t>
+              <a:t>Coupon digitals</a:t>
             </a:r>
-            <a:endParaRPr lang="en-US" sz="1200" dirty="0"/>
+            <a:endParaRPr lang="en-US" sz="1150" dirty="0"/>
           </a:p>
         </p:txBody>
       </p:sp>
@@ -15470,8 +16445,8 @@
         </p:nvSpPr>
         <p:spPr>
           <a:xfrm>
-            <a:off x="3383280" y="1554480"/>
-            <a:ext cx="2377440" cy="594360"/>
+            <a:off x="2642616" y="1536192"/>
+            <a:ext cx="1783080" cy="731520"/>
           </a:xfrm>
           <a:prstGeom prst="rect">
             <a:avLst/>
@@ -15487,7 +16462,7 @@
               <a:buNone/>
             </a:pPr>
             <a:r>
-              <a:rPr lang="en-US" sz="900" dirty="0">
+              <a:rPr lang="en-US" sz="850" dirty="0">
                 <a:solidFill>
                   <a:srgbClr val="5F7176"/>
                 </a:solidFill>
@@ -15495,9 +16470,9 @@
                 <a:ea typeface="Calibri" pitchFamily="34" charset="-122"/>
                 <a:cs typeface="Calibri" pitchFamily="34" charset="-120"/>
               </a:rPr>
-              <a:t>Pay 1.80%, plus missed coupons, on each date the basket is ≥ 100%. Worth 7.9%</a:t>
+              <a:t>2.63% plus missed coupons on each date ≥ 100%. Worth 11.6% (net of autocall)</a:t>
             </a:r>
-            <a:endParaRPr lang="en-US" sz="900" dirty="0"/>
+            <a:endParaRPr lang="en-US" sz="850" dirty="0"/>
           </a:p>
         </p:txBody>
       </p:sp>
@@ -15508,8 +16483,8 @@
           <p:nvPr/>
         </p:nvGraphicFramePr>
         <p:xfrm>
-          <a:off x="3291840" y="2148840"/>
-          <a:ext cx="2560320" cy="1737360"/>
+          <a:off x="2560320" y="2286000"/>
+          <a:ext cx="1901952" cy="1627632"/>
         </p:xfrm>
         <a:graphic xmlns:a="http://schemas.openxmlformats.org/drawingml/2006/main">
           <a:graphicData uri="http://schemas.openxmlformats.org/drawingml/2006/chart">
@@ -15525,8 +16500,8 @@
         </p:nvSpPr>
         <p:spPr>
           <a:xfrm>
-            <a:off x="5879592" y="2697480"/>
-            <a:ext cx="228600" cy="365760"/>
+            <a:off x="4471416" y="2697480"/>
+            <a:ext cx="182880" cy="365760"/>
           </a:xfrm>
           <a:prstGeom prst="rect">
             <a:avLst/>
@@ -15542,7 +16517,7 @@
               <a:buNone/>
             </a:pPr>
             <a:r>
-              <a:rPr lang="en-US" sz="1800" b="1" dirty="0">
+              <a:rPr lang="en-US" sz="1600" b="1" dirty="0">
                 <a:solidFill>
                   <a:srgbClr val="0B3C49"/>
                 </a:solidFill>
@@ -15552,7 +16527,7 @@
               </a:rPr>
               <a:t>−</a:t>
             </a:r>
-            <a:endParaRPr lang="en-US" sz="1800" dirty="0"/>
+            <a:endParaRPr lang="en-US" sz="1600" dirty="0"/>
           </a:p>
         </p:txBody>
       </p:sp>
@@ -15564,12 +16539,12 @@
         </p:nvSpPr>
         <p:spPr>
           <a:xfrm>
-            <a:off x="6080760" y="1188720"/>
-            <a:ext cx="2651760" cy="2788920"/>
+            <a:off x="4654296" y="1188720"/>
+            <a:ext cx="1956816" cy="2788920"/>
           </a:xfrm>
           <a:prstGeom prst="roundRect">
             <a:avLst>
-              <a:gd name="adj" fmla="val 2414"/>
+              <a:gd name="adj" fmla="val 3271"/>
             </a:avLst>
           </a:prstGeom>
           <a:solidFill>
@@ -15591,8 +16566,8 @@
         </p:nvSpPr>
         <p:spPr>
           <a:xfrm>
-            <a:off x="6217920" y="1261872"/>
-            <a:ext cx="2377440" cy="274320"/>
+            <a:off x="4764024" y="1261872"/>
+            <a:ext cx="1783080" cy="274320"/>
           </a:xfrm>
           <a:prstGeom prst="rect">
             <a:avLst/>
@@ -15608,17 +16583,17 @@
               <a:buNone/>
             </a:pPr>
             <a:r>
-              <a:rPr lang="en-US" sz="1200" b="1" dirty="0">
+              <a:rPr lang="en-US" sz="1150" b="1" dirty="0">
                 <a:solidFill>
-                  <a:srgbClr val="B8433A"/>
+                  <a:srgbClr val="0B3C49"/>
                 </a:solidFill>
                 <a:latin typeface="Calibri" pitchFamily="34" charset="0"/>
                 <a:ea typeface="Calibri" pitchFamily="34" charset="-122"/>
                 <a:cs typeface="Calibri" pitchFamily="34" charset="-120"/>
               </a:rPr>
-              <a:t>Autocall (Natixis's side)</a:t>
+              <a:t>Autocall (Natixis)</a:t>
             </a:r>
-            <a:endParaRPr lang="en-US" sz="1200" dirty="0"/>
+            <a:endParaRPr lang="en-US" sz="1150" dirty="0"/>
           </a:p>
         </p:txBody>
       </p:sp>
@@ -15630,8 +16605,8 @@
         </p:nvSpPr>
         <p:spPr>
           <a:xfrm>
-            <a:off x="6217920" y="1554480"/>
-            <a:ext cx="2377440" cy="594360"/>
+            <a:off x="4764024" y="1536192"/>
+            <a:ext cx="1783080" cy="731520"/>
           </a:xfrm>
           <a:prstGeom prst="rect">
             <a:avLst/>
@@ -15647,7 +16622,7 @@
               <a:buNone/>
             </a:pPr>
             <a:r>
-              <a:rPr lang="en-US" sz="900" dirty="0">
+              <a:rPr lang="en-US" sz="850" dirty="0">
                 <a:solidFill>
                   <a:srgbClr val="5F7176"/>
                 </a:solidFill>
@@ -15655,9 +16630,9 @@
                 <a:ea typeface="Calibri" pitchFamily="34" charset="-122"/>
                 <a:cs typeface="Calibri" pitchFamily="34" charset="-120"/>
               </a:rPr>
-              <a:t>Remaining coupons: cancelled on a date from Q4 with basket ≥ 100%, when the note ends. This is what keeps the coupon affordable</a:t>
+              <a:t>From Q4, basket ≥ 100%: remaining coupons cancelled, note ends. Keeps the coupon affordable</a:t>
             </a:r>
-            <a:endParaRPr lang="en-US" sz="900" dirty="0"/>
+            <a:endParaRPr lang="en-US" sz="850" dirty="0"/>
           </a:p>
         </p:txBody>
       </p:sp>
@@ -15668,8 +16643,8 @@
           <p:nvPr/>
         </p:nvGraphicFramePr>
         <p:xfrm>
-          <a:off x="6126480" y="2148840"/>
-          <a:ext cx="2560320" cy="1737360"/>
+          <a:off x="4681728" y="2286000"/>
+          <a:ext cx="1901952" cy="1627632"/>
         </p:xfrm>
         <a:graphic xmlns:a="http://schemas.openxmlformats.org/drawingml/2006/main">
           <a:graphicData uri="http://schemas.openxmlformats.org/drawingml/2006/chart">
@@ -15679,7 +16654,167 @@
       </p:graphicFrame>
       <p:sp>
         <p:nvSpPr>
-          <p:cNvPr id="18" name="Shape 13"/>
+          <p:cNvPr id="18" name="Text 13"/>
+          <p:cNvSpPr txBox="1"/>
+          <p:nvPr/>
+        </p:nvSpPr>
+        <p:spPr>
+          <a:xfrm>
+            <a:off x="6592824" y="2697480"/>
+            <a:ext cx="182880" cy="365760"/>
+          </a:xfrm>
+          <a:prstGeom prst="rect">
+            <a:avLst/>
+          </a:prstGeom>
+          <a:noFill/>
+          <a:ln/>
+        </p:spPr>
+        <p:txBody>
+          <a:bodyPr wrap="square" lIns="0" tIns="0" rIns="0" bIns="0" rtlCol="0" anchor="t"/>
+          <a:lstStyle/>
+          <a:p>
+            <a:pPr algn="ctr" indent="0" marL="0">
+              <a:buNone/>
+            </a:pPr>
+            <a:r>
+              <a:rPr lang="en-US" sz="1600" b="1" dirty="0">
+                <a:solidFill>
+                  <a:srgbClr val="0B3C49"/>
+                </a:solidFill>
+                <a:latin typeface="Calibri" pitchFamily="34" charset="0"/>
+                <a:ea typeface="Calibri" pitchFamily="34" charset="-122"/>
+                <a:cs typeface="Calibri" pitchFamily="34" charset="-120"/>
+              </a:rPr>
+              <a:t>−</a:t>
+            </a:r>
+            <a:endParaRPr lang="en-US" sz="1600" dirty="0"/>
+          </a:p>
+        </p:txBody>
+      </p:sp>
+      <p:sp>
+        <p:nvSpPr>
+          <p:cNvPr id="19" name="Shape 14"/>
+          <p:cNvSpPr/>
+          <p:nvPr/>
+        </p:nvSpPr>
+        <p:spPr>
+          <a:xfrm>
+            <a:off x="6775704" y="1188720"/>
+            <a:ext cx="1956816" cy="2788920"/>
+          </a:xfrm>
+          <a:prstGeom prst="roundRect">
+            <a:avLst>
+              <a:gd name="adj" fmla="val 3271"/>
+            </a:avLst>
+          </a:prstGeom>
+          <a:solidFill>
+            <a:srgbClr val="E6F2F0"/>
+          </a:solidFill>
+          <a:ln w="12700">
+            <a:solidFill>
+              <a:srgbClr val="E6F2F0"/>
+            </a:solidFill>
+            <a:prstDash val="solid"/>
+          </a:ln>
+        </p:spPr>
+      </p:sp>
+      <p:sp>
+        <p:nvSpPr>
+          <p:cNvPr id="20" name="Text 15"/>
+          <p:cNvSpPr txBox="1"/>
+          <p:nvPr/>
+        </p:nvSpPr>
+        <p:spPr>
+          <a:xfrm>
+            <a:off x="6885432" y="1261872"/>
+            <a:ext cx="1783080" cy="274320"/>
+          </a:xfrm>
+          <a:prstGeom prst="rect">
+            <a:avLst/>
+          </a:prstGeom>
+          <a:noFill/>
+          <a:ln/>
+        </p:spPr>
+        <p:txBody>
+          <a:bodyPr wrap="square" lIns="0" tIns="0" rIns="0" bIns="0" rtlCol="0" anchor="t"/>
+          <a:lstStyle/>
+          <a:p>
+            <a:pPr indent="0" marL="0">
+              <a:buNone/>
+            </a:pPr>
+            <a:r>
+              <a:rPr lang="en-US" sz="1150" b="1" dirty="0">
+                <a:solidFill>
+                  <a:srgbClr val="B8433A"/>
+                </a:solidFill>
+                <a:latin typeface="Calibri" pitchFamily="34" charset="0"/>
+                <a:ea typeface="Calibri" pitchFamily="34" charset="-122"/>
+                <a:cs typeface="Calibri" pitchFamily="34" charset="-120"/>
+              </a:rPr>
+              <a:t>70% put pair</a:t>
+            </a:r>
+            <a:endParaRPr lang="en-US" sz="1150" dirty="0"/>
+          </a:p>
+        </p:txBody>
+      </p:sp>
+      <p:sp>
+        <p:nvSpPr>
+          <p:cNvPr id="21" name="Text 16"/>
+          <p:cNvSpPr txBox="1"/>
+          <p:nvPr/>
+        </p:nvSpPr>
+        <p:spPr>
+          <a:xfrm>
+            <a:off x="6885432" y="1536192"/>
+            <a:ext cx="1783080" cy="731520"/>
+          </a:xfrm>
+          <a:prstGeom prst="rect">
+            <a:avLst/>
+          </a:prstGeom>
+          <a:noFill/>
+          <a:ln/>
+        </p:spPr>
+        <p:txBody>
+          <a:bodyPr wrap="square" lIns="0" tIns="0" rIns="0" bIns="0" rtlCol="0" anchor="t"/>
+          <a:lstStyle/>
+          <a:p>
+            <a:pPr indent="0" marL="0">
+              <a:buNone/>
+            </a:pPr>
+            <a:r>
+              <a:rPr lang="en-US" sz="850" dirty="0">
+                <a:solidFill>
+                  <a:srgbClr val="5F7176"/>
+                </a:solidFill>
+                <a:latin typeface="Calibri" pitchFamily="34" charset="0"/>
+                <a:ea typeface="Calibri" pitchFamily="34" charset="-122"/>
+                <a:cs typeface="Calibri" pitchFamily="34" charset="-120"/>
+              </a:rPr>
+              <a:t>Client sells a 70% barrier put (6.3%); the note embeds a 70% put back (2.6%). Net: −30% only if &lt; 70% at Y5</a:t>
+            </a:r>
+            <a:endParaRPr lang="en-US" sz="850" dirty="0"/>
+          </a:p>
+        </p:txBody>
+      </p:sp>
+      <p:graphicFrame>
+        <p:nvGraphicFramePr>
+          <p:cNvPr id="22" name="Chart 3" descr=""/>
+          <p:cNvGraphicFramePr/>
+          <p:nvPr/>
+        </p:nvGraphicFramePr>
+        <p:xfrm>
+          <a:off x="6803136" y="2286000"/>
+          <a:ext cx="1901952" cy="1627632"/>
+        </p:xfrm>
+        <a:graphic xmlns:a="http://schemas.openxmlformats.org/drawingml/2006/main">
+          <a:graphicData uri="http://schemas.openxmlformats.org/drawingml/2006/chart">
+            <c:chart xmlns:c="http://schemas.openxmlformats.org/drawingml/2006/chart" r:id="rId4"/>
+          </a:graphicData>
+        </a:graphic>
+      </p:graphicFrame>
+      <p:sp>
+        <p:nvSpPr>
+          <p:cNvPr id="23" name="Shape 17"/>
           <p:cNvSpPr/>
           <p:nvPr/>
         </p:nvSpPr>
@@ -15706,7 +16841,7 @@
       </p:sp>
       <p:sp>
         <p:nvSpPr>
-          <p:cNvPr id="19" name="Text 14"/>
+          <p:cNvPr id="24" name="Text 18"/>
           <p:cNvSpPr txBox="1"/>
           <p:nvPr/>
         </p:nvSpPr>
@@ -15737,7 +16872,7 @@
                 <a:ea typeface="Calibri" pitchFamily="34" charset="-122"/>
                 <a:cs typeface="Calibri" pitchFamily="34" charset="-120"/>
               </a:rPr>
-              <a:t>Fair value 97.3% = principal 89.3% + coupons 7.9% (net of autocall).  </a:t>
+              <a:t>Fair value 97.2% = principal 89.3% + coupons 11.6% − put pair 3.7%.  </a:t>
             </a:r>
             <a:pPr indent="0" marL="0">
               <a:buNone/>
@@ -15751,7 +16886,7 @@
                 <a:ea typeface="Calibri" pitchFamily="34" charset="-122"/>
                 <a:cs typeface="Calibri" pitchFamily="34" charset="-120"/>
               </a:rPr>
-              <a:t>Issued at 100%, leaving 2.8% for hedging costs and Natixis margin. The client sells no put, so it takes no equity downside: it gives up upside above the coupon instead.</a:t>
+              <a:t>Issued at 100%, leaving 2.8% for hedging and margin. The short barrier put funds the higher coupon; the embedded put stops the loss at 30%.</a:t>
             </a:r>
             <a:endParaRPr lang="en-US" sz="1000" dirty="0"/>
           </a:p>
@@ -15759,7 +16894,7 @@
       </p:sp>
       <p:sp>
         <p:nvSpPr>
-          <p:cNvPr id="20" name="Text 15"/>
+          <p:cNvPr id="25" name="Text 19"/>
           <p:cNvSpPr txBox="1"/>
           <p:nvPr/>
         </p:nvSpPr>
@@ -16516,7 +17651,7 @@
                           <a:ea typeface="Calibri" pitchFamily="34" charset="-122"/>
                           <a:cs typeface="Calibri" pitchFamily="34" charset="-120"/>
                         </a:rPr>
-                        <a:t>7.2%</a:t>
+                        <a:t>10.5%</a:t>
                       </a:r>
                       <a:endParaRPr lang="en-US" sz="850" dirty="0">
                         <a:latin typeface="Calibri" charset="0"/>
@@ -16584,7 +17719,7 @@
                           <a:ea typeface="Calibri" pitchFamily="34" charset="-122"/>
                           <a:cs typeface="Calibri" pitchFamily="34" charset="-120"/>
                         </a:rPr>
-                        <a:t>107.2</a:t>
+                        <a:t>110.5</a:t>
                       </a:r>
                       <a:endParaRPr lang="en-US" sz="850" dirty="0">
                         <a:latin typeface="Calibri" charset="0"/>
@@ -16652,7 +17787,7 @@
                           <a:ea typeface="Calibri" pitchFamily="34" charset="-122"/>
                           <a:cs typeface="Calibri" pitchFamily="34" charset="-120"/>
                         </a:rPr>
-                        <a:t>7.4%</a:t>
+                        <a:t>10.9%</a:t>
                       </a:r>
                       <a:endParaRPr lang="en-US" sz="850" dirty="0">
                         <a:latin typeface="Calibri" charset="0"/>
@@ -16926,7 +18061,7 @@
                           <a:ea typeface="Calibri" pitchFamily="34" charset="-122"/>
                           <a:cs typeface="Calibri" pitchFamily="34" charset="-120"/>
                         </a:rPr>
-                        <a:t>10.8%</a:t>
+                        <a:t>15.8%</a:t>
                       </a:r>
                       <a:endParaRPr lang="en-US" sz="850" dirty="0">
                         <a:latin typeface="Calibri" charset="0"/>
@@ -16994,7 +18129,7 @@
                           <a:ea typeface="Calibri" pitchFamily="34" charset="-122"/>
                           <a:cs typeface="Calibri" pitchFamily="34" charset="-120"/>
                         </a:rPr>
-                        <a:t>110.8</a:t>
+                        <a:t>115.8</a:t>
                       </a:r>
                       <a:endParaRPr lang="en-US" sz="850" dirty="0">
                         <a:latin typeface="Calibri" charset="0"/>
@@ -17062,7 +18197,7 @@
                           <a:ea typeface="Calibri" pitchFamily="34" charset="-122"/>
                           <a:cs typeface="Calibri" pitchFamily="34" charset="-120"/>
                         </a:rPr>
-                        <a:t>7.1%</a:t>
+                        <a:t>10.2%</a:t>
                       </a:r>
                       <a:endParaRPr lang="en-US" sz="850" dirty="0">
                         <a:latin typeface="Calibri" charset="0"/>
@@ -17336,7 +18471,7 @@
                           <a:ea typeface="Calibri" pitchFamily="34" charset="-122"/>
                           <a:cs typeface="Calibri" pitchFamily="34" charset="-120"/>
                         </a:rPr>
-                        <a:t>27.0%</a:t>
+                        <a:t>39.4%</a:t>
                       </a:r>
                       <a:endParaRPr lang="en-US" sz="850" dirty="0">
                         <a:latin typeface="Calibri" charset="0"/>
@@ -17404,7 +18539,7 @@
                           <a:ea typeface="Calibri" pitchFamily="34" charset="-122"/>
                           <a:cs typeface="Calibri" pitchFamily="34" charset="-120"/>
                         </a:rPr>
-                        <a:t>127.0</a:t>
+                        <a:t>139.4</a:t>
                       </a:r>
                       <a:endParaRPr lang="en-US" sz="850" dirty="0">
                         <a:latin typeface="Calibri" charset="0"/>
@@ -17472,7 +18607,7 @@
                           <a:ea typeface="Calibri" pitchFamily="34" charset="-122"/>
                           <a:cs typeface="Calibri" pitchFamily="34" charset="-120"/>
                         </a:rPr>
-                        <a:t>6.6%</a:t>
+                        <a:t>9.3%</a:t>
                       </a:r>
                       <a:endParaRPr lang="en-US" sz="850" dirty="0">
                         <a:latin typeface="Calibri" charset="0"/>
@@ -18088,7 +19223,7 @@
                           <a:ea typeface="Calibri" pitchFamily="34" charset="-122"/>
                           <a:cs typeface="Calibri" pitchFamily="34" charset="-120"/>
                         </a:rPr>
-                        <a:t>100% back at Y5</a:t>
+                        <a:t>70% back at Y5 (put)</a:t>
                       </a:r>
                       <a:endParaRPr lang="en-US" sz="850" dirty="0">
                         <a:latin typeface="Calibri" charset="0"/>
@@ -18224,7 +19359,7 @@
                           <a:ea typeface="Calibri" pitchFamily="34" charset="-122"/>
                           <a:cs typeface="Calibri" pitchFamily="34" charset="-120"/>
                         </a:rPr>
-                        <a:t>100.0</a:t>
+                        <a:t>70.0</a:t>
                       </a:r>
                       <a:endParaRPr lang="en-US" sz="850" dirty="0">
                         <a:latin typeface="Calibri" charset="0"/>
@@ -18292,7 +19427,7 @@
                           <a:ea typeface="Calibri" pitchFamily="34" charset="-122"/>
                           <a:cs typeface="Calibri" pitchFamily="34" charset="-120"/>
                         </a:rPr>
-                        <a:t>0.0%</a:t>
+                        <a:t>-6.9%</a:t>
                       </a:r>
                       <a:endParaRPr lang="en-US" sz="850" dirty="0">
                         <a:latin typeface="Calibri" charset="0"/>
@@ -18490,7 +19625,7 @@
                 <a:ea typeface="Calibri" pitchFamily="34" charset="-122"/>
                 <a:cs typeface="Calibri" pitchFamily="34" charset="-120"/>
               </a:rPr>
-              <a:t>the note earns ~6.6%–7.4% a year whenever the basket gets back to 100%, even after a 30% drawdown: memory pays all 15 missed coupons at Q15. In a lost decade or a lasting shock the family gets 100% back, while the basket itself is down 12–45%.</a:t>
+              <a:t>the note earns ~9.3%–10.9% a year whenever the basket gets back to 100%, even after a 30% drawdown: memory pays all 15 missed coupons at Q15. In a lost decade (basket −12%) the buffer returns 100%; in a lasting shock (basket −45%) the embedded put returns 70%.</a:t>
             </a:r>
             <a:endParaRPr lang="en-US" sz="950" dirty="0"/>
           </a:p>
@@ -19841,7 +20976,7 @@
                           <a:ea typeface="Calibri" pitchFamily="34" charset="-122"/>
                           <a:cs typeface="Calibri" pitchFamily="34" charset="-120"/>
                         </a:rPr>
-                        <a:t>5.7%</a:t>
+                        <a:t>7.3%</a:t>
                       </a:r>
                       <a:endParaRPr lang="en-US" sz="900" dirty="0">
                         <a:latin typeface="Calibri" charset="0"/>
@@ -19909,7 +21044,7 @@
                           <a:ea typeface="Calibri" pitchFamily="34" charset="-122"/>
                           <a:cs typeface="Calibri" pitchFamily="34" charset="-120"/>
                         </a:rPr>
-                        <a:t>4.9%</a:t>
+                        <a:t>5.3%</a:t>
                       </a:r>
                       <a:endParaRPr lang="en-US" sz="900" dirty="0">
                         <a:latin typeface="Calibri" charset="0"/>
@@ -19977,7 +21112,7 @@
                           <a:ea typeface="Calibri" pitchFamily="34" charset="-122"/>
                           <a:cs typeface="Calibri" pitchFamily="34" charset="-120"/>
                         </a:rPr>
-                        <a:t>5.6%</a:t>
+                        <a:t>6.9%</a:t>
                       </a:r>
                       <a:endParaRPr lang="en-US" sz="900" dirty="0">
                         <a:latin typeface="Calibri" charset="0"/>
@@ -20045,7 +21180,7 @@
                           <a:ea typeface="Calibri" pitchFamily="34" charset="-122"/>
                           <a:cs typeface="Calibri" pitchFamily="34" charset="-120"/>
                         </a:rPr>
-                        <a:t>6.1%</a:t>
+                        <a:t>8.1%</a:t>
                       </a:r>
                       <a:endParaRPr lang="en-US" sz="900" dirty="0">
                         <a:latin typeface="Calibri" charset="0"/>
@@ -20183,7 +21318,7 @@
                           <a:ea typeface="Calibri" pitchFamily="34" charset="-122"/>
                           <a:cs typeface="Calibri" pitchFamily="34" charset="-120"/>
                         </a:rPr>
-                        <a:t>7.3%</a:t>
+                        <a:t>10.6%</a:t>
                       </a:r>
                       <a:endParaRPr lang="en-US" sz="900" dirty="0">
                         <a:latin typeface="Calibri" charset="0"/>
@@ -20251,7 +21386,7 @@
                           <a:ea typeface="Calibri" pitchFamily="34" charset="-122"/>
                           <a:cs typeface="Calibri" pitchFamily="34" charset="-120"/>
                         </a:rPr>
-                        <a:t>7.1%</a:t>
+                        <a:t>10.4%</a:t>
                       </a:r>
                       <a:endParaRPr lang="en-US" sz="900" dirty="0">
                         <a:latin typeface="Calibri" charset="0"/>
@@ -20319,7 +21454,7 @@
                           <a:ea typeface="Calibri" pitchFamily="34" charset="-122"/>
                           <a:cs typeface="Calibri" pitchFamily="34" charset="-120"/>
                         </a:rPr>
-                        <a:t>7.2%</a:t>
+                        <a:t>10.6%</a:t>
                       </a:r>
                       <a:endParaRPr lang="en-US" sz="900" dirty="0">
                         <a:latin typeface="Calibri" charset="0"/>
@@ -20387,7 +21522,7 @@
                           <a:ea typeface="Calibri" pitchFamily="34" charset="-122"/>
                           <a:cs typeface="Calibri" pitchFamily="34" charset="-120"/>
                         </a:rPr>
-                        <a:t>7.3%</a:t>
+                        <a:t>10.7%</a:t>
                       </a:r>
                       <a:endParaRPr lang="en-US" sz="900" dirty="0">
                         <a:latin typeface="Calibri" charset="0"/>
@@ -20525,7 +21660,7 @@
                           <a:ea typeface="Calibri" pitchFamily="34" charset="-122"/>
                           <a:cs typeface="Calibri" pitchFamily="34" charset="-120"/>
                         </a:rPr>
-                        <a:t>8.7%</a:t>
+                        <a:t>12.6%</a:t>
                       </a:r>
                       <a:endParaRPr lang="en-US" sz="900" dirty="0">
                         <a:latin typeface="Calibri" charset="0"/>
@@ -20593,7 +21728,7 @@
                           <a:ea typeface="Calibri" pitchFamily="34" charset="-122"/>
                           <a:cs typeface="Calibri" pitchFamily="34" charset="-120"/>
                         </a:rPr>
-                        <a:t>7.6%</a:t>
+                        <a:t>11.0%</a:t>
                       </a:r>
                       <a:endParaRPr lang="en-US" sz="900" dirty="0">
                         <a:latin typeface="Calibri" charset="0"/>
@@ -20661,7 +21796,7 @@
                           <a:ea typeface="Calibri" pitchFamily="34" charset="-122"/>
                           <a:cs typeface="Calibri" pitchFamily="34" charset="-120"/>
                         </a:rPr>
-                        <a:t>8.4%</a:t>
+                        <a:t>12.2%</a:t>
                       </a:r>
                       <a:endParaRPr lang="en-US" sz="900" dirty="0">
                         <a:latin typeface="Calibri" charset="0"/>
@@ -20729,7 +21864,7 @@
                           <a:ea typeface="Calibri" pitchFamily="34" charset="-122"/>
                           <a:cs typeface="Calibri" pitchFamily="34" charset="-120"/>
                         </a:rPr>
-                        <a:t>8.9%</a:t>
+                        <a:t>13.1%</a:t>
                       </a:r>
                       <a:endParaRPr lang="en-US" sz="900" dirty="0">
                         <a:latin typeface="Calibri" charset="0"/>
@@ -20867,7 +22002,7 @@
                           <a:ea typeface="Calibri" pitchFamily="34" charset="-122"/>
                           <a:cs typeface="Calibri" pitchFamily="34" charset="-120"/>
                         </a:rPr>
-                        <a:t>13%</a:t>
+                        <a:t>3%</a:t>
                       </a:r>
                       <a:endParaRPr lang="en-US" sz="900" dirty="0">
                         <a:latin typeface="Calibri" charset="0"/>
@@ -20935,7 +22070,7 @@
                           <a:ea typeface="Calibri" pitchFamily="34" charset="-122"/>
                           <a:cs typeface="Calibri" pitchFamily="34" charset="-120"/>
                         </a:rPr>
-                        <a:t>21%</a:t>
+                        <a:t>3%</a:t>
                       </a:r>
                       <a:endParaRPr lang="en-US" sz="900" dirty="0">
                         <a:latin typeface="Calibri" charset="0"/>
@@ -21003,7 +22138,7 @@
                           <a:ea typeface="Calibri" pitchFamily="34" charset="-122"/>
                           <a:cs typeface="Calibri" pitchFamily="34" charset="-120"/>
                         </a:rPr>
-                        <a:t>15%</a:t>
+                        <a:t>3%</a:t>
                       </a:r>
                       <a:endParaRPr lang="en-US" sz="900" dirty="0">
                         <a:latin typeface="Calibri" charset="0"/>
@@ -21071,7 +22206,7 @@
                           <a:ea typeface="Calibri" pitchFamily="34" charset="-122"/>
                           <a:cs typeface="Calibri" pitchFamily="34" charset="-120"/>
                         </a:rPr>
-                        <a:t>10%</a:t>
+                        <a:t>3%</a:t>
                       </a:r>
                       <a:endParaRPr lang="en-US" sz="900" dirty="0">
                         <a:latin typeface="Calibri" charset="0"/>
@@ -21141,7 +22276,7 @@
                           <a:ea typeface="Calibri" pitchFamily="34" charset="-122"/>
                           <a:cs typeface="Calibri" pitchFamily="34" charset="-120"/>
                         </a:rPr>
-                        <a:t>Capital loss</a:t>
+                        <a:t>70% back (put pays)</a:t>
                       </a:r>
                       <a:endParaRPr lang="en-US" sz="900" dirty="0">
                         <a:latin typeface="Calibri" charset="0"/>
@@ -21209,7 +22344,7 @@
                           <a:ea typeface="Calibri" pitchFamily="34" charset="-122"/>
                           <a:cs typeface="Calibri" pitchFamily="34" charset="-120"/>
                         </a:rPr>
-                        <a:t>0%</a:t>
+                        <a:t>16%</a:t>
                       </a:r>
                       <a:endParaRPr lang="en-US" sz="900" dirty="0">
                         <a:latin typeface="Calibri" charset="0"/>
@@ -21277,7 +22412,7 @@
                           <a:ea typeface="Calibri" pitchFamily="34" charset="-122"/>
                           <a:cs typeface="Calibri" pitchFamily="34" charset="-120"/>
                         </a:rPr>
-                        <a:t>0%</a:t>
+                        <a:t>28%</a:t>
                       </a:r>
                       <a:endParaRPr lang="en-US" sz="900" dirty="0">
                         <a:latin typeface="Calibri" charset="0"/>
@@ -21345,7 +22480,7 @@
                           <a:ea typeface="Calibri" pitchFamily="34" charset="-122"/>
                           <a:cs typeface="Calibri" pitchFamily="34" charset="-120"/>
                         </a:rPr>
-                        <a:t>0%</a:t>
+                        <a:t>18%</a:t>
                       </a:r>
                       <a:endParaRPr lang="en-US" sz="900" dirty="0">
                         <a:latin typeface="Calibri" charset="0"/>
@@ -21413,7 +22548,7 @@
                           <a:ea typeface="Calibri" pitchFamily="34" charset="-122"/>
                           <a:cs typeface="Calibri" pitchFamily="34" charset="-120"/>
                         </a:rPr>
-                        <a:t>0%</a:t>
+                        <a:t>12%</a:t>
                       </a:r>
                       <a:endParaRPr lang="en-US" sz="900" dirty="0">
                         <a:latin typeface="Calibri" charset="0"/>
@@ -21568,7 +22703,7 @@
                 <a:ea typeface="Calibri" pitchFamily="34" charset="-122"/>
                 <a:cs typeface="Calibri" pitchFamily="34" charset="-120"/>
               </a:rPr>
-              <a:t>called at the first review (107.2% total)</a:t>
+              <a:t>called at the first review (110.5% total)</a:t>
             </a:r>
             <a:endParaRPr lang="en-US" sz="1000" dirty="0"/>
           </a:p>
@@ -21634,7 +22769,7 @@
                 <a:ea typeface="Cambria" pitchFamily="34" charset="-122"/>
                 <a:cs typeface="Cambria" pitchFamily="34" charset="-120"/>
               </a:rPr>
-              <a:t>0%</a:t>
+              <a:t>16%</a:t>
             </a:r>
             <a:endParaRPr lang="en-US" sz="2400" dirty="0"/>
           </a:p>
@@ -21673,7 +22808,7 @@
                 <a:ea typeface="Calibri" pitchFamily="34" charset="-122"/>
                 <a:cs typeface="Calibri" pitchFamily="34" charset="-120"/>
               </a:rPr>
-              <a:t>chance of losing capital at maturity</a:t>
+              <a:t>chance of 70% back: loss capped at 30%</a:t>
             </a:r>
             <a:endParaRPr lang="en-US" sz="1000" dirty="0"/>
           </a:p>
@@ -21739,7 +22874,7 @@
                 <a:ea typeface="Cambria" pitchFamily="34" charset="-122"/>
                 <a:cs typeface="Cambria" pitchFamily="34" charset="-120"/>
               </a:rPr>
-              <a:t>13%</a:t>
+              <a:t>70%</a:t>
             </a:r>
             <a:endParaRPr lang="en-US" sz="2400" dirty="0"/>
           </a:p>
@@ -21778,7 +22913,7 @@
                 <a:ea typeface="Calibri" pitchFamily="34" charset="-122"/>
                 <a:cs typeface="Calibri" pitchFamily="34" charset="-120"/>
               </a:rPr>
-              <a:t>of paths earn nothing: 100% back after 5 years</a:t>
+              <a:t>worst case at maturity, in every path</a:t>
             </a:r>
             <a:endParaRPr lang="en-US" sz="1000" dirty="0"/>
           </a:p>
@@ -22223,7 +23358,7 @@
                           <a:ea typeface="Calibri" pitchFamily="34" charset="-122"/>
                           <a:cs typeface="Calibri" pitchFamily="34" charset="-120"/>
                         </a:rPr>
-                        <a:t>Opportunity cost</a:t>
+                        <a:t>Capital loss</a:t>
                       </a:r>
                       <a:endParaRPr lang="en-US" sz="850" dirty="0">
                         <a:latin typeface="Calibri" charset="0"/>
@@ -22291,7 +23426,7 @@
                           <a:ea typeface="Calibri" pitchFamily="34" charset="-122"/>
                           <a:cs typeface="Calibri" pitchFamily="34" charset="-120"/>
                         </a:rPr>
-                        <a:t>Basket never back to 100%: 0% for 5 years (~13% of paths)</a:t>
+                        <a:t>Basket below 70% at Y5: 70% back, a 30% loss (~16% of paths)</a:t>
                       </a:r>
                       <a:endParaRPr lang="en-US" sz="850" dirty="0">
                         <a:latin typeface="Calibri" charset="0"/>
@@ -22359,7 +23494,7 @@
                           <a:ea typeface="Calibri" pitchFamily="34" charset="-122"/>
                           <a:cs typeface="Calibri" pitchFamily="34" charset="-120"/>
                         </a:rPr>
-                        <a:t>Coupon above the funding rate in most paths; only 5% of wealth</a:t>
+                        <a:t>Embedded 70% put caps the loss; diversified basket; only 5% of wealth</a:t>
                       </a:r>
                       <a:endParaRPr lang="en-US" sz="850" dirty="0">
                         <a:latin typeface="Calibri" charset="0"/>
@@ -22497,7 +23632,7 @@
                           <a:ea typeface="Calibri" pitchFamily="34" charset="-122"/>
                           <a:cs typeface="Calibri" pitchFamily="34" charset="-120"/>
                         </a:rPr>
-                        <a:t>Basket +80% still pays 7.20% p.a. and is called at Y1</a:t>
+                        <a:t>Basket +80% still pays 10.50% p.a. and is called at Y1</a:t>
                       </a:r>
                       <a:endParaRPr lang="en-US" sz="850" dirty="0">
                         <a:latin typeface="Calibri" charset="0"/>
@@ -22909,7 +24044,7 @@
                           <a:ea typeface="Calibri" pitchFamily="34" charset="-122"/>
                           <a:cs typeface="Calibri" pitchFamily="34" charset="-120"/>
                         </a:rPr>
-                        <a:t>Protection depends on Natixis / BPCE paying</a:t>
+                        <a:t>Repayment and the 70% floor depend on Natixis / BPCE</a:t>
                       </a:r>
                       <a:endParaRPr lang="en-US" sz="850" dirty="0">
                         <a:latin typeface="Calibri" charset="0"/>
@@ -23443,7 +24578,7 @@
                 <a:ea typeface="Calibri" pitchFamily="34" charset="-122"/>
                 <a:cs typeface="Calibri" pitchFamily="34" charset="-120"/>
               </a:rPr>
-              <a:t>Coupon value moves with basket vol and correlation (fair 7.6%–8.2% for vol ±3pts): managed with listed index options and correlation trades</a:t>
+              <a:t>Coupon value moves with basket vol and correlation (fair 10.6%–12.0% for vol ±3pts): managed with listed index options and correlation trades</a:t>
             </a:r>
             <a:endParaRPr lang="en-US" sz="850" dirty="0"/>
           </a:p>
@@ -23614,7 +24749,7 @@
                 <a:ea typeface="Calibri" pitchFamily="34" charset="-122"/>
                 <a:cs typeface="Calibri" pitchFamily="34" charset="-120"/>
               </a:rPr>
-              <a:t>Rates &amp; funding</a:t>
+              <a:t>Put pair &amp; funding</a:t>
             </a:r>
             <a:endParaRPr lang="en-US" sz="1050" dirty="0"/>
           </a:p>
@@ -23653,7 +24788,7 @@
                 <a:ea typeface="Calibri" pitchFamily="34" charset="-122"/>
                 <a:cs typeface="Calibri" pitchFamily="34" charset="-120"/>
               </a:rPr>
-              <a:t>Protected principal funded at the 5.69% curve and hedged with USD swaps; the autocall shortens the liability</a:t>
+              <a:t>Natixis is long the client's 70% barrier put and short the embedded 70% put: a 30% digital put, hedged with basket put spreads. Principal funded at 5.69%</a:t>
             </a:r>
             <a:endParaRPr lang="en-US" sz="850" dirty="0"/>
           </a:p>
@@ -23706,7 +24841,7 @@
                 <a:ea typeface="Calibri" pitchFamily="34" charset="-122"/>
                 <a:cs typeface="Calibri" pitchFamily="34" charset="-120"/>
               </a:rPr>
-              <a:t>base 7.9% · vol ±3pts 7.6%–8.2% · corr ±0.15 7.7%–8.1% · equity drift −1/−2% 8.4%–9.0%. The 7.20% offer stays fundable in every case.</a:t>
+              <a:t>base 11.2% · vol ±3pts 10.6%–12.0% · corr ±0.15 10.8%–11.8% · equity drift −1/−2% 12.3%–13.5%. The 10.50% offer stays fundable in every case.</a:t>
             </a:r>
             <a:endParaRPr lang="en-US" sz="900" dirty="0"/>
           </a:p>
@@ -27796,7 +28931,7 @@
                           <a:ea typeface="Calibri" pitchFamily="34" charset="-122"/>
                           <a:cs typeface="Calibri" pitchFamily="34" charset="-120"/>
                         </a:rPr>
-                        <a:t>Design variant (capital protected)</a:t>
+                        <a:t>Variant of our note (70% barrier + put)</a:t>
                       </a:r>
                       <a:endParaRPr lang="en-US" sz="900" dirty="0">
                         <a:latin typeface="Calibri" charset="0"/>
@@ -28002,7 +29137,7 @@
                           <a:ea typeface="Calibri" pitchFamily="34" charset="-122"/>
                           <a:cs typeface="Calibri" pitchFamily="34" charset="-120"/>
                         </a:rPr>
-                        <a:t>7.9%</a:t>
+                        <a:t>11.2%</a:t>
                       </a:r>
                       <a:endParaRPr lang="en-US" sz="900" dirty="0">
                         <a:latin typeface="Calibri" charset="0"/>
@@ -28140,7 +29275,7 @@
                           <a:ea typeface="Calibri" pitchFamily="34" charset="-122"/>
                           <a:cs typeface="Calibri" pitchFamily="34" charset="-120"/>
                         </a:rPr>
-                        <a:t>7.2%</a:t>
+                        <a:t>10.3%</a:t>
                       </a:r>
                       <a:endParaRPr lang="en-US" sz="900" dirty="0">
                         <a:latin typeface="Calibri" charset="0"/>
@@ -28278,7 +29413,7 @@
                           <a:ea typeface="Calibri" pitchFamily="34" charset="-122"/>
                           <a:cs typeface="Calibri" pitchFamily="34" charset="-120"/>
                         </a:rPr>
-                        <a:t>6.7%</a:t>
+                        <a:t>9.5%</a:t>
                       </a:r>
                       <a:endParaRPr lang="en-US" sz="900" dirty="0">
                         <a:latin typeface="Calibri" charset="0"/>
@@ -28416,7 +29551,7 @@
                           <a:ea typeface="Calibri" pitchFamily="34" charset="-122"/>
                           <a:cs typeface="Calibri" pitchFamily="34" charset="-120"/>
                         </a:rPr>
-                        <a:t>8.0%</a:t>
+                        <a:t>10.8%</a:t>
                       </a:r>
                       <a:endParaRPr lang="en-US" sz="900" dirty="0">
                         <a:latin typeface="Calibri" charset="0"/>
@@ -28554,7 +29689,7 @@
                           <a:ea typeface="Calibri" pitchFamily="34" charset="-122"/>
                           <a:cs typeface="Calibri" pitchFamily="34" charset="-120"/>
                         </a:rPr>
-                        <a:t>8.4%</a:t>
+                        <a:t>12.3%</a:t>
                       </a:r>
                       <a:endParaRPr lang="en-US" sz="900" dirty="0">
                         <a:latin typeface="Calibri" charset="0"/>
@@ -28692,7 +29827,7 @@
                           <a:ea typeface="Calibri" pitchFamily="34" charset="-122"/>
                           <a:cs typeface="Calibri" pitchFamily="34" charset="-120"/>
                         </a:rPr>
-                        <a:t>9.0%</a:t>
+                        <a:t>13.5%</a:t>
                       </a:r>
                       <a:endParaRPr lang="en-US" sz="900" dirty="0">
                         <a:latin typeface="Calibri" charset="0"/>
@@ -28830,7 +29965,7 @@
                           <a:ea typeface="Calibri" pitchFamily="34" charset="-122"/>
                           <a:cs typeface="Calibri" pitchFamily="34" charset="-120"/>
                         </a:rPr>
-                        <a:t>8.2% / 7.6%</a:t>
+                        <a:t>12.0% / 10.6%</a:t>
                       </a:r>
                       <a:endParaRPr lang="en-US" sz="900" dirty="0">
                         <a:latin typeface="Calibri" charset="0"/>
@@ -29029,7 +30164,7 @@
                 <a:ea typeface="Calibri" pitchFamily="34" charset="-122"/>
                 <a:cs typeface="Calibri" pitchFamily="34" charset="-120"/>
               </a:rPr>
-              <a:t>Same basket: a higher-coupon at-risk snowball, and a pure participation note</a:t>
+              <a:t>Same basket: full protection, a higher-coupon at-risk snowball, and a pure participation note</a:t>
             </a:r>
             <a:endParaRPr lang="en-US" sz="1250" dirty="0"/>
           </a:p>
@@ -29302,7 +30437,7 @@
                           <a:ea typeface="Calibri" pitchFamily="34" charset="-122"/>
                           <a:cs typeface="Calibri" pitchFamily="34" charset="-120"/>
                         </a:rPr>
-                        <a:t>Protected autocallable (ours)</a:t>
+                        <a:t>Buffered autocallable (ours)</a:t>
                       </a:r>
                       <a:endParaRPr lang="en-US" sz="900" dirty="0">
                         <a:latin typeface="Calibri" charset="0"/>
@@ -29370,7 +30505,213 @@
                           <a:ea typeface="Calibri" pitchFamily="34" charset="-122"/>
                           <a:cs typeface="Calibri" pitchFamily="34" charset="-120"/>
                         </a:rPr>
-                        <a:t>7.20% p.a. memory coupon</a:t>
+                        <a:t>10.50% p.a. memory coupon</a:t>
+                      </a:r>
+                      <a:endParaRPr lang="en-US" sz="900" dirty="0">
+                        <a:latin typeface="Calibri" charset="0"/>
+                        <a:ea typeface="Calibri" charset="0"/>
+                        <a:cs typeface="Calibri" charset="0"/>
+                      </a:endParaRPr>
+                    </a:p>
+                  </a:txBody>
+                  <a:tcPr marL="50800" marR="50800" marT="25400" marB="25400" anchor="ctr">
+                    <a:lnL w="6350" cap="flat" cmpd="sng" algn="ctr">
+                      <a:solidFill>
+                        <a:srgbClr val="DCE7E5"/>
+                      </a:solidFill>
+                      <a:prstDash val="solid"/>
+                      <a:round/>
+                      <a:headEnd type="none" w="med" len="med"/>
+                      <a:tailEnd type="none" w="med" len="med"/>
+                    </a:lnL>
+                    <a:lnR w="6350" cap="flat" cmpd="sng" algn="ctr">
+                      <a:solidFill>
+                        <a:srgbClr val="DCE7E5"/>
+                      </a:solidFill>
+                      <a:prstDash val="solid"/>
+                      <a:round/>
+                      <a:headEnd type="none" w="med" len="med"/>
+                      <a:tailEnd type="none" w="med" len="med"/>
+                    </a:lnR>
+                    <a:lnT w="6350" cap="flat" cmpd="sng" algn="ctr">
+                      <a:solidFill>
+                        <a:srgbClr val="DCE7E5"/>
+                      </a:solidFill>
+                      <a:prstDash val="solid"/>
+                      <a:round/>
+                      <a:headEnd type="none" w="med" len="med"/>
+                      <a:tailEnd type="none" w="med" len="med"/>
+                    </a:lnT>
+                    <a:lnB w="6350" cap="flat" cmpd="sng" algn="ctr">
+                      <a:solidFill>
+                        <a:srgbClr val="DCE7E5"/>
+                      </a:solidFill>
+                      <a:prstDash val="solid"/>
+                      <a:round/>
+                      <a:headEnd type="none" w="med" len="med"/>
+                      <a:tailEnd type="none" w="med" len="med"/>
+                    </a:lnB>
+                    <a:solidFill>
+                      <a:srgbClr val="FFFFFF"/>
+                    </a:solidFill>
+                  </a:tcPr>
+                </a:tc>
+                <a:tc>
+                  <a:txBody>
+                    <a:bodyPr/>
+                    <a:lstStyle/>
+                    <a:p>
+                      <a:pPr indent="0" marL="0">
+                        <a:buNone/>
+                      </a:pPr>
+                      <a:r>
+                        <a:rPr lang="en-US" sz="900" dirty="0">
+                          <a:solidFill>
+                            <a:srgbClr val="1D2B30"/>
+                          </a:solidFill>
+                          <a:latin typeface="Calibri" pitchFamily="34" charset="0"/>
+                          <a:ea typeface="Calibri" pitchFamily="34" charset="-122"/>
+                          <a:cs typeface="Calibri" pitchFamily="34" charset="-120"/>
+                        </a:rPr>
+                        <a:t>16% (max 30%)</a:t>
+                      </a:r>
+                      <a:endParaRPr lang="en-US" sz="900" dirty="0">
+                        <a:latin typeface="Calibri" charset="0"/>
+                        <a:ea typeface="Calibri" charset="0"/>
+                        <a:cs typeface="Calibri" charset="0"/>
+                      </a:endParaRPr>
+                    </a:p>
+                  </a:txBody>
+                  <a:tcPr marL="50800" marR="50800" marT="25400" marB="25400" anchor="ctr">
+                    <a:lnL w="6350" cap="flat" cmpd="sng" algn="ctr">
+                      <a:solidFill>
+                        <a:srgbClr val="DCE7E5"/>
+                      </a:solidFill>
+                      <a:prstDash val="solid"/>
+                      <a:round/>
+                      <a:headEnd type="none" w="med" len="med"/>
+                      <a:tailEnd type="none" w="med" len="med"/>
+                    </a:lnL>
+                    <a:lnR w="6350" cap="flat" cmpd="sng" algn="ctr">
+                      <a:solidFill>
+                        <a:srgbClr val="DCE7E5"/>
+                      </a:solidFill>
+                      <a:prstDash val="solid"/>
+                      <a:round/>
+                      <a:headEnd type="none" w="med" len="med"/>
+                      <a:tailEnd type="none" w="med" len="med"/>
+                    </a:lnR>
+                    <a:lnT w="6350" cap="flat" cmpd="sng" algn="ctr">
+                      <a:solidFill>
+                        <a:srgbClr val="DCE7E5"/>
+                      </a:solidFill>
+                      <a:prstDash val="solid"/>
+                      <a:round/>
+                      <a:headEnd type="none" w="med" len="med"/>
+                      <a:tailEnd type="none" w="med" len="med"/>
+                    </a:lnT>
+                    <a:lnB w="6350" cap="flat" cmpd="sng" algn="ctr">
+                      <a:solidFill>
+                        <a:srgbClr val="DCE7E5"/>
+                      </a:solidFill>
+                      <a:prstDash val="solid"/>
+                      <a:round/>
+                      <a:headEnd type="none" w="med" len="med"/>
+                      <a:tailEnd type="none" w="med" len="med"/>
+                    </a:lnB>
+                    <a:solidFill>
+                      <a:srgbClr val="FFFFFF"/>
+                    </a:solidFill>
+                  </a:tcPr>
+                </a:tc>
+              </a:tr>
+              <a:tr h="329184">
+                <a:tc>
+                  <a:txBody>
+                    <a:bodyPr/>
+                    <a:lstStyle/>
+                    <a:p>
+                      <a:pPr indent="0" marL="0">
+                        <a:buNone/>
+                      </a:pPr>
+                      <a:r>
+                        <a:rPr lang="en-US" sz="900" dirty="0">
+                          <a:solidFill>
+                            <a:srgbClr val="1D2B30"/>
+                          </a:solidFill>
+                          <a:latin typeface="Calibri" pitchFamily="34" charset="0"/>
+                          <a:ea typeface="Calibri" pitchFamily="34" charset="-122"/>
+                          <a:cs typeface="Calibri" pitchFamily="34" charset="-120"/>
+                        </a:rPr>
+                        <a:t>100% protected autocallable</a:t>
+                      </a:r>
+                      <a:endParaRPr lang="en-US" sz="900" dirty="0">
+                        <a:latin typeface="Calibri" charset="0"/>
+                        <a:ea typeface="Calibri" charset="0"/>
+                        <a:cs typeface="Calibri" charset="0"/>
+                      </a:endParaRPr>
+                    </a:p>
+                  </a:txBody>
+                  <a:tcPr marL="50800" marR="50800" marT="25400" marB="25400" anchor="ctr">
+                    <a:lnL w="6350" cap="flat" cmpd="sng" algn="ctr">
+                      <a:solidFill>
+                        <a:srgbClr val="DCE7E5"/>
+                      </a:solidFill>
+                      <a:prstDash val="solid"/>
+                      <a:round/>
+                      <a:headEnd type="none" w="med" len="med"/>
+                      <a:tailEnd type="none" w="med" len="med"/>
+                    </a:lnL>
+                    <a:lnR w="6350" cap="flat" cmpd="sng" algn="ctr">
+                      <a:solidFill>
+                        <a:srgbClr val="DCE7E5"/>
+                      </a:solidFill>
+                      <a:prstDash val="solid"/>
+                      <a:round/>
+                      <a:headEnd type="none" w="med" len="med"/>
+                      <a:tailEnd type="none" w="med" len="med"/>
+                    </a:lnR>
+                    <a:lnT w="6350" cap="flat" cmpd="sng" algn="ctr">
+                      <a:solidFill>
+                        <a:srgbClr val="DCE7E5"/>
+                      </a:solidFill>
+                      <a:prstDash val="solid"/>
+                      <a:round/>
+                      <a:headEnd type="none" w="med" len="med"/>
+                      <a:tailEnd type="none" w="med" len="med"/>
+                    </a:lnT>
+                    <a:lnB w="6350" cap="flat" cmpd="sng" algn="ctr">
+                      <a:solidFill>
+                        <a:srgbClr val="DCE7E5"/>
+                      </a:solidFill>
+                      <a:prstDash val="solid"/>
+                      <a:round/>
+                      <a:headEnd type="none" w="med" len="med"/>
+                      <a:tailEnd type="none" w="med" len="med"/>
+                    </a:lnB>
+                    <a:solidFill>
+                      <a:srgbClr val="FFFFFF"/>
+                    </a:solidFill>
+                  </a:tcPr>
+                </a:tc>
+                <a:tc>
+                  <a:txBody>
+                    <a:bodyPr/>
+                    <a:lstStyle/>
+                    <a:p>
+                      <a:pPr indent="0" marL="0">
+                        <a:buNone/>
+                      </a:pPr>
+                      <a:r>
+                        <a:rPr lang="en-US" sz="900" dirty="0">
+                          <a:solidFill>
+                            <a:srgbClr val="1D2B30"/>
+                          </a:solidFill>
+                          <a:latin typeface="Calibri" pitchFamily="34" charset="0"/>
+                          <a:ea typeface="Calibri" pitchFamily="34" charset="-122"/>
+                          <a:cs typeface="Calibri" pitchFamily="34" charset="-120"/>
+                        </a:rPr>
+                        <a:t>~7.9% fair coupon</a:t>
                       </a:r>
                       <a:endParaRPr lang="en-US" sz="900" dirty="0">
                         <a:latin typeface="Calibri" charset="0"/>
@@ -29914,12 +31255,12 @@
         </p:nvSpPr>
         <p:spPr>
           <a:xfrm>
-            <a:off x="5212080" y="2606040"/>
-            <a:ext cx="3520440" cy="1828800"/>
+            <a:off x="5212080" y="2926080"/>
+            <a:ext cx="3520440" cy="1143000"/>
           </a:xfrm>
           <a:prstGeom prst="roundRect">
             <a:avLst>
-              <a:gd name="adj" fmla="val 3500"/>
+              <a:gd name="adj" fmla="val 5600"/>
             </a:avLst>
           </a:prstGeom>
           <a:solidFill>
@@ -29941,8 +31282,8 @@
         </p:nvSpPr>
         <p:spPr>
           <a:xfrm>
-            <a:off x="5349240" y="2679192"/>
-            <a:ext cx="3291840" cy="1691640"/>
+            <a:off x="5349240" y="2990088"/>
+            <a:ext cx="3291840" cy="1024128"/>
           </a:xfrm>
           <a:prstGeom prst="rect">
             <a:avLst/>
@@ -29958,7 +31299,7 @@
               <a:buNone/>
             </a:pPr>
             <a:r>
-              <a:rPr lang="en-US" sz="950" b="1" dirty="0">
+              <a:rPr lang="en-US" sz="900" b="1" dirty="0">
                 <a:solidFill>
                   <a:srgbClr val="0F8B8D"/>
                 </a:solidFill>
@@ -29972,7 +31313,7 @@
               <a:buNone/>
             </a:pPr>
             <a:r>
-              <a:rPr lang="en-US" sz="950" dirty="0">
+              <a:rPr lang="en-US" sz="900" dirty="0">
                 <a:solidFill>
                   <a:srgbClr val="1D2B30"/>
                 </a:solidFill>
@@ -29980,9 +31321,9 @@
                 <a:ea typeface="Calibri" pitchFamily="34" charset="-122"/>
                 <a:cs typeface="Calibri" pitchFamily="34" charset="-120"/>
               </a:rPr>
-              <a:t>The snowball pays 9% but loses capital in ~14% of paths. The PPN keeps full protection with uncapped upside, but pays nothing unless the basket ends above 100% after 5 years and has no early exit. Our note sits between them: full protection, a coupon above the funding rate, and money usually back within ~2 years.</a:t>
+              <a:t>The snowball pays 9% but loses capital in ~14% of paths. Full protection pays only ~8%. The PPN pays nothing unless the basket ends above 100% after 5 years. Our note pays 10.50% and caps the loss at 30%, with money usually back within ~2 years.</a:t>
             </a:r>
-            <a:endParaRPr lang="en-US" sz="950" dirty="0"/>
+            <a:endParaRPr lang="en-US" sz="900" dirty="0"/>
           </a:p>
         </p:txBody>
       </p:sp>
@@ -30403,7 +31744,7 @@
                 <a:ea typeface="Calibri" pitchFamily="34" charset="-122"/>
                 <a:cs typeface="Calibri" pitchFamily="34" charset="-120"/>
               </a:rPr>
-              <a:t>Underlying basket, term sheet, and why a capital-protected autocallable</a:t>
+              <a:t>Underlying basket, term sheet, and why a buffered autocallable (70% barrier + 70% put)</a:t>
             </a:r>
             <a:endParaRPr lang="en-US" sz="1150" dirty="0"/>
           </a:p>
@@ -31080,7 +32421,7 @@
                 <a:ea typeface="Calibri" pitchFamily="34" charset="-122"/>
                 <a:cs typeface="Calibri" pitchFamily="34" charset="-120"/>
               </a:rPr>
-              <a:t>One note that turns the family's operating expertise into protected returns</a:t>
+              <a:t>One note that turns the family's operating expertise into double-digit income with a capped downside</a:t>
             </a:r>
             <a:endParaRPr lang="en-US" sz="1250" dirty="0"/>
           </a:p>
@@ -31146,7 +32487,7 @@
                 <a:ea typeface="Cambria" pitchFamily="34" charset="-122"/>
                 <a:cs typeface="Cambria" pitchFamily="34" charset="-120"/>
               </a:rPr>
-              <a:t>7.20%</a:t>
+              <a:t>10.50%</a:t>
             </a:r>
             <a:endParaRPr lang="en-US" sz="3800" dirty="0"/>
           </a:p>
@@ -31224,7 +32565,7 @@
                 <a:ea typeface="Calibri" pitchFamily="34" charset="-122"/>
                 <a:cs typeface="Calibri" pitchFamily="34" charset="-120"/>
               </a:rPr>
-              <a:t>1.80% each quarter the basket is ≥ 100%; missed coupons are paid later when it recovers</a:t>
+              <a:t>2.63% each quarter the basket is ≥ 100%; missed coupons are paid later when it recovers</a:t>
             </a:r>
             <a:endParaRPr lang="en-US" sz="1050" dirty="0"/>
           </a:p>
@@ -31290,7 +32631,7 @@
                 <a:ea typeface="Cambria" pitchFamily="34" charset="-122"/>
                 <a:cs typeface="Cambria" pitchFamily="34" charset="-120"/>
               </a:rPr>
-              <a:t>100%</a:t>
+              <a:t>70%</a:t>
             </a:r>
             <a:endParaRPr lang="en-US" sz="3800" dirty="0"/>
           </a:p>
@@ -31329,7 +32670,7 @@
                 <a:ea typeface="Calibri" pitchFamily="34" charset="-122"/>
                 <a:cs typeface="Calibri" pitchFamily="34" charset="-120"/>
               </a:rPr>
-              <a:t>Capital protected</a:t>
+              <a:t>Minimum repayment</a:t>
             </a:r>
             <a:endParaRPr lang="en-US" sz="1300" dirty="0"/>
           </a:p>
@@ -31368,7 +32709,7 @@
                 <a:ea typeface="Calibri" pitchFamily="34" charset="-122"/>
                 <a:cs typeface="Calibri" pitchFamily="34" charset="-120"/>
               </a:rPr>
-              <a:t>Principal returned in full at maturity whatever the basket does (Natixis credit risk only)</a:t>
+              <a:t>100% back unless the basket ends below 70%; then the embedded put still pays 70%. Maximum loss 30% (plus Natixis credit)</a:t>
             </a:r>
             <a:endParaRPr lang="en-US" sz="1050" dirty="0"/>
           </a:p>
@@ -31565,7 +32906,7 @@
                 <a:ea typeface="Calibri" pitchFamily="34" charset="-122"/>
                 <a:cs typeface="Calibri" pitchFamily="34" charset="-120"/>
               </a:rPr>
-              <a:t>a USD 100mn, 5-year Natixis capital-protected autocallable note</a:t>
+              <a:t>a USD 100mn, 5-year Natixis buffered autocallable note</a:t>
             </a:r>
             <a:pPr indent="0" marL="0">
               <a:buNone/>
@@ -31593,7 +32934,7 @@
                 <a:ea typeface="Calibri" pitchFamily="34" charset="-122"/>
                 <a:cs typeface="Calibri" pitchFamily="34" charset="-120"/>
               </a:rPr>
-              <a:t>The family never loses capital at maturity, earns 7.20% a year in the 79% of paths where the basket gets back to its starting level, and gets 100% back in the rest. Fair value is 97.3%, so issuing at par leaves Natixis 2.8% for hedging and margin.</a:t>
+              <a:t>The family earns 10.50% a year in the 79% of paths where the basket gets back to its starting level, gets 100% back if it ends anywhere above 70%, and never less than 70% (16% of paths, risk-neutral). Fair value is 97.2%, so issuing at par leaves Natixis 2.8% for hedging and margin.</a:t>
             </a:r>
             <a:endParaRPr lang="en-US" sz="1150" dirty="0"/>
           </a:p>
@@ -32177,7 +33518,7 @@
                 <a:ea typeface="Calibri" pitchFamily="34" charset="-122"/>
                 <a:cs typeface="Calibri" pitchFamily="34" charset="-120"/>
               </a:rPr>
-              <a:t>Volatile backdrop: no capital at risk</a:t>
+              <a:t>Volatile backdrop: loss must be capped</a:t>
             </a:r>
             <a:endParaRPr lang="en-US" sz="1050" dirty="0"/>
           </a:p>
@@ -32433,7 +33774,7 @@
                           <a:ea typeface="Calibri" pitchFamily="34" charset="-122"/>
                           <a:cs typeface="Calibri" pitchFamily="34" charset="-120"/>
                         </a:rPr>
-                        <a:t>7.20% p.a. coupon, above the 5.69% 5Y USD funding rate, in every path that autocalls; proceeds roll into the next note</a:t>
+                        <a:t>10.50% p.a. coupon, above the 5.69% 5Y USD funding rate, in every path that autocalls; proceeds roll into the next note</a:t>
                       </a:r>
                       <a:endParaRPr lang="en-US" sz="950" dirty="0">
                         <a:latin typeface="Calibri" charset="0"/>
@@ -32709,7 +34050,7 @@
                           <a:ea typeface="Calibri" pitchFamily="34" charset="-122"/>
                           <a:cs typeface="Calibri" pitchFamily="34" charset="-120"/>
                         </a:rPr>
-                        <a:t>100% capital protection at maturity, diversified basket (not worst-of), BPCE-backed issuer</a:t>
+                        <a:t>70% barrier plus embedded 70% put: maximum loss 30% at maturity; diversified basket (not worst-of); BPCE-backed issuer</a:t>
                       </a:r>
                       <a:endParaRPr lang="en-US" sz="950" dirty="0">
                         <a:latin typeface="Calibri" charset="0"/>
@@ -32847,7 +34188,7 @@
                           <a:ea typeface="Calibri" pitchFamily="34" charset="-122"/>
                           <a:cs typeface="Calibri" pitchFamily="34" charset="-120"/>
                         </a:rPr>
-                        <a:t>Memory coupon: a missed coupon is not lost but paid when the basket recovers; drawdowns cannot touch the principal</a:t>
+                        <a:t>Memory coupon: a missed coupon is paid when the basket recovers; a fall of up to 30% at maturity costs nothing</a:t>
                       </a:r>
                       <a:endParaRPr lang="en-US" sz="950" dirty="0">
                         <a:latin typeface="Calibri" charset="0"/>
@@ -33046,7 +34387,7 @@
                 <a:ea typeface="Calibri" pitchFamily="34" charset="-122"/>
                 <a:cs typeface="Calibri" pitchFamily="34" charset="-120"/>
               </a:rPr>
-              <a:t>Investment thesis: structural growth themes, and a rate level that makes capital protection cheap</a:t>
+              <a:t>Investment thesis: structural growth themes, and high rates and volatility that pay for a coupon with a floor</a:t>
             </a:r>
             <a:endParaRPr lang="en-US" sz="1250" dirty="0"/>
           </a:p>
@@ -33801,7 +35142,7 @@
                 <a:ea typeface="Calibri" pitchFamily="34" charset="-122"/>
                 <a:cs typeface="Calibri" pitchFamily="34" charset="-120"/>
               </a:rPr>
-              <a:t>High USD rates make the 5Y zero-coupon bond cheap (75.8%), so guaranteeing 100% back costs little. Asian equity volatility (basket ~25%) makes it likely the basket revisits 100%, which is what pays the 7.20% coupon.</a:t>
+              <a:t>High USD rates make the principal cheap to fund (5Y zero-coupon 75.8%). Asian volatility (basket ~25%) makes the basket likely to revisit 100%, which pays the 10.50% coupon, and the embedded 70% put caps the loss at 30%.</a:t>
             </a:r>
             <a:endParaRPr lang="en-US" sz="1000" dirty="0"/>
           </a:p>
@@ -36242,7 +37583,7 @@
                 <a:ea typeface="Cambria" pitchFamily="34" charset="-122"/>
                 <a:cs typeface="Cambria" pitchFamily="34" charset="-120"/>
               </a:rPr>
-              <a:t>Term sheet: 5-year capital-protected autocallable, 7.20% coupon</a:t>
+              <a:t>Term sheet: 5-year buffered autocallable, 10.50% coupon</a:t>
             </a:r>
             <a:endParaRPr lang="en-US" sz="2200" dirty="0"/>
           </a:p>
@@ -36281,7 +37622,7 @@
                 <a:ea typeface="Calibri" pitchFamily="34" charset="-122"/>
                 <a:cs typeface="Calibri" pitchFamily="34" charset="-120"/>
               </a:rPr>
-              <a:t>Why this design: above the funding rate, with zero chance of losing capital at maturity</a:t>
+              <a:t>Why this design: a double-digit coupon, with the loss at maturity capped at 30%</a:t>
             </a:r>
             <a:endParaRPr lang="en-US" sz="1250" dirty="0"/>
           </a:p>
@@ -37089,7 +38430,7 @@
                           <a:ea typeface="Calibri" pitchFamily="34" charset="-122"/>
                           <a:cs typeface="Calibri" pitchFamily="34" charset="-120"/>
                         </a:rPr>
-                        <a:t>7.20% p.a. (1.80% per quarter), paid if basket ≥ 100%</a:t>
+                        <a:t>10.50% p.a. (2.63% per quarter), paid if basket ≥ 100%</a:t>
                       </a:r>
                       <a:endParaRPr lang="en-US" sz="950" dirty="0">
                         <a:latin typeface="Calibri" charset="0"/>
@@ -37503,7 +38844,7 @@
                           <a:ea typeface="Calibri" pitchFamily="34" charset="-122"/>
                           <a:cs typeface="Calibri" pitchFamily="34" charset="-120"/>
                         </a:rPr>
-                        <a:t>100% of principal, whatever the basket level</a:t>
+                        <a:t>100% if basket ≥ 70%; otherwise 70% (embedded 70% put)</a:t>
                       </a:r>
                       <a:endParaRPr lang="en-US" sz="950" dirty="0">
                         <a:latin typeface="Calibri" charset="0"/>
@@ -37641,7 +38982,7 @@
                           <a:ea typeface="Calibri" pitchFamily="34" charset="-122"/>
                           <a:cs typeface="Calibri" pitchFamily="34" charset="-120"/>
                         </a:rPr>
-                        <a:t>100% / 97.3%</a:t>
+                        <a:t>100% / 97.2%</a:t>
                       </a:r>
                       <a:endParaRPr lang="en-US" sz="950" dirty="0">
                         <a:latin typeface="Calibri" charset="0"/>
@@ -37720,9 +39061,10 @@
             <a:tbl>
               <a:tblPr/>
               <a:tblGrid>
-                <a:gridCol w="2514600"/>
-                <a:gridCol w="640080"/>
-                <a:gridCol w="685800"/>
+                <a:gridCol w="2011680"/>
+                <a:gridCol w="566928"/>
+                <a:gridCol w="603504"/>
+                <a:gridCol w="658368"/>
               </a:tblGrid>
               <a:tr h="274320">
                 <a:tc>
@@ -37929,6 +39271,74 @@
                     </a:solidFill>
                   </a:tcPr>
                 </a:tc>
+                <a:tc>
+                  <a:txBody>
+                    <a:bodyPr/>
+                    <a:lstStyle/>
+                    <a:p>
+                      <a:pPr algn="l" indent="0" marL="0">
+                        <a:buNone/>
+                      </a:pPr>
+                      <a:r>
+                        <a:rPr lang="en-US" sz="850" b="1" dirty="0">
+                          <a:solidFill>
+                            <a:srgbClr val="FFFFFF"/>
+                          </a:solidFill>
+                          <a:latin typeface="Calibri" pitchFamily="34" charset="0"/>
+                          <a:ea typeface="Calibri" pitchFamily="34" charset="-122"/>
+                          <a:cs typeface="Calibri" pitchFamily="34" charset="-120"/>
+                        </a:rPr>
+                        <a:t>Max loss</a:t>
+                      </a:r>
+                      <a:endParaRPr lang="en-US" sz="850" dirty="0">
+                        <a:latin typeface="Calibri" charset="0"/>
+                        <a:ea typeface="Calibri" charset="0"/>
+                        <a:cs typeface="Calibri" charset="0"/>
+                      </a:endParaRPr>
+                    </a:p>
+                  </a:txBody>
+                  <a:tcPr marL="50800" marR="50800" marT="25400" marB="25400" anchor="ctr">
+                    <a:lnL w="6350" cap="flat" cmpd="sng" algn="ctr">
+                      <a:solidFill>
+                        <a:srgbClr val="DCE7E5"/>
+                      </a:solidFill>
+                      <a:prstDash val="solid"/>
+                      <a:round/>
+                      <a:headEnd type="none" w="med" len="med"/>
+                      <a:tailEnd type="none" w="med" len="med"/>
+                    </a:lnL>
+                    <a:lnR w="6350" cap="flat" cmpd="sng" algn="ctr">
+                      <a:solidFill>
+                        <a:srgbClr val="DCE7E5"/>
+                      </a:solidFill>
+                      <a:prstDash val="solid"/>
+                      <a:round/>
+                      <a:headEnd type="none" w="med" len="med"/>
+                      <a:tailEnd type="none" w="med" len="med"/>
+                    </a:lnR>
+                    <a:lnT w="6350" cap="flat" cmpd="sng" algn="ctr">
+                      <a:solidFill>
+                        <a:srgbClr val="DCE7E5"/>
+                      </a:solidFill>
+                      <a:prstDash val="solid"/>
+                      <a:round/>
+                      <a:headEnd type="none" w="med" len="med"/>
+                      <a:tailEnd type="none" w="med" len="med"/>
+                    </a:lnT>
+                    <a:lnB w="6350" cap="flat" cmpd="sng" algn="ctr">
+                      <a:solidFill>
+                        <a:srgbClr val="DCE7E5"/>
+                      </a:solidFill>
+                      <a:prstDash val="solid"/>
+                      <a:round/>
+                      <a:headEnd type="none" w="med" len="med"/>
+                      <a:tailEnd type="none" w="med" len="med"/>
+                    </a:lnB>
+                    <a:solidFill>
+                      <a:srgbClr val="0B3C49"/>
+                    </a:solidFill>
+                  </a:tcPr>
+                </a:tc>
               </a:tr>
               <a:tr h="301752">
                 <a:tc>
@@ -37948,7 +39358,7 @@
                           <a:ea typeface="Calibri" pitchFamily="34" charset="-122"/>
                           <a:cs typeface="Calibri" pitchFamily="34" charset="-120"/>
                         </a:rPr>
-                        <a:t>Classic: fixed coupon, 70% barrier</a:t>
+                        <a:t>Classic fixed coupon, 70% barrier</a:t>
                       </a:r>
                       <a:endParaRPr lang="en-US" sz="850" dirty="0">
                         <a:latin typeface="Calibri" charset="0"/>
@@ -38135,8 +39545,6 @@
                     </a:solidFill>
                   </a:tcPr>
                 </a:tc>
-              </a:tr>
-              <a:tr h="301752">
                 <a:tc>
                   <a:txBody>
                     <a:bodyPr/>
@@ -38154,143 +39562,7 @@
                           <a:ea typeface="Calibri" pitchFamily="34" charset="-122"/>
                           <a:cs typeface="Calibri" pitchFamily="34" charset="-120"/>
                         </a:rPr>
-                        <a:t>Phoenix memory (80% cpn barrier), 70% barrier</a:t>
-                      </a:r>
-                      <a:endParaRPr lang="en-US" sz="850" dirty="0">
-                        <a:latin typeface="Calibri" charset="0"/>
-                        <a:ea typeface="Calibri" charset="0"/>
-                        <a:cs typeface="Calibri" charset="0"/>
-                      </a:endParaRPr>
-                    </a:p>
-                  </a:txBody>
-                  <a:tcPr marL="50800" marR="50800" marT="25400" marB="25400" anchor="ctr">
-                    <a:lnL w="6350" cap="flat" cmpd="sng" algn="ctr">
-                      <a:solidFill>
-                        <a:srgbClr val="DCE7E5"/>
-                      </a:solidFill>
-                      <a:prstDash val="solid"/>
-                      <a:round/>
-                      <a:headEnd type="none" w="med" len="med"/>
-                      <a:tailEnd type="none" w="med" len="med"/>
-                    </a:lnL>
-                    <a:lnR w="6350" cap="flat" cmpd="sng" algn="ctr">
-                      <a:solidFill>
-                        <a:srgbClr val="DCE7E5"/>
-                      </a:solidFill>
-                      <a:prstDash val="solid"/>
-                      <a:round/>
-                      <a:headEnd type="none" w="med" len="med"/>
-                      <a:tailEnd type="none" w="med" len="med"/>
-                    </a:lnR>
-                    <a:lnT w="6350" cap="flat" cmpd="sng" algn="ctr">
-                      <a:solidFill>
-                        <a:srgbClr val="DCE7E5"/>
-                      </a:solidFill>
-                      <a:prstDash val="solid"/>
-                      <a:round/>
-                      <a:headEnd type="none" w="med" len="med"/>
-                      <a:tailEnd type="none" w="med" len="med"/>
-                    </a:lnT>
-                    <a:lnB w="6350" cap="flat" cmpd="sng" algn="ctr">
-                      <a:solidFill>
-                        <a:srgbClr val="DCE7E5"/>
-                      </a:solidFill>
-                      <a:prstDash val="solid"/>
-                      <a:round/>
-                      <a:headEnd type="none" w="med" len="med"/>
-                      <a:tailEnd type="none" w="med" len="med"/>
-                    </a:lnB>
-                    <a:solidFill>
-                      <a:srgbClr val="FFFFFF"/>
-                    </a:solidFill>
-                  </a:tcPr>
-                </a:tc>
-                <a:tc>
-                  <a:txBody>
-                    <a:bodyPr/>
-                    <a:lstStyle/>
-                    <a:p>
-                      <a:pPr algn="l" indent="0" marL="0">
-                        <a:buNone/>
-                      </a:pPr>
-                      <a:r>
-                        <a:rPr lang="en-US" sz="850" dirty="0">
-                          <a:solidFill>
-                            <a:srgbClr val="1D2B30"/>
-                          </a:solidFill>
-                          <a:latin typeface="Calibri" pitchFamily="34" charset="0"/>
-                          <a:ea typeface="Calibri" pitchFamily="34" charset="-122"/>
-                          <a:cs typeface="Calibri" pitchFamily="34" charset="-120"/>
-                        </a:rPr>
-                        <a:t>10.0%</a:t>
-                      </a:r>
-                      <a:endParaRPr lang="en-US" sz="850" dirty="0">
-                        <a:latin typeface="Calibri" charset="0"/>
-                        <a:ea typeface="Calibri" charset="0"/>
-                        <a:cs typeface="Calibri" charset="0"/>
-                      </a:endParaRPr>
-                    </a:p>
-                  </a:txBody>
-                  <a:tcPr marL="50800" marR="50800" marT="25400" marB="25400" anchor="ctr">
-                    <a:lnL w="6350" cap="flat" cmpd="sng" algn="ctr">
-                      <a:solidFill>
-                        <a:srgbClr val="DCE7E5"/>
-                      </a:solidFill>
-                      <a:prstDash val="solid"/>
-                      <a:round/>
-                      <a:headEnd type="none" w="med" len="med"/>
-                      <a:tailEnd type="none" w="med" len="med"/>
-                    </a:lnL>
-                    <a:lnR w="6350" cap="flat" cmpd="sng" algn="ctr">
-                      <a:solidFill>
-                        <a:srgbClr val="DCE7E5"/>
-                      </a:solidFill>
-                      <a:prstDash val="solid"/>
-                      <a:round/>
-                      <a:headEnd type="none" w="med" len="med"/>
-                      <a:tailEnd type="none" w="med" len="med"/>
-                    </a:lnR>
-                    <a:lnT w="6350" cap="flat" cmpd="sng" algn="ctr">
-                      <a:solidFill>
-                        <a:srgbClr val="DCE7E5"/>
-                      </a:solidFill>
-                      <a:prstDash val="solid"/>
-                      <a:round/>
-                      <a:headEnd type="none" w="med" len="med"/>
-                      <a:tailEnd type="none" w="med" len="med"/>
-                    </a:lnT>
-                    <a:lnB w="6350" cap="flat" cmpd="sng" algn="ctr">
-                      <a:solidFill>
-                        <a:srgbClr val="DCE7E5"/>
-                      </a:solidFill>
-                      <a:prstDash val="solid"/>
-                      <a:round/>
-                      <a:headEnd type="none" w="med" len="med"/>
-                      <a:tailEnd type="none" w="med" len="med"/>
-                    </a:lnB>
-                    <a:solidFill>
-                      <a:srgbClr val="FFFFFF"/>
-                    </a:solidFill>
-                  </a:tcPr>
-                </a:tc>
-                <a:tc>
-                  <a:txBody>
-                    <a:bodyPr/>
-                    <a:lstStyle/>
-                    <a:p>
-                      <a:pPr algn="l" indent="0" marL="0">
-                        <a:buNone/>
-                      </a:pPr>
-                      <a:r>
-                        <a:rPr lang="en-US" sz="850" dirty="0">
-                          <a:solidFill>
-                            <a:srgbClr val="1D2B30"/>
-                          </a:solidFill>
-                          <a:latin typeface="Calibri" pitchFamily="34" charset="0"/>
-                          <a:ea typeface="Calibri" pitchFamily="34" charset="-122"/>
-                          <a:cs typeface="Calibri" pitchFamily="34" charset="-120"/>
-                        </a:rPr>
-                        <a:t>16.2%</a:t>
+                        <a:t>Up to 100%</a:t>
                       </a:r>
                       <a:endParaRPr lang="en-US" sz="850" dirty="0">
                         <a:latin typeface="Calibri" charset="0"/>
@@ -38547,6 +39819,74 @@
                     </a:solidFill>
                   </a:tcPr>
                 </a:tc>
+                <a:tc>
+                  <a:txBody>
+                    <a:bodyPr/>
+                    <a:lstStyle/>
+                    <a:p>
+                      <a:pPr algn="l" indent="0" marL="0">
+                        <a:buNone/>
+                      </a:pPr>
+                      <a:r>
+                        <a:rPr lang="en-US" sz="850" dirty="0">
+                          <a:solidFill>
+                            <a:srgbClr val="1D2B30"/>
+                          </a:solidFill>
+                          <a:latin typeface="Calibri" pitchFamily="34" charset="0"/>
+                          <a:ea typeface="Calibri" pitchFamily="34" charset="-122"/>
+                          <a:cs typeface="Calibri" pitchFamily="34" charset="-120"/>
+                        </a:rPr>
+                        <a:t>Up to 100%</a:t>
+                      </a:r>
+                      <a:endParaRPr lang="en-US" sz="850" dirty="0">
+                        <a:latin typeface="Calibri" charset="0"/>
+                        <a:ea typeface="Calibri" charset="0"/>
+                        <a:cs typeface="Calibri" charset="0"/>
+                      </a:endParaRPr>
+                    </a:p>
+                  </a:txBody>
+                  <a:tcPr marL="50800" marR="50800" marT="25400" marB="25400" anchor="ctr">
+                    <a:lnL w="6350" cap="flat" cmpd="sng" algn="ctr">
+                      <a:solidFill>
+                        <a:srgbClr val="DCE7E5"/>
+                      </a:solidFill>
+                      <a:prstDash val="solid"/>
+                      <a:round/>
+                      <a:headEnd type="none" w="med" len="med"/>
+                      <a:tailEnd type="none" w="med" len="med"/>
+                    </a:lnL>
+                    <a:lnR w="6350" cap="flat" cmpd="sng" algn="ctr">
+                      <a:solidFill>
+                        <a:srgbClr val="DCE7E5"/>
+                      </a:solidFill>
+                      <a:prstDash val="solid"/>
+                      <a:round/>
+                      <a:headEnd type="none" w="med" len="med"/>
+                      <a:tailEnd type="none" w="med" len="med"/>
+                    </a:lnR>
+                    <a:lnT w="6350" cap="flat" cmpd="sng" algn="ctr">
+                      <a:solidFill>
+                        <a:srgbClr val="DCE7E5"/>
+                      </a:solidFill>
+                      <a:prstDash val="solid"/>
+                      <a:round/>
+                      <a:headEnd type="none" w="med" len="med"/>
+                      <a:tailEnd type="none" w="med" len="med"/>
+                    </a:lnT>
+                    <a:lnB w="6350" cap="flat" cmpd="sng" algn="ctr">
+                      <a:solidFill>
+                        <a:srgbClr val="DCE7E5"/>
+                      </a:solidFill>
+                      <a:prstDash val="solid"/>
+                      <a:round/>
+                      <a:headEnd type="none" w="med" len="med"/>
+                      <a:tailEnd type="none" w="med" len="med"/>
+                    </a:lnB>
+                    <a:solidFill>
+                      <a:srgbClr val="FFFFFF"/>
+                    </a:solidFill>
+                  </a:tcPr>
+                </a:tc>
               </a:tr>
               <a:tr h="301752">
                 <a:tc>
@@ -38566,7 +39906,7 @@
                           <a:ea typeface="Calibri" pitchFamily="34" charset="-122"/>
                           <a:cs typeface="Calibri" pitchFamily="34" charset="-120"/>
                         </a:rPr>
-                        <a:t>Classic, 70% barrier, 10%-vol basket</a:t>
+                        <a:t>Memory coupon, 70% barrier, no put</a:t>
                       </a:r>
                       <a:endParaRPr lang="en-US" sz="850" dirty="0">
                         <a:latin typeface="Calibri" charset="0"/>
@@ -38634,7 +39974,7 @@
                           <a:ea typeface="Calibri" pitchFamily="34" charset="-122"/>
                           <a:cs typeface="Calibri" pitchFamily="34" charset="-120"/>
                         </a:rPr>
-                        <a:t>4.2%</a:t>
+                        <a:t>13.6%</a:t>
                       </a:r>
                       <a:endParaRPr lang="en-US" sz="850" dirty="0">
                         <a:latin typeface="Calibri" charset="0"/>
@@ -38702,7 +40042,349 @@
                           <a:ea typeface="Calibri" pitchFamily="34" charset="-122"/>
                           <a:cs typeface="Calibri" pitchFamily="34" charset="-120"/>
                         </a:rPr>
-                        <a:t>1.3%</a:t>
+                        <a:t>16.2%</a:t>
+                      </a:r>
+                      <a:endParaRPr lang="en-US" sz="850" dirty="0">
+                        <a:latin typeface="Calibri" charset="0"/>
+                        <a:ea typeface="Calibri" charset="0"/>
+                        <a:cs typeface="Calibri" charset="0"/>
+                      </a:endParaRPr>
+                    </a:p>
+                  </a:txBody>
+                  <a:tcPr marL="50800" marR="50800" marT="25400" marB="25400" anchor="ctr">
+                    <a:lnL w="6350" cap="flat" cmpd="sng" algn="ctr">
+                      <a:solidFill>
+                        <a:srgbClr val="DCE7E5"/>
+                      </a:solidFill>
+                      <a:prstDash val="solid"/>
+                      <a:round/>
+                      <a:headEnd type="none" w="med" len="med"/>
+                      <a:tailEnd type="none" w="med" len="med"/>
+                    </a:lnL>
+                    <a:lnR w="6350" cap="flat" cmpd="sng" algn="ctr">
+                      <a:solidFill>
+                        <a:srgbClr val="DCE7E5"/>
+                      </a:solidFill>
+                      <a:prstDash val="solid"/>
+                      <a:round/>
+                      <a:headEnd type="none" w="med" len="med"/>
+                      <a:tailEnd type="none" w="med" len="med"/>
+                    </a:lnR>
+                    <a:lnT w="6350" cap="flat" cmpd="sng" algn="ctr">
+                      <a:solidFill>
+                        <a:srgbClr val="DCE7E5"/>
+                      </a:solidFill>
+                      <a:prstDash val="solid"/>
+                      <a:round/>
+                      <a:headEnd type="none" w="med" len="med"/>
+                      <a:tailEnd type="none" w="med" len="med"/>
+                    </a:lnT>
+                    <a:lnB w="6350" cap="flat" cmpd="sng" algn="ctr">
+                      <a:solidFill>
+                        <a:srgbClr val="DCE7E5"/>
+                      </a:solidFill>
+                      <a:prstDash val="solid"/>
+                      <a:round/>
+                      <a:headEnd type="none" w="med" len="med"/>
+                      <a:tailEnd type="none" w="med" len="med"/>
+                    </a:lnB>
+                    <a:solidFill>
+                      <a:srgbClr val="FFFFFF"/>
+                    </a:solidFill>
+                  </a:tcPr>
+                </a:tc>
+                <a:tc>
+                  <a:txBody>
+                    <a:bodyPr/>
+                    <a:lstStyle/>
+                    <a:p>
+                      <a:pPr algn="l" indent="0" marL="0">
+                        <a:buNone/>
+                      </a:pPr>
+                      <a:r>
+                        <a:rPr lang="en-US" sz="850" dirty="0">
+                          <a:solidFill>
+                            <a:srgbClr val="1D2B30"/>
+                          </a:solidFill>
+                          <a:latin typeface="Calibri" pitchFamily="34" charset="0"/>
+                          <a:ea typeface="Calibri" pitchFamily="34" charset="-122"/>
+                          <a:cs typeface="Calibri" pitchFamily="34" charset="-120"/>
+                        </a:rPr>
+                        <a:t>Up to 100%</a:t>
+                      </a:r>
+                      <a:endParaRPr lang="en-US" sz="850" dirty="0">
+                        <a:latin typeface="Calibri" charset="0"/>
+                        <a:ea typeface="Calibri" charset="0"/>
+                        <a:cs typeface="Calibri" charset="0"/>
+                      </a:endParaRPr>
+                    </a:p>
+                  </a:txBody>
+                  <a:tcPr marL="50800" marR="50800" marT="25400" marB="25400" anchor="ctr">
+                    <a:lnL w="6350" cap="flat" cmpd="sng" algn="ctr">
+                      <a:solidFill>
+                        <a:srgbClr val="DCE7E5"/>
+                      </a:solidFill>
+                      <a:prstDash val="solid"/>
+                      <a:round/>
+                      <a:headEnd type="none" w="med" len="med"/>
+                      <a:tailEnd type="none" w="med" len="med"/>
+                    </a:lnL>
+                    <a:lnR w="6350" cap="flat" cmpd="sng" algn="ctr">
+                      <a:solidFill>
+                        <a:srgbClr val="DCE7E5"/>
+                      </a:solidFill>
+                      <a:prstDash val="solid"/>
+                      <a:round/>
+                      <a:headEnd type="none" w="med" len="med"/>
+                      <a:tailEnd type="none" w="med" len="med"/>
+                    </a:lnR>
+                    <a:lnT w="6350" cap="flat" cmpd="sng" algn="ctr">
+                      <a:solidFill>
+                        <a:srgbClr val="DCE7E5"/>
+                      </a:solidFill>
+                      <a:prstDash val="solid"/>
+                      <a:round/>
+                      <a:headEnd type="none" w="med" len="med"/>
+                      <a:tailEnd type="none" w="med" len="med"/>
+                    </a:lnT>
+                    <a:lnB w="6350" cap="flat" cmpd="sng" algn="ctr">
+                      <a:solidFill>
+                        <a:srgbClr val="DCE7E5"/>
+                      </a:solidFill>
+                      <a:prstDash val="solid"/>
+                      <a:round/>
+                      <a:headEnd type="none" w="med" len="med"/>
+                      <a:tailEnd type="none" w="med" len="med"/>
+                    </a:lnB>
+                    <a:solidFill>
+                      <a:srgbClr val="FFFFFF"/>
+                    </a:solidFill>
+                  </a:tcPr>
+                </a:tc>
+              </a:tr>
+              <a:tr h="301752">
+                <a:tc>
+                  <a:txBody>
+                    <a:bodyPr/>
+                    <a:lstStyle/>
+                    <a:p>
+                      <a:pPr algn="l" indent="0" marL="0">
+                        <a:buNone/>
+                      </a:pPr>
+                      <a:r>
+                        <a:rPr lang="en-US" sz="850" dirty="0">
+                          <a:solidFill>
+                            <a:srgbClr val="1D2B30"/>
+                          </a:solidFill>
+                          <a:latin typeface="Calibri" pitchFamily="34" charset="0"/>
+                          <a:ea typeface="Calibri" pitchFamily="34" charset="-122"/>
+                          <a:cs typeface="Calibri" pitchFamily="34" charset="-120"/>
+                        </a:rPr>
+                        <a:t>Memory coupon, 100% protected</a:t>
+                      </a:r>
+                      <a:endParaRPr lang="en-US" sz="850" dirty="0">
+                        <a:latin typeface="Calibri" charset="0"/>
+                        <a:ea typeface="Calibri" charset="0"/>
+                        <a:cs typeface="Calibri" charset="0"/>
+                      </a:endParaRPr>
+                    </a:p>
+                  </a:txBody>
+                  <a:tcPr marL="50800" marR="50800" marT="25400" marB="25400" anchor="ctr">
+                    <a:lnL w="6350" cap="flat" cmpd="sng" algn="ctr">
+                      <a:solidFill>
+                        <a:srgbClr val="DCE7E5"/>
+                      </a:solidFill>
+                      <a:prstDash val="solid"/>
+                      <a:round/>
+                      <a:headEnd type="none" w="med" len="med"/>
+                      <a:tailEnd type="none" w="med" len="med"/>
+                    </a:lnL>
+                    <a:lnR w="6350" cap="flat" cmpd="sng" algn="ctr">
+                      <a:solidFill>
+                        <a:srgbClr val="DCE7E5"/>
+                      </a:solidFill>
+                      <a:prstDash val="solid"/>
+                      <a:round/>
+                      <a:headEnd type="none" w="med" len="med"/>
+                      <a:tailEnd type="none" w="med" len="med"/>
+                    </a:lnR>
+                    <a:lnT w="6350" cap="flat" cmpd="sng" algn="ctr">
+                      <a:solidFill>
+                        <a:srgbClr val="DCE7E5"/>
+                      </a:solidFill>
+                      <a:prstDash val="solid"/>
+                      <a:round/>
+                      <a:headEnd type="none" w="med" len="med"/>
+                      <a:tailEnd type="none" w="med" len="med"/>
+                    </a:lnT>
+                    <a:lnB w="6350" cap="flat" cmpd="sng" algn="ctr">
+                      <a:solidFill>
+                        <a:srgbClr val="DCE7E5"/>
+                      </a:solidFill>
+                      <a:prstDash val="solid"/>
+                      <a:round/>
+                      <a:headEnd type="none" w="med" len="med"/>
+                      <a:tailEnd type="none" w="med" len="med"/>
+                    </a:lnB>
+                    <a:solidFill>
+                      <a:srgbClr val="FFFFFF"/>
+                    </a:solidFill>
+                  </a:tcPr>
+                </a:tc>
+                <a:tc>
+                  <a:txBody>
+                    <a:bodyPr/>
+                    <a:lstStyle/>
+                    <a:p>
+                      <a:pPr algn="l" indent="0" marL="0">
+                        <a:buNone/>
+                      </a:pPr>
+                      <a:r>
+                        <a:rPr lang="en-US" sz="850" dirty="0">
+                          <a:solidFill>
+                            <a:srgbClr val="1D2B30"/>
+                          </a:solidFill>
+                          <a:latin typeface="Calibri" pitchFamily="34" charset="0"/>
+                          <a:ea typeface="Calibri" pitchFamily="34" charset="-122"/>
+                          <a:cs typeface="Calibri" pitchFamily="34" charset="-120"/>
+                        </a:rPr>
+                        <a:t>7.9%</a:t>
+                      </a:r>
+                      <a:endParaRPr lang="en-US" sz="850" dirty="0">
+                        <a:latin typeface="Calibri" charset="0"/>
+                        <a:ea typeface="Calibri" charset="0"/>
+                        <a:cs typeface="Calibri" charset="0"/>
+                      </a:endParaRPr>
+                    </a:p>
+                  </a:txBody>
+                  <a:tcPr marL="50800" marR="50800" marT="25400" marB="25400" anchor="ctr">
+                    <a:lnL w="6350" cap="flat" cmpd="sng" algn="ctr">
+                      <a:solidFill>
+                        <a:srgbClr val="DCE7E5"/>
+                      </a:solidFill>
+                      <a:prstDash val="solid"/>
+                      <a:round/>
+                      <a:headEnd type="none" w="med" len="med"/>
+                      <a:tailEnd type="none" w="med" len="med"/>
+                    </a:lnL>
+                    <a:lnR w="6350" cap="flat" cmpd="sng" algn="ctr">
+                      <a:solidFill>
+                        <a:srgbClr val="DCE7E5"/>
+                      </a:solidFill>
+                      <a:prstDash val="solid"/>
+                      <a:round/>
+                      <a:headEnd type="none" w="med" len="med"/>
+                      <a:tailEnd type="none" w="med" len="med"/>
+                    </a:lnR>
+                    <a:lnT w="6350" cap="flat" cmpd="sng" algn="ctr">
+                      <a:solidFill>
+                        <a:srgbClr val="DCE7E5"/>
+                      </a:solidFill>
+                      <a:prstDash val="solid"/>
+                      <a:round/>
+                      <a:headEnd type="none" w="med" len="med"/>
+                      <a:tailEnd type="none" w="med" len="med"/>
+                    </a:lnT>
+                    <a:lnB w="6350" cap="flat" cmpd="sng" algn="ctr">
+                      <a:solidFill>
+                        <a:srgbClr val="DCE7E5"/>
+                      </a:solidFill>
+                      <a:prstDash val="solid"/>
+                      <a:round/>
+                      <a:headEnd type="none" w="med" len="med"/>
+                      <a:tailEnd type="none" w="med" len="med"/>
+                    </a:lnB>
+                    <a:solidFill>
+                      <a:srgbClr val="FFFFFF"/>
+                    </a:solidFill>
+                  </a:tcPr>
+                </a:tc>
+                <a:tc>
+                  <a:txBody>
+                    <a:bodyPr/>
+                    <a:lstStyle/>
+                    <a:p>
+                      <a:pPr algn="l" indent="0" marL="0">
+                        <a:buNone/>
+                      </a:pPr>
+                      <a:r>
+                        <a:rPr lang="en-US" sz="850" dirty="0">
+                          <a:solidFill>
+                            <a:srgbClr val="1D2B30"/>
+                          </a:solidFill>
+                          <a:latin typeface="Calibri" pitchFamily="34" charset="0"/>
+                          <a:ea typeface="Calibri" pitchFamily="34" charset="-122"/>
+                          <a:cs typeface="Calibri" pitchFamily="34" charset="-120"/>
+                        </a:rPr>
+                        <a:t>0.0%</a:t>
+                      </a:r>
+                      <a:endParaRPr lang="en-US" sz="850" dirty="0">
+                        <a:latin typeface="Calibri" charset="0"/>
+                        <a:ea typeface="Calibri" charset="0"/>
+                        <a:cs typeface="Calibri" charset="0"/>
+                      </a:endParaRPr>
+                    </a:p>
+                  </a:txBody>
+                  <a:tcPr marL="50800" marR="50800" marT="25400" marB="25400" anchor="ctr">
+                    <a:lnL w="6350" cap="flat" cmpd="sng" algn="ctr">
+                      <a:solidFill>
+                        <a:srgbClr val="DCE7E5"/>
+                      </a:solidFill>
+                      <a:prstDash val="solid"/>
+                      <a:round/>
+                      <a:headEnd type="none" w="med" len="med"/>
+                      <a:tailEnd type="none" w="med" len="med"/>
+                    </a:lnL>
+                    <a:lnR w="6350" cap="flat" cmpd="sng" algn="ctr">
+                      <a:solidFill>
+                        <a:srgbClr val="DCE7E5"/>
+                      </a:solidFill>
+                      <a:prstDash val="solid"/>
+                      <a:round/>
+                      <a:headEnd type="none" w="med" len="med"/>
+                      <a:tailEnd type="none" w="med" len="med"/>
+                    </a:lnR>
+                    <a:lnT w="6350" cap="flat" cmpd="sng" algn="ctr">
+                      <a:solidFill>
+                        <a:srgbClr val="DCE7E5"/>
+                      </a:solidFill>
+                      <a:prstDash val="solid"/>
+                      <a:round/>
+                      <a:headEnd type="none" w="med" len="med"/>
+                      <a:tailEnd type="none" w="med" len="med"/>
+                    </a:lnT>
+                    <a:lnB w="6350" cap="flat" cmpd="sng" algn="ctr">
+                      <a:solidFill>
+                        <a:srgbClr val="DCE7E5"/>
+                      </a:solidFill>
+                      <a:prstDash val="solid"/>
+                      <a:round/>
+                      <a:headEnd type="none" w="med" len="med"/>
+                      <a:tailEnd type="none" w="med" len="med"/>
+                    </a:lnB>
+                    <a:solidFill>
+                      <a:srgbClr val="FFFFFF"/>
+                    </a:solidFill>
+                  </a:tcPr>
+                </a:tc>
+                <a:tc>
+                  <a:txBody>
+                    <a:bodyPr/>
+                    <a:lstStyle/>
+                    <a:p>
+                      <a:pPr algn="l" indent="0" marL="0">
+                        <a:buNone/>
+                      </a:pPr>
+                      <a:r>
+                        <a:rPr lang="en-US" sz="850" dirty="0">
+                          <a:solidFill>
+                            <a:srgbClr val="1D2B30"/>
+                          </a:solidFill>
+                          <a:latin typeface="Calibri" pitchFamily="34" charset="0"/>
+                          <a:ea typeface="Calibri" pitchFamily="34" charset="-122"/>
+                          <a:cs typeface="Calibri" pitchFamily="34" charset="-120"/>
+                        </a:rPr>
+                        <a:t>None</a:t>
                       </a:r>
                       <a:endParaRPr lang="en-US" sz="850" dirty="0">
                         <a:latin typeface="Calibri" charset="0"/>
@@ -38772,7 +40454,7 @@
                           <a:ea typeface="Calibri" pitchFamily="34" charset="-122"/>
                           <a:cs typeface="Calibri" pitchFamily="34" charset="-120"/>
                         </a:rPr>
-                        <a:t>Capital protected, memory coupon (ours)</a:t>
+                        <a:t>Memory coupon, 70% barrier + 70% put (ours)</a:t>
                       </a:r>
                       <a:endParaRPr lang="en-US" sz="850" dirty="0">
                         <a:latin typeface="Calibri" charset="0"/>
@@ -38840,7 +40522,7 @@
                           <a:ea typeface="Calibri" pitchFamily="34" charset="-122"/>
                           <a:cs typeface="Calibri" pitchFamily="34" charset="-120"/>
                         </a:rPr>
-                        <a:t>7.9%</a:t>
+                        <a:t>11.2%</a:t>
                       </a:r>
                       <a:endParaRPr lang="en-US" sz="850" dirty="0">
                         <a:latin typeface="Calibri" charset="0"/>
@@ -38908,7 +40590,75 @@
                           <a:ea typeface="Calibri" pitchFamily="34" charset="-122"/>
                           <a:cs typeface="Calibri" pitchFamily="34" charset="-120"/>
                         </a:rPr>
-                        <a:t>0.0%</a:t>
+                        <a:t>16.2%</a:t>
+                      </a:r>
+                      <a:endParaRPr lang="en-US" sz="850" dirty="0">
+                        <a:latin typeface="Calibri" charset="0"/>
+                        <a:ea typeface="Calibri" charset="0"/>
+                        <a:cs typeface="Calibri" charset="0"/>
+                      </a:endParaRPr>
+                    </a:p>
+                  </a:txBody>
+                  <a:tcPr marL="50800" marR="50800" marT="25400" marB="25400" anchor="ctr">
+                    <a:lnL w="6350" cap="flat" cmpd="sng" algn="ctr">
+                      <a:solidFill>
+                        <a:srgbClr val="DCE7E5"/>
+                      </a:solidFill>
+                      <a:prstDash val="solid"/>
+                      <a:round/>
+                      <a:headEnd type="none" w="med" len="med"/>
+                      <a:tailEnd type="none" w="med" len="med"/>
+                    </a:lnL>
+                    <a:lnR w="6350" cap="flat" cmpd="sng" algn="ctr">
+                      <a:solidFill>
+                        <a:srgbClr val="DCE7E5"/>
+                      </a:solidFill>
+                      <a:prstDash val="solid"/>
+                      <a:round/>
+                      <a:headEnd type="none" w="med" len="med"/>
+                      <a:tailEnd type="none" w="med" len="med"/>
+                    </a:lnR>
+                    <a:lnT w="6350" cap="flat" cmpd="sng" algn="ctr">
+                      <a:solidFill>
+                        <a:srgbClr val="DCE7E5"/>
+                      </a:solidFill>
+                      <a:prstDash val="solid"/>
+                      <a:round/>
+                      <a:headEnd type="none" w="med" len="med"/>
+                      <a:tailEnd type="none" w="med" len="med"/>
+                    </a:lnT>
+                    <a:lnB w="6350" cap="flat" cmpd="sng" algn="ctr">
+                      <a:solidFill>
+                        <a:srgbClr val="DCE7E5"/>
+                      </a:solidFill>
+                      <a:prstDash val="solid"/>
+                      <a:round/>
+                      <a:headEnd type="none" w="med" len="med"/>
+                      <a:tailEnd type="none" w="med" len="med"/>
+                    </a:lnB>
+                    <a:solidFill>
+                      <a:srgbClr val="E6F2F0"/>
+                    </a:solidFill>
+                  </a:tcPr>
+                </a:tc>
+                <a:tc>
+                  <a:txBody>
+                    <a:bodyPr/>
+                    <a:lstStyle/>
+                    <a:p>
+                      <a:pPr algn="l" indent="0" marL="0">
+                        <a:buNone/>
+                      </a:pPr>
+                      <a:r>
+                        <a:rPr lang="en-US" sz="850" b="1" dirty="0">
+                          <a:solidFill>
+                            <a:srgbClr val="0F8B8D"/>
+                          </a:solidFill>
+                          <a:latin typeface="Calibri" pitchFamily="34" charset="0"/>
+                          <a:ea typeface="Calibri" pitchFamily="34" charset="-122"/>
+                          <a:cs typeface="Calibri" pitchFamily="34" charset="-120"/>
+                        </a:rPr>
+                        <a:t>30%</a:t>
                       </a:r>
                       <a:endParaRPr lang="en-US" sz="850" dirty="0">
                         <a:latin typeface="Calibri" charset="0"/>
@@ -39038,7 +40788,7 @@
                 <a:ea typeface="Calibri" pitchFamily="34" charset="-122"/>
                 <a:cs typeface="Calibri" pitchFamily="34" charset="-120"/>
               </a:rPr>
-              <a:t>The draft's 8.5% fixed coupon is worth 100.3% to the client, so Natixis cannot fund it. At-risk designs pay 7%–14% for a 14%–16% chance of losing capital. Cutting that to ~1% needs a 10%-vol basket and pays only 4.2%, below the 5.69% bond. Full protection prices at 7.9%; we offer 7.20%.</a:t>
+              <a:t>The draft's 8.5% fixed coupon is worth 100.3%, so Natixis cannot fund it. Full protection pays only 7.9%. Without a put the coupon is 13.6%, but a crash can wipe out the capital. The embedded 70% put costs ~2.4pts of coupon and caps the loss at 30%: fair 11.2%, we offer 10.50%.</a:t>
             </a:r>
             <a:endParaRPr lang="en-US" sz="950" dirty="0"/>
           </a:p>
@@ -39077,7 +40827,7 @@
                 <a:ea typeface="Calibri" pitchFamily="34" charset="-122"/>
                 <a:cs typeface="Calibri" pitchFamily="34" charset="-120"/>
               </a:rPr>
-              <a:t>Monte Carlo, 200k paths. Vols, dividends and correlations are assumptions to refresh with Bloomberg data as of the 17 Sep 2026 trade date; discounting uses the USD funding grid. Loss risk = probability the note returns less than 100%.</a:t>
+              <a:t>Monte Carlo, 200k paths. Vols, dividends and correlations are assumptions to refresh with Bloomberg data as of the 17 Sep 2026 trade date; discounting uses the USD funding grid. Loss risk = probability the note returns less than 100% at maturity (risk-neutral).</a:t>
             </a:r>
             <a:endParaRPr lang="en-US" sz="800" dirty="0"/>
           </a:p>
@@ -39496,7 +41246,7 @@
                 <a:ea typeface="Calibri" pitchFamily="34" charset="-122"/>
                 <a:cs typeface="Calibri" pitchFamily="34" charset="-120"/>
               </a:rPr>
-              <a:t>called, 107.2% total</a:t>
+              <a:t>called, 110.5% total</a:t>
             </a:r>
             <a:endParaRPr lang="en-US" sz="950" dirty="0"/>
           </a:p>
@@ -39650,7 +41400,7 @@
                 <a:ea typeface="Calibri" pitchFamily="34" charset="-122"/>
                 <a:cs typeface="Calibri" pitchFamily="34" charset="-120"/>
               </a:rPr>
-              <a:t>called, 114.4% total</a:t>
+              <a:t>called, 121.0% total</a:t>
             </a:r>
             <a:endParaRPr lang="en-US" sz="950" dirty="0"/>
           </a:p>
@@ -39804,7 +41554,7 @@
                 <a:ea typeface="Calibri" pitchFamily="34" charset="-122"/>
                 <a:cs typeface="Calibri" pitchFamily="34" charset="-120"/>
               </a:rPr>
-              <a:t>called, 121.6% total</a:t>
+              <a:t>called, 131.5% total</a:t>
             </a:r>
             <a:endParaRPr lang="en-US" sz="950" dirty="0"/>
           </a:p>
@@ -39958,7 +41708,7 @@
                 <a:ea typeface="Calibri" pitchFamily="34" charset="-122"/>
                 <a:cs typeface="Calibri" pitchFamily="34" charset="-120"/>
               </a:rPr>
-              <a:t>called, 128.8% total</a:t>
+              <a:t>called, 142.0% total</a:t>
             </a:r>
             <a:endParaRPr lang="en-US" sz="950" dirty="0"/>
           </a:p>
@@ -40112,7 +41862,7 @@
                 <a:ea typeface="Calibri" pitchFamily="34" charset="-122"/>
                 <a:cs typeface="Calibri" pitchFamily="34" charset="-120"/>
               </a:rPr>
-              <a:t>called, 136.0% total</a:t>
+              <a:t>called, 152.5% total</a:t>
             </a:r>
             <a:endParaRPr lang="en-US" sz="950" dirty="0"/>
           </a:p>
@@ -40190,7 +41940,7 @@
                 <a:ea typeface="Calibri" pitchFamily="34" charset="-122"/>
                 <a:cs typeface="Calibri" pitchFamily="34" charset="-120"/>
               </a:rPr>
-              <a:t>Q1–Q3: coupon only (1.80% if basket ≥ 100%). From Q4: coupon plus autocall. Missed coupons are always caught up.</a:t>
+              <a:t>Q1–Q3: coupon only (2.63% if basket ≥ 100%). From Q4: coupon plus autocall. Missed coupons are always caught up.</a:t>
             </a:r>
             <a:endParaRPr lang="en-US" sz="900" dirty="0"/>
           </a:p>
@@ -40532,7 +42282,7 @@
                 <a:ea typeface="Calibri" pitchFamily="34" charset="-122"/>
                 <a:cs typeface="Calibri" pitchFamily="34" charset="-120"/>
               </a:rPr>
-              <a:t>Not called, early coupons</a:t>
+              <a:t>Not called, basket ≥ 70%</a:t>
             </a:r>
             <a:endParaRPr lang="en-US" sz="1200" dirty="0"/>
           </a:p>
@@ -40571,7 +42321,7 @@
                 <a:ea typeface="Calibri" pitchFamily="34" charset="-122"/>
                 <a:cs typeface="Calibri" pitchFamily="34" charset="-120"/>
               </a:rPr>
-              <a:t>Basket ≥ 100% in Q1–Q3 only, never afterwards. The family keeps those coupons and gets 100% back at Y5.</a:t>
+              <a:t>Basket never back to 100% after Q3 but ends at or above 70%: 100% back at Y5, plus any early coupons.</a:t>
             </a:r>
             <a:endParaRPr lang="en-US" sz="1000" dirty="0"/>
           </a:p>
@@ -40610,7 +42360,7 @@
                 <a:ea typeface="Calibri" pitchFamily="34" charset="-122"/>
                 <a:cs typeface="Calibri" pitchFamily="34" charset="-120"/>
               </a:rPr>
-              <a:t>8%</a:t>
+              <a:t>5%</a:t>
             </a:r>
             <a:pPr indent="0" marL="0">
               <a:buNone/>
@@ -40749,7 +42499,7 @@
                 <a:ea typeface="Calibri" pitchFamily="34" charset="-122"/>
                 <a:cs typeface="Calibri" pitchFamily="34" charset="-120"/>
               </a:rPr>
-              <a:t>Not called, no coupon</a:t>
+              <a:t>Not called, basket &lt; 70%</a:t>
             </a:r>
             <a:endParaRPr lang="en-US" sz="1200" dirty="0"/>
           </a:p>
@@ -40788,7 +42538,7 @@
                 <a:ea typeface="Calibri" pitchFamily="34" charset="-122"/>
                 <a:cs typeface="Calibri" pitchFamily="34" charset="-120"/>
               </a:rPr>
-              <a:t>Basket never back to 100%. The family gets 100% back at Y5: a 0% return, but no capital loss.</a:t>
+              <a:t>Basket ends more than 30% down: the embedded put pays 70% back at Y5. Maximum loss 30%.</a:t>
             </a:r>
             <a:endParaRPr lang="en-US" sz="1000" dirty="0"/>
           </a:p>
@@ -40827,7 +42577,7 @@
                 <a:ea typeface="Calibri" pitchFamily="34" charset="-122"/>
                 <a:cs typeface="Calibri" pitchFamily="34" charset="-120"/>
               </a:rPr>
-              <a:t>13%</a:t>
+              <a:t>16%</a:t>
             </a:r>
             <a:pPr indent="0" marL="0">
               <a:buNone/>
@@ -41084,7 +42834,7 @@
                 <a:ea typeface="Calibri" pitchFamily="34" charset="-122"/>
                 <a:cs typeface="Calibri" pitchFamily="34" charset="-120"/>
               </a:rPr>
-              <a:t>Y1: 107.2%  (USD 107.2mn)</a:t>
+              <a:t>Y1: 110.5%  (USD 110.5mn)</a:t>
             </a:r>
             <a:endParaRPr lang="en-US" sz="900" dirty="0"/>
           </a:p>
@@ -41101,7 +42851,7 @@
                 <a:ea typeface="Calibri" pitchFamily="34" charset="-122"/>
                 <a:cs typeface="Calibri" pitchFamily="34" charset="-120"/>
               </a:rPr>
-              <a:t>Y2: 114.4%  (USD 114.4mn)</a:t>
+              <a:t>Y2: 121.0%  (USD 121.0mn)</a:t>
             </a:r>
             <a:endParaRPr lang="en-US" sz="900" dirty="0"/>
           </a:p>
@@ -41118,7 +42868,7 @@
                 <a:ea typeface="Calibri" pitchFamily="34" charset="-122"/>
                 <a:cs typeface="Calibri" pitchFamily="34" charset="-120"/>
               </a:rPr>
-              <a:t>Y3: 121.6%  (USD 121.6mn)</a:t>
+              <a:t>Y3: 131.5%  (USD 131.5mn)</a:t>
             </a:r>
             <a:endParaRPr lang="en-US" sz="900" dirty="0"/>
           </a:p>
@@ -41135,7 +42885,7 @@
                 <a:ea typeface="Calibri" pitchFamily="34" charset="-122"/>
                 <a:cs typeface="Calibri" pitchFamily="34" charset="-120"/>
               </a:rPr>
-              <a:t>Y4: 128.8%  (USD 128.8mn)</a:t>
+              <a:t>Y4: 142.0%  (USD 142.0mn)</a:t>
             </a:r>
             <a:endParaRPr lang="en-US" sz="900" dirty="0"/>
           </a:p>
@@ -41152,7 +42902,7 @@
                 <a:ea typeface="Calibri" pitchFamily="34" charset="-122"/>
                 <a:cs typeface="Calibri" pitchFamily="34" charset="-120"/>
               </a:rPr>
-              <a:t>Y5: 136.0%  (USD 136.0mn)</a:t>
+              <a:t>Y5: 152.5%  (USD 152.5mn)</a:t>
             </a:r>
             <a:endParaRPr lang="en-US" sz="900" dirty="0"/>
           </a:p>
@@ -41221,18 +42971,18 @@
         </p:nvSpPr>
         <p:spPr>
           <a:xfrm>
-            <a:off x="4709160" y="4315968"/>
+            <a:off x="4709160" y="4261104"/>
             <a:ext cx="91440" cy="91440"/>
           </a:xfrm>
           <a:prstGeom prst="ellipse">
             <a:avLst/>
           </a:prstGeom>
           <a:solidFill>
-            <a:srgbClr val="D9961A"/>
+            <a:srgbClr val="B8433A"/>
           </a:solidFill>
           <a:ln w="12700">
             <a:solidFill>
-              <a:srgbClr val="D9961A"/>
+              <a:srgbClr val="B8433A"/>
             </a:solidFill>
             <a:prstDash val="solid"/>
           </a:ln>
@@ -41246,7 +42996,7 @@
         </p:nvSpPr>
         <p:spPr>
           <a:xfrm>
-            <a:off x="4864608" y="4261104"/>
+            <a:off x="4864608" y="4206240"/>
             <a:ext cx="3840480" cy="182880"/>
           </a:xfrm>
           <a:prstGeom prst="rect">
@@ -41271,7 +43021,7 @@
                 <a:ea typeface="Calibri" pitchFamily="34" charset="-122"/>
                 <a:cs typeface="Calibri" pitchFamily="34" charset="-120"/>
               </a:rPr>
-              <a:t>&lt; 100%: 100% back; capital protected however far the basket falls</a:t>
+              <a:t>&lt; 70%: 70% back (embedded put): maximum loss 30%</a:t>
             </a:r>
             <a:endParaRPr lang="en-US" sz="850" dirty="0"/>
           </a:p>
@@ -41285,18 +43035,18 @@
         </p:nvSpPr>
         <p:spPr>
           <a:xfrm>
-            <a:off x="4709160" y="4489704"/>
+            <a:off x="4709160" y="4434840"/>
             <a:ext cx="91440" cy="91440"/>
           </a:xfrm>
           <a:prstGeom prst="ellipse">
             <a:avLst/>
           </a:prstGeom>
           <a:solidFill>
-            <a:srgbClr val="0F8B8D"/>
+            <a:srgbClr val="D9961A"/>
           </a:solidFill>
           <a:ln w="12700">
             <a:solidFill>
-              <a:srgbClr val="0F8B8D"/>
+              <a:srgbClr val="D9961A"/>
             </a:solidFill>
             <a:prstDash val="solid"/>
           </a:ln>
@@ -41310,7 +43060,7 @@
         </p:nvSpPr>
         <p:spPr>
           <a:xfrm>
-            <a:off x="4864608" y="4434840"/>
+            <a:off x="4864608" y="4379976"/>
             <a:ext cx="3840480" cy="182880"/>
           </a:xfrm>
           <a:prstGeom prst="rect">
@@ -41335,7 +43085,7 @@
                 <a:ea typeface="Calibri" pitchFamily="34" charset="-122"/>
                 <a:cs typeface="Calibri" pitchFamily="34" charset="-120"/>
               </a:rPr>
-              <a:t>≥ 100%: 136.0% (principal + all 20 coupons via memory)</a:t>
+              <a:t>70–100%: 100% back, the 30% buffer absorbs the fall</a:t>
             </a:r>
             <a:endParaRPr lang="en-US" sz="850" dirty="0"/>
           </a:p>
@@ -41343,7 +43093,71 @@
       </p:sp>
       <p:sp>
         <p:nvSpPr>
-          <p:cNvPr id="12" name="Text 8"/>
+          <p:cNvPr id="12" name="Shape 8"/>
+          <p:cNvSpPr/>
+          <p:nvPr/>
+        </p:nvSpPr>
+        <p:spPr>
+          <a:xfrm>
+            <a:off x="4709160" y="4608576"/>
+            <a:ext cx="91440" cy="91440"/>
+          </a:xfrm>
+          <a:prstGeom prst="ellipse">
+            <a:avLst/>
+          </a:prstGeom>
+          <a:solidFill>
+            <a:srgbClr val="0F8B8D"/>
+          </a:solidFill>
+          <a:ln w="12700">
+            <a:solidFill>
+              <a:srgbClr val="0F8B8D"/>
+            </a:solidFill>
+            <a:prstDash val="solid"/>
+          </a:ln>
+        </p:spPr>
+      </p:sp>
+      <p:sp>
+        <p:nvSpPr>
+          <p:cNvPr id="13" name="Text 9"/>
+          <p:cNvSpPr txBox="1"/>
+          <p:nvPr/>
+        </p:nvSpPr>
+        <p:spPr>
+          <a:xfrm>
+            <a:off x="4864608" y="4553712"/>
+            <a:ext cx="3840480" cy="182880"/>
+          </a:xfrm>
+          <a:prstGeom prst="rect">
+            <a:avLst/>
+          </a:prstGeom>
+          <a:noFill/>
+          <a:ln/>
+        </p:spPr>
+        <p:txBody>
+          <a:bodyPr wrap="square" lIns="0" tIns="0" rIns="0" bIns="0" rtlCol="0" anchor="t"/>
+          <a:lstStyle/>
+          <a:p>
+            <a:pPr indent="0" marL="0">
+              <a:buNone/>
+            </a:pPr>
+            <a:r>
+              <a:rPr lang="en-US" sz="850" dirty="0">
+                <a:solidFill>
+                  <a:srgbClr val="1D2B30"/>
+                </a:solidFill>
+                <a:latin typeface="Calibri" pitchFamily="34" charset="0"/>
+                <a:ea typeface="Calibri" pitchFamily="34" charset="-122"/>
+                <a:cs typeface="Calibri" pitchFamily="34" charset="-120"/>
+              </a:rPr>
+              <a:t>≥ 100%: 152.5% (principal + all 20 coupons via memory)</a:t>
+            </a:r>
+            <a:endParaRPr lang="en-US" sz="850" dirty="0"/>
+          </a:p>
+        </p:txBody>
+      </p:sp>
+      <p:sp>
+        <p:nvSpPr>
+          <p:cNvPr id="14" name="Text 10"/>
           <p:cNvSpPr txBox="1"/>
           <p:nvPr/>
         </p:nvSpPr>

--- a/deck/Asian-Digital-Autocallable-Note.pptx
+++ b/deck/Asian-Digital-Autocallable-Note.pptx
@@ -3349,7 +3349,7 @@
               <c:strCache>
                 <c:ptCount val="1"/>
                 <c:pt idx="0">
-                  <c:v>Snowball 9%, 65% barrier</c:v>
+                  <c:v>Snowball 13.6%, 65% barrier</c:v>
                 </c:pt>
               </c:strCache>
             </c:strRef>
@@ -4003,247 +4003,247 @@
                   <c:v>100</c:v>
                 </c:pt>
                 <c:pt idx="60">
-                  <c:v>145</c:v>
+                  <c:v>167.8</c:v>
                 </c:pt>
                 <c:pt idx="61">
-                  <c:v>145</c:v>
+                  <c:v>167.8</c:v>
                 </c:pt>
                 <c:pt idx="62">
-                  <c:v>145</c:v>
+                  <c:v>167.8</c:v>
                 </c:pt>
                 <c:pt idx="63">
-                  <c:v>145</c:v>
+                  <c:v>167.8</c:v>
                 </c:pt>
                 <c:pt idx="64">
-                  <c:v>145</c:v>
+                  <c:v>167.8</c:v>
                 </c:pt>
                 <c:pt idx="65">
-                  <c:v>145</c:v>
+                  <c:v>167.8</c:v>
                 </c:pt>
                 <c:pt idx="66">
-                  <c:v>145</c:v>
+                  <c:v>167.8</c:v>
                 </c:pt>
                 <c:pt idx="67">
-                  <c:v>145</c:v>
+                  <c:v>167.8</c:v>
                 </c:pt>
                 <c:pt idx="68">
-                  <c:v>145</c:v>
+                  <c:v>167.8</c:v>
                 </c:pt>
                 <c:pt idx="69">
-                  <c:v>145</c:v>
+                  <c:v>167.8</c:v>
                 </c:pt>
                 <c:pt idx="70">
-                  <c:v>145</c:v>
+                  <c:v>167.8</c:v>
                 </c:pt>
                 <c:pt idx="71">
-                  <c:v>145</c:v>
+                  <c:v>167.8</c:v>
                 </c:pt>
                 <c:pt idx="72">
-                  <c:v>145</c:v>
+                  <c:v>167.8</c:v>
                 </c:pt>
                 <c:pt idx="73">
-                  <c:v>145</c:v>
+                  <c:v>167.8</c:v>
                 </c:pt>
                 <c:pt idx="74">
-                  <c:v>145</c:v>
+                  <c:v>167.8</c:v>
                 </c:pt>
                 <c:pt idx="75">
-                  <c:v>145</c:v>
+                  <c:v>167.8</c:v>
                 </c:pt>
                 <c:pt idx="76">
-                  <c:v>145</c:v>
+                  <c:v>167.8</c:v>
                 </c:pt>
                 <c:pt idx="77">
-                  <c:v>145</c:v>
+                  <c:v>167.8</c:v>
                 </c:pt>
                 <c:pt idx="78">
-                  <c:v>145</c:v>
+                  <c:v>167.8</c:v>
                 </c:pt>
                 <c:pt idx="79">
-                  <c:v>145</c:v>
+                  <c:v>167.8</c:v>
                 </c:pt>
                 <c:pt idx="80">
-                  <c:v>145</c:v>
+                  <c:v>167.8</c:v>
                 </c:pt>
                 <c:pt idx="81">
-                  <c:v>145</c:v>
+                  <c:v>167.8</c:v>
                 </c:pt>
                 <c:pt idx="82">
-                  <c:v>145</c:v>
+                  <c:v>167.8</c:v>
                 </c:pt>
                 <c:pt idx="83">
-                  <c:v>145</c:v>
+                  <c:v>167.8</c:v>
                 </c:pt>
                 <c:pt idx="84">
-                  <c:v>145</c:v>
+                  <c:v>167.8</c:v>
                 </c:pt>
                 <c:pt idx="85">
-                  <c:v>145</c:v>
+                  <c:v>167.8</c:v>
                 </c:pt>
                 <c:pt idx="86">
-                  <c:v>145</c:v>
+                  <c:v>167.8</c:v>
                 </c:pt>
                 <c:pt idx="87">
-                  <c:v>145</c:v>
+                  <c:v>167.8</c:v>
                 </c:pt>
                 <c:pt idx="88">
-                  <c:v>145</c:v>
+                  <c:v>167.8</c:v>
                 </c:pt>
                 <c:pt idx="89">
-                  <c:v>145</c:v>
+                  <c:v>167.8</c:v>
                 </c:pt>
                 <c:pt idx="90">
-                  <c:v>145</c:v>
+                  <c:v>167.8</c:v>
                 </c:pt>
                 <c:pt idx="91">
-                  <c:v>145</c:v>
+                  <c:v>167.8</c:v>
                 </c:pt>
                 <c:pt idx="92">
-                  <c:v>145</c:v>
+                  <c:v>167.8</c:v>
                 </c:pt>
                 <c:pt idx="93">
-                  <c:v>145</c:v>
+                  <c:v>167.8</c:v>
                 </c:pt>
                 <c:pt idx="94">
-                  <c:v>145</c:v>
+                  <c:v>167.8</c:v>
                 </c:pt>
                 <c:pt idx="95">
-                  <c:v>145</c:v>
+                  <c:v>167.8</c:v>
                 </c:pt>
                 <c:pt idx="96">
-                  <c:v>145</c:v>
+                  <c:v>167.8</c:v>
                 </c:pt>
                 <c:pt idx="97">
-                  <c:v>145</c:v>
+                  <c:v>167.8</c:v>
                 </c:pt>
                 <c:pt idx="98">
-                  <c:v>145</c:v>
+                  <c:v>167.8</c:v>
                 </c:pt>
                 <c:pt idx="99">
-                  <c:v>145</c:v>
+                  <c:v>167.8</c:v>
                 </c:pt>
                 <c:pt idx="100">
-                  <c:v>145</c:v>
+                  <c:v>167.8</c:v>
                 </c:pt>
                 <c:pt idx="101">
-                  <c:v>145</c:v>
+                  <c:v>167.8</c:v>
                 </c:pt>
                 <c:pt idx="102">
-                  <c:v>145</c:v>
+                  <c:v>167.8</c:v>
                 </c:pt>
                 <c:pt idx="103">
-                  <c:v>145</c:v>
+                  <c:v>167.8</c:v>
                 </c:pt>
                 <c:pt idx="104">
-                  <c:v>145</c:v>
+                  <c:v>167.8</c:v>
                 </c:pt>
                 <c:pt idx="105">
-                  <c:v>145</c:v>
+                  <c:v>167.8</c:v>
                 </c:pt>
                 <c:pt idx="106">
-                  <c:v>145</c:v>
+                  <c:v>167.8</c:v>
                 </c:pt>
                 <c:pt idx="107">
-                  <c:v>145</c:v>
+                  <c:v>167.8</c:v>
                 </c:pt>
                 <c:pt idx="108">
-                  <c:v>145</c:v>
+                  <c:v>167.8</c:v>
                 </c:pt>
                 <c:pt idx="109">
-                  <c:v>145</c:v>
+                  <c:v>167.8</c:v>
                 </c:pt>
                 <c:pt idx="110">
-                  <c:v>145</c:v>
+                  <c:v>167.8</c:v>
                 </c:pt>
                 <c:pt idx="111">
-                  <c:v>145</c:v>
+                  <c:v>167.8</c:v>
                 </c:pt>
                 <c:pt idx="112">
-                  <c:v>145</c:v>
+                  <c:v>167.8</c:v>
                 </c:pt>
                 <c:pt idx="113">
-                  <c:v>145</c:v>
+                  <c:v>167.8</c:v>
                 </c:pt>
                 <c:pt idx="114">
-                  <c:v>145</c:v>
+                  <c:v>167.8</c:v>
                 </c:pt>
                 <c:pt idx="115">
-                  <c:v>145</c:v>
+                  <c:v>167.8</c:v>
                 </c:pt>
                 <c:pt idx="116">
-                  <c:v>145</c:v>
+                  <c:v>167.8</c:v>
                 </c:pt>
                 <c:pt idx="117">
-                  <c:v>145</c:v>
+                  <c:v>167.8</c:v>
                 </c:pt>
                 <c:pt idx="118">
-                  <c:v>145</c:v>
+                  <c:v>167.8</c:v>
                 </c:pt>
                 <c:pt idx="119">
-                  <c:v>145</c:v>
+                  <c:v>167.8</c:v>
                 </c:pt>
                 <c:pt idx="120">
-                  <c:v>145</c:v>
+                  <c:v>167.8</c:v>
                 </c:pt>
                 <c:pt idx="121">
-                  <c:v>145</c:v>
+                  <c:v>167.8</c:v>
                 </c:pt>
                 <c:pt idx="122">
-                  <c:v>145</c:v>
+                  <c:v>167.8</c:v>
                 </c:pt>
                 <c:pt idx="123">
-                  <c:v>145</c:v>
+                  <c:v>167.8</c:v>
                 </c:pt>
                 <c:pt idx="124">
-                  <c:v>145</c:v>
+                  <c:v>167.8</c:v>
                 </c:pt>
                 <c:pt idx="125">
-                  <c:v>145</c:v>
+                  <c:v>167.8</c:v>
                 </c:pt>
                 <c:pt idx="126">
-                  <c:v>145</c:v>
+                  <c:v>167.8</c:v>
                 </c:pt>
                 <c:pt idx="127">
-                  <c:v>145</c:v>
+                  <c:v>167.8</c:v>
                 </c:pt>
                 <c:pt idx="128">
-                  <c:v>145</c:v>
+                  <c:v>167.8</c:v>
                 </c:pt>
                 <c:pt idx="129">
-                  <c:v>145</c:v>
+                  <c:v>167.8</c:v>
                 </c:pt>
                 <c:pt idx="130">
-                  <c:v>145</c:v>
+                  <c:v>167.8</c:v>
                 </c:pt>
                 <c:pt idx="131">
-                  <c:v>145</c:v>
+                  <c:v>167.8</c:v>
                 </c:pt>
                 <c:pt idx="132">
-                  <c:v>145</c:v>
+                  <c:v>167.8</c:v>
                 </c:pt>
                 <c:pt idx="133">
-                  <c:v>145</c:v>
+                  <c:v>167.8</c:v>
                 </c:pt>
                 <c:pt idx="134">
-                  <c:v>145</c:v>
+                  <c:v>167.8</c:v>
                 </c:pt>
                 <c:pt idx="135">
-                  <c:v>145</c:v>
+                  <c:v>167.8</c:v>
                 </c:pt>
                 <c:pt idx="136">
-                  <c:v>145</c:v>
+                  <c:v>167.8</c:v>
                 </c:pt>
                 <c:pt idx="137">
-                  <c:v>145</c:v>
+                  <c:v>167.8</c:v>
                 </c:pt>
                 <c:pt idx="138">
-                  <c:v>145</c:v>
+                  <c:v>167.8</c:v>
                 </c:pt>
                 <c:pt idx="139">
-                  <c:v>145</c:v>
+                  <c:v>167.8</c:v>
                 </c:pt>
                 <c:pt idx="140">
-                  <c:v>145</c:v>
+                  <c:v>167.8</c:v>
                 </c:pt>
               </c:numCache>
             </c:numRef>
@@ -4916,244 +4916,244 @@
                   <c:v>100</c:v>
                 </c:pt>
                 <c:pt idx="61">
-                  <c:v>100.837</c:v>
+                  <c:v>100.853</c:v>
                 </c:pt>
                 <c:pt idx="62">
-                  <c:v>101.674</c:v>
+                  <c:v>101.706</c:v>
                 </c:pt>
                 <c:pt idx="63">
-                  <c:v>102.511</c:v>
+                  <c:v>102.559</c:v>
                 </c:pt>
                 <c:pt idx="64">
-                  <c:v>103.348</c:v>
+                  <c:v>103.412</c:v>
                 </c:pt>
                 <c:pt idx="65">
-                  <c:v>104.185</c:v>
+                  <c:v>104.265</c:v>
                 </c:pt>
                 <c:pt idx="66">
-                  <c:v>105.022</c:v>
+                  <c:v>105.118</c:v>
                 </c:pt>
                 <c:pt idx="67">
-                  <c:v>105.859</c:v>
+                  <c:v>105.971</c:v>
                 </c:pt>
                 <c:pt idx="68">
-                  <c:v>106.696</c:v>
+                  <c:v>106.824</c:v>
                 </c:pt>
                 <c:pt idx="69">
-                  <c:v>107.533</c:v>
+                  <c:v>107.67699999999999</c:v>
                 </c:pt>
                 <c:pt idx="70">
-                  <c:v>108.37</c:v>
+                  <c:v>108.53</c:v>
                 </c:pt>
                 <c:pt idx="71">
-                  <c:v>109.207</c:v>
+                  <c:v>109.383</c:v>
                 </c:pt>
                 <c:pt idx="72">
-                  <c:v>110.044</c:v>
+                  <c:v>110.236</c:v>
                 </c:pt>
                 <c:pt idx="73">
-                  <c:v>110.881</c:v>
+                  <c:v>111.089</c:v>
                 </c:pt>
                 <c:pt idx="74">
-                  <c:v>111.718</c:v>
+                  <c:v>111.94200000000001</c:v>
                 </c:pt>
                 <c:pt idx="75">
-                  <c:v>112.555</c:v>
+                  <c:v>112.795</c:v>
                 </c:pt>
                 <c:pt idx="76">
-                  <c:v>113.392</c:v>
+                  <c:v>113.648</c:v>
                 </c:pt>
                 <c:pt idx="77">
-                  <c:v>114.229</c:v>
+                  <c:v>114.501</c:v>
                 </c:pt>
                 <c:pt idx="78">
-                  <c:v>115.066</c:v>
+                  <c:v>115.354</c:v>
                 </c:pt>
                 <c:pt idx="79">
-                  <c:v>115.90299999999999</c:v>
+                  <c:v>116.207</c:v>
                 </c:pt>
                 <c:pt idx="80">
-                  <c:v>116.74</c:v>
+                  <c:v>117.06</c:v>
                 </c:pt>
                 <c:pt idx="81">
-                  <c:v>117.577</c:v>
+                  <c:v>117.913</c:v>
                 </c:pt>
                 <c:pt idx="82">
-                  <c:v>118.414</c:v>
+                  <c:v>118.76599999999999</c:v>
                 </c:pt>
                 <c:pt idx="83">
-                  <c:v>119.251</c:v>
+                  <c:v>119.619</c:v>
                 </c:pt>
                 <c:pt idx="84">
-                  <c:v>120.088</c:v>
+                  <c:v>120.47200000000001</c:v>
                 </c:pt>
                 <c:pt idx="85">
-                  <c:v>120.925</c:v>
+                  <c:v>121.325</c:v>
                 </c:pt>
                 <c:pt idx="86">
-                  <c:v>121.762</c:v>
+                  <c:v>122.178</c:v>
                 </c:pt>
                 <c:pt idx="87">
-                  <c:v>122.599</c:v>
+                  <c:v>123.031</c:v>
                 </c:pt>
                 <c:pt idx="88">
-                  <c:v>123.436</c:v>
+                  <c:v>123.884</c:v>
                 </c:pt>
                 <c:pt idx="89">
-                  <c:v>124.273</c:v>
+                  <c:v>124.737</c:v>
                 </c:pt>
                 <c:pt idx="90">
-                  <c:v>125.11</c:v>
+                  <c:v>125.59</c:v>
                 </c:pt>
                 <c:pt idx="91">
-                  <c:v>125.947</c:v>
+                  <c:v>126.443</c:v>
                 </c:pt>
                 <c:pt idx="92">
-                  <c:v>126.78399999999999</c:v>
+                  <c:v>127.29599999999999</c:v>
                 </c:pt>
                 <c:pt idx="93">
-                  <c:v>127.621</c:v>
+                  <c:v>128.149</c:v>
                 </c:pt>
                 <c:pt idx="94">
-                  <c:v>128.458</c:v>
+                  <c:v>129.002</c:v>
                 </c:pt>
                 <c:pt idx="95">
-                  <c:v>129.295</c:v>
+                  <c:v>129.855</c:v>
                 </c:pt>
                 <c:pt idx="96">
-                  <c:v>130.132</c:v>
+                  <c:v>130.708</c:v>
                 </c:pt>
                 <c:pt idx="97">
-                  <c:v>130.969</c:v>
+                  <c:v>131.561</c:v>
                 </c:pt>
                 <c:pt idx="98">
-                  <c:v>131.80599999999998</c:v>
+                  <c:v>132.414</c:v>
                 </c:pt>
                 <c:pt idx="99">
-                  <c:v>132.643</c:v>
+                  <c:v>133.267</c:v>
                 </c:pt>
                 <c:pt idx="100">
-                  <c:v>133.48</c:v>
+                  <c:v>134.12</c:v>
                 </c:pt>
                 <c:pt idx="101">
-                  <c:v>134.317</c:v>
+                  <c:v>134.973</c:v>
                 </c:pt>
                 <c:pt idx="102">
-                  <c:v>135.154</c:v>
+                  <c:v>135.826</c:v>
                 </c:pt>
                 <c:pt idx="103">
-                  <c:v>135.99099999999999</c:v>
+                  <c:v>136.679</c:v>
                 </c:pt>
                 <c:pt idx="104">
-                  <c:v>136.828</c:v>
+                  <c:v>137.53199999999998</c:v>
                 </c:pt>
                 <c:pt idx="105">
-                  <c:v>137.665</c:v>
+                  <c:v>138.385</c:v>
                 </c:pt>
                 <c:pt idx="106">
-                  <c:v>138.502</c:v>
+                  <c:v>139.238</c:v>
                 </c:pt>
                 <c:pt idx="107">
-                  <c:v>139.339</c:v>
+                  <c:v>140.091</c:v>
                 </c:pt>
                 <c:pt idx="108">
-                  <c:v>140.176</c:v>
+                  <c:v>140.94400000000002</c:v>
                 </c:pt>
                 <c:pt idx="109">
-                  <c:v>141.013</c:v>
+                  <c:v>141.797</c:v>
                 </c:pt>
                 <c:pt idx="110">
-                  <c:v>141.85</c:v>
+                  <c:v>142.65</c:v>
                 </c:pt>
                 <c:pt idx="111">
-                  <c:v>142.687</c:v>
+                  <c:v>143.503</c:v>
                 </c:pt>
                 <c:pt idx="112">
-                  <c:v>143.524</c:v>
+                  <c:v>144.356</c:v>
                 </c:pt>
                 <c:pt idx="113">
-                  <c:v>144.361</c:v>
+                  <c:v>145.209</c:v>
                 </c:pt>
                 <c:pt idx="114">
-                  <c:v>145.198</c:v>
+                  <c:v>146.062</c:v>
                 </c:pt>
                 <c:pt idx="115">
-                  <c:v>146.035</c:v>
+                  <c:v>146.915</c:v>
                 </c:pt>
                 <c:pt idx="116">
-                  <c:v>146.872</c:v>
+                  <c:v>147.768</c:v>
                 </c:pt>
                 <c:pt idx="117">
-                  <c:v>147.709</c:v>
+                  <c:v>148.621</c:v>
                 </c:pt>
                 <c:pt idx="118">
-                  <c:v>148.546</c:v>
+                  <c:v>149.474</c:v>
                 </c:pt>
                 <c:pt idx="119">
-                  <c:v>149.38299999999998</c:v>
+                  <c:v>150.327</c:v>
                 </c:pt>
                 <c:pt idx="120">
-                  <c:v>150.22</c:v>
+                  <c:v>151.18</c:v>
                 </c:pt>
                 <c:pt idx="121">
-                  <c:v>151.057</c:v>
+                  <c:v>152.03300000000002</c:v>
                 </c:pt>
                 <c:pt idx="122">
-                  <c:v>151.894</c:v>
+                  <c:v>152.886</c:v>
                 </c:pt>
                 <c:pt idx="123">
-                  <c:v>152.731</c:v>
+                  <c:v>153.739</c:v>
                 </c:pt>
                 <c:pt idx="124">
-                  <c:v>153.56799999999998</c:v>
+                  <c:v>154.59199999999998</c:v>
                 </c:pt>
                 <c:pt idx="125">
-                  <c:v>154.405</c:v>
+                  <c:v>155.445</c:v>
                 </c:pt>
                 <c:pt idx="126">
-                  <c:v>155.242</c:v>
+                  <c:v>156.298</c:v>
                 </c:pt>
                 <c:pt idx="127">
-                  <c:v>156.079</c:v>
+                  <c:v>157.151</c:v>
                 </c:pt>
                 <c:pt idx="128">
-                  <c:v>156.916</c:v>
+                  <c:v>158.004</c:v>
                 </c:pt>
                 <c:pt idx="129">
-                  <c:v>157.753</c:v>
+                  <c:v>158.857</c:v>
                 </c:pt>
                 <c:pt idx="130">
-                  <c:v>158.59</c:v>
+                  <c:v>159.71</c:v>
                 </c:pt>
                 <c:pt idx="131">
-                  <c:v>159.427</c:v>
+                  <c:v>160.563</c:v>
                 </c:pt>
                 <c:pt idx="132">
-                  <c:v>160.264</c:v>
+                  <c:v>161.416</c:v>
                 </c:pt>
                 <c:pt idx="133">
-                  <c:v>161.101</c:v>
+                  <c:v>162.269</c:v>
                 </c:pt>
                 <c:pt idx="134">
-                  <c:v>161.938</c:v>
+                  <c:v>163.122</c:v>
                 </c:pt>
                 <c:pt idx="135">
-                  <c:v>162.775</c:v>
+                  <c:v>163.975</c:v>
                 </c:pt>
                 <c:pt idx="136">
-                  <c:v>163.612</c:v>
+                  <c:v>164.828</c:v>
                 </c:pt>
                 <c:pt idx="137">
-                  <c:v>164.449</c:v>
+                  <c:v>165.68099999999998</c:v>
                 </c:pt>
                 <c:pt idx="138">
-                  <c:v>165.286</c:v>
+                  <c:v>166.534</c:v>
                 </c:pt>
                 <c:pt idx="139">
-                  <c:v>166.123</c:v>
+                  <c:v>167.387</c:v>
                 </c:pt>
                 <c:pt idx="140">
-                  <c:v>166.95999999999998</c:v>
+                  <c:v>168.24</c:v>
                 </c:pt>
               </c:numCache>
             </c:numRef>
@@ -6901,7 +6901,7 @@
             <c:bubble3D val="0"/>
             <c:spPr>
               <a:solidFill>
-                <a:srgbClr val="A6A6A6"/>
+                <a:srgbClr val="4F86AE"/>
               </a:solidFill>
               <a:effectLst/>
             </c:spPr>
@@ -6921,7 +6921,7 @@
             <c:bubble3D val="0"/>
             <c:spPr>
               <a:solidFill>
-                <a:srgbClr val="4F86AE"/>
+                <a:srgbClr val="A6A6A6"/>
               </a:solidFill>
               <a:effectLst/>
             </c:spPr>
@@ -7094,13 +7094,13 @@
                   <c:v>Asia Semiconductor (3119 HK)</c:v>
                 </c:pt>
                 <c:pt idx="1">
-                  <c:v>Japan Semiconductor (2644 JP)</c:v>
+                  <c:v>iShares MSCI South Korea (EWY)</c:v>
                 </c:pt>
                 <c:pt idx="2">
                   <c:v>iShares MSCI Taiwan (EWT)</c:v>
                 </c:pt>
                 <c:pt idx="3">
-                  <c:v>iShares MSCI South Korea (EWY)</c:v>
+                  <c:v>Japan Semiconductor (2644 JP)</c:v>
                 </c:pt>
                 <c:pt idx="4">
                   <c:v>Taiwan ESG High Dividend (00878 TT)</c:v>
@@ -7117,13 +7117,13 @@
                   <c:v>35</c:v>
                 </c:pt>
                 <c:pt idx="1">
-                  <c:v>15</c:v>
+                  <c:v>20</c:v>
                 </c:pt>
                 <c:pt idx="2">
                   <c:v>15</c:v>
                 </c:pt>
                 <c:pt idx="3">
-                  <c:v>20</c:v>
+                  <c:v>15</c:v>
                 </c:pt>
                 <c:pt idx="4">
                   <c:v>15</c:v>
@@ -10673,7 +10673,7 @@
                 </a:solidFill>
                 <a:latin typeface="Arial"/>
               </a:rPr>
-              <a:t>Cumulative autocall probability (risk-neutral)</a:t>
+              <a:t>Cumulative autocall probability (team outlook)</a:t>
             </a:r>
           </a:p>
         </c:rich>
@@ -10765,19 +10765,19 @@
                 <c:formatCode>General</c:formatCode>
                 <c:ptCount val="5"/>
                 <c:pt idx="0">
-                  <c:v>48.6</c:v>
+                  <c:v>78.1</c:v>
                 </c:pt>
                 <c:pt idx="1">
-                  <c:v>66.3</c:v>
+                  <c:v>93</c:v>
                 </c:pt>
                 <c:pt idx="2">
-                  <c:v>72.8</c:v>
+                  <c:v>96.9</c:v>
                 </c:pt>
                 <c:pt idx="3">
-                  <c:v>76.5</c:v>
+                  <c:v>98.5</c:v>
                 </c:pt>
                 <c:pt idx="4">
-                  <c:v>79</c:v>
+                  <c:v>99.3</c:v>
                 </c:pt>
               </c:numCache>
             </c:numRef>
@@ -14800,7 +14800,7 @@
           <a:p>
             <a:r>
               <a:rPr lang="en-US" dirty="0"/>
-              <a:t>The table answers 'what if markets go nowhere?'. Even at 0% equity return the note is called in ~68% of paths, because volatility alone takes the basket back to 100% on some date. The honest cost of the higher coupon: in ~21% of paths (risk-neutral; 16% at 8% equity returns) the basket never gets back to its start and the family is repaid the basket's level, 56% on average.</a:t>
+              <a:t>On the team outlook (the app's returns and volatilities, which reproduce the slide-5 Monte Carlo) the note is called in 99% of paths. The table also answers 'what if markets go nowhere?': at 0% the note is still called in ~67% of paths, because volatility alone takes the basket back to 100% on some date. The honest cost of the higher coupon: if the basket never gets back to its start (0.8% on the team outlook, 33% if flat) the family is repaid the basket's level.</a:t>
             </a:r>
             <a:endParaRPr lang="en-US" dirty="0"/>
           </a:p>
@@ -18407,7 +18407,7 @@
                           <a:ea typeface="Arial" pitchFamily="34" charset="-122"/>
                           <a:cs typeface="Arial" pitchFamily="34" charset="-120"/>
                         </a:rPr>
-                        <a:t>Loss risk</a:t>
+                        <a:t>Loss risk (pricing)</a:t>
                       </a:r>
                       <a:endParaRPr lang="en-US" sz="780" dirty="0">
                         <a:latin typeface="Arial" charset="0"/>
@@ -18613,7 +18613,7 @@
                           <a:ea typeface="Arial" pitchFamily="34" charset="-122"/>
                           <a:cs typeface="Arial" pitchFamily="34" charset="-120"/>
                         </a:rPr>
-                        <a:t>7.4%</a:t>
+                        <a:t>7.2%</a:t>
                       </a:r>
                       <a:endParaRPr lang="en-US" sz="780" dirty="0">
                         <a:latin typeface="Arial" charset="0"/>
@@ -18681,7 +18681,7 @@
                           <a:ea typeface="Arial" pitchFamily="34" charset="-122"/>
                           <a:cs typeface="Arial" pitchFamily="34" charset="-120"/>
                         </a:rPr>
-                        <a:t>15.9%</a:t>
+                        <a:t>15.8%</a:t>
                       </a:r>
                       <a:endParaRPr lang="en-US" sz="780" dirty="0">
                         <a:latin typeface="Arial" charset="0"/>
@@ -18887,7 +18887,7 @@
                           <a:ea typeface="Arial" pitchFamily="34" charset="-122"/>
                           <a:cs typeface="Arial" pitchFamily="34" charset="-120"/>
                         </a:rPr>
-                        <a:t>13.7%</a:t>
+                        <a:t>13.6%</a:t>
                       </a:r>
                       <a:endParaRPr lang="en-US" sz="780" dirty="0">
                         <a:latin typeface="Arial" charset="0"/>
@@ -18955,7 +18955,7 @@
                           <a:ea typeface="Arial" pitchFamily="34" charset="-122"/>
                           <a:cs typeface="Arial" pitchFamily="34" charset="-120"/>
                         </a:rPr>
-                        <a:t>14.3%</a:t>
+                        <a:t>14.0%</a:t>
                       </a:r>
                       <a:endParaRPr lang="en-US" sz="780" dirty="0">
                         <a:latin typeface="Arial" charset="0"/>
@@ -19161,7 +19161,7 @@
                           <a:ea typeface="Arial" pitchFamily="34" charset="-122"/>
                           <a:cs typeface="Arial" pitchFamily="34" charset="-120"/>
                         </a:rPr>
-                        <a:t>11.1%</a:t>
+                        <a:t>11.2%</a:t>
                       </a:r>
                       <a:endParaRPr lang="en-US" sz="780" dirty="0">
                         <a:latin typeface="Arial" charset="0"/>
@@ -19229,7 +19229,7 @@
                           <a:ea typeface="Arial" pitchFamily="34" charset="-122"/>
                           <a:cs typeface="Arial" pitchFamily="34" charset="-120"/>
                         </a:rPr>
-                        <a:t>15.9%</a:t>
+                        <a:t>15.8%</a:t>
                       </a:r>
                       <a:endParaRPr lang="en-US" sz="780" dirty="0">
                         <a:latin typeface="Arial" charset="0"/>
@@ -19435,7 +19435,7 @@
                           <a:ea typeface="Arial" pitchFamily="34" charset="-122"/>
                           <a:cs typeface="Arial" pitchFamily="34" charset="-120"/>
                         </a:rPr>
-                        <a:t>7.8%</a:t>
+                        <a:t>7.9%</a:t>
                       </a:r>
                       <a:endParaRPr lang="en-US" sz="780" dirty="0">
                         <a:latin typeface="Arial" charset="0"/>
@@ -19777,7 +19777,7 @@
                           <a:ea typeface="Arial" pitchFamily="34" charset="-122"/>
                           <a:cs typeface="Arial" pitchFamily="34" charset="-120"/>
                         </a:rPr>
-                        <a:t>21.0%</a:t>
+                        <a:t>21.6%</a:t>
                       </a:r>
                       <a:endParaRPr lang="en-US" sz="780" dirty="0">
                         <a:latin typeface="Arial" charset="0"/>
@@ -19973,7 +19973,7 @@
                 <a:ea typeface="Arial" pitchFamily="34" charset="-122"/>
                 <a:cs typeface="Arial" pitchFamily="34" charset="-120"/>
               </a:rPr>
-              <a:t>The draft's 8.5% fixed coupon is worth 100.3%, so Natixis cannot fund it. Full protection pays only 7.8%; a 70% floor pays 11.1%. Without barrier or floor the classic autocall is worth 14.1%: the family takes the basket's fall if the note is never called. We offer 12.75%.</a:t>
+              <a:t>The draft's 8.5% fixed coupon is worth 100.6%, so Natixis cannot fund it. Full protection pays only 7.9%; a 70% floor pays 11.2%. Without barrier or floor the classic autocall is worth 14.1%: the family takes the basket's fall if the note is never called. We offer 12.75%.</a:t>
             </a:r>
             <a:endParaRPr lang="en-US" sz="870" dirty="0"/>
           </a:p>
@@ -20680,7 +20680,7 @@
                 <a:ea typeface="Arial" pitchFamily="34" charset="-122"/>
                 <a:cs typeface="Arial" pitchFamily="34" charset="-120"/>
               </a:rPr>
-              <a:t>P(called by Y1) 49%</a:t>
+              <a:t>P(called by Y1) 78%</a:t>
             </a:r>
             <a:endParaRPr lang="en-US" sz="740" dirty="0"/>
           </a:p>
@@ -20834,7 +20834,7 @@
                 <a:ea typeface="Arial" pitchFamily="34" charset="-122"/>
                 <a:cs typeface="Arial" pitchFamily="34" charset="-120"/>
               </a:rPr>
-              <a:t>P(called by Y2) 66%</a:t>
+              <a:t>P(called by Y2) 93%</a:t>
             </a:r>
             <a:endParaRPr lang="en-US" sz="740" dirty="0"/>
           </a:p>
@@ -20988,7 +20988,7 @@
                 <a:ea typeface="Arial" pitchFamily="34" charset="-122"/>
                 <a:cs typeface="Arial" pitchFamily="34" charset="-120"/>
               </a:rPr>
-              <a:t>P(called by Y3) 73%</a:t>
+              <a:t>P(called by Y3) 97%</a:t>
             </a:r>
             <a:endParaRPr lang="en-US" sz="740" dirty="0"/>
           </a:p>
@@ -21142,7 +21142,7 @@
                 <a:ea typeface="Arial" pitchFamily="34" charset="-122"/>
                 <a:cs typeface="Arial" pitchFamily="34" charset="-120"/>
               </a:rPr>
-              <a:t>P(called by Y4) 76%</a:t>
+              <a:t>P(called by Y4) 99%</a:t>
             </a:r>
             <a:endParaRPr lang="en-US" sz="740" dirty="0"/>
           </a:p>
@@ -21296,7 +21296,7 @@
                 <a:ea typeface="Arial" pitchFamily="34" charset="-122"/>
                 <a:cs typeface="Arial" pitchFamily="34" charset="-120"/>
               </a:rPr>
-              <a:t>P(called by Y5) 79%</a:t>
+              <a:t>P(called by Y5) 99%</a:t>
             </a:r>
             <a:endParaRPr lang="en-US" sz="740" dirty="0"/>
           </a:p>
@@ -21513,7 +21513,7 @@
                 <a:ea typeface="Arial" pitchFamily="34" charset="-122"/>
                 <a:cs typeface="Arial" pitchFamily="34" charset="-120"/>
               </a:rPr>
-              <a:t>79%</a:t>
+              <a:t>99.3%</a:t>
             </a:r>
             <a:endParaRPr lang="en-US" sz="1010" dirty="0"/>
           </a:p>
@@ -21530,7 +21530,7 @@
                 <a:ea typeface="Arial" pitchFamily="34" charset="-122"/>
                 <a:cs typeface="Arial" pitchFamily="34" charset="-120"/>
               </a:rPr>
-              <a:t>risk-neutral</a:t>
+              <a:t>team outlook</a:t>
             </a:r>
             <a:endParaRPr lang="en-US" sz="1010" dirty="0"/>
           </a:p>
@@ -21731,7 +21731,7 @@
                 <a:ea typeface="Arial" pitchFamily="34" charset="-122"/>
                 <a:cs typeface="Arial" pitchFamily="34" charset="-120"/>
               </a:rPr>
-              <a:t>5%</a:t>
+              <a:t>0.6%</a:t>
             </a:r>
             <a:endParaRPr lang="en-US" sz="1010" dirty="0"/>
           </a:p>
@@ -21748,7 +21748,7 @@
                 <a:ea typeface="Arial" pitchFamily="34" charset="-122"/>
                 <a:cs typeface="Arial" pitchFamily="34" charset="-120"/>
               </a:rPr>
-              <a:t>risk-neutral</a:t>
+              <a:t>team outlook</a:t>
             </a:r>
             <a:endParaRPr lang="en-US" sz="1010" dirty="0"/>
           </a:p>
@@ -21949,7 +21949,7 @@
                 <a:ea typeface="Arial" pitchFamily="34" charset="-122"/>
                 <a:cs typeface="Arial" pitchFamily="34" charset="-120"/>
               </a:rPr>
-              <a:t>16%</a:t>
+              <a:t>0.2%</a:t>
             </a:r>
             <a:endParaRPr lang="en-US" sz="1010" dirty="0"/>
           </a:p>
@@ -21966,7 +21966,7 @@
                 <a:ea typeface="Arial" pitchFamily="34" charset="-122"/>
                 <a:cs typeface="Arial" pitchFamily="34" charset="-120"/>
               </a:rPr>
-              <a:t>risk-neutral</a:t>
+              <a:t>team outlook</a:t>
             </a:r>
             <a:endParaRPr lang="en-US" sz="1010" dirty="0"/>
           </a:p>
@@ -22005,7 +22005,7 @@
                 <a:ea typeface="Arial" pitchFamily="34" charset="-122"/>
                 <a:cs typeface="Arial" pitchFamily="34" charset="-120"/>
               </a:rPr>
-              <a:t>Probabilities are risk-neutral (drift = funding rate − dividends); real-world outcomes are on slide 9. The desk's replication (bond, coupon digitals, short put) is in Appendix C; stress paths in Appendix B.</a:t>
+              <a:t>Probabilities on the team outlook (app returns and vols, slides 4–5); other scenarios and the pricing measure are on slide 9. The desk's replication (bond, coupon digitals, short put) is in Appendix C; stress paths in Appendix B.</a:t>
             </a:r>
             <a:endParaRPr lang="en-US" sz="680" dirty="0"/>
           </a:p>
@@ -22280,7 +22280,7 @@
                 <a:ea typeface="Arial" pitchFamily="34" charset="-122"/>
                 <a:cs typeface="Arial" pitchFamily="34" charset="-120"/>
               </a:rPr>
-              <a:t>Simulation back-test: most paths end early with full coupons</a:t>
+              <a:t>Monte Carlo: on the team outlook the note is called in 99% of paths</a:t>
             </a:r>
             <a:endParaRPr lang="en-US" sz="1650" dirty="0"/>
           </a:p>
@@ -22342,7 +22342,7 @@
                 <a:ea typeface="Arial" pitchFamily="34" charset="-122"/>
                 <a:cs typeface="Arial" pitchFamily="34" charset="-120"/>
               </a:rPr>
-              <a:t>Monte Carlo outcome distribution: risk-neutral and under three real-world equity return assumptions</a:t>
+              <a:t>Note outcomes on the team outlook (slides 4–5), on half that outlook, if markets go nowhere, and under the pricing measure</a:t>
             </a:r>
             <a:endParaRPr lang="en-US" sz="850" dirty="0"/>
           </a:p>
@@ -22479,7 +22479,7 @@
                           <a:ea typeface="Arial" pitchFamily="34" charset="-122"/>
                           <a:cs typeface="Arial" pitchFamily="34" charset="-120"/>
                         </a:rPr>
-                        <a:t>Risk-neutral</a:t>
+                        <a:t>Team outlook</a:t>
                       </a:r>
                       <a:endParaRPr lang="en-US" sz="830" dirty="0">
                         <a:latin typeface="Arial" charset="0"/>
@@ -22547,7 +22547,7 @@
                           <a:ea typeface="Arial" pitchFamily="34" charset="-122"/>
                           <a:cs typeface="Arial" pitchFamily="34" charset="-120"/>
                         </a:rPr>
-                        <a:t>0% equity p.a.</a:t>
+                        <a:t>Half outlook</a:t>
                       </a:r>
                       <a:endParaRPr lang="en-US" sz="830" dirty="0">
                         <a:latin typeface="Arial" charset="0"/>
@@ -22615,7 +22615,7 @@
                           <a:ea typeface="Arial" pitchFamily="34" charset="-122"/>
                           <a:cs typeface="Arial" pitchFamily="34" charset="-120"/>
                         </a:rPr>
-                        <a:t>4% equity p.a.</a:t>
+                        <a:t>0% (flat)</a:t>
                       </a:r>
                       <a:endParaRPr lang="en-US" sz="830" dirty="0">
                         <a:latin typeface="Arial" charset="0"/>
@@ -22683,7 +22683,7 @@
                           <a:ea typeface="Arial" pitchFamily="34" charset="-122"/>
                           <a:cs typeface="Arial" pitchFamily="34" charset="-120"/>
                         </a:rPr>
-                        <a:t>8% equity p.a.</a:t>
+                        <a:t>Pricing (RN)</a:t>
                       </a:r>
                       <a:endParaRPr lang="en-US" sz="830" dirty="0">
                         <a:latin typeface="Arial" charset="0"/>
@@ -22821,7 +22821,7 @@
                           <a:ea typeface="Arial" pitchFamily="34" charset="-122"/>
                           <a:cs typeface="Arial" pitchFamily="34" charset="-120"/>
                         </a:rPr>
-                        <a:t>79%</a:t>
+                        <a:t>99%</a:t>
                       </a:r>
                       <a:endParaRPr lang="en-US" sz="830" dirty="0">
                         <a:latin typeface="Arial" charset="0"/>
@@ -22889,7 +22889,7 @@
                           <a:ea typeface="Arial" pitchFamily="34" charset="-122"/>
                           <a:cs typeface="Arial" pitchFamily="34" charset="-120"/>
                         </a:rPr>
-                        <a:t>68%</a:t>
+                        <a:t>91%</a:t>
                       </a:r>
                       <a:endParaRPr lang="en-US" sz="830" dirty="0">
                         <a:latin typeface="Arial" charset="0"/>
@@ -22957,7 +22957,7 @@
                           <a:ea typeface="Arial" pitchFamily="34" charset="-122"/>
                           <a:cs typeface="Arial" pitchFamily="34" charset="-120"/>
                         </a:rPr>
-                        <a:t>77%</a:t>
+                        <a:t>67%</a:t>
                       </a:r>
                       <a:endParaRPr lang="en-US" sz="830" dirty="0">
                         <a:latin typeface="Arial" charset="0"/>
@@ -23025,7 +23025,7 @@
                           <a:ea typeface="Arial" pitchFamily="34" charset="-122"/>
                           <a:cs typeface="Arial" pitchFamily="34" charset="-120"/>
                         </a:rPr>
-                        <a:t>84%</a:t>
+                        <a:t>78%</a:t>
                       </a:r>
                       <a:endParaRPr lang="en-US" sz="830" dirty="0">
                         <a:latin typeface="Arial" charset="0"/>
@@ -23163,7 +23163,75 @@
                           <a:ea typeface="Arial" pitchFamily="34" charset="-122"/>
                           <a:cs typeface="Arial" pitchFamily="34" charset="-120"/>
                         </a:rPr>
-                        <a:t>2.2</a:t>
+                        <a:t>1.2</a:t>
+                      </a:r>
+                      <a:endParaRPr lang="en-US" sz="830" dirty="0">
+                        <a:latin typeface="Arial" charset="0"/>
+                        <a:ea typeface="Arial" charset="0"/>
+                        <a:cs typeface="Arial" charset="0"/>
+                      </a:endParaRPr>
+                    </a:p>
+                  </a:txBody>
+                  <a:tcPr marL="50800" marR="50800" marT="25400" marB="25400" anchor="ctr">
+                    <a:lnL w="6350" cap="flat" cmpd="sng" algn="ctr">
+                      <a:solidFill>
+                        <a:srgbClr val="E3E3E3"/>
+                      </a:solidFill>
+                      <a:prstDash val="solid"/>
+                      <a:round/>
+                      <a:headEnd type="none" w="med" len="med"/>
+                      <a:tailEnd type="none" w="med" len="med"/>
+                    </a:lnL>
+                    <a:lnR w="6350" cap="flat" cmpd="sng" algn="ctr">
+                      <a:solidFill>
+                        <a:srgbClr val="E3E3E3"/>
+                      </a:solidFill>
+                      <a:prstDash val="solid"/>
+                      <a:round/>
+                      <a:headEnd type="none" w="med" len="med"/>
+                      <a:tailEnd type="none" w="med" len="med"/>
+                    </a:lnR>
+                    <a:lnT w="6350" cap="flat" cmpd="sng" algn="ctr">
+                      <a:solidFill>
+                        <a:srgbClr val="E3E3E3"/>
+                      </a:solidFill>
+                      <a:prstDash val="solid"/>
+                      <a:round/>
+                      <a:headEnd type="none" w="med" len="med"/>
+                      <a:tailEnd type="none" w="med" len="med"/>
+                    </a:lnT>
+                    <a:lnB w="6350" cap="flat" cmpd="sng" algn="ctr">
+                      <a:solidFill>
+                        <a:srgbClr val="E3E3E3"/>
+                      </a:solidFill>
+                      <a:prstDash val="solid"/>
+                      <a:round/>
+                      <a:headEnd type="none" w="med" len="med"/>
+                      <a:tailEnd type="none" w="med" len="med"/>
+                    </a:lnB>
+                    <a:solidFill>
+                      <a:srgbClr val="FFFFFF"/>
+                    </a:solidFill>
+                  </a:tcPr>
+                </a:tc>
+                <a:tc>
+                  <a:txBody>
+                    <a:bodyPr/>
+                    <a:lstStyle/>
+                    <a:p>
+                      <a:pPr algn="ctr" indent="0" marL="0">
+                        <a:buNone/>
+                      </a:pPr>
+                      <a:r>
+                        <a:rPr lang="en-US" sz="830" dirty="0">
+                          <a:solidFill>
+                            <a:srgbClr val="262626"/>
+                          </a:solidFill>
+                          <a:latin typeface="Arial" pitchFamily="34" charset="0"/>
+                          <a:ea typeface="Arial" pitchFamily="34" charset="-122"/>
+                          <a:cs typeface="Arial" pitchFamily="34" charset="-120"/>
+                        </a:rPr>
+                        <a:t>1.7</a:t>
                       </a:r>
                       <a:endParaRPr lang="en-US" sz="830" dirty="0">
                         <a:latin typeface="Arial" charset="0"/>
@@ -23300,74 +23368,6 @@
                           <a:cs typeface="Arial" pitchFamily="34" charset="-120"/>
                         </a:rPr>
                         <a:t>2.3</a:t>
-                      </a:r>
-                      <a:endParaRPr lang="en-US" sz="830" dirty="0">
-                        <a:latin typeface="Arial" charset="0"/>
-                        <a:ea typeface="Arial" charset="0"/>
-                        <a:cs typeface="Arial" charset="0"/>
-                      </a:endParaRPr>
-                    </a:p>
-                  </a:txBody>
-                  <a:tcPr marL="50800" marR="50800" marT="25400" marB="25400" anchor="ctr">
-                    <a:lnL w="6350" cap="flat" cmpd="sng" algn="ctr">
-                      <a:solidFill>
-                        <a:srgbClr val="E3E3E3"/>
-                      </a:solidFill>
-                      <a:prstDash val="solid"/>
-                      <a:round/>
-                      <a:headEnd type="none" w="med" len="med"/>
-                      <a:tailEnd type="none" w="med" len="med"/>
-                    </a:lnL>
-                    <a:lnR w="6350" cap="flat" cmpd="sng" algn="ctr">
-                      <a:solidFill>
-                        <a:srgbClr val="E3E3E3"/>
-                      </a:solidFill>
-                      <a:prstDash val="solid"/>
-                      <a:round/>
-                      <a:headEnd type="none" w="med" len="med"/>
-                      <a:tailEnd type="none" w="med" len="med"/>
-                    </a:lnR>
-                    <a:lnT w="6350" cap="flat" cmpd="sng" algn="ctr">
-                      <a:solidFill>
-                        <a:srgbClr val="E3E3E3"/>
-                      </a:solidFill>
-                      <a:prstDash val="solid"/>
-                      <a:round/>
-                      <a:headEnd type="none" w="med" len="med"/>
-                      <a:tailEnd type="none" w="med" len="med"/>
-                    </a:lnT>
-                    <a:lnB w="6350" cap="flat" cmpd="sng" algn="ctr">
-                      <a:solidFill>
-                        <a:srgbClr val="E3E3E3"/>
-                      </a:solidFill>
-                      <a:prstDash val="solid"/>
-                      <a:round/>
-                      <a:headEnd type="none" w="med" len="med"/>
-                      <a:tailEnd type="none" w="med" len="med"/>
-                    </a:lnB>
-                    <a:solidFill>
-                      <a:srgbClr val="FFFFFF"/>
-                    </a:solidFill>
-                  </a:tcPr>
-                </a:tc>
-                <a:tc>
-                  <a:txBody>
-                    <a:bodyPr/>
-                    <a:lstStyle/>
-                    <a:p>
-                      <a:pPr algn="ctr" indent="0" marL="0">
-                        <a:buNone/>
-                      </a:pPr>
-                      <a:r>
-                        <a:rPr lang="en-US" sz="830" dirty="0">
-                          <a:solidFill>
-                            <a:srgbClr val="262626"/>
-                          </a:solidFill>
-                          <a:latin typeface="Arial" pitchFamily="34" charset="0"/>
-                          <a:ea typeface="Arial" pitchFamily="34" charset="-122"/>
-                          <a:cs typeface="Arial" pitchFamily="34" charset="-120"/>
-                        </a:rPr>
-                        <a:t>2.0</a:t>
                       </a:r>
                       <a:endParaRPr lang="en-US" sz="830" dirty="0">
                         <a:latin typeface="Arial" charset="0"/>
@@ -23505,7 +23505,75 @@
                           <a:ea typeface="Arial" pitchFamily="34" charset="-122"/>
                           <a:cs typeface="Arial" pitchFamily="34" charset="-120"/>
                         </a:rPr>
-                        <a:t>7.8%</a:t>
+                        <a:t>13.0%</a:t>
+                      </a:r>
+                      <a:endParaRPr lang="en-US" sz="830" dirty="0">
+                        <a:latin typeface="Arial" charset="0"/>
+                        <a:ea typeface="Arial" charset="0"/>
+                        <a:cs typeface="Arial" charset="0"/>
+                      </a:endParaRPr>
+                    </a:p>
+                  </a:txBody>
+                  <a:tcPr marL="50800" marR="50800" marT="25400" marB="25400" anchor="ctr">
+                    <a:lnL w="6350" cap="flat" cmpd="sng" algn="ctr">
+                      <a:solidFill>
+                        <a:srgbClr val="E3E3E3"/>
+                      </a:solidFill>
+                      <a:prstDash val="solid"/>
+                      <a:round/>
+                      <a:headEnd type="none" w="med" len="med"/>
+                      <a:tailEnd type="none" w="med" len="med"/>
+                    </a:lnL>
+                    <a:lnR w="6350" cap="flat" cmpd="sng" algn="ctr">
+                      <a:solidFill>
+                        <a:srgbClr val="E3E3E3"/>
+                      </a:solidFill>
+                      <a:prstDash val="solid"/>
+                      <a:round/>
+                      <a:headEnd type="none" w="med" len="med"/>
+                      <a:tailEnd type="none" w="med" len="med"/>
+                    </a:lnR>
+                    <a:lnT w="6350" cap="flat" cmpd="sng" algn="ctr">
+                      <a:solidFill>
+                        <a:srgbClr val="E3E3E3"/>
+                      </a:solidFill>
+                      <a:prstDash val="solid"/>
+                      <a:round/>
+                      <a:headEnd type="none" w="med" len="med"/>
+                      <a:tailEnd type="none" w="med" len="med"/>
+                    </a:lnT>
+                    <a:lnB w="6350" cap="flat" cmpd="sng" algn="ctr">
+                      <a:solidFill>
+                        <a:srgbClr val="E3E3E3"/>
+                      </a:solidFill>
+                      <a:prstDash val="solid"/>
+                      <a:round/>
+                      <a:headEnd type="none" w="med" len="med"/>
+                      <a:tailEnd type="none" w="med" len="med"/>
+                    </a:lnB>
+                    <a:solidFill>
+                      <a:srgbClr val="FFFFFF"/>
+                    </a:solidFill>
+                  </a:tcPr>
+                </a:tc>
+                <a:tc>
+                  <a:txBody>
+                    <a:bodyPr/>
+                    <a:lstStyle/>
+                    <a:p>
+                      <a:pPr algn="ctr" indent="0" marL="0">
+                        <a:buNone/>
+                      </a:pPr>
+                      <a:r>
+                        <a:rPr lang="en-US" sz="830" dirty="0">
+                          <a:solidFill>
+                            <a:srgbClr val="262626"/>
+                          </a:solidFill>
+                          <a:latin typeface="Arial" pitchFamily="34" charset="0"/>
+                          <a:ea typeface="Arial" pitchFamily="34" charset="-122"/>
+                          <a:cs typeface="Arial" pitchFamily="34" charset="-120"/>
+                        </a:rPr>
+                        <a:t>11.1%</a:t>
                       </a:r>
                       <a:endParaRPr lang="en-US" sz="830" dirty="0">
                         <a:latin typeface="Arial" charset="0"/>
@@ -23641,75 +23709,7 @@
                           <a:ea typeface="Arial" pitchFamily="34" charset="-122"/>
                           <a:cs typeface="Arial" pitchFamily="34" charset="-120"/>
                         </a:rPr>
-                        <a:t>7.1%</a:t>
-                      </a:r>
-                      <a:endParaRPr lang="en-US" sz="830" dirty="0">
-                        <a:latin typeface="Arial" charset="0"/>
-                        <a:ea typeface="Arial" charset="0"/>
-                        <a:cs typeface="Arial" charset="0"/>
-                      </a:endParaRPr>
-                    </a:p>
-                  </a:txBody>
-                  <a:tcPr marL="50800" marR="50800" marT="25400" marB="25400" anchor="ctr">
-                    <a:lnL w="6350" cap="flat" cmpd="sng" algn="ctr">
-                      <a:solidFill>
-                        <a:srgbClr val="E3E3E3"/>
-                      </a:solidFill>
-                      <a:prstDash val="solid"/>
-                      <a:round/>
-                      <a:headEnd type="none" w="med" len="med"/>
-                      <a:tailEnd type="none" w="med" len="med"/>
-                    </a:lnL>
-                    <a:lnR w="6350" cap="flat" cmpd="sng" algn="ctr">
-                      <a:solidFill>
-                        <a:srgbClr val="E3E3E3"/>
-                      </a:solidFill>
-                      <a:prstDash val="solid"/>
-                      <a:round/>
-                      <a:headEnd type="none" w="med" len="med"/>
-                      <a:tailEnd type="none" w="med" len="med"/>
-                    </a:lnR>
-                    <a:lnT w="6350" cap="flat" cmpd="sng" algn="ctr">
-                      <a:solidFill>
-                        <a:srgbClr val="E3E3E3"/>
-                      </a:solidFill>
-                      <a:prstDash val="solid"/>
-                      <a:round/>
-                      <a:headEnd type="none" w="med" len="med"/>
-                      <a:tailEnd type="none" w="med" len="med"/>
-                    </a:lnT>
-                    <a:lnB w="6350" cap="flat" cmpd="sng" algn="ctr">
-                      <a:solidFill>
-                        <a:srgbClr val="E3E3E3"/>
-                      </a:solidFill>
-                      <a:prstDash val="solid"/>
-                      <a:round/>
-                      <a:headEnd type="none" w="med" len="med"/>
-                      <a:tailEnd type="none" w="med" len="med"/>
-                    </a:lnB>
-                    <a:solidFill>
-                      <a:srgbClr val="FFFFFF"/>
-                    </a:solidFill>
-                  </a:tcPr>
-                </a:tc>
-                <a:tc>
-                  <a:txBody>
-                    <a:bodyPr/>
-                    <a:lstStyle/>
-                    <a:p>
-                      <a:pPr algn="ctr" indent="0" marL="0">
-                        <a:buNone/>
-                      </a:pPr>
-                      <a:r>
-                        <a:rPr lang="en-US" sz="830" dirty="0">
-                          <a:solidFill>
-                            <a:srgbClr val="262626"/>
-                          </a:solidFill>
-                          <a:latin typeface="Arial" pitchFamily="34" charset="0"/>
-                          <a:ea typeface="Arial" pitchFamily="34" charset="-122"/>
-                          <a:cs typeface="Arial" pitchFamily="34" charset="-120"/>
-                        </a:rPr>
-                        <a:t>9.1%</a:t>
+                        <a:t>7.8%</a:t>
                       </a:r>
                       <a:endParaRPr lang="en-US" sz="830" dirty="0">
                         <a:latin typeface="Arial" charset="0"/>
@@ -23847,7 +23847,75 @@
                           <a:ea typeface="Arial" pitchFamily="34" charset="-122"/>
                           <a:cs typeface="Arial" pitchFamily="34" charset="-120"/>
                         </a:rPr>
-                        <a:t>13.0%</a:t>
+                        <a:t>13.3%</a:t>
+                      </a:r>
+                      <a:endParaRPr lang="en-US" sz="830" dirty="0">
+                        <a:latin typeface="Arial" charset="0"/>
+                        <a:ea typeface="Arial" charset="0"/>
+                        <a:cs typeface="Arial" charset="0"/>
+                      </a:endParaRPr>
+                    </a:p>
+                  </a:txBody>
+                  <a:tcPr marL="50800" marR="50800" marT="25400" marB="25400" anchor="ctr">
+                    <a:lnL w="6350" cap="flat" cmpd="sng" algn="ctr">
+                      <a:solidFill>
+                        <a:srgbClr val="E3E3E3"/>
+                      </a:solidFill>
+                      <a:prstDash val="solid"/>
+                      <a:round/>
+                      <a:headEnd type="none" w="med" len="med"/>
+                      <a:tailEnd type="none" w="med" len="med"/>
+                    </a:lnL>
+                    <a:lnR w="6350" cap="flat" cmpd="sng" algn="ctr">
+                      <a:solidFill>
+                        <a:srgbClr val="E3E3E3"/>
+                      </a:solidFill>
+                      <a:prstDash val="solid"/>
+                      <a:round/>
+                      <a:headEnd type="none" w="med" len="med"/>
+                      <a:tailEnd type="none" w="med" len="med"/>
+                    </a:lnR>
+                    <a:lnT w="6350" cap="flat" cmpd="sng" algn="ctr">
+                      <a:solidFill>
+                        <a:srgbClr val="E3E3E3"/>
+                      </a:solidFill>
+                      <a:prstDash val="solid"/>
+                      <a:round/>
+                      <a:headEnd type="none" w="med" len="med"/>
+                      <a:tailEnd type="none" w="med" len="med"/>
+                    </a:lnT>
+                    <a:lnB w="6350" cap="flat" cmpd="sng" algn="ctr">
+                      <a:solidFill>
+                        <a:srgbClr val="E3E3E3"/>
+                      </a:solidFill>
+                      <a:prstDash val="solid"/>
+                      <a:round/>
+                      <a:headEnd type="none" w="med" len="med"/>
+                      <a:tailEnd type="none" w="med" len="med"/>
+                    </a:lnB>
+                    <a:solidFill>
+                      <a:srgbClr val="FFFFFF"/>
+                    </a:solidFill>
+                  </a:tcPr>
+                </a:tc>
+                <a:tc>
+                  <a:txBody>
+                    <a:bodyPr/>
+                    <a:lstStyle/>
+                    <a:p>
+                      <a:pPr algn="ctr" indent="0" marL="0">
+                        <a:buNone/>
+                      </a:pPr>
+                      <a:r>
+                        <a:rPr lang="en-US" sz="830" dirty="0">
+                          <a:solidFill>
+                            <a:srgbClr val="262626"/>
+                          </a:solidFill>
+                          <a:latin typeface="Arial" pitchFamily="34" charset="0"/>
+                          <a:ea typeface="Arial" pitchFamily="34" charset="-122"/>
+                          <a:cs typeface="Arial" pitchFamily="34" charset="-120"/>
+                        </a:rPr>
+                        <a:t>13.2%</a:t>
                       </a:r>
                       <a:endParaRPr lang="en-US" sz="830" dirty="0">
                         <a:latin typeface="Arial" charset="0"/>
@@ -23984,74 +24052,6 @@
                           <a:cs typeface="Arial" pitchFamily="34" charset="-120"/>
                         </a:rPr>
                         <a:t>12.9%</a:t>
-                      </a:r>
-                      <a:endParaRPr lang="en-US" sz="830" dirty="0">
-                        <a:latin typeface="Arial" charset="0"/>
-                        <a:ea typeface="Arial" charset="0"/>
-                        <a:cs typeface="Arial" charset="0"/>
-                      </a:endParaRPr>
-                    </a:p>
-                  </a:txBody>
-                  <a:tcPr marL="50800" marR="50800" marT="25400" marB="25400" anchor="ctr">
-                    <a:lnL w="6350" cap="flat" cmpd="sng" algn="ctr">
-                      <a:solidFill>
-                        <a:srgbClr val="E3E3E3"/>
-                      </a:solidFill>
-                      <a:prstDash val="solid"/>
-                      <a:round/>
-                      <a:headEnd type="none" w="med" len="med"/>
-                      <a:tailEnd type="none" w="med" len="med"/>
-                    </a:lnL>
-                    <a:lnR w="6350" cap="flat" cmpd="sng" algn="ctr">
-                      <a:solidFill>
-                        <a:srgbClr val="E3E3E3"/>
-                      </a:solidFill>
-                      <a:prstDash val="solid"/>
-                      <a:round/>
-                      <a:headEnd type="none" w="med" len="med"/>
-                      <a:tailEnd type="none" w="med" len="med"/>
-                    </a:lnR>
-                    <a:lnT w="6350" cap="flat" cmpd="sng" algn="ctr">
-                      <a:solidFill>
-                        <a:srgbClr val="E3E3E3"/>
-                      </a:solidFill>
-                      <a:prstDash val="solid"/>
-                      <a:round/>
-                      <a:headEnd type="none" w="med" len="med"/>
-                      <a:tailEnd type="none" w="med" len="med"/>
-                    </a:lnT>
-                    <a:lnB w="6350" cap="flat" cmpd="sng" algn="ctr">
-                      <a:solidFill>
-                        <a:srgbClr val="E3E3E3"/>
-                      </a:solidFill>
-                      <a:prstDash val="solid"/>
-                      <a:round/>
-                      <a:headEnd type="none" w="med" len="med"/>
-                      <a:tailEnd type="none" w="med" len="med"/>
-                    </a:lnB>
-                    <a:solidFill>
-                      <a:srgbClr val="FFFFFF"/>
-                    </a:solidFill>
-                  </a:tcPr>
-                </a:tc>
-                <a:tc>
-                  <a:txBody>
-                    <a:bodyPr/>
-                    <a:lstStyle/>
-                    <a:p>
-                      <a:pPr algn="ctr" indent="0" marL="0">
-                        <a:buNone/>
-                      </a:pPr>
-                      <a:r>
-                        <a:rPr lang="en-US" sz="830" dirty="0">
-                          <a:solidFill>
-                            <a:srgbClr val="262626"/>
-                          </a:solidFill>
-                          <a:latin typeface="Arial" pitchFamily="34" charset="0"/>
-                          <a:ea typeface="Arial" pitchFamily="34" charset="-122"/>
-                          <a:cs typeface="Arial" pitchFamily="34" charset="-120"/>
-                        </a:rPr>
-                        <a:t>13.1%</a:t>
                       </a:r>
                       <a:endParaRPr lang="en-US" sz="830" dirty="0">
                         <a:latin typeface="Arial" charset="0"/>
@@ -24189,7 +24189,7 @@
                           <a:ea typeface="Arial" pitchFamily="34" charset="-122"/>
                           <a:cs typeface="Arial" pitchFamily="34" charset="-120"/>
                         </a:rPr>
-                        <a:t>15.4%</a:t>
+                        <a:t>15.2%</a:t>
                       </a:r>
                       <a:endParaRPr lang="en-US" sz="830" dirty="0">
                         <a:latin typeface="Arial" charset="0"/>
@@ -24257,7 +24257,7 @@
                           <a:ea typeface="Arial" pitchFamily="34" charset="-122"/>
                           <a:cs typeface="Arial" pitchFamily="34" charset="-120"/>
                         </a:rPr>
-                        <a:t>13.5%</a:t>
+                        <a:t>16.6%</a:t>
                       </a:r>
                       <a:endParaRPr lang="en-US" sz="830" dirty="0">
                         <a:latin typeface="Arial" charset="0"/>
@@ -24325,7 +24325,7 @@
                           <a:ea typeface="Arial" pitchFamily="34" charset="-122"/>
                           <a:cs typeface="Arial" pitchFamily="34" charset="-120"/>
                         </a:rPr>
-                        <a:t>14.9%</a:t>
+                        <a:t>13.4%</a:t>
                       </a:r>
                       <a:endParaRPr lang="en-US" sz="830" dirty="0">
                         <a:latin typeface="Arial" charset="0"/>
@@ -24393,7 +24393,7 @@
                           <a:ea typeface="Arial" pitchFamily="34" charset="-122"/>
                           <a:cs typeface="Arial" pitchFamily="34" charset="-120"/>
                         </a:rPr>
-                        <a:t>15.9%</a:t>
+                        <a:t>15.4%</a:t>
                       </a:r>
                       <a:endParaRPr lang="en-US" sz="830" dirty="0">
                         <a:latin typeface="Arial" charset="0"/>
@@ -24531,7 +24531,7 @@
                           <a:ea typeface="Arial" pitchFamily="34" charset="-122"/>
                           <a:cs typeface="Arial" pitchFamily="34" charset="-120"/>
                         </a:rPr>
-                        <a:t>56%</a:t>
+                        <a:t>79%</a:t>
                       </a:r>
                       <a:endParaRPr lang="en-US" sz="830" dirty="0">
                         <a:latin typeface="Arial" charset="0"/>
@@ -24599,7 +24599,7 @@
                           <a:ea typeface="Arial" pitchFamily="34" charset="-122"/>
                           <a:cs typeface="Arial" pitchFamily="34" charset="-120"/>
                         </a:rPr>
-                        <a:t>50%</a:t>
+                        <a:t>67%</a:t>
                       </a:r>
                       <a:endParaRPr lang="en-US" sz="830" dirty="0">
                         <a:latin typeface="Arial" charset="0"/>
@@ -24667,7 +24667,7 @@
                           <a:ea typeface="Arial" pitchFamily="34" charset="-122"/>
                           <a:cs typeface="Arial" pitchFamily="34" charset="-120"/>
                         </a:rPr>
-                        <a:t>55%</a:t>
+                        <a:t>51%</a:t>
                       </a:r>
                       <a:endParaRPr lang="en-US" sz="830" dirty="0">
                         <a:latin typeface="Arial" charset="0"/>
@@ -24735,7 +24735,7 @@
                           <a:ea typeface="Arial" pitchFamily="34" charset="-122"/>
                           <a:cs typeface="Arial" pitchFamily="34" charset="-120"/>
                         </a:rPr>
-                        <a:t>59%</a:t>
+                        <a:t>58%</a:t>
                       </a:r>
                       <a:endParaRPr lang="en-US" sz="830" dirty="0">
                         <a:latin typeface="Arial" charset="0"/>
@@ -24873,7 +24873,7 @@
                           <a:ea typeface="Arial" pitchFamily="34" charset="-122"/>
                           <a:cs typeface="Arial" pitchFamily="34" charset="-120"/>
                         </a:rPr>
-                        <a:t>21%</a:t>
+                        <a:t>1%</a:t>
                       </a:r>
                       <a:endParaRPr lang="en-US" sz="830" dirty="0">
                         <a:latin typeface="Arial" charset="0"/>
@@ -24941,7 +24941,7 @@
                           <a:ea typeface="Arial" pitchFamily="34" charset="-122"/>
                           <a:cs typeface="Arial" pitchFamily="34" charset="-120"/>
                         </a:rPr>
-                        <a:t>32%</a:t>
+                        <a:t>9%</a:t>
                       </a:r>
                       <a:endParaRPr lang="en-US" sz="830" dirty="0">
                         <a:latin typeface="Arial" charset="0"/>
@@ -25009,7 +25009,7 @@
                           <a:ea typeface="Arial" pitchFamily="34" charset="-122"/>
                           <a:cs typeface="Arial" pitchFamily="34" charset="-120"/>
                         </a:rPr>
-                        <a:t>23%</a:t>
+                        <a:t>33%</a:t>
                       </a:r>
                       <a:endParaRPr lang="en-US" sz="830" dirty="0">
                         <a:latin typeface="Arial" charset="0"/>
@@ -25077,7 +25077,7 @@
                           <a:ea typeface="Arial" pitchFamily="34" charset="-122"/>
                           <a:cs typeface="Arial" pitchFamily="34" charset="-120"/>
                         </a:rPr>
-                        <a:t>16%</a:t>
+                        <a:t>22%</a:t>
                       </a:r>
                       <a:endParaRPr lang="en-US" sz="830" dirty="0">
                         <a:latin typeface="Arial" charset="0"/>
@@ -25191,7 +25191,7 @@
                 <a:ea typeface="Arial" pitchFamily="34" charset="-122"/>
                 <a:cs typeface="Arial" pitchFamily="34" charset="-120"/>
               </a:rPr>
-              <a:t>49%</a:t>
+              <a:t>78%</a:t>
             </a:r>
             <a:endParaRPr lang="en-US" sz="2210" dirty="0"/>
           </a:p>
@@ -25294,7 +25294,7 @@
                 <a:ea typeface="Arial" pitchFamily="34" charset="-122"/>
                 <a:cs typeface="Arial" pitchFamily="34" charset="-120"/>
               </a:rPr>
-              <a:t>21%</a:t>
+              <a:t>13.3%</a:t>
             </a:r>
             <a:endParaRPr lang="en-US" sz="2210" dirty="0"/>
           </a:p>
@@ -25333,7 +25333,7 @@
                 <a:ea typeface="Arial" pitchFamily="34" charset="-122"/>
                 <a:cs typeface="Arial" pitchFamily="34" charset="-120"/>
               </a:rPr>
-              <a:t>chance of a loss: never called, repaid at the basket level</a:t>
+              <a:t>median return a year on the team outlook</a:t>
             </a:r>
             <a:endParaRPr lang="en-US" sz="920" dirty="0"/>
           </a:p>
@@ -25397,7 +25397,7 @@
                 <a:ea typeface="Arial" pitchFamily="34" charset="-122"/>
                 <a:cs typeface="Arial" pitchFamily="34" charset="-120"/>
               </a:rPr>
-              <a:t>56%</a:t>
+              <a:t>33%</a:t>
             </a:r>
             <a:endParaRPr lang="en-US" sz="2210" dirty="0"/>
           </a:p>
@@ -25436,7 +25436,7 @@
                 <a:ea typeface="Arial" pitchFamily="34" charset="-122"/>
                 <a:cs typeface="Arial" pitchFamily="34" charset="-120"/>
               </a:rPr>
-              <a:t>average repayment in those paths</a:t>
+              <a:t>chance of a loss if markets go nowhere</a:t>
             </a:r>
             <a:endParaRPr lang="en-US" sz="920" dirty="0"/>
           </a:p>
@@ -26137,7 +26137,7 @@
                           <a:ea typeface="Arial" pitchFamily="34" charset="-122"/>
                           <a:cs typeface="Arial" pitchFamily="34" charset="-120"/>
                         </a:rPr>
-                        <a:t>Never called: repaid at the basket level (~21% of paths, 56% back on average)</a:t>
+                        <a:t>Never called: repaid at the basket level (0.8% on the team outlook; 33% if markets go nowhere)</a:t>
                       </a:r>
                       <a:endParaRPr lang="en-US" sz="780" dirty="0">
                         <a:latin typeface="Arial" charset="0"/>
@@ -26343,7 +26343,7 @@
                           <a:ea typeface="Arial" pitchFamily="34" charset="-122"/>
                           <a:cs typeface="Arial" pitchFamily="34" charset="-120"/>
                         </a:rPr>
-                        <a:t>Basket +80% still pays 12.75% p.a. and is called at Y1</a:t>
+                        <a:t>Team median is 2.8× in 5 years; the note pays 12.75% p.a. and is usually called by Y1</a:t>
                       </a:r>
                       <a:endParaRPr lang="en-US" sz="780" dirty="0">
                         <a:latin typeface="Arial" charset="0"/>
@@ -26411,7 +26411,7 @@
                           <a:ea typeface="Arial" pitchFamily="34" charset="-122"/>
                           <a:cs typeface="Arial" pitchFamily="34" charset="-120"/>
                         </a:rPr>
-                        <a:t>Rest of family wealth keeps direct equity exposure</a:t>
+                        <a:t>Coupons lock in gains if the rally stalls; rest of family wealth keeps direct equity exposure</a:t>
                       </a:r>
                       <a:endParaRPr lang="en-US" sz="780" dirty="0">
                         <a:latin typeface="Arial" charset="0"/>
@@ -27285,7 +27285,7 @@
                 <a:ea typeface="Arial" pitchFamily="34" charset="-122"/>
                 <a:cs typeface="Arial" pitchFamily="34" charset="-120"/>
               </a:rPr>
-              <a:t>Coupon value moves with basket vol and correlation (fair 12.9%–15.5% for vol ±3pts): managed with listed index options and correlation trades</a:t>
+              <a:t>Coupon value moves with basket vol and correlation (fair 12.9%–15.6% for vol ±3pts): managed with listed index options and correlation trades</a:t>
             </a:r>
             <a:endParaRPr lang="en-US" sz="780" dirty="0"/>
           </a:p>
@@ -27544,7 +27544,7 @@
                 <a:ea typeface="Arial" pitchFamily="34" charset="-122"/>
                 <a:cs typeface="Arial" pitchFamily="34" charset="-120"/>
               </a:rPr>
-              <a:t>base 14.1% · vol ±3pts 12.9%–15.5% · corr ±0.15 13.2%–15.0% · equity drift −1/−2% 15.5%–17.3%. The 12.75% offer stays fundable in every case.</a:t>
+              <a:t>base 14.1% · vol ±3pts 12.9%–15.6% · corr ±0.15 13.2%–15.1% · equity drift −1/−2% 15.6%–17.4%. The 12.75% offer stays fundable in every case.</a:t>
             </a:r>
             <a:endParaRPr lang="en-US" sz="830" dirty="0"/>
           </a:p>
@@ -27881,7 +27881,7 @@
                 <a:ea typeface="Arial" pitchFamily="34" charset="-122"/>
                 <a:cs typeface="Arial" pitchFamily="34" charset="-120"/>
               </a:rPr>
-              <a:t>Inputs to refresh on Bloomberg at trade date (BVOL / OVDV for vols, CORR for correlations)</a:t>
+              <a:t>Vols and expected returns from the team risk/return app (slides 4–5); correlations and dividends to refresh on Bloomberg</a:t>
             </a:r>
             <a:endParaRPr lang="en-US" sz="850" dirty="0"/>
           </a:p>
@@ -28278,7 +28278,7 @@
                           <a:ea typeface="Arial" pitchFamily="34" charset="-122"/>
                           <a:cs typeface="Arial" pitchFamily="34" charset="-120"/>
                         </a:rPr>
-                        <a:t>2644 JP</a:t>
+                        <a:t>EWY US</a:t>
                       </a:r>
                       <a:endParaRPr lang="en-US" sz="830" dirty="0">
                         <a:latin typeface="Arial" charset="0"/>
@@ -28414,7 +28414,7 @@
                           <a:ea typeface="Arial" pitchFamily="34" charset="-122"/>
                           <a:cs typeface="Arial" pitchFamily="34" charset="-120"/>
                         </a:rPr>
-                        <a:t>EWY US</a:t>
+                        <a:t>2644 JP</a:t>
                       </a:r>
                       <a:endParaRPr lang="en-US" sz="830" dirty="0">
                         <a:latin typeface="Arial" charset="0"/>
@@ -28688,7 +28688,7 @@
                           <a:ea typeface="Arial" pitchFamily="34" charset="-122"/>
                           <a:cs typeface="Arial" pitchFamily="34" charset="-120"/>
                         </a:rPr>
-                        <a:t>32%</a:t>
+                        <a:t>18%</a:t>
                       </a:r>
                       <a:endParaRPr lang="en-US" sz="830" dirty="0">
                         <a:latin typeface="Arial" charset="0"/>
@@ -28892,7 +28892,7 @@
                           <a:ea typeface="Arial" pitchFamily="34" charset="-122"/>
                           <a:cs typeface="Arial" pitchFamily="34" charset="-120"/>
                         </a:rPr>
-                        <a:t>0.70</a:t>
+                        <a:t>0.80</a:t>
                       </a:r>
                       <a:endParaRPr lang="en-US" sz="830" dirty="0">
                         <a:latin typeface="Arial" charset="0"/>
@@ -29028,7 +29028,7 @@
                           <a:ea typeface="Arial" pitchFamily="34" charset="-122"/>
                           <a:cs typeface="Arial" pitchFamily="34" charset="-120"/>
                         </a:rPr>
-                        <a:t>0.80</a:t>
+                        <a:t>0.70</a:t>
                       </a:r>
                       <a:endParaRPr lang="en-US" sz="830" dirty="0">
                         <a:latin typeface="Arial" charset="0"/>
@@ -29097,6 +29097,1234 @@
                           <a:cs typeface="Arial" pitchFamily="34" charset="-120"/>
                         </a:rPr>
                         <a:t>0.60</a:t>
+                      </a:r>
+                      <a:endParaRPr lang="en-US" sz="830" dirty="0">
+                        <a:latin typeface="Arial" charset="0"/>
+                        <a:ea typeface="Arial" charset="0"/>
+                        <a:cs typeface="Arial" charset="0"/>
+                      </a:endParaRPr>
+                    </a:p>
+                  </a:txBody>
+                  <a:tcPr marL="38100" marR="38100" marT="25400" marB="25400" anchor="ctr">
+                    <a:lnL w="6350" cap="flat" cmpd="sng" algn="ctr">
+                      <a:solidFill>
+                        <a:srgbClr val="E3E3E3"/>
+                      </a:solidFill>
+                      <a:prstDash val="solid"/>
+                      <a:round/>
+                      <a:headEnd type="none" w="med" len="med"/>
+                      <a:tailEnd type="none" w="med" len="med"/>
+                    </a:lnL>
+                    <a:lnR w="6350" cap="flat" cmpd="sng" algn="ctr">
+                      <a:solidFill>
+                        <a:srgbClr val="E3E3E3"/>
+                      </a:solidFill>
+                      <a:prstDash val="solid"/>
+                      <a:round/>
+                      <a:headEnd type="none" w="med" len="med"/>
+                      <a:tailEnd type="none" w="med" len="med"/>
+                    </a:lnR>
+                    <a:lnT w="6350" cap="flat" cmpd="sng" algn="ctr">
+                      <a:solidFill>
+                        <a:srgbClr val="E3E3E3"/>
+                      </a:solidFill>
+                      <a:prstDash val="solid"/>
+                      <a:round/>
+                      <a:headEnd type="none" w="med" len="med"/>
+                      <a:tailEnd type="none" w="med" len="med"/>
+                    </a:lnT>
+                    <a:lnB w="6350" cap="flat" cmpd="sng" algn="ctr">
+                      <a:solidFill>
+                        <a:srgbClr val="E3E3E3"/>
+                      </a:solidFill>
+                      <a:prstDash val="solid"/>
+                      <a:round/>
+                      <a:headEnd type="none" w="med" len="med"/>
+                      <a:tailEnd type="none" w="med" len="med"/>
+                    </a:lnB>
+                    <a:solidFill>
+                      <a:srgbClr val="FFFFFF"/>
+                    </a:solidFill>
+                  </a:tcPr>
+                </a:tc>
+              </a:tr>
+              <a:tr h="267462">
+                <a:tc>
+                  <a:txBody>
+                    <a:bodyPr/>
+                    <a:lstStyle/>
+                    <a:p>
+                      <a:pPr algn="ctr" indent="0" marL="0">
+                        <a:buNone/>
+                      </a:pPr>
+                      <a:r>
+                        <a:rPr lang="en-US" sz="830" b="1" dirty="0">
+                          <a:solidFill>
+                            <a:srgbClr val="262626"/>
+                          </a:solidFill>
+                          <a:latin typeface="Arial" pitchFamily="34" charset="0"/>
+                          <a:ea typeface="Arial" pitchFamily="34" charset="-122"/>
+                          <a:cs typeface="Arial" pitchFamily="34" charset="-120"/>
+                        </a:rPr>
+                        <a:t>EWY US</a:t>
+                      </a:r>
+                      <a:endParaRPr lang="en-US" sz="830" dirty="0">
+                        <a:latin typeface="Arial" charset="0"/>
+                        <a:ea typeface="Arial" charset="0"/>
+                        <a:cs typeface="Arial" charset="0"/>
+                      </a:endParaRPr>
+                    </a:p>
+                  </a:txBody>
+                  <a:tcPr marL="38100" marR="38100" marT="25400" marB="25400" anchor="ctr">
+                    <a:lnL w="6350" cap="flat" cmpd="sng" algn="ctr">
+                      <a:solidFill>
+                        <a:srgbClr val="E3E3E3"/>
+                      </a:solidFill>
+                      <a:prstDash val="solid"/>
+                      <a:round/>
+                      <a:headEnd type="none" w="med" len="med"/>
+                      <a:tailEnd type="none" w="med" len="med"/>
+                    </a:lnL>
+                    <a:lnR w="6350" cap="flat" cmpd="sng" algn="ctr">
+                      <a:solidFill>
+                        <a:srgbClr val="E3E3E3"/>
+                      </a:solidFill>
+                      <a:prstDash val="solid"/>
+                      <a:round/>
+                      <a:headEnd type="none" w="med" len="med"/>
+                      <a:tailEnd type="none" w="med" len="med"/>
+                    </a:lnR>
+                    <a:lnT w="6350" cap="flat" cmpd="sng" algn="ctr">
+                      <a:solidFill>
+                        <a:srgbClr val="E3E3E3"/>
+                      </a:solidFill>
+                      <a:prstDash val="solid"/>
+                      <a:round/>
+                      <a:headEnd type="none" w="med" len="med"/>
+                      <a:tailEnd type="none" w="med" len="med"/>
+                    </a:lnT>
+                    <a:lnB w="6350" cap="flat" cmpd="sng" algn="ctr">
+                      <a:solidFill>
+                        <a:srgbClr val="E3E3E3"/>
+                      </a:solidFill>
+                      <a:prstDash val="solid"/>
+                      <a:round/>
+                      <a:headEnd type="none" w="med" len="med"/>
+                      <a:tailEnd type="none" w="med" len="med"/>
+                    </a:lnB>
+                    <a:solidFill>
+                      <a:srgbClr val="FFFFFF"/>
+                    </a:solidFill>
+                  </a:tcPr>
+                </a:tc>
+                <a:tc>
+                  <a:txBody>
+                    <a:bodyPr/>
+                    <a:lstStyle/>
+                    <a:p>
+                      <a:pPr algn="ctr" indent="0" marL="0">
+                        <a:buNone/>
+                      </a:pPr>
+                      <a:r>
+                        <a:rPr lang="en-US" sz="830" dirty="0">
+                          <a:solidFill>
+                            <a:srgbClr val="262626"/>
+                          </a:solidFill>
+                          <a:latin typeface="Arial" pitchFamily="34" charset="0"/>
+                          <a:ea typeface="Arial" pitchFamily="34" charset="-122"/>
+                          <a:cs typeface="Arial" pitchFamily="34" charset="-120"/>
+                        </a:rPr>
+                        <a:t>20%</a:t>
+                      </a:r>
+                      <a:endParaRPr lang="en-US" sz="830" dirty="0">
+                        <a:latin typeface="Arial" charset="0"/>
+                        <a:ea typeface="Arial" charset="0"/>
+                        <a:cs typeface="Arial" charset="0"/>
+                      </a:endParaRPr>
+                    </a:p>
+                  </a:txBody>
+                  <a:tcPr marL="38100" marR="38100" marT="25400" marB="25400" anchor="ctr">
+                    <a:lnL w="6350" cap="flat" cmpd="sng" algn="ctr">
+                      <a:solidFill>
+                        <a:srgbClr val="E3E3E3"/>
+                      </a:solidFill>
+                      <a:prstDash val="solid"/>
+                      <a:round/>
+                      <a:headEnd type="none" w="med" len="med"/>
+                      <a:tailEnd type="none" w="med" len="med"/>
+                    </a:lnL>
+                    <a:lnR w="6350" cap="flat" cmpd="sng" algn="ctr">
+                      <a:solidFill>
+                        <a:srgbClr val="E3E3E3"/>
+                      </a:solidFill>
+                      <a:prstDash val="solid"/>
+                      <a:round/>
+                      <a:headEnd type="none" w="med" len="med"/>
+                      <a:tailEnd type="none" w="med" len="med"/>
+                    </a:lnR>
+                    <a:lnT w="6350" cap="flat" cmpd="sng" algn="ctr">
+                      <a:solidFill>
+                        <a:srgbClr val="E3E3E3"/>
+                      </a:solidFill>
+                      <a:prstDash val="solid"/>
+                      <a:round/>
+                      <a:headEnd type="none" w="med" len="med"/>
+                      <a:tailEnd type="none" w="med" len="med"/>
+                    </a:lnT>
+                    <a:lnB w="6350" cap="flat" cmpd="sng" algn="ctr">
+                      <a:solidFill>
+                        <a:srgbClr val="E3E3E3"/>
+                      </a:solidFill>
+                      <a:prstDash val="solid"/>
+                      <a:round/>
+                      <a:headEnd type="none" w="med" len="med"/>
+                      <a:tailEnd type="none" w="med" len="med"/>
+                    </a:lnB>
+                    <a:solidFill>
+                      <a:srgbClr val="FFFFFF"/>
+                    </a:solidFill>
+                  </a:tcPr>
+                </a:tc>
+                <a:tc>
+                  <a:txBody>
+                    <a:bodyPr/>
+                    <a:lstStyle/>
+                    <a:p>
+                      <a:pPr algn="ctr" indent="0" marL="0">
+                        <a:buNone/>
+                      </a:pPr>
+                      <a:r>
+                        <a:rPr lang="en-US" sz="830" dirty="0">
+                          <a:solidFill>
+                            <a:srgbClr val="262626"/>
+                          </a:solidFill>
+                          <a:latin typeface="Arial" pitchFamily="34" charset="0"/>
+                          <a:ea typeface="Arial" pitchFamily="34" charset="-122"/>
+                          <a:cs typeface="Arial" pitchFamily="34" charset="-120"/>
+                        </a:rPr>
+                        <a:t>49%</a:t>
+                      </a:r>
+                      <a:endParaRPr lang="en-US" sz="830" dirty="0">
+                        <a:latin typeface="Arial" charset="0"/>
+                        <a:ea typeface="Arial" charset="0"/>
+                        <a:cs typeface="Arial" charset="0"/>
+                      </a:endParaRPr>
+                    </a:p>
+                  </a:txBody>
+                  <a:tcPr marL="38100" marR="38100" marT="25400" marB="25400" anchor="ctr">
+                    <a:lnL w="6350" cap="flat" cmpd="sng" algn="ctr">
+                      <a:solidFill>
+                        <a:srgbClr val="E3E3E3"/>
+                      </a:solidFill>
+                      <a:prstDash val="solid"/>
+                      <a:round/>
+                      <a:headEnd type="none" w="med" len="med"/>
+                      <a:tailEnd type="none" w="med" len="med"/>
+                    </a:lnL>
+                    <a:lnR w="6350" cap="flat" cmpd="sng" algn="ctr">
+                      <a:solidFill>
+                        <a:srgbClr val="E3E3E3"/>
+                      </a:solidFill>
+                      <a:prstDash val="solid"/>
+                      <a:round/>
+                      <a:headEnd type="none" w="med" len="med"/>
+                      <a:tailEnd type="none" w="med" len="med"/>
+                    </a:lnR>
+                    <a:lnT w="6350" cap="flat" cmpd="sng" algn="ctr">
+                      <a:solidFill>
+                        <a:srgbClr val="E3E3E3"/>
+                      </a:solidFill>
+                      <a:prstDash val="solid"/>
+                      <a:round/>
+                      <a:headEnd type="none" w="med" len="med"/>
+                      <a:tailEnd type="none" w="med" len="med"/>
+                    </a:lnT>
+                    <a:lnB w="6350" cap="flat" cmpd="sng" algn="ctr">
+                      <a:solidFill>
+                        <a:srgbClr val="E3E3E3"/>
+                      </a:solidFill>
+                      <a:prstDash val="solid"/>
+                      <a:round/>
+                      <a:headEnd type="none" w="med" len="med"/>
+                      <a:tailEnd type="none" w="med" len="med"/>
+                    </a:lnB>
+                    <a:solidFill>
+                      <a:srgbClr val="FFFFFF"/>
+                    </a:solidFill>
+                  </a:tcPr>
+                </a:tc>
+                <a:tc>
+                  <a:txBody>
+                    <a:bodyPr/>
+                    <a:lstStyle/>
+                    <a:p>
+                      <a:pPr algn="ctr" indent="0" marL="0">
+                        <a:buNone/>
+                      </a:pPr>
+                      <a:r>
+                        <a:rPr lang="en-US" sz="830" dirty="0">
+                          <a:solidFill>
+                            <a:srgbClr val="262626"/>
+                          </a:solidFill>
+                          <a:latin typeface="Arial" pitchFamily="34" charset="0"/>
+                          <a:ea typeface="Arial" pitchFamily="34" charset="-122"/>
+                          <a:cs typeface="Arial" pitchFamily="34" charset="-120"/>
+                        </a:rPr>
+                        <a:t>1.2%</a:t>
+                      </a:r>
+                      <a:endParaRPr lang="en-US" sz="830" dirty="0">
+                        <a:latin typeface="Arial" charset="0"/>
+                        <a:ea typeface="Arial" charset="0"/>
+                        <a:cs typeface="Arial" charset="0"/>
+                      </a:endParaRPr>
+                    </a:p>
+                  </a:txBody>
+                  <a:tcPr marL="38100" marR="38100" marT="25400" marB="25400" anchor="ctr">
+                    <a:lnL w="6350" cap="flat" cmpd="sng" algn="ctr">
+                      <a:solidFill>
+                        <a:srgbClr val="E3E3E3"/>
+                      </a:solidFill>
+                      <a:prstDash val="solid"/>
+                      <a:round/>
+                      <a:headEnd type="none" w="med" len="med"/>
+                      <a:tailEnd type="none" w="med" len="med"/>
+                    </a:lnL>
+                    <a:lnR w="6350" cap="flat" cmpd="sng" algn="ctr">
+                      <a:solidFill>
+                        <a:srgbClr val="E3E3E3"/>
+                      </a:solidFill>
+                      <a:prstDash val="solid"/>
+                      <a:round/>
+                      <a:headEnd type="none" w="med" len="med"/>
+                      <a:tailEnd type="none" w="med" len="med"/>
+                    </a:lnR>
+                    <a:lnT w="6350" cap="flat" cmpd="sng" algn="ctr">
+                      <a:solidFill>
+                        <a:srgbClr val="E3E3E3"/>
+                      </a:solidFill>
+                      <a:prstDash val="solid"/>
+                      <a:round/>
+                      <a:headEnd type="none" w="med" len="med"/>
+                      <a:tailEnd type="none" w="med" len="med"/>
+                    </a:lnT>
+                    <a:lnB w="6350" cap="flat" cmpd="sng" algn="ctr">
+                      <a:solidFill>
+                        <a:srgbClr val="E3E3E3"/>
+                      </a:solidFill>
+                      <a:prstDash val="solid"/>
+                      <a:round/>
+                      <a:headEnd type="none" w="med" len="med"/>
+                      <a:tailEnd type="none" w="med" len="med"/>
+                    </a:lnB>
+                    <a:solidFill>
+                      <a:srgbClr val="FFFFFF"/>
+                    </a:solidFill>
+                  </a:tcPr>
+                </a:tc>
+                <a:tc>
+                  <a:txBody>
+                    <a:bodyPr/>
+                    <a:lstStyle/>
+                    <a:p>
+                      <a:pPr algn="ctr" indent="0" marL="0">
+                        <a:buNone/>
+                      </a:pPr>
+                      <a:r>
+                        <a:rPr lang="en-US" sz="830" dirty="0">
+                          <a:solidFill>
+                            <a:srgbClr val="262626"/>
+                          </a:solidFill>
+                          <a:latin typeface="Arial" pitchFamily="34" charset="0"/>
+                          <a:ea typeface="Arial" pitchFamily="34" charset="-122"/>
+                          <a:cs typeface="Arial" pitchFamily="34" charset="-120"/>
+                        </a:rPr>
+                        <a:t>0.80</a:t>
+                      </a:r>
+                      <a:endParaRPr lang="en-US" sz="830" dirty="0">
+                        <a:latin typeface="Arial" charset="0"/>
+                        <a:ea typeface="Arial" charset="0"/>
+                        <a:cs typeface="Arial" charset="0"/>
+                      </a:endParaRPr>
+                    </a:p>
+                  </a:txBody>
+                  <a:tcPr marL="38100" marR="38100" marT="25400" marB="25400" anchor="ctr">
+                    <a:lnL w="6350" cap="flat" cmpd="sng" algn="ctr">
+                      <a:solidFill>
+                        <a:srgbClr val="E3E3E3"/>
+                      </a:solidFill>
+                      <a:prstDash val="solid"/>
+                      <a:round/>
+                      <a:headEnd type="none" w="med" len="med"/>
+                      <a:tailEnd type="none" w="med" len="med"/>
+                    </a:lnL>
+                    <a:lnR w="6350" cap="flat" cmpd="sng" algn="ctr">
+                      <a:solidFill>
+                        <a:srgbClr val="E3E3E3"/>
+                      </a:solidFill>
+                      <a:prstDash val="solid"/>
+                      <a:round/>
+                      <a:headEnd type="none" w="med" len="med"/>
+                      <a:tailEnd type="none" w="med" len="med"/>
+                    </a:lnR>
+                    <a:lnT w="6350" cap="flat" cmpd="sng" algn="ctr">
+                      <a:solidFill>
+                        <a:srgbClr val="E3E3E3"/>
+                      </a:solidFill>
+                      <a:prstDash val="solid"/>
+                      <a:round/>
+                      <a:headEnd type="none" w="med" len="med"/>
+                      <a:tailEnd type="none" w="med" len="med"/>
+                    </a:lnT>
+                    <a:lnB w="6350" cap="flat" cmpd="sng" algn="ctr">
+                      <a:solidFill>
+                        <a:srgbClr val="E3E3E3"/>
+                      </a:solidFill>
+                      <a:prstDash val="solid"/>
+                      <a:round/>
+                      <a:headEnd type="none" w="med" len="med"/>
+                      <a:tailEnd type="none" w="med" len="med"/>
+                    </a:lnB>
+                    <a:solidFill>
+                      <a:srgbClr val="FFFFFF"/>
+                    </a:solidFill>
+                  </a:tcPr>
+                </a:tc>
+                <a:tc>
+                  <a:txBody>
+                    <a:bodyPr/>
+                    <a:lstStyle/>
+                    <a:p>
+                      <a:pPr algn="ctr" indent="0" marL="0">
+                        <a:buNone/>
+                      </a:pPr>
+                      <a:r>
+                        <a:rPr lang="en-US" sz="830" dirty="0">
+                          <a:solidFill>
+                            <a:srgbClr val="262626"/>
+                          </a:solidFill>
+                          <a:latin typeface="Arial" pitchFamily="34" charset="0"/>
+                          <a:ea typeface="Arial" pitchFamily="34" charset="-122"/>
+                          <a:cs typeface="Arial" pitchFamily="34" charset="-120"/>
+                        </a:rPr>
+                        <a:t>1.00</a:t>
+                      </a:r>
+                      <a:endParaRPr lang="en-US" sz="830" dirty="0">
+                        <a:latin typeface="Arial" charset="0"/>
+                        <a:ea typeface="Arial" charset="0"/>
+                        <a:cs typeface="Arial" charset="0"/>
+                      </a:endParaRPr>
+                    </a:p>
+                  </a:txBody>
+                  <a:tcPr marL="38100" marR="38100" marT="25400" marB="25400" anchor="ctr">
+                    <a:lnL w="6350" cap="flat" cmpd="sng" algn="ctr">
+                      <a:solidFill>
+                        <a:srgbClr val="E3E3E3"/>
+                      </a:solidFill>
+                      <a:prstDash val="solid"/>
+                      <a:round/>
+                      <a:headEnd type="none" w="med" len="med"/>
+                      <a:tailEnd type="none" w="med" len="med"/>
+                    </a:lnL>
+                    <a:lnR w="6350" cap="flat" cmpd="sng" algn="ctr">
+                      <a:solidFill>
+                        <a:srgbClr val="E3E3E3"/>
+                      </a:solidFill>
+                      <a:prstDash val="solid"/>
+                      <a:round/>
+                      <a:headEnd type="none" w="med" len="med"/>
+                      <a:tailEnd type="none" w="med" len="med"/>
+                    </a:lnR>
+                    <a:lnT w="6350" cap="flat" cmpd="sng" algn="ctr">
+                      <a:solidFill>
+                        <a:srgbClr val="E3E3E3"/>
+                      </a:solidFill>
+                      <a:prstDash val="solid"/>
+                      <a:round/>
+                      <a:headEnd type="none" w="med" len="med"/>
+                      <a:tailEnd type="none" w="med" len="med"/>
+                    </a:lnT>
+                    <a:lnB w="6350" cap="flat" cmpd="sng" algn="ctr">
+                      <a:solidFill>
+                        <a:srgbClr val="E3E3E3"/>
+                      </a:solidFill>
+                      <a:prstDash val="solid"/>
+                      <a:round/>
+                      <a:headEnd type="none" w="med" len="med"/>
+                      <a:tailEnd type="none" w="med" len="med"/>
+                    </a:lnB>
+                    <a:solidFill>
+                      <a:srgbClr val="FFFFFF"/>
+                    </a:solidFill>
+                  </a:tcPr>
+                </a:tc>
+                <a:tc>
+                  <a:txBody>
+                    <a:bodyPr/>
+                    <a:lstStyle/>
+                    <a:p>
+                      <a:pPr algn="ctr" indent="0" marL="0">
+                        <a:buNone/>
+                      </a:pPr>
+                      <a:r>
+                        <a:rPr lang="en-US" sz="830" dirty="0">
+                          <a:solidFill>
+                            <a:srgbClr val="262626"/>
+                          </a:solidFill>
+                          <a:latin typeface="Arial" pitchFamily="34" charset="0"/>
+                          <a:ea typeface="Arial" pitchFamily="34" charset="-122"/>
+                          <a:cs typeface="Arial" pitchFamily="34" charset="-120"/>
+                        </a:rPr>
+                        <a:t>0.70</a:t>
+                      </a:r>
+                      <a:endParaRPr lang="en-US" sz="830" dirty="0">
+                        <a:latin typeface="Arial" charset="0"/>
+                        <a:ea typeface="Arial" charset="0"/>
+                        <a:cs typeface="Arial" charset="0"/>
+                      </a:endParaRPr>
+                    </a:p>
+                  </a:txBody>
+                  <a:tcPr marL="38100" marR="38100" marT="25400" marB="25400" anchor="ctr">
+                    <a:lnL w="6350" cap="flat" cmpd="sng" algn="ctr">
+                      <a:solidFill>
+                        <a:srgbClr val="E3E3E3"/>
+                      </a:solidFill>
+                      <a:prstDash val="solid"/>
+                      <a:round/>
+                      <a:headEnd type="none" w="med" len="med"/>
+                      <a:tailEnd type="none" w="med" len="med"/>
+                    </a:lnL>
+                    <a:lnR w="6350" cap="flat" cmpd="sng" algn="ctr">
+                      <a:solidFill>
+                        <a:srgbClr val="E3E3E3"/>
+                      </a:solidFill>
+                      <a:prstDash val="solid"/>
+                      <a:round/>
+                      <a:headEnd type="none" w="med" len="med"/>
+                      <a:tailEnd type="none" w="med" len="med"/>
+                    </a:lnR>
+                    <a:lnT w="6350" cap="flat" cmpd="sng" algn="ctr">
+                      <a:solidFill>
+                        <a:srgbClr val="E3E3E3"/>
+                      </a:solidFill>
+                      <a:prstDash val="solid"/>
+                      <a:round/>
+                      <a:headEnd type="none" w="med" len="med"/>
+                      <a:tailEnd type="none" w="med" len="med"/>
+                    </a:lnT>
+                    <a:lnB w="6350" cap="flat" cmpd="sng" algn="ctr">
+                      <a:solidFill>
+                        <a:srgbClr val="E3E3E3"/>
+                      </a:solidFill>
+                      <a:prstDash val="solid"/>
+                      <a:round/>
+                      <a:headEnd type="none" w="med" len="med"/>
+                      <a:tailEnd type="none" w="med" len="med"/>
+                    </a:lnB>
+                    <a:solidFill>
+                      <a:srgbClr val="FFFFFF"/>
+                    </a:solidFill>
+                  </a:tcPr>
+                </a:tc>
+                <a:tc>
+                  <a:txBody>
+                    <a:bodyPr/>
+                    <a:lstStyle/>
+                    <a:p>
+                      <a:pPr algn="ctr" indent="0" marL="0">
+                        <a:buNone/>
+                      </a:pPr>
+                      <a:r>
+                        <a:rPr lang="en-US" sz="830" dirty="0">
+                          <a:solidFill>
+                            <a:srgbClr val="262626"/>
+                          </a:solidFill>
+                          <a:latin typeface="Arial" pitchFamily="34" charset="0"/>
+                          <a:ea typeface="Arial" pitchFamily="34" charset="-122"/>
+                          <a:cs typeface="Arial" pitchFamily="34" charset="-120"/>
+                        </a:rPr>
+                        <a:t>0.55</a:t>
+                      </a:r>
+                      <a:endParaRPr lang="en-US" sz="830" dirty="0">
+                        <a:latin typeface="Arial" charset="0"/>
+                        <a:ea typeface="Arial" charset="0"/>
+                        <a:cs typeface="Arial" charset="0"/>
+                      </a:endParaRPr>
+                    </a:p>
+                  </a:txBody>
+                  <a:tcPr marL="38100" marR="38100" marT="25400" marB="25400" anchor="ctr">
+                    <a:lnL w="6350" cap="flat" cmpd="sng" algn="ctr">
+                      <a:solidFill>
+                        <a:srgbClr val="E3E3E3"/>
+                      </a:solidFill>
+                      <a:prstDash val="solid"/>
+                      <a:round/>
+                      <a:headEnd type="none" w="med" len="med"/>
+                      <a:tailEnd type="none" w="med" len="med"/>
+                    </a:lnL>
+                    <a:lnR w="6350" cap="flat" cmpd="sng" algn="ctr">
+                      <a:solidFill>
+                        <a:srgbClr val="E3E3E3"/>
+                      </a:solidFill>
+                      <a:prstDash val="solid"/>
+                      <a:round/>
+                      <a:headEnd type="none" w="med" len="med"/>
+                      <a:tailEnd type="none" w="med" len="med"/>
+                    </a:lnR>
+                    <a:lnT w="6350" cap="flat" cmpd="sng" algn="ctr">
+                      <a:solidFill>
+                        <a:srgbClr val="E3E3E3"/>
+                      </a:solidFill>
+                      <a:prstDash val="solid"/>
+                      <a:round/>
+                      <a:headEnd type="none" w="med" len="med"/>
+                      <a:tailEnd type="none" w="med" len="med"/>
+                    </a:lnT>
+                    <a:lnB w="6350" cap="flat" cmpd="sng" algn="ctr">
+                      <a:solidFill>
+                        <a:srgbClr val="E3E3E3"/>
+                      </a:solidFill>
+                      <a:prstDash val="solid"/>
+                      <a:round/>
+                      <a:headEnd type="none" w="med" len="med"/>
+                      <a:tailEnd type="none" w="med" len="med"/>
+                    </a:lnB>
+                    <a:solidFill>
+                      <a:srgbClr val="FFFFFF"/>
+                    </a:solidFill>
+                  </a:tcPr>
+                </a:tc>
+                <a:tc>
+                  <a:txBody>
+                    <a:bodyPr/>
+                    <a:lstStyle/>
+                    <a:p>
+                      <a:pPr algn="ctr" indent="0" marL="0">
+                        <a:buNone/>
+                      </a:pPr>
+                      <a:r>
+                        <a:rPr lang="en-US" sz="830" dirty="0">
+                          <a:solidFill>
+                            <a:srgbClr val="262626"/>
+                          </a:solidFill>
+                          <a:latin typeface="Arial" pitchFamily="34" charset="0"/>
+                          <a:ea typeface="Arial" pitchFamily="34" charset="-122"/>
+                          <a:cs typeface="Arial" pitchFamily="34" charset="-120"/>
+                        </a:rPr>
+                        <a:t>0.55</a:t>
+                      </a:r>
+                      <a:endParaRPr lang="en-US" sz="830" dirty="0">
+                        <a:latin typeface="Arial" charset="0"/>
+                        <a:ea typeface="Arial" charset="0"/>
+                        <a:cs typeface="Arial" charset="0"/>
+                      </a:endParaRPr>
+                    </a:p>
+                  </a:txBody>
+                  <a:tcPr marL="38100" marR="38100" marT="25400" marB="25400" anchor="ctr">
+                    <a:lnL w="6350" cap="flat" cmpd="sng" algn="ctr">
+                      <a:solidFill>
+                        <a:srgbClr val="E3E3E3"/>
+                      </a:solidFill>
+                      <a:prstDash val="solid"/>
+                      <a:round/>
+                      <a:headEnd type="none" w="med" len="med"/>
+                      <a:tailEnd type="none" w="med" len="med"/>
+                    </a:lnL>
+                    <a:lnR w="6350" cap="flat" cmpd="sng" algn="ctr">
+                      <a:solidFill>
+                        <a:srgbClr val="E3E3E3"/>
+                      </a:solidFill>
+                      <a:prstDash val="solid"/>
+                      <a:round/>
+                      <a:headEnd type="none" w="med" len="med"/>
+                      <a:tailEnd type="none" w="med" len="med"/>
+                    </a:lnR>
+                    <a:lnT w="6350" cap="flat" cmpd="sng" algn="ctr">
+                      <a:solidFill>
+                        <a:srgbClr val="E3E3E3"/>
+                      </a:solidFill>
+                      <a:prstDash val="solid"/>
+                      <a:round/>
+                      <a:headEnd type="none" w="med" len="med"/>
+                      <a:tailEnd type="none" w="med" len="med"/>
+                    </a:lnT>
+                    <a:lnB w="6350" cap="flat" cmpd="sng" algn="ctr">
+                      <a:solidFill>
+                        <a:srgbClr val="E3E3E3"/>
+                      </a:solidFill>
+                      <a:prstDash val="solid"/>
+                      <a:round/>
+                      <a:headEnd type="none" w="med" len="med"/>
+                      <a:tailEnd type="none" w="med" len="med"/>
+                    </a:lnB>
+                    <a:solidFill>
+                      <a:srgbClr val="FFFFFF"/>
+                    </a:solidFill>
+                  </a:tcPr>
+                </a:tc>
+              </a:tr>
+              <a:tr h="267462">
+                <a:tc>
+                  <a:txBody>
+                    <a:bodyPr/>
+                    <a:lstStyle/>
+                    <a:p>
+                      <a:pPr algn="ctr" indent="0" marL="0">
+                        <a:buNone/>
+                      </a:pPr>
+                      <a:r>
+                        <a:rPr lang="en-US" sz="830" b="1" dirty="0">
+                          <a:solidFill>
+                            <a:srgbClr val="262626"/>
+                          </a:solidFill>
+                          <a:latin typeface="Arial" pitchFamily="34" charset="0"/>
+                          <a:ea typeface="Arial" pitchFamily="34" charset="-122"/>
+                          <a:cs typeface="Arial" pitchFamily="34" charset="-120"/>
+                        </a:rPr>
+                        <a:t>EWT US</a:t>
+                      </a:r>
+                      <a:endParaRPr lang="en-US" sz="830" dirty="0">
+                        <a:latin typeface="Arial" charset="0"/>
+                        <a:ea typeface="Arial" charset="0"/>
+                        <a:cs typeface="Arial" charset="0"/>
+                      </a:endParaRPr>
+                    </a:p>
+                  </a:txBody>
+                  <a:tcPr marL="38100" marR="38100" marT="25400" marB="25400" anchor="ctr">
+                    <a:lnL w="6350" cap="flat" cmpd="sng" algn="ctr">
+                      <a:solidFill>
+                        <a:srgbClr val="E3E3E3"/>
+                      </a:solidFill>
+                      <a:prstDash val="solid"/>
+                      <a:round/>
+                      <a:headEnd type="none" w="med" len="med"/>
+                      <a:tailEnd type="none" w="med" len="med"/>
+                    </a:lnL>
+                    <a:lnR w="6350" cap="flat" cmpd="sng" algn="ctr">
+                      <a:solidFill>
+                        <a:srgbClr val="E3E3E3"/>
+                      </a:solidFill>
+                      <a:prstDash val="solid"/>
+                      <a:round/>
+                      <a:headEnd type="none" w="med" len="med"/>
+                      <a:tailEnd type="none" w="med" len="med"/>
+                    </a:lnR>
+                    <a:lnT w="6350" cap="flat" cmpd="sng" algn="ctr">
+                      <a:solidFill>
+                        <a:srgbClr val="E3E3E3"/>
+                      </a:solidFill>
+                      <a:prstDash val="solid"/>
+                      <a:round/>
+                      <a:headEnd type="none" w="med" len="med"/>
+                      <a:tailEnd type="none" w="med" len="med"/>
+                    </a:lnT>
+                    <a:lnB w="6350" cap="flat" cmpd="sng" algn="ctr">
+                      <a:solidFill>
+                        <a:srgbClr val="E3E3E3"/>
+                      </a:solidFill>
+                      <a:prstDash val="solid"/>
+                      <a:round/>
+                      <a:headEnd type="none" w="med" len="med"/>
+                      <a:tailEnd type="none" w="med" len="med"/>
+                    </a:lnB>
+                    <a:solidFill>
+                      <a:srgbClr val="FFFFFF"/>
+                    </a:solidFill>
+                  </a:tcPr>
+                </a:tc>
+                <a:tc>
+                  <a:txBody>
+                    <a:bodyPr/>
+                    <a:lstStyle/>
+                    <a:p>
+                      <a:pPr algn="ctr" indent="0" marL="0">
+                        <a:buNone/>
+                      </a:pPr>
+                      <a:r>
+                        <a:rPr lang="en-US" sz="830" dirty="0">
+                          <a:solidFill>
+                            <a:srgbClr val="262626"/>
+                          </a:solidFill>
+                          <a:latin typeface="Arial" pitchFamily="34" charset="0"/>
+                          <a:ea typeface="Arial" pitchFamily="34" charset="-122"/>
+                          <a:cs typeface="Arial" pitchFamily="34" charset="-120"/>
+                        </a:rPr>
+                        <a:t>15%</a:t>
+                      </a:r>
+                      <a:endParaRPr lang="en-US" sz="830" dirty="0">
+                        <a:latin typeface="Arial" charset="0"/>
+                        <a:ea typeface="Arial" charset="0"/>
+                        <a:cs typeface="Arial" charset="0"/>
+                      </a:endParaRPr>
+                    </a:p>
+                  </a:txBody>
+                  <a:tcPr marL="38100" marR="38100" marT="25400" marB="25400" anchor="ctr">
+                    <a:lnL w="6350" cap="flat" cmpd="sng" algn="ctr">
+                      <a:solidFill>
+                        <a:srgbClr val="E3E3E3"/>
+                      </a:solidFill>
+                      <a:prstDash val="solid"/>
+                      <a:round/>
+                      <a:headEnd type="none" w="med" len="med"/>
+                      <a:tailEnd type="none" w="med" len="med"/>
+                    </a:lnL>
+                    <a:lnR w="6350" cap="flat" cmpd="sng" algn="ctr">
+                      <a:solidFill>
+                        <a:srgbClr val="E3E3E3"/>
+                      </a:solidFill>
+                      <a:prstDash val="solid"/>
+                      <a:round/>
+                      <a:headEnd type="none" w="med" len="med"/>
+                      <a:tailEnd type="none" w="med" len="med"/>
+                    </a:lnR>
+                    <a:lnT w="6350" cap="flat" cmpd="sng" algn="ctr">
+                      <a:solidFill>
+                        <a:srgbClr val="E3E3E3"/>
+                      </a:solidFill>
+                      <a:prstDash val="solid"/>
+                      <a:round/>
+                      <a:headEnd type="none" w="med" len="med"/>
+                      <a:tailEnd type="none" w="med" len="med"/>
+                    </a:lnT>
+                    <a:lnB w="6350" cap="flat" cmpd="sng" algn="ctr">
+                      <a:solidFill>
+                        <a:srgbClr val="E3E3E3"/>
+                      </a:solidFill>
+                      <a:prstDash val="solid"/>
+                      <a:round/>
+                      <a:headEnd type="none" w="med" len="med"/>
+                      <a:tailEnd type="none" w="med" len="med"/>
+                    </a:lnB>
+                    <a:solidFill>
+                      <a:srgbClr val="FFFFFF"/>
+                    </a:solidFill>
+                  </a:tcPr>
+                </a:tc>
+                <a:tc>
+                  <a:txBody>
+                    <a:bodyPr/>
+                    <a:lstStyle/>
+                    <a:p>
+                      <a:pPr algn="ctr" indent="0" marL="0">
+                        <a:buNone/>
+                      </a:pPr>
+                      <a:r>
+                        <a:rPr lang="en-US" sz="830" dirty="0">
+                          <a:solidFill>
+                            <a:srgbClr val="262626"/>
+                          </a:solidFill>
+                          <a:latin typeface="Arial" pitchFamily="34" charset="0"/>
+                          <a:ea typeface="Arial" pitchFamily="34" charset="-122"/>
+                          <a:cs typeface="Arial" pitchFamily="34" charset="-120"/>
+                        </a:rPr>
+                        <a:t>36%</a:t>
+                      </a:r>
+                      <a:endParaRPr lang="en-US" sz="830" dirty="0">
+                        <a:latin typeface="Arial" charset="0"/>
+                        <a:ea typeface="Arial" charset="0"/>
+                        <a:cs typeface="Arial" charset="0"/>
+                      </a:endParaRPr>
+                    </a:p>
+                  </a:txBody>
+                  <a:tcPr marL="38100" marR="38100" marT="25400" marB="25400" anchor="ctr">
+                    <a:lnL w="6350" cap="flat" cmpd="sng" algn="ctr">
+                      <a:solidFill>
+                        <a:srgbClr val="E3E3E3"/>
+                      </a:solidFill>
+                      <a:prstDash val="solid"/>
+                      <a:round/>
+                      <a:headEnd type="none" w="med" len="med"/>
+                      <a:tailEnd type="none" w="med" len="med"/>
+                    </a:lnL>
+                    <a:lnR w="6350" cap="flat" cmpd="sng" algn="ctr">
+                      <a:solidFill>
+                        <a:srgbClr val="E3E3E3"/>
+                      </a:solidFill>
+                      <a:prstDash val="solid"/>
+                      <a:round/>
+                      <a:headEnd type="none" w="med" len="med"/>
+                      <a:tailEnd type="none" w="med" len="med"/>
+                    </a:lnR>
+                    <a:lnT w="6350" cap="flat" cmpd="sng" algn="ctr">
+                      <a:solidFill>
+                        <a:srgbClr val="E3E3E3"/>
+                      </a:solidFill>
+                      <a:prstDash val="solid"/>
+                      <a:round/>
+                      <a:headEnd type="none" w="med" len="med"/>
+                      <a:tailEnd type="none" w="med" len="med"/>
+                    </a:lnT>
+                    <a:lnB w="6350" cap="flat" cmpd="sng" algn="ctr">
+                      <a:solidFill>
+                        <a:srgbClr val="E3E3E3"/>
+                      </a:solidFill>
+                      <a:prstDash val="solid"/>
+                      <a:round/>
+                      <a:headEnd type="none" w="med" len="med"/>
+                      <a:tailEnd type="none" w="med" len="med"/>
+                    </a:lnB>
+                    <a:solidFill>
+                      <a:srgbClr val="FFFFFF"/>
+                    </a:solidFill>
+                  </a:tcPr>
+                </a:tc>
+                <a:tc>
+                  <a:txBody>
+                    <a:bodyPr/>
+                    <a:lstStyle/>
+                    <a:p>
+                      <a:pPr algn="ctr" indent="0" marL="0">
+                        <a:buNone/>
+                      </a:pPr>
+                      <a:r>
+                        <a:rPr lang="en-US" sz="830" dirty="0">
+                          <a:solidFill>
+                            <a:srgbClr val="262626"/>
+                          </a:solidFill>
+                          <a:latin typeface="Arial" pitchFamily="34" charset="0"/>
+                          <a:ea typeface="Arial" pitchFamily="34" charset="-122"/>
+                          <a:cs typeface="Arial" pitchFamily="34" charset="-120"/>
+                        </a:rPr>
+                        <a:t>2.6%</a:t>
+                      </a:r>
+                      <a:endParaRPr lang="en-US" sz="830" dirty="0">
+                        <a:latin typeface="Arial" charset="0"/>
+                        <a:ea typeface="Arial" charset="0"/>
+                        <a:cs typeface="Arial" charset="0"/>
+                      </a:endParaRPr>
+                    </a:p>
+                  </a:txBody>
+                  <a:tcPr marL="38100" marR="38100" marT="25400" marB="25400" anchor="ctr">
+                    <a:lnL w="6350" cap="flat" cmpd="sng" algn="ctr">
+                      <a:solidFill>
+                        <a:srgbClr val="E3E3E3"/>
+                      </a:solidFill>
+                      <a:prstDash val="solid"/>
+                      <a:round/>
+                      <a:headEnd type="none" w="med" len="med"/>
+                      <a:tailEnd type="none" w="med" len="med"/>
+                    </a:lnL>
+                    <a:lnR w="6350" cap="flat" cmpd="sng" algn="ctr">
+                      <a:solidFill>
+                        <a:srgbClr val="E3E3E3"/>
+                      </a:solidFill>
+                      <a:prstDash val="solid"/>
+                      <a:round/>
+                      <a:headEnd type="none" w="med" len="med"/>
+                      <a:tailEnd type="none" w="med" len="med"/>
+                    </a:lnR>
+                    <a:lnT w="6350" cap="flat" cmpd="sng" algn="ctr">
+                      <a:solidFill>
+                        <a:srgbClr val="E3E3E3"/>
+                      </a:solidFill>
+                      <a:prstDash val="solid"/>
+                      <a:round/>
+                      <a:headEnd type="none" w="med" len="med"/>
+                      <a:tailEnd type="none" w="med" len="med"/>
+                    </a:lnT>
+                    <a:lnB w="6350" cap="flat" cmpd="sng" algn="ctr">
+                      <a:solidFill>
+                        <a:srgbClr val="E3E3E3"/>
+                      </a:solidFill>
+                      <a:prstDash val="solid"/>
+                      <a:round/>
+                      <a:headEnd type="none" w="med" len="med"/>
+                      <a:tailEnd type="none" w="med" len="med"/>
+                    </a:lnB>
+                    <a:solidFill>
+                      <a:srgbClr val="FFFFFF"/>
+                    </a:solidFill>
+                  </a:tcPr>
+                </a:tc>
+                <a:tc>
+                  <a:txBody>
+                    <a:bodyPr/>
+                    <a:lstStyle/>
+                    <a:p>
+                      <a:pPr algn="ctr" indent="0" marL="0">
+                        <a:buNone/>
+                      </a:pPr>
+                      <a:r>
+                        <a:rPr lang="en-US" sz="830" dirty="0">
+                          <a:solidFill>
+                            <a:srgbClr val="262626"/>
+                          </a:solidFill>
+                          <a:latin typeface="Arial" pitchFamily="34" charset="0"/>
+                          <a:ea typeface="Arial" pitchFamily="34" charset="-122"/>
+                          <a:cs typeface="Arial" pitchFamily="34" charset="-120"/>
+                        </a:rPr>
+                        <a:t>0.85</a:t>
+                      </a:r>
+                      <a:endParaRPr lang="en-US" sz="830" dirty="0">
+                        <a:latin typeface="Arial" charset="0"/>
+                        <a:ea typeface="Arial" charset="0"/>
+                        <a:cs typeface="Arial" charset="0"/>
+                      </a:endParaRPr>
+                    </a:p>
+                  </a:txBody>
+                  <a:tcPr marL="38100" marR="38100" marT="25400" marB="25400" anchor="ctr">
+                    <a:lnL w="6350" cap="flat" cmpd="sng" algn="ctr">
+                      <a:solidFill>
+                        <a:srgbClr val="E3E3E3"/>
+                      </a:solidFill>
+                      <a:prstDash val="solid"/>
+                      <a:round/>
+                      <a:headEnd type="none" w="med" len="med"/>
+                      <a:tailEnd type="none" w="med" len="med"/>
+                    </a:lnL>
+                    <a:lnR w="6350" cap="flat" cmpd="sng" algn="ctr">
+                      <a:solidFill>
+                        <a:srgbClr val="E3E3E3"/>
+                      </a:solidFill>
+                      <a:prstDash val="solid"/>
+                      <a:round/>
+                      <a:headEnd type="none" w="med" len="med"/>
+                      <a:tailEnd type="none" w="med" len="med"/>
+                    </a:lnR>
+                    <a:lnT w="6350" cap="flat" cmpd="sng" algn="ctr">
+                      <a:solidFill>
+                        <a:srgbClr val="E3E3E3"/>
+                      </a:solidFill>
+                      <a:prstDash val="solid"/>
+                      <a:round/>
+                      <a:headEnd type="none" w="med" len="med"/>
+                      <a:tailEnd type="none" w="med" len="med"/>
+                    </a:lnT>
+                    <a:lnB w="6350" cap="flat" cmpd="sng" algn="ctr">
+                      <a:solidFill>
+                        <a:srgbClr val="E3E3E3"/>
+                      </a:solidFill>
+                      <a:prstDash val="solid"/>
+                      <a:round/>
+                      <a:headEnd type="none" w="med" len="med"/>
+                      <a:tailEnd type="none" w="med" len="med"/>
+                    </a:lnB>
+                    <a:solidFill>
+                      <a:srgbClr val="FFFFFF"/>
+                    </a:solidFill>
+                  </a:tcPr>
+                </a:tc>
+                <a:tc>
+                  <a:txBody>
+                    <a:bodyPr/>
+                    <a:lstStyle/>
+                    <a:p>
+                      <a:pPr algn="ctr" indent="0" marL="0">
+                        <a:buNone/>
+                      </a:pPr>
+                      <a:r>
+                        <a:rPr lang="en-US" sz="830" dirty="0">
+                          <a:solidFill>
+                            <a:srgbClr val="262626"/>
+                          </a:solidFill>
+                          <a:latin typeface="Arial" pitchFamily="34" charset="0"/>
+                          <a:ea typeface="Arial" pitchFamily="34" charset="-122"/>
+                          <a:cs typeface="Arial" pitchFamily="34" charset="-120"/>
+                        </a:rPr>
+                        <a:t>0.70</a:t>
+                      </a:r>
+                      <a:endParaRPr lang="en-US" sz="830" dirty="0">
+                        <a:latin typeface="Arial" charset="0"/>
+                        <a:ea typeface="Arial" charset="0"/>
+                        <a:cs typeface="Arial" charset="0"/>
+                      </a:endParaRPr>
+                    </a:p>
+                  </a:txBody>
+                  <a:tcPr marL="38100" marR="38100" marT="25400" marB="25400" anchor="ctr">
+                    <a:lnL w="6350" cap="flat" cmpd="sng" algn="ctr">
+                      <a:solidFill>
+                        <a:srgbClr val="E3E3E3"/>
+                      </a:solidFill>
+                      <a:prstDash val="solid"/>
+                      <a:round/>
+                      <a:headEnd type="none" w="med" len="med"/>
+                      <a:tailEnd type="none" w="med" len="med"/>
+                    </a:lnL>
+                    <a:lnR w="6350" cap="flat" cmpd="sng" algn="ctr">
+                      <a:solidFill>
+                        <a:srgbClr val="E3E3E3"/>
+                      </a:solidFill>
+                      <a:prstDash val="solid"/>
+                      <a:round/>
+                      <a:headEnd type="none" w="med" len="med"/>
+                      <a:tailEnd type="none" w="med" len="med"/>
+                    </a:lnR>
+                    <a:lnT w="6350" cap="flat" cmpd="sng" algn="ctr">
+                      <a:solidFill>
+                        <a:srgbClr val="E3E3E3"/>
+                      </a:solidFill>
+                      <a:prstDash val="solid"/>
+                      <a:round/>
+                      <a:headEnd type="none" w="med" len="med"/>
+                      <a:tailEnd type="none" w="med" len="med"/>
+                    </a:lnT>
+                    <a:lnB w="6350" cap="flat" cmpd="sng" algn="ctr">
+                      <a:solidFill>
+                        <a:srgbClr val="E3E3E3"/>
+                      </a:solidFill>
+                      <a:prstDash val="solid"/>
+                      <a:round/>
+                      <a:headEnd type="none" w="med" len="med"/>
+                      <a:tailEnd type="none" w="med" len="med"/>
+                    </a:lnB>
+                    <a:solidFill>
+                      <a:srgbClr val="FFFFFF"/>
+                    </a:solidFill>
+                  </a:tcPr>
+                </a:tc>
+                <a:tc>
+                  <a:txBody>
+                    <a:bodyPr/>
+                    <a:lstStyle/>
+                    <a:p>
+                      <a:pPr algn="ctr" indent="0" marL="0">
+                        <a:buNone/>
+                      </a:pPr>
+                      <a:r>
+                        <a:rPr lang="en-US" sz="830" dirty="0">
+                          <a:solidFill>
+                            <a:srgbClr val="262626"/>
+                          </a:solidFill>
+                          <a:latin typeface="Arial" pitchFamily="34" charset="0"/>
+                          <a:ea typeface="Arial" pitchFamily="34" charset="-122"/>
+                          <a:cs typeface="Arial" pitchFamily="34" charset="-120"/>
+                        </a:rPr>
+                        <a:t>1.00</a:t>
+                      </a:r>
+                      <a:endParaRPr lang="en-US" sz="830" dirty="0">
+                        <a:latin typeface="Arial" charset="0"/>
+                        <a:ea typeface="Arial" charset="0"/>
+                        <a:cs typeface="Arial" charset="0"/>
+                      </a:endParaRPr>
+                    </a:p>
+                  </a:txBody>
+                  <a:tcPr marL="38100" marR="38100" marT="25400" marB="25400" anchor="ctr">
+                    <a:lnL w="6350" cap="flat" cmpd="sng" algn="ctr">
+                      <a:solidFill>
+                        <a:srgbClr val="E3E3E3"/>
+                      </a:solidFill>
+                      <a:prstDash val="solid"/>
+                      <a:round/>
+                      <a:headEnd type="none" w="med" len="med"/>
+                      <a:tailEnd type="none" w="med" len="med"/>
+                    </a:lnL>
+                    <a:lnR w="6350" cap="flat" cmpd="sng" algn="ctr">
+                      <a:solidFill>
+                        <a:srgbClr val="E3E3E3"/>
+                      </a:solidFill>
+                      <a:prstDash val="solid"/>
+                      <a:round/>
+                      <a:headEnd type="none" w="med" len="med"/>
+                      <a:tailEnd type="none" w="med" len="med"/>
+                    </a:lnR>
+                    <a:lnT w="6350" cap="flat" cmpd="sng" algn="ctr">
+                      <a:solidFill>
+                        <a:srgbClr val="E3E3E3"/>
+                      </a:solidFill>
+                      <a:prstDash val="solid"/>
+                      <a:round/>
+                      <a:headEnd type="none" w="med" len="med"/>
+                      <a:tailEnd type="none" w="med" len="med"/>
+                    </a:lnT>
+                    <a:lnB w="6350" cap="flat" cmpd="sng" algn="ctr">
+                      <a:solidFill>
+                        <a:srgbClr val="E3E3E3"/>
+                      </a:solidFill>
+                      <a:prstDash val="solid"/>
+                      <a:round/>
+                      <a:headEnd type="none" w="med" len="med"/>
+                      <a:tailEnd type="none" w="med" len="med"/>
+                    </a:lnB>
+                    <a:solidFill>
+                      <a:srgbClr val="FFFFFF"/>
+                    </a:solidFill>
+                  </a:tcPr>
+                </a:tc>
+                <a:tc>
+                  <a:txBody>
+                    <a:bodyPr/>
+                    <a:lstStyle/>
+                    <a:p>
+                      <a:pPr algn="ctr" indent="0" marL="0">
+                        <a:buNone/>
+                      </a:pPr>
+                      <a:r>
+                        <a:rPr lang="en-US" sz="830" dirty="0">
+                          <a:solidFill>
+                            <a:srgbClr val="262626"/>
+                          </a:solidFill>
+                          <a:latin typeface="Arial" pitchFamily="34" charset="0"/>
+                          <a:ea typeface="Arial" pitchFamily="34" charset="-122"/>
+                          <a:cs typeface="Arial" pitchFamily="34" charset="-120"/>
+                        </a:rPr>
+                        <a:t>0.60</a:t>
+                      </a:r>
+                      <a:endParaRPr lang="en-US" sz="830" dirty="0">
+                        <a:latin typeface="Arial" charset="0"/>
+                        <a:ea typeface="Arial" charset="0"/>
+                        <a:cs typeface="Arial" charset="0"/>
+                      </a:endParaRPr>
+                    </a:p>
+                  </a:txBody>
+                  <a:tcPr marL="38100" marR="38100" marT="25400" marB="25400" anchor="ctr">
+                    <a:lnL w="6350" cap="flat" cmpd="sng" algn="ctr">
+                      <a:solidFill>
+                        <a:srgbClr val="E3E3E3"/>
+                      </a:solidFill>
+                      <a:prstDash val="solid"/>
+                      <a:round/>
+                      <a:headEnd type="none" w="med" len="med"/>
+                      <a:tailEnd type="none" w="med" len="med"/>
+                    </a:lnL>
+                    <a:lnR w="6350" cap="flat" cmpd="sng" algn="ctr">
+                      <a:solidFill>
+                        <a:srgbClr val="E3E3E3"/>
+                      </a:solidFill>
+                      <a:prstDash val="solid"/>
+                      <a:round/>
+                      <a:headEnd type="none" w="med" len="med"/>
+                      <a:tailEnd type="none" w="med" len="med"/>
+                    </a:lnR>
+                    <a:lnT w="6350" cap="flat" cmpd="sng" algn="ctr">
+                      <a:solidFill>
+                        <a:srgbClr val="E3E3E3"/>
+                      </a:solidFill>
+                      <a:prstDash val="solid"/>
+                      <a:round/>
+                      <a:headEnd type="none" w="med" len="med"/>
+                      <a:tailEnd type="none" w="med" len="med"/>
+                    </a:lnT>
+                    <a:lnB w="6350" cap="flat" cmpd="sng" algn="ctr">
+                      <a:solidFill>
+                        <a:srgbClr val="E3E3E3"/>
+                      </a:solidFill>
+                      <a:prstDash val="solid"/>
+                      <a:round/>
+                      <a:headEnd type="none" w="med" len="med"/>
+                      <a:tailEnd type="none" w="med" len="med"/>
+                    </a:lnB>
+                    <a:solidFill>
+                      <a:srgbClr val="FFFFFF"/>
+                    </a:solidFill>
+                  </a:tcPr>
+                </a:tc>
+                <a:tc>
+                  <a:txBody>
+                    <a:bodyPr/>
+                    <a:lstStyle/>
+                    <a:p>
+                      <a:pPr algn="ctr" indent="0" marL="0">
+                        <a:buNone/>
+                      </a:pPr>
+                      <a:r>
+                        <a:rPr lang="en-US" sz="830" dirty="0">
+                          <a:solidFill>
+                            <a:srgbClr val="262626"/>
+                          </a:solidFill>
+                          <a:latin typeface="Arial" pitchFamily="34" charset="0"/>
+                          <a:ea typeface="Arial" pitchFamily="34" charset="-122"/>
+                          <a:cs typeface="Arial" pitchFamily="34" charset="-120"/>
+                        </a:rPr>
+                        <a:t>0.75</a:t>
                       </a:r>
                       <a:endParaRPr lang="en-US" sz="830" dirty="0">
                         <a:latin typeface="Arial" charset="0"/>
@@ -29302,7 +30530,7 @@
                           <a:ea typeface="Arial" pitchFamily="34" charset="-122"/>
                           <a:cs typeface="Arial" pitchFamily="34" charset="-120"/>
                         </a:rPr>
-                        <a:t>38%</a:t>
+                        <a:t>26%</a:t>
                       </a:r>
                       <a:endParaRPr lang="en-US" sz="830" dirty="0">
                         <a:latin typeface="Arial" charset="0"/>
@@ -29506,7 +30734,7 @@
                           <a:ea typeface="Arial" pitchFamily="34" charset="-122"/>
                           <a:cs typeface="Arial" pitchFamily="34" charset="-120"/>
                         </a:rPr>
-                        <a:t>1.00</a:t>
+                        <a:t>0.55</a:t>
                       </a:r>
                       <a:endParaRPr lang="en-US" sz="830" dirty="0">
                         <a:latin typeface="Arial" charset="0"/>
@@ -29642,7 +30870,7 @@
                           <a:ea typeface="Arial" pitchFamily="34" charset="-122"/>
                           <a:cs typeface="Arial" pitchFamily="34" charset="-120"/>
                         </a:rPr>
-                        <a:t>0.55</a:t>
+                        <a:t>1.00</a:t>
                       </a:r>
                       <a:endParaRPr lang="en-US" sz="830" dirty="0">
                         <a:latin typeface="Arial" charset="0"/>
@@ -29711,1234 +30939,6 @@
                           <a:cs typeface="Arial" pitchFamily="34" charset="-120"/>
                         </a:rPr>
                         <a:t>0.45</a:t>
-                      </a:r>
-                      <a:endParaRPr lang="en-US" sz="830" dirty="0">
-                        <a:latin typeface="Arial" charset="0"/>
-                        <a:ea typeface="Arial" charset="0"/>
-                        <a:cs typeface="Arial" charset="0"/>
-                      </a:endParaRPr>
-                    </a:p>
-                  </a:txBody>
-                  <a:tcPr marL="38100" marR="38100" marT="25400" marB="25400" anchor="ctr">
-                    <a:lnL w="6350" cap="flat" cmpd="sng" algn="ctr">
-                      <a:solidFill>
-                        <a:srgbClr val="E3E3E3"/>
-                      </a:solidFill>
-                      <a:prstDash val="solid"/>
-                      <a:round/>
-                      <a:headEnd type="none" w="med" len="med"/>
-                      <a:tailEnd type="none" w="med" len="med"/>
-                    </a:lnL>
-                    <a:lnR w="6350" cap="flat" cmpd="sng" algn="ctr">
-                      <a:solidFill>
-                        <a:srgbClr val="E3E3E3"/>
-                      </a:solidFill>
-                      <a:prstDash val="solid"/>
-                      <a:round/>
-                      <a:headEnd type="none" w="med" len="med"/>
-                      <a:tailEnd type="none" w="med" len="med"/>
-                    </a:lnR>
-                    <a:lnT w="6350" cap="flat" cmpd="sng" algn="ctr">
-                      <a:solidFill>
-                        <a:srgbClr val="E3E3E3"/>
-                      </a:solidFill>
-                      <a:prstDash val="solid"/>
-                      <a:round/>
-                      <a:headEnd type="none" w="med" len="med"/>
-                      <a:tailEnd type="none" w="med" len="med"/>
-                    </a:lnT>
-                    <a:lnB w="6350" cap="flat" cmpd="sng" algn="ctr">
-                      <a:solidFill>
-                        <a:srgbClr val="E3E3E3"/>
-                      </a:solidFill>
-                      <a:prstDash val="solid"/>
-                      <a:round/>
-                      <a:headEnd type="none" w="med" len="med"/>
-                      <a:tailEnd type="none" w="med" len="med"/>
-                    </a:lnB>
-                    <a:solidFill>
-                      <a:srgbClr val="FFFFFF"/>
-                    </a:solidFill>
-                  </a:tcPr>
-                </a:tc>
-              </a:tr>
-              <a:tr h="267462">
-                <a:tc>
-                  <a:txBody>
-                    <a:bodyPr/>
-                    <a:lstStyle/>
-                    <a:p>
-                      <a:pPr algn="ctr" indent="0" marL="0">
-                        <a:buNone/>
-                      </a:pPr>
-                      <a:r>
-                        <a:rPr lang="en-US" sz="830" b="1" dirty="0">
-                          <a:solidFill>
-                            <a:srgbClr val="262626"/>
-                          </a:solidFill>
-                          <a:latin typeface="Arial" pitchFamily="34" charset="0"/>
-                          <a:ea typeface="Arial" pitchFamily="34" charset="-122"/>
-                          <a:cs typeface="Arial" pitchFamily="34" charset="-120"/>
-                        </a:rPr>
-                        <a:t>EWT US</a:t>
-                      </a:r>
-                      <a:endParaRPr lang="en-US" sz="830" dirty="0">
-                        <a:latin typeface="Arial" charset="0"/>
-                        <a:ea typeface="Arial" charset="0"/>
-                        <a:cs typeface="Arial" charset="0"/>
-                      </a:endParaRPr>
-                    </a:p>
-                  </a:txBody>
-                  <a:tcPr marL="38100" marR="38100" marT="25400" marB="25400" anchor="ctr">
-                    <a:lnL w="6350" cap="flat" cmpd="sng" algn="ctr">
-                      <a:solidFill>
-                        <a:srgbClr val="E3E3E3"/>
-                      </a:solidFill>
-                      <a:prstDash val="solid"/>
-                      <a:round/>
-                      <a:headEnd type="none" w="med" len="med"/>
-                      <a:tailEnd type="none" w="med" len="med"/>
-                    </a:lnL>
-                    <a:lnR w="6350" cap="flat" cmpd="sng" algn="ctr">
-                      <a:solidFill>
-                        <a:srgbClr val="E3E3E3"/>
-                      </a:solidFill>
-                      <a:prstDash val="solid"/>
-                      <a:round/>
-                      <a:headEnd type="none" w="med" len="med"/>
-                      <a:tailEnd type="none" w="med" len="med"/>
-                    </a:lnR>
-                    <a:lnT w="6350" cap="flat" cmpd="sng" algn="ctr">
-                      <a:solidFill>
-                        <a:srgbClr val="E3E3E3"/>
-                      </a:solidFill>
-                      <a:prstDash val="solid"/>
-                      <a:round/>
-                      <a:headEnd type="none" w="med" len="med"/>
-                      <a:tailEnd type="none" w="med" len="med"/>
-                    </a:lnT>
-                    <a:lnB w="6350" cap="flat" cmpd="sng" algn="ctr">
-                      <a:solidFill>
-                        <a:srgbClr val="E3E3E3"/>
-                      </a:solidFill>
-                      <a:prstDash val="solid"/>
-                      <a:round/>
-                      <a:headEnd type="none" w="med" len="med"/>
-                      <a:tailEnd type="none" w="med" len="med"/>
-                    </a:lnB>
-                    <a:solidFill>
-                      <a:srgbClr val="FFFFFF"/>
-                    </a:solidFill>
-                  </a:tcPr>
-                </a:tc>
-                <a:tc>
-                  <a:txBody>
-                    <a:bodyPr/>
-                    <a:lstStyle/>
-                    <a:p>
-                      <a:pPr algn="ctr" indent="0" marL="0">
-                        <a:buNone/>
-                      </a:pPr>
-                      <a:r>
-                        <a:rPr lang="en-US" sz="830" dirty="0">
-                          <a:solidFill>
-                            <a:srgbClr val="262626"/>
-                          </a:solidFill>
-                          <a:latin typeface="Arial" pitchFamily="34" charset="0"/>
-                          <a:ea typeface="Arial" pitchFamily="34" charset="-122"/>
-                          <a:cs typeface="Arial" pitchFamily="34" charset="-120"/>
-                        </a:rPr>
-                        <a:t>15%</a:t>
-                      </a:r>
-                      <a:endParaRPr lang="en-US" sz="830" dirty="0">
-                        <a:latin typeface="Arial" charset="0"/>
-                        <a:ea typeface="Arial" charset="0"/>
-                        <a:cs typeface="Arial" charset="0"/>
-                      </a:endParaRPr>
-                    </a:p>
-                  </a:txBody>
-                  <a:tcPr marL="38100" marR="38100" marT="25400" marB="25400" anchor="ctr">
-                    <a:lnL w="6350" cap="flat" cmpd="sng" algn="ctr">
-                      <a:solidFill>
-                        <a:srgbClr val="E3E3E3"/>
-                      </a:solidFill>
-                      <a:prstDash val="solid"/>
-                      <a:round/>
-                      <a:headEnd type="none" w="med" len="med"/>
-                      <a:tailEnd type="none" w="med" len="med"/>
-                    </a:lnL>
-                    <a:lnR w="6350" cap="flat" cmpd="sng" algn="ctr">
-                      <a:solidFill>
-                        <a:srgbClr val="E3E3E3"/>
-                      </a:solidFill>
-                      <a:prstDash val="solid"/>
-                      <a:round/>
-                      <a:headEnd type="none" w="med" len="med"/>
-                      <a:tailEnd type="none" w="med" len="med"/>
-                    </a:lnR>
-                    <a:lnT w="6350" cap="flat" cmpd="sng" algn="ctr">
-                      <a:solidFill>
-                        <a:srgbClr val="E3E3E3"/>
-                      </a:solidFill>
-                      <a:prstDash val="solid"/>
-                      <a:round/>
-                      <a:headEnd type="none" w="med" len="med"/>
-                      <a:tailEnd type="none" w="med" len="med"/>
-                    </a:lnT>
-                    <a:lnB w="6350" cap="flat" cmpd="sng" algn="ctr">
-                      <a:solidFill>
-                        <a:srgbClr val="E3E3E3"/>
-                      </a:solidFill>
-                      <a:prstDash val="solid"/>
-                      <a:round/>
-                      <a:headEnd type="none" w="med" len="med"/>
-                      <a:tailEnd type="none" w="med" len="med"/>
-                    </a:lnB>
-                    <a:solidFill>
-                      <a:srgbClr val="FFFFFF"/>
-                    </a:solidFill>
-                  </a:tcPr>
-                </a:tc>
-                <a:tc>
-                  <a:txBody>
-                    <a:bodyPr/>
-                    <a:lstStyle/>
-                    <a:p>
-                      <a:pPr algn="ctr" indent="0" marL="0">
-                        <a:buNone/>
-                      </a:pPr>
-                      <a:r>
-                        <a:rPr lang="en-US" sz="830" dirty="0">
-                          <a:solidFill>
-                            <a:srgbClr val="262626"/>
-                          </a:solidFill>
-                          <a:latin typeface="Arial" pitchFamily="34" charset="0"/>
-                          <a:ea typeface="Arial" pitchFamily="34" charset="-122"/>
-                          <a:cs typeface="Arial" pitchFamily="34" charset="-120"/>
-                        </a:rPr>
-                        <a:t>26%</a:t>
-                      </a:r>
-                      <a:endParaRPr lang="en-US" sz="830" dirty="0">
-                        <a:latin typeface="Arial" charset="0"/>
-                        <a:ea typeface="Arial" charset="0"/>
-                        <a:cs typeface="Arial" charset="0"/>
-                      </a:endParaRPr>
-                    </a:p>
-                  </a:txBody>
-                  <a:tcPr marL="38100" marR="38100" marT="25400" marB="25400" anchor="ctr">
-                    <a:lnL w="6350" cap="flat" cmpd="sng" algn="ctr">
-                      <a:solidFill>
-                        <a:srgbClr val="E3E3E3"/>
-                      </a:solidFill>
-                      <a:prstDash val="solid"/>
-                      <a:round/>
-                      <a:headEnd type="none" w="med" len="med"/>
-                      <a:tailEnd type="none" w="med" len="med"/>
-                    </a:lnL>
-                    <a:lnR w="6350" cap="flat" cmpd="sng" algn="ctr">
-                      <a:solidFill>
-                        <a:srgbClr val="E3E3E3"/>
-                      </a:solidFill>
-                      <a:prstDash val="solid"/>
-                      <a:round/>
-                      <a:headEnd type="none" w="med" len="med"/>
-                      <a:tailEnd type="none" w="med" len="med"/>
-                    </a:lnR>
-                    <a:lnT w="6350" cap="flat" cmpd="sng" algn="ctr">
-                      <a:solidFill>
-                        <a:srgbClr val="E3E3E3"/>
-                      </a:solidFill>
-                      <a:prstDash val="solid"/>
-                      <a:round/>
-                      <a:headEnd type="none" w="med" len="med"/>
-                      <a:tailEnd type="none" w="med" len="med"/>
-                    </a:lnT>
-                    <a:lnB w="6350" cap="flat" cmpd="sng" algn="ctr">
-                      <a:solidFill>
-                        <a:srgbClr val="E3E3E3"/>
-                      </a:solidFill>
-                      <a:prstDash val="solid"/>
-                      <a:round/>
-                      <a:headEnd type="none" w="med" len="med"/>
-                      <a:tailEnd type="none" w="med" len="med"/>
-                    </a:lnB>
-                    <a:solidFill>
-                      <a:srgbClr val="FFFFFF"/>
-                    </a:solidFill>
-                  </a:tcPr>
-                </a:tc>
-                <a:tc>
-                  <a:txBody>
-                    <a:bodyPr/>
-                    <a:lstStyle/>
-                    <a:p>
-                      <a:pPr algn="ctr" indent="0" marL="0">
-                        <a:buNone/>
-                      </a:pPr>
-                      <a:r>
-                        <a:rPr lang="en-US" sz="830" dirty="0">
-                          <a:solidFill>
-                            <a:srgbClr val="262626"/>
-                          </a:solidFill>
-                          <a:latin typeface="Arial" pitchFamily="34" charset="0"/>
-                          <a:ea typeface="Arial" pitchFamily="34" charset="-122"/>
-                          <a:cs typeface="Arial" pitchFamily="34" charset="-120"/>
-                        </a:rPr>
-                        <a:t>2.6%</a:t>
-                      </a:r>
-                      <a:endParaRPr lang="en-US" sz="830" dirty="0">
-                        <a:latin typeface="Arial" charset="0"/>
-                        <a:ea typeface="Arial" charset="0"/>
-                        <a:cs typeface="Arial" charset="0"/>
-                      </a:endParaRPr>
-                    </a:p>
-                  </a:txBody>
-                  <a:tcPr marL="38100" marR="38100" marT="25400" marB="25400" anchor="ctr">
-                    <a:lnL w="6350" cap="flat" cmpd="sng" algn="ctr">
-                      <a:solidFill>
-                        <a:srgbClr val="E3E3E3"/>
-                      </a:solidFill>
-                      <a:prstDash val="solid"/>
-                      <a:round/>
-                      <a:headEnd type="none" w="med" len="med"/>
-                      <a:tailEnd type="none" w="med" len="med"/>
-                    </a:lnL>
-                    <a:lnR w="6350" cap="flat" cmpd="sng" algn="ctr">
-                      <a:solidFill>
-                        <a:srgbClr val="E3E3E3"/>
-                      </a:solidFill>
-                      <a:prstDash val="solid"/>
-                      <a:round/>
-                      <a:headEnd type="none" w="med" len="med"/>
-                      <a:tailEnd type="none" w="med" len="med"/>
-                    </a:lnR>
-                    <a:lnT w="6350" cap="flat" cmpd="sng" algn="ctr">
-                      <a:solidFill>
-                        <a:srgbClr val="E3E3E3"/>
-                      </a:solidFill>
-                      <a:prstDash val="solid"/>
-                      <a:round/>
-                      <a:headEnd type="none" w="med" len="med"/>
-                      <a:tailEnd type="none" w="med" len="med"/>
-                    </a:lnT>
-                    <a:lnB w="6350" cap="flat" cmpd="sng" algn="ctr">
-                      <a:solidFill>
-                        <a:srgbClr val="E3E3E3"/>
-                      </a:solidFill>
-                      <a:prstDash val="solid"/>
-                      <a:round/>
-                      <a:headEnd type="none" w="med" len="med"/>
-                      <a:tailEnd type="none" w="med" len="med"/>
-                    </a:lnB>
-                    <a:solidFill>
-                      <a:srgbClr val="FFFFFF"/>
-                    </a:solidFill>
-                  </a:tcPr>
-                </a:tc>
-                <a:tc>
-                  <a:txBody>
-                    <a:bodyPr/>
-                    <a:lstStyle/>
-                    <a:p>
-                      <a:pPr algn="ctr" indent="0" marL="0">
-                        <a:buNone/>
-                      </a:pPr>
-                      <a:r>
-                        <a:rPr lang="en-US" sz="830" dirty="0">
-                          <a:solidFill>
-                            <a:srgbClr val="262626"/>
-                          </a:solidFill>
-                          <a:latin typeface="Arial" pitchFamily="34" charset="0"/>
-                          <a:ea typeface="Arial" pitchFamily="34" charset="-122"/>
-                          <a:cs typeface="Arial" pitchFamily="34" charset="-120"/>
-                        </a:rPr>
-                        <a:t>0.85</a:t>
-                      </a:r>
-                      <a:endParaRPr lang="en-US" sz="830" dirty="0">
-                        <a:latin typeface="Arial" charset="0"/>
-                        <a:ea typeface="Arial" charset="0"/>
-                        <a:cs typeface="Arial" charset="0"/>
-                      </a:endParaRPr>
-                    </a:p>
-                  </a:txBody>
-                  <a:tcPr marL="38100" marR="38100" marT="25400" marB="25400" anchor="ctr">
-                    <a:lnL w="6350" cap="flat" cmpd="sng" algn="ctr">
-                      <a:solidFill>
-                        <a:srgbClr val="E3E3E3"/>
-                      </a:solidFill>
-                      <a:prstDash val="solid"/>
-                      <a:round/>
-                      <a:headEnd type="none" w="med" len="med"/>
-                      <a:tailEnd type="none" w="med" len="med"/>
-                    </a:lnL>
-                    <a:lnR w="6350" cap="flat" cmpd="sng" algn="ctr">
-                      <a:solidFill>
-                        <a:srgbClr val="E3E3E3"/>
-                      </a:solidFill>
-                      <a:prstDash val="solid"/>
-                      <a:round/>
-                      <a:headEnd type="none" w="med" len="med"/>
-                      <a:tailEnd type="none" w="med" len="med"/>
-                    </a:lnR>
-                    <a:lnT w="6350" cap="flat" cmpd="sng" algn="ctr">
-                      <a:solidFill>
-                        <a:srgbClr val="E3E3E3"/>
-                      </a:solidFill>
-                      <a:prstDash val="solid"/>
-                      <a:round/>
-                      <a:headEnd type="none" w="med" len="med"/>
-                      <a:tailEnd type="none" w="med" len="med"/>
-                    </a:lnT>
-                    <a:lnB w="6350" cap="flat" cmpd="sng" algn="ctr">
-                      <a:solidFill>
-                        <a:srgbClr val="E3E3E3"/>
-                      </a:solidFill>
-                      <a:prstDash val="solid"/>
-                      <a:round/>
-                      <a:headEnd type="none" w="med" len="med"/>
-                      <a:tailEnd type="none" w="med" len="med"/>
-                    </a:lnB>
-                    <a:solidFill>
-                      <a:srgbClr val="FFFFFF"/>
-                    </a:solidFill>
-                  </a:tcPr>
-                </a:tc>
-                <a:tc>
-                  <a:txBody>
-                    <a:bodyPr/>
-                    <a:lstStyle/>
-                    <a:p>
-                      <a:pPr algn="ctr" indent="0" marL="0">
-                        <a:buNone/>
-                      </a:pPr>
-                      <a:r>
-                        <a:rPr lang="en-US" sz="830" dirty="0">
-                          <a:solidFill>
-                            <a:srgbClr val="262626"/>
-                          </a:solidFill>
-                          <a:latin typeface="Arial" pitchFamily="34" charset="0"/>
-                          <a:ea typeface="Arial" pitchFamily="34" charset="-122"/>
-                          <a:cs typeface="Arial" pitchFamily="34" charset="-120"/>
-                        </a:rPr>
-                        <a:t>0.60</a:t>
-                      </a:r>
-                      <a:endParaRPr lang="en-US" sz="830" dirty="0">
-                        <a:latin typeface="Arial" charset="0"/>
-                        <a:ea typeface="Arial" charset="0"/>
-                        <a:cs typeface="Arial" charset="0"/>
-                      </a:endParaRPr>
-                    </a:p>
-                  </a:txBody>
-                  <a:tcPr marL="38100" marR="38100" marT="25400" marB="25400" anchor="ctr">
-                    <a:lnL w="6350" cap="flat" cmpd="sng" algn="ctr">
-                      <a:solidFill>
-                        <a:srgbClr val="E3E3E3"/>
-                      </a:solidFill>
-                      <a:prstDash val="solid"/>
-                      <a:round/>
-                      <a:headEnd type="none" w="med" len="med"/>
-                      <a:tailEnd type="none" w="med" len="med"/>
-                    </a:lnL>
-                    <a:lnR w="6350" cap="flat" cmpd="sng" algn="ctr">
-                      <a:solidFill>
-                        <a:srgbClr val="E3E3E3"/>
-                      </a:solidFill>
-                      <a:prstDash val="solid"/>
-                      <a:round/>
-                      <a:headEnd type="none" w="med" len="med"/>
-                      <a:tailEnd type="none" w="med" len="med"/>
-                    </a:lnR>
-                    <a:lnT w="6350" cap="flat" cmpd="sng" algn="ctr">
-                      <a:solidFill>
-                        <a:srgbClr val="E3E3E3"/>
-                      </a:solidFill>
-                      <a:prstDash val="solid"/>
-                      <a:round/>
-                      <a:headEnd type="none" w="med" len="med"/>
-                      <a:tailEnd type="none" w="med" len="med"/>
-                    </a:lnT>
-                    <a:lnB w="6350" cap="flat" cmpd="sng" algn="ctr">
-                      <a:solidFill>
-                        <a:srgbClr val="E3E3E3"/>
-                      </a:solidFill>
-                      <a:prstDash val="solid"/>
-                      <a:round/>
-                      <a:headEnd type="none" w="med" len="med"/>
-                      <a:tailEnd type="none" w="med" len="med"/>
-                    </a:lnB>
-                    <a:solidFill>
-                      <a:srgbClr val="FFFFFF"/>
-                    </a:solidFill>
-                  </a:tcPr>
-                </a:tc>
-                <a:tc>
-                  <a:txBody>
-                    <a:bodyPr/>
-                    <a:lstStyle/>
-                    <a:p>
-                      <a:pPr algn="ctr" indent="0" marL="0">
-                        <a:buNone/>
-                      </a:pPr>
-                      <a:r>
-                        <a:rPr lang="en-US" sz="830" dirty="0">
-                          <a:solidFill>
-                            <a:srgbClr val="262626"/>
-                          </a:solidFill>
-                          <a:latin typeface="Arial" pitchFamily="34" charset="0"/>
-                          <a:ea typeface="Arial" pitchFamily="34" charset="-122"/>
-                          <a:cs typeface="Arial" pitchFamily="34" charset="-120"/>
-                        </a:rPr>
-                        <a:t>1.00</a:t>
-                      </a:r>
-                      <a:endParaRPr lang="en-US" sz="830" dirty="0">
-                        <a:latin typeface="Arial" charset="0"/>
-                        <a:ea typeface="Arial" charset="0"/>
-                        <a:cs typeface="Arial" charset="0"/>
-                      </a:endParaRPr>
-                    </a:p>
-                  </a:txBody>
-                  <a:tcPr marL="38100" marR="38100" marT="25400" marB="25400" anchor="ctr">
-                    <a:lnL w="6350" cap="flat" cmpd="sng" algn="ctr">
-                      <a:solidFill>
-                        <a:srgbClr val="E3E3E3"/>
-                      </a:solidFill>
-                      <a:prstDash val="solid"/>
-                      <a:round/>
-                      <a:headEnd type="none" w="med" len="med"/>
-                      <a:tailEnd type="none" w="med" len="med"/>
-                    </a:lnL>
-                    <a:lnR w="6350" cap="flat" cmpd="sng" algn="ctr">
-                      <a:solidFill>
-                        <a:srgbClr val="E3E3E3"/>
-                      </a:solidFill>
-                      <a:prstDash val="solid"/>
-                      <a:round/>
-                      <a:headEnd type="none" w="med" len="med"/>
-                      <a:tailEnd type="none" w="med" len="med"/>
-                    </a:lnR>
-                    <a:lnT w="6350" cap="flat" cmpd="sng" algn="ctr">
-                      <a:solidFill>
-                        <a:srgbClr val="E3E3E3"/>
-                      </a:solidFill>
-                      <a:prstDash val="solid"/>
-                      <a:round/>
-                      <a:headEnd type="none" w="med" len="med"/>
-                      <a:tailEnd type="none" w="med" len="med"/>
-                    </a:lnT>
-                    <a:lnB w="6350" cap="flat" cmpd="sng" algn="ctr">
-                      <a:solidFill>
-                        <a:srgbClr val="E3E3E3"/>
-                      </a:solidFill>
-                      <a:prstDash val="solid"/>
-                      <a:round/>
-                      <a:headEnd type="none" w="med" len="med"/>
-                      <a:tailEnd type="none" w="med" len="med"/>
-                    </a:lnB>
-                    <a:solidFill>
-                      <a:srgbClr val="FFFFFF"/>
-                    </a:solidFill>
-                  </a:tcPr>
-                </a:tc>
-                <a:tc>
-                  <a:txBody>
-                    <a:bodyPr/>
-                    <a:lstStyle/>
-                    <a:p>
-                      <a:pPr algn="ctr" indent="0" marL="0">
-                        <a:buNone/>
-                      </a:pPr>
-                      <a:r>
-                        <a:rPr lang="en-US" sz="830" dirty="0">
-                          <a:solidFill>
-                            <a:srgbClr val="262626"/>
-                          </a:solidFill>
-                          <a:latin typeface="Arial" pitchFamily="34" charset="0"/>
-                          <a:ea typeface="Arial" pitchFamily="34" charset="-122"/>
-                          <a:cs typeface="Arial" pitchFamily="34" charset="-120"/>
-                        </a:rPr>
-                        <a:t>0.70</a:t>
-                      </a:r>
-                      <a:endParaRPr lang="en-US" sz="830" dirty="0">
-                        <a:latin typeface="Arial" charset="0"/>
-                        <a:ea typeface="Arial" charset="0"/>
-                        <a:cs typeface="Arial" charset="0"/>
-                      </a:endParaRPr>
-                    </a:p>
-                  </a:txBody>
-                  <a:tcPr marL="38100" marR="38100" marT="25400" marB="25400" anchor="ctr">
-                    <a:lnL w="6350" cap="flat" cmpd="sng" algn="ctr">
-                      <a:solidFill>
-                        <a:srgbClr val="E3E3E3"/>
-                      </a:solidFill>
-                      <a:prstDash val="solid"/>
-                      <a:round/>
-                      <a:headEnd type="none" w="med" len="med"/>
-                      <a:tailEnd type="none" w="med" len="med"/>
-                    </a:lnL>
-                    <a:lnR w="6350" cap="flat" cmpd="sng" algn="ctr">
-                      <a:solidFill>
-                        <a:srgbClr val="E3E3E3"/>
-                      </a:solidFill>
-                      <a:prstDash val="solid"/>
-                      <a:round/>
-                      <a:headEnd type="none" w="med" len="med"/>
-                      <a:tailEnd type="none" w="med" len="med"/>
-                    </a:lnR>
-                    <a:lnT w="6350" cap="flat" cmpd="sng" algn="ctr">
-                      <a:solidFill>
-                        <a:srgbClr val="E3E3E3"/>
-                      </a:solidFill>
-                      <a:prstDash val="solid"/>
-                      <a:round/>
-                      <a:headEnd type="none" w="med" len="med"/>
-                      <a:tailEnd type="none" w="med" len="med"/>
-                    </a:lnT>
-                    <a:lnB w="6350" cap="flat" cmpd="sng" algn="ctr">
-                      <a:solidFill>
-                        <a:srgbClr val="E3E3E3"/>
-                      </a:solidFill>
-                      <a:prstDash val="solid"/>
-                      <a:round/>
-                      <a:headEnd type="none" w="med" len="med"/>
-                      <a:tailEnd type="none" w="med" len="med"/>
-                    </a:lnB>
-                    <a:solidFill>
-                      <a:srgbClr val="FFFFFF"/>
-                    </a:solidFill>
-                  </a:tcPr>
-                </a:tc>
-                <a:tc>
-                  <a:txBody>
-                    <a:bodyPr/>
-                    <a:lstStyle/>
-                    <a:p>
-                      <a:pPr algn="ctr" indent="0" marL="0">
-                        <a:buNone/>
-                      </a:pPr>
-                      <a:r>
-                        <a:rPr lang="en-US" sz="830" dirty="0">
-                          <a:solidFill>
-                            <a:srgbClr val="262626"/>
-                          </a:solidFill>
-                          <a:latin typeface="Arial" pitchFamily="34" charset="0"/>
-                          <a:ea typeface="Arial" pitchFamily="34" charset="-122"/>
-                          <a:cs typeface="Arial" pitchFamily="34" charset="-120"/>
-                        </a:rPr>
-                        <a:t>0.75</a:t>
-                      </a:r>
-                      <a:endParaRPr lang="en-US" sz="830" dirty="0">
-                        <a:latin typeface="Arial" charset="0"/>
-                        <a:ea typeface="Arial" charset="0"/>
-                        <a:cs typeface="Arial" charset="0"/>
-                      </a:endParaRPr>
-                    </a:p>
-                  </a:txBody>
-                  <a:tcPr marL="38100" marR="38100" marT="25400" marB="25400" anchor="ctr">
-                    <a:lnL w="6350" cap="flat" cmpd="sng" algn="ctr">
-                      <a:solidFill>
-                        <a:srgbClr val="E3E3E3"/>
-                      </a:solidFill>
-                      <a:prstDash val="solid"/>
-                      <a:round/>
-                      <a:headEnd type="none" w="med" len="med"/>
-                      <a:tailEnd type="none" w="med" len="med"/>
-                    </a:lnL>
-                    <a:lnR w="6350" cap="flat" cmpd="sng" algn="ctr">
-                      <a:solidFill>
-                        <a:srgbClr val="E3E3E3"/>
-                      </a:solidFill>
-                      <a:prstDash val="solid"/>
-                      <a:round/>
-                      <a:headEnd type="none" w="med" len="med"/>
-                      <a:tailEnd type="none" w="med" len="med"/>
-                    </a:lnR>
-                    <a:lnT w="6350" cap="flat" cmpd="sng" algn="ctr">
-                      <a:solidFill>
-                        <a:srgbClr val="E3E3E3"/>
-                      </a:solidFill>
-                      <a:prstDash val="solid"/>
-                      <a:round/>
-                      <a:headEnd type="none" w="med" len="med"/>
-                      <a:tailEnd type="none" w="med" len="med"/>
-                    </a:lnT>
-                    <a:lnB w="6350" cap="flat" cmpd="sng" algn="ctr">
-                      <a:solidFill>
-                        <a:srgbClr val="E3E3E3"/>
-                      </a:solidFill>
-                      <a:prstDash val="solid"/>
-                      <a:round/>
-                      <a:headEnd type="none" w="med" len="med"/>
-                      <a:tailEnd type="none" w="med" len="med"/>
-                    </a:lnB>
-                    <a:solidFill>
-                      <a:srgbClr val="FFFFFF"/>
-                    </a:solidFill>
-                  </a:tcPr>
-                </a:tc>
-              </a:tr>
-              <a:tr h="267462">
-                <a:tc>
-                  <a:txBody>
-                    <a:bodyPr/>
-                    <a:lstStyle/>
-                    <a:p>
-                      <a:pPr algn="ctr" indent="0" marL="0">
-                        <a:buNone/>
-                      </a:pPr>
-                      <a:r>
-                        <a:rPr lang="en-US" sz="830" b="1" dirty="0">
-                          <a:solidFill>
-                            <a:srgbClr val="262626"/>
-                          </a:solidFill>
-                          <a:latin typeface="Arial" pitchFamily="34" charset="0"/>
-                          <a:ea typeface="Arial" pitchFamily="34" charset="-122"/>
-                          <a:cs typeface="Arial" pitchFamily="34" charset="-120"/>
-                        </a:rPr>
-                        <a:t>EWY US</a:t>
-                      </a:r>
-                      <a:endParaRPr lang="en-US" sz="830" dirty="0">
-                        <a:latin typeface="Arial" charset="0"/>
-                        <a:ea typeface="Arial" charset="0"/>
-                        <a:cs typeface="Arial" charset="0"/>
-                      </a:endParaRPr>
-                    </a:p>
-                  </a:txBody>
-                  <a:tcPr marL="38100" marR="38100" marT="25400" marB="25400" anchor="ctr">
-                    <a:lnL w="6350" cap="flat" cmpd="sng" algn="ctr">
-                      <a:solidFill>
-                        <a:srgbClr val="E3E3E3"/>
-                      </a:solidFill>
-                      <a:prstDash val="solid"/>
-                      <a:round/>
-                      <a:headEnd type="none" w="med" len="med"/>
-                      <a:tailEnd type="none" w="med" len="med"/>
-                    </a:lnL>
-                    <a:lnR w="6350" cap="flat" cmpd="sng" algn="ctr">
-                      <a:solidFill>
-                        <a:srgbClr val="E3E3E3"/>
-                      </a:solidFill>
-                      <a:prstDash val="solid"/>
-                      <a:round/>
-                      <a:headEnd type="none" w="med" len="med"/>
-                      <a:tailEnd type="none" w="med" len="med"/>
-                    </a:lnR>
-                    <a:lnT w="6350" cap="flat" cmpd="sng" algn="ctr">
-                      <a:solidFill>
-                        <a:srgbClr val="E3E3E3"/>
-                      </a:solidFill>
-                      <a:prstDash val="solid"/>
-                      <a:round/>
-                      <a:headEnd type="none" w="med" len="med"/>
-                      <a:tailEnd type="none" w="med" len="med"/>
-                    </a:lnT>
-                    <a:lnB w="6350" cap="flat" cmpd="sng" algn="ctr">
-                      <a:solidFill>
-                        <a:srgbClr val="E3E3E3"/>
-                      </a:solidFill>
-                      <a:prstDash val="solid"/>
-                      <a:round/>
-                      <a:headEnd type="none" w="med" len="med"/>
-                      <a:tailEnd type="none" w="med" len="med"/>
-                    </a:lnB>
-                    <a:solidFill>
-                      <a:srgbClr val="FFFFFF"/>
-                    </a:solidFill>
-                  </a:tcPr>
-                </a:tc>
-                <a:tc>
-                  <a:txBody>
-                    <a:bodyPr/>
-                    <a:lstStyle/>
-                    <a:p>
-                      <a:pPr algn="ctr" indent="0" marL="0">
-                        <a:buNone/>
-                      </a:pPr>
-                      <a:r>
-                        <a:rPr lang="en-US" sz="830" dirty="0">
-                          <a:solidFill>
-                            <a:srgbClr val="262626"/>
-                          </a:solidFill>
-                          <a:latin typeface="Arial" pitchFamily="34" charset="0"/>
-                          <a:ea typeface="Arial" pitchFamily="34" charset="-122"/>
-                          <a:cs typeface="Arial" pitchFamily="34" charset="-120"/>
-                        </a:rPr>
-                        <a:t>20%</a:t>
-                      </a:r>
-                      <a:endParaRPr lang="en-US" sz="830" dirty="0">
-                        <a:latin typeface="Arial" charset="0"/>
-                        <a:ea typeface="Arial" charset="0"/>
-                        <a:cs typeface="Arial" charset="0"/>
-                      </a:endParaRPr>
-                    </a:p>
-                  </a:txBody>
-                  <a:tcPr marL="38100" marR="38100" marT="25400" marB="25400" anchor="ctr">
-                    <a:lnL w="6350" cap="flat" cmpd="sng" algn="ctr">
-                      <a:solidFill>
-                        <a:srgbClr val="E3E3E3"/>
-                      </a:solidFill>
-                      <a:prstDash val="solid"/>
-                      <a:round/>
-                      <a:headEnd type="none" w="med" len="med"/>
-                      <a:tailEnd type="none" w="med" len="med"/>
-                    </a:lnL>
-                    <a:lnR w="6350" cap="flat" cmpd="sng" algn="ctr">
-                      <a:solidFill>
-                        <a:srgbClr val="E3E3E3"/>
-                      </a:solidFill>
-                      <a:prstDash val="solid"/>
-                      <a:round/>
-                      <a:headEnd type="none" w="med" len="med"/>
-                      <a:tailEnd type="none" w="med" len="med"/>
-                    </a:lnR>
-                    <a:lnT w="6350" cap="flat" cmpd="sng" algn="ctr">
-                      <a:solidFill>
-                        <a:srgbClr val="E3E3E3"/>
-                      </a:solidFill>
-                      <a:prstDash val="solid"/>
-                      <a:round/>
-                      <a:headEnd type="none" w="med" len="med"/>
-                      <a:tailEnd type="none" w="med" len="med"/>
-                    </a:lnT>
-                    <a:lnB w="6350" cap="flat" cmpd="sng" algn="ctr">
-                      <a:solidFill>
-                        <a:srgbClr val="E3E3E3"/>
-                      </a:solidFill>
-                      <a:prstDash val="solid"/>
-                      <a:round/>
-                      <a:headEnd type="none" w="med" len="med"/>
-                      <a:tailEnd type="none" w="med" len="med"/>
-                    </a:lnB>
-                    <a:solidFill>
-                      <a:srgbClr val="FFFFFF"/>
-                    </a:solidFill>
-                  </a:tcPr>
-                </a:tc>
-                <a:tc>
-                  <a:txBody>
-                    <a:bodyPr/>
-                    <a:lstStyle/>
-                    <a:p>
-                      <a:pPr algn="ctr" indent="0" marL="0">
-                        <a:buNone/>
-                      </a:pPr>
-                      <a:r>
-                        <a:rPr lang="en-US" sz="830" dirty="0">
-                          <a:solidFill>
-                            <a:srgbClr val="262626"/>
-                          </a:solidFill>
-                          <a:latin typeface="Arial" pitchFamily="34" charset="0"/>
-                          <a:ea typeface="Arial" pitchFamily="34" charset="-122"/>
-                          <a:cs typeface="Arial" pitchFamily="34" charset="-120"/>
-                        </a:rPr>
-                        <a:t>30%</a:t>
-                      </a:r>
-                      <a:endParaRPr lang="en-US" sz="830" dirty="0">
-                        <a:latin typeface="Arial" charset="0"/>
-                        <a:ea typeface="Arial" charset="0"/>
-                        <a:cs typeface="Arial" charset="0"/>
-                      </a:endParaRPr>
-                    </a:p>
-                  </a:txBody>
-                  <a:tcPr marL="38100" marR="38100" marT="25400" marB="25400" anchor="ctr">
-                    <a:lnL w="6350" cap="flat" cmpd="sng" algn="ctr">
-                      <a:solidFill>
-                        <a:srgbClr val="E3E3E3"/>
-                      </a:solidFill>
-                      <a:prstDash val="solid"/>
-                      <a:round/>
-                      <a:headEnd type="none" w="med" len="med"/>
-                      <a:tailEnd type="none" w="med" len="med"/>
-                    </a:lnL>
-                    <a:lnR w="6350" cap="flat" cmpd="sng" algn="ctr">
-                      <a:solidFill>
-                        <a:srgbClr val="E3E3E3"/>
-                      </a:solidFill>
-                      <a:prstDash val="solid"/>
-                      <a:round/>
-                      <a:headEnd type="none" w="med" len="med"/>
-                      <a:tailEnd type="none" w="med" len="med"/>
-                    </a:lnR>
-                    <a:lnT w="6350" cap="flat" cmpd="sng" algn="ctr">
-                      <a:solidFill>
-                        <a:srgbClr val="E3E3E3"/>
-                      </a:solidFill>
-                      <a:prstDash val="solid"/>
-                      <a:round/>
-                      <a:headEnd type="none" w="med" len="med"/>
-                      <a:tailEnd type="none" w="med" len="med"/>
-                    </a:lnT>
-                    <a:lnB w="6350" cap="flat" cmpd="sng" algn="ctr">
-                      <a:solidFill>
-                        <a:srgbClr val="E3E3E3"/>
-                      </a:solidFill>
-                      <a:prstDash val="solid"/>
-                      <a:round/>
-                      <a:headEnd type="none" w="med" len="med"/>
-                      <a:tailEnd type="none" w="med" len="med"/>
-                    </a:lnB>
-                    <a:solidFill>
-                      <a:srgbClr val="FFFFFF"/>
-                    </a:solidFill>
-                  </a:tcPr>
-                </a:tc>
-                <a:tc>
-                  <a:txBody>
-                    <a:bodyPr/>
-                    <a:lstStyle/>
-                    <a:p>
-                      <a:pPr algn="ctr" indent="0" marL="0">
-                        <a:buNone/>
-                      </a:pPr>
-                      <a:r>
-                        <a:rPr lang="en-US" sz="830" dirty="0">
-                          <a:solidFill>
-                            <a:srgbClr val="262626"/>
-                          </a:solidFill>
-                          <a:latin typeface="Arial" pitchFamily="34" charset="0"/>
-                          <a:ea typeface="Arial" pitchFamily="34" charset="-122"/>
-                          <a:cs typeface="Arial" pitchFamily="34" charset="-120"/>
-                        </a:rPr>
-                        <a:t>1.2%</a:t>
-                      </a:r>
-                      <a:endParaRPr lang="en-US" sz="830" dirty="0">
-                        <a:latin typeface="Arial" charset="0"/>
-                        <a:ea typeface="Arial" charset="0"/>
-                        <a:cs typeface="Arial" charset="0"/>
-                      </a:endParaRPr>
-                    </a:p>
-                  </a:txBody>
-                  <a:tcPr marL="38100" marR="38100" marT="25400" marB="25400" anchor="ctr">
-                    <a:lnL w="6350" cap="flat" cmpd="sng" algn="ctr">
-                      <a:solidFill>
-                        <a:srgbClr val="E3E3E3"/>
-                      </a:solidFill>
-                      <a:prstDash val="solid"/>
-                      <a:round/>
-                      <a:headEnd type="none" w="med" len="med"/>
-                      <a:tailEnd type="none" w="med" len="med"/>
-                    </a:lnL>
-                    <a:lnR w="6350" cap="flat" cmpd="sng" algn="ctr">
-                      <a:solidFill>
-                        <a:srgbClr val="E3E3E3"/>
-                      </a:solidFill>
-                      <a:prstDash val="solid"/>
-                      <a:round/>
-                      <a:headEnd type="none" w="med" len="med"/>
-                      <a:tailEnd type="none" w="med" len="med"/>
-                    </a:lnR>
-                    <a:lnT w="6350" cap="flat" cmpd="sng" algn="ctr">
-                      <a:solidFill>
-                        <a:srgbClr val="E3E3E3"/>
-                      </a:solidFill>
-                      <a:prstDash val="solid"/>
-                      <a:round/>
-                      <a:headEnd type="none" w="med" len="med"/>
-                      <a:tailEnd type="none" w="med" len="med"/>
-                    </a:lnT>
-                    <a:lnB w="6350" cap="flat" cmpd="sng" algn="ctr">
-                      <a:solidFill>
-                        <a:srgbClr val="E3E3E3"/>
-                      </a:solidFill>
-                      <a:prstDash val="solid"/>
-                      <a:round/>
-                      <a:headEnd type="none" w="med" len="med"/>
-                      <a:tailEnd type="none" w="med" len="med"/>
-                    </a:lnB>
-                    <a:solidFill>
-                      <a:srgbClr val="FFFFFF"/>
-                    </a:solidFill>
-                  </a:tcPr>
-                </a:tc>
-                <a:tc>
-                  <a:txBody>
-                    <a:bodyPr/>
-                    <a:lstStyle/>
-                    <a:p>
-                      <a:pPr algn="ctr" indent="0" marL="0">
-                        <a:buNone/>
-                      </a:pPr>
-                      <a:r>
-                        <a:rPr lang="en-US" sz="830" dirty="0">
-                          <a:solidFill>
-                            <a:srgbClr val="262626"/>
-                          </a:solidFill>
-                          <a:latin typeface="Arial" pitchFamily="34" charset="0"/>
-                          <a:ea typeface="Arial" pitchFamily="34" charset="-122"/>
-                          <a:cs typeface="Arial" pitchFamily="34" charset="-120"/>
-                        </a:rPr>
-                        <a:t>0.80</a:t>
-                      </a:r>
-                      <a:endParaRPr lang="en-US" sz="830" dirty="0">
-                        <a:latin typeface="Arial" charset="0"/>
-                        <a:ea typeface="Arial" charset="0"/>
-                        <a:cs typeface="Arial" charset="0"/>
-                      </a:endParaRPr>
-                    </a:p>
-                  </a:txBody>
-                  <a:tcPr marL="38100" marR="38100" marT="25400" marB="25400" anchor="ctr">
-                    <a:lnL w="6350" cap="flat" cmpd="sng" algn="ctr">
-                      <a:solidFill>
-                        <a:srgbClr val="E3E3E3"/>
-                      </a:solidFill>
-                      <a:prstDash val="solid"/>
-                      <a:round/>
-                      <a:headEnd type="none" w="med" len="med"/>
-                      <a:tailEnd type="none" w="med" len="med"/>
-                    </a:lnL>
-                    <a:lnR w="6350" cap="flat" cmpd="sng" algn="ctr">
-                      <a:solidFill>
-                        <a:srgbClr val="E3E3E3"/>
-                      </a:solidFill>
-                      <a:prstDash val="solid"/>
-                      <a:round/>
-                      <a:headEnd type="none" w="med" len="med"/>
-                      <a:tailEnd type="none" w="med" len="med"/>
-                    </a:lnR>
-                    <a:lnT w="6350" cap="flat" cmpd="sng" algn="ctr">
-                      <a:solidFill>
-                        <a:srgbClr val="E3E3E3"/>
-                      </a:solidFill>
-                      <a:prstDash val="solid"/>
-                      <a:round/>
-                      <a:headEnd type="none" w="med" len="med"/>
-                      <a:tailEnd type="none" w="med" len="med"/>
-                    </a:lnT>
-                    <a:lnB w="6350" cap="flat" cmpd="sng" algn="ctr">
-                      <a:solidFill>
-                        <a:srgbClr val="E3E3E3"/>
-                      </a:solidFill>
-                      <a:prstDash val="solid"/>
-                      <a:round/>
-                      <a:headEnd type="none" w="med" len="med"/>
-                      <a:tailEnd type="none" w="med" len="med"/>
-                    </a:lnB>
-                    <a:solidFill>
-                      <a:srgbClr val="FFFFFF"/>
-                    </a:solidFill>
-                  </a:tcPr>
-                </a:tc>
-                <a:tc>
-                  <a:txBody>
-                    <a:bodyPr/>
-                    <a:lstStyle/>
-                    <a:p>
-                      <a:pPr algn="ctr" indent="0" marL="0">
-                        <a:buNone/>
-                      </a:pPr>
-                      <a:r>
-                        <a:rPr lang="en-US" sz="830" dirty="0">
-                          <a:solidFill>
-                            <a:srgbClr val="262626"/>
-                          </a:solidFill>
-                          <a:latin typeface="Arial" pitchFamily="34" charset="0"/>
-                          <a:ea typeface="Arial" pitchFamily="34" charset="-122"/>
-                          <a:cs typeface="Arial" pitchFamily="34" charset="-120"/>
-                        </a:rPr>
-                        <a:t>0.55</a:t>
-                      </a:r>
-                      <a:endParaRPr lang="en-US" sz="830" dirty="0">
-                        <a:latin typeface="Arial" charset="0"/>
-                        <a:ea typeface="Arial" charset="0"/>
-                        <a:cs typeface="Arial" charset="0"/>
-                      </a:endParaRPr>
-                    </a:p>
-                  </a:txBody>
-                  <a:tcPr marL="38100" marR="38100" marT="25400" marB="25400" anchor="ctr">
-                    <a:lnL w="6350" cap="flat" cmpd="sng" algn="ctr">
-                      <a:solidFill>
-                        <a:srgbClr val="E3E3E3"/>
-                      </a:solidFill>
-                      <a:prstDash val="solid"/>
-                      <a:round/>
-                      <a:headEnd type="none" w="med" len="med"/>
-                      <a:tailEnd type="none" w="med" len="med"/>
-                    </a:lnL>
-                    <a:lnR w="6350" cap="flat" cmpd="sng" algn="ctr">
-                      <a:solidFill>
-                        <a:srgbClr val="E3E3E3"/>
-                      </a:solidFill>
-                      <a:prstDash val="solid"/>
-                      <a:round/>
-                      <a:headEnd type="none" w="med" len="med"/>
-                      <a:tailEnd type="none" w="med" len="med"/>
-                    </a:lnR>
-                    <a:lnT w="6350" cap="flat" cmpd="sng" algn="ctr">
-                      <a:solidFill>
-                        <a:srgbClr val="E3E3E3"/>
-                      </a:solidFill>
-                      <a:prstDash val="solid"/>
-                      <a:round/>
-                      <a:headEnd type="none" w="med" len="med"/>
-                      <a:tailEnd type="none" w="med" len="med"/>
-                    </a:lnT>
-                    <a:lnB w="6350" cap="flat" cmpd="sng" algn="ctr">
-                      <a:solidFill>
-                        <a:srgbClr val="E3E3E3"/>
-                      </a:solidFill>
-                      <a:prstDash val="solid"/>
-                      <a:round/>
-                      <a:headEnd type="none" w="med" len="med"/>
-                      <a:tailEnd type="none" w="med" len="med"/>
-                    </a:lnB>
-                    <a:solidFill>
-                      <a:srgbClr val="FFFFFF"/>
-                    </a:solidFill>
-                  </a:tcPr>
-                </a:tc>
-                <a:tc>
-                  <a:txBody>
-                    <a:bodyPr/>
-                    <a:lstStyle/>
-                    <a:p>
-                      <a:pPr algn="ctr" indent="0" marL="0">
-                        <a:buNone/>
-                      </a:pPr>
-                      <a:r>
-                        <a:rPr lang="en-US" sz="830" dirty="0">
-                          <a:solidFill>
-                            <a:srgbClr val="262626"/>
-                          </a:solidFill>
-                          <a:latin typeface="Arial" pitchFamily="34" charset="0"/>
-                          <a:ea typeface="Arial" pitchFamily="34" charset="-122"/>
-                          <a:cs typeface="Arial" pitchFamily="34" charset="-120"/>
-                        </a:rPr>
-                        <a:t>0.70</a:t>
-                      </a:r>
-                      <a:endParaRPr lang="en-US" sz="830" dirty="0">
-                        <a:latin typeface="Arial" charset="0"/>
-                        <a:ea typeface="Arial" charset="0"/>
-                        <a:cs typeface="Arial" charset="0"/>
-                      </a:endParaRPr>
-                    </a:p>
-                  </a:txBody>
-                  <a:tcPr marL="38100" marR="38100" marT="25400" marB="25400" anchor="ctr">
-                    <a:lnL w="6350" cap="flat" cmpd="sng" algn="ctr">
-                      <a:solidFill>
-                        <a:srgbClr val="E3E3E3"/>
-                      </a:solidFill>
-                      <a:prstDash val="solid"/>
-                      <a:round/>
-                      <a:headEnd type="none" w="med" len="med"/>
-                      <a:tailEnd type="none" w="med" len="med"/>
-                    </a:lnL>
-                    <a:lnR w="6350" cap="flat" cmpd="sng" algn="ctr">
-                      <a:solidFill>
-                        <a:srgbClr val="E3E3E3"/>
-                      </a:solidFill>
-                      <a:prstDash val="solid"/>
-                      <a:round/>
-                      <a:headEnd type="none" w="med" len="med"/>
-                      <a:tailEnd type="none" w="med" len="med"/>
-                    </a:lnR>
-                    <a:lnT w="6350" cap="flat" cmpd="sng" algn="ctr">
-                      <a:solidFill>
-                        <a:srgbClr val="E3E3E3"/>
-                      </a:solidFill>
-                      <a:prstDash val="solid"/>
-                      <a:round/>
-                      <a:headEnd type="none" w="med" len="med"/>
-                      <a:tailEnd type="none" w="med" len="med"/>
-                    </a:lnT>
-                    <a:lnB w="6350" cap="flat" cmpd="sng" algn="ctr">
-                      <a:solidFill>
-                        <a:srgbClr val="E3E3E3"/>
-                      </a:solidFill>
-                      <a:prstDash val="solid"/>
-                      <a:round/>
-                      <a:headEnd type="none" w="med" len="med"/>
-                      <a:tailEnd type="none" w="med" len="med"/>
-                    </a:lnB>
-                    <a:solidFill>
-                      <a:srgbClr val="FFFFFF"/>
-                    </a:solidFill>
-                  </a:tcPr>
-                </a:tc>
-                <a:tc>
-                  <a:txBody>
-                    <a:bodyPr/>
-                    <a:lstStyle/>
-                    <a:p>
-                      <a:pPr algn="ctr" indent="0" marL="0">
-                        <a:buNone/>
-                      </a:pPr>
-                      <a:r>
-                        <a:rPr lang="en-US" sz="830" dirty="0">
-                          <a:solidFill>
-                            <a:srgbClr val="262626"/>
-                          </a:solidFill>
-                          <a:latin typeface="Arial" pitchFamily="34" charset="0"/>
-                          <a:ea typeface="Arial" pitchFamily="34" charset="-122"/>
-                          <a:cs typeface="Arial" pitchFamily="34" charset="-120"/>
-                        </a:rPr>
-                        <a:t>1.00</a:t>
-                      </a:r>
-                      <a:endParaRPr lang="en-US" sz="830" dirty="0">
-                        <a:latin typeface="Arial" charset="0"/>
-                        <a:ea typeface="Arial" charset="0"/>
-                        <a:cs typeface="Arial" charset="0"/>
-                      </a:endParaRPr>
-                    </a:p>
-                  </a:txBody>
-                  <a:tcPr marL="38100" marR="38100" marT="25400" marB="25400" anchor="ctr">
-                    <a:lnL w="6350" cap="flat" cmpd="sng" algn="ctr">
-                      <a:solidFill>
-                        <a:srgbClr val="E3E3E3"/>
-                      </a:solidFill>
-                      <a:prstDash val="solid"/>
-                      <a:round/>
-                      <a:headEnd type="none" w="med" len="med"/>
-                      <a:tailEnd type="none" w="med" len="med"/>
-                    </a:lnL>
-                    <a:lnR w="6350" cap="flat" cmpd="sng" algn="ctr">
-                      <a:solidFill>
-                        <a:srgbClr val="E3E3E3"/>
-                      </a:solidFill>
-                      <a:prstDash val="solid"/>
-                      <a:round/>
-                      <a:headEnd type="none" w="med" len="med"/>
-                      <a:tailEnd type="none" w="med" len="med"/>
-                    </a:lnR>
-                    <a:lnT w="6350" cap="flat" cmpd="sng" algn="ctr">
-                      <a:solidFill>
-                        <a:srgbClr val="E3E3E3"/>
-                      </a:solidFill>
-                      <a:prstDash val="solid"/>
-                      <a:round/>
-                      <a:headEnd type="none" w="med" len="med"/>
-                      <a:tailEnd type="none" w="med" len="med"/>
-                    </a:lnT>
-                    <a:lnB w="6350" cap="flat" cmpd="sng" algn="ctr">
-                      <a:solidFill>
-                        <a:srgbClr val="E3E3E3"/>
-                      </a:solidFill>
-                      <a:prstDash val="solid"/>
-                      <a:round/>
-                      <a:headEnd type="none" w="med" len="med"/>
-                      <a:tailEnd type="none" w="med" len="med"/>
-                    </a:lnB>
-                    <a:solidFill>
-                      <a:srgbClr val="FFFFFF"/>
-                    </a:solidFill>
-                  </a:tcPr>
-                </a:tc>
-                <a:tc>
-                  <a:txBody>
-                    <a:bodyPr/>
-                    <a:lstStyle/>
-                    <a:p>
-                      <a:pPr algn="ctr" indent="0" marL="0">
-                        <a:buNone/>
-                      </a:pPr>
-                      <a:r>
-                        <a:rPr lang="en-US" sz="830" dirty="0">
-                          <a:solidFill>
-                            <a:srgbClr val="262626"/>
-                          </a:solidFill>
-                          <a:latin typeface="Arial" pitchFamily="34" charset="0"/>
-                          <a:ea typeface="Arial" pitchFamily="34" charset="-122"/>
-                          <a:cs typeface="Arial" pitchFamily="34" charset="-120"/>
-                        </a:rPr>
-                        <a:t>0.55</a:t>
                       </a:r>
                       <a:endParaRPr lang="en-US" sz="830" dirty="0">
                         <a:latin typeface="Arial" charset="0"/>
@@ -31144,7 +31144,7 @@
                           <a:ea typeface="Arial" pitchFamily="34" charset="-122"/>
                           <a:cs typeface="Arial" pitchFamily="34" charset="-120"/>
                         </a:rPr>
-                        <a:t>18%</a:t>
+                        <a:t>37%</a:t>
                       </a:r>
                       <a:endParaRPr lang="en-US" sz="830" dirty="0">
                         <a:latin typeface="Arial" charset="0"/>
@@ -31348,7 +31348,7 @@
                           <a:ea typeface="Arial" pitchFamily="34" charset="-122"/>
                           <a:cs typeface="Arial" pitchFamily="34" charset="-120"/>
                         </a:rPr>
-                        <a:t>0.45</a:t>
+                        <a:t>0.55</a:t>
                       </a:r>
                       <a:endParaRPr lang="en-US" sz="830" dirty="0">
                         <a:latin typeface="Arial" charset="0"/>
@@ -31484,7 +31484,7 @@
                           <a:ea typeface="Arial" pitchFamily="34" charset="-122"/>
                           <a:cs typeface="Arial" pitchFamily="34" charset="-120"/>
                         </a:rPr>
-                        <a:t>0.55</a:t>
+                        <a:t>0.45</a:t>
                       </a:r>
                       <a:endParaRPr lang="en-US" sz="830" dirty="0">
                         <a:latin typeface="Arial" charset="0"/>
@@ -32166,7 +32166,7 @@
                           <a:ea typeface="Arial" pitchFamily="34" charset="-122"/>
                           <a:cs typeface="Arial" pitchFamily="34" charset="-120"/>
                         </a:rPr>
-                        <a:t>13.0%</a:t>
+                        <a:t>12.9%</a:t>
                       </a:r>
                       <a:endParaRPr lang="en-US" sz="830" dirty="0">
                         <a:latin typeface="Arial" charset="0"/>
@@ -32304,7 +32304,7 @@
                           <a:ea typeface="Arial" pitchFamily="34" charset="-122"/>
                           <a:cs typeface="Arial" pitchFamily="34" charset="-120"/>
                         </a:rPr>
-                        <a:t>12.0%</a:t>
+                        <a:t>11.9%</a:t>
                       </a:r>
                       <a:endParaRPr lang="en-US" sz="830" dirty="0">
                         <a:latin typeface="Arial" charset="0"/>
@@ -32580,7 +32580,7 @@
                           <a:ea typeface="Arial" pitchFamily="34" charset="-122"/>
                           <a:cs typeface="Arial" pitchFamily="34" charset="-120"/>
                         </a:rPr>
-                        <a:t>15.5%</a:t>
+                        <a:t>15.6%</a:t>
                       </a:r>
                       <a:endParaRPr lang="en-US" sz="830" dirty="0">
                         <a:latin typeface="Arial" charset="0"/>
@@ -32718,7 +32718,7 @@
                           <a:ea typeface="Arial" pitchFamily="34" charset="-122"/>
                           <a:cs typeface="Arial" pitchFamily="34" charset="-120"/>
                         </a:rPr>
-                        <a:t>17.3%</a:t>
+                        <a:t>17.4%</a:t>
                       </a:r>
                       <a:endParaRPr lang="en-US" sz="830" dirty="0">
                         <a:latin typeface="Arial" charset="0"/>
@@ -32856,7 +32856,7 @@
                           <a:ea typeface="Arial" pitchFamily="34" charset="-122"/>
                           <a:cs typeface="Arial" pitchFamily="34" charset="-120"/>
                         </a:rPr>
-                        <a:t>15.5% / 12.9%</a:t>
+                        <a:t>15.6% / 12.9%</a:t>
                       </a:r>
                       <a:endParaRPr lang="en-US" sz="830" dirty="0">
                         <a:latin typeface="Arial" charset="0"/>
@@ -36271,7 +36271,7 @@
                 <a:ea typeface="Arial" pitchFamily="34" charset="-122"/>
                 <a:cs typeface="Arial" pitchFamily="34" charset="-120"/>
               </a:rPr>
-              <a:t>100% repaid at autocall or maturity. Worth 89.4%</a:t>
+              <a:t>100% repaid at autocall or maturity. Worth 89.3%</a:t>
             </a:r>
             <a:endParaRPr lang="en-US" sz="780" dirty="0"/>
           </a:p>
@@ -36745,7 +36745,7 @@
                 <a:ea typeface="Arial" pitchFamily="34" charset="-122"/>
                 <a:cs typeface="Arial" pitchFamily="34" charset="-120"/>
               </a:rPr>
-              <a:t>If never called, the client bears the basket's fall below 100% at Y5. Worth −7.0%</a:t>
+              <a:t>If never called, the client bears the basket's fall below 100% at Y5. Worth −6.8%</a:t>
             </a:r>
             <a:endParaRPr lang="en-US" sz="780" dirty="0"/>
           </a:p>
@@ -36825,7 +36825,7 @@
                 <a:ea typeface="Arial" pitchFamily="34" charset="-122"/>
                 <a:cs typeface="Arial" pitchFamily="34" charset="-120"/>
               </a:rPr>
-              <a:t>Fair value 96.5% = principal 89.4% + coupons 14.1% − short put 7.0%.  </a:t>
+              <a:t>Fair value 96.5% = principal 89.3% + coupons 14.1% − short put 6.8%.  </a:t>
             </a:r>
             <a:pPr indent="0" marL="0">
               <a:buNone/>
@@ -37546,7 +37546,7 @@
                           <a:ea typeface="Arial" pitchFamily="34" charset="-122"/>
                           <a:cs typeface="Arial" pitchFamily="34" charset="-120"/>
                         </a:rPr>
-                        <a:t>21%</a:t>
+                        <a:t>0.8% (team outlook)</a:t>
                       </a:r>
                       <a:endParaRPr lang="en-US" sz="830" dirty="0">
                         <a:latin typeface="Arial" charset="0"/>
@@ -37684,7 +37684,7 @@
                           <a:ea typeface="Arial" pitchFamily="34" charset="-122"/>
                           <a:cs typeface="Arial" pitchFamily="34" charset="-120"/>
                         </a:rPr>
-                        <a:t>~7.8% fair coupon</a:t>
+                        <a:t>~7.9% fair coupon</a:t>
                       </a:r>
                       <a:endParaRPr lang="en-US" sz="830" dirty="0">
                         <a:latin typeface="Arial" charset="0"/>
@@ -37890,7 +37890,7 @@
                           <a:ea typeface="Arial" pitchFamily="34" charset="-122"/>
                           <a:cs typeface="Arial" pitchFamily="34" charset="-120"/>
                         </a:rPr>
-                        <a:t>9% p.a., paid at call</a:t>
+                        <a:t>13.6% fair, paid at call</a:t>
                       </a:r>
                       <a:endParaRPr lang="en-US" sz="830" dirty="0">
                         <a:latin typeface="Arial" charset="0"/>
@@ -37958,7 +37958,7 @@
                           <a:ea typeface="Arial" pitchFamily="34" charset="-122"/>
                           <a:cs typeface="Arial" pitchFamily="34" charset="-120"/>
                         </a:rPr>
-                        <a:t>14.3%</a:t>
+                        <a:t>14.0% (pricing)</a:t>
                       </a:r>
                       <a:endParaRPr lang="en-US" sz="830" dirty="0">
                         <a:latin typeface="Arial" charset="0"/>
@@ -38096,7 +38096,7 @@
                           <a:ea typeface="Arial" pitchFamily="34" charset="-122"/>
                           <a:cs typeface="Arial" pitchFamily="34" charset="-120"/>
                         </a:rPr>
-                        <a:t>84% of basket gain at Y5</a:t>
+                        <a:t>85% of basket gain at Y5</a:t>
                       </a:r>
                       <a:endParaRPr lang="en-US" sz="830" dirty="0">
                         <a:latin typeface="Arial" charset="0"/>
@@ -38292,7 +38292,7 @@
                 <a:ea typeface="Arial" pitchFamily="34" charset="-122"/>
                 <a:cs typeface="Arial" pitchFamily="34" charset="-120"/>
               </a:rPr>
-              <a:t>The snowball pays 9% but loses capital in ~14% of paths. Full protection pays only ~8%. The PPN pays nothing unless the basket ends above 100% after 5 years. Our note pays 12.75%, with money usually back within ~2 years, but takes the basket's fall if never called.</a:t>
+              <a:t>The snowball's fair coupon is 13.6%, but it loses capital in ~14% of paths (pricing measure). Full protection pays only ~8%. The PPN pays nothing unless the basket ends above 100% after 5 years. Our note pays 12.75%, with money usually back within ~1 year on the team outlook, but takes the basket's fall if never called.</a:t>
             </a:r>
             <a:endParaRPr lang="en-US" sz="830" dirty="0"/>
           </a:p>
@@ -39090,7 +39090,7 @@
                 <a:ea typeface="Arial" pitchFamily="34" charset="-122"/>
                 <a:cs typeface="Arial" pitchFamily="34" charset="-120"/>
               </a:rPr>
-              <a:t>Observation timeline and the three outcomes at maturity (building blocks in the appendix)</a:t>
+              <a:t>Observation timeline and the three possible outcomes (building blocks in the appendix)</a:t>
             </a:r>
             <a:endParaRPr lang="en-US" sz="1060" dirty="0"/>
           </a:p>
@@ -39820,7 +39820,7 @@
                 <a:ea typeface="Arial" pitchFamily="34" charset="-122"/>
                 <a:cs typeface="Arial" pitchFamily="34" charset="-120"/>
               </a:rPr>
-              <a:t>21%</a:t>
+              <a:t>0.8%</a:t>
             </a:r>
             <a:endParaRPr lang="en-US" sz="3500" dirty="0"/>
           </a:p>
@@ -39898,7 +39898,7 @@
                 <a:ea typeface="Arial" pitchFamily="34" charset="-122"/>
                 <a:cs typeface="Arial" pitchFamily="34" charset="-120"/>
               </a:rPr>
-              <a:t>If never called, repaid at the basket level (on average 56% back): the price of the higher coupon</a:t>
+              <a:t>On the team outlook (slides 4–5). If markets go nowhere it rises to 33%: never called, repaid at the basket level</a:t>
             </a:r>
             <a:endParaRPr lang="en-US" sz="970" dirty="0"/>
           </a:p>
@@ -39962,7 +39962,7 @@
                 <a:ea typeface="Arial" pitchFamily="34" charset="-122"/>
                 <a:cs typeface="Arial" pitchFamily="34" charset="-120"/>
               </a:rPr>
-              <a:t>49%</a:t>
+              <a:t>78%</a:t>
             </a:r>
             <a:endParaRPr lang="en-US" sz="3500" dirty="0"/>
           </a:p>
@@ -40040,7 +40040,7 @@
                 <a:ea typeface="Arial" pitchFamily="34" charset="-122"/>
                 <a:cs typeface="Arial" pitchFamily="34" charset="-120"/>
               </a:rPr>
-              <a:t>Risk-neutral. 79% called within 5 years; expected life 2.22 years</a:t>
+              <a:t>Team outlook. 99% called within 5 years; expected life 1.2 years</a:t>
             </a:r>
             <a:endParaRPr lang="en-US" sz="970" dirty="0"/>
           </a:p>
@@ -40121,7 +40121,7 @@
                 <a:ea typeface="Arial" pitchFamily="34" charset="-122"/>
                 <a:cs typeface="Arial" pitchFamily="34" charset="-120"/>
               </a:rPr>
-              <a:t>The family earns 12.75% a year in the 79% of paths where the basket gets back to its starting level; if it never does (21% of paths, risk-neutral), the note repays the basket's level at Year 5. Fair value is 96.5%, so issuing at par leaves Natixis 3.5% for hedging and margin.</a:t>
+              <a:t>On the team's outlook (slides 4–5) the note is called in 99% of paths, usually within 1.2 years, paying 12.75% a year; if the basket never gets back to its start (0.8%; 33% if markets go nowhere), the note repays the basket's level at Year 5. Fair value is 96.5%, so issuing at par leaves Natixis 3.5% for hedging and margin.</a:t>
             </a:r>
             <a:endParaRPr lang="en-US" sz="1060" dirty="0"/>
           </a:p>
@@ -40866,28 +40866,7 @@
                 <a:ea typeface="Arial" pitchFamily="34" charset="-122"/>
                 <a:cs typeface="Arial" pitchFamily="34" charset="-120"/>
               </a:rPr>
-              <a:t>Accepts limited liquidity on 5% of wealth</a:t>
-            </a:r>
-            <a:endParaRPr lang="en-US" sz="970" dirty="0"/>
-          </a:p>
-          <a:p>
-            <a:pPr marL="342900" indent="-342900">
-              <a:spcAft>
-                <a:spcPts val="300"/>
-              </a:spcAft>
-              <a:buSzPct val="100000"/>
-              <a:buChar char="•"/>
-            </a:pPr>
-            <a:r>
-              <a:rPr lang="en-US" sz="970" dirty="0">
-                <a:solidFill>
-                  <a:srgbClr val="FFFFFF"/>
-                </a:solidFill>
-                <a:latin typeface="Arial" pitchFamily="34" charset="0"/>
-                <a:ea typeface="Arial" pitchFamily="34" charset="-122"/>
-                <a:cs typeface="Arial" pitchFamily="34" charset="-120"/>
-              </a:rPr>
-              <a:t>Accepts equity risk on 5% of wealth</a:t>
+              <a:t>Accepts limited liquidity and equity risk on 5% of wealth</a:t>
             </a:r>
             <a:endParaRPr lang="en-US" sz="970" dirty="0"/>
           </a:p>
@@ -41419,7 +41398,7 @@
                           <a:ea typeface="Arial" pitchFamily="34" charset="-122"/>
                           <a:cs typeface="Arial" pitchFamily="34" charset="-120"/>
                         </a:rPr>
-                        <a:t>Diversified basket (not worst-of); capital back early in 79% of paths; BPCE-backed issuer</a:t>
+                        <a:t>Diversified basket at the low-risk edge of all mixes (slide 4); capital back early in 99% of paths; BPCE-backed issuer</a:t>
                       </a:r>
                       <a:endParaRPr lang="en-US" sz="870" dirty="0">
                         <a:latin typeface="Arial" charset="0"/>
@@ -41944,7 +41923,7 @@
                 <a:ea typeface="Arial" pitchFamily="34" charset="-122"/>
                 <a:cs typeface="Arial" pitchFamily="34" charset="-120"/>
               </a:rPr>
-              <a:t>Investment thesis: structural growth themes, and high rates and volatility that pay for a double-digit coupon</a:t>
+              <a:t>Market view: structural growth themes, and high rates and volatility that pay for a double-digit coupon</a:t>
             </a:r>
             <a:endParaRPr lang="en-US" sz="850" dirty="0"/>
           </a:p>
@@ -43930,7 +43909,7 @@
                 <a:ea typeface="Arial" pitchFamily="34" charset="-122"/>
                 <a:cs typeface="Arial" pitchFamily="34" charset="-120"/>
               </a:rPr>
-              <a:t>Fed median 4.125% to end-2027, cuts only from 2028; 12 dots see 4.375%.</a:t>
+              <a:t>Fed median 4.125% to end-2027, cuts only from 2028; 4.375% seen by 4 members for 2026 and 8 for 2027.</a:t>
             </a:r>
             <a:endParaRPr lang="en-US" sz="710" dirty="0"/>
           </a:p>
@@ -44434,7 +44413,7 @@
                 <a:ea typeface="Arial" pitchFamily="34" charset="-122"/>
                 <a:cs typeface="Arial" pitchFamily="34" charset="-120"/>
               </a:rPr>
-              <a:t>→ Diversified five-ETF basket; capping upside at the coupon costs little</a:t>
+              <a:t>→ Diversified five-ETF basket; coupons lock in gains if the rally stalls</a:t>
             </a:r>
             <a:endParaRPr lang="en-US" sz="680" dirty="0"/>
           </a:p>
@@ -48497,11 +48476,11 @@
             <a:avLst/>
           </a:prstGeom>
           <a:solidFill>
-            <a:srgbClr val="A6A6A6"/>
+            <a:srgbClr val="4F86AE"/>
           </a:solidFill>
           <a:ln w="12700">
             <a:solidFill>
-              <a:srgbClr val="A6A6A6"/>
+              <a:srgbClr val="4F86AE"/>
             </a:solidFill>
             <a:prstDash val="solid"/>
           </a:ln>
@@ -48540,7 +48519,7 @@
                 <a:ea typeface="Arial" pitchFamily="34" charset="-122"/>
                 <a:cs typeface="Arial" pitchFamily="34" charset="-120"/>
               </a:rPr>
-              <a:t>Japan Semiconductor (2644 JP)</a:t>
+              <a:t>iShares MSCI South Korea (EWY)</a:t>
             </a:r>
             <a:endParaRPr lang="en-US" sz="780" dirty="0"/>
           </a:p>
@@ -48625,11 +48604,11 @@
             <a:avLst/>
           </a:prstGeom>
           <a:solidFill>
-            <a:srgbClr val="4F86AE"/>
+            <a:srgbClr val="A6A6A6"/>
           </a:solidFill>
           <a:ln w="12700">
             <a:solidFill>
-              <a:srgbClr val="4F86AE"/>
+              <a:srgbClr val="A6A6A6"/>
             </a:solidFill>
             <a:prstDash val="solid"/>
           </a:ln>
@@ -48668,7 +48647,7 @@
                 <a:ea typeface="Arial" pitchFamily="34" charset="-122"/>
                 <a:cs typeface="Arial" pitchFamily="34" charset="-120"/>
               </a:rPr>
-              <a:t>iShares MSCI South Korea (EWY)</a:t>
+              <a:t>Japan Semiconductor (2644 JP)</a:t>
             </a:r>
             <a:endParaRPr lang="en-US" sz="780" dirty="0"/>
           </a:p>
@@ -49262,7 +49241,555 @@
                           <a:ea typeface="Arial" pitchFamily="34" charset="-122"/>
                           <a:cs typeface="Arial" pitchFamily="34" charset="-120"/>
                         </a:rPr>
-                        <a:t>32%</a:t>
+                        <a:t>18%</a:t>
+                      </a:r>
+                      <a:endParaRPr lang="en-US" sz="780" dirty="0">
+                        <a:latin typeface="Arial" charset="0"/>
+                        <a:ea typeface="Arial" charset="0"/>
+                        <a:cs typeface="Arial" charset="0"/>
+                      </a:endParaRPr>
+                    </a:p>
+                  </a:txBody>
+                  <a:tcPr marL="50800" marR="50800" marT="25400" marB="25400" anchor="ctr">
+                    <a:lnL w="6350" cap="flat" cmpd="sng" algn="ctr">
+                      <a:solidFill>
+                        <a:srgbClr val="E3E3E3"/>
+                      </a:solidFill>
+                      <a:prstDash val="solid"/>
+                      <a:round/>
+                      <a:headEnd type="none" w="med" len="med"/>
+                      <a:tailEnd type="none" w="med" len="med"/>
+                    </a:lnL>
+                    <a:lnR w="6350" cap="flat" cmpd="sng" algn="ctr">
+                      <a:solidFill>
+                        <a:srgbClr val="E3E3E3"/>
+                      </a:solidFill>
+                      <a:prstDash val="solid"/>
+                      <a:round/>
+                      <a:headEnd type="none" w="med" len="med"/>
+                      <a:tailEnd type="none" w="med" len="med"/>
+                    </a:lnR>
+                    <a:lnT w="6350" cap="flat" cmpd="sng" algn="ctr">
+                      <a:solidFill>
+                        <a:srgbClr val="E3E3E3"/>
+                      </a:solidFill>
+                      <a:prstDash val="solid"/>
+                      <a:round/>
+                      <a:headEnd type="none" w="med" len="med"/>
+                      <a:tailEnd type="none" w="med" len="med"/>
+                    </a:lnT>
+                    <a:lnB w="6350" cap="flat" cmpd="sng" algn="ctr">
+                      <a:solidFill>
+                        <a:srgbClr val="E3E3E3"/>
+                      </a:solidFill>
+                      <a:prstDash val="solid"/>
+                      <a:round/>
+                      <a:headEnd type="none" w="med" len="med"/>
+                      <a:tailEnd type="none" w="med" len="med"/>
+                    </a:lnB>
+                    <a:solidFill>
+                      <a:srgbClr val="FFFFFF"/>
+                    </a:solidFill>
+                  </a:tcPr>
+                </a:tc>
+              </a:tr>
+              <a:tr h="463601">
+                <a:tc>
+                  <a:txBody>
+                    <a:bodyPr/>
+                    <a:lstStyle/>
+                    <a:p>
+                      <a:pPr indent="0" marL="0">
+                        <a:buNone/>
+                      </a:pPr>
+                      <a:r>
+                        <a:rPr lang="en-US" sz="780" b="1" dirty="0">
+                          <a:solidFill>
+                            <a:srgbClr val="262626"/>
+                          </a:solidFill>
+                          <a:latin typeface="Arial" pitchFamily="34" charset="0"/>
+                          <a:ea typeface="Arial" pitchFamily="34" charset="-122"/>
+                          <a:cs typeface="Arial" pitchFamily="34" charset="-120"/>
+                        </a:rPr>
+                        <a:t>iShares MSCI South Korea (EWY)</a:t>
+                      </a:r>
+                      <a:endParaRPr lang="en-US" sz="780" dirty="0">
+                        <a:latin typeface="Arial" charset="0"/>
+                        <a:ea typeface="Arial" charset="0"/>
+                        <a:cs typeface="Arial" charset="0"/>
+                      </a:endParaRPr>
+                    </a:p>
+                  </a:txBody>
+                  <a:tcPr marL="50800" marR="50800" marT="25400" marB="25400" anchor="ctr">
+                    <a:lnL w="6350" cap="flat" cmpd="sng" algn="ctr">
+                      <a:solidFill>
+                        <a:srgbClr val="E3E3E3"/>
+                      </a:solidFill>
+                      <a:prstDash val="solid"/>
+                      <a:round/>
+                      <a:headEnd type="none" w="med" len="med"/>
+                      <a:tailEnd type="none" w="med" len="med"/>
+                    </a:lnL>
+                    <a:lnR w="6350" cap="flat" cmpd="sng" algn="ctr">
+                      <a:solidFill>
+                        <a:srgbClr val="E3E3E3"/>
+                      </a:solidFill>
+                      <a:prstDash val="solid"/>
+                      <a:round/>
+                      <a:headEnd type="none" w="med" len="med"/>
+                      <a:tailEnd type="none" w="med" len="med"/>
+                    </a:lnR>
+                    <a:lnT w="6350" cap="flat" cmpd="sng" algn="ctr">
+                      <a:solidFill>
+                        <a:srgbClr val="E3E3E3"/>
+                      </a:solidFill>
+                      <a:prstDash val="solid"/>
+                      <a:round/>
+                      <a:headEnd type="none" w="med" len="med"/>
+                      <a:tailEnd type="none" w="med" len="med"/>
+                    </a:lnT>
+                    <a:lnB w="6350" cap="flat" cmpd="sng" algn="ctr">
+                      <a:solidFill>
+                        <a:srgbClr val="E3E3E3"/>
+                      </a:solidFill>
+                      <a:prstDash val="solid"/>
+                      <a:round/>
+                      <a:headEnd type="none" w="med" len="med"/>
+                      <a:tailEnd type="none" w="med" len="med"/>
+                    </a:lnB>
+                    <a:solidFill>
+                      <a:srgbClr val="FFFFFF"/>
+                    </a:solidFill>
+                  </a:tcPr>
+                </a:tc>
+                <a:tc>
+                  <a:txBody>
+                    <a:bodyPr/>
+                    <a:lstStyle/>
+                    <a:p>
+                      <a:pPr indent="0" marL="0">
+                        <a:buNone/>
+                      </a:pPr>
+                      <a:r>
+                        <a:rPr lang="en-US" sz="780" dirty="0">
+                          <a:solidFill>
+                            <a:srgbClr val="262626"/>
+                          </a:solidFill>
+                          <a:latin typeface="Arial" pitchFamily="34" charset="0"/>
+                          <a:ea typeface="Arial" pitchFamily="34" charset="-122"/>
+                          <a:cs typeface="Arial" pitchFamily="34" charset="-120"/>
+                        </a:rPr>
+                        <a:t>20%</a:t>
+                      </a:r>
+                      <a:endParaRPr lang="en-US" sz="780" dirty="0">
+                        <a:latin typeface="Arial" charset="0"/>
+                        <a:ea typeface="Arial" charset="0"/>
+                        <a:cs typeface="Arial" charset="0"/>
+                      </a:endParaRPr>
+                    </a:p>
+                  </a:txBody>
+                  <a:tcPr marL="50800" marR="50800" marT="25400" marB="25400" anchor="ctr">
+                    <a:lnL w="6350" cap="flat" cmpd="sng" algn="ctr">
+                      <a:solidFill>
+                        <a:srgbClr val="E3E3E3"/>
+                      </a:solidFill>
+                      <a:prstDash val="solid"/>
+                      <a:round/>
+                      <a:headEnd type="none" w="med" len="med"/>
+                      <a:tailEnd type="none" w="med" len="med"/>
+                    </a:lnL>
+                    <a:lnR w="6350" cap="flat" cmpd="sng" algn="ctr">
+                      <a:solidFill>
+                        <a:srgbClr val="E3E3E3"/>
+                      </a:solidFill>
+                      <a:prstDash val="solid"/>
+                      <a:round/>
+                      <a:headEnd type="none" w="med" len="med"/>
+                      <a:tailEnd type="none" w="med" len="med"/>
+                    </a:lnR>
+                    <a:lnT w="6350" cap="flat" cmpd="sng" algn="ctr">
+                      <a:solidFill>
+                        <a:srgbClr val="E3E3E3"/>
+                      </a:solidFill>
+                      <a:prstDash val="solid"/>
+                      <a:round/>
+                      <a:headEnd type="none" w="med" len="med"/>
+                      <a:tailEnd type="none" w="med" len="med"/>
+                    </a:lnT>
+                    <a:lnB w="6350" cap="flat" cmpd="sng" algn="ctr">
+                      <a:solidFill>
+                        <a:srgbClr val="E3E3E3"/>
+                      </a:solidFill>
+                      <a:prstDash val="solid"/>
+                      <a:round/>
+                      <a:headEnd type="none" w="med" len="med"/>
+                      <a:tailEnd type="none" w="med" len="med"/>
+                    </a:lnB>
+                    <a:solidFill>
+                      <a:srgbClr val="FFFFFF"/>
+                    </a:solidFill>
+                  </a:tcPr>
+                </a:tc>
+                <a:tc>
+                  <a:txBody>
+                    <a:bodyPr/>
+                    <a:lstStyle/>
+                    <a:p>
+                      <a:pPr indent="0" marL="0">
+                        <a:buNone/>
+                      </a:pPr>
+                      <a:r>
+                        <a:rPr lang="en-US" sz="780" dirty="0">
+                          <a:solidFill>
+                            <a:srgbClr val="262626"/>
+                          </a:solidFill>
+                          <a:latin typeface="Arial" pitchFamily="34" charset="0"/>
+                          <a:ea typeface="Arial" pitchFamily="34" charset="-122"/>
+                          <a:cs typeface="Arial" pitchFamily="34" charset="-120"/>
+                        </a:rPr>
+                        <a:t>Korea large caps (Samsung + SK hynix ~44%): high-bandwidth memory for AI</a:t>
+                      </a:r>
+                      <a:endParaRPr lang="en-US" sz="780" dirty="0">
+                        <a:latin typeface="Arial" charset="0"/>
+                        <a:ea typeface="Arial" charset="0"/>
+                        <a:cs typeface="Arial" charset="0"/>
+                      </a:endParaRPr>
+                    </a:p>
+                  </a:txBody>
+                  <a:tcPr marL="50800" marR="50800" marT="25400" marB="25400" anchor="ctr">
+                    <a:lnL w="6350" cap="flat" cmpd="sng" algn="ctr">
+                      <a:solidFill>
+                        <a:srgbClr val="E3E3E3"/>
+                      </a:solidFill>
+                      <a:prstDash val="solid"/>
+                      <a:round/>
+                      <a:headEnd type="none" w="med" len="med"/>
+                      <a:tailEnd type="none" w="med" len="med"/>
+                    </a:lnL>
+                    <a:lnR w="6350" cap="flat" cmpd="sng" algn="ctr">
+                      <a:solidFill>
+                        <a:srgbClr val="E3E3E3"/>
+                      </a:solidFill>
+                      <a:prstDash val="solid"/>
+                      <a:round/>
+                      <a:headEnd type="none" w="med" len="med"/>
+                      <a:tailEnd type="none" w="med" len="med"/>
+                    </a:lnR>
+                    <a:lnT w="6350" cap="flat" cmpd="sng" algn="ctr">
+                      <a:solidFill>
+                        <a:srgbClr val="E3E3E3"/>
+                      </a:solidFill>
+                      <a:prstDash val="solid"/>
+                      <a:round/>
+                      <a:headEnd type="none" w="med" len="med"/>
+                      <a:tailEnd type="none" w="med" len="med"/>
+                    </a:lnT>
+                    <a:lnB w="6350" cap="flat" cmpd="sng" algn="ctr">
+                      <a:solidFill>
+                        <a:srgbClr val="E3E3E3"/>
+                      </a:solidFill>
+                      <a:prstDash val="solid"/>
+                      <a:round/>
+                      <a:headEnd type="none" w="med" len="med"/>
+                      <a:tailEnd type="none" w="med" len="med"/>
+                    </a:lnB>
+                    <a:solidFill>
+                      <a:srgbClr val="FFFFFF"/>
+                    </a:solidFill>
+                  </a:tcPr>
+                </a:tc>
+                <a:tc>
+                  <a:txBody>
+                    <a:bodyPr/>
+                    <a:lstStyle/>
+                    <a:p>
+                      <a:pPr indent="0" marL="0">
+                        <a:buNone/>
+                      </a:pPr>
+                      <a:r>
+                        <a:rPr lang="en-US" sz="780" dirty="0">
+                          <a:solidFill>
+                            <a:srgbClr val="262626"/>
+                          </a:solidFill>
+                          <a:latin typeface="Arial" pitchFamily="34" charset="0"/>
+                          <a:ea typeface="Arial" pitchFamily="34" charset="-122"/>
+                          <a:cs typeface="Arial" pitchFamily="34" charset="-120"/>
+                        </a:rPr>
+                        <a:t>49%</a:t>
+                      </a:r>
+                      <a:endParaRPr lang="en-US" sz="780" dirty="0">
+                        <a:latin typeface="Arial" charset="0"/>
+                        <a:ea typeface="Arial" charset="0"/>
+                        <a:cs typeface="Arial" charset="0"/>
+                      </a:endParaRPr>
+                    </a:p>
+                  </a:txBody>
+                  <a:tcPr marL="50800" marR="50800" marT="25400" marB="25400" anchor="ctr">
+                    <a:lnL w="6350" cap="flat" cmpd="sng" algn="ctr">
+                      <a:solidFill>
+                        <a:srgbClr val="E3E3E3"/>
+                      </a:solidFill>
+                      <a:prstDash val="solid"/>
+                      <a:round/>
+                      <a:headEnd type="none" w="med" len="med"/>
+                      <a:tailEnd type="none" w="med" len="med"/>
+                    </a:lnL>
+                    <a:lnR w="6350" cap="flat" cmpd="sng" algn="ctr">
+                      <a:solidFill>
+                        <a:srgbClr val="E3E3E3"/>
+                      </a:solidFill>
+                      <a:prstDash val="solid"/>
+                      <a:round/>
+                      <a:headEnd type="none" w="med" len="med"/>
+                      <a:tailEnd type="none" w="med" len="med"/>
+                    </a:lnR>
+                    <a:lnT w="6350" cap="flat" cmpd="sng" algn="ctr">
+                      <a:solidFill>
+                        <a:srgbClr val="E3E3E3"/>
+                      </a:solidFill>
+                      <a:prstDash val="solid"/>
+                      <a:round/>
+                      <a:headEnd type="none" w="med" len="med"/>
+                      <a:tailEnd type="none" w="med" len="med"/>
+                    </a:lnT>
+                    <a:lnB w="6350" cap="flat" cmpd="sng" algn="ctr">
+                      <a:solidFill>
+                        <a:srgbClr val="E3E3E3"/>
+                      </a:solidFill>
+                      <a:prstDash val="solid"/>
+                      <a:round/>
+                      <a:headEnd type="none" w="med" len="med"/>
+                      <a:tailEnd type="none" w="med" len="med"/>
+                    </a:lnB>
+                    <a:solidFill>
+                      <a:srgbClr val="FFFFFF"/>
+                    </a:solidFill>
+                  </a:tcPr>
+                </a:tc>
+              </a:tr>
+              <a:tr h="463601">
+                <a:tc>
+                  <a:txBody>
+                    <a:bodyPr/>
+                    <a:lstStyle/>
+                    <a:p>
+                      <a:pPr indent="0" marL="0">
+                        <a:buNone/>
+                      </a:pPr>
+                      <a:r>
+                        <a:rPr lang="en-US" sz="780" b="1" dirty="0">
+                          <a:solidFill>
+                            <a:srgbClr val="262626"/>
+                          </a:solidFill>
+                          <a:latin typeface="Arial" pitchFamily="34" charset="0"/>
+                          <a:ea typeface="Arial" pitchFamily="34" charset="-122"/>
+                          <a:cs typeface="Arial" pitchFamily="34" charset="-120"/>
+                        </a:rPr>
+                        <a:t>iShares MSCI Taiwan (EWT)</a:t>
+                      </a:r>
+                      <a:endParaRPr lang="en-US" sz="780" dirty="0">
+                        <a:latin typeface="Arial" charset="0"/>
+                        <a:ea typeface="Arial" charset="0"/>
+                        <a:cs typeface="Arial" charset="0"/>
+                      </a:endParaRPr>
+                    </a:p>
+                  </a:txBody>
+                  <a:tcPr marL="50800" marR="50800" marT="25400" marB="25400" anchor="ctr">
+                    <a:lnL w="6350" cap="flat" cmpd="sng" algn="ctr">
+                      <a:solidFill>
+                        <a:srgbClr val="E3E3E3"/>
+                      </a:solidFill>
+                      <a:prstDash val="solid"/>
+                      <a:round/>
+                      <a:headEnd type="none" w="med" len="med"/>
+                      <a:tailEnd type="none" w="med" len="med"/>
+                    </a:lnL>
+                    <a:lnR w="6350" cap="flat" cmpd="sng" algn="ctr">
+                      <a:solidFill>
+                        <a:srgbClr val="E3E3E3"/>
+                      </a:solidFill>
+                      <a:prstDash val="solid"/>
+                      <a:round/>
+                      <a:headEnd type="none" w="med" len="med"/>
+                      <a:tailEnd type="none" w="med" len="med"/>
+                    </a:lnR>
+                    <a:lnT w="6350" cap="flat" cmpd="sng" algn="ctr">
+                      <a:solidFill>
+                        <a:srgbClr val="E3E3E3"/>
+                      </a:solidFill>
+                      <a:prstDash val="solid"/>
+                      <a:round/>
+                      <a:headEnd type="none" w="med" len="med"/>
+                      <a:tailEnd type="none" w="med" len="med"/>
+                    </a:lnT>
+                    <a:lnB w="6350" cap="flat" cmpd="sng" algn="ctr">
+                      <a:solidFill>
+                        <a:srgbClr val="E3E3E3"/>
+                      </a:solidFill>
+                      <a:prstDash val="solid"/>
+                      <a:round/>
+                      <a:headEnd type="none" w="med" len="med"/>
+                      <a:tailEnd type="none" w="med" len="med"/>
+                    </a:lnB>
+                    <a:solidFill>
+                      <a:srgbClr val="FFFFFF"/>
+                    </a:solidFill>
+                  </a:tcPr>
+                </a:tc>
+                <a:tc>
+                  <a:txBody>
+                    <a:bodyPr/>
+                    <a:lstStyle/>
+                    <a:p>
+                      <a:pPr indent="0" marL="0">
+                        <a:buNone/>
+                      </a:pPr>
+                      <a:r>
+                        <a:rPr lang="en-US" sz="780" dirty="0">
+                          <a:solidFill>
+                            <a:srgbClr val="262626"/>
+                          </a:solidFill>
+                          <a:latin typeface="Arial" pitchFamily="34" charset="0"/>
+                          <a:ea typeface="Arial" pitchFamily="34" charset="-122"/>
+                          <a:cs typeface="Arial" pitchFamily="34" charset="-120"/>
+                        </a:rPr>
+                        <a:t>15%</a:t>
+                      </a:r>
+                      <a:endParaRPr lang="en-US" sz="780" dirty="0">
+                        <a:latin typeface="Arial" charset="0"/>
+                        <a:ea typeface="Arial" charset="0"/>
+                        <a:cs typeface="Arial" charset="0"/>
+                      </a:endParaRPr>
+                    </a:p>
+                  </a:txBody>
+                  <a:tcPr marL="50800" marR="50800" marT="25400" marB="25400" anchor="ctr">
+                    <a:lnL w="6350" cap="flat" cmpd="sng" algn="ctr">
+                      <a:solidFill>
+                        <a:srgbClr val="E3E3E3"/>
+                      </a:solidFill>
+                      <a:prstDash val="solid"/>
+                      <a:round/>
+                      <a:headEnd type="none" w="med" len="med"/>
+                      <a:tailEnd type="none" w="med" len="med"/>
+                    </a:lnL>
+                    <a:lnR w="6350" cap="flat" cmpd="sng" algn="ctr">
+                      <a:solidFill>
+                        <a:srgbClr val="E3E3E3"/>
+                      </a:solidFill>
+                      <a:prstDash val="solid"/>
+                      <a:round/>
+                      <a:headEnd type="none" w="med" len="med"/>
+                      <a:tailEnd type="none" w="med" len="med"/>
+                    </a:lnR>
+                    <a:lnT w="6350" cap="flat" cmpd="sng" algn="ctr">
+                      <a:solidFill>
+                        <a:srgbClr val="E3E3E3"/>
+                      </a:solidFill>
+                      <a:prstDash val="solid"/>
+                      <a:round/>
+                      <a:headEnd type="none" w="med" len="med"/>
+                      <a:tailEnd type="none" w="med" len="med"/>
+                    </a:lnT>
+                    <a:lnB w="6350" cap="flat" cmpd="sng" algn="ctr">
+                      <a:solidFill>
+                        <a:srgbClr val="E3E3E3"/>
+                      </a:solidFill>
+                      <a:prstDash val="solid"/>
+                      <a:round/>
+                      <a:headEnd type="none" w="med" len="med"/>
+                      <a:tailEnd type="none" w="med" len="med"/>
+                    </a:lnB>
+                    <a:solidFill>
+                      <a:srgbClr val="FFFFFF"/>
+                    </a:solidFill>
+                  </a:tcPr>
+                </a:tc>
+                <a:tc>
+                  <a:txBody>
+                    <a:bodyPr/>
+                    <a:lstStyle/>
+                    <a:p>
+                      <a:pPr indent="0" marL="0">
+                        <a:buNone/>
+                      </a:pPr>
+                      <a:r>
+                        <a:rPr lang="en-US" sz="780" dirty="0">
+                          <a:solidFill>
+                            <a:srgbClr val="262626"/>
+                          </a:solidFill>
+                          <a:latin typeface="Arial" pitchFamily="34" charset="0"/>
+                          <a:ea typeface="Arial" pitchFamily="34" charset="-122"/>
+                          <a:cs typeface="Arial" pitchFamily="34" charset="-120"/>
+                        </a:rPr>
+                        <a:t>Taiwan large caps (TSMC, MediaTek, Delta): AI foundry and server chain in the family's Greater China region</a:t>
+                      </a:r>
+                      <a:endParaRPr lang="en-US" sz="780" dirty="0">
+                        <a:latin typeface="Arial" charset="0"/>
+                        <a:ea typeface="Arial" charset="0"/>
+                        <a:cs typeface="Arial" charset="0"/>
+                      </a:endParaRPr>
+                    </a:p>
+                  </a:txBody>
+                  <a:tcPr marL="50800" marR="50800" marT="25400" marB="25400" anchor="ctr">
+                    <a:lnL w="6350" cap="flat" cmpd="sng" algn="ctr">
+                      <a:solidFill>
+                        <a:srgbClr val="E3E3E3"/>
+                      </a:solidFill>
+                      <a:prstDash val="solid"/>
+                      <a:round/>
+                      <a:headEnd type="none" w="med" len="med"/>
+                      <a:tailEnd type="none" w="med" len="med"/>
+                    </a:lnL>
+                    <a:lnR w="6350" cap="flat" cmpd="sng" algn="ctr">
+                      <a:solidFill>
+                        <a:srgbClr val="E3E3E3"/>
+                      </a:solidFill>
+                      <a:prstDash val="solid"/>
+                      <a:round/>
+                      <a:headEnd type="none" w="med" len="med"/>
+                      <a:tailEnd type="none" w="med" len="med"/>
+                    </a:lnR>
+                    <a:lnT w="6350" cap="flat" cmpd="sng" algn="ctr">
+                      <a:solidFill>
+                        <a:srgbClr val="E3E3E3"/>
+                      </a:solidFill>
+                      <a:prstDash val="solid"/>
+                      <a:round/>
+                      <a:headEnd type="none" w="med" len="med"/>
+                      <a:tailEnd type="none" w="med" len="med"/>
+                    </a:lnT>
+                    <a:lnB w="6350" cap="flat" cmpd="sng" algn="ctr">
+                      <a:solidFill>
+                        <a:srgbClr val="E3E3E3"/>
+                      </a:solidFill>
+                      <a:prstDash val="solid"/>
+                      <a:round/>
+                      <a:headEnd type="none" w="med" len="med"/>
+                      <a:tailEnd type="none" w="med" len="med"/>
+                    </a:lnB>
+                    <a:solidFill>
+                      <a:srgbClr val="FFFFFF"/>
+                    </a:solidFill>
+                  </a:tcPr>
+                </a:tc>
+                <a:tc>
+                  <a:txBody>
+                    <a:bodyPr/>
+                    <a:lstStyle/>
+                    <a:p>
+                      <a:pPr indent="0" marL="0">
+                        <a:buNone/>
+                      </a:pPr>
+                      <a:r>
+                        <a:rPr lang="en-US" sz="780" dirty="0">
+                          <a:solidFill>
+                            <a:srgbClr val="262626"/>
+                          </a:solidFill>
+                          <a:latin typeface="Arial" pitchFamily="34" charset="0"/>
+                          <a:ea typeface="Arial" pitchFamily="34" charset="-122"/>
+                          <a:cs typeface="Arial" pitchFamily="34" charset="-120"/>
+                        </a:rPr>
+                        <a:t>36%</a:t>
                       </a:r>
                       <a:endParaRPr lang="en-US" sz="780" dirty="0">
                         <a:latin typeface="Arial" charset="0"/>
@@ -49536,555 +50063,7 @@
                           <a:ea typeface="Arial" pitchFamily="34" charset="-122"/>
                           <a:cs typeface="Arial" pitchFamily="34" charset="-120"/>
                         </a:rPr>
-                        <a:t>38%</a:t>
-                      </a:r>
-                      <a:endParaRPr lang="en-US" sz="780" dirty="0">
-                        <a:latin typeface="Arial" charset="0"/>
-                        <a:ea typeface="Arial" charset="0"/>
-                        <a:cs typeface="Arial" charset="0"/>
-                      </a:endParaRPr>
-                    </a:p>
-                  </a:txBody>
-                  <a:tcPr marL="50800" marR="50800" marT="25400" marB="25400" anchor="ctr">
-                    <a:lnL w="6350" cap="flat" cmpd="sng" algn="ctr">
-                      <a:solidFill>
-                        <a:srgbClr val="E3E3E3"/>
-                      </a:solidFill>
-                      <a:prstDash val="solid"/>
-                      <a:round/>
-                      <a:headEnd type="none" w="med" len="med"/>
-                      <a:tailEnd type="none" w="med" len="med"/>
-                    </a:lnL>
-                    <a:lnR w="6350" cap="flat" cmpd="sng" algn="ctr">
-                      <a:solidFill>
-                        <a:srgbClr val="E3E3E3"/>
-                      </a:solidFill>
-                      <a:prstDash val="solid"/>
-                      <a:round/>
-                      <a:headEnd type="none" w="med" len="med"/>
-                      <a:tailEnd type="none" w="med" len="med"/>
-                    </a:lnR>
-                    <a:lnT w="6350" cap="flat" cmpd="sng" algn="ctr">
-                      <a:solidFill>
-                        <a:srgbClr val="E3E3E3"/>
-                      </a:solidFill>
-                      <a:prstDash val="solid"/>
-                      <a:round/>
-                      <a:headEnd type="none" w="med" len="med"/>
-                      <a:tailEnd type="none" w="med" len="med"/>
-                    </a:lnT>
-                    <a:lnB w="6350" cap="flat" cmpd="sng" algn="ctr">
-                      <a:solidFill>
-                        <a:srgbClr val="E3E3E3"/>
-                      </a:solidFill>
-                      <a:prstDash val="solid"/>
-                      <a:round/>
-                      <a:headEnd type="none" w="med" len="med"/>
-                      <a:tailEnd type="none" w="med" len="med"/>
-                    </a:lnB>
-                    <a:solidFill>
-                      <a:srgbClr val="FFFFFF"/>
-                    </a:solidFill>
-                  </a:tcPr>
-                </a:tc>
-              </a:tr>
-              <a:tr h="463601">
-                <a:tc>
-                  <a:txBody>
-                    <a:bodyPr/>
-                    <a:lstStyle/>
-                    <a:p>
-                      <a:pPr indent="0" marL="0">
-                        <a:buNone/>
-                      </a:pPr>
-                      <a:r>
-                        <a:rPr lang="en-US" sz="780" b="1" dirty="0">
-                          <a:solidFill>
-                            <a:srgbClr val="262626"/>
-                          </a:solidFill>
-                          <a:latin typeface="Arial" pitchFamily="34" charset="0"/>
-                          <a:ea typeface="Arial" pitchFamily="34" charset="-122"/>
-                          <a:cs typeface="Arial" pitchFamily="34" charset="-120"/>
-                        </a:rPr>
-                        <a:t>iShares MSCI Taiwan (EWT)</a:t>
-                      </a:r>
-                      <a:endParaRPr lang="en-US" sz="780" dirty="0">
-                        <a:latin typeface="Arial" charset="0"/>
-                        <a:ea typeface="Arial" charset="0"/>
-                        <a:cs typeface="Arial" charset="0"/>
-                      </a:endParaRPr>
-                    </a:p>
-                  </a:txBody>
-                  <a:tcPr marL="50800" marR="50800" marT="25400" marB="25400" anchor="ctr">
-                    <a:lnL w="6350" cap="flat" cmpd="sng" algn="ctr">
-                      <a:solidFill>
-                        <a:srgbClr val="E3E3E3"/>
-                      </a:solidFill>
-                      <a:prstDash val="solid"/>
-                      <a:round/>
-                      <a:headEnd type="none" w="med" len="med"/>
-                      <a:tailEnd type="none" w="med" len="med"/>
-                    </a:lnL>
-                    <a:lnR w="6350" cap="flat" cmpd="sng" algn="ctr">
-                      <a:solidFill>
-                        <a:srgbClr val="E3E3E3"/>
-                      </a:solidFill>
-                      <a:prstDash val="solid"/>
-                      <a:round/>
-                      <a:headEnd type="none" w="med" len="med"/>
-                      <a:tailEnd type="none" w="med" len="med"/>
-                    </a:lnR>
-                    <a:lnT w="6350" cap="flat" cmpd="sng" algn="ctr">
-                      <a:solidFill>
-                        <a:srgbClr val="E3E3E3"/>
-                      </a:solidFill>
-                      <a:prstDash val="solid"/>
-                      <a:round/>
-                      <a:headEnd type="none" w="med" len="med"/>
-                      <a:tailEnd type="none" w="med" len="med"/>
-                    </a:lnT>
-                    <a:lnB w="6350" cap="flat" cmpd="sng" algn="ctr">
-                      <a:solidFill>
-                        <a:srgbClr val="E3E3E3"/>
-                      </a:solidFill>
-                      <a:prstDash val="solid"/>
-                      <a:round/>
-                      <a:headEnd type="none" w="med" len="med"/>
-                      <a:tailEnd type="none" w="med" len="med"/>
-                    </a:lnB>
-                    <a:solidFill>
-                      <a:srgbClr val="FFFFFF"/>
-                    </a:solidFill>
-                  </a:tcPr>
-                </a:tc>
-                <a:tc>
-                  <a:txBody>
-                    <a:bodyPr/>
-                    <a:lstStyle/>
-                    <a:p>
-                      <a:pPr indent="0" marL="0">
-                        <a:buNone/>
-                      </a:pPr>
-                      <a:r>
-                        <a:rPr lang="en-US" sz="780" dirty="0">
-                          <a:solidFill>
-                            <a:srgbClr val="262626"/>
-                          </a:solidFill>
-                          <a:latin typeface="Arial" pitchFamily="34" charset="0"/>
-                          <a:ea typeface="Arial" pitchFamily="34" charset="-122"/>
-                          <a:cs typeface="Arial" pitchFamily="34" charset="-120"/>
-                        </a:rPr>
-                        <a:t>15%</a:t>
-                      </a:r>
-                      <a:endParaRPr lang="en-US" sz="780" dirty="0">
-                        <a:latin typeface="Arial" charset="0"/>
-                        <a:ea typeface="Arial" charset="0"/>
-                        <a:cs typeface="Arial" charset="0"/>
-                      </a:endParaRPr>
-                    </a:p>
-                  </a:txBody>
-                  <a:tcPr marL="50800" marR="50800" marT="25400" marB="25400" anchor="ctr">
-                    <a:lnL w="6350" cap="flat" cmpd="sng" algn="ctr">
-                      <a:solidFill>
-                        <a:srgbClr val="E3E3E3"/>
-                      </a:solidFill>
-                      <a:prstDash val="solid"/>
-                      <a:round/>
-                      <a:headEnd type="none" w="med" len="med"/>
-                      <a:tailEnd type="none" w="med" len="med"/>
-                    </a:lnL>
-                    <a:lnR w="6350" cap="flat" cmpd="sng" algn="ctr">
-                      <a:solidFill>
-                        <a:srgbClr val="E3E3E3"/>
-                      </a:solidFill>
-                      <a:prstDash val="solid"/>
-                      <a:round/>
-                      <a:headEnd type="none" w="med" len="med"/>
-                      <a:tailEnd type="none" w="med" len="med"/>
-                    </a:lnR>
-                    <a:lnT w="6350" cap="flat" cmpd="sng" algn="ctr">
-                      <a:solidFill>
-                        <a:srgbClr val="E3E3E3"/>
-                      </a:solidFill>
-                      <a:prstDash val="solid"/>
-                      <a:round/>
-                      <a:headEnd type="none" w="med" len="med"/>
-                      <a:tailEnd type="none" w="med" len="med"/>
-                    </a:lnT>
-                    <a:lnB w="6350" cap="flat" cmpd="sng" algn="ctr">
-                      <a:solidFill>
-                        <a:srgbClr val="E3E3E3"/>
-                      </a:solidFill>
-                      <a:prstDash val="solid"/>
-                      <a:round/>
-                      <a:headEnd type="none" w="med" len="med"/>
-                      <a:tailEnd type="none" w="med" len="med"/>
-                    </a:lnB>
-                    <a:solidFill>
-                      <a:srgbClr val="FFFFFF"/>
-                    </a:solidFill>
-                  </a:tcPr>
-                </a:tc>
-                <a:tc>
-                  <a:txBody>
-                    <a:bodyPr/>
-                    <a:lstStyle/>
-                    <a:p>
-                      <a:pPr indent="0" marL="0">
-                        <a:buNone/>
-                      </a:pPr>
-                      <a:r>
-                        <a:rPr lang="en-US" sz="780" dirty="0">
-                          <a:solidFill>
-                            <a:srgbClr val="262626"/>
-                          </a:solidFill>
-                          <a:latin typeface="Arial" pitchFamily="34" charset="0"/>
-                          <a:ea typeface="Arial" pitchFamily="34" charset="-122"/>
-                          <a:cs typeface="Arial" pitchFamily="34" charset="-120"/>
-                        </a:rPr>
-                        <a:t>Taiwan large caps (TSMC, MediaTek, Delta): AI foundry and server chain in the family's Greater China region</a:t>
-                      </a:r>
-                      <a:endParaRPr lang="en-US" sz="780" dirty="0">
-                        <a:latin typeface="Arial" charset="0"/>
-                        <a:ea typeface="Arial" charset="0"/>
-                        <a:cs typeface="Arial" charset="0"/>
-                      </a:endParaRPr>
-                    </a:p>
-                  </a:txBody>
-                  <a:tcPr marL="50800" marR="50800" marT="25400" marB="25400" anchor="ctr">
-                    <a:lnL w="6350" cap="flat" cmpd="sng" algn="ctr">
-                      <a:solidFill>
-                        <a:srgbClr val="E3E3E3"/>
-                      </a:solidFill>
-                      <a:prstDash val="solid"/>
-                      <a:round/>
-                      <a:headEnd type="none" w="med" len="med"/>
-                      <a:tailEnd type="none" w="med" len="med"/>
-                    </a:lnL>
-                    <a:lnR w="6350" cap="flat" cmpd="sng" algn="ctr">
-                      <a:solidFill>
-                        <a:srgbClr val="E3E3E3"/>
-                      </a:solidFill>
-                      <a:prstDash val="solid"/>
-                      <a:round/>
-                      <a:headEnd type="none" w="med" len="med"/>
-                      <a:tailEnd type="none" w="med" len="med"/>
-                    </a:lnR>
-                    <a:lnT w="6350" cap="flat" cmpd="sng" algn="ctr">
-                      <a:solidFill>
-                        <a:srgbClr val="E3E3E3"/>
-                      </a:solidFill>
-                      <a:prstDash val="solid"/>
-                      <a:round/>
-                      <a:headEnd type="none" w="med" len="med"/>
-                      <a:tailEnd type="none" w="med" len="med"/>
-                    </a:lnT>
-                    <a:lnB w="6350" cap="flat" cmpd="sng" algn="ctr">
-                      <a:solidFill>
-                        <a:srgbClr val="E3E3E3"/>
-                      </a:solidFill>
-                      <a:prstDash val="solid"/>
-                      <a:round/>
-                      <a:headEnd type="none" w="med" len="med"/>
-                      <a:tailEnd type="none" w="med" len="med"/>
-                    </a:lnB>
-                    <a:solidFill>
-                      <a:srgbClr val="FFFFFF"/>
-                    </a:solidFill>
-                  </a:tcPr>
-                </a:tc>
-                <a:tc>
-                  <a:txBody>
-                    <a:bodyPr/>
-                    <a:lstStyle/>
-                    <a:p>
-                      <a:pPr indent="0" marL="0">
-                        <a:buNone/>
-                      </a:pPr>
-                      <a:r>
-                        <a:rPr lang="en-US" sz="780" dirty="0">
-                          <a:solidFill>
-                            <a:srgbClr val="262626"/>
-                          </a:solidFill>
-                          <a:latin typeface="Arial" pitchFamily="34" charset="0"/>
-                          <a:ea typeface="Arial" pitchFamily="34" charset="-122"/>
-                          <a:cs typeface="Arial" pitchFamily="34" charset="-120"/>
-                        </a:rPr>
                         <a:t>26%</a:t>
-                      </a:r>
-                      <a:endParaRPr lang="en-US" sz="780" dirty="0">
-                        <a:latin typeface="Arial" charset="0"/>
-                        <a:ea typeface="Arial" charset="0"/>
-                        <a:cs typeface="Arial" charset="0"/>
-                      </a:endParaRPr>
-                    </a:p>
-                  </a:txBody>
-                  <a:tcPr marL="50800" marR="50800" marT="25400" marB="25400" anchor="ctr">
-                    <a:lnL w="6350" cap="flat" cmpd="sng" algn="ctr">
-                      <a:solidFill>
-                        <a:srgbClr val="E3E3E3"/>
-                      </a:solidFill>
-                      <a:prstDash val="solid"/>
-                      <a:round/>
-                      <a:headEnd type="none" w="med" len="med"/>
-                      <a:tailEnd type="none" w="med" len="med"/>
-                    </a:lnL>
-                    <a:lnR w="6350" cap="flat" cmpd="sng" algn="ctr">
-                      <a:solidFill>
-                        <a:srgbClr val="E3E3E3"/>
-                      </a:solidFill>
-                      <a:prstDash val="solid"/>
-                      <a:round/>
-                      <a:headEnd type="none" w="med" len="med"/>
-                      <a:tailEnd type="none" w="med" len="med"/>
-                    </a:lnR>
-                    <a:lnT w="6350" cap="flat" cmpd="sng" algn="ctr">
-                      <a:solidFill>
-                        <a:srgbClr val="E3E3E3"/>
-                      </a:solidFill>
-                      <a:prstDash val="solid"/>
-                      <a:round/>
-                      <a:headEnd type="none" w="med" len="med"/>
-                      <a:tailEnd type="none" w="med" len="med"/>
-                    </a:lnT>
-                    <a:lnB w="6350" cap="flat" cmpd="sng" algn="ctr">
-                      <a:solidFill>
-                        <a:srgbClr val="E3E3E3"/>
-                      </a:solidFill>
-                      <a:prstDash val="solid"/>
-                      <a:round/>
-                      <a:headEnd type="none" w="med" len="med"/>
-                      <a:tailEnd type="none" w="med" len="med"/>
-                    </a:lnB>
-                    <a:solidFill>
-                      <a:srgbClr val="FFFFFF"/>
-                    </a:solidFill>
-                  </a:tcPr>
-                </a:tc>
-              </a:tr>
-              <a:tr h="463601">
-                <a:tc>
-                  <a:txBody>
-                    <a:bodyPr/>
-                    <a:lstStyle/>
-                    <a:p>
-                      <a:pPr indent="0" marL="0">
-                        <a:buNone/>
-                      </a:pPr>
-                      <a:r>
-                        <a:rPr lang="en-US" sz="780" b="1" dirty="0">
-                          <a:solidFill>
-                            <a:srgbClr val="262626"/>
-                          </a:solidFill>
-                          <a:latin typeface="Arial" pitchFamily="34" charset="0"/>
-                          <a:ea typeface="Arial" pitchFamily="34" charset="-122"/>
-                          <a:cs typeface="Arial" pitchFamily="34" charset="-120"/>
-                        </a:rPr>
-                        <a:t>iShares MSCI South Korea (EWY)</a:t>
-                      </a:r>
-                      <a:endParaRPr lang="en-US" sz="780" dirty="0">
-                        <a:latin typeface="Arial" charset="0"/>
-                        <a:ea typeface="Arial" charset="0"/>
-                        <a:cs typeface="Arial" charset="0"/>
-                      </a:endParaRPr>
-                    </a:p>
-                  </a:txBody>
-                  <a:tcPr marL="50800" marR="50800" marT="25400" marB="25400" anchor="ctr">
-                    <a:lnL w="6350" cap="flat" cmpd="sng" algn="ctr">
-                      <a:solidFill>
-                        <a:srgbClr val="E3E3E3"/>
-                      </a:solidFill>
-                      <a:prstDash val="solid"/>
-                      <a:round/>
-                      <a:headEnd type="none" w="med" len="med"/>
-                      <a:tailEnd type="none" w="med" len="med"/>
-                    </a:lnL>
-                    <a:lnR w="6350" cap="flat" cmpd="sng" algn="ctr">
-                      <a:solidFill>
-                        <a:srgbClr val="E3E3E3"/>
-                      </a:solidFill>
-                      <a:prstDash val="solid"/>
-                      <a:round/>
-                      <a:headEnd type="none" w="med" len="med"/>
-                      <a:tailEnd type="none" w="med" len="med"/>
-                    </a:lnR>
-                    <a:lnT w="6350" cap="flat" cmpd="sng" algn="ctr">
-                      <a:solidFill>
-                        <a:srgbClr val="E3E3E3"/>
-                      </a:solidFill>
-                      <a:prstDash val="solid"/>
-                      <a:round/>
-                      <a:headEnd type="none" w="med" len="med"/>
-                      <a:tailEnd type="none" w="med" len="med"/>
-                    </a:lnT>
-                    <a:lnB w="6350" cap="flat" cmpd="sng" algn="ctr">
-                      <a:solidFill>
-                        <a:srgbClr val="E3E3E3"/>
-                      </a:solidFill>
-                      <a:prstDash val="solid"/>
-                      <a:round/>
-                      <a:headEnd type="none" w="med" len="med"/>
-                      <a:tailEnd type="none" w="med" len="med"/>
-                    </a:lnB>
-                    <a:solidFill>
-                      <a:srgbClr val="FFFFFF"/>
-                    </a:solidFill>
-                  </a:tcPr>
-                </a:tc>
-                <a:tc>
-                  <a:txBody>
-                    <a:bodyPr/>
-                    <a:lstStyle/>
-                    <a:p>
-                      <a:pPr indent="0" marL="0">
-                        <a:buNone/>
-                      </a:pPr>
-                      <a:r>
-                        <a:rPr lang="en-US" sz="780" dirty="0">
-                          <a:solidFill>
-                            <a:srgbClr val="262626"/>
-                          </a:solidFill>
-                          <a:latin typeface="Arial" pitchFamily="34" charset="0"/>
-                          <a:ea typeface="Arial" pitchFamily="34" charset="-122"/>
-                          <a:cs typeface="Arial" pitchFamily="34" charset="-120"/>
-                        </a:rPr>
-                        <a:t>20%</a:t>
-                      </a:r>
-                      <a:endParaRPr lang="en-US" sz="780" dirty="0">
-                        <a:latin typeface="Arial" charset="0"/>
-                        <a:ea typeface="Arial" charset="0"/>
-                        <a:cs typeface="Arial" charset="0"/>
-                      </a:endParaRPr>
-                    </a:p>
-                  </a:txBody>
-                  <a:tcPr marL="50800" marR="50800" marT="25400" marB="25400" anchor="ctr">
-                    <a:lnL w="6350" cap="flat" cmpd="sng" algn="ctr">
-                      <a:solidFill>
-                        <a:srgbClr val="E3E3E3"/>
-                      </a:solidFill>
-                      <a:prstDash val="solid"/>
-                      <a:round/>
-                      <a:headEnd type="none" w="med" len="med"/>
-                      <a:tailEnd type="none" w="med" len="med"/>
-                    </a:lnL>
-                    <a:lnR w="6350" cap="flat" cmpd="sng" algn="ctr">
-                      <a:solidFill>
-                        <a:srgbClr val="E3E3E3"/>
-                      </a:solidFill>
-                      <a:prstDash val="solid"/>
-                      <a:round/>
-                      <a:headEnd type="none" w="med" len="med"/>
-                      <a:tailEnd type="none" w="med" len="med"/>
-                    </a:lnR>
-                    <a:lnT w="6350" cap="flat" cmpd="sng" algn="ctr">
-                      <a:solidFill>
-                        <a:srgbClr val="E3E3E3"/>
-                      </a:solidFill>
-                      <a:prstDash val="solid"/>
-                      <a:round/>
-                      <a:headEnd type="none" w="med" len="med"/>
-                      <a:tailEnd type="none" w="med" len="med"/>
-                    </a:lnT>
-                    <a:lnB w="6350" cap="flat" cmpd="sng" algn="ctr">
-                      <a:solidFill>
-                        <a:srgbClr val="E3E3E3"/>
-                      </a:solidFill>
-                      <a:prstDash val="solid"/>
-                      <a:round/>
-                      <a:headEnd type="none" w="med" len="med"/>
-                      <a:tailEnd type="none" w="med" len="med"/>
-                    </a:lnB>
-                    <a:solidFill>
-                      <a:srgbClr val="FFFFFF"/>
-                    </a:solidFill>
-                  </a:tcPr>
-                </a:tc>
-                <a:tc>
-                  <a:txBody>
-                    <a:bodyPr/>
-                    <a:lstStyle/>
-                    <a:p>
-                      <a:pPr indent="0" marL="0">
-                        <a:buNone/>
-                      </a:pPr>
-                      <a:r>
-                        <a:rPr lang="en-US" sz="780" dirty="0">
-                          <a:solidFill>
-                            <a:srgbClr val="262626"/>
-                          </a:solidFill>
-                          <a:latin typeface="Arial" pitchFamily="34" charset="0"/>
-                          <a:ea typeface="Arial" pitchFamily="34" charset="-122"/>
-                          <a:cs typeface="Arial" pitchFamily="34" charset="-120"/>
-                        </a:rPr>
-                        <a:t>Korea large caps (Samsung + SK hynix ~44%): high-bandwidth memory for AI</a:t>
-                      </a:r>
-                      <a:endParaRPr lang="en-US" sz="780" dirty="0">
-                        <a:latin typeface="Arial" charset="0"/>
-                        <a:ea typeface="Arial" charset="0"/>
-                        <a:cs typeface="Arial" charset="0"/>
-                      </a:endParaRPr>
-                    </a:p>
-                  </a:txBody>
-                  <a:tcPr marL="50800" marR="50800" marT="25400" marB="25400" anchor="ctr">
-                    <a:lnL w="6350" cap="flat" cmpd="sng" algn="ctr">
-                      <a:solidFill>
-                        <a:srgbClr val="E3E3E3"/>
-                      </a:solidFill>
-                      <a:prstDash val="solid"/>
-                      <a:round/>
-                      <a:headEnd type="none" w="med" len="med"/>
-                      <a:tailEnd type="none" w="med" len="med"/>
-                    </a:lnL>
-                    <a:lnR w="6350" cap="flat" cmpd="sng" algn="ctr">
-                      <a:solidFill>
-                        <a:srgbClr val="E3E3E3"/>
-                      </a:solidFill>
-                      <a:prstDash val="solid"/>
-                      <a:round/>
-                      <a:headEnd type="none" w="med" len="med"/>
-                      <a:tailEnd type="none" w="med" len="med"/>
-                    </a:lnR>
-                    <a:lnT w="6350" cap="flat" cmpd="sng" algn="ctr">
-                      <a:solidFill>
-                        <a:srgbClr val="E3E3E3"/>
-                      </a:solidFill>
-                      <a:prstDash val="solid"/>
-                      <a:round/>
-                      <a:headEnd type="none" w="med" len="med"/>
-                      <a:tailEnd type="none" w="med" len="med"/>
-                    </a:lnT>
-                    <a:lnB w="6350" cap="flat" cmpd="sng" algn="ctr">
-                      <a:solidFill>
-                        <a:srgbClr val="E3E3E3"/>
-                      </a:solidFill>
-                      <a:prstDash val="solid"/>
-                      <a:round/>
-                      <a:headEnd type="none" w="med" len="med"/>
-                      <a:tailEnd type="none" w="med" len="med"/>
-                    </a:lnB>
-                    <a:solidFill>
-                      <a:srgbClr val="FFFFFF"/>
-                    </a:solidFill>
-                  </a:tcPr>
-                </a:tc>
-                <a:tc>
-                  <a:txBody>
-                    <a:bodyPr/>
-                    <a:lstStyle/>
-                    <a:p>
-                      <a:pPr indent="0" marL="0">
-                        <a:buNone/>
-                      </a:pPr>
-                      <a:r>
-                        <a:rPr lang="en-US" sz="780" dirty="0">
-                          <a:solidFill>
-                            <a:srgbClr val="262626"/>
-                          </a:solidFill>
-                          <a:latin typeface="Arial" pitchFamily="34" charset="0"/>
-                          <a:ea typeface="Arial" pitchFamily="34" charset="-122"/>
-                          <a:cs typeface="Arial" pitchFamily="34" charset="-120"/>
-                        </a:rPr>
-                        <a:t>30%</a:t>
                       </a:r>
                       <a:endParaRPr lang="en-US" sz="780" dirty="0">
                         <a:latin typeface="Arial" charset="0"/>
@@ -50358,7 +50337,7 @@
                           <a:ea typeface="Arial" pitchFamily="34" charset="-122"/>
                           <a:cs typeface="Arial" pitchFamily="34" charset="-120"/>
                         </a:rPr>
-                        <a:t>18%</a:t>
+                        <a:t>37%</a:t>
                       </a:r>
                       <a:endParaRPr lang="en-US" sz="780" dirty="0">
                         <a:latin typeface="Arial" charset="0"/>
@@ -50461,7 +50440,7 @@
                 <a:ea typeface="Arial" pitchFamily="34" charset="-122"/>
                 <a:cs typeface="Arial" pitchFamily="34" charset="-120"/>
               </a:rPr>
-              <a:t>a shock to one ETF is cushioned by the others: basket vol ~26% vs 18%–38% alone. Overlap (TSMC, Samsung, SK hynix sit in several ETFs) keeps correlations high (0.45–0.85).</a:t>
+              <a:t>a shock to one ETF is cushioned by the others: basket vol ~26% vs 18%–49% alone. Overlap (TSMC, Samsung, SK hynix sit in several ETFs) keeps correlations high (0.45–0.85).</a:t>
             </a:r>
             <a:endParaRPr lang="en-US" sz="870" dirty="0"/>
           </a:p>
@@ -50500,7 +50479,7 @@
                 <a:ea typeface="Arial" pitchFamily="34" charset="-122"/>
                 <a:cs typeface="Arial" pitchFamily="34" charset="-120"/>
               </a:rPr>
-              <a:t>*Assumed 5Y vols. USD 5M/day ETF rule: EWY, EWT, 2644, 00878 pass; 3119 is borderline (~USD 4–5M/day), verify the 6-month average on Bloomberg. 00878 distributes ~7.6% a year, which lowers its price path.</a:t>
+              <a:t>*Annualised vols from the team risk/return app (slide 4). Basket vol ~26% with Bloomberg-style correlations, the level the slide-5 Monte Carlo implies (the app's chart estimates ~17%). USD 5M/day ETF rule: EWY, EWT, 2644, 00878 pass; 3119 is borderline (~USD 4–5M/day), verify the 6-month average on Bloomberg. 00878 distributes ~7.6% a year, which lowers its price path.</a:t>
             </a:r>
             <a:endParaRPr lang="en-US" sz="680" dirty="0"/>
           </a:p>
